--- a/presentation/mt_bench_paper_study.pptx
+++ b/presentation/mt_bench_paper_study.pptx
@@ -21,8 +21,6 @@
     <p:sldId id="269" r:id="rId21"/>
     <p:sldId id="270" r:id="rId22"/>
     <p:sldId id="271" r:id="rId23"/>
-    <p:sldId id="272" r:id="rId24"/>
-    <p:sldId id="273" r:id="rId25"/>
   </p:sldIdLst>
   <p:sldSz cx="12191695" cy="6858000" type="screen4x3"/>
   <p:notesSz cx="6858000" cy="9144000"/>
@@ -631,54 +629,49 @@
           <a:lstStyle/>
           <a:p>
             <a:r>
-              <a:t>이 저장소는 phase 중심으로 읽는 게 가장 좋습니다.</a:t>
-            </a:r>
-          </a:p>
-          <a:p>
-            <a:r>
-              <a:t>Phase 1과 2는 준비운동이고, 진짜 메인은 Phase 3입니다.</a:t>
-            </a:r>
-          </a:p>
-          <a:p>
-            <a:r>
-              <a:t>Qwen 7B/14B/32B를 같은 family에서 비교하면서 judge scaling을 관찰합니다.</a:t>
+              <a:t>여기부터는 의도적으로 분위기를 바꿉니다.</a:t>
+            </a:r>
+          </a:p>
+          <a:p>
+            <a:r>
+              <a:t>divider 슬라이드에서 세션 전환은 이미 끝났습니다.</a:t>
+            </a:r>
+          </a:p>
+          <a:p>
+            <a:r>
+              <a:t>이 슬라이드는 더 이상 전환을 선언하는 슬라이드가 아니라,</a:t>
+            </a:r>
+          </a:p>
+          <a:p>
+            <a:r>
+              <a:t>뒤 절반 전체를 묶는 세 연구 질문을 정리하는 슬라이드입니다.</a:t>
             </a:r>
           </a:p>
           <a:p/>
           <a:p>
             <a:r>
-              <a:t>Phase 4와 5는 보조 검증입니다.</a:t>
-            </a:r>
-          </a:p>
-          <a:p>
-            <a:r>
-              <a:t>InternLM20B와 GPT-4o-mini를 붙여서 Qwen에서 보인 broad rank pattern이 완전히 family-specific artifact인지 확인합니다.</a:t>
-            </a:r>
-          </a:p>
-          <a:p>
-            <a:r>
-              <a:t>Phase 6은 tinyMT-Bench를 same-set 상한에만 머물지 않게 하려고,</a:t>
-            </a:r>
-          </a:p>
-          <a:p>
-            <a:r>
-              <a:t>11개 모델 풀 전체에서 leave-4-out hold-out 330 split을 전부 돌린 단계입니다.</a:t>
+              <a:t>뒤 절반을 들을 때는 세 질문만 기억하면 됩니다.</a:t>
+            </a:r>
+          </a:p>
+          <a:p>
+            <a:r>
+              <a:t>judge scaling이 실제로 reliability를 개선하는가.</a:t>
+            </a:r>
+          </a:p>
+          <a:p>
+            <a:r>
+              <a:t>개선 뒤 남는 오류는 어떤 구조인가.</a:t>
+            </a:r>
+          </a:p>
+          <a:p>
+            <a:r>
+              <a:t>그리고 그 결론이 cross-family와 hold-out까지 가도 남는가.</a:t>
             </a:r>
           </a:p>
           <a:p/>
           <a:p>
             <a:r>
-              <a:t>저장소 구조도 phase를 따라가도록 만들었습니다.</a:t>
-            </a:r>
-          </a:p>
-          <a:p>
-            <a:r>
-              <a:t>README에서 주장한 문장은 data의 CSV와 raw JSONL로 되짚어 볼 수 있게 구성했고,</a:t>
-            </a:r>
-          </a:p>
-          <a:p>
-            <a:r>
-              <a:t>paper와 presentation도 같은 figure를 재사용합니다.</a:t>
+              <a:t>즉 이 슬라이드는 랩미팅 파트의 문제 정의 슬라이드라고 보시면 됩니다.</a:t>
             </a:r>
           </a:p>
         </p:txBody>
@@ -983,12 +976,23 @@
           <a:lstStyle/>
           <a:p>
             <a:r>
-              <a:t>많은 발표가 inconsistency가 줄었다는 데서 멈추는데,</a:t>
-            </a:r>
-          </a:p>
-          <a:p>
-            <a:r>
-              <a:t>저는 남는 오류의 구조까지 보는 게 더 중요하다고 생각합니다.</a:t>
+              <a:t>Phase 4와 5를 보고 나면 많은 청중이 안심합니다.</a:t>
+            </a:r>
+          </a:p>
+          <a:p>
+            <a:r>
+              <a:t>Qwen32와 InternLM20B, GPT-4o-mini가 대체로 비슷한 서열을 준다면</a:t>
+            </a:r>
+          </a:p>
+          <a:p>
+            <a:r>
+              <a:t>이제 judge 문제는 거의 해결된 것처럼 느껴질 수 있습니다.</a:t>
+            </a:r>
+          </a:p>
+          <a:p/>
+          <a:p>
+            <a:r>
+              <a:t>하지만 바로 이 지점에서 한 걸음 더 들어가야 합니다.</a:t>
             </a:r>
           </a:p>
           <a:p>
@@ -1004,44 +1008,33 @@
           <a:p/>
           <a:p>
             <a:r>
-              <a:t>이건 의미가 큽니다.</a:t>
-            </a:r>
-          </a:p>
-          <a:p>
-            <a:r>
-              <a:t>‘더 큰 judge = 더 공정한 judge’가 아니라,</a:t>
-            </a:r>
-          </a:p>
-          <a:p>
-            <a:r>
-              <a:t>‘더 큰 judge = 더 일관적인 judge, 그러나 남는 오류는 특정 편향 형태로 집중될 수 있음’이기 때문입니다.</a:t>
+              <a:t>즉 큰 흐름의 ranking validity와, 개별 질문 수준의 decision cleanliness는 다른 문제입니다.</a:t>
+            </a:r>
+          </a:p>
+          <a:p>
+            <a:r>
+              <a:t>앙상블 결과도 같은 교훈을 줍니다.</a:t>
+            </a:r>
+          </a:p>
+          <a:p>
+            <a:r>
+              <a:t>작은 judge를 그냥 다수결로 합치면 오히려 오염되고,</a:t>
+            </a:r>
+          </a:p>
+          <a:p>
+            <a:r>
+              <a:t>abstain ensemble처럼 불확실성을 관리해야 오히려 더 좋아집니다.</a:t>
             </a:r>
           </a:p>
           <a:p/>
           <a:p>
             <a:r>
-              <a:t>앙상블 결과도 비슷한 교훈을 줍니다.</a:t>
-            </a:r>
-          </a:p>
-          <a:p>
-            <a:r>
-              <a:t>작은 judge를 그냥 다수결로 합치면 오히려 오염됩니다.</a:t>
-            </a:r>
-          </a:p>
-          <a:p>
-            <a:r>
-              <a:t>반면 abstain ensemble은 inconsistent 케이스를 기권 처리해서 훨씬 낫습니다.</a:t>
-            </a:r>
-          </a:p>
-          <a:p/>
-          <a:p>
-            <a:r>
-              <a:t>즉 이 슬라이드는 judge 연구를 모델 비교로만 읽으면 안 되고,</a:t>
-            </a:r>
-          </a:p>
-          <a:p>
-            <a:r>
-              <a:t>evaluation system design 문제로도 읽어야 한다는 걸 보여줍니다.</a:t>
+              <a:t>그래서 이 슬라이드는 judge 연구를 단순 모델 비교가 아니라</a:t>
+            </a:r>
+          </a:p>
+          <a:p>
+            <a:r>
+              <a:t>evaluation system design 문제로 읽어야 한다는 메시지를 줍니다.</a:t>
             </a:r>
           </a:p>
         </p:txBody>
@@ -1111,65 +1104,54 @@
           <a:lstStyle/>
           <a:p>
             <a:r>
-              <a:t>이 슬라이드는 Phase 3 메인 결과를 보조하는 슬라이드입니다.</a:t>
-            </a:r>
-          </a:p>
-          <a:p>
-            <a:r>
-              <a:t>InternLM을 따로 분리한 이유는, 사용자 요청대로 Phase 4도 Phase 3처럼 독립적으로 읽히게 만들기 위해서입니다.</a:t>
+              <a:t>이제 RQ3를 한 장에서 정리합니다.</a:t>
+            </a:r>
+          </a:p>
+          <a:p>
+            <a:r>
+              <a:t>Claude 피드백을 반영해서 InternLM, GPT-4o-mini, hold-out을 하나의 arc로 묶었습니다.</a:t>
             </a:r>
           </a:p>
           <a:p/>
           <a:p>
             <a:r>
-              <a:t>20B 모델은 broad ranking을 꽤 잘 유지합니다.</a:t>
-            </a:r>
-          </a:p>
-          <a:p>
-            <a:r>
-              <a:t>즉 Qwen32의 메인 서열이 완전히 family-specific artifact는 아니라는 보조 증거가 됩니다.</a:t>
-            </a:r>
-          </a:p>
-          <a:p>
-            <a:r>
-              <a:t>하지만 pairwise inconsistency는 47.44%로 여전히 높아서,</a:t>
-            </a:r>
-          </a:p>
-          <a:p>
-            <a:r>
-              <a:t>실제 운영 judge로는 더 noisy하다고 읽어야 합니다.</a:t>
+              <a:t>첫 번째 포인트는 cross-family sanity입니다.</a:t>
+            </a:r>
+          </a:p>
+          <a:p>
+            <a:r>
+              <a:t>InternLM20B는 Qwen32와 broad ranking을 꽤 잘 맞추지만 더 noisy합니다.</a:t>
+            </a:r>
+          </a:p>
+          <a:p>
+            <a:r>
+              <a:t>두 번째 포인트는 strongest external anchor입니다.</a:t>
+            </a:r>
+          </a:p>
+          <a:p>
+            <a:r>
+              <a:t>GPT-4o-mini는 Qwen32와 가장 잘 맞는 외부 judge입니다.</a:t>
+            </a:r>
+          </a:p>
+          <a:p>
+            <a:r>
+              <a:t>세 번째 포인트는 question reduction의 hold-out 현실입니다.</a:t>
+            </a:r>
+          </a:p>
+          <a:p>
+            <a:r>
+              <a:t>repeated hold-out 기준으로는 60문항이 가장 안전한 운영점입니다.</a:t>
             </a:r>
           </a:p>
           <a:p/>
           <a:p>
             <a:r>
-              <a:t>그리고 7B의 실패는 매우 교육적입니다.</a:t>
-            </a:r>
-          </a:p>
-          <a:p>
-            <a:r>
-              <a:t>이건 단순히 점수가 낮다는 수준이 아니라,</a:t>
-            </a:r>
-          </a:p>
-          <a:p>
-            <a:r>
-              <a:t>pairwise verdict format을 안정적으로 못 지켜 파싱 가능한 winner를 자주 내지 못합니다.</a:t>
-            </a:r>
-          </a:p>
-          <a:p/>
-          <a:p>
-            <a:r>
-              <a:t>그래서 이 슬라이드의 결론은 명확합니다.</a:t>
-            </a:r>
-          </a:p>
-          <a:p>
-            <a:r>
-              <a:t>InternLM20B는 cross-family sanity check로는 의미가 있지만,</a:t>
-            </a:r>
-          </a:p>
-          <a:p>
-            <a:r>
-              <a:t>open-weight judge라면 아무거나 pairwise에 올릴 수 있다는 뜻은 아닙니다.</a:t>
+              <a:t>즉 RQ3는 완전한 yes가 아니라 partial yes라고 답해야 정직합니다.</a:t>
+            </a:r>
+          </a:p>
+          <a:p>
+            <a:r>
+              <a:t>큰 흐름은 남지만, judge 품질과 question-level cleanliness는 서로 다릅니다.</a:t>
             </a:r>
           </a:p>
         </p:txBody>
@@ -1239,50 +1221,65 @@
           <a:lstStyle/>
           <a:p>
             <a:r>
-              <a:t>Phase 5는 Phase 4와 다르게 외부 API judge를 붙인 결과입니다.</a:t>
-            </a:r>
-          </a:p>
-          <a:p>
-            <a:r>
-              <a:t>저는 이 슬라이드를 일부러 별도로 뺐습니다.</a:t>
-            </a:r>
-          </a:p>
-          <a:p>
-            <a:r>
-              <a:t>왜냐하면 GPT-4o-mini는 지금 저장소에서 가장 강한 external reference point이기 때문입니다.</a:t>
+              <a:t>이 슬라이드는 2부 전체를 닫아 주는 슬라이드입니다.</a:t>
+            </a:r>
+          </a:p>
+          <a:p>
+            <a:r>
+              <a:t>Claude가 지적한 것처럼 2부가 phase 보고의 나열로 끝나면 연구 질문이 희미해집니다.</a:t>
+            </a:r>
+          </a:p>
+          <a:p>
+            <a:r>
+              <a:t>그래서 처음 던진 RQ1, RQ2, RQ3를 다시 불러와 답하는 방식으로 마무리합니다.</a:t>
             </a:r>
           </a:p>
           <a:p/>
           <a:p>
             <a:r>
-              <a:t>Qwen32와 Spearman 0.964, Kendall 0.905면 broad rank pattern은 거의 유지된다고 읽어도 됩니다.</a:t>
-            </a:r>
-          </a:p>
-          <a:p>
-            <a:r>
-              <a:t>pairwise inconsistency도 33.99%로 Qwen32와 매우 가깝습니다.</a:t>
+              <a:t>RQ1에 대한 답은 가장 명확합니다.</a:t>
+            </a:r>
+          </a:p>
+          <a:p>
+            <a:r>
+              <a:t>Qwen same-family에서는 judge scaling이 reliability 개선으로 이어졌습니다.</a:t>
+            </a:r>
+          </a:p>
+          <a:p>
+            <a:r>
+              <a:t>RQ2에 대한 답도 선명합니다.</a:t>
+            </a:r>
+          </a:p>
+          <a:p>
+            <a:r>
+              <a:t>남는 오류는 단순 noise가 아니라 구조화된 bias와 format failure입니다.</a:t>
             </a:r>
           </a:p>
           <a:p/>
           <a:p>
             <a:r>
-              <a:t>하지만 exact pairwise agreement가 0.580이라는 점은 꼭 같이 말해야 합니다.</a:t>
-            </a:r>
-          </a:p>
-          <a:p>
-            <a:r>
-              <a:t>즉 “전체 서열의 큰 흐름은 잘 맞지만, 개별 질문 단위 판단까지 완전히 같진 않다”는 뜻입니다.</a:t>
+              <a:t>RQ3는 부분적으로만 예라고 답해야 정직합니다.</a:t>
+            </a:r>
+          </a:p>
+          <a:p>
+            <a:r>
+              <a:t>InternLM20B, GPT-4o-mini, repeated hold-out이 broad claim을 지지하지만,</a:t>
+            </a:r>
+          </a:p>
+          <a:p>
+            <a:r>
+              <a:t>이걸 모든 open judge에 대한 보편 법칙처럼 말하면 과합니다.</a:t>
             </a:r>
           </a:p>
           <a:p/>
           <a:p>
             <a:r>
-              <a:t>그래서 이 슬라이드는 external validation의 가장 강한 근거이면서도,</a:t>
-            </a:r>
-          </a:p>
-          <a:p>
-            <a:r>
-              <a:t>동시에 claim boundary를 가르쳐 주는 슬라이드입니다.</a:t>
+              <a:t>이 슬라이드가 들어가면 2부가 phase 보고가 아니라</a:t>
+            </a:r>
+          </a:p>
+          <a:p>
+            <a:r>
+              <a:t>세 개의 연구 질문에 대한 실험적 답변으로 닫히게 됩니다.</a:t>
             </a:r>
           </a:p>
         </p:txBody>
@@ -1352,257 +1349,17 @@
           <a:lstStyle/>
           <a:p>
             <a:r>
-              <a:t>tinyMT-Bench는 제 발표에서 가장 조심스럽게 설명해야 하는 결과입니다.</a:t>
-            </a:r>
-          </a:p>
-          <a:p>
-            <a:r>
-              <a:t>same-set에서는 Top-Disc-40이 정말 아름답게 나옵니다. full-80 ranking을 그대로 보존합니다.</a:t>
-            </a:r>
-          </a:p>
-          <a:p>
-            <a:r>
-              <a:t>하지만 그건 선택과 검증이 같은 모델 집합에서 이뤄졌기 때문에 upper bound로 읽어야 합니다.</a:t>
+              <a:t>마지막 슬라이드는 발표를 마무리하면서 동시에 repo 안내를 하는 슬라이드입니다.</a:t>
+            </a:r>
+          </a:p>
+          <a:p>
+            <a:r>
+              <a:t>교수님이 발표 후 저장소를 실제로 보신다면 어디부터 보면 되는지를 남기는 역할도 합니다.</a:t>
             </a:r>
           </a:p>
           <a:p/>
           <a:p>
             <a:r>
-              <a:t>그래서 repeated hold-out을 했습니다.</a:t>
-            </a:r>
-          </a:p>
-          <a:p>
-            <a:r>
-              <a:t>11개 모델 중 4개를 test로 두는 모든 조합, 즉 330 split을 전부 돌렸고,</a:t>
-            </a:r>
-          </a:p>
-          <a:p>
-            <a:r>
-              <a:t>각 split마다 random subset 200개와 Top-Disc를 비교했습니다.</a:t>
-            </a:r>
-          </a:p>
-          <a:p/>
-          <a:p>
-            <a:r>
-              <a:t>그 결과 40문항도 강하지만 judge에 따라 편차가 있습니다.</a:t>
-            </a:r>
-          </a:p>
-          <a:p>
-            <a:r>
-              <a:t>반면 60문항은 세 judge 모두 mean rho가 0.97 이상으로 안정적입니다.</a:t>
-            </a:r>
-          </a:p>
-          <a:p>
-            <a:r>
-              <a:t>그래서 이제는 ‘40문항이 항상 충분하다’보다</a:t>
-            </a:r>
-          </a:p>
-          <a:p>
-            <a:r>
-              <a:t>‘same-set에서는 40문항이 upper bound이고, 운영점으로는 60문항이 더 안전하다’라고 말하는 게 맞습니다.</a:t>
-            </a:r>
-          </a:p>
-        </p:txBody>
-      </p:sp>
-      <p:sp>
-        <p:nvSpPr>
-          <p:cNvPr id="4" name="Slide Number Placeholder 3"/>
-          <p:cNvSpPr>
-            <a:spLocks noGrp="1"/>
-          </p:cNvSpPr>
-          <p:nvPr>
-            <p:ph type="sldNum" idx="5" sz="quarter"/>
-          </p:nvPr>
-        </p:nvSpPr>
-        <p:spPr/>
-      </p:sp>
-    </p:spTree>
-  </p:cSld>
-  <p:clrMapOvr>
-    <a:masterClrMapping/>
-  </p:clrMapOvr>
-</p:notes>
-</file>
-
-<file path=ppt/notesSlides/notesSlide17.xml><?xml version="1.0" encoding="utf-8"?>
-<p:notes xmlns:a="http://schemas.openxmlformats.org/drawingml/2006/main" xmlns:p="http://schemas.openxmlformats.org/presentationml/2006/main" xmlns:r="http://schemas.openxmlformats.org/officeDocument/2006/relationships">
-  <p:cSld>
-    <p:spTree>
-      <p:nvGrpSpPr>
-        <p:cNvPr id="1" name=""/>
-        <p:cNvGrpSpPr/>
-        <p:nvPr/>
-      </p:nvGrpSpPr>
-      <p:grpSpPr>
-        <a:xfrm>
-          <a:off x="0" y="0"/>
-          <a:ext cx="0" cy="0"/>
-          <a:chOff x="0" y="0"/>
-          <a:chExt cx="0" cy="0"/>
-        </a:xfrm>
-      </p:grpSpPr>
-      <p:sp>
-        <p:nvSpPr>
-          <p:cNvPr id="2" name="Slide Image Placeholder 1"/>
-          <p:cNvSpPr>
-            <a:spLocks noGrp="1"/>
-          </p:cNvSpPr>
-          <p:nvPr>
-            <p:ph type="sldImg" idx="2"/>
-          </p:nvPr>
-        </p:nvSpPr>
-        <p:spPr/>
-      </p:sp>
-      <p:sp>
-        <p:nvSpPr>
-          <p:cNvPr id="3" name="Notes Placeholder 2"/>
-          <p:cNvSpPr>
-            <a:spLocks noGrp="1"/>
-          </p:cNvSpPr>
-          <p:nvPr>
-            <p:ph type="body" idx="3" sz="quarter"/>
-          </p:nvPr>
-        </p:nvSpPr>
-        <p:spPr/>
-        <p:txBody>
-          <a:bodyPr/>
-          <a:lstStyle/>
-          <a:p>
-            <a:r>
-              <a:t>이 슬라이드는 paper study 발표의 결론입니다.</a:t>
-            </a:r>
-          </a:p>
-          <a:p>
-            <a:r>
-              <a:t>원 논문을 그대로 믿는 것도, 제 재현 결과를 과장하는 것도 둘 다 좋은 읽기 방식은 아닙니다.</a:t>
-            </a:r>
-          </a:p>
-          <a:p/>
-          <a:p>
-            <a:r>
-              <a:t>지금 자신 있게 말할 수 있는 건 세 가지입니다.</a:t>
-            </a:r>
-          </a:p>
-          <a:p>
-            <a:r>
-              <a:t>Qwen same-family에서는 judge가 커질수록 reliability가 좋아집니다.</a:t>
-            </a:r>
-          </a:p>
-          <a:p>
-            <a:r>
-              <a:t>GPT-4o-mini와 InternLM20B를 붙여도 broad rank pattern은 대체로 유지됩니다.</a:t>
-            </a:r>
-          </a:p>
-          <a:p>
-            <a:r>
-              <a:t>그리고 repeated hold-out 기준으로 문항 축소는 60문항 정도가 가장 안전합니다.</a:t>
-            </a:r>
-          </a:p>
-          <a:p/>
-          <a:p>
-            <a:r>
-              <a:t>반대로 아직 조심해야 할 범위도 분명합니다.</a:t>
-            </a:r>
-          </a:p>
-          <a:p>
-            <a:r>
-              <a:t>현재 모델 풀은 같은 세대의 중소형 chat 모델 중심입니다.</a:t>
-            </a:r>
-          </a:p>
-          <a:p>
-            <a:r>
-              <a:t>그래서 이 결론을 70B급, 코딩 특화, 다국어 환경으로 곧바로 일반화하는 건 과합니다.</a:t>
-            </a:r>
-          </a:p>
-          <a:p/>
-          <a:p>
-            <a:r>
-              <a:t>이 슬라이드는 제 연구의 신뢰도를 높이는 슬라이드라고 생각합니다.</a:t>
-            </a:r>
-          </a:p>
-          <a:p>
-            <a:r>
-              <a:t>왜냐하면 강한 결과와 claim boundary를 동시에 말해야 발표가 단단해지기 때문입니다.</a:t>
-            </a:r>
-          </a:p>
-        </p:txBody>
-      </p:sp>
-      <p:sp>
-        <p:nvSpPr>
-          <p:cNvPr id="4" name="Slide Number Placeholder 3"/>
-          <p:cNvSpPr>
-            <a:spLocks noGrp="1"/>
-          </p:cNvSpPr>
-          <p:nvPr>
-            <p:ph type="sldNum" idx="5" sz="quarter"/>
-          </p:nvPr>
-        </p:nvSpPr>
-        <p:spPr/>
-      </p:sp>
-    </p:spTree>
-  </p:cSld>
-  <p:clrMapOvr>
-    <a:masterClrMapping/>
-  </p:clrMapOvr>
-</p:notes>
-</file>
-
-<file path=ppt/notesSlides/notesSlide18.xml><?xml version="1.0" encoding="utf-8"?>
-<p:notes xmlns:a="http://schemas.openxmlformats.org/drawingml/2006/main" xmlns:p="http://schemas.openxmlformats.org/presentationml/2006/main" xmlns:r="http://schemas.openxmlformats.org/officeDocument/2006/relationships">
-  <p:cSld>
-    <p:spTree>
-      <p:nvGrpSpPr>
-        <p:cNvPr id="1" name=""/>
-        <p:cNvGrpSpPr/>
-        <p:nvPr/>
-      </p:nvGrpSpPr>
-      <p:grpSpPr>
-        <a:xfrm>
-          <a:off x="0" y="0"/>
-          <a:ext cx="0" cy="0"/>
-          <a:chOff x="0" y="0"/>
-          <a:chExt cx="0" cy="0"/>
-        </a:xfrm>
-      </p:grpSpPr>
-      <p:sp>
-        <p:nvSpPr>
-          <p:cNvPr id="2" name="Slide Image Placeholder 1"/>
-          <p:cNvSpPr>
-            <a:spLocks noGrp="1"/>
-          </p:cNvSpPr>
-          <p:nvPr>
-            <p:ph type="sldImg" idx="2"/>
-          </p:nvPr>
-        </p:nvSpPr>
-        <p:spPr/>
-      </p:sp>
-      <p:sp>
-        <p:nvSpPr>
-          <p:cNvPr id="3" name="Notes Placeholder 2"/>
-          <p:cNvSpPr>
-            <a:spLocks noGrp="1"/>
-          </p:cNvSpPr>
-          <p:nvPr>
-            <p:ph type="body" idx="3" sz="quarter"/>
-          </p:nvPr>
-        </p:nvSpPr>
-        <p:spPr/>
-        <p:txBody>
-          <a:bodyPr/>
-          <a:lstStyle/>
-          <a:p>
-            <a:r>
-              <a:t>마지막 슬라이드는 발표를 마무리하면서 동시에 repo 안내를 하는 슬라이드입니다.</a:t>
-            </a:r>
-          </a:p>
-          <a:p>
-            <a:r>
-              <a:t>교수님이 발표 후 저장소를 실제로 보신다면 어디부터 보면 되는지를 남기는 역할도 합니다.</a:t>
-            </a:r>
-          </a:p>
-          <a:p/>
-          <a:p>
-            <a:r>
               <a:t>오늘 발표는 paper study였기 때문에, 발표가 끝나면 질문이 두 방향으로 나올 겁니다.</a:t>
             </a:r>
           </a:p>
@@ -1619,6 +1376,11 @@
           <a:p>
             <a:r>
               <a:t>후자는 README, figures, data를 따라가면 됩니다.</a:t>
+            </a:r>
+          </a:p>
+          <a:p>
+            <a:r>
+              <a:t>특히 저장소는 phase 순서로 읽으면 오늘 발표의 2부와 같은 흐름이 다시 재생됩니다.</a:t>
             </a:r>
           </a:p>
           <a:p/>
@@ -2548,54 +2310,28 @@
           <a:lstStyle/>
           <a:p>
             <a:r>
-              <a:t>여기부터는 의도적으로 분위기를 바꿉니다.</a:t>
-            </a:r>
-          </a:p>
-          <a:p>
-            <a:r>
-              <a:t>앞쪽이 논문 스터디였다면, 여기부터는 랩미팅이라고 생각하시면 됩니다.</a:t>
-            </a:r>
-          </a:p>
-          <a:p>
-            <a:r>
-              <a:t>하지만 이때 파이프라인을 먼저 보여주면 분위기가 식습니다.</a:t>
-            </a:r>
-          </a:p>
-          <a:p>
-            <a:r>
-              <a:t>그래서 이 슬라이드에서는 연구 질문만 던집니다.</a:t>
+              <a:t>이 슬라이드는 의도적으로 호흡을 한번 끊는 역할을 합니다.</a:t>
+            </a:r>
+          </a:p>
+          <a:p>
+            <a:r>
+              <a:t>앞 절반은 원 논문 리뷰였고, 여기부터는 제 연구 발표입니다.</a:t>
+            </a:r>
+          </a:p>
+          <a:p>
+            <a:r>
+              <a:t>그래서 청중이 화면만 봐도 세션이 전환됐다는 걸 느끼게 하고 싶었습니다.</a:t>
             </a:r>
           </a:p>
           <a:p/>
           <a:p>
             <a:r>
-              <a:t>뒤 절반을 들을 때는 세 질문만 기억하면 됩니다.</a:t>
-            </a:r>
-          </a:p>
-          <a:p>
-            <a:r>
-              <a:t>judge scaling이 실제로 reliability를 개선하는가.</a:t>
-            </a:r>
-          </a:p>
-          <a:p>
-            <a:r>
-              <a:t>개선 뒤 남는 오류는 어떤 구조인가.</a:t>
-            </a:r>
-          </a:p>
-          <a:p>
-            <a:r>
-              <a:t>그리고 그 결론이 cross-family와 hold-out까지 가도 남는가.</a:t>
-            </a:r>
-          </a:p>
-          <a:p/>
-          <a:p>
-            <a:r>
-              <a:t>파이프라인은 그 다음 슬라이드에서 보여주고,</a:t>
-            </a:r>
-          </a:p>
-          <a:p>
-            <a:r>
-              <a:t>이 슬라이드는 랩미팅의 문제 정의 슬라이드라고 보시면 됩니다.</a:t>
+              <a:t>짧게 말하면 앞 절반에서 만든 기준점을 이제 검증 대상으로 바꾸는 순간입니다.</a:t>
+            </a:r>
+          </a:p>
+          <a:p>
+            <a:r>
+              <a:t>원 논문의 두 핵심 주장, 그리고 열린 질문을 들고 제 실험으로 넘어갑니다.</a:t>
             </a:r>
           </a:p>
         </p:txBody>
@@ -5858,8 +5594,7 @@
                 <a:latin typeface="Apple SD Gothic Neo"/>
               </a:rPr>
               <a:t>MT-Bench / Chatbot Arena
-논문 스터디에서
-내 재현 연구로</a:t>
+논문 리뷰와 내 연구</a:t>
             </a:r>
           </a:p>
         </p:txBody>
@@ -5897,7 +5632,7 @@
                 </a:solidFill>
                 <a:latin typeface="Apple SD Gothic Neo"/>
               </a:rPr>
-              <a:t>Paper study first, lab meeting second</a:t>
+              <a:t>1부 논문 리뷰, 2부 내 연구</a:t>
             </a:r>
           </a:p>
         </p:txBody>
@@ -6174,7 +5909,7 @@
                 </a:solidFill>
                 <a:latin typeface="Apple SD Gothic Neo"/>
               </a:rPr>
-              <a:t>박승현 | CLINK Lab | Paper Study</a:t>
+              <a:t>박승현 | CLINK Lab | 논문 리뷰 + 내 연구</a:t>
             </a:r>
           </a:p>
         </p:txBody>
@@ -6324,7 +6059,7 @@
                 </a:solidFill>
                 <a:latin typeface="Apple SD Gothic Neo"/>
               </a:rPr>
-              <a:t>2-2. 랩미팅 관점의 저장소와 phase 파이프라인</a:t>
+              <a:t>2-1. 내가 실제로 검증한 세 연구 질문</a:t>
             </a:r>
           </a:p>
         </p:txBody>
@@ -6366,7 +6101,7 @@
                 </a:solidFill>
                 <a:latin typeface="Apple SD Gothic Neo"/>
               </a:rPr>
-              <a:t>Lab Meeting</a:t>
+              <a:t>내 연구</a:t>
             </a:r>
           </a:p>
         </p:txBody>
@@ -6404,7 +6139,7 @@
                 </a:solidFill>
                 <a:latin typeface="Apple SD Gothic Neo"/>
               </a:rPr>
-              <a:t>10/18</a:t>
+              <a:t>10/16</a:t>
             </a:r>
           </a:p>
         </p:txBody>
@@ -6485,7 +6220,7 @@
                 </a:solidFill>
                 <a:latin typeface="Apple SD Gothic Neo"/>
               </a:rPr>
-              <a:t>Lab meeting | my reproduction and extensions</a:t>
+              <a:t>내 연구 | reproduction and extensions</a:t>
             </a:r>
           </a:p>
         </p:txBody>
@@ -6527,94 +6262,92 @@
                 </a:solidFill>
                 <a:latin typeface="Apple SD Gothic Neo"/>
               </a:rPr>
-              <a:t>이 슬라이드의 목적: 코드베이스가 결과 저장소가 아니라 재생성 가능한 연구 파이프라인이라는 점을 보여준다.</a:t>
-            </a:r>
-          </a:p>
-        </p:txBody>
-      </p:sp>
-      <p:sp>
-        <p:nvSpPr>
-          <p:cNvPr id="10" name="Rectangle 9"/>
-          <p:cNvSpPr/>
-          <p:nvPr/>
-        </p:nvSpPr>
-        <p:spPr>
-          <a:xfrm>
-            <a:off x="914400" y="1920240"/>
-            <a:ext cx="10149840" cy="54864"/>
+              <a:t>이 슬라이드의 목적: 뒤 절반의 랩미팅을 연구 질문 단위로 묶어 놓고 듣게 한다.</a:t>
+            </a:r>
+          </a:p>
+        </p:txBody>
+      </p:sp>
+      <p:sp>
+        <p:nvSpPr>
+          <p:cNvPr id="10" name="TextBox 9"/>
+          <p:cNvSpPr txBox="1"/>
+          <p:nvPr/>
+        </p:nvSpPr>
+        <p:spPr>
+          <a:xfrm>
+            <a:off x="502920" y="1298448"/>
+            <a:ext cx="11155680" cy="566928"/>
           </a:xfrm>
           <a:prstGeom prst="rect">
             <a:avLst/>
           </a:prstGeom>
           <a:solidFill>
-            <a:srgbClr val="DAD4CA"/>
+            <a:srgbClr val="E2EAEF"/>
           </a:solidFill>
           <a:ln>
-            <a:noFill/>
-          </a:ln>
-        </p:spPr>
-        <p:style>
-          <a:lnRef idx="1">
-            <a:schemeClr val="accent1"/>
-          </a:lnRef>
-          <a:fillRef idx="3">
-            <a:schemeClr val="accent1"/>
-          </a:fillRef>
-          <a:effectRef idx="2">
-            <a:schemeClr val="accent1"/>
-          </a:effectRef>
-          <a:fontRef idx="minor">
-            <a:schemeClr val="lt1"/>
-          </a:fontRef>
-        </p:style>
-        <p:txBody>
-          <a:bodyPr rtlCol="0" anchor="ctr"/>
-          <a:lstStyle/>
-          <a:p>
-            <a:pPr algn="ctr"/>
-          </a:p>
-        </p:txBody>
-      </p:sp>
-      <p:sp>
-        <p:nvSpPr>
-          <p:cNvPr id="11" name="Oval 10"/>
-          <p:cNvSpPr/>
-          <p:nvPr/>
-        </p:nvSpPr>
-        <p:spPr>
-          <a:xfrm>
-            <a:off x="914400" y="1572768"/>
-            <a:ext cx="658368" cy="658368"/>
-          </a:xfrm>
-          <a:prstGeom prst="ellipse">
+            <a:solidFill>
+              <a:srgbClr val="E2EAEF"/>
+            </a:solidFill>
+          </a:ln>
+        </p:spPr>
+        <p:txBody>
+          <a:bodyPr wrap="square" lIns="64008" rIns="64008" tIns="64008" bIns="64008" anchor="ctr">
+            <a:spAutoFit/>
+          </a:bodyPr>
+          <a:lstStyle/>
+          <a:p>
+            <a:pPr algn="l"/>
+            <a:r>
+              <a:rPr sz="1900" b="1">
+                <a:solidFill>
+                  <a:srgbClr val="282C3A"/>
+                </a:solidFill>
+                <a:latin typeface="Apple SD Gothic Neo"/>
+              </a:rPr>
+              <a:t>이 뒤 절반은 구현 목록이 아니라 세 개의 연구 질문으로 듣는 것이 가장 좋습니다.</a:t>
+            </a:r>
+          </a:p>
+        </p:txBody>
+      </p:sp>
+      <p:sp>
+        <p:nvSpPr>
+          <p:cNvPr id="11" name="TextBox 10"/>
+          <p:cNvSpPr txBox="1"/>
+          <p:nvPr/>
+        </p:nvSpPr>
+        <p:spPr>
+          <a:xfrm>
+            <a:off x="502920" y="2048256"/>
+            <a:ext cx="3553967" cy="1993392"/>
+          </a:xfrm>
+          <a:prstGeom prst="rect">
             <a:avLst/>
           </a:prstGeom>
           <a:solidFill>
-            <a:srgbClr val="BF9A5E"/>
+            <a:srgbClr val="FFFFFF"/>
           </a:solidFill>
           <a:ln>
-            <a:noFill/>
-          </a:ln>
-        </p:spPr>
-        <p:style>
-          <a:lnRef idx="1">
-            <a:schemeClr val="accent1"/>
-          </a:lnRef>
-          <a:fillRef idx="3">
-            <a:schemeClr val="accent1"/>
-          </a:fillRef>
-          <a:effectRef idx="2">
-            <a:schemeClr val="accent1"/>
-          </a:effectRef>
-          <a:fontRef idx="minor">
-            <a:schemeClr val="lt1"/>
-          </a:fontRef>
-        </p:style>
-        <p:txBody>
-          <a:bodyPr rtlCol="0" anchor="ctr"/>
-          <a:lstStyle/>
-          <a:p>
-            <a:pPr algn="ctr"/>
+            <a:solidFill>
+              <a:srgbClr val="DAD4CA"/>
+            </a:solidFill>
+          </a:ln>
+        </p:spPr>
+        <p:txBody>
+          <a:bodyPr wrap="square" lIns="109728" rIns="109728" tIns="109728" bIns="109728" anchor="t">
+            <a:spAutoFit/>
+          </a:bodyPr>
+          <a:lstStyle/>
+          <a:p>
+            <a:pPr algn="l"/>
+            <a:r>
+              <a:rPr sz="1700" b="0">
+                <a:solidFill>
+                  <a:srgbClr val="363A48"/>
+                </a:solidFill>
+                <a:latin typeface="Apple SD Gothic Neo"/>
+              </a:rPr>
+              <a:t/>
+            </a:r>
           </a:p>
         </p:txBody>
       </p:sp>
@@ -6626,8 +6359,8 @@
         </p:nvSpPr>
         <p:spPr>
           <a:xfrm>
-            <a:off x="914400" y="1746504"/>
-            <a:ext cx="658368" cy="137160"/>
+            <a:off x="576072" y="2157984"/>
+            <a:ext cx="3407664" cy="237744"/>
           </a:xfrm>
           <a:prstGeom prst="rect">
             <a:avLst/>
@@ -6643,15 +6376,15 @@
           </a:bodyPr>
           <a:lstStyle/>
           <a:p>
-            <a:pPr algn="ctr"/>
-            <a:r>
-              <a:rPr sz="1100" b="1">
-                <a:solidFill>
-                  <a:srgbClr val="FFFFFF"/>
-                </a:solidFill>
-                <a:latin typeface="Apple SD Gothic Neo"/>
-              </a:rPr>
-              <a:t>P1</a:t>
+            <a:pPr algn="l"/>
+            <a:r>
+              <a:rPr sz="1500" b="1">
+                <a:solidFill>
+                  <a:srgbClr val="3B586E"/>
+                </a:solidFill>
+                <a:latin typeface="Apple SD Gothic Neo"/>
+              </a:rPr>
+              <a:t>RQ1. judge scaling</a:t>
             </a:r>
           </a:p>
         </p:txBody>
@@ -6664,8 +6397,8 @@
         </p:nvSpPr>
         <p:spPr>
           <a:xfrm>
-            <a:off x="749808" y="2267712"/>
-            <a:ext cx="987552" cy="320040"/>
+            <a:off x="576072" y="2542032"/>
+            <a:ext cx="3407664" cy="1152144"/>
           </a:xfrm>
           <a:prstGeom prst="rect">
             <a:avLst/>
@@ -6681,59 +6414,58 @@
           </a:bodyPr>
           <a:lstStyle/>
           <a:p>
-            <a:pPr algn="ctr"/>
-            <a:r>
-              <a:rPr sz="1200" b="1">
-                <a:solidFill>
-                  <a:srgbClr val="282C3A"/>
-                </a:solidFill>
-                <a:latin typeface="Apple SD Gothic Neo"/>
-              </a:rPr>
-              <a:t>Self-judge</a:t>
-            </a:r>
-          </a:p>
-        </p:txBody>
-      </p:sp>
-      <p:sp>
-        <p:nvSpPr>
-          <p:cNvPr id="14" name="Oval 13"/>
-          <p:cNvSpPr/>
-          <p:nvPr/>
-        </p:nvSpPr>
-        <p:spPr>
-          <a:xfrm>
-            <a:off x="2697480" y="1572768"/>
-            <a:ext cx="658368" cy="658368"/>
-          </a:xfrm>
-          <a:prstGeom prst="ellipse">
+            <a:pPr algn="l"/>
+            <a:r>
+              <a:rPr sz="1500" b="0">
+                <a:solidFill>
+                  <a:srgbClr val="363A48"/>
+                </a:solidFill>
+                <a:latin typeface="Apple SD Gothic Neo"/>
+              </a:rPr>
+              <a:t>Qwen judge를 7B → 14B → 32B로 키우면 pairwise reliability가 실제로 단조 개선되는가?</a:t>
+            </a:r>
+          </a:p>
+        </p:txBody>
+      </p:sp>
+      <p:sp>
+        <p:nvSpPr>
+          <p:cNvPr id="14" name="TextBox 13"/>
+          <p:cNvSpPr txBox="1"/>
+          <p:nvPr/>
+        </p:nvSpPr>
+        <p:spPr>
+          <a:xfrm>
+            <a:off x="4221480" y="2048256"/>
+            <a:ext cx="3553967" cy="1993392"/>
+          </a:xfrm>
+          <a:prstGeom prst="rect">
             <a:avLst/>
           </a:prstGeom>
           <a:solidFill>
-            <a:srgbClr val="B5654E"/>
+            <a:srgbClr val="FFFFFF"/>
           </a:solidFill>
           <a:ln>
-            <a:noFill/>
-          </a:ln>
-        </p:spPr>
-        <p:style>
-          <a:lnRef idx="1">
-            <a:schemeClr val="accent1"/>
-          </a:lnRef>
-          <a:fillRef idx="3">
-            <a:schemeClr val="accent1"/>
-          </a:fillRef>
-          <a:effectRef idx="2">
-            <a:schemeClr val="accent1"/>
-          </a:effectRef>
-          <a:fontRef idx="minor">
-            <a:schemeClr val="lt1"/>
-          </a:fontRef>
-        </p:style>
-        <p:txBody>
-          <a:bodyPr rtlCol="0" anchor="ctr"/>
-          <a:lstStyle/>
-          <a:p>
-            <a:pPr algn="ctr"/>
+            <a:solidFill>
+              <a:srgbClr val="DAD4CA"/>
+            </a:solidFill>
+          </a:ln>
+        </p:spPr>
+        <p:txBody>
+          <a:bodyPr wrap="square" lIns="109728" rIns="109728" tIns="109728" bIns="109728" anchor="t">
+            <a:spAutoFit/>
+          </a:bodyPr>
+          <a:lstStyle/>
+          <a:p>
+            <a:pPr algn="l"/>
+            <a:r>
+              <a:rPr sz="1700" b="0">
+                <a:solidFill>
+                  <a:srgbClr val="363A48"/>
+                </a:solidFill>
+                <a:latin typeface="Apple SD Gothic Neo"/>
+              </a:rPr>
+              <a:t/>
+            </a:r>
           </a:p>
         </p:txBody>
       </p:sp>
@@ -6745,8 +6477,8 @@
         </p:nvSpPr>
         <p:spPr>
           <a:xfrm>
-            <a:off x="2697480" y="1746504"/>
-            <a:ext cx="658368" cy="137160"/>
+            <a:off x="4294632" y="2157984"/>
+            <a:ext cx="3407664" cy="237744"/>
           </a:xfrm>
           <a:prstGeom prst="rect">
             <a:avLst/>
@@ -6762,15 +6494,15 @@
           </a:bodyPr>
           <a:lstStyle/>
           <a:p>
-            <a:pPr algn="ctr"/>
-            <a:r>
-              <a:rPr sz="1100" b="1">
-                <a:solidFill>
-                  <a:srgbClr val="FFFFFF"/>
-                </a:solidFill>
-                <a:latin typeface="Apple SD Gothic Neo"/>
-              </a:rPr>
-              <a:t>P2</a:t>
+            <a:pPr algn="l"/>
+            <a:r>
+              <a:rPr sz="1500" b="1">
+                <a:solidFill>
+                  <a:srgbClr val="3B586E"/>
+                </a:solidFill>
+                <a:latin typeface="Apple SD Gothic Neo"/>
+              </a:rPr>
+              <a:t>RQ2. residual error</a:t>
             </a:r>
           </a:p>
         </p:txBody>
@@ -6783,8 +6515,8 @@
         </p:nvSpPr>
         <p:spPr>
           <a:xfrm>
-            <a:off x="2532888" y="2267712"/>
-            <a:ext cx="987552" cy="320040"/>
+            <a:off x="4294632" y="2542032"/>
+            <a:ext cx="3407664" cy="1152144"/>
           </a:xfrm>
           <a:prstGeom prst="rect">
             <a:avLst/>
@@ -6800,59 +6532,58 @@
           </a:bodyPr>
           <a:lstStyle/>
           <a:p>
-            <a:pPr algn="ctr"/>
-            <a:r>
-              <a:rPr sz="1200" b="1">
-                <a:solidFill>
-                  <a:srgbClr val="282C3A"/>
-                </a:solidFill>
-                <a:latin typeface="Apple SD Gothic Neo"/>
-              </a:rPr>
-              <a:t>Sanity</a:t>
-            </a:r>
-          </a:p>
-        </p:txBody>
-      </p:sp>
-      <p:sp>
-        <p:nvSpPr>
-          <p:cNvPr id="17" name="Oval 16"/>
-          <p:cNvSpPr/>
-          <p:nvPr/>
-        </p:nvSpPr>
-        <p:spPr>
-          <a:xfrm>
-            <a:off x="4480560" y="1572768"/>
-            <a:ext cx="658368" cy="658368"/>
-          </a:xfrm>
-          <a:prstGeom prst="ellipse">
+            <a:pPr algn="l"/>
+            <a:r>
+              <a:rPr sz="1500" b="0">
+                <a:solidFill>
+                  <a:srgbClr val="363A48"/>
+                </a:solidFill>
+                <a:latin typeface="Apple SD Gothic Neo"/>
+              </a:rPr>
+              <a:t>좋아진 뒤 남는 오류는 단순 noise인가, 아니면 position bias나 format failure처럼 구조화되는가?</a:t>
+            </a:r>
+          </a:p>
+        </p:txBody>
+      </p:sp>
+      <p:sp>
+        <p:nvSpPr>
+          <p:cNvPr id="17" name="TextBox 16"/>
+          <p:cNvSpPr txBox="1"/>
+          <p:nvPr/>
+        </p:nvSpPr>
+        <p:spPr>
+          <a:xfrm>
+            <a:off x="7940040" y="2048256"/>
+            <a:ext cx="3553967" cy="1993392"/>
+          </a:xfrm>
+          <a:prstGeom prst="rect">
             <a:avLst/>
           </a:prstGeom>
           <a:solidFill>
-            <a:srgbClr val="375667"/>
+            <a:srgbClr val="FFFFFF"/>
           </a:solidFill>
           <a:ln>
-            <a:noFill/>
-          </a:ln>
-        </p:spPr>
-        <p:style>
-          <a:lnRef idx="1">
-            <a:schemeClr val="accent1"/>
-          </a:lnRef>
-          <a:fillRef idx="3">
-            <a:schemeClr val="accent1"/>
-          </a:fillRef>
-          <a:effectRef idx="2">
-            <a:schemeClr val="accent1"/>
-          </a:effectRef>
-          <a:fontRef idx="minor">
-            <a:schemeClr val="lt1"/>
-          </a:fontRef>
-        </p:style>
-        <p:txBody>
-          <a:bodyPr rtlCol="0" anchor="ctr"/>
-          <a:lstStyle/>
-          <a:p>
-            <a:pPr algn="ctr"/>
+            <a:solidFill>
+              <a:srgbClr val="DAD4CA"/>
+            </a:solidFill>
+          </a:ln>
+        </p:spPr>
+        <p:txBody>
+          <a:bodyPr wrap="square" lIns="109728" rIns="109728" tIns="109728" bIns="109728" anchor="t">
+            <a:spAutoFit/>
+          </a:bodyPr>
+          <a:lstStyle/>
+          <a:p>
+            <a:pPr algn="l"/>
+            <a:r>
+              <a:rPr sz="1700" b="0">
+                <a:solidFill>
+                  <a:srgbClr val="363A48"/>
+                </a:solidFill>
+                <a:latin typeface="Apple SD Gothic Neo"/>
+              </a:rPr>
+              <a:t/>
+            </a:r>
           </a:p>
         </p:txBody>
       </p:sp>
@@ -6864,8 +6595,8 @@
         </p:nvSpPr>
         <p:spPr>
           <a:xfrm>
-            <a:off x="4480560" y="1746504"/>
-            <a:ext cx="658368" cy="137160"/>
+            <a:off x="8013192" y="2157984"/>
+            <a:ext cx="3407664" cy="237744"/>
           </a:xfrm>
           <a:prstGeom prst="rect">
             <a:avLst/>
@@ -6881,15 +6612,15 @@
           </a:bodyPr>
           <a:lstStyle/>
           <a:p>
-            <a:pPr algn="ctr"/>
-            <a:r>
-              <a:rPr sz="1100" b="1">
-                <a:solidFill>
-                  <a:srgbClr val="FFFFFF"/>
-                </a:solidFill>
-                <a:latin typeface="Apple SD Gothic Neo"/>
-              </a:rPr>
-              <a:t>P3</a:t>
+            <a:pPr algn="l"/>
+            <a:r>
+              <a:rPr sz="1500" b="1">
+                <a:solidFill>
+                  <a:srgbClr val="3B586E"/>
+                </a:solidFill>
+                <a:latin typeface="Apple SD Gothic Neo"/>
+              </a:rPr>
+              <a:t>RQ3. validation</a:t>
             </a:r>
           </a:p>
         </p:txBody>
@@ -6902,8 +6633,8 @@
         </p:nvSpPr>
         <p:spPr>
           <a:xfrm>
-            <a:off x="4315968" y="2267712"/>
-            <a:ext cx="987552" cy="320040"/>
+            <a:off x="8013192" y="2542032"/>
+            <a:ext cx="3407664" cy="1152144"/>
           </a:xfrm>
           <a:prstGeom prst="rect">
             <a:avLst/>
@@ -6919,386 +6650,29 @@
           </a:bodyPr>
           <a:lstStyle/>
           <a:p>
-            <a:pPr algn="ctr"/>
-            <a:r>
-              <a:rPr sz="1200" b="1">
-                <a:solidFill>
-                  <a:srgbClr val="282C3A"/>
-                </a:solidFill>
-                <a:latin typeface="Apple SD Gothic Neo"/>
-              </a:rPr>
-              <a:t>Scaling</a:t>
-            </a:r>
-          </a:p>
-        </p:txBody>
-      </p:sp>
-      <p:sp>
-        <p:nvSpPr>
-          <p:cNvPr id="20" name="Oval 19"/>
-          <p:cNvSpPr/>
-          <p:nvPr/>
-        </p:nvSpPr>
-        <p:spPr>
-          <a:xfrm>
-            <a:off x="6263640" y="1572768"/>
-            <a:ext cx="658368" cy="658368"/>
-          </a:xfrm>
-          <a:prstGeom prst="ellipse">
-            <a:avLst/>
-          </a:prstGeom>
-          <a:solidFill>
-            <a:srgbClr val="668185"/>
-          </a:solidFill>
-          <a:ln>
-            <a:noFill/>
-          </a:ln>
-        </p:spPr>
-        <p:style>
-          <a:lnRef idx="1">
-            <a:schemeClr val="accent1"/>
-          </a:lnRef>
-          <a:fillRef idx="3">
-            <a:schemeClr val="accent1"/>
-          </a:fillRef>
-          <a:effectRef idx="2">
-            <a:schemeClr val="accent1"/>
-          </a:effectRef>
-          <a:fontRef idx="minor">
-            <a:schemeClr val="lt1"/>
-          </a:fontRef>
-        </p:style>
-        <p:txBody>
-          <a:bodyPr rtlCol="0" anchor="ctr"/>
-          <a:lstStyle/>
-          <a:p>
-            <a:pPr algn="ctr"/>
-          </a:p>
-        </p:txBody>
-      </p:sp>
-      <p:sp>
-        <p:nvSpPr>
-          <p:cNvPr id="21" name="TextBox 20"/>
-          <p:cNvSpPr txBox="1"/>
-          <p:nvPr/>
-        </p:nvSpPr>
-        <p:spPr>
-          <a:xfrm>
-            <a:off x="6263640" y="1746504"/>
-            <a:ext cx="658368" cy="137160"/>
-          </a:xfrm>
-          <a:prstGeom prst="rect">
-            <a:avLst/>
-          </a:prstGeom>
-          <a:noFill/>
-          <a:ln>
-            <a:noFill/>
-          </a:ln>
-        </p:spPr>
-        <p:txBody>
-          <a:bodyPr wrap="square" lIns="0" rIns="0" tIns="0" bIns="0" anchor="t">
-            <a:spAutoFit/>
-          </a:bodyPr>
-          <a:lstStyle/>
-          <a:p>
-            <a:pPr algn="ctr"/>
-            <a:r>
-              <a:rPr sz="1100" b="1">
-                <a:solidFill>
-                  <a:srgbClr val="FFFFFF"/>
-                </a:solidFill>
-                <a:latin typeface="Apple SD Gothic Neo"/>
-              </a:rPr>
-              <a:t>P4</a:t>
-            </a:r>
-          </a:p>
-        </p:txBody>
-      </p:sp>
-      <p:sp>
-        <p:nvSpPr>
-          <p:cNvPr id="22" name="TextBox 21"/>
-          <p:cNvSpPr txBox="1"/>
-          <p:nvPr/>
-        </p:nvSpPr>
-        <p:spPr>
-          <a:xfrm>
-            <a:off x="6099048" y="2267712"/>
-            <a:ext cx="987552" cy="320040"/>
-          </a:xfrm>
-          <a:prstGeom prst="rect">
-            <a:avLst/>
-          </a:prstGeom>
-          <a:noFill/>
-          <a:ln>
-            <a:noFill/>
-          </a:ln>
-        </p:spPr>
-        <p:txBody>
-          <a:bodyPr wrap="square" lIns="0" rIns="0" tIns="0" bIns="0" anchor="t">
-            <a:spAutoFit/>
-          </a:bodyPr>
-          <a:lstStyle/>
-          <a:p>
-            <a:pPr algn="ctr"/>
-            <a:r>
-              <a:rPr sz="1200" b="1">
-                <a:solidFill>
-                  <a:srgbClr val="282C3A"/>
-                </a:solidFill>
-                <a:latin typeface="Apple SD Gothic Neo"/>
-              </a:rPr>
-              <a:t>InternLM</a:t>
-            </a:r>
-          </a:p>
-        </p:txBody>
-      </p:sp>
-      <p:sp>
-        <p:nvSpPr>
-          <p:cNvPr id="23" name="Oval 22"/>
-          <p:cNvSpPr/>
-          <p:nvPr/>
-        </p:nvSpPr>
-        <p:spPr>
-          <a:xfrm>
-            <a:off x="8046720" y="1572768"/>
-            <a:ext cx="658368" cy="658368"/>
-          </a:xfrm>
-          <a:prstGeom prst="ellipse">
-            <a:avLst/>
-          </a:prstGeom>
-          <a:solidFill>
-            <a:srgbClr val="282C3A"/>
-          </a:solidFill>
-          <a:ln>
-            <a:noFill/>
-          </a:ln>
-        </p:spPr>
-        <p:style>
-          <a:lnRef idx="1">
-            <a:schemeClr val="accent1"/>
-          </a:lnRef>
-          <a:fillRef idx="3">
-            <a:schemeClr val="accent1"/>
-          </a:fillRef>
-          <a:effectRef idx="2">
-            <a:schemeClr val="accent1"/>
-          </a:effectRef>
-          <a:fontRef idx="minor">
-            <a:schemeClr val="lt1"/>
-          </a:fontRef>
-        </p:style>
-        <p:txBody>
-          <a:bodyPr rtlCol="0" anchor="ctr"/>
-          <a:lstStyle/>
-          <a:p>
-            <a:pPr algn="ctr"/>
-          </a:p>
-        </p:txBody>
-      </p:sp>
-      <p:sp>
-        <p:nvSpPr>
-          <p:cNvPr id="24" name="TextBox 23"/>
-          <p:cNvSpPr txBox="1"/>
-          <p:nvPr/>
-        </p:nvSpPr>
-        <p:spPr>
-          <a:xfrm>
-            <a:off x="8046720" y="1746504"/>
-            <a:ext cx="658368" cy="137160"/>
-          </a:xfrm>
-          <a:prstGeom prst="rect">
-            <a:avLst/>
-          </a:prstGeom>
-          <a:noFill/>
-          <a:ln>
-            <a:noFill/>
-          </a:ln>
-        </p:spPr>
-        <p:txBody>
-          <a:bodyPr wrap="square" lIns="0" rIns="0" tIns="0" bIns="0" anchor="t">
-            <a:spAutoFit/>
-          </a:bodyPr>
-          <a:lstStyle/>
-          <a:p>
-            <a:pPr algn="ctr"/>
-            <a:r>
-              <a:rPr sz="1100" b="1">
-                <a:solidFill>
-                  <a:srgbClr val="FFFFFF"/>
-                </a:solidFill>
-                <a:latin typeface="Apple SD Gothic Neo"/>
-              </a:rPr>
-              <a:t>P5</a:t>
-            </a:r>
-          </a:p>
-        </p:txBody>
-      </p:sp>
-      <p:sp>
-        <p:nvSpPr>
-          <p:cNvPr id="25" name="TextBox 24"/>
-          <p:cNvSpPr txBox="1"/>
-          <p:nvPr/>
-        </p:nvSpPr>
-        <p:spPr>
-          <a:xfrm>
-            <a:off x="7882128" y="2267712"/>
-            <a:ext cx="987552" cy="320040"/>
-          </a:xfrm>
-          <a:prstGeom prst="rect">
-            <a:avLst/>
-          </a:prstGeom>
-          <a:noFill/>
-          <a:ln>
-            <a:noFill/>
-          </a:ln>
-        </p:spPr>
-        <p:txBody>
-          <a:bodyPr wrap="square" lIns="0" rIns="0" tIns="0" bIns="0" anchor="t">
-            <a:spAutoFit/>
-          </a:bodyPr>
-          <a:lstStyle/>
-          <a:p>
-            <a:pPr algn="ctr"/>
-            <a:r>
-              <a:rPr sz="1200" b="1">
-                <a:solidFill>
-                  <a:srgbClr val="282C3A"/>
-                </a:solidFill>
-                <a:latin typeface="Apple SD Gothic Neo"/>
-              </a:rPr>
-              <a:t>GPT-4o-mini</a:t>
-            </a:r>
-          </a:p>
-        </p:txBody>
-      </p:sp>
-      <p:sp>
-        <p:nvSpPr>
-          <p:cNvPr id="26" name="Oval 25"/>
-          <p:cNvSpPr/>
-          <p:nvPr/>
-        </p:nvSpPr>
-        <p:spPr>
-          <a:xfrm>
-            <a:off x="9829800" y="1572768"/>
-            <a:ext cx="658368" cy="658368"/>
-          </a:xfrm>
-          <a:prstGeom prst="ellipse">
-            <a:avLst/>
-          </a:prstGeom>
-          <a:solidFill>
-            <a:srgbClr val="375667"/>
-          </a:solidFill>
-          <a:ln>
-            <a:noFill/>
-          </a:ln>
-        </p:spPr>
-        <p:style>
-          <a:lnRef idx="1">
-            <a:schemeClr val="accent1"/>
-          </a:lnRef>
-          <a:fillRef idx="3">
-            <a:schemeClr val="accent1"/>
-          </a:fillRef>
-          <a:effectRef idx="2">
-            <a:schemeClr val="accent1"/>
-          </a:effectRef>
-          <a:fontRef idx="minor">
-            <a:schemeClr val="lt1"/>
-          </a:fontRef>
-        </p:style>
-        <p:txBody>
-          <a:bodyPr rtlCol="0" anchor="ctr"/>
-          <a:lstStyle/>
-          <a:p>
-            <a:pPr algn="ctr"/>
-          </a:p>
-        </p:txBody>
-      </p:sp>
-      <p:sp>
-        <p:nvSpPr>
-          <p:cNvPr id="27" name="TextBox 26"/>
-          <p:cNvSpPr txBox="1"/>
-          <p:nvPr/>
-        </p:nvSpPr>
-        <p:spPr>
-          <a:xfrm>
-            <a:off x="9829800" y="1746504"/>
-            <a:ext cx="658368" cy="137160"/>
-          </a:xfrm>
-          <a:prstGeom prst="rect">
-            <a:avLst/>
-          </a:prstGeom>
-          <a:noFill/>
-          <a:ln>
-            <a:noFill/>
-          </a:ln>
-        </p:spPr>
-        <p:txBody>
-          <a:bodyPr wrap="square" lIns="0" rIns="0" tIns="0" bIns="0" anchor="t">
-            <a:spAutoFit/>
-          </a:bodyPr>
-          <a:lstStyle/>
-          <a:p>
-            <a:pPr algn="ctr"/>
-            <a:r>
-              <a:rPr sz="1100" b="1">
-                <a:solidFill>
-                  <a:srgbClr val="FFFFFF"/>
-                </a:solidFill>
-                <a:latin typeface="Apple SD Gothic Neo"/>
-              </a:rPr>
-              <a:t>P6</a:t>
-            </a:r>
-          </a:p>
-        </p:txBody>
-      </p:sp>
-      <p:sp>
-        <p:nvSpPr>
-          <p:cNvPr id="28" name="TextBox 27"/>
-          <p:cNvSpPr txBox="1"/>
-          <p:nvPr/>
-        </p:nvSpPr>
-        <p:spPr>
-          <a:xfrm>
-            <a:off x="9665208" y="2267712"/>
-            <a:ext cx="987552" cy="320040"/>
-          </a:xfrm>
-          <a:prstGeom prst="rect">
-            <a:avLst/>
-          </a:prstGeom>
-          <a:noFill/>
-          <a:ln>
-            <a:noFill/>
-          </a:ln>
-        </p:spPr>
-        <p:txBody>
-          <a:bodyPr wrap="square" lIns="0" rIns="0" tIns="0" bIns="0" anchor="t">
-            <a:spAutoFit/>
-          </a:bodyPr>
-          <a:lstStyle/>
-          <a:p>
-            <a:pPr algn="ctr"/>
-            <a:r>
-              <a:rPr sz="1200" b="1">
-                <a:solidFill>
-                  <a:srgbClr val="282C3A"/>
-                </a:solidFill>
-                <a:latin typeface="Apple SD Gothic Neo"/>
-              </a:rPr>
-              <a:t>Hold-out</a:t>
-            </a:r>
-          </a:p>
-        </p:txBody>
-      </p:sp>
-      <p:sp>
-        <p:nvSpPr>
-          <p:cNvPr id="29" name="TextBox 28"/>
-          <p:cNvSpPr txBox="1"/>
-          <p:nvPr/>
-        </p:nvSpPr>
-        <p:spPr>
-          <a:xfrm>
-            <a:off x="502920" y="2944368"/>
-            <a:ext cx="11155680" cy="2743200"/>
+            <a:pPr algn="l"/>
+            <a:r>
+              <a:rPr sz="1500" b="0">
+                <a:solidFill>
+                  <a:srgbClr val="363A48"/>
+                </a:solidFill>
+                <a:latin typeface="Apple SD Gothic Neo"/>
+              </a:rPr>
+              <a:t>InternLM, GPT-4o-mini, repeated hold-out까지 붙여도 같은 결론이 남는가?</a:t>
+            </a:r>
+          </a:p>
+        </p:txBody>
+      </p:sp>
+      <p:sp>
+        <p:nvSpPr>
+          <p:cNvPr id="20" name="TextBox 19"/>
+          <p:cNvSpPr txBox="1"/>
+          <p:nvPr/>
+        </p:nvSpPr>
+        <p:spPr>
+          <a:xfrm>
+            <a:off x="502920" y="4407408"/>
+            <a:ext cx="11155680" cy="1225296"/>
           </a:xfrm>
           <a:prstGeom prst="rect">
             <a:avLst/>
@@ -7328,7 +6702,7 @@
               <a:spcAft>
                 <a:spcPts val="800"/>
               </a:spcAft>
-              <a:defRPr sz="1700">
+              <a:defRPr sz="1600">
                 <a:solidFill>
                   <a:srgbClr val="363A48"/>
                 </a:solidFill>
@@ -7336,93 +6710,7 @@
               </a:defRPr>
             </a:pPr>
             <a:r>
-              <a:t>• Phase 1–2는 self-judge bias와 초기 sanity check, Phase 3는 메인 same-family scaling 실험이다.</a:t>
-            </a:r>
-          </a:p>
-          <a:p>
-            <a:pPr>
-              <a:lnSpc>
-                <a:spcPct val="112000"/>
-              </a:lnSpc>
-              <a:spcBef>
-                <a:spcPts val="0"/>
-              </a:spcBef>
-              <a:spcAft>
-                <a:spcPts val="800"/>
-              </a:spcAft>
-              <a:defRPr sz="1700">
-                <a:solidFill>
-                  <a:srgbClr val="363A48"/>
-                </a:solidFill>
-                <a:latin typeface="Apple SD Gothic Neo"/>
-              </a:defRPr>
-            </a:pPr>
-            <a:r>
-              <a:t>• Phase 4–5는 cross-family / external judge 검증, Phase 6은 11개 모델 풀의 exhaustive leave-4-out hold-out이다.</a:t>
-            </a:r>
-          </a:p>
-          <a:p>
-            <a:pPr>
-              <a:lnSpc>
-                <a:spcPct val="112000"/>
-              </a:lnSpc>
-              <a:spcBef>
-                <a:spcPts val="0"/>
-              </a:spcBef>
-              <a:spcAft>
-                <a:spcPts val="800"/>
-              </a:spcAft>
-              <a:defRPr sz="1700">
-                <a:solidFill>
-                  <a:srgbClr val="363A48"/>
-                </a:solidFill>
-                <a:latin typeface="Apple SD Gothic Neo"/>
-              </a:defRPr>
-            </a:pPr>
-            <a:r>
-              <a:t>• README → CSV → raw JSONL로 역추적 가능하게 설계해 결과를 다시 계산할 수 있다.</a:t>
-            </a:r>
-          </a:p>
-        </p:txBody>
-      </p:sp>
-      <p:sp>
-        <p:nvSpPr>
-          <p:cNvPr id="30" name="TextBox 29"/>
-          <p:cNvSpPr txBox="1"/>
-          <p:nvPr/>
-        </p:nvSpPr>
-        <p:spPr>
-          <a:xfrm>
-            <a:off x="502920" y="5815584"/>
-            <a:ext cx="11155680" cy="384048"/>
-          </a:xfrm>
-          <a:prstGeom prst="rect">
-            <a:avLst/>
-          </a:prstGeom>
-          <a:solidFill>
-            <a:srgbClr val="E2EAEF"/>
-          </a:solidFill>
-          <a:ln>
-            <a:solidFill>
-              <a:srgbClr val="E2EAEF"/>
-            </a:solidFill>
-          </a:ln>
-        </p:spPr>
-        <p:txBody>
-          <a:bodyPr wrap="square" lIns="64008" rIns="64008" tIns="64008" bIns="64008" anchor="ctr">
-            <a:spAutoFit/>
-          </a:bodyPr>
-          <a:lstStyle/>
-          <a:p>
-            <a:pPr algn="l"/>
-            <a:r>
-              <a:rPr sz="1500" b="1">
-                <a:solidFill>
-                  <a:srgbClr val="282C3A"/>
-                </a:solidFill>
-                <a:latin typeface="Apple SD Gothic Neo"/>
-              </a:rPr>
-              <a:t>Phase 3가 메인 축이고, Phase 4–6이 그 결과를 어디까지 보강하는지 차례로 보여줍니다.</a:t>
+              <a:t>• 이 뒤 절반은 구현 목록보다 세 개의 연구 질문으로 들으면 가장 잘 들어온다.</a:t>
             </a:r>
           </a:p>
         </p:txBody>
@@ -7572,7 +6860,7 @@
                 </a:solidFill>
                 <a:latin typeface="Apple SD Gothic Neo"/>
               </a:rPr>
-              <a:t>3-1. Phase 1–2: 왜 self-judge를 믿으면 안 되는가</a:t>
+              <a:t>RQ1 준비. Phase 1–2: 왜 self-judge를 믿으면 안 되는가</a:t>
             </a:r>
           </a:p>
         </p:txBody>
@@ -7614,7 +6902,7 @@
                 </a:solidFill>
                 <a:latin typeface="Apple SD Gothic Neo"/>
               </a:rPr>
-              <a:t>Lab Meeting</a:t>
+              <a:t>내 연구</a:t>
             </a:r>
           </a:p>
         </p:txBody>
@@ -7652,7 +6940,7 @@
                 </a:solidFill>
                 <a:latin typeface="Apple SD Gothic Neo"/>
               </a:rPr>
-              <a:t>11/18</a:t>
+              <a:t>11/16</a:t>
             </a:r>
           </a:p>
         </p:txBody>
@@ -7733,7 +7021,7 @@
                 </a:solidFill>
                 <a:latin typeface="Apple SD Gothic Neo"/>
               </a:rPr>
-              <a:t>Lab meeting | my reproduction and extensions</a:t>
+              <a:t>내 연구 | reproduction and extensions</a:t>
             </a:r>
           </a:p>
         </p:txBody>
@@ -8059,7 +7347,7 @@
                 </a:solidFill>
                 <a:latin typeface="Apple SD Gothic Neo"/>
               </a:rPr>
-              <a:t>이 슬라이드의 결론은 외부 judge가 필요하다는 것이지, 이미 충분하다는 뜻은 아닙니다.</a:t>
+              <a:t>RQ1을 제대로 보려면 먼저 self-judge 함정을 걷어내야 합니다. 이 슬라이드는 그 준비 단계입니다.</a:t>
             </a:r>
           </a:p>
         </p:txBody>
@@ -8209,7 +7497,7 @@
                 </a:solidFill>
                 <a:latin typeface="Apple SD Gothic Neo"/>
               </a:rPr>
-              <a:t>3-2. Phase 3: Qwen same-family scaling이 메인 결과다</a:t>
+              <a:t>RQ1 답. Phase 3: Qwen same-family scaling이 메인 결과다</a:t>
             </a:r>
           </a:p>
         </p:txBody>
@@ -8251,7 +7539,7 @@
                 </a:solidFill>
                 <a:latin typeface="Apple SD Gothic Neo"/>
               </a:rPr>
-              <a:t>Lab Meeting</a:t>
+              <a:t>내 연구</a:t>
             </a:r>
           </a:p>
         </p:txBody>
@@ -8289,7 +7577,7 @@
                 </a:solidFill>
                 <a:latin typeface="Apple SD Gothic Neo"/>
               </a:rPr>
-              <a:t>12/18</a:t>
+              <a:t>12/16</a:t>
             </a:r>
           </a:p>
         </p:txBody>
@@ -8370,7 +7658,7 @@
                 </a:solidFill>
                 <a:latin typeface="Apple SD Gothic Neo"/>
               </a:rPr>
-              <a:t>Lab meeting | my reproduction and extensions</a:t>
+              <a:t>내 연구 | reproduction and extensions</a:t>
             </a:r>
           </a:p>
         </p:txBody>
@@ -9426,7 +8714,7 @@
                 </a:solidFill>
                 <a:latin typeface="Apple SD Gothic Neo"/>
               </a:rPr>
-              <a:t>3-3. 남는 오류는 무엇이며, 앙상블은 도움이 되는가</a:t>
+              <a:t>RQ2 답. 그런데 broad ranking이 맞아도 남는 오류는 있다</a:t>
             </a:r>
           </a:p>
         </p:txBody>
@@ -9468,7 +8756,7 @@
                 </a:solidFill>
                 <a:latin typeface="Apple SD Gothic Neo"/>
               </a:rPr>
-              <a:t>Lab Meeting</a:t>
+              <a:t>내 연구</a:t>
             </a:r>
           </a:p>
         </p:txBody>
@@ -9506,7 +8794,7 @@
                 </a:solidFill>
                 <a:latin typeface="Apple SD Gothic Neo"/>
               </a:rPr>
-              <a:t>13/18</a:t>
+              <a:t>13/16</a:t>
             </a:r>
           </a:p>
         </p:txBody>
@@ -9587,7 +8875,7 @@
                 </a:solidFill>
                 <a:latin typeface="Apple SD Gothic Neo"/>
               </a:rPr>
-              <a:t>Lab meeting | my reproduction and extensions</a:t>
+              <a:t>내 연구 | reproduction and extensions</a:t>
             </a:r>
           </a:p>
         </p:txBody>
@@ -9629,7 +8917,7 @@
                 </a:solidFill>
                 <a:latin typeface="Apple SD Gothic Neo"/>
               </a:rPr>
-              <a:t>이 슬라이드의 목적: inconsistency가 줄어든 뒤에도 어떤 bias가 남는지와 practical ensemble 결론을 보여준다.</a:t>
+              <a:t>이 슬라이드의 목적: cross-family validation 이후에도 남는 residual bias와 practical ensemble 결론을 보여준다.</a:t>
             </a:r>
           </a:p>
         </p:txBody>
@@ -9849,7 +9137,7 @@
               </a:defRPr>
             </a:pPr>
             <a:r>
-              <a:t>• 즉 더 큰 judge는 더 일관적이지만, 남는 오류를 이해하지 않으면 운영에 바로 쓰기 어렵다.</a:t>
+              <a:t>• 즉 broad ranking이 맞는 것과 question-level decision이 깨끗한 것은 다른 문제다.</a:t>
             </a:r>
           </a:p>
         </p:txBody>
@@ -9891,7 +9179,7 @@
                 </a:solidFill>
                 <a:latin typeface="Apple SD Gothic Neo"/>
               </a:rPr>
-              <a:t>놀라운 지점은 여기입니다. judge가 커질수록 오류가 사라지는 게 아니라, 남는 오류가 first-position bias로 농축됩니다.</a:t>
+              <a:t>RQ2의 답은 명확합니다. 전체 서열이 맞아도 남는 오류는 구조화된 편향과 운영 리스크로 남습니다.</a:t>
             </a:r>
           </a:p>
         </p:txBody>
@@ -10041,7 +9329,7 @@
                 </a:solidFill>
                 <a:latin typeface="Apple SD Gothic Neo"/>
               </a:rPr>
-              <a:t>3-4. 보조 검증 A: InternLM judge는 어디까지 믿을 수 있는가</a:t>
+              <a:t>RQ3. cross-family와 hold-out에서도 결론이 남는가</a:t>
             </a:r>
           </a:p>
         </p:txBody>
@@ -10083,7 +9371,7 @@
                 </a:solidFill>
                 <a:latin typeface="Apple SD Gothic Neo"/>
               </a:rPr>
-              <a:t>Lab Meeting</a:t>
+              <a:t>내 연구</a:t>
             </a:r>
           </a:p>
         </p:txBody>
@@ -10121,7 +9409,7 @@
                 </a:solidFill>
                 <a:latin typeface="Apple SD Gothic Neo"/>
               </a:rPr>
-              <a:t>14/18</a:t>
+              <a:t>14/16</a:t>
             </a:r>
           </a:p>
         </p:txBody>
@@ -10202,7 +9490,7 @@
                 </a:solidFill>
                 <a:latin typeface="Apple SD Gothic Neo"/>
               </a:rPr>
-              <a:t>Lab meeting | my reproduction and extensions</a:t>
+              <a:t>내 연구 | reproduction and extensions</a:t>
             </a:r>
           </a:p>
         </p:txBody>
@@ -10244,14 +9532,14 @@
                 </a:solidFill>
                 <a:latin typeface="Apple SD Gothic Neo"/>
               </a:rPr>
-              <a:t>이 슬라이드의 목적: InternLM2.5-7B/20B를 따로 떼어 놓고, open-weight cross-family judge의 품질을 평가한다.</a:t>
+              <a:t>이 슬라이드의 목적: InternLM20B, GPT-4o-mini, repeated hold-out 결과를 한 장에서 묶어 RQ3에 답한다.</a:t>
             </a:r>
           </a:p>
         </p:txBody>
       </p:sp>
       <p:pic>
         <p:nvPicPr>
-          <p:cNvPr id="10" name="Picture 9" descr="fig17_phase4_internlm.png"/>
+          <p:cNvPr id="10" name="Picture 9" descr="fig16_phase345_judge_summary.png"/>
           <p:cNvPicPr>
             <a:picLocks noChangeAspect="1"/>
           </p:cNvPicPr>
@@ -10265,24 +9553,48 @@
         </p:blipFill>
         <p:spPr>
           <a:xfrm>
-            <a:off x="411480" y="1261872"/>
-            <a:ext cx="7059168" cy="2858143"/>
+            <a:off x="502920" y="1261872"/>
+            <a:ext cx="5468112" cy="3892253"/>
           </a:xfrm>
           <a:prstGeom prst="rect">
             <a:avLst/>
           </a:prstGeom>
         </p:spPr>
       </p:pic>
-      <p:sp>
-        <p:nvSpPr>
-          <p:cNvPr id="11" name="TextBox 10"/>
-          <p:cNvSpPr txBox="1"/>
-          <p:nvPr/>
-        </p:nvSpPr>
-        <p:spPr>
-          <a:xfrm>
-            <a:off x="566928" y="5413248"/>
-            <a:ext cx="6839712" cy="201168"/>
+      <p:pic>
+        <p:nvPicPr>
+          <p:cNvPr id="11" name="Picture 10" descr="fig15_tiny_mt_bench_generalization.png"/>
+          <p:cNvPicPr>
+            <a:picLocks noChangeAspect="1"/>
+          </p:cNvPicPr>
+          <p:nvPr/>
+        </p:nvPicPr>
+        <p:blipFill>
+          <a:blip r:embed="rId3"/>
+          <a:stretch>
+            <a:fillRect/>
+          </a:stretch>
+        </p:blipFill>
+        <p:spPr>
+          <a:xfrm>
+            <a:off x="6199632" y="1261872"/>
+            <a:ext cx="5468112" cy="2131906"/>
+          </a:xfrm>
+          <a:prstGeom prst="rect">
+            <a:avLst/>
+          </a:prstGeom>
+        </p:spPr>
+      </p:pic>
+      <p:sp>
+        <p:nvSpPr>
+          <p:cNvPr id="12" name="TextBox 11"/>
+          <p:cNvSpPr txBox="1"/>
+          <p:nvPr/>
+        </p:nvSpPr>
+        <p:spPr>
+          <a:xfrm>
+            <a:off x="566928" y="4297680"/>
+            <a:ext cx="5340096" cy="201168"/>
           </a:xfrm>
           <a:prstGeom prst="rect">
             <a:avLst/>
@@ -10306,21 +9618,59 @@
                 </a:solidFill>
                 <a:latin typeface="Apple SD Gothic Neo"/>
               </a:rPr>
-              <a:t>Phase 4: InternLM judge summary</a:t>
-            </a:r>
-          </a:p>
-        </p:txBody>
-      </p:sp>
-      <p:sp>
-        <p:nvSpPr>
-          <p:cNvPr id="12" name="TextBox 11"/>
-          <p:cNvSpPr txBox="1"/>
-          <p:nvPr/>
-        </p:nvSpPr>
-        <p:spPr>
-          <a:xfrm>
-            <a:off x="7662672" y="1261872"/>
-            <a:ext cx="3977639" cy="3858768"/>
+              <a:t>Cross-family / external judge summary</a:t>
+            </a:r>
+          </a:p>
+        </p:txBody>
+      </p:sp>
+      <p:sp>
+        <p:nvSpPr>
+          <p:cNvPr id="13" name="TextBox 12"/>
+          <p:cNvSpPr txBox="1"/>
+          <p:nvPr/>
+        </p:nvSpPr>
+        <p:spPr>
+          <a:xfrm>
+            <a:off x="6263640" y="4297680"/>
+            <a:ext cx="5340096" cy="201168"/>
+          </a:xfrm>
+          <a:prstGeom prst="rect">
+            <a:avLst/>
+          </a:prstGeom>
+          <a:noFill/>
+          <a:ln>
+            <a:noFill/>
+          </a:ln>
+        </p:spPr>
+        <p:txBody>
+          <a:bodyPr wrap="square" lIns="64008" rIns="64008" tIns="64008" bIns="64008" anchor="t">
+            <a:spAutoFit/>
+          </a:bodyPr>
+          <a:lstStyle/>
+          <a:p>
+            <a:pPr algn="ctr"/>
+            <a:r>
+              <a:rPr sz="1000" b="0">
+                <a:solidFill>
+                  <a:srgbClr val="70767D"/>
+                </a:solidFill>
+                <a:latin typeface="Apple SD Gothic Neo"/>
+              </a:rPr>
+              <a:t>330-split repeated hold-out generalization</a:t>
+            </a:r>
+          </a:p>
+        </p:txBody>
+      </p:sp>
+      <p:sp>
+        <p:nvSpPr>
+          <p:cNvPr id="14" name="TextBox 13"/>
+          <p:cNvSpPr txBox="1"/>
+          <p:nvPr/>
+        </p:nvSpPr>
+        <p:spPr>
+          <a:xfrm>
+            <a:off x="502920" y="4553712"/>
+            <a:ext cx="11155680" cy="1417320"/>
           </a:xfrm>
           <a:prstGeom prst="rect">
             <a:avLst/>
@@ -10358,7 +9708,7 @@
               </a:defRPr>
             </a:pPr>
             <a:r>
-              <a:t>• InternLM2.5-20B는 Qwen32와 Spearman ρ=0.893로 broad ranking을 유지하지만, pairwise inconsistency는 47.44%로 더 높다.</a:t>
+              <a:t>• InternLM20B는 Qwen32와 Spearman ρ=0.893로 broad ranking을 유지하지만, pairwise inconsistency는 47.44%로 더 noisy하다.</a:t>
             </a:r>
           </a:p>
           <a:p>
@@ -10380,7 +9730,7 @@
               </a:defRPr>
             </a:pPr>
             <a:r>
-              <a:t>• 즉 cross-family sanity는 되지만, same-family Qwen32만큼 pairwise가 안정적이진 않다.</a:t>
+              <a:t>• GPT-4o-mini는 Qwen32와 ρ=0.964, τ=0.905, pairwise inconsistency 33.99%로 가장 강한 외부 기준점이다.</a:t>
             </a:r>
           </a:p>
           <a:p>
@@ -10402,20 +9752,20 @@
               </a:defRPr>
             </a:pPr>
             <a:r>
-              <a:t>• 반면 InternLM2.5-7B는 pairwise error가 72.62%라서 winner format 자체를 안정적으로 못 지키는 수준이다.</a:t>
-            </a:r>
-          </a:p>
-        </p:txBody>
-      </p:sp>
-      <p:sp>
-        <p:nvSpPr>
-          <p:cNvPr id="13" name="TextBox 12"/>
-          <p:cNvSpPr txBox="1"/>
-          <p:nvPr/>
-        </p:nvSpPr>
-        <p:spPr>
-          <a:xfrm>
-            <a:off x="7726679" y="5394960"/>
+              <a:t>• tinyMT repeated hold-out 330 split에서는 60문항이 세 judge 모두 mean ρ≥0.97로 가장 안전한 운영점이었다.</a:t>
+            </a:r>
+          </a:p>
+        </p:txBody>
+      </p:sp>
+      <p:sp>
+        <p:nvSpPr>
+          <p:cNvPr id="15" name="TextBox 14"/>
+          <p:cNvSpPr txBox="1"/>
+          <p:nvPr/>
+        </p:nvSpPr>
+        <p:spPr>
+          <a:xfrm>
+            <a:off x="566928" y="5623560"/>
             <a:ext cx="2029968" cy="877824"/>
           </a:xfrm>
           <a:prstGeom prst="rect">
@@ -10451,13 +9801,13 @@
       </p:sp>
       <p:sp>
         <p:nvSpPr>
-          <p:cNvPr id="14" name="Rectangle 13"/>
+          <p:cNvPr id="16" name="Rectangle 15"/>
           <p:cNvSpPr/>
           <p:nvPr/>
         </p:nvSpPr>
         <p:spPr>
           <a:xfrm>
-            <a:off x="7836407" y="5504688"/>
+            <a:off x="676656" y="5733288"/>
             <a:ext cx="502920" cy="182880"/>
           </a:xfrm>
           <a:prstGeom prst="rect">
@@ -10494,13 +9844,13 @@
       </p:sp>
       <p:sp>
         <p:nvSpPr>
-          <p:cNvPr id="15" name="TextBox 14"/>
-          <p:cNvSpPr txBox="1"/>
-          <p:nvPr/>
-        </p:nvSpPr>
-        <p:spPr>
-          <a:xfrm>
-            <a:off x="7854695" y="5504688"/>
+          <p:cNvPr id="17" name="TextBox 16"/>
+          <p:cNvSpPr txBox="1"/>
+          <p:nvPr/>
+        </p:nvSpPr>
+        <p:spPr>
+          <a:xfrm>
+            <a:off x="694944" y="5733288"/>
             <a:ext cx="1691640" cy="182880"/>
           </a:xfrm>
           <a:prstGeom prst="rect">
@@ -10525,20 +9875,20 @@
                 </a:solidFill>
                 <a:latin typeface="Apple SD Gothic Neo"/>
               </a:rPr>
-              <a:t>Qwen32↔InternLM20B</a:t>
-            </a:r>
-          </a:p>
-        </p:txBody>
-      </p:sp>
-      <p:sp>
-        <p:nvSpPr>
-          <p:cNvPr id="16" name="TextBox 15"/>
-          <p:cNvSpPr txBox="1"/>
-          <p:nvPr/>
-        </p:nvSpPr>
-        <p:spPr>
-          <a:xfrm>
-            <a:off x="7836407" y="5742432"/>
+              <a:t>InternLM20B</a:t>
+            </a:r>
+          </a:p>
+        </p:txBody>
+      </p:sp>
+      <p:sp>
+        <p:nvSpPr>
+          <p:cNvPr id="18" name="TextBox 17"/>
+          <p:cNvSpPr txBox="1"/>
+          <p:nvPr/>
+        </p:nvSpPr>
+        <p:spPr>
+          <a:xfrm>
+            <a:off x="676656" y="5971032"/>
             <a:ext cx="1737360" cy="310896"/>
           </a:xfrm>
           <a:prstGeom prst="rect">
@@ -10570,13 +9920,13 @@
       </p:sp>
       <p:sp>
         <p:nvSpPr>
-          <p:cNvPr id="17" name="TextBox 16"/>
-          <p:cNvSpPr txBox="1"/>
-          <p:nvPr/>
-        </p:nvSpPr>
-        <p:spPr>
-          <a:xfrm>
-            <a:off x="9665208" y="5394960"/>
+          <p:cNvPr id="19" name="TextBox 18"/>
+          <p:cNvSpPr txBox="1"/>
+          <p:nvPr/>
+        </p:nvSpPr>
+        <p:spPr>
+          <a:xfrm>
+            <a:off x="2779776" y="5623560"/>
             <a:ext cx="2029968" cy="877824"/>
           </a:xfrm>
           <a:prstGeom prst="rect">
@@ -10612,13 +9962,13 @@
       </p:sp>
       <p:sp>
         <p:nvSpPr>
-          <p:cNvPr id="18" name="Rectangle 17"/>
+          <p:cNvPr id="20" name="Rectangle 19"/>
           <p:cNvSpPr/>
           <p:nvPr/>
         </p:nvSpPr>
         <p:spPr>
           <a:xfrm>
-            <a:off x="9774936" y="5504688"/>
+            <a:off x="2889504" y="5733288"/>
             <a:ext cx="502920" cy="182880"/>
           </a:xfrm>
           <a:prstGeom prst="rect">
@@ -10655,13 +10005,13 @@
       </p:sp>
       <p:sp>
         <p:nvSpPr>
-          <p:cNvPr id="19" name="TextBox 18"/>
-          <p:cNvSpPr txBox="1"/>
-          <p:nvPr/>
-        </p:nvSpPr>
-        <p:spPr>
-          <a:xfrm>
-            <a:off x="9793224" y="5504688"/>
+          <p:cNvPr id="21" name="TextBox 20"/>
+          <p:cNvSpPr txBox="1"/>
+          <p:nvPr/>
+        </p:nvSpPr>
+        <p:spPr>
+          <a:xfrm>
+            <a:off x="2907792" y="5733288"/>
             <a:ext cx="1691640" cy="182880"/>
           </a:xfrm>
           <a:prstGeom prst="rect">
@@ -10686,20 +10036,20 @@
                 </a:solidFill>
                 <a:latin typeface="Apple SD Gothic Neo"/>
               </a:rPr>
-              <a:t>InternLM20B pairwise</a:t>
-            </a:r>
-          </a:p>
-        </p:txBody>
-      </p:sp>
-      <p:sp>
-        <p:nvSpPr>
-          <p:cNvPr id="20" name="TextBox 19"/>
-          <p:cNvSpPr txBox="1"/>
-          <p:nvPr/>
-        </p:nvSpPr>
-        <p:spPr>
-          <a:xfrm>
-            <a:off x="9774936" y="5742432"/>
+              <a:t>GPT-4o-mini</a:t>
+            </a:r>
+          </a:p>
+        </p:txBody>
+      </p:sp>
+      <p:sp>
+        <p:nvSpPr>
+          <p:cNvPr id="22" name="TextBox 21"/>
+          <p:cNvSpPr txBox="1"/>
+          <p:nvPr/>
+        </p:nvSpPr>
+        <p:spPr>
+          <a:xfrm>
+            <a:off x="2889504" y="5971032"/>
             <a:ext cx="1737360" cy="310896"/>
           </a:xfrm>
           <a:prstGeom prst="rect">
@@ -10724,20 +10074,20 @@
                 </a:solidFill>
                 <a:latin typeface="Apple SD Gothic Neo"/>
               </a:rPr>
-              <a:t>47.44%</a:t>
-            </a:r>
-          </a:p>
-        </p:txBody>
-      </p:sp>
-      <p:sp>
-        <p:nvSpPr>
-          <p:cNvPr id="21" name="TextBox 20"/>
-          <p:cNvSpPr txBox="1"/>
-          <p:nvPr/>
-        </p:nvSpPr>
-        <p:spPr>
-          <a:xfrm>
-            <a:off x="7726679" y="6291072"/>
+              <a:t>ρ=0.964</a:t>
+            </a:r>
+          </a:p>
+        </p:txBody>
+      </p:sp>
+      <p:sp>
+        <p:nvSpPr>
+          <p:cNvPr id="23" name="TextBox 22"/>
+          <p:cNvSpPr txBox="1"/>
+          <p:nvPr/>
+        </p:nvSpPr>
+        <p:spPr>
+          <a:xfrm>
+            <a:off x="4992624" y="5623560"/>
             <a:ext cx="2029968" cy="877824"/>
           </a:xfrm>
           <a:prstGeom prst="rect">
@@ -10773,13 +10123,13 @@
       </p:sp>
       <p:sp>
         <p:nvSpPr>
-          <p:cNvPr id="22" name="Rectangle 21"/>
+          <p:cNvPr id="24" name="Rectangle 23"/>
           <p:cNvSpPr/>
           <p:nvPr/>
         </p:nvSpPr>
         <p:spPr>
           <a:xfrm>
-            <a:off x="7836407" y="6400800"/>
+            <a:off x="5102352" y="5733288"/>
             <a:ext cx="502920" cy="182880"/>
           </a:xfrm>
           <a:prstGeom prst="rect">
@@ -10816,13 +10166,13 @@
       </p:sp>
       <p:sp>
         <p:nvSpPr>
-          <p:cNvPr id="23" name="TextBox 22"/>
-          <p:cNvSpPr txBox="1"/>
-          <p:nvPr/>
-        </p:nvSpPr>
-        <p:spPr>
-          <a:xfrm>
-            <a:off x="7854695" y="6400800"/>
+          <p:cNvPr id="25" name="TextBox 24"/>
+          <p:cNvSpPr txBox="1"/>
+          <p:nvPr/>
+        </p:nvSpPr>
+        <p:spPr>
+          <a:xfrm>
+            <a:off x="5120640" y="5733288"/>
             <a:ext cx="1691640" cy="182880"/>
           </a:xfrm>
           <a:prstGeom prst="rect">
@@ -10847,20 +10197,20 @@
                 </a:solidFill>
                 <a:latin typeface="Apple SD Gothic Neo"/>
               </a:rPr>
-              <a:t>InternLM7B error</a:t>
-            </a:r>
-          </a:p>
-        </p:txBody>
-      </p:sp>
-      <p:sp>
-        <p:nvSpPr>
-          <p:cNvPr id="24" name="TextBox 23"/>
-          <p:cNvSpPr txBox="1"/>
-          <p:nvPr/>
-        </p:nvSpPr>
-        <p:spPr>
-          <a:xfrm>
-            <a:off x="7836407" y="6638544"/>
+              <a:t>60문항</a:t>
+            </a:r>
+          </a:p>
+        </p:txBody>
+      </p:sp>
+      <p:sp>
+        <p:nvSpPr>
+          <p:cNvPr id="26" name="TextBox 25"/>
+          <p:cNvSpPr txBox="1"/>
+          <p:nvPr/>
+        </p:nvSpPr>
+        <p:spPr>
+          <a:xfrm>
+            <a:off x="5102352" y="5971032"/>
             <a:ext cx="1737360" cy="310896"/>
           </a:xfrm>
           <a:prstGeom prst="rect">
@@ -10885,20 +10235,20 @@
                 </a:solidFill>
                 <a:latin typeface="Apple SD Gothic Neo"/>
               </a:rPr>
-              <a:t>72.62%</a:t>
-            </a:r>
-          </a:p>
-        </p:txBody>
-      </p:sp>
-      <p:sp>
-        <p:nvSpPr>
-          <p:cNvPr id="25" name="TextBox 24"/>
-          <p:cNvSpPr txBox="1"/>
-          <p:nvPr/>
-        </p:nvSpPr>
-        <p:spPr>
-          <a:xfrm>
-            <a:off x="9665208" y="6291072"/>
+              <a:t>mean ρ≥0.97</a:t>
+            </a:r>
+          </a:p>
+        </p:txBody>
+      </p:sp>
+      <p:sp>
+        <p:nvSpPr>
+          <p:cNvPr id="27" name="TextBox 26"/>
+          <p:cNvSpPr txBox="1"/>
+          <p:nvPr/>
+        </p:nvSpPr>
+        <p:spPr>
+          <a:xfrm>
+            <a:off x="7205472" y="5623560"/>
             <a:ext cx="2029968" cy="877824"/>
           </a:xfrm>
           <a:prstGeom prst="rect">
@@ -10934,13 +10284,13 @@
       </p:sp>
       <p:sp>
         <p:nvSpPr>
-          <p:cNvPr id="26" name="Rectangle 25"/>
+          <p:cNvPr id="28" name="Rectangle 27"/>
           <p:cNvSpPr/>
           <p:nvPr/>
         </p:nvSpPr>
         <p:spPr>
           <a:xfrm>
-            <a:off x="9774936" y="6400800"/>
+            <a:off x="7315200" y="5733288"/>
             <a:ext cx="502920" cy="182880"/>
           </a:xfrm>
           <a:prstGeom prst="rect">
@@ -10977,13 +10327,13 @@
       </p:sp>
       <p:sp>
         <p:nvSpPr>
-          <p:cNvPr id="27" name="TextBox 26"/>
-          <p:cNvSpPr txBox="1"/>
-          <p:nvPr/>
-        </p:nvSpPr>
-        <p:spPr>
-          <a:xfrm>
-            <a:off x="9793224" y="6400800"/>
+          <p:cNvPr id="29" name="TextBox 28"/>
+          <p:cNvSpPr txBox="1"/>
+          <p:nvPr/>
+        </p:nvSpPr>
+        <p:spPr>
+          <a:xfrm>
+            <a:off x="7333488" y="5733288"/>
             <a:ext cx="1691640" cy="182880"/>
           </a:xfrm>
           <a:prstGeom prst="rect">
@@ -11015,13 +10365,13 @@
       </p:sp>
       <p:sp>
         <p:nvSpPr>
-          <p:cNvPr id="28" name="TextBox 27"/>
-          <p:cNvSpPr txBox="1"/>
-          <p:nvPr/>
-        </p:nvSpPr>
-        <p:spPr>
-          <a:xfrm>
-            <a:off x="9774936" y="6638544"/>
+          <p:cNvPr id="30" name="TextBox 29"/>
+          <p:cNvSpPr txBox="1"/>
+          <p:nvPr/>
+        </p:nvSpPr>
+        <p:spPr>
+          <a:xfrm>
+            <a:off x="7315200" y="5971032"/>
             <a:ext cx="1737360" cy="310896"/>
           </a:xfrm>
           <a:prstGeom prst="rect">
@@ -11046,7 +10396,7 @@
                 </a:solidFill>
                 <a:latin typeface="Apple SD Gothic Neo"/>
               </a:rPr>
-              <a:t>sanity check</a:t>
+              <a:t>partial yes</a:t>
             </a:r>
           </a:p>
         </p:txBody>
@@ -11196,7 +10546,7 @@
                 </a:solidFill>
                 <a:latin typeface="Apple SD Gothic Neo"/>
               </a:rPr>
-              <a:t>3-5. 보조 검증 B: GPT-4o-mini는 가장 강한 외부 기준점인가</a:t>
+              <a:t>4. 세 연구 질문에 대해 지금 무엇을 답할 수 있나</a:t>
             </a:r>
           </a:p>
         </p:txBody>
@@ -11238,7 +10588,7 @@
                 </a:solidFill>
                 <a:latin typeface="Apple SD Gothic Neo"/>
               </a:rPr>
-              <a:t>Lab Meeting</a:t>
+              <a:t>내 연구</a:t>
             </a:r>
           </a:p>
         </p:txBody>
@@ -11276,7 +10626,7 @@
                 </a:solidFill>
                 <a:latin typeface="Apple SD Gothic Neo"/>
               </a:rPr>
-              <a:t>15/18</a:t>
+              <a:t>15/16</a:t>
             </a:r>
           </a:p>
         </p:txBody>
@@ -11357,7 +10707,7 @@
                 </a:solidFill>
                 <a:latin typeface="Apple SD Gothic Neo"/>
               </a:rPr>
-              <a:t>Lab meeting | my reproduction and extensions</a:t>
+              <a:t>내 연구 | reproduction and extensions</a:t>
             </a:r>
           </a:p>
         </p:txBody>
@@ -11399,35 +10749,53 @@
                 </a:solidFill>
                 <a:latin typeface="Apple SD Gothic Neo"/>
               </a:rPr>
-              <a:t>이 슬라이드의 목적: closed-weight external judge로서 GPT-4o-mini가 Qwen32의 메인 결과를 얼마나 잘 지지하는지 본다.</a:t>
-            </a:r>
-          </a:p>
-        </p:txBody>
-      </p:sp>
-      <p:pic>
-        <p:nvPicPr>
-          <p:cNvPr id="10" name="Picture 9" descr="fig18_phase5_gpt4omini.png"/>
-          <p:cNvPicPr>
-            <a:picLocks noChangeAspect="1"/>
-          </p:cNvPicPr>
-          <p:nvPr/>
-        </p:nvPicPr>
-        <p:blipFill>
-          <a:blip r:embed="rId2"/>
-          <a:stretch>
-            <a:fillRect/>
-          </a:stretch>
-        </p:blipFill>
-        <p:spPr>
-          <a:xfrm>
-            <a:off x="411480" y="1261872"/>
-            <a:ext cx="7059168" cy="2858143"/>
-          </a:xfrm>
-          <a:prstGeom prst="rect">
-            <a:avLst/>
-          </a:prstGeom>
-        </p:spPr>
-      </p:pic>
+              <a:t>이 슬라이드의 목적: 2부에서 처음 던진 세 연구 질문에 대한 현재 답을 한 장에서 닫아 준다.</a:t>
+            </a:r>
+          </a:p>
+        </p:txBody>
+      </p:sp>
+      <p:sp>
+        <p:nvSpPr>
+          <p:cNvPr id="10" name="TextBox 9"/>
+          <p:cNvSpPr txBox="1"/>
+          <p:nvPr/>
+        </p:nvSpPr>
+        <p:spPr>
+          <a:xfrm>
+            <a:off x="502920" y="1298448"/>
+            <a:ext cx="11155680" cy="566928"/>
+          </a:xfrm>
+          <a:prstGeom prst="rect">
+            <a:avLst/>
+          </a:prstGeom>
+          <a:solidFill>
+            <a:srgbClr val="E2EAEF"/>
+          </a:solidFill>
+          <a:ln>
+            <a:solidFill>
+              <a:srgbClr val="E2EAEF"/>
+            </a:solidFill>
+          </a:ln>
+        </p:spPr>
+        <p:txBody>
+          <a:bodyPr wrap="square" lIns="64008" rIns="64008" tIns="64008" bIns="64008" anchor="ctr">
+            <a:spAutoFit/>
+          </a:bodyPr>
+          <a:lstStyle/>
+          <a:p>
+            <a:pPr algn="l"/>
+            <a:r>
+              <a:rPr sz="1900" b="1">
+                <a:solidFill>
+                  <a:srgbClr val="282C3A"/>
+                </a:solidFill>
+                <a:latin typeface="Apple SD Gothic Neo"/>
+              </a:rPr>
+              <a:t>따라서 이 발표의 결론은 ‘오픈소스 judge도 충분하다’가 아니라, ‘strong judge message는 부분적으로 재현되지만 boundary를 같이 말해야 한다’입니다.</a:t>
+            </a:r>
+          </a:p>
+        </p:txBody>
+      </p:sp>
       <p:sp>
         <p:nvSpPr>
           <p:cNvPr id="11" name="TextBox 10"/>
@@ -11436,8 +10804,50 @@
         </p:nvSpPr>
         <p:spPr>
           <a:xfrm>
-            <a:off x="566928" y="5413248"/>
-            <a:ext cx="6839712" cy="201168"/>
+            <a:off x="502920" y="2048256"/>
+            <a:ext cx="3553967" cy="1993392"/>
+          </a:xfrm>
+          <a:prstGeom prst="rect">
+            <a:avLst/>
+          </a:prstGeom>
+          <a:solidFill>
+            <a:srgbClr val="FFFFFF"/>
+          </a:solidFill>
+          <a:ln>
+            <a:solidFill>
+              <a:srgbClr val="DAD4CA"/>
+            </a:solidFill>
+          </a:ln>
+        </p:spPr>
+        <p:txBody>
+          <a:bodyPr wrap="square" lIns="109728" rIns="109728" tIns="109728" bIns="109728" anchor="t">
+            <a:spAutoFit/>
+          </a:bodyPr>
+          <a:lstStyle/>
+          <a:p>
+            <a:pPr algn="l"/>
+            <a:r>
+              <a:rPr sz="1700" b="0">
+                <a:solidFill>
+                  <a:srgbClr val="363A48"/>
+                </a:solidFill>
+                <a:latin typeface="Apple SD Gothic Neo"/>
+              </a:rPr>
+              <a:t/>
+            </a:r>
+          </a:p>
+        </p:txBody>
+      </p:sp>
+      <p:sp>
+        <p:nvSpPr>
+          <p:cNvPr id="12" name="TextBox 11"/>
+          <p:cNvSpPr txBox="1"/>
+          <p:nvPr/>
+        </p:nvSpPr>
+        <p:spPr>
+          <a:xfrm>
+            <a:off x="576072" y="2157984"/>
+            <a:ext cx="3407664" cy="237744"/>
           </a:xfrm>
           <a:prstGeom prst="rect">
             <a:avLst/>
@@ -11448,34 +10858,308 @@
           </a:ln>
         </p:spPr>
         <p:txBody>
-          <a:bodyPr wrap="square" lIns="64008" rIns="64008" tIns="64008" bIns="64008" anchor="t">
-            <a:spAutoFit/>
-          </a:bodyPr>
-          <a:lstStyle/>
-          <a:p>
-            <a:pPr algn="ctr"/>
-            <a:r>
-              <a:rPr sz="1000" b="0">
-                <a:solidFill>
-                  <a:srgbClr val="70767D"/>
-                </a:solidFill>
-                <a:latin typeface="Apple SD Gothic Neo"/>
-              </a:rPr>
-              <a:t>Phase 5: GPT-4o-mini judge summary</a:t>
-            </a:r>
-          </a:p>
-        </p:txBody>
-      </p:sp>
-      <p:sp>
-        <p:nvSpPr>
-          <p:cNvPr id="12" name="TextBox 11"/>
-          <p:cNvSpPr txBox="1"/>
-          <p:nvPr/>
-        </p:nvSpPr>
-        <p:spPr>
-          <a:xfrm>
-            <a:off x="7662672" y="1261872"/>
-            <a:ext cx="3977639" cy="3858768"/>
+          <a:bodyPr wrap="square" lIns="0" rIns="0" tIns="0" bIns="0" anchor="t">
+            <a:spAutoFit/>
+          </a:bodyPr>
+          <a:lstStyle/>
+          <a:p>
+            <a:pPr algn="l"/>
+            <a:r>
+              <a:rPr sz="1500" b="1">
+                <a:solidFill>
+                  <a:srgbClr val="3B586E"/>
+                </a:solidFill>
+                <a:latin typeface="Apple SD Gothic Neo"/>
+              </a:rPr>
+              <a:t>RQ1. judge scaling은 개선되는가</a:t>
+            </a:r>
+          </a:p>
+        </p:txBody>
+      </p:sp>
+      <p:sp>
+        <p:nvSpPr>
+          <p:cNvPr id="13" name="TextBox 12"/>
+          <p:cNvSpPr txBox="1"/>
+          <p:nvPr/>
+        </p:nvSpPr>
+        <p:spPr>
+          <a:xfrm>
+            <a:off x="576072" y="2542032"/>
+            <a:ext cx="3407664" cy="1152144"/>
+          </a:xfrm>
+          <a:prstGeom prst="rect">
+            <a:avLst/>
+          </a:prstGeom>
+          <a:noFill/>
+          <a:ln>
+            <a:noFill/>
+          </a:ln>
+        </p:spPr>
+        <p:txBody>
+          <a:bodyPr wrap="square" lIns="0" rIns="0" tIns="0" bIns="0" anchor="t">
+            <a:spAutoFit/>
+          </a:bodyPr>
+          <a:lstStyle/>
+          <a:p>
+            <a:pPr algn="l"/>
+            <a:r>
+              <a:rPr sz="1500" b="0">
+                <a:solidFill>
+                  <a:srgbClr val="363A48"/>
+                </a:solidFill>
+                <a:latin typeface="Apple SD Gothic Neo"/>
+              </a:rPr>
+              <a:t>예. Qwen same-family에서는 7B → 14B → 32B로 갈수록 pairwise inconsistency가 뚜렷하게 줄었습니다.</a:t>
+            </a:r>
+          </a:p>
+        </p:txBody>
+      </p:sp>
+      <p:sp>
+        <p:nvSpPr>
+          <p:cNvPr id="14" name="TextBox 13"/>
+          <p:cNvSpPr txBox="1"/>
+          <p:nvPr/>
+        </p:nvSpPr>
+        <p:spPr>
+          <a:xfrm>
+            <a:off x="4221480" y="2048256"/>
+            <a:ext cx="3553967" cy="1993392"/>
+          </a:xfrm>
+          <a:prstGeom prst="rect">
+            <a:avLst/>
+          </a:prstGeom>
+          <a:solidFill>
+            <a:srgbClr val="FFFFFF"/>
+          </a:solidFill>
+          <a:ln>
+            <a:solidFill>
+              <a:srgbClr val="DAD4CA"/>
+            </a:solidFill>
+          </a:ln>
+        </p:spPr>
+        <p:txBody>
+          <a:bodyPr wrap="square" lIns="109728" rIns="109728" tIns="109728" bIns="109728" anchor="t">
+            <a:spAutoFit/>
+          </a:bodyPr>
+          <a:lstStyle/>
+          <a:p>
+            <a:pPr algn="l"/>
+            <a:r>
+              <a:rPr sz="1700" b="0">
+                <a:solidFill>
+                  <a:srgbClr val="363A48"/>
+                </a:solidFill>
+                <a:latin typeface="Apple SD Gothic Neo"/>
+              </a:rPr>
+              <a:t/>
+            </a:r>
+          </a:p>
+        </p:txBody>
+      </p:sp>
+      <p:sp>
+        <p:nvSpPr>
+          <p:cNvPr id="15" name="TextBox 14"/>
+          <p:cNvSpPr txBox="1"/>
+          <p:nvPr/>
+        </p:nvSpPr>
+        <p:spPr>
+          <a:xfrm>
+            <a:off x="4294632" y="2157984"/>
+            <a:ext cx="3407664" cy="237744"/>
+          </a:xfrm>
+          <a:prstGeom prst="rect">
+            <a:avLst/>
+          </a:prstGeom>
+          <a:noFill/>
+          <a:ln>
+            <a:noFill/>
+          </a:ln>
+        </p:spPr>
+        <p:txBody>
+          <a:bodyPr wrap="square" lIns="0" rIns="0" tIns="0" bIns="0" anchor="t">
+            <a:spAutoFit/>
+          </a:bodyPr>
+          <a:lstStyle/>
+          <a:p>
+            <a:pPr algn="l"/>
+            <a:r>
+              <a:rPr sz="1500" b="1">
+                <a:solidFill>
+                  <a:srgbClr val="3B586E"/>
+                </a:solidFill>
+                <a:latin typeface="Apple SD Gothic Neo"/>
+              </a:rPr>
+              <a:t>RQ2. 남는 오류는 어떤 구조인가</a:t>
+            </a:r>
+          </a:p>
+        </p:txBody>
+      </p:sp>
+      <p:sp>
+        <p:nvSpPr>
+          <p:cNvPr id="16" name="TextBox 15"/>
+          <p:cNvSpPr txBox="1"/>
+          <p:nvPr/>
+        </p:nvSpPr>
+        <p:spPr>
+          <a:xfrm>
+            <a:off x="4294632" y="2542032"/>
+            <a:ext cx="3407664" cy="1152144"/>
+          </a:xfrm>
+          <a:prstGeom prst="rect">
+            <a:avLst/>
+          </a:prstGeom>
+          <a:noFill/>
+          <a:ln>
+            <a:noFill/>
+          </a:ln>
+        </p:spPr>
+        <p:txBody>
+          <a:bodyPr wrap="square" lIns="0" rIns="0" tIns="0" bIns="0" anchor="t">
+            <a:spAutoFit/>
+          </a:bodyPr>
+          <a:lstStyle/>
+          <a:p>
+            <a:pPr algn="l"/>
+            <a:r>
+              <a:rPr sz="1500" b="0">
+                <a:solidFill>
+                  <a:srgbClr val="363A48"/>
+                </a:solidFill>
+                <a:latin typeface="Apple SD Gothic Neo"/>
+              </a:rPr>
+              <a:t>단순 noise가 아니라 first-position bias와 format failure처럼 구조화됩니다. 그래서 abstain ensemble이 의미를 가집니다.</a:t>
+            </a:r>
+          </a:p>
+        </p:txBody>
+      </p:sp>
+      <p:sp>
+        <p:nvSpPr>
+          <p:cNvPr id="17" name="TextBox 16"/>
+          <p:cNvSpPr txBox="1"/>
+          <p:nvPr/>
+        </p:nvSpPr>
+        <p:spPr>
+          <a:xfrm>
+            <a:off x="7940040" y="2048256"/>
+            <a:ext cx="3553967" cy="1993392"/>
+          </a:xfrm>
+          <a:prstGeom prst="rect">
+            <a:avLst/>
+          </a:prstGeom>
+          <a:solidFill>
+            <a:srgbClr val="FFFFFF"/>
+          </a:solidFill>
+          <a:ln>
+            <a:solidFill>
+              <a:srgbClr val="DAD4CA"/>
+            </a:solidFill>
+          </a:ln>
+        </p:spPr>
+        <p:txBody>
+          <a:bodyPr wrap="square" lIns="109728" rIns="109728" tIns="109728" bIns="109728" anchor="t">
+            <a:spAutoFit/>
+          </a:bodyPr>
+          <a:lstStyle/>
+          <a:p>
+            <a:pPr algn="l"/>
+            <a:r>
+              <a:rPr sz="1700" b="0">
+                <a:solidFill>
+                  <a:srgbClr val="363A48"/>
+                </a:solidFill>
+                <a:latin typeface="Apple SD Gothic Neo"/>
+              </a:rPr>
+              <a:t/>
+            </a:r>
+          </a:p>
+        </p:txBody>
+      </p:sp>
+      <p:sp>
+        <p:nvSpPr>
+          <p:cNvPr id="18" name="TextBox 17"/>
+          <p:cNvSpPr txBox="1"/>
+          <p:nvPr/>
+        </p:nvSpPr>
+        <p:spPr>
+          <a:xfrm>
+            <a:off x="8013192" y="2157984"/>
+            <a:ext cx="3407664" cy="237744"/>
+          </a:xfrm>
+          <a:prstGeom prst="rect">
+            <a:avLst/>
+          </a:prstGeom>
+          <a:noFill/>
+          <a:ln>
+            <a:noFill/>
+          </a:ln>
+        </p:spPr>
+        <p:txBody>
+          <a:bodyPr wrap="square" lIns="0" rIns="0" tIns="0" bIns="0" anchor="t">
+            <a:spAutoFit/>
+          </a:bodyPr>
+          <a:lstStyle/>
+          <a:p>
+            <a:pPr algn="l"/>
+            <a:r>
+              <a:rPr sz="1500" b="1">
+                <a:solidFill>
+                  <a:srgbClr val="3B586E"/>
+                </a:solidFill>
+                <a:latin typeface="Apple SD Gothic Neo"/>
+              </a:rPr>
+              <a:t>RQ3. 그 결론은 남는가</a:t>
+            </a:r>
+          </a:p>
+        </p:txBody>
+      </p:sp>
+      <p:sp>
+        <p:nvSpPr>
+          <p:cNvPr id="19" name="TextBox 18"/>
+          <p:cNvSpPr txBox="1"/>
+          <p:nvPr/>
+        </p:nvSpPr>
+        <p:spPr>
+          <a:xfrm>
+            <a:off x="8013192" y="2542032"/>
+            <a:ext cx="3407664" cy="1152144"/>
+          </a:xfrm>
+          <a:prstGeom prst="rect">
+            <a:avLst/>
+          </a:prstGeom>
+          <a:noFill/>
+          <a:ln>
+            <a:noFill/>
+          </a:ln>
+        </p:spPr>
+        <p:txBody>
+          <a:bodyPr wrap="square" lIns="0" rIns="0" tIns="0" bIns="0" anchor="t">
+            <a:spAutoFit/>
+          </a:bodyPr>
+          <a:lstStyle/>
+          <a:p>
+            <a:pPr algn="l"/>
+            <a:r>
+              <a:rPr sz="1500" b="0">
+                <a:solidFill>
+                  <a:srgbClr val="363A48"/>
+                </a:solidFill>
+                <a:latin typeface="Apple SD Gothic Neo"/>
+              </a:rPr>
+              <a:t>부분적으로 예. InternLM20B·GPT-4o-mini·repeated hold-out이 broad claim을 지지하지만, 모든 open judge에 대한 보편 법칙은 아닙니다.</a:t>
+            </a:r>
+          </a:p>
+        </p:txBody>
+      </p:sp>
+      <p:sp>
+        <p:nvSpPr>
+          <p:cNvPr id="20" name="TextBox 19"/>
+          <p:cNvSpPr txBox="1"/>
+          <p:nvPr/>
+        </p:nvSpPr>
+        <p:spPr>
+          <a:xfrm>
+            <a:off x="502920" y="4407408"/>
+            <a:ext cx="11155680" cy="1225296"/>
           </a:xfrm>
           <a:prstGeom prst="rect">
             <a:avLst/>
@@ -11513,695 +11197,7 @@
               </a:defRPr>
             </a:pPr>
             <a:r>
-              <a:t>• GPT-4o-mini는 Qwen32와 Spearman ρ=0.964, Kendall τ=0.905로 가장 비슷한 rank pattern을 보였다.</a:t>
-            </a:r>
-          </a:p>
-          <a:p>
-            <a:pPr>
-              <a:lnSpc>
-                <a:spcPct val="112000"/>
-              </a:lnSpc>
-              <a:spcBef>
-                <a:spcPts val="0"/>
-              </a:spcBef>
-              <a:spcAft>
-                <a:spcPts val="800"/>
-              </a:spcAft>
-              <a:defRPr sz="1600">
-                <a:solidFill>
-                  <a:srgbClr val="363A48"/>
-                </a:solidFill>
-                <a:latin typeface="Apple SD Gothic Neo"/>
-              </a:defRPr>
-            </a:pPr>
-            <a:r>
-              <a:t>• Pairwise inconsistency도 33.99%로 Qwen32의 32.86%와 거의 비슷한 수준이었다.</a:t>
-            </a:r>
-          </a:p>
-          <a:p>
-            <a:pPr>
-              <a:lnSpc>
-                <a:spcPct val="112000"/>
-              </a:lnSpc>
-              <a:spcBef>
-                <a:spcPts val="0"/>
-              </a:spcBef>
-              <a:spcAft>
-                <a:spcPts val="800"/>
-              </a:spcAft>
-              <a:defRPr sz="1600">
-                <a:solidFill>
-                  <a:srgbClr val="363A48"/>
-                </a:solidFill>
-                <a:latin typeface="Apple SD Gothic Neo"/>
-              </a:defRPr>
-            </a:pPr>
-            <a:r>
-              <a:t>• 다만 exact pairwise agreement는 0.580이라, question-level decision까지 완전히 동일하다고 해석하면 과하다.</a:t>
-            </a:r>
-          </a:p>
-        </p:txBody>
-      </p:sp>
-      <p:sp>
-        <p:nvSpPr>
-          <p:cNvPr id="13" name="TextBox 12"/>
-          <p:cNvSpPr txBox="1"/>
-          <p:nvPr/>
-        </p:nvSpPr>
-        <p:spPr>
-          <a:xfrm>
-            <a:off x="7726679" y="5394960"/>
-            <a:ext cx="2029968" cy="877824"/>
-          </a:xfrm>
-          <a:prstGeom prst="rect">
-            <a:avLst/>
-          </a:prstGeom>
-          <a:solidFill>
-            <a:srgbClr val="FFFFFF"/>
-          </a:solidFill>
-          <a:ln>
-            <a:solidFill>
-              <a:srgbClr val="DAD4CA"/>
-            </a:solidFill>
-          </a:ln>
-        </p:spPr>
-        <p:txBody>
-          <a:bodyPr wrap="square" lIns="54864" rIns="54864" tIns="54864" bIns="54864" anchor="t">
-            <a:spAutoFit/>
-          </a:bodyPr>
-          <a:lstStyle/>
-          <a:p>
-            <a:pPr algn="l"/>
-            <a:r>
-              <a:rPr sz="1700" b="0">
-                <a:solidFill>
-                  <a:srgbClr val="363A48"/>
-                </a:solidFill>
-                <a:latin typeface="Apple SD Gothic Neo"/>
-              </a:rPr>
-              <a:t/>
-            </a:r>
-          </a:p>
-        </p:txBody>
-      </p:sp>
-      <p:sp>
-        <p:nvSpPr>
-          <p:cNvPr id="14" name="Rectangle 13"/>
-          <p:cNvSpPr/>
-          <p:nvPr/>
-        </p:nvSpPr>
-        <p:spPr>
-          <a:xfrm>
-            <a:off x="7836407" y="5504688"/>
-            <a:ext cx="502920" cy="182880"/>
-          </a:xfrm>
-          <a:prstGeom prst="rect">
-            <a:avLst/>
-          </a:prstGeom>
-          <a:solidFill>
-            <a:srgbClr val="375667"/>
-          </a:solidFill>
-          <a:ln>
-            <a:noFill/>
-          </a:ln>
-        </p:spPr>
-        <p:style>
-          <a:lnRef idx="1">
-            <a:schemeClr val="accent1"/>
-          </a:lnRef>
-          <a:fillRef idx="3">
-            <a:schemeClr val="accent1"/>
-          </a:fillRef>
-          <a:effectRef idx="2">
-            <a:schemeClr val="accent1"/>
-          </a:effectRef>
-          <a:fontRef idx="minor">
-            <a:schemeClr val="lt1"/>
-          </a:fontRef>
-        </p:style>
-        <p:txBody>
-          <a:bodyPr rtlCol="0" anchor="ctr"/>
-          <a:lstStyle/>
-          <a:p>
-            <a:pPr algn="ctr"/>
-          </a:p>
-        </p:txBody>
-      </p:sp>
-      <p:sp>
-        <p:nvSpPr>
-          <p:cNvPr id="15" name="TextBox 14"/>
-          <p:cNvSpPr txBox="1"/>
-          <p:nvPr/>
-        </p:nvSpPr>
-        <p:spPr>
-          <a:xfrm>
-            <a:off x="7854695" y="5504688"/>
-            <a:ext cx="1691640" cy="182880"/>
-          </a:xfrm>
-          <a:prstGeom prst="rect">
-            <a:avLst/>
-          </a:prstGeom>
-          <a:noFill/>
-          <a:ln>
-            <a:noFill/>
-          </a:ln>
-        </p:spPr>
-        <p:txBody>
-          <a:bodyPr wrap="square" lIns="9144" rIns="9144" tIns="9144" bIns="9144" anchor="ctr">
-            <a:spAutoFit/>
-          </a:bodyPr>
-          <a:lstStyle/>
-          <a:p>
-            <a:pPr algn="l"/>
-            <a:r>
-              <a:rPr sz="900" b="1">
-                <a:solidFill>
-                  <a:srgbClr val="FFFFFF"/>
-                </a:solidFill>
-                <a:latin typeface="Apple SD Gothic Neo"/>
-              </a:rPr>
-              <a:t>Qwen32↔GPT-4o-mini</a:t>
-            </a:r>
-          </a:p>
-        </p:txBody>
-      </p:sp>
-      <p:sp>
-        <p:nvSpPr>
-          <p:cNvPr id="16" name="TextBox 15"/>
-          <p:cNvSpPr txBox="1"/>
-          <p:nvPr/>
-        </p:nvSpPr>
-        <p:spPr>
-          <a:xfrm>
-            <a:off x="7836407" y="5742432"/>
-            <a:ext cx="1737360" cy="310896"/>
-          </a:xfrm>
-          <a:prstGeom prst="rect">
-            <a:avLst/>
-          </a:prstGeom>
-          <a:noFill/>
-          <a:ln>
-            <a:noFill/>
-          </a:ln>
-        </p:spPr>
-        <p:txBody>
-          <a:bodyPr wrap="square" lIns="9144" rIns="9144" tIns="9144" bIns="9144" anchor="t">
-            <a:spAutoFit/>
-          </a:bodyPr>
-          <a:lstStyle/>
-          <a:p>
-            <a:pPr algn="l"/>
-            <a:r>
-              <a:rPr sz="1900" b="1">
-                <a:solidFill>
-                  <a:srgbClr val="282C3A"/>
-                </a:solidFill>
-                <a:latin typeface="Apple SD Gothic Neo"/>
-              </a:rPr>
-              <a:t>ρ=0.964</a:t>
-            </a:r>
-          </a:p>
-        </p:txBody>
-      </p:sp>
-      <p:sp>
-        <p:nvSpPr>
-          <p:cNvPr id="17" name="TextBox 16"/>
-          <p:cNvSpPr txBox="1"/>
-          <p:nvPr/>
-        </p:nvSpPr>
-        <p:spPr>
-          <a:xfrm>
-            <a:off x="9665208" y="5394960"/>
-            <a:ext cx="2029968" cy="877824"/>
-          </a:xfrm>
-          <a:prstGeom prst="rect">
-            <a:avLst/>
-          </a:prstGeom>
-          <a:solidFill>
-            <a:srgbClr val="FFFFFF"/>
-          </a:solidFill>
-          <a:ln>
-            <a:solidFill>
-              <a:srgbClr val="DAD4CA"/>
-            </a:solidFill>
-          </a:ln>
-        </p:spPr>
-        <p:txBody>
-          <a:bodyPr wrap="square" lIns="54864" rIns="54864" tIns="54864" bIns="54864" anchor="t">
-            <a:spAutoFit/>
-          </a:bodyPr>
-          <a:lstStyle/>
-          <a:p>
-            <a:pPr algn="l"/>
-            <a:r>
-              <a:rPr sz="1700" b="0">
-                <a:solidFill>
-                  <a:srgbClr val="363A48"/>
-                </a:solidFill>
-                <a:latin typeface="Apple SD Gothic Neo"/>
-              </a:rPr>
-              <a:t/>
-            </a:r>
-          </a:p>
-        </p:txBody>
-      </p:sp>
-      <p:sp>
-        <p:nvSpPr>
-          <p:cNvPr id="18" name="Rectangle 17"/>
-          <p:cNvSpPr/>
-          <p:nvPr/>
-        </p:nvSpPr>
-        <p:spPr>
-          <a:xfrm>
-            <a:off x="9774936" y="5504688"/>
-            <a:ext cx="502920" cy="182880"/>
-          </a:xfrm>
-          <a:prstGeom prst="rect">
-            <a:avLst/>
-          </a:prstGeom>
-          <a:solidFill>
-            <a:srgbClr val="B5654E"/>
-          </a:solidFill>
-          <a:ln>
-            <a:noFill/>
-          </a:ln>
-        </p:spPr>
-        <p:style>
-          <a:lnRef idx="1">
-            <a:schemeClr val="accent1"/>
-          </a:lnRef>
-          <a:fillRef idx="3">
-            <a:schemeClr val="accent1"/>
-          </a:fillRef>
-          <a:effectRef idx="2">
-            <a:schemeClr val="accent1"/>
-          </a:effectRef>
-          <a:fontRef idx="minor">
-            <a:schemeClr val="lt1"/>
-          </a:fontRef>
-        </p:style>
-        <p:txBody>
-          <a:bodyPr rtlCol="0" anchor="ctr"/>
-          <a:lstStyle/>
-          <a:p>
-            <a:pPr algn="ctr"/>
-          </a:p>
-        </p:txBody>
-      </p:sp>
-      <p:sp>
-        <p:nvSpPr>
-          <p:cNvPr id="19" name="TextBox 18"/>
-          <p:cNvSpPr txBox="1"/>
-          <p:nvPr/>
-        </p:nvSpPr>
-        <p:spPr>
-          <a:xfrm>
-            <a:off x="9793224" y="5504688"/>
-            <a:ext cx="1691640" cy="182880"/>
-          </a:xfrm>
-          <a:prstGeom prst="rect">
-            <a:avLst/>
-          </a:prstGeom>
-          <a:noFill/>
-          <a:ln>
-            <a:noFill/>
-          </a:ln>
-        </p:spPr>
-        <p:txBody>
-          <a:bodyPr wrap="square" lIns="9144" rIns="9144" tIns="9144" bIns="9144" anchor="ctr">
-            <a:spAutoFit/>
-          </a:bodyPr>
-          <a:lstStyle/>
-          <a:p>
-            <a:pPr algn="l"/>
-            <a:r>
-              <a:rPr sz="900" b="1">
-                <a:solidFill>
-                  <a:srgbClr val="FFFFFF"/>
-                </a:solidFill>
-                <a:latin typeface="Apple SD Gothic Neo"/>
-              </a:rPr>
-              <a:t>Kendall τ</a:t>
-            </a:r>
-          </a:p>
-        </p:txBody>
-      </p:sp>
-      <p:sp>
-        <p:nvSpPr>
-          <p:cNvPr id="20" name="TextBox 19"/>
-          <p:cNvSpPr txBox="1"/>
-          <p:nvPr/>
-        </p:nvSpPr>
-        <p:spPr>
-          <a:xfrm>
-            <a:off x="9774936" y="5742432"/>
-            <a:ext cx="1737360" cy="310896"/>
-          </a:xfrm>
-          <a:prstGeom prst="rect">
-            <a:avLst/>
-          </a:prstGeom>
-          <a:noFill/>
-          <a:ln>
-            <a:noFill/>
-          </a:ln>
-        </p:spPr>
-        <p:txBody>
-          <a:bodyPr wrap="square" lIns="9144" rIns="9144" tIns="9144" bIns="9144" anchor="t">
-            <a:spAutoFit/>
-          </a:bodyPr>
-          <a:lstStyle/>
-          <a:p>
-            <a:pPr algn="l"/>
-            <a:r>
-              <a:rPr sz="1900" b="1">
-                <a:solidFill>
-                  <a:srgbClr val="282C3A"/>
-                </a:solidFill>
-                <a:latin typeface="Apple SD Gothic Neo"/>
-              </a:rPr>
-              <a:t>0.905</a:t>
-            </a:r>
-          </a:p>
-        </p:txBody>
-      </p:sp>
-      <p:sp>
-        <p:nvSpPr>
-          <p:cNvPr id="21" name="TextBox 20"/>
-          <p:cNvSpPr txBox="1"/>
-          <p:nvPr/>
-        </p:nvSpPr>
-        <p:spPr>
-          <a:xfrm>
-            <a:off x="7726679" y="6291072"/>
-            <a:ext cx="2029968" cy="877824"/>
-          </a:xfrm>
-          <a:prstGeom prst="rect">
-            <a:avLst/>
-          </a:prstGeom>
-          <a:solidFill>
-            <a:srgbClr val="FFFFFF"/>
-          </a:solidFill>
-          <a:ln>
-            <a:solidFill>
-              <a:srgbClr val="DAD4CA"/>
-            </a:solidFill>
-          </a:ln>
-        </p:spPr>
-        <p:txBody>
-          <a:bodyPr wrap="square" lIns="54864" rIns="54864" tIns="54864" bIns="54864" anchor="t">
-            <a:spAutoFit/>
-          </a:bodyPr>
-          <a:lstStyle/>
-          <a:p>
-            <a:pPr algn="l"/>
-            <a:r>
-              <a:rPr sz="1700" b="0">
-                <a:solidFill>
-                  <a:srgbClr val="363A48"/>
-                </a:solidFill>
-                <a:latin typeface="Apple SD Gothic Neo"/>
-              </a:rPr>
-              <a:t/>
-            </a:r>
-          </a:p>
-        </p:txBody>
-      </p:sp>
-      <p:sp>
-        <p:nvSpPr>
-          <p:cNvPr id="22" name="Rectangle 21"/>
-          <p:cNvSpPr/>
-          <p:nvPr/>
-        </p:nvSpPr>
-        <p:spPr>
-          <a:xfrm>
-            <a:off x="7836407" y="6400800"/>
-            <a:ext cx="502920" cy="182880"/>
-          </a:xfrm>
-          <a:prstGeom prst="rect">
-            <a:avLst/>
-          </a:prstGeom>
-          <a:solidFill>
-            <a:srgbClr val="BF9A5E"/>
-          </a:solidFill>
-          <a:ln>
-            <a:noFill/>
-          </a:ln>
-        </p:spPr>
-        <p:style>
-          <a:lnRef idx="1">
-            <a:schemeClr val="accent1"/>
-          </a:lnRef>
-          <a:fillRef idx="3">
-            <a:schemeClr val="accent1"/>
-          </a:fillRef>
-          <a:effectRef idx="2">
-            <a:schemeClr val="accent1"/>
-          </a:effectRef>
-          <a:fontRef idx="minor">
-            <a:schemeClr val="lt1"/>
-          </a:fontRef>
-        </p:style>
-        <p:txBody>
-          <a:bodyPr rtlCol="0" anchor="ctr"/>
-          <a:lstStyle/>
-          <a:p>
-            <a:pPr algn="ctr"/>
-          </a:p>
-        </p:txBody>
-      </p:sp>
-      <p:sp>
-        <p:nvSpPr>
-          <p:cNvPr id="23" name="TextBox 22"/>
-          <p:cNvSpPr txBox="1"/>
-          <p:nvPr/>
-        </p:nvSpPr>
-        <p:spPr>
-          <a:xfrm>
-            <a:off x="7854695" y="6400800"/>
-            <a:ext cx="1691640" cy="182880"/>
-          </a:xfrm>
-          <a:prstGeom prst="rect">
-            <a:avLst/>
-          </a:prstGeom>
-          <a:noFill/>
-          <a:ln>
-            <a:noFill/>
-          </a:ln>
-        </p:spPr>
-        <p:txBody>
-          <a:bodyPr wrap="square" lIns="9144" rIns="9144" tIns="9144" bIns="9144" anchor="ctr">
-            <a:spAutoFit/>
-          </a:bodyPr>
-          <a:lstStyle/>
-          <a:p>
-            <a:pPr algn="l"/>
-            <a:r>
-              <a:rPr sz="900" b="1">
-                <a:solidFill>
-                  <a:srgbClr val="FFFFFF"/>
-                </a:solidFill>
-                <a:latin typeface="Apple SD Gothic Neo"/>
-              </a:rPr>
-              <a:t>GPT pairwise</a:t>
-            </a:r>
-          </a:p>
-        </p:txBody>
-      </p:sp>
-      <p:sp>
-        <p:nvSpPr>
-          <p:cNvPr id="24" name="TextBox 23"/>
-          <p:cNvSpPr txBox="1"/>
-          <p:nvPr/>
-        </p:nvSpPr>
-        <p:spPr>
-          <a:xfrm>
-            <a:off x="7836407" y="6638544"/>
-            <a:ext cx="1737360" cy="310896"/>
-          </a:xfrm>
-          <a:prstGeom prst="rect">
-            <a:avLst/>
-          </a:prstGeom>
-          <a:noFill/>
-          <a:ln>
-            <a:noFill/>
-          </a:ln>
-        </p:spPr>
-        <p:txBody>
-          <a:bodyPr wrap="square" lIns="9144" rIns="9144" tIns="9144" bIns="9144" anchor="t">
-            <a:spAutoFit/>
-          </a:bodyPr>
-          <a:lstStyle/>
-          <a:p>
-            <a:pPr algn="l"/>
-            <a:r>
-              <a:rPr sz="1900" b="1">
-                <a:solidFill>
-                  <a:srgbClr val="282C3A"/>
-                </a:solidFill>
-                <a:latin typeface="Apple SD Gothic Neo"/>
-              </a:rPr>
-              <a:t>33.99%</a:t>
-            </a:r>
-          </a:p>
-        </p:txBody>
-      </p:sp>
-      <p:sp>
-        <p:nvSpPr>
-          <p:cNvPr id="25" name="TextBox 24"/>
-          <p:cNvSpPr txBox="1"/>
-          <p:nvPr/>
-        </p:nvSpPr>
-        <p:spPr>
-          <a:xfrm>
-            <a:off x="9665208" y="6291072"/>
-            <a:ext cx="2029968" cy="877824"/>
-          </a:xfrm>
-          <a:prstGeom prst="rect">
-            <a:avLst/>
-          </a:prstGeom>
-          <a:solidFill>
-            <a:srgbClr val="FFFFFF"/>
-          </a:solidFill>
-          <a:ln>
-            <a:solidFill>
-              <a:srgbClr val="DAD4CA"/>
-            </a:solidFill>
-          </a:ln>
-        </p:spPr>
-        <p:txBody>
-          <a:bodyPr wrap="square" lIns="54864" rIns="54864" tIns="54864" bIns="54864" anchor="t">
-            <a:spAutoFit/>
-          </a:bodyPr>
-          <a:lstStyle/>
-          <a:p>
-            <a:pPr algn="l"/>
-            <a:r>
-              <a:rPr sz="1700" b="0">
-                <a:solidFill>
-                  <a:srgbClr val="363A48"/>
-                </a:solidFill>
-                <a:latin typeface="Apple SD Gothic Neo"/>
-              </a:rPr>
-              <a:t/>
-            </a:r>
-          </a:p>
-        </p:txBody>
-      </p:sp>
-      <p:sp>
-        <p:nvSpPr>
-          <p:cNvPr id="26" name="Rectangle 25"/>
-          <p:cNvSpPr/>
-          <p:nvPr/>
-        </p:nvSpPr>
-        <p:spPr>
-          <a:xfrm>
-            <a:off x="9774936" y="6400800"/>
-            <a:ext cx="502920" cy="182880"/>
-          </a:xfrm>
-          <a:prstGeom prst="rect">
-            <a:avLst/>
-          </a:prstGeom>
-          <a:solidFill>
-            <a:srgbClr val="668185"/>
-          </a:solidFill>
-          <a:ln>
-            <a:noFill/>
-          </a:ln>
-        </p:spPr>
-        <p:style>
-          <a:lnRef idx="1">
-            <a:schemeClr val="accent1"/>
-          </a:lnRef>
-          <a:fillRef idx="3">
-            <a:schemeClr val="accent1"/>
-          </a:fillRef>
-          <a:effectRef idx="2">
-            <a:schemeClr val="accent1"/>
-          </a:effectRef>
-          <a:fontRef idx="minor">
-            <a:schemeClr val="lt1"/>
-          </a:fontRef>
-        </p:style>
-        <p:txBody>
-          <a:bodyPr rtlCol="0" anchor="ctr"/>
-          <a:lstStyle/>
-          <a:p>
-            <a:pPr algn="ctr"/>
-          </a:p>
-        </p:txBody>
-      </p:sp>
-      <p:sp>
-        <p:nvSpPr>
-          <p:cNvPr id="27" name="TextBox 26"/>
-          <p:cNvSpPr txBox="1"/>
-          <p:nvPr/>
-        </p:nvSpPr>
-        <p:spPr>
-          <a:xfrm>
-            <a:off x="9793224" y="6400800"/>
-            <a:ext cx="1691640" cy="182880"/>
-          </a:xfrm>
-          <a:prstGeom prst="rect">
-            <a:avLst/>
-          </a:prstGeom>
-          <a:noFill/>
-          <a:ln>
-            <a:noFill/>
-          </a:ln>
-        </p:spPr>
-        <p:txBody>
-          <a:bodyPr wrap="square" lIns="9144" rIns="9144" tIns="9144" bIns="9144" anchor="ctr">
-            <a:spAutoFit/>
-          </a:bodyPr>
-          <a:lstStyle/>
-          <a:p>
-            <a:pPr algn="l"/>
-            <a:r>
-              <a:rPr sz="900" b="1">
-                <a:solidFill>
-                  <a:srgbClr val="FFFFFF"/>
-                </a:solidFill>
-                <a:latin typeface="Apple SD Gothic Neo"/>
-              </a:rPr>
-              <a:t>exact agreement</a:t>
-            </a:r>
-          </a:p>
-        </p:txBody>
-      </p:sp>
-      <p:sp>
-        <p:nvSpPr>
-          <p:cNvPr id="28" name="TextBox 27"/>
-          <p:cNvSpPr txBox="1"/>
-          <p:nvPr/>
-        </p:nvSpPr>
-        <p:spPr>
-          <a:xfrm>
-            <a:off x="9774936" y="6638544"/>
-            <a:ext cx="1737360" cy="310896"/>
-          </a:xfrm>
-          <a:prstGeom prst="rect">
-            <a:avLst/>
-          </a:prstGeom>
-          <a:noFill/>
-          <a:ln>
-            <a:noFill/>
-          </a:ln>
-        </p:spPr>
-        <p:txBody>
-          <a:bodyPr wrap="square" lIns="9144" rIns="9144" tIns="9144" bIns="9144" anchor="t">
-            <a:spAutoFit/>
-          </a:bodyPr>
-          <a:lstStyle/>
-          <a:p>
-            <a:pPr algn="l"/>
-            <a:r>
-              <a:rPr sz="1900" b="1">
-                <a:solidFill>
-                  <a:srgbClr val="282C3A"/>
-                </a:solidFill>
-                <a:latin typeface="Apple SD Gothic Neo"/>
-              </a:rPr>
-              <a:t>0.580</a:t>
+              <a:t>• RQ1, RQ2, RQ3를 다시 부르면 2부가 phase 나열이 아니라 하나의 argument로 닫힙니다.</a:t>
             </a:r>
           </a:p>
         </p:txBody>
@@ -12351,7 +11347,7 @@
                 </a:solidFill>
                 <a:latin typeface="Apple SD Gothic Neo"/>
               </a:rPr>
-              <a:t>3-6. Phase 6: tinyMT-Bench는 같은 집합과 hold-out에서 다르게 읽어야 한다</a:t>
+              <a:t>질문 전에: 저장소는 이렇게 읽으면 됩니다</a:t>
             </a:r>
           </a:p>
         </p:txBody>
@@ -12393,7 +11389,7 @@
                 </a:solidFill>
                 <a:latin typeface="Apple SD Gothic Neo"/>
               </a:rPr>
-              <a:t>Lab Meeting</a:t>
+              <a:t>내 연구</a:t>
             </a:r>
           </a:p>
         </p:txBody>
@@ -12431,7 +11427,7 @@
                 </a:solidFill>
                 <a:latin typeface="Apple SD Gothic Neo"/>
               </a:rPr>
-              <a:t>16/18</a:t>
+              <a:t>16/16</a:t>
             </a:r>
           </a:p>
         </p:txBody>
@@ -12512,1963 +11508,7 @@
                 </a:solidFill>
                 <a:latin typeface="Apple SD Gothic Neo"/>
               </a:rPr>
-              <a:t>Lab meeting | my reproduction and extensions</a:t>
-            </a:r>
-          </a:p>
-        </p:txBody>
-      </p:sp>
-      <p:sp>
-        <p:nvSpPr>
-          <p:cNvPr id="9" name="TextBox 8"/>
-          <p:cNvSpPr txBox="1"/>
-          <p:nvPr/>
-        </p:nvSpPr>
-        <p:spPr>
-          <a:xfrm>
-            <a:off x="438912" y="694944"/>
-            <a:ext cx="11292840" cy="365760"/>
-          </a:xfrm>
-          <a:prstGeom prst="rect">
-            <a:avLst/>
-          </a:prstGeom>
-          <a:solidFill>
-            <a:srgbClr val="E2EAEF"/>
-          </a:solidFill>
-          <a:ln>
-            <a:solidFill>
-              <a:srgbClr val="E2EAEF"/>
-            </a:solidFill>
-          </a:ln>
-        </p:spPr>
-        <p:txBody>
-          <a:bodyPr wrap="square" lIns="27432" rIns="27432" tIns="27432" bIns="27432" anchor="ctr">
-            <a:spAutoFit/>
-          </a:bodyPr>
-          <a:lstStyle/>
-          <a:p>
-            <a:pPr algn="l"/>
-            <a:r>
-              <a:rPr sz="1200" b="1">
-                <a:solidFill>
-                  <a:srgbClr val="282C3A"/>
-                </a:solidFill>
-                <a:latin typeface="Apple SD Gothic Neo"/>
-              </a:rPr>
-              <a:t>이 슬라이드의 목적: 문항 축소 결과를 same-set과 exhaustive hold-out으로 나눠 읽게 한다.</a:t>
-            </a:r>
-          </a:p>
-        </p:txBody>
-      </p:sp>
-      <p:pic>
-        <p:nvPicPr>
-          <p:cNvPr id="10" name="Picture 9" descr="fig9_tiny_mt_bench.png"/>
-          <p:cNvPicPr>
-            <a:picLocks noChangeAspect="1"/>
-          </p:cNvPicPr>
-          <p:nvPr/>
-        </p:nvPicPr>
-        <p:blipFill>
-          <a:blip r:embed="rId2"/>
-          <a:stretch>
-            <a:fillRect/>
-          </a:stretch>
-        </p:blipFill>
-        <p:spPr>
-          <a:xfrm>
-            <a:off x="502920" y="1261872"/>
-            <a:ext cx="5468112" cy="1947735"/>
-          </a:xfrm>
-          <a:prstGeom prst="rect">
-            <a:avLst/>
-          </a:prstGeom>
-        </p:spPr>
-      </p:pic>
-      <p:pic>
-        <p:nvPicPr>
-          <p:cNvPr id="11" name="Picture 10" descr="fig15_tiny_mt_bench_generalization.png"/>
-          <p:cNvPicPr>
-            <a:picLocks noChangeAspect="1"/>
-          </p:cNvPicPr>
-          <p:nvPr/>
-        </p:nvPicPr>
-        <p:blipFill>
-          <a:blip r:embed="rId3"/>
-          <a:stretch>
-            <a:fillRect/>
-          </a:stretch>
-        </p:blipFill>
-        <p:spPr>
-          <a:xfrm>
-            <a:off x="6199632" y="1261872"/>
-            <a:ext cx="5468112" cy="2131906"/>
-          </a:xfrm>
-          <a:prstGeom prst="rect">
-            <a:avLst/>
-          </a:prstGeom>
-        </p:spPr>
-      </p:pic>
-      <p:sp>
-        <p:nvSpPr>
-          <p:cNvPr id="12" name="TextBox 11"/>
-          <p:cNvSpPr txBox="1"/>
-          <p:nvPr/>
-        </p:nvSpPr>
-        <p:spPr>
-          <a:xfrm>
-            <a:off x="566928" y="4297680"/>
-            <a:ext cx="5340096" cy="201168"/>
-          </a:xfrm>
-          <a:prstGeom prst="rect">
-            <a:avLst/>
-          </a:prstGeom>
-          <a:noFill/>
-          <a:ln>
-            <a:noFill/>
-          </a:ln>
-        </p:spPr>
-        <p:txBody>
-          <a:bodyPr wrap="square" lIns="64008" rIns="64008" tIns="64008" bIns="64008" anchor="t">
-            <a:spAutoFit/>
-          </a:bodyPr>
-          <a:lstStyle/>
-          <a:p>
-            <a:pPr algn="ctr"/>
-            <a:r>
-              <a:rPr sz="1000" b="0">
-                <a:solidFill>
-                  <a:srgbClr val="70767D"/>
-                </a:solidFill>
-                <a:latin typeface="Apple SD Gothic Neo"/>
-              </a:rPr>
-              <a:t>same-set tinyMT-Bench</a:t>
-            </a:r>
-          </a:p>
-        </p:txBody>
-      </p:sp>
-      <p:sp>
-        <p:nvSpPr>
-          <p:cNvPr id="13" name="TextBox 12"/>
-          <p:cNvSpPr txBox="1"/>
-          <p:nvPr/>
-        </p:nvSpPr>
-        <p:spPr>
-          <a:xfrm>
-            <a:off x="6263640" y="4297680"/>
-            <a:ext cx="5340096" cy="201168"/>
-          </a:xfrm>
-          <a:prstGeom prst="rect">
-            <a:avLst/>
-          </a:prstGeom>
-          <a:noFill/>
-          <a:ln>
-            <a:noFill/>
-          </a:ln>
-        </p:spPr>
-        <p:txBody>
-          <a:bodyPr wrap="square" lIns="64008" rIns="64008" tIns="64008" bIns="64008" anchor="t">
-            <a:spAutoFit/>
-          </a:bodyPr>
-          <a:lstStyle/>
-          <a:p>
-            <a:pPr algn="ctr"/>
-            <a:r>
-              <a:rPr sz="1000" b="0">
-                <a:solidFill>
-                  <a:srgbClr val="70767D"/>
-                </a:solidFill>
-                <a:latin typeface="Apple SD Gothic Neo"/>
-              </a:rPr>
-              <a:t>330-split repeated hold-out generalization</a:t>
-            </a:r>
-          </a:p>
-        </p:txBody>
-      </p:sp>
-      <p:sp>
-        <p:nvSpPr>
-          <p:cNvPr id="14" name="TextBox 13"/>
-          <p:cNvSpPr txBox="1"/>
-          <p:nvPr/>
-        </p:nvSpPr>
-        <p:spPr>
-          <a:xfrm>
-            <a:off x="502920" y="4553712"/>
-            <a:ext cx="11155680" cy="1417320"/>
-          </a:xfrm>
-          <a:prstGeom prst="rect">
-            <a:avLst/>
-          </a:prstGeom>
-          <a:solidFill>
-            <a:srgbClr val="FFFFFF"/>
-          </a:solidFill>
-          <a:ln>
-            <a:solidFill>
-              <a:srgbClr val="DAD4CA"/>
-            </a:solidFill>
-          </a:ln>
-        </p:spPr>
-        <p:txBody>
-          <a:bodyPr wrap="square" lIns="118872" rIns="118872" tIns="118872" bIns="118872" anchor="t">
-            <a:spAutoFit/>
-          </a:bodyPr>
-          <a:lstStyle/>
-          <a:p>
-            <a:pPr algn="l">
-              <a:lnSpc>
-                <a:spcPct val="112000"/>
-              </a:lnSpc>
-              <a:spcBef>
-                <a:spcPts val="0"/>
-              </a:spcBef>
-              <a:spcAft>
-                <a:spcPts val="800"/>
-              </a:spcAft>
-              <a:defRPr sz="1600">
-                <a:solidFill>
-                  <a:srgbClr val="363A48"/>
-                </a:solidFill>
-                <a:latin typeface="Apple SD Gothic Neo"/>
-              </a:defRPr>
-            </a:pPr>
-            <a:r>
-              <a:t>• same-set에서는 Top-Disc-40이 ρ=1.000, Top-Disc-25도 ρ=0.964로 매우 강한 upper bound를 보였다.</a:t>
-            </a:r>
-          </a:p>
-          <a:p>
-            <a:pPr>
-              <a:lnSpc>
-                <a:spcPct val="112000"/>
-              </a:lnSpc>
-              <a:spcBef>
-                <a:spcPts val="0"/>
-              </a:spcBef>
-              <a:spcAft>
-                <a:spcPts val="800"/>
-              </a:spcAft>
-              <a:defRPr sz="1600">
-                <a:solidFill>
-                  <a:srgbClr val="363A48"/>
-                </a:solidFill>
-                <a:latin typeface="Apple SD Gothic Neo"/>
-              </a:defRPr>
-            </a:pPr>
-            <a:r>
-              <a:t>• 하지만 11개 모델 풀의 330 split hold-out으로 가면 40문항 mean ρ는 Qwen 0.968, InternLM20B 0.922, GPT-4o-mini 0.959다.</a:t>
-            </a:r>
-          </a:p>
-          <a:p>
-            <a:pPr>
-              <a:lnSpc>
-                <a:spcPct val="112000"/>
-              </a:lnSpc>
-              <a:spcBef>
-                <a:spcPts val="0"/>
-              </a:spcBef>
-              <a:spcAft>
-                <a:spcPts val="800"/>
-              </a:spcAft>
-              <a:defRPr sz="1600">
-                <a:solidFill>
-                  <a:srgbClr val="363A48"/>
-                </a:solidFill>
-                <a:latin typeface="Apple SD Gothic Neo"/>
-              </a:defRPr>
-            </a:pPr>
-            <a:r>
-              <a:t>• 60문항에서는 세 judge 모두 mean ρ≥0.97로 더 안정적이어서, 운영점으로는 60문항이 안전하다.</a:t>
-            </a:r>
-          </a:p>
-        </p:txBody>
-      </p:sp>
-      <p:sp>
-        <p:nvSpPr>
-          <p:cNvPr id="15" name="TextBox 14"/>
-          <p:cNvSpPr txBox="1"/>
-          <p:nvPr/>
-        </p:nvSpPr>
-        <p:spPr>
-          <a:xfrm>
-            <a:off x="566928" y="5623560"/>
-            <a:ext cx="2029968" cy="877824"/>
-          </a:xfrm>
-          <a:prstGeom prst="rect">
-            <a:avLst/>
-          </a:prstGeom>
-          <a:solidFill>
-            <a:srgbClr val="FFFFFF"/>
-          </a:solidFill>
-          <a:ln>
-            <a:solidFill>
-              <a:srgbClr val="DAD4CA"/>
-            </a:solidFill>
-          </a:ln>
-        </p:spPr>
-        <p:txBody>
-          <a:bodyPr wrap="square" lIns="54864" rIns="54864" tIns="54864" bIns="54864" anchor="t">
-            <a:spAutoFit/>
-          </a:bodyPr>
-          <a:lstStyle/>
-          <a:p>
-            <a:pPr algn="l"/>
-            <a:r>
-              <a:rPr sz="1700" b="0">
-                <a:solidFill>
-                  <a:srgbClr val="363A48"/>
-                </a:solidFill>
-                <a:latin typeface="Apple SD Gothic Neo"/>
-              </a:rPr>
-              <a:t/>
-            </a:r>
-          </a:p>
-        </p:txBody>
-      </p:sp>
-      <p:sp>
-        <p:nvSpPr>
-          <p:cNvPr id="16" name="Rectangle 15"/>
-          <p:cNvSpPr/>
-          <p:nvPr/>
-        </p:nvSpPr>
-        <p:spPr>
-          <a:xfrm>
-            <a:off x="676656" y="5733288"/>
-            <a:ext cx="502920" cy="182880"/>
-          </a:xfrm>
-          <a:prstGeom prst="rect">
-            <a:avLst/>
-          </a:prstGeom>
-          <a:solidFill>
-            <a:srgbClr val="375667"/>
-          </a:solidFill>
-          <a:ln>
-            <a:noFill/>
-          </a:ln>
-        </p:spPr>
-        <p:style>
-          <a:lnRef idx="1">
-            <a:schemeClr val="accent1"/>
-          </a:lnRef>
-          <a:fillRef idx="3">
-            <a:schemeClr val="accent1"/>
-          </a:fillRef>
-          <a:effectRef idx="2">
-            <a:schemeClr val="accent1"/>
-          </a:effectRef>
-          <a:fontRef idx="minor">
-            <a:schemeClr val="lt1"/>
-          </a:fontRef>
-        </p:style>
-        <p:txBody>
-          <a:bodyPr rtlCol="0" anchor="ctr"/>
-          <a:lstStyle/>
-          <a:p>
-            <a:pPr algn="ctr"/>
-          </a:p>
-        </p:txBody>
-      </p:sp>
-      <p:sp>
-        <p:nvSpPr>
-          <p:cNvPr id="17" name="TextBox 16"/>
-          <p:cNvSpPr txBox="1"/>
-          <p:nvPr/>
-        </p:nvSpPr>
-        <p:spPr>
-          <a:xfrm>
-            <a:off x="694944" y="5733288"/>
-            <a:ext cx="1691640" cy="182880"/>
-          </a:xfrm>
-          <a:prstGeom prst="rect">
-            <a:avLst/>
-          </a:prstGeom>
-          <a:noFill/>
-          <a:ln>
-            <a:noFill/>
-          </a:ln>
-        </p:spPr>
-        <p:txBody>
-          <a:bodyPr wrap="square" lIns="9144" rIns="9144" tIns="9144" bIns="9144" anchor="ctr">
-            <a:spAutoFit/>
-          </a:bodyPr>
-          <a:lstStyle/>
-          <a:p>
-            <a:pPr algn="l"/>
-            <a:r>
-              <a:rPr sz="900" b="1">
-                <a:solidFill>
-                  <a:srgbClr val="FFFFFF"/>
-                </a:solidFill>
-                <a:latin typeface="Apple SD Gothic Neo"/>
-              </a:rPr>
-              <a:t>40문항</a:t>
-            </a:r>
-          </a:p>
-        </p:txBody>
-      </p:sp>
-      <p:sp>
-        <p:nvSpPr>
-          <p:cNvPr id="18" name="TextBox 17"/>
-          <p:cNvSpPr txBox="1"/>
-          <p:nvPr/>
-        </p:nvSpPr>
-        <p:spPr>
-          <a:xfrm>
-            <a:off x="676656" y="5971032"/>
-            <a:ext cx="1737360" cy="310896"/>
-          </a:xfrm>
-          <a:prstGeom prst="rect">
-            <a:avLst/>
-          </a:prstGeom>
-          <a:noFill/>
-          <a:ln>
-            <a:noFill/>
-          </a:ln>
-        </p:spPr>
-        <p:txBody>
-          <a:bodyPr wrap="square" lIns="9144" rIns="9144" tIns="9144" bIns="9144" anchor="t">
-            <a:spAutoFit/>
-          </a:bodyPr>
-          <a:lstStyle/>
-          <a:p>
-            <a:pPr algn="l"/>
-            <a:r>
-              <a:rPr sz="1900" b="1">
-                <a:solidFill>
-                  <a:srgbClr val="282C3A"/>
-                </a:solidFill>
-                <a:latin typeface="Apple SD Gothic Neo"/>
-              </a:rPr>
-              <a:t>same-set 상한</a:t>
-            </a:r>
-          </a:p>
-        </p:txBody>
-      </p:sp>
-      <p:sp>
-        <p:nvSpPr>
-          <p:cNvPr id="19" name="TextBox 18"/>
-          <p:cNvSpPr txBox="1"/>
-          <p:nvPr/>
-        </p:nvSpPr>
-        <p:spPr>
-          <a:xfrm>
-            <a:off x="2779776" y="5623560"/>
-            <a:ext cx="2029968" cy="877824"/>
-          </a:xfrm>
-          <a:prstGeom prst="rect">
-            <a:avLst/>
-          </a:prstGeom>
-          <a:solidFill>
-            <a:srgbClr val="FFFFFF"/>
-          </a:solidFill>
-          <a:ln>
-            <a:solidFill>
-              <a:srgbClr val="DAD4CA"/>
-            </a:solidFill>
-          </a:ln>
-        </p:spPr>
-        <p:txBody>
-          <a:bodyPr wrap="square" lIns="54864" rIns="54864" tIns="54864" bIns="54864" anchor="t">
-            <a:spAutoFit/>
-          </a:bodyPr>
-          <a:lstStyle/>
-          <a:p>
-            <a:pPr algn="l"/>
-            <a:r>
-              <a:rPr sz="1700" b="0">
-                <a:solidFill>
-                  <a:srgbClr val="363A48"/>
-                </a:solidFill>
-                <a:latin typeface="Apple SD Gothic Neo"/>
-              </a:rPr>
-              <a:t/>
-            </a:r>
-          </a:p>
-        </p:txBody>
-      </p:sp>
-      <p:sp>
-        <p:nvSpPr>
-          <p:cNvPr id="20" name="Rectangle 19"/>
-          <p:cNvSpPr/>
-          <p:nvPr/>
-        </p:nvSpPr>
-        <p:spPr>
-          <a:xfrm>
-            <a:off x="2889504" y="5733288"/>
-            <a:ext cx="502920" cy="182880"/>
-          </a:xfrm>
-          <a:prstGeom prst="rect">
-            <a:avLst/>
-          </a:prstGeom>
-          <a:solidFill>
-            <a:srgbClr val="B5654E"/>
-          </a:solidFill>
-          <a:ln>
-            <a:noFill/>
-          </a:ln>
-        </p:spPr>
-        <p:style>
-          <a:lnRef idx="1">
-            <a:schemeClr val="accent1"/>
-          </a:lnRef>
-          <a:fillRef idx="3">
-            <a:schemeClr val="accent1"/>
-          </a:fillRef>
-          <a:effectRef idx="2">
-            <a:schemeClr val="accent1"/>
-          </a:effectRef>
-          <a:fontRef idx="minor">
-            <a:schemeClr val="lt1"/>
-          </a:fontRef>
-        </p:style>
-        <p:txBody>
-          <a:bodyPr rtlCol="0" anchor="ctr"/>
-          <a:lstStyle/>
-          <a:p>
-            <a:pPr algn="ctr"/>
-          </a:p>
-        </p:txBody>
-      </p:sp>
-      <p:sp>
-        <p:nvSpPr>
-          <p:cNvPr id="21" name="TextBox 20"/>
-          <p:cNvSpPr txBox="1"/>
-          <p:nvPr/>
-        </p:nvSpPr>
-        <p:spPr>
-          <a:xfrm>
-            <a:off x="2907792" y="5733288"/>
-            <a:ext cx="1691640" cy="182880"/>
-          </a:xfrm>
-          <a:prstGeom prst="rect">
-            <a:avLst/>
-          </a:prstGeom>
-          <a:noFill/>
-          <a:ln>
-            <a:noFill/>
-          </a:ln>
-        </p:spPr>
-        <p:txBody>
-          <a:bodyPr wrap="square" lIns="9144" rIns="9144" tIns="9144" bIns="9144" anchor="ctr">
-            <a:spAutoFit/>
-          </a:bodyPr>
-          <a:lstStyle/>
-          <a:p>
-            <a:pPr algn="l"/>
-            <a:r>
-              <a:rPr sz="900" b="1">
-                <a:solidFill>
-                  <a:srgbClr val="FFFFFF"/>
-                </a:solidFill>
-                <a:latin typeface="Apple SD Gothic Neo"/>
-              </a:rPr>
-              <a:t>40문항 hold-out</a:t>
-            </a:r>
-          </a:p>
-        </p:txBody>
-      </p:sp>
-      <p:sp>
-        <p:nvSpPr>
-          <p:cNvPr id="22" name="TextBox 21"/>
-          <p:cNvSpPr txBox="1"/>
-          <p:nvPr/>
-        </p:nvSpPr>
-        <p:spPr>
-          <a:xfrm>
-            <a:off x="2889504" y="5971032"/>
-            <a:ext cx="1737360" cy="310896"/>
-          </a:xfrm>
-          <a:prstGeom prst="rect">
-            <a:avLst/>
-          </a:prstGeom>
-          <a:noFill/>
-          <a:ln>
-            <a:noFill/>
-          </a:ln>
-        </p:spPr>
-        <p:txBody>
-          <a:bodyPr wrap="square" lIns="9144" rIns="9144" tIns="9144" bIns="9144" anchor="t">
-            <a:spAutoFit/>
-          </a:bodyPr>
-          <a:lstStyle/>
-          <a:p>
-            <a:pPr algn="l"/>
-            <a:r>
-              <a:rPr sz="1900" b="1">
-                <a:solidFill>
-                  <a:srgbClr val="282C3A"/>
-                </a:solidFill>
-                <a:latin typeface="Apple SD Gothic Neo"/>
-              </a:rPr>
-              <a:t>judge별 편차</a:t>
-            </a:r>
-          </a:p>
-        </p:txBody>
-      </p:sp>
-      <p:sp>
-        <p:nvSpPr>
-          <p:cNvPr id="23" name="TextBox 22"/>
-          <p:cNvSpPr txBox="1"/>
-          <p:nvPr/>
-        </p:nvSpPr>
-        <p:spPr>
-          <a:xfrm>
-            <a:off x="4992624" y="5623560"/>
-            <a:ext cx="2029968" cy="877824"/>
-          </a:xfrm>
-          <a:prstGeom prst="rect">
-            <a:avLst/>
-          </a:prstGeom>
-          <a:solidFill>
-            <a:srgbClr val="FFFFFF"/>
-          </a:solidFill>
-          <a:ln>
-            <a:solidFill>
-              <a:srgbClr val="DAD4CA"/>
-            </a:solidFill>
-          </a:ln>
-        </p:spPr>
-        <p:txBody>
-          <a:bodyPr wrap="square" lIns="54864" rIns="54864" tIns="54864" bIns="54864" anchor="t">
-            <a:spAutoFit/>
-          </a:bodyPr>
-          <a:lstStyle/>
-          <a:p>
-            <a:pPr algn="l"/>
-            <a:r>
-              <a:rPr sz="1700" b="0">
-                <a:solidFill>
-                  <a:srgbClr val="363A48"/>
-                </a:solidFill>
-                <a:latin typeface="Apple SD Gothic Neo"/>
-              </a:rPr>
-              <a:t/>
-            </a:r>
-          </a:p>
-        </p:txBody>
-      </p:sp>
-      <p:sp>
-        <p:nvSpPr>
-          <p:cNvPr id="24" name="Rectangle 23"/>
-          <p:cNvSpPr/>
-          <p:nvPr/>
-        </p:nvSpPr>
-        <p:spPr>
-          <a:xfrm>
-            <a:off x="5102352" y="5733288"/>
-            <a:ext cx="502920" cy="182880"/>
-          </a:xfrm>
-          <a:prstGeom prst="rect">
-            <a:avLst/>
-          </a:prstGeom>
-          <a:solidFill>
-            <a:srgbClr val="BF9A5E"/>
-          </a:solidFill>
-          <a:ln>
-            <a:noFill/>
-          </a:ln>
-        </p:spPr>
-        <p:style>
-          <a:lnRef idx="1">
-            <a:schemeClr val="accent1"/>
-          </a:lnRef>
-          <a:fillRef idx="3">
-            <a:schemeClr val="accent1"/>
-          </a:fillRef>
-          <a:effectRef idx="2">
-            <a:schemeClr val="accent1"/>
-          </a:effectRef>
-          <a:fontRef idx="minor">
-            <a:schemeClr val="lt1"/>
-          </a:fontRef>
-        </p:style>
-        <p:txBody>
-          <a:bodyPr rtlCol="0" anchor="ctr"/>
-          <a:lstStyle/>
-          <a:p>
-            <a:pPr algn="ctr"/>
-          </a:p>
-        </p:txBody>
-      </p:sp>
-      <p:sp>
-        <p:nvSpPr>
-          <p:cNvPr id="25" name="TextBox 24"/>
-          <p:cNvSpPr txBox="1"/>
-          <p:nvPr/>
-        </p:nvSpPr>
-        <p:spPr>
-          <a:xfrm>
-            <a:off x="5120640" y="5733288"/>
-            <a:ext cx="1691640" cy="182880"/>
-          </a:xfrm>
-          <a:prstGeom prst="rect">
-            <a:avLst/>
-          </a:prstGeom>
-          <a:noFill/>
-          <a:ln>
-            <a:noFill/>
-          </a:ln>
-        </p:spPr>
-        <p:txBody>
-          <a:bodyPr wrap="square" lIns="9144" rIns="9144" tIns="9144" bIns="9144" anchor="ctr">
-            <a:spAutoFit/>
-          </a:bodyPr>
-          <a:lstStyle/>
-          <a:p>
-            <a:pPr algn="l"/>
-            <a:r>
-              <a:rPr sz="900" b="1">
-                <a:solidFill>
-                  <a:srgbClr val="FFFFFF"/>
-                </a:solidFill>
-                <a:latin typeface="Apple SD Gothic Neo"/>
-              </a:rPr>
-              <a:t>60문항</a:t>
-            </a:r>
-          </a:p>
-        </p:txBody>
-      </p:sp>
-      <p:sp>
-        <p:nvSpPr>
-          <p:cNvPr id="26" name="TextBox 25"/>
-          <p:cNvSpPr txBox="1"/>
-          <p:nvPr/>
-        </p:nvSpPr>
-        <p:spPr>
-          <a:xfrm>
-            <a:off x="5102352" y="5971032"/>
-            <a:ext cx="1737360" cy="310896"/>
-          </a:xfrm>
-          <a:prstGeom prst="rect">
-            <a:avLst/>
-          </a:prstGeom>
-          <a:noFill/>
-          <a:ln>
-            <a:noFill/>
-          </a:ln>
-        </p:spPr>
-        <p:txBody>
-          <a:bodyPr wrap="square" lIns="9144" rIns="9144" tIns="9144" bIns="9144" anchor="t">
-            <a:spAutoFit/>
-          </a:bodyPr>
-          <a:lstStyle/>
-          <a:p>
-            <a:pPr algn="l"/>
-            <a:r>
-              <a:rPr sz="1900" b="1">
-                <a:solidFill>
-                  <a:srgbClr val="282C3A"/>
-                </a:solidFill>
-                <a:latin typeface="Apple SD Gothic Neo"/>
-              </a:rPr>
-              <a:t>세 judge 모두 안정</a:t>
-            </a:r>
-          </a:p>
-        </p:txBody>
-      </p:sp>
-      <p:sp>
-        <p:nvSpPr>
-          <p:cNvPr id="27" name="TextBox 26"/>
-          <p:cNvSpPr txBox="1"/>
-          <p:nvPr/>
-        </p:nvSpPr>
-        <p:spPr>
-          <a:xfrm>
-            <a:off x="7205472" y="5623560"/>
-            <a:ext cx="2029968" cy="877824"/>
-          </a:xfrm>
-          <a:prstGeom prst="rect">
-            <a:avLst/>
-          </a:prstGeom>
-          <a:solidFill>
-            <a:srgbClr val="FFFFFF"/>
-          </a:solidFill>
-          <a:ln>
-            <a:solidFill>
-              <a:srgbClr val="DAD4CA"/>
-            </a:solidFill>
-          </a:ln>
-        </p:spPr>
-        <p:txBody>
-          <a:bodyPr wrap="square" lIns="54864" rIns="54864" tIns="54864" bIns="54864" anchor="t">
-            <a:spAutoFit/>
-          </a:bodyPr>
-          <a:lstStyle/>
-          <a:p>
-            <a:pPr algn="l"/>
-            <a:r>
-              <a:rPr sz="1700" b="0">
-                <a:solidFill>
-                  <a:srgbClr val="363A48"/>
-                </a:solidFill>
-                <a:latin typeface="Apple SD Gothic Neo"/>
-              </a:rPr>
-              <a:t/>
-            </a:r>
-          </a:p>
-        </p:txBody>
-      </p:sp>
-      <p:sp>
-        <p:nvSpPr>
-          <p:cNvPr id="28" name="Rectangle 27"/>
-          <p:cNvSpPr/>
-          <p:nvPr/>
-        </p:nvSpPr>
-        <p:spPr>
-          <a:xfrm>
-            <a:off x="7315200" y="5733288"/>
-            <a:ext cx="502920" cy="182880"/>
-          </a:xfrm>
-          <a:prstGeom prst="rect">
-            <a:avLst/>
-          </a:prstGeom>
-          <a:solidFill>
-            <a:srgbClr val="668185"/>
-          </a:solidFill>
-          <a:ln>
-            <a:noFill/>
-          </a:ln>
-        </p:spPr>
-        <p:style>
-          <a:lnRef idx="1">
-            <a:schemeClr val="accent1"/>
-          </a:lnRef>
-          <a:fillRef idx="3">
-            <a:schemeClr val="accent1"/>
-          </a:fillRef>
-          <a:effectRef idx="2">
-            <a:schemeClr val="accent1"/>
-          </a:effectRef>
-          <a:fontRef idx="minor">
-            <a:schemeClr val="lt1"/>
-          </a:fontRef>
-        </p:style>
-        <p:txBody>
-          <a:bodyPr rtlCol="0" anchor="ctr"/>
-          <a:lstStyle/>
-          <a:p>
-            <a:pPr algn="ctr"/>
-          </a:p>
-        </p:txBody>
-      </p:sp>
-      <p:sp>
-        <p:nvSpPr>
-          <p:cNvPr id="29" name="TextBox 28"/>
-          <p:cNvSpPr txBox="1"/>
-          <p:nvPr/>
-        </p:nvSpPr>
-        <p:spPr>
-          <a:xfrm>
-            <a:off x="7333488" y="5733288"/>
-            <a:ext cx="1691640" cy="182880"/>
-          </a:xfrm>
-          <a:prstGeom prst="rect">
-            <a:avLst/>
-          </a:prstGeom>
-          <a:noFill/>
-          <a:ln>
-            <a:noFill/>
-          </a:ln>
-        </p:spPr>
-        <p:txBody>
-          <a:bodyPr wrap="square" lIns="9144" rIns="9144" tIns="9144" bIns="9144" anchor="ctr">
-            <a:spAutoFit/>
-          </a:bodyPr>
-          <a:lstStyle/>
-          <a:p>
-            <a:pPr algn="l"/>
-            <a:r>
-              <a:rPr sz="900" b="1">
-                <a:solidFill>
-                  <a:srgbClr val="FFFFFF"/>
-                </a:solidFill>
-                <a:latin typeface="Apple SD Gothic Neo"/>
-              </a:rPr>
-              <a:t>Split</a:t>
-            </a:r>
-          </a:p>
-        </p:txBody>
-      </p:sp>
-      <p:sp>
-        <p:nvSpPr>
-          <p:cNvPr id="30" name="TextBox 29"/>
-          <p:cNvSpPr txBox="1"/>
-          <p:nvPr/>
-        </p:nvSpPr>
-        <p:spPr>
-          <a:xfrm>
-            <a:off x="7315200" y="5971032"/>
-            <a:ext cx="1737360" cy="310896"/>
-          </a:xfrm>
-          <a:prstGeom prst="rect">
-            <a:avLst/>
-          </a:prstGeom>
-          <a:noFill/>
-          <a:ln>
-            <a:noFill/>
-          </a:ln>
-        </p:spPr>
-        <p:txBody>
-          <a:bodyPr wrap="square" lIns="9144" rIns="9144" tIns="9144" bIns="9144" anchor="t">
-            <a:spAutoFit/>
-          </a:bodyPr>
-          <a:lstStyle/>
-          <a:p>
-            <a:pPr algn="l"/>
-            <a:r>
-              <a:rPr sz="1900" b="1">
-                <a:solidFill>
-                  <a:srgbClr val="282C3A"/>
-                </a:solidFill>
-                <a:latin typeface="Apple SD Gothic Neo"/>
-              </a:rPr>
-              <a:t>330</a:t>
-            </a:r>
-          </a:p>
-        </p:txBody>
-      </p:sp>
-    </p:spTree>
-  </p:cSld>
-  <p:clrMapOvr>
-    <a:masterClrMapping/>
-  </p:clrMapOvr>
-</p:sld>
-</file>
-
-<file path=ppt/slides/slide17.xml><?xml version="1.0" encoding="utf-8"?>
-<p:sld xmlns:a="http://schemas.openxmlformats.org/drawingml/2006/main" xmlns:p="http://schemas.openxmlformats.org/presentationml/2006/main" xmlns:r="http://schemas.openxmlformats.org/officeDocument/2006/relationships">
-  <p:cSld>
-    <p:bg>
-      <p:bgPr>
-        <a:solidFill>
-          <a:srgbClr val="EFF4F6"/>
-        </a:solidFill>
-        <a:effectLst/>
-      </p:bgPr>
-    </p:bg>
-    <p:spTree>
-      <p:nvGrpSpPr>
-        <p:cNvPr id="1" name=""/>
-        <p:cNvGrpSpPr/>
-        <p:nvPr/>
-      </p:nvGrpSpPr>
-      <p:grpSpPr/>
-      <p:sp>
-        <p:nvSpPr>
-          <p:cNvPr id="2" name="Rectangle 1"/>
-          <p:cNvSpPr/>
-          <p:nvPr/>
-        </p:nvSpPr>
-        <p:spPr>
-          <a:xfrm>
-            <a:off x="329184" y="384048"/>
-            <a:ext cx="128016" cy="841248"/>
-          </a:xfrm>
-          <a:prstGeom prst="rect">
-            <a:avLst/>
-          </a:prstGeom>
-          <a:solidFill>
-            <a:srgbClr val="3B586E"/>
-          </a:solidFill>
-          <a:ln>
-            <a:noFill/>
-          </a:ln>
-        </p:spPr>
-        <p:style>
-          <a:lnRef idx="1">
-            <a:schemeClr val="accent1"/>
-          </a:lnRef>
-          <a:fillRef idx="3">
-            <a:schemeClr val="accent1"/>
-          </a:fillRef>
-          <a:effectRef idx="2">
-            <a:schemeClr val="accent1"/>
-          </a:effectRef>
-          <a:fontRef idx="minor">
-            <a:schemeClr val="lt1"/>
-          </a:fontRef>
-        </p:style>
-        <p:txBody>
-          <a:bodyPr rtlCol="0" anchor="ctr"/>
-          <a:lstStyle/>
-          <a:p>
-            <a:pPr algn="ctr"/>
-          </a:p>
-        </p:txBody>
-      </p:sp>
-      <p:sp>
-        <p:nvSpPr>
-          <p:cNvPr id="3" name="Rectangle 2"/>
-          <p:cNvSpPr/>
-          <p:nvPr/>
-        </p:nvSpPr>
-        <p:spPr>
-          <a:xfrm>
-            <a:off x="329184" y="182880"/>
-            <a:ext cx="11384280" cy="36576"/>
-          </a:xfrm>
-          <a:prstGeom prst="rect">
-            <a:avLst/>
-          </a:prstGeom>
-          <a:solidFill>
-            <a:srgbClr val="DAD4CA"/>
-          </a:solidFill>
-          <a:ln>
-            <a:noFill/>
-          </a:ln>
-        </p:spPr>
-        <p:style>
-          <a:lnRef idx="1">
-            <a:schemeClr val="accent1"/>
-          </a:lnRef>
-          <a:fillRef idx="3">
-            <a:schemeClr val="accent1"/>
-          </a:fillRef>
-          <a:effectRef idx="2">
-            <a:schemeClr val="accent1"/>
-          </a:effectRef>
-          <a:fontRef idx="minor">
-            <a:schemeClr val="lt1"/>
-          </a:fontRef>
-        </p:style>
-        <p:txBody>
-          <a:bodyPr rtlCol="0" anchor="ctr"/>
-          <a:lstStyle/>
-          <a:p>
-            <a:pPr algn="ctr"/>
-          </a:p>
-        </p:txBody>
-      </p:sp>
-      <p:sp>
-        <p:nvSpPr>
-          <p:cNvPr id="4" name="TextBox 3"/>
-          <p:cNvSpPr txBox="1"/>
-          <p:nvPr/>
-        </p:nvSpPr>
-        <p:spPr>
-          <a:xfrm>
-            <a:off x="621792" y="329184"/>
-            <a:ext cx="8595360" cy="530352"/>
-          </a:xfrm>
-          <a:prstGeom prst="rect">
-            <a:avLst/>
-          </a:prstGeom>
-          <a:noFill/>
-          <a:ln>
-            <a:noFill/>
-          </a:ln>
-        </p:spPr>
-        <p:txBody>
-          <a:bodyPr wrap="square" lIns="0" rIns="0" tIns="0" bIns="0" anchor="t">
-            <a:spAutoFit/>
-          </a:bodyPr>
-          <a:lstStyle/>
-          <a:p>
-            <a:pPr algn="l"/>
-            <a:r>
-              <a:rPr sz="2400" b="1">
-                <a:solidFill>
-                  <a:srgbClr val="282C3A"/>
-                </a:solidFill>
-                <a:latin typeface="Apple SD Gothic Neo"/>
-              </a:rPr>
-              <a:t>4. 무엇을 믿고 무엇을 조심해야 하나</a:t>
-            </a:r>
-          </a:p>
-        </p:txBody>
-      </p:sp>
-      <p:sp>
-        <p:nvSpPr>
-          <p:cNvPr id="5" name="TextBox 4"/>
-          <p:cNvSpPr txBox="1"/>
-          <p:nvPr/>
-        </p:nvSpPr>
-        <p:spPr>
-          <a:xfrm>
-            <a:off x="9601200" y="402336"/>
-            <a:ext cx="1417320" cy="201168"/>
-          </a:xfrm>
-          <a:prstGeom prst="rect">
-            <a:avLst/>
-          </a:prstGeom>
-          <a:solidFill>
-            <a:srgbClr val="E2EAEF"/>
-          </a:solidFill>
-          <a:ln>
-            <a:solidFill>
-              <a:srgbClr val="E2EAEF"/>
-            </a:solidFill>
-          </a:ln>
-        </p:spPr>
-        <p:txBody>
-          <a:bodyPr wrap="square" lIns="9144" rIns="9144" tIns="9144" bIns="9144" anchor="ctr">
-            <a:spAutoFit/>
-          </a:bodyPr>
-          <a:lstStyle/>
-          <a:p>
-            <a:pPr algn="ctr"/>
-            <a:r>
-              <a:rPr sz="1000" b="1">
-                <a:solidFill>
-                  <a:srgbClr val="282C3A"/>
-                </a:solidFill>
-                <a:latin typeface="Apple SD Gothic Neo"/>
-              </a:rPr>
-              <a:t>Lab Meeting</a:t>
-            </a:r>
-          </a:p>
-        </p:txBody>
-      </p:sp>
-      <p:sp>
-        <p:nvSpPr>
-          <p:cNvPr id="6" name="TextBox 5"/>
-          <p:cNvSpPr txBox="1"/>
-          <p:nvPr/>
-        </p:nvSpPr>
-        <p:spPr>
-          <a:xfrm>
-            <a:off x="11064240" y="420624"/>
-            <a:ext cx="685800" cy="164592"/>
-          </a:xfrm>
-          <a:prstGeom prst="rect">
-            <a:avLst/>
-          </a:prstGeom>
-          <a:noFill/>
-          <a:ln>
-            <a:noFill/>
-          </a:ln>
-        </p:spPr>
-        <p:txBody>
-          <a:bodyPr wrap="square" lIns="0" rIns="0" tIns="0" bIns="0" anchor="ctr">
-            <a:spAutoFit/>
-          </a:bodyPr>
-          <a:lstStyle/>
-          <a:p>
-            <a:pPr algn="r"/>
-            <a:r>
-              <a:rPr sz="1000" b="1">
-                <a:solidFill>
-                  <a:srgbClr val="70767D"/>
-                </a:solidFill>
-                <a:latin typeface="Apple SD Gothic Neo"/>
-              </a:rPr>
-              <a:t>17/18</a:t>
-            </a:r>
-          </a:p>
-        </p:txBody>
-      </p:sp>
-      <p:sp>
-        <p:nvSpPr>
-          <p:cNvPr id="7" name="Rectangle 6"/>
-          <p:cNvSpPr/>
-          <p:nvPr/>
-        </p:nvSpPr>
-        <p:spPr>
-          <a:xfrm>
-            <a:off x="475488" y="6419088"/>
-            <a:ext cx="11201400" cy="36576"/>
-          </a:xfrm>
-          <a:prstGeom prst="rect">
-            <a:avLst/>
-          </a:prstGeom>
-          <a:solidFill>
-            <a:srgbClr val="DAD4CA"/>
-          </a:solidFill>
-          <a:ln>
-            <a:noFill/>
-          </a:ln>
-        </p:spPr>
-        <p:style>
-          <a:lnRef idx="1">
-            <a:schemeClr val="accent1"/>
-          </a:lnRef>
-          <a:fillRef idx="3">
-            <a:schemeClr val="accent1"/>
-          </a:fillRef>
-          <a:effectRef idx="2">
-            <a:schemeClr val="accent1"/>
-          </a:effectRef>
-          <a:fontRef idx="minor">
-            <a:schemeClr val="lt1"/>
-          </a:fontRef>
-        </p:style>
-        <p:txBody>
-          <a:bodyPr rtlCol="0" anchor="ctr"/>
-          <a:lstStyle/>
-          <a:p>
-            <a:pPr algn="ctr"/>
-          </a:p>
-        </p:txBody>
-      </p:sp>
-      <p:sp>
-        <p:nvSpPr>
-          <p:cNvPr id="8" name="TextBox 7"/>
-          <p:cNvSpPr txBox="1"/>
-          <p:nvPr/>
-        </p:nvSpPr>
-        <p:spPr>
-          <a:xfrm>
-            <a:off x="502920" y="6455664"/>
-            <a:ext cx="4663440" cy="164592"/>
-          </a:xfrm>
-          <a:prstGeom prst="rect">
-            <a:avLst/>
-          </a:prstGeom>
-          <a:noFill/>
-          <a:ln>
-            <a:noFill/>
-          </a:ln>
-        </p:spPr>
-        <p:txBody>
-          <a:bodyPr wrap="square" lIns="0" rIns="0" tIns="0" bIns="0" anchor="t">
-            <a:spAutoFit/>
-          </a:bodyPr>
-          <a:lstStyle/>
-          <a:p>
-            <a:pPr algn="l"/>
-            <a:r>
-              <a:rPr sz="800" b="0">
-                <a:solidFill>
-                  <a:srgbClr val="70767D"/>
-                </a:solidFill>
-                <a:latin typeface="Apple SD Gothic Neo"/>
-              </a:rPr>
-              <a:t>Lab meeting | my reproduction and extensions</a:t>
-            </a:r>
-          </a:p>
-        </p:txBody>
-      </p:sp>
-      <p:sp>
-        <p:nvSpPr>
-          <p:cNvPr id="9" name="TextBox 8"/>
-          <p:cNvSpPr txBox="1"/>
-          <p:nvPr/>
-        </p:nvSpPr>
-        <p:spPr>
-          <a:xfrm>
-            <a:off x="438912" y="694944"/>
-            <a:ext cx="11292840" cy="365760"/>
-          </a:xfrm>
-          <a:prstGeom prst="rect">
-            <a:avLst/>
-          </a:prstGeom>
-          <a:solidFill>
-            <a:srgbClr val="E2EAEF"/>
-          </a:solidFill>
-          <a:ln>
-            <a:solidFill>
-              <a:srgbClr val="E2EAEF"/>
-            </a:solidFill>
-          </a:ln>
-        </p:spPr>
-        <p:txBody>
-          <a:bodyPr wrap="square" lIns="27432" rIns="27432" tIns="27432" bIns="27432" anchor="ctr">
-            <a:spAutoFit/>
-          </a:bodyPr>
-          <a:lstStyle/>
-          <a:p>
-            <a:pPr algn="l"/>
-            <a:r>
-              <a:rPr sz="1200" b="1">
-                <a:solidFill>
-                  <a:srgbClr val="282C3A"/>
-                </a:solidFill>
-                <a:latin typeface="Apple SD Gothic Neo"/>
-              </a:rPr>
-              <a:t>이 슬라이드의 목적: 주장의 범위를 통제하고 paper study의 비판적 결론을 남긴다.</a:t>
-            </a:r>
-          </a:p>
-        </p:txBody>
-      </p:sp>
-      <p:sp>
-        <p:nvSpPr>
-          <p:cNvPr id="10" name="TextBox 9"/>
-          <p:cNvSpPr txBox="1"/>
-          <p:nvPr/>
-        </p:nvSpPr>
-        <p:spPr>
-          <a:xfrm>
-            <a:off x="502920" y="1298448"/>
-            <a:ext cx="11155680" cy="493776"/>
-          </a:xfrm>
-          <a:prstGeom prst="rect">
-            <a:avLst/>
-          </a:prstGeom>
-          <a:solidFill>
-            <a:srgbClr val="E2EAEF"/>
-          </a:solidFill>
-          <a:ln>
-            <a:solidFill>
-              <a:srgbClr val="E2EAEF"/>
-            </a:solidFill>
-          </a:ln>
-        </p:spPr>
-        <p:txBody>
-          <a:bodyPr wrap="square" lIns="64008" rIns="64008" tIns="64008" bIns="64008" anchor="ctr">
-            <a:spAutoFit/>
-          </a:bodyPr>
-          <a:lstStyle/>
-          <a:p>
-            <a:pPr algn="l"/>
-            <a:r>
-              <a:rPr sz="1700" b="1">
-                <a:solidFill>
-                  <a:srgbClr val="282C3A"/>
-                </a:solidFill>
-                <a:latin typeface="Apple SD Gothic Neo"/>
-              </a:rPr>
-              <a:t>좋은 재현 연구는 강한 결과를 크게 말하되, 그 결과가 무너지기 쉬운 경계를 먼저 분명히 그어 줍니다.</a:t>
-            </a:r>
-          </a:p>
-        </p:txBody>
-      </p:sp>
-      <p:sp>
-        <p:nvSpPr>
-          <p:cNvPr id="11" name="TextBox 10"/>
-          <p:cNvSpPr txBox="1"/>
-          <p:nvPr/>
-        </p:nvSpPr>
-        <p:spPr>
-          <a:xfrm>
-            <a:off x="502920" y="1975104"/>
-            <a:ext cx="5440680" cy="4315968"/>
-          </a:xfrm>
-          <a:prstGeom prst="rect">
-            <a:avLst/>
-          </a:prstGeom>
-          <a:solidFill>
-            <a:srgbClr val="FFFFFF"/>
-          </a:solidFill>
-          <a:ln>
-            <a:solidFill>
-              <a:srgbClr val="DAD4CA"/>
-            </a:solidFill>
-          </a:ln>
-        </p:spPr>
-        <p:txBody>
-          <a:bodyPr wrap="square" lIns="118872" rIns="118872" tIns="118872" bIns="118872" anchor="t">
-            <a:spAutoFit/>
-          </a:bodyPr>
-          <a:lstStyle/>
-          <a:p>
-            <a:pPr algn="l"/>
-            <a:r>
-              <a:rPr sz="1700" b="0">
-                <a:solidFill>
-                  <a:srgbClr val="363A48"/>
-                </a:solidFill>
-                <a:latin typeface="Apple SD Gothic Neo"/>
-              </a:rPr>
-              <a:t/>
-            </a:r>
-          </a:p>
-        </p:txBody>
-      </p:sp>
-      <p:sp>
-        <p:nvSpPr>
-          <p:cNvPr id="12" name="TextBox 11"/>
-          <p:cNvSpPr txBox="1"/>
-          <p:nvPr/>
-        </p:nvSpPr>
-        <p:spPr>
-          <a:xfrm>
-            <a:off x="594360" y="2084832"/>
-            <a:ext cx="5212080" cy="237744"/>
-          </a:xfrm>
-          <a:prstGeom prst="rect">
-            <a:avLst/>
-          </a:prstGeom>
-          <a:noFill/>
-          <a:ln>
-            <a:noFill/>
-          </a:ln>
-        </p:spPr>
-        <p:txBody>
-          <a:bodyPr wrap="square" lIns="0" rIns="0" tIns="0" bIns="0" anchor="t">
-            <a:spAutoFit/>
-          </a:bodyPr>
-          <a:lstStyle/>
-          <a:p>
-            <a:pPr algn="l"/>
-            <a:r>
-              <a:rPr sz="1800" b="1">
-                <a:solidFill>
-                  <a:srgbClr val="282C3A"/>
-                </a:solidFill>
-                <a:latin typeface="Apple SD Gothic Neo"/>
-              </a:rPr>
-              <a:t>지금 믿어도 되는 결론</a:t>
-            </a:r>
-          </a:p>
-        </p:txBody>
-      </p:sp>
-      <p:sp>
-        <p:nvSpPr>
-          <p:cNvPr id="13" name="TextBox 12"/>
-          <p:cNvSpPr txBox="1"/>
-          <p:nvPr/>
-        </p:nvSpPr>
-        <p:spPr>
-          <a:xfrm>
-            <a:off x="594360" y="2450592"/>
-            <a:ext cx="5212080" cy="3520440"/>
-          </a:xfrm>
-          <a:prstGeom prst="rect">
-            <a:avLst/>
-          </a:prstGeom>
-          <a:noFill/>
-          <a:ln>
-            <a:noFill/>
-          </a:ln>
-        </p:spPr>
-        <p:txBody>
-          <a:bodyPr wrap="square" lIns="0" rIns="0" tIns="0" bIns="0" anchor="t">
-            <a:spAutoFit/>
-          </a:bodyPr>
-          <a:lstStyle/>
-          <a:p>
-            <a:pPr algn="l">
-              <a:lnSpc>
-                <a:spcPct val="112000"/>
-              </a:lnSpc>
-              <a:spcBef>
-                <a:spcPts val="0"/>
-              </a:spcBef>
-              <a:spcAft>
-                <a:spcPts val="800"/>
-              </a:spcAft>
-              <a:defRPr sz="1700">
-                <a:solidFill>
-                  <a:srgbClr val="363A48"/>
-                </a:solidFill>
-                <a:latin typeface="Apple SD Gothic Neo"/>
-              </a:defRPr>
-            </a:pPr>
-            <a:r>
-              <a:t>• Qwen same-family에서는 judge가 커질수록 pairwise inconsistency가 뚜렷하게 줄어든다.</a:t>
-            </a:r>
-          </a:p>
-          <a:p>
-            <a:pPr>
-              <a:lnSpc>
-                <a:spcPct val="112000"/>
-              </a:lnSpc>
-              <a:spcBef>
-                <a:spcPts val="0"/>
-              </a:spcBef>
-              <a:spcAft>
-                <a:spcPts val="800"/>
-              </a:spcAft>
-              <a:defRPr sz="1700">
-                <a:solidFill>
-                  <a:srgbClr val="363A48"/>
-                </a:solidFill>
-                <a:latin typeface="Apple SD Gothic Neo"/>
-              </a:defRPr>
-            </a:pPr>
-            <a:r>
-              <a:t>• GPT-4o-mini와 InternLM20B를 붙여도 broad rank pattern은 대체로 유지된다.</a:t>
-            </a:r>
-          </a:p>
-          <a:p>
-            <a:pPr>
-              <a:lnSpc>
-                <a:spcPct val="112000"/>
-              </a:lnSpc>
-              <a:spcBef>
-                <a:spcPts val="0"/>
-              </a:spcBef>
-              <a:spcAft>
-                <a:spcPts val="800"/>
-              </a:spcAft>
-              <a:defRPr sz="1700">
-                <a:solidFill>
-                  <a:srgbClr val="363A48"/>
-                </a:solidFill>
-                <a:latin typeface="Apple SD Gothic Neo"/>
-              </a:defRPr>
-            </a:pPr>
-            <a:r>
-              <a:t>• Repeated hold-out 기준 tinyMT 운영점은 60문항이 가장 안전하다.</a:t>
-            </a:r>
-          </a:p>
-        </p:txBody>
-      </p:sp>
-      <p:sp>
-        <p:nvSpPr>
-          <p:cNvPr id="14" name="TextBox 13"/>
-          <p:cNvSpPr txBox="1"/>
-          <p:nvPr/>
-        </p:nvSpPr>
-        <p:spPr>
-          <a:xfrm>
-            <a:off x="6108192" y="1975104"/>
-            <a:ext cx="5440680" cy="4315968"/>
-          </a:xfrm>
-          <a:prstGeom prst="rect">
-            <a:avLst/>
-          </a:prstGeom>
-          <a:solidFill>
-            <a:srgbClr val="FFFFFF"/>
-          </a:solidFill>
-          <a:ln>
-            <a:solidFill>
-              <a:srgbClr val="DAD4CA"/>
-            </a:solidFill>
-          </a:ln>
-        </p:spPr>
-        <p:txBody>
-          <a:bodyPr wrap="square" lIns="118872" rIns="118872" tIns="118872" bIns="118872" anchor="t">
-            <a:spAutoFit/>
-          </a:bodyPr>
-          <a:lstStyle/>
-          <a:p>
-            <a:pPr algn="l"/>
-            <a:r>
-              <a:rPr sz="1700" b="0">
-                <a:solidFill>
-                  <a:srgbClr val="363A48"/>
-                </a:solidFill>
-                <a:latin typeface="Apple SD Gothic Neo"/>
-              </a:rPr>
-              <a:t/>
-            </a:r>
-          </a:p>
-        </p:txBody>
-      </p:sp>
-      <p:sp>
-        <p:nvSpPr>
-          <p:cNvPr id="15" name="TextBox 14"/>
-          <p:cNvSpPr txBox="1"/>
-          <p:nvPr/>
-        </p:nvSpPr>
-        <p:spPr>
-          <a:xfrm>
-            <a:off x="6199632" y="2084832"/>
-            <a:ext cx="5212080" cy="237744"/>
-          </a:xfrm>
-          <a:prstGeom prst="rect">
-            <a:avLst/>
-          </a:prstGeom>
-          <a:noFill/>
-          <a:ln>
-            <a:noFill/>
-          </a:ln>
-        </p:spPr>
-        <p:txBody>
-          <a:bodyPr wrap="square" lIns="0" rIns="0" tIns="0" bIns="0" anchor="t">
-            <a:spAutoFit/>
-          </a:bodyPr>
-          <a:lstStyle/>
-          <a:p>
-            <a:pPr algn="l"/>
-            <a:r>
-              <a:rPr sz="1800" b="1">
-                <a:solidFill>
-                  <a:srgbClr val="282C3A"/>
-                </a:solidFill>
-                <a:latin typeface="Apple SD Gothic Neo"/>
-              </a:rPr>
-              <a:t>지금 강하게 말하면 안 되는 결론</a:t>
-            </a:r>
-          </a:p>
-        </p:txBody>
-      </p:sp>
-      <p:sp>
-        <p:nvSpPr>
-          <p:cNvPr id="16" name="TextBox 15"/>
-          <p:cNvSpPr txBox="1"/>
-          <p:nvPr/>
-        </p:nvSpPr>
-        <p:spPr>
-          <a:xfrm>
-            <a:off x="6199632" y="2450592"/>
-            <a:ext cx="5212080" cy="3520440"/>
-          </a:xfrm>
-          <a:prstGeom prst="rect">
-            <a:avLst/>
-          </a:prstGeom>
-          <a:noFill/>
-          <a:ln>
-            <a:noFill/>
-          </a:ln>
-        </p:spPr>
-        <p:txBody>
-          <a:bodyPr wrap="square" lIns="0" rIns="0" tIns="0" bIns="0" anchor="t">
-            <a:spAutoFit/>
-          </a:bodyPr>
-          <a:lstStyle/>
-          <a:p>
-            <a:pPr algn="l">
-              <a:lnSpc>
-                <a:spcPct val="112000"/>
-              </a:lnSpc>
-              <a:spcBef>
-                <a:spcPts val="0"/>
-              </a:spcBef>
-              <a:spcAft>
-                <a:spcPts val="800"/>
-              </a:spcAft>
-              <a:defRPr sz="1700">
-                <a:solidFill>
-                  <a:srgbClr val="363A48"/>
-                </a:solidFill>
-                <a:latin typeface="Apple SD Gothic Neo"/>
-              </a:defRPr>
-            </a:pPr>
-            <a:r>
-              <a:t>• 모든 open-source judge에서 보편적인 scaling law가 성립한다고 말할 수는 없다.</a:t>
-            </a:r>
-          </a:p>
-          <a:p>
-            <a:pPr>
-              <a:lnSpc>
-                <a:spcPct val="112000"/>
-              </a:lnSpc>
-              <a:spcBef>
-                <a:spcPts val="0"/>
-              </a:spcBef>
-              <a:spcAft>
-                <a:spcPts val="800"/>
-              </a:spcAft>
-              <a:defRPr sz="1700">
-                <a:solidFill>
-                  <a:srgbClr val="363A48"/>
-                </a:solidFill>
-                <a:latin typeface="Apple SD Gothic Neo"/>
-              </a:defRPr>
-            </a:pPr>
-            <a:r>
-              <a:t>• 현재 모델 풀로 70B급, code-specialist, multilingual까지 일반화하긴 이르다.</a:t>
-            </a:r>
-          </a:p>
-          <a:p>
-            <a:pPr>
-              <a:lnSpc>
-                <a:spcPct val="112000"/>
-              </a:lnSpc>
-              <a:spcBef>
-                <a:spcPts val="0"/>
-              </a:spcBef>
-              <a:spcAft>
-                <a:spcPts val="800"/>
-              </a:spcAft>
-              <a:defRPr sz="1700">
-                <a:solidFill>
-                  <a:srgbClr val="363A48"/>
-                </a:solidFill>
-                <a:latin typeface="Apple SD Gothic Neo"/>
-              </a:defRPr>
-            </a:pPr>
-            <a:r>
-              <a:t>• 40문항이 언제나 충분하다고 말하면 same-set upper bound를 과장하는 셈이다.</a:t>
-            </a:r>
-          </a:p>
-        </p:txBody>
-      </p:sp>
-    </p:spTree>
-  </p:cSld>
-  <p:clrMapOvr>
-    <a:masterClrMapping/>
-  </p:clrMapOvr>
-</p:sld>
-</file>
-
-<file path=ppt/slides/slide18.xml><?xml version="1.0" encoding="utf-8"?>
-<p:sld xmlns:a="http://schemas.openxmlformats.org/drawingml/2006/main" xmlns:p="http://schemas.openxmlformats.org/presentationml/2006/main" xmlns:r="http://schemas.openxmlformats.org/officeDocument/2006/relationships">
-  <p:cSld>
-    <p:bg>
-      <p:bgPr>
-        <a:solidFill>
-          <a:srgbClr val="EFF4F6"/>
-        </a:solidFill>
-        <a:effectLst/>
-      </p:bgPr>
-    </p:bg>
-    <p:spTree>
-      <p:nvGrpSpPr>
-        <p:cNvPr id="1" name=""/>
-        <p:cNvGrpSpPr/>
-        <p:nvPr/>
-      </p:nvGrpSpPr>
-      <p:grpSpPr/>
-      <p:sp>
-        <p:nvSpPr>
-          <p:cNvPr id="2" name="Rectangle 1"/>
-          <p:cNvSpPr/>
-          <p:nvPr/>
-        </p:nvSpPr>
-        <p:spPr>
-          <a:xfrm>
-            <a:off x="329184" y="384048"/>
-            <a:ext cx="128016" cy="841248"/>
-          </a:xfrm>
-          <a:prstGeom prst="rect">
-            <a:avLst/>
-          </a:prstGeom>
-          <a:solidFill>
-            <a:srgbClr val="3B586E"/>
-          </a:solidFill>
-          <a:ln>
-            <a:noFill/>
-          </a:ln>
-        </p:spPr>
-        <p:style>
-          <a:lnRef idx="1">
-            <a:schemeClr val="accent1"/>
-          </a:lnRef>
-          <a:fillRef idx="3">
-            <a:schemeClr val="accent1"/>
-          </a:fillRef>
-          <a:effectRef idx="2">
-            <a:schemeClr val="accent1"/>
-          </a:effectRef>
-          <a:fontRef idx="minor">
-            <a:schemeClr val="lt1"/>
-          </a:fontRef>
-        </p:style>
-        <p:txBody>
-          <a:bodyPr rtlCol="0" anchor="ctr"/>
-          <a:lstStyle/>
-          <a:p>
-            <a:pPr algn="ctr"/>
-          </a:p>
-        </p:txBody>
-      </p:sp>
-      <p:sp>
-        <p:nvSpPr>
-          <p:cNvPr id="3" name="Rectangle 2"/>
-          <p:cNvSpPr/>
-          <p:nvPr/>
-        </p:nvSpPr>
-        <p:spPr>
-          <a:xfrm>
-            <a:off x="329184" y="182880"/>
-            <a:ext cx="11384280" cy="36576"/>
-          </a:xfrm>
-          <a:prstGeom prst="rect">
-            <a:avLst/>
-          </a:prstGeom>
-          <a:solidFill>
-            <a:srgbClr val="DAD4CA"/>
-          </a:solidFill>
-          <a:ln>
-            <a:noFill/>
-          </a:ln>
-        </p:spPr>
-        <p:style>
-          <a:lnRef idx="1">
-            <a:schemeClr val="accent1"/>
-          </a:lnRef>
-          <a:fillRef idx="3">
-            <a:schemeClr val="accent1"/>
-          </a:fillRef>
-          <a:effectRef idx="2">
-            <a:schemeClr val="accent1"/>
-          </a:effectRef>
-          <a:fontRef idx="minor">
-            <a:schemeClr val="lt1"/>
-          </a:fontRef>
-        </p:style>
-        <p:txBody>
-          <a:bodyPr rtlCol="0" anchor="ctr"/>
-          <a:lstStyle/>
-          <a:p>
-            <a:pPr algn="ctr"/>
-          </a:p>
-        </p:txBody>
-      </p:sp>
-      <p:sp>
-        <p:nvSpPr>
-          <p:cNvPr id="4" name="TextBox 3"/>
-          <p:cNvSpPr txBox="1"/>
-          <p:nvPr/>
-        </p:nvSpPr>
-        <p:spPr>
-          <a:xfrm>
-            <a:off x="621792" y="329184"/>
-            <a:ext cx="8595360" cy="530352"/>
-          </a:xfrm>
-          <a:prstGeom prst="rect">
-            <a:avLst/>
-          </a:prstGeom>
-          <a:noFill/>
-          <a:ln>
-            <a:noFill/>
-          </a:ln>
-        </p:spPr>
-        <p:txBody>
-          <a:bodyPr wrap="square" lIns="0" rIns="0" tIns="0" bIns="0" anchor="t">
-            <a:spAutoFit/>
-          </a:bodyPr>
-          <a:lstStyle/>
-          <a:p>
-            <a:pPr algn="l"/>
-            <a:r>
-              <a:rPr sz="2400" b="1">
-                <a:solidFill>
-                  <a:srgbClr val="282C3A"/>
-                </a:solidFill>
-                <a:latin typeface="Apple SD Gothic Neo"/>
-              </a:rPr>
-              <a:t>질문 전에: 저장소는 이렇게 읽으면 됩니다</a:t>
-            </a:r>
-          </a:p>
-        </p:txBody>
-      </p:sp>
-      <p:sp>
-        <p:nvSpPr>
-          <p:cNvPr id="5" name="TextBox 4"/>
-          <p:cNvSpPr txBox="1"/>
-          <p:nvPr/>
-        </p:nvSpPr>
-        <p:spPr>
-          <a:xfrm>
-            <a:off x="9601200" y="402336"/>
-            <a:ext cx="1417320" cy="201168"/>
-          </a:xfrm>
-          <a:prstGeom prst="rect">
-            <a:avLst/>
-          </a:prstGeom>
-          <a:solidFill>
-            <a:srgbClr val="E2EAEF"/>
-          </a:solidFill>
-          <a:ln>
-            <a:solidFill>
-              <a:srgbClr val="E2EAEF"/>
-            </a:solidFill>
-          </a:ln>
-        </p:spPr>
-        <p:txBody>
-          <a:bodyPr wrap="square" lIns="9144" rIns="9144" tIns="9144" bIns="9144" anchor="ctr">
-            <a:spAutoFit/>
-          </a:bodyPr>
-          <a:lstStyle/>
-          <a:p>
-            <a:pPr algn="ctr"/>
-            <a:r>
-              <a:rPr sz="1000" b="1">
-                <a:solidFill>
-                  <a:srgbClr val="282C3A"/>
-                </a:solidFill>
-                <a:latin typeface="Apple SD Gothic Neo"/>
-              </a:rPr>
-              <a:t>Lab Meeting</a:t>
-            </a:r>
-          </a:p>
-        </p:txBody>
-      </p:sp>
-      <p:sp>
-        <p:nvSpPr>
-          <p:cNvPr id="6" name="TextBox 5"/>
-          <p:cNvSpPr txBox="1"/>
-          <p:nvPr/>
-        </p:nvSpPr>
-        <p:spPr>
-          <a:xfrm>
-            <a:off x="11064240" y="420624"/>
-            <a:ext cx="685800" cy="164592"/>
-          </a:xfrm>
-          <a:prstGeom prst="rect">
-            <a:avLst/>
-          </a:prstGeom>
-          <a:noFill/>
-          <a:ln>
-            <a:noFill/>
-          </a:ln>
-        </p:spPr>
-        <p:txBody>
-          <a:bodyPr wrap="square" lIns="0" rIns="0" tIns="0" bIns="0" anchor="ctr">
-            <a:spAutoFit/>
-          </a:bodyPr>
-          <a:lstStyle/>
-          <a:p>
-            <a:pPr algn="r"/>
-            <a:r>
-              <a:rPr sz="1000" b="1">
-                <a:solidFill>
-                  <a:srgbClr val="70767D"/>
-                </a:solidFill>
-                <a:latin typeface="Apple SD Gothic Neo"/>
-              </a:rPr>
-              <a:t>18/18</a:t>
-            </a:r>
-          </a:p>
-        </p:txBody>
-      </p:sp>
-      <p:sp>
-        <p:nvSpPr>
-          <p:cNvPr id="7" name="Rectangle 6"/>
-          <p:cNvSpPr/>
-          <p:nvPr/>
-        </p:nvSpPr>
-        <p:spPr>
-          <a:xfrm>
-            <a:off x="475488" y="6419088"/>
-            <a:ext cx="11201400" cy="36576"/>
-          </a:xfrm>
-          <a:prstGeom prst="rect">
-            <a:avLst/>
-          </a:prstGeom>
-          <a:solidFill>
-            <a:srgbClr val="DAD4CA"/>
-          </a:solidFill>
-          <a:ln>
-            <a:noFill/>
-          </a:ln>
-        </p:spPr>
-        <p:style>
-          <a:lnRef idx="1">
-            <a:schemeClr val="accent1"/>
-          </a:lnRef>
-          <a:fillRef idx="3">
-            <a:schemeClr val="accent1"/>
-          </a:fillRef>
-          <a:effectRef idx="2">
-            <a:schemeClr val="accent1"/>
-          </a:effectRef>
-          <a:fontRef idx="minor">
-            <a:schemeClr val="lt1"/>
-          </a:fontRef>
-        </p:style>
-        <p:txBody>
-          <a:bodyPr rtlCol="0" anchor="ctr"/>
-          <a:lstStyle/>
-          <a:p>
-            <a:pPr algn="ctr"/>
-          </a:p>
-        </p:txBody>
-      </p:sp>
-      <p:sp>
-        <p:nvSpPr>
-          <p:cNvPr id="8" name="TextBox 7"/>
-          <p:cNvSpPr txBox="1"/>
-          <p:nvPr/>
-        </p:nvSpPr>
-        <p:spPr>
-          <a:xfrm>
-            <a:off x="502920" y="6455664"/>
-            <a:ext cx="4663440" cy="164592"/>
-          </a:xfrm>
-          <a:prstGeom prst="rect">
-            <a:avLst/>
-          </a:prstGeom>
-          <a:noFill/>
-          <a:ln>
-            <a:noFill/>
-          </a:ln>
-        </p:spPr>
-        <p:txBody>
-          <a:bodyPr wrap="square" lIns="0" rIns="0" tIns="0" bIns="0" anchor="t">
-            <a:spAutoFit/>
-          </a:bodyPr>
-          <a:lstStyle/>
-          <a:p>
-            <a:pPr algn="l"/>
-            <a:r>
-              <a:rPr sz="800" b="0">
-                <a:solidFill>
-                  <a:srgbClr val="70767D"/>
-                </a:solidFill>
-                <a:latin typeface="Apple SD Gothic Neo"/>
-              </a:rPr>
-              <a:t>Lab meeting | my reproduction and extensions</a:t>
+              <a:t>내 연구 | reproduction and extensions</a:t>
             </a:r>
           </a:p>
         </p:txBody>
@@ -14563,6 +11603,28 @@
             </a:pPr>
             <a:r>
               <a:t>• 원 논문 설명은 `presentation/`의 deck와 notes, 재현 서사는 `README.md`, 원고는 `paper/`를 보면 된다.</a:t>
+            </a:r>
+          </a:p>
+          <a:p>
+            <a:pPr>
+              <a:lnSpc>
+                <a:spcPct val="112000"/>
+              </a:lnSpc>
+              <a:spcBef>
+                <a:spcPts val="0"/>
+              </a:spcBef>
+              <a:spcAft>
+                <a:spcPts val="800"/>
+              </a:spcAft>
+              <a:defRPr sz="1800">
+                <a:solidFill>
+                  <a:srgbClr val="363A48"/>
+                </a:solidFill>
+                <a:latin typeface="Apple SD Gothic Neo"/>
+              </a:defRPr>
+            </a:pPr>
+            <a:r>
+              <a:t>• 실험은 Phase 1–2 → Phase 3 → Phase 4–5 → Phase 6 순으로 읽으면 오늘 발표 흐름과 정확히 맞는다.</a:t>
             </a:r>
           </a:p>
           <a:p>
@@ -15518,7 +12580,7 @@
                 </a:solidFill>
                 <a:latin typeface="Apple SD Gothic Neo"/>
               </a:rPr>
-              <a:t>오늘 발표는 두 개의 세션처럼 들으면 됩니다</a:t>
+              <a:t>오늘 발표는 1부 논문 리뷰, 2부 내 연구입니다</a:t>
             </a:r>
           </a:p>
         </p:txBody>
@@ -15598,7 +12660,7 @@
                 </a:solidFill>
                 <a:latin typeface="Apple SD Gothic Neo"/>
               </a:rPr>
-              <a:t>2/18</a:t>
+              <a:t>2/16</a:t>
             </a:r>
           </a:p>
         </p:txBody>
@@ -15843,7 +12905,7 @@
                 </a:solidFill>
                 <a:latin typeface="Apple SD Gothic Neo"/>
               </a:rPr>
-              <a:t>Part A. 내 베이스 논문 읽기</a:t>
+              <a:t>1부. 논문 리뷰</a:t>
             </a:r>
           </a:p>
         </p:txBody>
@@ -15961,7 +13023,7 @@
                 </a:solidFill>
                 <a:latin typeface="Apple SD Gothic Neo"/>
               </a:rPr>
-              <a:t>Part B. 내 랩미팅: 프로토콜 이식</a:t>
+              <a:t>2부. 내 연구</a:t>
             </a:r>
           </a:p>
         </p:txBody>
@@ -16079,7 +13141,7 @@
                 </a:solidFill>
                 <a:latin typeface="Apple SD Gothic Neo"/>
               </a:rPr>
-              <a:t>Part C. 내 연구의 결론</a:t>
+              <a:t>발표의 최종 메시지</a:t>
             </a:r>
           </a:p>
         </p:txBody>
@@ -16309,7 +13371,7 @@
                 </a:solidFill>
                 <a:latin typeface="Apple SD Gothic Neo"/>
               </a:rPr>
-              <a:t>Paper Study</a:t>
+              <a:t>논문 리뷰</a:t>
             </a:r>
           </a:p>
         </p:txBody>
@@ -16347,7 +13409,7 @@
                 </a:solidFill>
                 <a:latin typeface="Apple SD Gothic Neo"/>
               </a:rPr>
-              <a:t>3/18</a:t>
+              <a:t>3/16</a:t>
             </a:r>
           </a:p>
         </p:txBody>
@@ -16428,7 +13490,7 @@
                 </a:solidFill>
                 <a:latin typeface="Apple SD Gothic Neo"/>
               </a:rPr>
-              <a:t>Paper study | base paper and original claims</a:t>
+              <a:t>논문 리뷰 | base paper and original claims</a:t>
             </a:r>
           </a:p>
         </p:txBody>
@@ -16924,7 +13986,7 @@
                 </a:solidFill>
                 <a:latin typeface="Apple SD Gothic Neo"/>
               </a:rPr>
-              <a:t>Paper Study</a:t>
+              <a:t>논문 리뷰</a:t>
             </a:r>
           </a:p>
         </p:txBody>
@@ -16962,7 +14024,7 @@
                 </a:solidFill>
                 <a:latin typeface="Apple SD Gothic Neo"/>
               </a:rPr>
-              <a:t>4/18</a:t>
+              <a:t>4/16</a:t>
             </a:r>
           </a:p>
         </p:txBody>
@@ -17043,7 +14105,7 @@
                 </a:solidFill>
                 <a:latin typeface="Apple SD Gothic Neo"/>
               </a:rPr>
-              <a:t>Paper study | base paper and original claims</a:t>
+              <a:t>논문 리뷰 | base paper and original claims</a:t>
             </a:r>
           </a:p>
         </p:txBody>
@@ -18135,7 +15197,7 @@
                 </a:solidFill>
                 <a:latin typeface="Apple SD Gothic Neo"/>
               </a:rPr>
-              <a:t>Paper Study</a:t>
+              <a:t>논문 리뷰</a:t>
             </a:r>
           </a:p>
         </p:txBody>
@@ -18173,7 +15235,7 @@
                 </a:solidFill>
                 <a:latin typeface="Apple SD Gothic Neo"/>
               </a:rPr>
-              <a:t>5/18</a:t>
+              <a:t>5/16</a:t>
             </a:r>
           </a:p>
         </p:txBody>
@@ -18254,7 +15316,7 @@
                 </a:solidFill>
                 <a:latin typeface="Apple SD Gothic Neo"/>
               </a:rPr>
-              <a:t>Paper study | base paper and original claims</a:t>
+              <a:t>논문 리뷰 | base paper and original claims</a:t>
             </a:r>
           </a:p>
         </p:txBody>
@@ -18936,7 +15998,7 @@
                 </a:solidFill>
                 <a:latin typeface="Apple SD Gothic Neo"/>
               </a:rPr>
-              <a:t>Paper Study</a:t>
+              <a:t>논문 리뷰</a:t>
             </a:r>
           </a:p>
         </p:txBody>
@@ -18974,7 +16036,7 @@
                 </a:solidFill>
                 <a:latin typeface="Apple SD Gothic Neo"/>
               </a:rPr>
-              <a:t>6/18</a:t>
+              <a:t>6/16</a:t>
             </a:r>
           </a:p>
         </p:txBody>
@@ -19055,7 +16117,7 @@
                 </a:solidFill>
                 <a:latin typeface="Apple SD Gothic Neo"/>
               </a:rPr>
-              <a:t>Paper study | base paper and original claims</a:t>
+              <a:t>논문 리뷰 | base paper and original claims</a:t>
             </a:r>
           </a:p>
         </p:txBody>
@@ -19551,7 +16613,7 @@
                 </a:solidFill>
                 <a:latin typeface="Apple SD Gothic Neo"/>
               </a:rPr>
-              <a:t>Paper Study</a:t>
+              <a:t>논문 리뷰</a:t>
             </a:r>
           </a:p>
         </p:txBody>
@@ -19589,7 +16651,7 @@
                 </a:solidFill>
                 <a:latin typeface="Apple SD Gothic Neo"/>
               </a:rPr>
-              <a:t>7/18</a:t>
+              <a:t>7/16</a:t>
             </a:r>
           </a:p>
         </p:txBody>
@@ -19670,7 +16732,7 @@
                 </a:solidFill>
                 <a:latin typeface="Apple SD Gothic Neo"/>
               </a:rPr>
-              <a:t>Paper study | base paper and original claims</a:t>
+              <a:t>논문 리뷰 | base paper and original claims</a:t>
             </a:r>
           </a:p>
         </p:txBody>
@@ -20290,7 +17352,7 @@
                 </a:solidFill>
                 <a:latin typeface="Apple SD Gothic Neo"/>
               </a:rPr>
-              <a:t>Paper Study</a:t>
+              <a:t>논문 리뷰</a:t>
             </a:r>
           </a:p>
         </p:txBody>
@@ -20328,7 +17390,7 @@
                 </a:solidFill>
                 <a:latin typeface="Apple SD Gothic Neo"/>
               </a:rPr>
-              <a:t>8/18</a:t>
+              <a:t>8/16</a:t>
             </a:r>
           </a:p>
         </p:txBody>
@@ -20409,7 +17471,7 @@
                 </a:solidFill>
                 <a:latin typeface="Apple SD Gothic Neo"/>
               </a:rPr>
-              <a:t>Paper study | base paper and original claims</a:t>
+              <a:t>논문 리뷰 | base paper and original claims</a:t>
             </a:r>
           </a:p>
         </p:txBody>
@@ -21348,14 +18410,14 @@
         </p:nvSpPr>
         <p:spPr>
           <a:xfrm>
-            <a:off x="329184" y="384048"/>
-            <a:ext cx="128016" cy="841248"/>
+            <a:off x="457200" y="411480"/>
+            <a:ext cx="11155680" cy="36576"/>
           </a:xfrm>
           <a:prstGeom prst="rect">
             <a:avLst/>
           </a:prstGeom>
           <a:solidFill>
-            <a:srgbClr val="3B586E"/>
+            <a:srgbClr val="DAD4CA"/>
           </a:solidFill>
           <a:ln>
             <a:noFill/>
@@ -21391,14 +18453,14 @@
         </p:nvSpPr>
         <p:spPr>
           <a:xfrm>
-            <a:off x="329184" y="182880"/>
-            <a:ext cx="11384280" cy="36576"/>
+            <a:off x="566928" y="987552"/>
+            <a:ext cx="128016" cy="2880360"/>
           </a:xfrm>
           <a:prstGeom prst="rect">
             <a:avLst/>
           </a:prstGeom>
           <a:solidFill>
-            <a:srgbClr val="DAD4CA"/>
+            <a:srgbClr val="3B586E"/>
           </a:solidFill>
           <a:ln>
             <a:noFill/>
@@ -21434,8 +18496,8 @@
         </p:nvSpPr>
         <p:spPr>
           <a:xfrm>
-            <a:off x="621792" y="329184"/>
-            <a:ext cx="8595360" cy="530352"/>
+            <a:off x="8549640" y="1051560"/>
+            <a:ext cx="2651760" cy="1417320"/>
           </a:xfrm>
           <a:prstGeom prst="rect">
             <a:avLst/>
@@ -21451,29 +18513,105 @@
           </a:bodyPr>
           <a:lstStyle/>
           <a:p>
+            <a:pPr algn="r"/>
+            <a:r>
+              <a:rPr sz="7400" b="1">
+                <a:solidFill>
+                  <a:srgbClr val="DAD4CA"/>
+                </a:solidFill>
+                <a:latin typeface="Apple SD Gothic Neo"/>
+              </a:rPr>
+              <a:t>2부</a:t>
+            </a:r>
+          </a:p>
+        </p:txBody>
+      </p:sp>
+      <p:sp>
+        <p:nvSpPr>
+          <p:cNvPr id="5" name="TextBox 4"/>
+          <p:cNvSpPr txBox="1"/>
+          <p:nvPr/>
+        </p:nvSpPr>
+        <p:spPr>
+          <a:xfrm>
+            <a:off x="859536" y="1005840"/>
+            <a:ext cx="6217920" cy="347472"/>
+          </a:xfrm>
+          <a:prstGeom prst="rect">
+            <a:avLst/>
+          </a:prstGeom>
+          <a:noFill/>
+          <a:ln>
+            <a:noFill/>
+          </a:ln>
+        </p:spPr>
+        <p:txBody>
+          <a:bodyPr wrap="square" lIns="0" rIns="0" tIns="0" bIns="0" anchor="t">
+            <a:spAutoFit/>
+          </a:bodyPr>
+          <a:lstStyle/>
+          <a:p>
             <a:pPr algn="l"/>
             <a:r>
-              <a:rPr sz="2400" b="1">
+              <a:rPr sz="1500" b="1">
+                <a:solidFill>
+                  <a:srgbClr val="3B586E"/>
+                </a:solidFill>
+                <a:latin typeface="Apple SD Gothic Neo"/>
+              </a:rPr>
+              <a:t>내 연구</a:t>
+            </a:r>
+          </a:p>
+        </p:txBody>
+      </p:sp>
+      <p:sp>
+        <p:nvSpPr>
+          <p:cNvPr id="6" name="TextBox 5"/>
+          <p:cNvSpPr txBox="1"/>
+          <p:nvPr/>
+        </p:nvSpPr>
+        <p:spPr>
+          <a:xfrm>
+            <a:off x="859536" y="1554480"/>
+            <a:ext cx="6949440" cy="868680"/>
+          </a:xfrm>
+          <a:prstGeom prst="rect">
+            <a:avLst/>
+          </a:prstGeom>
+          <a:noFill/>
+          <a:ln>
+            <a:noFill/>
+          </a:ln>
+        </p:spPr>
+        <p:txBody>
+          <a:bodyPr wrap="square" lIns="0" rIns="0" tIns="0" bIns="0" anchor="t">
+            <a:spAutoFit/>
+          </a:bodyPr>
+          <a:lstStyle/>
+          <a:p>
+            <a:pPr algn="l"/>
+            <a:r>
+              <a:rPr sz="3000" b="1">
                 <a:solidFill>
                   <a:srgbClr val="282C3A"/>
                 </a:solidFill>
                 <a:latin typeface="Apple SD Gothic Neo"/>
               </a:rPr>
-              <a:t>2-1. 이제 랩미팅으로: 내가 실제로 던진 세 연구 질문</a:t>
-            </a:r>
-          </a:p>
-        </p:txBody>
-      </p:sp>
-      <p:sp>
-        <p:nvSpPr>
-          <p:cNvPr id="5" name="TextBox 4"/>
-          <p:cNvSpPr txBox="1"/>
-          <p:nvPr/>
-        </p:nvSpPr>
-        <p:spPr>
-          <a:xfrm>
-            <a:off x="9601200" y="402336"/>
-            <a:ext cx="1417320" cy="201168"/>
+              <a:t>2부. 내 연구</a:t>
+            </a:r>
+          </a:p>
+        </p:txBody>
+      </p:sp>
+      <p:sp>
+        <p:nvSpPr>
+          <p:cNvPr id="7" name="TextBox 6"/>
+          <p:cNvSpPr txBox="1"/>
+          <p:nvPr/>
+        </p:nvSpPr>
+        <p:spPr>
+          <a:xfrm>
+            <a:off x="859536" y="2761488"/>
+            <a:ext cx="6812280" cy="960120"/>
           </a:xfrm>
           <a:prstGeom prst="rect">
             <a:avLst/>
@@ -21488,629 +18626,58 @@
           </a:ln>
         </p:spPr>
         <p:txBody>
-          <a:bodyPr wrap="square" lIns="9144" rIns="9144" tIns="9144" bIns="9144" anchor="ctr">
-            <a:spAutoFit/>
-          </a:bodyPr>
-          <a:lstStyle/>
-          <a:p>
-            <a:pPr algn="ctr"/>
+          <a:bodyPr wrap="square" lIns="109728" rIns="109728" tIns="109728" bIns="109728" anchor="t">
+            <a:spAutoFit/>
+          </a:bodyPr>
+          <a:lstStyle/>
+          <a:p>
+            <a:pPr algn="l"/>
+            <a:r>
+              <a:rPr sz="1800" b="0">
+                <a:solidFill>
+                  <a:srgbClr val="282C3A"/>
+                </a:solidFill>
+                <a:latin typeface="Apple SD Gothic Neo"/>
+              </a:rPr>
+              <a:t>이제부터는 paper claim을 다시 읽는 것이 아니라, 그 claim을 내 judge 실험으로 어디까지 옮길 수 있었는지 보여드립니다.</a:t>
+            </a:r>
+          </a:p>
+        </p:txBody>
+      </p:sp>
+      <p:sp>
+        <p:nvSpPr>
+          <p:cNvPr id="8" name="TextBox 7"/>
+          <p:cNvSpPr txBox="1"/>
+          <p:nvPr/>
+        </p:nvSpPr>
+        <p:spPr>
+          <a:xfrm>
+            <a:off x="10972800" y="438912"/>
+            <a:ext cx="658368" cy="146304"/>
+          </a:xfrm>
+          <a:prstGeom prst="rect">
+            <a:avLst/>
+          </a:prstGeom>
+          <a:noFill/>
+          <a:ln>
+            <a:noFill/>
+          </a:ln>
+        </p:spPr>
+        <p:txBody>
+          <a:bodyPr wrap="square" lIns="0" rIns="0" tIns="0" bIns="0" anchor="t">
+            <a:spAutoFit/>
+          </a:bodyPr>
+          <a:lstStyle/>
+          <a:p>
+            <a:pPr algn="r"/>
             <a:r>
               <a:rPr sz="1000" b="1">
                 <a:solidFill>
-                  <a:srgbClr val="282C3A"/>
-                </a:solidFill>
-                <a:latin typeface="Apple SD Gothic Neo"/>
-              </a:rPr>
-              <a:t>Lab Meeting</a:t>
-            </a:r>
-          </a:p>
-        </p:txBody>
-      </p:sp>
-      <p:sp>
-        <p:nvSpPr>
-          <p:cNvPr id="6" name="TextBox 5"/>
-          <p:cNvSpPr txBox="1"/>
-          <p:nvPr/>
-        </p:nvSpPr>
-        <p:spPr>
-          <a:xfrm>
-            <a:off x="11064240" y="420624"/>
-            <a:ext cx="685800" cy="164592"/>
-          </a:xfrm>
-          <a:prstGeom prst="rect">
-            <a:avLst/>
-          </a:prstGeom>
-          <a:noFill/>
-          <a:ln>
-            <a:noFill/>
-          </a:ln>
-        </p:spPr>
-        <p:txBody>
-          <a:bodyPr wrap="square" lIns="0" rIns="0" tIns="0" bIns="0" anchor="ctr">
-            <a:spAutoFit/>
-          </a:bodyPr>
-          <a:lstStyle/>
-          <a:p>
-            <a:pPr algn="r"/>
-            <a:r>
-              <a:rPr sz="1000" b="1">
-                <a:solidFill>
                   <a:srgbClr val="70767D"/>
                 </a:solidFill>
                 <a:latin typeface="Apple SD Gothic Neo"/>
               </a:rPr>
-              <a:t>9/18</a:t>
-            </a:r>
-          </a:p>
-        </p:txBody>
-      </p:sp>
-      <p:sp>
-        <p:nvSpPr>
-          <p:cNvPr id="7" name="Rectangle 6"/>
-          <p:cNvSpPr/>
-          <p:nvPr/>
-        </p:nvSpPr>
-        <p:spPr>
-          <a:xfrm>
-            <a:off x="475488" y="6419088"/>
-            <a:ext cx="11201400" cy="36576"/>
-          </a:xfrm>
-          <a:prstGeom prst="rect">
-            <a:avLst/>
-          </a:prstGeom>
-          <a:solidFill>
-            <a:srgbClr val="DAD4CA"/>
-          </a:solidFill>
-          <a:ln>
-            <a:noFill/>
-          </a:ln>
-        </p:spPr>
-        <p:style>
-          <a:lnRef idx="1">
-            <a:schemeClr val="accent1"/>
-          </a:lnRef>
-          <a:fillRef idx="3">
-            <a:schemeClr val="accent1"/>
-          </a:fillRef>
-          <a:effectRef idx="2">
-            <a:schemeClr val="accent1"/>
-          </a:effectRef>
-          <a:fontRef idx="minor">
-            <a:schemeClr val="lt1"/>
-          </a:fontRef>
-        </p:style>
-        <p:txBody>
-          <a:bodyPr rtlCol="0" anchor="ctr"/>
-          <a:lstStyle/>
-          <a:p>
-            <a:pPr algn="ctr"/>
-          </a:p>
-        </p:txBody>
-      </p:sp>
-      <p:sp>
-        <p:nvSpPr>
-          <p:cNvPr id="8" name="TextBox 7"/>
-          <p:cNvSpPr txBox="1"/>
-          <p:nvPr/>
-        </p:nvSpPr>
-        <p:spPr>
-          <a:xfrm>
-            <a:off x="502920" y="6455664"/>
-            <a:ext cx="4663440" cy="164592"/>
-          </a:xfrm>
-          <a:prstGeom prst="rect">
-            <a:avLst/>
-          </a:prstGeom>
-          <a:noFill/>
-          <a:ln>
-            <a:noFill/>
-          </a:ln>
-        </p:spPr>
-        <p:txBody>
-          <a:bodyPr wrap="square" lIns="0" rIns="0" tIns="0" bIns="0" anchor="t">
-            <a:spAutoFit/>
-          </a:bodyPr>
-          <a:lstStyle/>
-          <a:p>
-            <a:pPr algn="l"/>
-            <a:r>
-              <a:rPr sz="800" b="0">
-                <a:solidFill>
-                  <a:srgbClr val="70767D"/>
-                </a:solidFill>
-                <a:latin typeface="Apple SD Gothic Neo"/>
-              </a:rPr>
-              <a:t>Lab meeting | my reproduction and extensions</a:t>
-            </a:r>
-          </a:p>
-        </p:txBody>
-      </p:sp>
-      <p:sp>
-        <p:nvSpPr>
-          <p:cNvPr id="9" name="TextBox 8"/>
-          <p:cNvSpPr txBox="1"/>
-          <p:nvPr/>
-        </p:nvSpPr>
-        <p:spPr>
-          <a:xfrm>
-            <a:off x="438912" y="694944"/>
-            <a:ext cx="11292840" cy="365760"/>
-          </a:xfrm>
-          <a:prstGeom prst="rect">
-            <a:avLst/>
-          </a:prstGeom>
-          <a:solidFill>
-            <a:srgbClr val="E2EAEF"/>
-          </a:solidFill>
-          <a:ln>
-            <a:solidFill>
-              <a:srgbClr val="E2EAEF"/>
-            </a:solidFill>
-          </a:ln>
-        </p:spPr>
-        <p:txBody>
-          <a:bodyPr wrap="square" lIns="27432" rIns="27432" tIns="27432" bIns="27432" anchor="ctr">
-            <a:spAutoFit/>
-          </a:bodyPr>
-          <a:lstStyle/>
-          <a:p>
-            <a:pPr algn="l"/>
-            <a:r>
-              <a:rPr sz="1200" b="1">
-                <a:solidFill>
-                  <a:srgbClr val="282C3A"/>
-                </a:solidFill>
-                <a:latin typeface="Apple SD Gothic Neo"/>
-              </a:rPr>
-              <a:t>이 슬라이드의 목적: 뒤 절반의 랩미팅을 연구 질문 단위로 묶어 놓고 듣게 한다.</a:t>
-            </a:r>
-          </a:p>
-        </p:txBody>
-      </p:sp>
-      <p:sp>
-        <p:nvSpPr>
-          <p:cNvPr id="10" name="TextBox 9"/>
-          <p:cNvSpPr txBox="1"/>
-          <p:nvPr/>
-        </p:nvSpPr>
-        <p:spPr>
-          <a:xfrm>
-            <a:off x="502920" y="1298448"/>
-            <a:ext cx="11155680" cy="566928"/>
-          </a:xfrm>
-          <a:prstGeom prst="rect">
-            <a:avLst/>
-          </a:prstGeom>
-          <a:solidFill>
-            <a:srgbClr val="E2EAEF"/>
-          </a:solidFill>
-          <a:ln>
-            <a:solidFill>
-              <a:srgbClr val="E2EAEF"/>
-            </a:solidFill>
-          </a:ln>
-        </p:spPr>
-        <p:txBody>
-          <a:bodyPr wrap="square" lIns="64008" rIns="64008" tIns="64008" bIns="64008" anchor="ctr">
-            <a:spAutoFit/>
-          </a:bodyPr>
-          <a:lstStyle/>
-          <a:p>
-            <a:pPr algn="l"/>
-            <a:r>
-              <a:rPr sz="1900" b="1">
-                <a:solidFill>
-                  <a:srgbClr val="282C3A"/>
-                </a:solidFill>
-                <a:latin typeface="Apple SD Gothic Neo"/>
-              </a:rPr>
-              <a:t>여기서부터는 taxonomy보다 질문이 중요합니다. 뒤 절반은 ‘좋아진다’보다 ‘어떻게 좋아지고 무엇이 남는가’를 보는 랩미팅입니다.</a:t>
-            </a:r>
-          </a:p>
-        </p:txBody>
-      </p:sp>
-      <p:sp>
-        <p:nvSpPr>
-          <p:cNvPr id="11" name="TextBox 10"/>
-          <p:cNvSpPr txBox="1"/>
-          <p:nvPr/>
-        </p:nvSpPr>
-        <p:spPr>
-          <a:xfrm>
-            <a:off x="502920" y="2048256"/>
-            <a:ext cx="3553967" cy="1993392"/>
-          </a:xfrm>
-          <a:prstGeom prst="rect">
-            <a:avLst/>
-          </a:prstGeom>
-          <a:solidFill>
-            <a:srgbClr val="FFFFFF"/>
-          </a:solidFill>
-          <a:ln>
-            <a:solidFill>
-              <a:srgbClr val="DAD4CA"/>
-            </a:solidFill>
-          </a:ln>
-        </p:spPr>
-        <p:txBody>
-          <a:bodyPr wrap="square" lIns="109728" rIns="109728" tIns="109728" bIns="109728" anchor="t">
-            <a:spAutoFit/>
-          </a:bodyPr>
-          <a:lstStyle/>
-          <a:p>
-            <a:pPr algn="l"/>
-            <a:r>
-              <a:rPr sz="1700" b="0">
-                <a:solidFill>
-                  <a:srgbClr val="363A48"/>
-                </a:solidFill>
-                <a:latin typeface="Apple SD Gothic Neo"/>
-              </a:rPr>
-              <a:t/>
-            </a:r>
-          </a:p>
-        </p:txBody>
-      </p:sp>
-      <p:sp>
-        <p:nvSpPr>
-          <p:cNvPr id="12" name="TextBox 11"/>
-          <p:cNvSpPr txBox="1"/>
-          <p:nvPr/>
-        </p:nvSpPr>
-        <p:spPr>
-          <a:xfrm>
-            <a:off x="576072" y="2157984"/>
-            <a:ext cx="3407664" cy="237744"/>
-          </a:xfrm>
-          <a:prstGeom prst="rect">
-            <a:avLst/>
-          </a:prstGeom>
-          <a:noFill/>
-          <a:ln>
-            <a:noFill/>
-          </a:ln>
-        </p:spPr>
-        <p:txBody>
-          <a:bodyPr wrap="square" lIns="0" rIns="0" tIns="0" bIns="0" anchor="t">
-            <a:spAutoFit/>
-          </a:bodyPr>
-          <a:lstStyle/>
-          <a:p>
-            <a:pPr algn="l"/>
-            <a:r>
-              <a:rPr sz="1500" b="1">
-                <a:solidFill>
-                  <a:srgbClr val="3B586E"/>
-                </a:solidFill>
-                <a:latin typeface="Apple SD Gothic Neo"/>
-              </a:rPr>
-              <a:t>RQ1. judge scaling</a:t>
-            </a:r>
-          </a:p>
-        </p:txBody>
-      </p:sp>
-      <p:sp>
-        <p:nvSpPr>
-          <p:cNvPr id="13" name="TextBox 12"/>
-          <p:cNvSpPr txBox="1"/>
-          <p:nvPr/>
-        </p:nvSpPr>
-        <p:spPr>
-          <a:xfrm>
-            <a:off x="576072" y="2542032"/>
-            <a:ext cx="3407664" cy="1152144"/>
-          </a:xfrm>
-          <a:prstGeom prst="rect">
-            <a:avLst/>
-          </a:prstGeom>
-          <a:noFill/>
-          <a:ln>
-            <a:noFill/>
-          </a:ln>
-        </p:spPr>
-        <p:txBody>
-          <a:bodyPr wrap="square" lIns="0" rIns="0" tIns="0" bIns="0" anchor="t">
-            <a:spAutoFit/>
-          </a:bodyPr>
-          <a:lstStyle/>
-          <a:p>
-            <a:pPr algn="l"/>
-            <a:r>
-              <a:rPr sz="1500" b="0">
-                <a:solidFill>
-                  <a:srgbClr val="363A48"/>
-                </a:solidFill>
-                <a:latin typeface="Apple SD Gothic Neo"/>
-              </a:rPr>
-              <a:t>Qwen judge를 7B → 14B → 32B로 키우면 pairwise reliability가 실제로 단조 개선되는가?</a:t>
-            </a:r>
-          </a:p>
-        </p:txBody>
-      </p:sp>
-      <p:sp>
-        <p:nvSpPr>
-          <p:cNvPr id="14" name="TextBox 13"/>
-          <p:cNvSpPr txBox="1"/>
-          <p:nvPr/>
-        </p:nvSpPr>
-        <p:spPr>
-          <a:xfrm>
-            <a:off x="4221480" y="2048256"/>
-            <a:ext cx="3553967" cy="1993392"/>
-          </a:xfrm>
-          <a:prstGeom prst="rect">
-            <a:avLst/>
-          </a:prstGeom>
-          <a:solidFill>
-            <a:srgbClr val="FFFFFF"/>
-          </a:solidFill>
-          <a:ln>
-            <a:solidFill>
-              <a:srgbClr val="DAD4CA"/>
-            </a:solidFill>
-          </a:ln>
-        </p:spPr>
-        <p:txBody>
-          <a:bodyPr wrap="square" lIns="109728" rIns="109728" tIns="109728" bIns="109728" anchor="t">
-            <a:spAutoFit/>
-          </a:bodyPr>
-          <a:lstStyle/>
-          <a:p>
-            <a:pPr algn="l"/>
-            <a:r>
-              <a:rPr sz="1700" b="0">
-                <a:solidFill>
-                  <a:srgbClr val="363A48"/>
-                </a:solidFill>
-                <a:latin typeface="Apple SD Gothic Neo"/>
-              </a:rPr>
-              <a:t/>
-            </a:r>
-          </a:p>
-        </p:txBody>
-      </p:sp>
-      <p:sp>
-        <p:nvSpPr>
-          <p:cNvPr id="15" name="TextBox 14"/>
-          <p:cNvSpPr txBox="1"/>
-          <p:nvPr/>
-        </p:nvSpPr>
-        <p:spPr>
-          <a:xfrm>
-            <a:off x="4294632" y="2157984"/>
-            <a:ext cx="3407664" cy="237744"/>
-          </a:xfrm>
-          <a:prstGeom prst="rect">
-            <a:avLst/>
-          </a:prstGeom>
-          <a:noFill/>
-          <a:ln>
-            <a:noFill/>
-          </a:ln>
-        </p:spPr>
-        <p:txBody>
-          <a:bodyPr wrap="square" lIns="0" rIns="0" tIns="0" bIns="0" anchor="t">
-            <a:spAutoFit/>
-          </a:bodyPr>
-          <a:lstStyle/>
-          <a:p>
-            <a:pPr algn="l"/>
-            <a:r>
-              <a:rPr sz="1500" b="1">
-                <a:solidFill>
-                  <a:srgbClr val="3B586E"/>
-                </a:solidFill>
-                <a:latin typeface="Apple SD Gothic Neo"/>
-              </a:rPr>
-              <a:t>RQ2. residual error</a:t>
-            </a:r>
-          </a:p>
-        </p:txBody>
-      </p:sp>
-      <p:sp>
-        <p:nvSpPr>
-          <p:cNvPr id="16" name="TextBox 15"/>
-          <p:cNvSpPr txBox="1"/>
-          <p:nvPr/>
-        </p:nvSpPr>
-        <p:spPr>
-          <a:xfrm>
-            <a:off x="4294632" y="2542032"/>
-            <a:ext cx="3407664" cy="1152144"/>
-          </a:xfrm>
-          <a:prstGeom prst="rect">
-            <a:avLst/>
-          </a:prstGeom>
-          <a:noFill/>
-          <a:ln>
-            <a:noFill/>
-          </a:ln>
-        </p:spPr>
-        <p:txBody>
-          <a:bodyPr wrap="square" lIns="0" rIns="0" tIns="0" bIns="0" anchor="t">
-            <a:spAutoFit/>
-          </a:bodyPr>
-          <a:lstStyle/>
-          <a:p>
-            <a:pPr algn="l"/>
-            <a:r>
-              <a:rPr sz="1500" b="0">
-                <a:solidFill>
-                  <a:srgbClr val="363A48"/>
-                </a:solidFill>
-                <a:latin typeface="Apple SD Gothic Neo"/>
-              </a:rPr>
-              <a:t>좋아진 뒤 남는 오류는 단순 noise인가, 아니면 position bias나 format failure처럼 구조화되는가?</a:t>
-            </a:r>
-          </a:p>
-        </p:txBody>
-      </p:sp>
-      <p:sp>
-        <p:nvSpPr>
-          <p:cNvPr id="17" name="TextBox 16"/>
-          <p:cNvSpPr txBox="1"/>
-          <p:nvPr/>
-        </p:nvSpPr>
-        <p:spPr>
-          <a:xfrm>
-            <a:off x="7940040" y="2048256"/>
-            <a:ext cx="3553967" cy="1993392"/>
-          </a:xfrm>
-          <a:prstGeom prst="rect">
-            <a:avLst/>
-          </a:prstGeom>
-          <a:solidFill>
-            <a:srgbClr val="FFFFFF"/>
-          </a:solidFill>
-          <a:ln>
-            <a:solidFill>
-              <a:srgbClr val="DAD4CA"/>
-            </a:solidFill>
-          </a:ln>
-        </p:spPr>
-        <p:txBody>
-          <a:bodyPr wrap="square" lIns="109728" rIns="109728" tIns="109728" bIns="109728" anchor="t">
-            <a:spAutoFit/>
-          </a:bodyPr>
-          <a:lstStyle/>
-          <a:p>
-            <a:pPr algn="l"/>
-            <a:r>
-              <a:rPr sz="1700" b="0">
-                <a:solidFill>
-                  <a:srgbClr val="363A48"/>
-                </a:solidFill>
-                <a:latin typeface="Apple SD Gothic Neo"/>
-              </a:rPr>
-              <a:t/>
-            </a:r>
-          </a:p>
-        </p:txBody>
-      </p:sp>
-      <p:sp>
-        <p:nvSpPr>
-          <p:cNvPr id="18" name="TextBox 17"/>
-          <p:cNvSpPr txBox="1"/>
-          <p:nvPr/>
-        </p:nvSpPr>
-        <p:spPr>
-          <a:xfrm>
-            <a:off x="8013192" y="2157984"/>
-            <a:ext cx="3407664" cy="237744"/>
-          </a:xfrm>
-          <a:prstGeom prst="rect">
-            <a:avLst/>
-          </a:prstGeom>
-          <a:noFill/>
-          <a:ln>
-            <a:noFill/>
-          </a:ln>
-        </p:spPr>
-        <p:txBody>
-          <a:bodyPr wrap="square" lIns="0" rIns="0" tIns="0" bIns="0" anchor="t">
-            <a:spAutoFit/>
-          </a:bodyPr>
-          <a:lstStyle/>
-          <a:p>
-            <a:pPr algn="l"/>
-            <a:r>
-              <a:rPr sz="1500" b="1">
-                <a:solidFill>
-                  <a:srgbClr val="3B586E"/>
-                </a:solidFill>
-                <a:latin typeface="Apple SD Gothic Neo"/>
-              </a:rPr>
-              <a:t>RQ3. validation</a:t>
-            </a:r>
-          </a:p>
-        </p:txBody>
-      </p:sp>
-      <p:sp>
-        <p:nvSpPr>
-          <p:cNvPr id="19" name="TextBox 18"/>
-          <p:cNvSpPr txBox="1"/>
-          <p:nvPr/>
-        </p:nvSpPr>
-        <p:spPr>
-          <a:xfrm>
-            <a:off x="8013192" y="2542032"/>
-            <a:ext cx="3407664" cy="1152144"/>
-          </a:xfrm>
-          <a:prstGeom prst="rect">
-            <a:avLst/>
-          </a:prstGeom>
-          <a:noFill/>
-          <a:ln>
-            <a:noFill/>
-          </a:ln>
-        </p:spPr>
-        <p:txBody>
-          <a:bodyPr wrap="square" lIns="0" rIns="0" tIns="0" bIns="0" anchor="t">
-            <a:spAutoFit/>
-          </a:bodyPr>
-          <a:lstStyle/>
-          <a:p>
-            <a:pPr algn="l"/>
-            <a:r>
-              <a:rPr sz="1500" b="0">
-                <a:solidFill>
-                  <a:srgbClr val="363A48"/>
-                </a:solidFill>
-                <a:latin typeface="Apple SD Gothic Neo"/>
-              </a:rPr>
-              <a:t>InternLM, GPT-4o-mini, repeated hold-out까지 붙여도 같은 결론이 남는가?</a:t>
-            </a:r>
-          </a:p>
-        </p:txBody>
-      </p:sp>
-      <p:sp>
-        <p:nvSpPr>
-          <p:cNvPr id="20" name="TextBox 19"/>
-          <p:cNvSpPr txBox="1"/>
-          <p:nvPr/>
-        </p:nvSpPr>
-        <p:spPr>
-          <a:xfrm>
-            <a:off x="502920" y="4407408"/>
-            <a:ext cx="11155680" cy="1225296"/>
-          </a:xfrm>
-          <a:prstGeom prst="rect">
-            <a:avLst/>
-          </a:prstGeom>
-          <a:solidFill>
-            <a:srgbClr val="FFFFFF"/>
-          </a:solidFill>
-          <a:ln>
-            <a:solidFill>
-              <a:srgbClr val="DAD4CA"/>
-            </a:solidFill>
-          </a:ln>
-        </p:spPr>
-        <p:txBody>
-          <a:bodyPr wrap="square" lIns="118872" rIns="118872" tIns="118872" bIns="118872" anchor="t">
-            <a:spAutoFit/>
-          </a:bodyPr>
-          <a:lstStyle/>
-          <a:p>
-            <a:pPr algn="l">
-              <a:lnSpc>
-                <a:spcPct val="112000"/>
-              </a:lnSpc>
-              <a:spcBef>
-                <a:spcPts val="0"/>
-              </a:spcBef>
-              <a:spcAft>
-                <a:spcPts val="800"/>
-              </a:spcAft>
-              <a:defRPr sz="1600">
-                <a:solidFill>
-                  <a:srgbClr val="363A48"/>
-                </a:solidFill>
-                <a:latin typeface="Apple SD Gothic Neo"/>
-              </a:defRPr>
-            </a:pPr>
-            <a:r>
-              <a:t>• 이 뒤 절반은 구현 목록보다 세 개의 연구 질문으로 들으면 가장 잘 들어온다.</a:t>
+              <a:t>9/16</a:t>
             </a:r>
           </a:p>
         </p:txBody>

--- a/presentation/mt_bench_paper_study.pptx
+++ b/presentation/mt_bench_paper_study.pptx
@@ -23,6 +23,7 @@
     <p:sldId id="271" r:id="rId23"/>
     <p:sldId id="272" r:id="rId24"/>
     <p:sldId id="273" r:id="rId25"/>
+    <p:sldId id="274" r:id="rId26"/>
   </p:sldIdLst>
   <p:sldSz cx="12191695" cy="6858000" type="screen4x3"/>
   <p:notesSz cx="6858000" cy="9144000"/>
@@ -834,44 +835,50 @@
           <a:lstStyle/>
           <a:p>
             <a:r>
-              <a:t>Phase 1과 2는 본격 결과라기보다 문제 제기 단계입니다.</a:t>
-            </a:r>
-          </a:p>
-          <a:p>
-            <a:r>
-              <a:t>Self-judge를 해보면 Qwen2.5-7B가 특히 Math와 Coding에서 높은 점수를 주는 경향이 드러납니다.</a:t>
-            </a:r>
-          </a:p>
-          <a:p>
-            <a:r>
-              <a:t>즉 자신의 강점 영역을 과대평가할 가능성이 있습니다.</a:t>
+              <a:t>이 슬라이드는 청중이 뒤의 결과를 phase log처럼 듣지 않도록 넣은 진행 순서 슬라이드입니다.</a:t>
+            </a:r>
+          </a:p>
+          <a:p>
+            <a:r>
+              <a:t>실험이 어떤 순서로 쌓였는지 보여주면, 왜 각 phase가 필요한지 더 잘 이해됩니다.</a:t>
             </a:r>
           </a:p>
           <a:p/>
           <a:p>
             <a:r>
-              <a:t>그래서 외부 judge를 붙이지만, 거기서도 문제가 끝나지 않습니다.</a:t>
-            </a:r>
-          </a:p>
-          <a:p>
-            <a:r>
-              <a:t>ranking은 어느 정도 정리되지만 pairwise inconsistency가 여전히 높습니다.</a:t>
-            </a:r>
-          </a:p>
-          <a:p>
-            <a:r>
-              <a:t>이건 judge reliability 문제를 단순히 self-vs-external로 읽으면 안 된다는 뜻입니다.</a:t>
+              <a:t>P1은 self-judge bias를 보는 기준선이고, P2는 외부 14B judge로 broad ranking sanity를 확인하는 단계입니다.</a:t>
+            </a:r>
+          </a:p>
+          <a:p>
+            <a:r>
+              <a:t>이 두 단계는 문제 정의와 예비 검증 역할을 합니다.</a:t>
             </a:r>
           </a:p>
           <a:p/>
           <a:p>
             <a:r>
-              <a:t>이 슬라이드의 역할은 뒤 메인 실험의 필요성을 만드는 것입니다.</a:t>
-            </a:r>
-          </a:p>
-          <a:p>
-            <a:r>
-              <a:t>왜 32B 같은 더 큰 judge를 보고, 왜 cross-family와 hold-out까지 보게 되었는지 설명하는 출발점이라고 생각하시면 됩니다.</a:t>
+              <a:t>핵심은 P3입니다. Qwen 7B, 14B, 32B를 같은 family 안에서 비교해 judge scaling의 메인 결과를 얻습니다.</a:t>
+            </a:r>
+          </a:p>
+          <a:p>
+            <a:r>
+              <a:t>P4와 P5는 그 메인 결과를 보조 검증하는 단계입니다.</a:t>
+            </a:r>
+          </a:p>
+          <a:p>
+            <a:r>
+              <a:t>InternLM은 cross-family, GPT-4o-mini는 external anchor입니다.</a:t>
+            </a:r>
+          </a:p>
+          <a:p/>
+          <a:p>
+            <a:r>
+              <a:t>마지막 P6는 question reduction을 같은 모델셋 안에서만 보지 않기 위해 넣은 단계입니다.</a:t>
+            </a:r>
+          </a:p>
+          <a:p>
+            <a:r>
+              <a:t>즉 Phase 6가 있어야 tinyMT-Bench 결과를 same-set upper bound와 repeated hold-out evidence로 분리해서 말할 수 있습니다.</a:t>
             </a:r>
           </a:p>
         </p:txBody>
@@ -941,65 +948,44 @@
           <a:lstStyle/>
           <a:p>
             <a:r>
-              <a:t>이 슬라이드가 이번 재현 실험의 중심입니다.</a:t>
-            </a:r>
-          </a:p>
-          <a:p>
-            <a:r>
-              <a:t>Qwen judge를 7B에서 14B, 32B로 키우면 pairwise inconsistency가 크게 줄어듭니다.</a:t>
-            </a:r>
-          </a:p>
-          <a:p>
-            <a:r>
-              <a:t>그리고 score range도 넓어져서 모델 간 차이를 더 잘 구분합니다.</a:t>
+              <a:t>Phase 1과 2는 본격 결과라기보다 문제 제기 단계입니다.</a:t>
+            </a:r>
+          </a:p>
+          <a:p>
+            <a:r>
+              <a:t>Self-judge를 해보면 Qwen2.5-7B가 특히 Math와 Coding에서 높은 점수를 주는 경향이 드러납니다.</a:t>
+            </a:r>
+          </a:p>
+          <a:p>
+            <a:r>
+              <a:t>즉 자신의 강점 영역을 과대평가할 가능성이 있습니다.</a:t>
             </a:r>
           </a:p>
           <a:p/>
           <a:p>
             <a:r>
-              <a:t>이 결과는 꽤 강합니다. 하지만 표현은 조심해야 합니다.</a:t>
-            </a:r>
-          </a:p>
-          <a:p>
-            <a:r>
-              <a:t>이건 universal scaling law가 아닙니다.</a:t>
-            </a:r>
-          </a:p>
-          <a:p>
-            <a:r>
-              <a:t>정확하게는 Qwen2.5 동일 family 안에서 judge가 커질수록 reliability가 좋아졌다는 empirical trend입니다.</a:t>
+              <a:t>그래서 외부 judge를 붙이지만, 거기서도 문제가 끝나지 않습니다.</a:t>
+            </a:r>
+          </a:p>
+          <a:p>
+            <a:r>
+              <a:t>ranking은 어느 정도 정리되지만 pairwise inconsistency가 여전히 높습니다.</a:t>
+            </a:r>
+          </a:p>
+          <a:p>
+            <a:r>
+              <a:t>이건 judge reliability 문제를 단순히 self-vs-external로 읽으면 안 된다는 뜻입니다.</a:t>
             </a:r>
           </a:p>
           <a:p/>
           <a:p>
             <a:r>
-              <a:t>저는 발표에서 이 보수적 framing을 일부러 유지할 겁니다.</a:t>
-            </a:r>
-          </a:p>
-          <a:p>
-            <a:r>
-              <a:t>왜냐하면 뒤의 InternLM과 GPT-4o-mini가 이 메인 결과를 보조하긴 하지만,</a:t>
-            </a:r>
-          </a:p>
-          <a:p>
-            <a:r>
-              <a:t>Phase 3 자체를 완전히 대체하진 않기 때문입니다.</a:t>
-            </a:r>
-          </a:p>
-          <a:p/>
-          <a:p>
-            <a:r>
-              <a:t>하지만 이 슬라이드를 그냥 ‘스케일링이 먹혔다’로 끝내면 재미가 없습니다.</a:t>
-            </a:r>
-          </a:p>
-          <a:p>
-            <a:r>
-              <a:t>바로 다음 슬라이드에서 남는 오류의 구조를 보면,</a:t>
-            </a:r>
-          </a:p>
-          <a:p>
-            <a:r>
-              <a:t>단순 개선 서사가 아니라 훨씬 더 흥미로운 이야기가 나오기 때문입니다.</a:t>
+              <a:t>이 슬라이드의 역할은 뒤 메인 실험의 필요성을 만드는 것입니다.</a:t>
+            </a:r>
+          </a:p>
+          <a:p>
+            <a:r>
+              <a:t>왜 32B 같은 더 큰 judge를 보고, 왜 cross-family와 hold-out까지 보게 되었는지 설명하는 출발점이라고 생각하시면 됩니다.</a:t>
             </a:r>
           </a:p>
         </p:txBody>
@@ -1069,65 +1055,65 @@
           <a:lstStyle/>
           <a:p>
             <a:r>
-              <a:t>Phase 4와 5를 보고 나면 많은 청중이 안심합니다.</a:t>
-            </a:r>
-          </a:p>
-          <a:p>
-            <a:r>
-              <a:t>Qwen32와 InternLM20B, GPT-4o-mini가 대체로 비슷한 서열을 준다면</a:t>
-            </a:r>
-          </a:p>
-          <a:p>
-            <a:r>
-              <a:t>이제 judge 문제는 거의 해결된 것처럼 느껴질 수 있습니다.</a:t>
+              <a:t>이 슬라이드가 이번 재현 실험의 중심입니다.</a:t>
+            </a:r>
+          </a:p>
+          <a:p>
+            <a:r>
+              <a:t>Qwen judge를 7B에서 14B, 32B로 키우면 pairwise inconsistency가 크게 줄어듭니다.</a:t>
+            </a:r>
+          </a:p>
+          <a:p>
+            <a:r>
+              <a:t>그리고 score range도 넓어져서 모델 간 차이를 더 잘 구분합니다.</a:t>
             </a:r>
           </a:p>
           <a:p/>
           <a:p>
             <a:r>
-              <a:t>하지만 바로 이 지점에서 한 걸음 더 들어가야 합니다.</a:t>
-            </a:r>
-          </a:p>
-          <a:p>
-            <a:r>
-              <a:t>32B judge는 전체 inconsistency는 많이 줄였지만,</a:t>
-            </a:r>
-          </a:p>
-          <a:p>
-            <a:r>
-              <a:t>남아 있는 불일치는 거의 first-position bias와 연결됩니다.</a:t>
+              <a:t>이 결과는 꽤 강합니다. 하지만 표현은 조심해야 합니다.</a:t>
+            </a:r>
+          </a:p>
+          <a:p>
+            <a:r>
+              <a:t>이건 universal scaling law가 아닙니다.</a:t>
+            </a:r>
+          </a:p>
+          <a:p>
+            <a:r>
+              <a:t>정확하게는 Qwen2.5 동일 family 안에서 judge가 커질수록 reliability가 좋아졌다는 empirical trend입니다.</a:t>
             </a:r>
           </a:p>
           <a:p/>
           <a:p>
             <a:r>
-              <a:t>즉 큰 흐름의 ranking validity와, 개별 질문 수준의 decision cleanliness는 다른 문제입니다.</a:t>
-            </a:r>
-          </a:p>
-          <a:p>
-            <a:r>
-              <a:t>앙상블 결과도 같은 교훈을 줍니다.</a:t>
-            </a:r>
-          </a:p>
-          <a:p>
-            <a:r>
-              <a:t>작은 judge를 그냥 다수결로 합치면 오히려 오염되고,</a:t>
-            </a:r>
-          </a:p>
-          <a:p>
-            <a:r>
-              <a:t>abstain ensemble처럼 불확실성을 관리해야 오히려 더 좋아집니다.</a:t>
+              <a:t>저는 발표에서 이 보수적 framing을 일부러 유지할 겁니다.</a:t>
+            </a:r>
+          </a:p>
+          <a:p>
+            <a:r>
+              <a:t>왜냐하면 뒤의 InternLM과 GPT-4o-mini가 이 메인 결과를 보조하긴 하지만,</a:t>
+            </a:r>
+          </a:p>
+          <a:p>
+            <a:r>
+              <a:t>Phase 3 자체를 완전히 대체하진 않기 때문입니다.</a:t>
             </a:r>
           </a:p>
           <a:p/>
           <a:p>
             <a:r>
-              <a:t>그래서 이 슬라이드는 judge 연구를 단순 모델 비교가 아니라</a:t>
-            </a:r>
-          </a:p>
-          <a:p>
-            <a:r>
-              <a:t>evaluation system design 문제로 읽어야 한다는 메시지를 줍니다.</a:t>
+              <a:t>하지만 이 슬라이드를 그냥 ‘스케일링이 먹혔다’로 끝내면 재미가 없습니다.</a:t>
+            </a:r>
+          </a:p>
+          <a:p>
+            <a:r>
+              <a:t>바로 다음 슬라이드에서 남는 오류의 구조를 보면,</a:t>
+            </a:r>
+          </a:p>
+          <a:p>
+            <a:r>
+              <a:t>단순 개선 서사가 아니라 훨씬 더 흥미로운 이야기가 나오기 때문입니다.</a:t>
             </a:r>
           </a:p>
         </p:txBody>
@@ -1197,75 +1183,65 @@
           <a:lstStyle/>
           <a:p>
             <a:r>
-              <a:t>이 슬라이드는 제가 이번 발표에서 꼭 분리해서 설명하고 싶은 부분입니다.</a:t>
-            </a:r>
-          </a:p>
-          <a:p>
-            <a:r>
-              <a:t>많은 청중이 기권 설계를 보면 처음에는 보수적으로 포기한 것처럼 받아들입니다.</a:t>
-            </a:r>
-          </a:p>
-          <a:p>
-            <a:r>
-              <a:t>하지만 실제로는 반대입니다. 이건 decision rule을 더 정교하게 만든 겁니다.</a:t>
+              <a:t>Phase 4와 5를 보고 나면 많은 청중이 안심합니다.</a:t>
+            </a:r>
+          </a:p>
+          <a:p>
+            <a:r>
+              <a:t>Qwen32와 InternLM20B, GPT-4o-mini가 대체로 비슷한 서열을 준다면</a:t>
+            </a:r>
+          </a:p>
+          <a:p>
+            <a:r>
+              <a:t>이제 judge 문제는 거의 해결된 것처럼 느껴질 수 있습니다.</a:t>
             </a:r>
           </a:p>
           <a:p/>
           <a:p>
             <a:r>
-              <a:t>pairwise 한 쌍에 대해 각 judge는 A, B, tie, inconsistent 중 하나를 냅니다.</a:t>
-            </a:r>
-          </a:p>
-          <a:p>
-            <a:r>
-              <a:t>여기서 inconsistent는 세 번째 class라기보다, AB/BA swap이 충돌한 low-confidence signal입니다.</a:t>
-            </a:r>
-          </a:p>
-          <a:p>
-            <a:r>
-              <a:t>그런데 다수결은 이걸 일반 표처럼 셉니다.</a:t>
-            </a:r>
-          </a:p>
-          <a:p>
-            <a:r>
-              <a:t>그러면 [inconsistent, inconsistent, A] 같은 상황에서도 winner를 잃습니다.</a:t>
+              <a:t>하지만 바로 이 지점에서 한 걸음 더 들어가야 합니다.</a:t>
+            </a:r>
+          </a:p>
+          <a:p>
+            <a:r>
+              <a:t>32B judge는 전체 inconsistency는 많이 줄였지만,</a:t>
+            </a:r>
+          </a:p>
+          <a:p>
+            <a:r>
+              <a:t>남아 있는 불일치는 거의 first-position bias와 연결됩니다.</a:t>
             </a:r>
           </a:p>
           <a:p/>
           <a:p>
             <a:r>
-              <a:t>abstain은 다르게 봅니다.</a:t>
-            </a:r>
-          </a:p>
-          <a:p>
-            <a:r>
-              <a:t>inconsistent를 vote가 아니라 기권으로 두고, 남은 decisive vote가 서로 충돌하지 않을 때만 winner를 선언합니다.</a:t>
-            </a:r>
-          </a:p>
-          <a:p>
-            <a:r>
-              <a:t>그래서 [inconsistent, inconsistent, A]는 A로 복구되고,</a:t>
-            </a:r>
-          </a:p>
-          <a:p>
-            <a:r>
-              <a:t>[A, B, inconsistent]는 여전히 inconsistent로 남습니다.</a:t>
+              <a:t>즉 큰 흐름의 ranking validity와, 개별 질문 수준의 decision cleanliness는 다른 문제입니다.</a:t>
+            </a:r>
+          </a:p>
+          <a:p>
+            <a:r>
+              <a:t>앙상블 결과도 같은 교훈을 줍니다.</a:t>
+            </a:r>
+          </a:p>
+          <a:p>
+            <a:r>
+              <a:t>작은 judge를 그냥 다수결로 합치면 오히려 오염되고,</a:t>
+            </a:r>
+          </a:p>
+          <a:p>
+            <a:r>
+              <a:t>abstain ensemble처럼 불확실성을 관리해야 오히려 더 좋아집니다.</a:t>
             </a:r>
           </a:p>
           <a:p/>
           <a:p>
             <a:r>
-              <a:t>즉 이 설계는 무조건 많이 판단하려는 것도 아니고, 무조건 보수적으로 포기하는 것도 아닙니다.</a:t>
-            </a:r>
-          </a:p>
-          <a:p>
-            <a:r>
-              <a:t>낮은 품질 judge의 불확실한 표를 집계에서 분리해 measurement noise를 줄이는 방식입니다.</a:t>
-            </a:r>
-          </a:p>
-          <a:p>
-            <a:r>
-              <a:t>604쌍이 복구되고 decisive rate도 올라간다는 숫자가 바로 그 설계적 의미를 보여줍니다.</a:t>
+              <a:t>그래서 이 슬라이드는 judge 연구를 단순 모델 비교가 아니라</a:t>
+            </a:r>
+          </a:p>
+          <a:p>
+            <a:r>
+              <a:t>evaluation system design 문제로 읽어야 한다는 메시지를 줍니다.</a:t>
             </a:r>
           </a:p>
         </p:txBody>
@@ -1335,54 +1311,75 @@
           <a:lstStyle/>
           <a:p>
             <a:r>
-              <a:t>이제 RQ3를 한 장에서 정리합니다.</a:t>
-            </a:r>
-          </a:p>
-          <a:p>
-            <a:r>
-              <a:t>Claude 피드백을 반영해서 InternLM, GPT-4o-mini, hold-out을 하나의 arc로 묶었습니다.</a:t>
+              <a:t>이 슬라이드는 제가 이번 발표에서 꼭 분리해서 설명하고 싶은 부분입니다.</a:t>
+            </a:r>
+          </a:p>
+          <a:p>
+            <a:r>
+              <a:t>많은 청중이 기권 설계를 보면 처음에는 보수적으로 포기한 것처럼 받아들입니다.</a:t>
+            </a:r>
+          </a:p>
+          <a:p>
+            <a:r>
+              <a:t>하지만 실제로는 반대입니다. 이건 decision rule을 더 정교하게 만든 겁니다.</a:t>
             </a:r>
           </a:p>
           <a:p/>
           <a:p>
             <a:r>
-              <a:t>첫 번째 포인트는 cross-family sanity입니다.</a:t>
-            </a:r>
-          </a:p>
-          <a:p>
-            <a:r>
-              <a:t>InternLM20B는 Qwen32와 broad ranking을 꽤 잘 맞추지만 더 noisy합니다.</a:t>
-            </a:r>
-          </a:p>
-          <a:p>
-            <a:r>
-              <a:t>두 번째 포인트는 strongest external anchor입니다.</a:t>
-            </a:r>
-          </a:p>
-          <a:p>
-            <a:r>
-              <a:t>GPT-4o-mini는 Qwen32와 가장 잘 맞는 외부 judge입니다.</a:t>
-            </a:r>
-          </a:p>
-          <a:p>
-            <a:r>
-              <a:t>세 번째 포인트는 question reduction의 hold-out 현실입니다.</a:t>
-            </a:r>
-          </a:p>
-          <a:p>
-            <a:r>
-              <a:t>repeated hold-out 기준으로는 60문항이 가장 안전한 운영점입니다.</a:t>
+              <a:t>pairwise 한 쌍에 대해 각 judge는 A, B, tie, inconsistent 중 하나를 냅니다.</a:t>
+            </a:r>
+          </a:p>
+          <a:p>
+            <a:r>
+              <a:t>여기서 inconsistent는 세 번째 class라기보다, AB/BA swap이 충돌한 low-confidence signal입니다.</a:t>
+            </a:r>
+          </a:p>
+          <a:p>
+            <a:r>
+              <a:t>그런데 다수결은 이걸 일반 표처럼 셉니다.</a:t>
+            </a:r>
+          </a:p>
+          <a:p>
+            <a:r>
+              <a:t>그러면 [inconsistent, inconsistent, A] 같은 상황에서도 winner를 잃습니다.</a:t>
             </a:r>
           </a:p>
           <a:p/>
           <a:p>
             <a:r>
-              <a:t>즉 RQ3는 완전한 yes가 아니라 partial yes라고 답해야 정직합니다.</a:t>
-            </a:r>
-          </a:p>
-          <a:p>
-            <a:r>
-              <a:t>큰 흐름은 남지만, judge 품질과 question-level cleanliness는 서로 다릅니다.</a:t>
+              <a:t>abstain은 다르게 봅니다.</a:t>
+            </a:r>
+          </a:p>
+          <a:p>
+            <a:r>
+              <a:t>inconsistent를 vote가 아니라 기권으로 두고, 남은 decisive vote가 서로 충돌하지 않을 때만 winner를 선언합니다.</a:t>
+            </a:r>
+          </a:p>
+          <a:p>
+            <a:r>
+              <a:t>그래서 [inconsistent, inconsistent, A]는 A로 복구되고,</a:t>
+            </a:r>
+          </a:p>
+          <a:p>
+            <a:r>
+              <a:t>[A, B, inconsistent]는 여전히 inconsistent로 남습니다.</a:t>
+            </a:r>
+          </a:p>
+          <a:p/>
+          <a:p>
+            <a:r>
+              <a:t>즉 이 설계는 무조건 많이 판단하려는 것도 아니고, 무조건 보수적으로 포기하는 것도 아닙니다.</a:t>
+            </a:r>
+          </a:p>
+          <a:p>
+            <a:r>
+              <a:t>낮은 품질 judge의 불확실한 표를 집계에서 분리해 measurement noise를 줄이는 방식입니다.</a:t>
+            </a:r>
+          </a:p>
+          <a:p>
+            <a:r>
+              <a:t>604쌍이 복구되고 decisive rate도 올라간다는 숫자가 바로 그 설계적 의미를 보여줍니다.</a:t>
             </a:r>
           </a:p>
         </p:txBody>
@@ -1452,65 +1449,54 @@
           <a:lstStyle/>
           <a:p>
             <a:r>
-              <a:t>이 슬라이드는 2부 전체를 닫아 주는 슬라이드입니다.</a:t>
-            </a:r>
-          </a:p>
-          <a:p>
-            <a:r>
-              <a:t>Claude가 지적한 것처럼 2부가 phase 보고의 나열로 끝나면 연구 질문이 희미해집니다.</a:t>
-            </a:r>
-          </a:p>
-          <a:p>
-            <a:r>
-              <a:t>그래서 처음 던진 RQ1, RQ2, RQ3를 다시 불러와 답하는 방식으로 마무리합니다.</a:t>
+              <a:t>이제 RQ3를 한 장에서 정리합니다.</a:t>
+            </a:r>
+          </a:p>
+          <a:p>
+            <a:r>
+              <a:t>Claude 피드백을 반영해서 InternLM, GPT-4o-mini, hold-out을 하나의 arc로 묶었습니다.</a:t>
             </a:r>
           </a:p>
           <a:p/>
           <a:p>
             <a:r>
-              <a:t>RQ1에 대한 답은 가장 명확합니다.</a:t>
-            </a:r>
-          </a:p>
-          <a:p>
-            <a:r>
-              <a:t>Qwen same-family에서는 judge scaling이 reliability 개선으로 이어졌습니다.</a:t>
-            </a:r>
-          </a:p>
-          <a:p>
-            <a:r>
-              <a:t>RQ2에 대한 답도 선명합니다.</a:t>
-            </a:r>
-          </a:p>
-          <a:p>
-            <a:r>
-              <a:t>남는 오류는 단순 noise가 아니라 구조화된 bias와 format failure입니다.</a:t>
+              <a:t>첫 번째 포인트는 cross-family sanity입니다.</a:t>
+            </a:r>
+          </a:p>
+          <a:p>
+            <a:r>
+              <a:t>InternLM20B는 Qwen32와 broad ranking을 꽤 잘 맞추지만 더 noisy합니다.</a:t>
+            </a:r>
+          </a:p>
+          <a:p>
+            <a:r>
+              <a:t>두 번째 포인트는 strongest external anchor입니다.</a:t>
+            </a:r>
+          </a:p>
+          <a:p>
+            <a:r>
+              <a:t>GPT-4o-mini는 Qwen32와 가장 잘 맞는 외부 judge입니다.</a:t>
+            </a:r>
+          </a:p>
+          <a:p>
+            <a:r>
+              <a:t>세 번째 포인트는 question reduction의 hold-out 현실입니다.</a:t>
+            </a:r>
+          </a:p>
+          <a:p>
+            <a:r>
+              <a:t>repeated hold-out 기준으로는 60문항이 가장 안전한 운영점입니다.</a:t>
             </a:r>
           </a:p>
           <a:p/>
           <a:p>
             <a:r>
-              <a:t>RQ3는 부분적으로만 예라고 답해야 정직합니다.</a:t>
-            </a:r>
-          </a:p>
-          <a:p>
-            <a:r>
-              <a:t>InternLM20B, GPT-4o-mini, repeated hold-out이 broad claim을 지지하지만,</a:t>
-            </a:r>
-          </a:p>
-          <a:p>
-            <a:r>
-              <a:t>이걸 모든 open judge에 대한 보편 법칙처럼 말하면 과합니다.</a:t>
-            </a:r>
-          </a:p>
-          <a:p/>
-          <a:p>
-            <a:r>
-              <a:t>이 슬라이드가 들어가면 2부가 phase 보고가 아니라</a:t>
-            </a:r>
-          </a:p>
-          <a:p>
-            <a:r>
-              <a:t>세 개의 연구 질문에 대한 실험적 답변으로 닫히게 됩니다.</a:t>
+              <a:t>즉 RQ3는 완전한 yes가 아니라 partial yes라고 답해야 정직합니다.</a:t>
+            </a:r>
+          </a:p>
+          <a:p>
+            <a:r>
+              <a:t>큰 흐름은 남지만, judge 품질과 question-level cleanliness는 서로 다릅니다.</a:t>
             </a:r>
           </a:p>
         </p:txBody>
@@ -1536,6 +1522,134 @@
 </file>
 
 <file path=ppt/notesSlides/notesSlide18.xml><?xml version="1.0" encoding="utf-8"?>
+<p:notes xmlns:a="http://schemas.openxmlformats.org/drawingml/2006/main" xmlns:p="http://schemas.openxmlformats.org/presentationml/2006/main" xmlns:r="http://schemas.openxmlformats.org/officeDocument/2006/relationships">
+  <p:cSld>
+    <p:spTree>
+      <p:nvGrpSpPr>
+        <p:cNvPr id="1" name=""/>
+        <p:cNvGrpSpPr/>
+        <p:nvPr/>
+      </p:nvGrpSpPr>
+      <p:grpSpPr>
+        <a:xfrm>
+          <a:off x="0" y="0"/>
+          <a:ext cx="0" cy="0"/>
+          <a:chOff x="0" y="0"/>
+          <a:chExt cx="0" cy="0"/>
+        </a:xfrm>
+      </p:grpSpPr>
+      <p:sp>
+        <p:nvSpPr>
+          <p:cNvPr id="2" name="Slide Image Placeholder 1"/>
+          <p:cNvSpPr>
+            <a:spLocks noGrp="1"/>
+          </p:cNvSpPr>
+          <p:nvPr>
+            <p:ph type="sldImg" idx="2"/>
+          </p:nvPr>
+        </p:nvSpPr>
+        <p:spPr/>
+      </p:sp>
+      <p:sp>
+        <p:nvSpPr>
+          <p:cNvPr id="3" name="Notes Placeholder 2"/>
+          <p:cNvSpPr>
+            <a:spLocks noGrp="1"/>
+          </p:cNvSpPr>
+          <p:nvPr>
+            <p:ph type="body" idx="3" sz="quarter"/>
+          </p:nvPr>
+        </p:nvSpPr>
+        <p:spPr/>
+        <p:txBody>
+          <a:bodyPr/>
+          <a:lstStyle/>
+          <a:p>
+            <a:r>
+              <a:t>이 슬라이드는 2부 전체를 닫아 주는 슬라이드입니다.</a:t>
+            </a:r>
+          </a:p>
+          <a:p>
+            <a:r>
+              <a:t>Claude가 지적한 것처럼 2부가 phase 보고의 나열로 끝나면 연구 질문이 희미해집니다.</a:t>
+            </a:r>
+          </a:p>
+          <a:p>
+            <a:r>
+              <a:t>그래서 처음 던진 RQ1, RQ2, RQ3를 다시 불러와 답하는 방식으로 마무리합니다.</a:t>
+            </a:r>
+          </a:p>
+          <a:p/>
+          <a:p>
+            <a:r>
+              <a:t>RQ1에 대한 답은 가장 명확합니다.</a:t>
+            </a:r>
+          </a:p>
+          <a:p>
+            <a:r>
+              <a:t>Qwen judge scaling 결과에서는 reliability 개선이 분명히 관찰됐습니다.</a:t>
+            </a:r>
+          </a:p>
+          <a:p>
+            <a:r>
+              <a:t>RQ2에 대한 답도 선명합니다.</a:t>
+            </a:r>
+          </a:p>
+          <a:p>
+            <a:r>
+              <a:t>남는 오류는 단순 noise가 아니라 구조화된 bias와 format failure입니다.</a:t>
+            </a:r>
+          </a:p>
+          <a:p/>
+          <a:p>
+            <a:r>
+              <a:t>RQ3는 부분적으로만 예라고 답해야 정직합니다.</a:t>
+            </a:r>
+          </a:p>
+          <a:p>
+            <a:r>
+              <a:t>InternLM20B, GPT-4o-mini, repeated hold-out이 broad claim을 지지하지만,</a:t>
+            </a:r>
+          </a:p>
+          <a:p>
+            <a:r>
+              <a:t>이걸 모든 open judge에 대한 보편 법칙처럼 말하면 과합니다.</a:t>
+            </a:r>
+          </a:p>
+          <a:p/>
+          <a:p>
+            <a:r>
+              <a:t>이 슬라이드가 들어가면 2부가 phase 보고가 아니라</a:t>
+            </a:r>
+          </a:p>
+          <a:p>
+            <a:r>
+              <a:t>세 개의 연구 질문에 대한 실험적 답변으로 닫히게 됩니다.</a:t>
+            </a:r>
+          </a:p>
+        </p:txBody>
+      </p:sp>
+      <p:sp>
+        <p:nvSpPr>
+          <p:cNvPr id="4" name="Slide Number Placeholder 3"/>
+          <p:cNvSpPr>
+            <a:spLocks noGrp="1"/>
+          </p:cNvSpPr>
+          <p:nvPr>
+            <p:ph type="sldNum" idx="5" sz="quarter"/>
+          </p:nvPr>
+        </p:nvSpPr>
+        <p:spPr/>
+      </p:sp>
+    </p:spTree>
+  </p:cSld>
+  <p:clrMapOvr>
+    <a:masterClrMapping/>
+  </p:clrMapOvr>
+</p:notes>
+</file>
+
+<file path=ppt/notesSlides/notesSlide19.xml><?xml version="1.0" encoding="utf-8"?>
 <p:notes xmlns:a="http://schemas.openxmlformats.org/drawingml/2006/main" xmlns:p="http://schemas.openxmlformats.org/presentationml/2006/main" xmlns:r="http://schemas.openxmlformats.org/officeDocument/2006/relationships">
   <p:cSld>
     <p:spTree>
@@ -6493,7 +6607,7 @@
                 </a:solidFill>
                 <a:latin typeface="Apple SD Gothic Neo"/>
               </a:rPr>
-              <a:t>10/18</a:t>
+              <a:t>10/19</a:t>
             </a:r>
           </a:p>
         </p:txBody>
@@ -6723,7 +6837,7 @@
                 </a:solidFill>
                 <a:latin typeface="Apple SD Gothic Neo"/>
               </a:rPr>
-              <a:t>11/18</a:t>
+              <a:t>11/19</a:t>
             </a:r>
           </a:p>
         </p:txBody>
@@ -7444,7 +7558,7 @@
                 </a:solidFill>
                 <a:latin typeface="Apple SD Gothic Neo"/>
               </a:rPr>
-              <a:t>RQ1 준비. Phase 1–2: 왜 self-judge를 믿으면 안 되는가</a:t>
+              <a:t>2-2. 실험은 어떤 순서로 진행했는가</a:t>
             </a:r>
           </a:p>
         </p:txBody>
@@ -7524,7 +7638,7 @@
                 </a:solidFill>
                 <a:latin typeface="Apple SD Gothic Neo"/>
               </a:rPr>
-              <a:t>12/18</a:t>
+              <a:t>12/19</a:t>
             </a:r>
           </a:p>
         </p:txBody>
@@ -7647,59 +7761,97 @@
                 </a:solidFill>
                 <a:latin typeface="Apple SD Gothic Neo"/>
               </a:rPr>
-              <a:t>이 슬라이드의 목적: 메인 실험에 들어가기 전에 self-judge bias와 초기 sanity check를 짚는다.</a:t>
-            </a:r>
-          </a:p>
-        </p:txBody>
-      </p:sp>
-      <p:pic>
-        <p:nvPicPr>
-          <p:cNvPr id="10" name="Picture 9" descr="fig0_phase1_scores.png"/>
-          <p:cNvPicPr>
-            <a:picLocks noChangeAspect="1"/>
-          </p:cNvPicPr>
-          <p:nvPr/>
-        </p:nvPicPr>
-        <p:blipFill>
-          <a:blip r:embed="rId2"/>
-          <a:stretch>
-            <a:fillRect/>
-          </a:stretch>
-        </p:blipFill>
-        <p:spPr>
-          <a:xfrm>
-            <a:off x="502920" y="1261872"/>
-            <a:ext cx="5468112" cy="2700226"/>
-          </a:xfrm>
-          <a:prstGeom prst="rect">
-            <a:avLst/>
-          </a:prstGeom>
-        </p:spPr>
-      </p:pic>
-      <p:pic>
-        <p:nvPicPr>
-          <p:cNvPr id="11" name="Picture 10" descr="fig2_overall_rankings.png"/>
-          <p:cNvPicPr>
-            <a:picLocks noChangeAspect="1"/>
-          </p:cNvPicPr>
-          <p:nvPr/>
-        </p:nvPicPr>
-        <p:blipFill>
-          <a:blip r:embed="rId3"/>
-          <a:stretch>
-            <a:fillRect/>
-          </a:stretch>
-        </p:blipFill>
-        <p:spPr>
-          <a:xfrm>
-            <a:off x="6199632" y="1261872"/>
-            <a:ext cx="5468112" cy="2130702"/>
-          </a:xfrm>
-          <a:prstGeom prst="rect">
-            <a:avLst/>
-          </a:prstGeom>
-        </p:spPr>
-      </p:pic>
+              <a:t>이 슬라이드의 목적: Phase 1부터 Phase 6까지의 실험 순서를 한 장에서 보여준다.</a:t>
+            </a:r>
+          </a:p>
+        </p:txBody>
+      </p:sp>
+      <p:sp>
+        <p:nvSpPr>
+          <p:cNvPr id="10" name="Rectangle 9"/>
+          <p:cNvSpPr/>
+          <p:nvPr/>
+        </p:nvSpPr>
+        <p:spPr>
+          <a:xfrm>
+            <a:off x="914400" y="1920240"/>
+            <a:ext cx="10149840" cy="54864"/>
+          </a:xfrm>
+          <a:prstGeom prst="rect">
+            <a:avLst/>
+          </a:prstGeom>
+          <a:solidFill>
+            <a:srgbClr val="DAD4CA"/>
+          </a:solidFill>
+          <a:ln>
+            <a:noFill/>
+          </a:ln>
+        </p:spPr>
+        <p:style>
+          <a:lnRef idx="1">
+            <a:schemeClr val="accent1"/>
+          </a:lnRef>
+          <a:fillRef idx="3">
+            <a:schemeClr val="accent1"/>
+          </a:fillRef>
+          <a:effectRef idx="2">
+            <a:schemeClr val="accent1"/>
+          </a:effectRef>
+          <a:fontRef idx="minor">
+            <a:schemeClr val="lt1"/>
+          </a:fontRef>
+        </p:style>
+        <p:txBody>
+          <a:bodyPr rtlCol="0" anchor="ctr"/>
+          <a:lstStyle/>
+          <a:p>
+            <a:pPr algn="ctr"/>
+          </a:p>
+        </p:txBody>
+      </p:sp>
+      <p:sp>
+        <p:nvSpPr>
+          <p:cNvPr id="11" name="Oval 10"/>
+          <p:cNvSpPr/>
+          <p:nvPr/>
+        </p:nvSpPr>
+        <p:spPr>
+          <a:xfrm>
+            <a:off x="914400" y="1572768"/>
+            <a:ext cx="658368" cy="658368"/>
+          </a:xfrm>
+          <a:prstGeom prst="ellipse">
+            <a:avLst/>
+          </a:prstGeom>
+          <a:solidFill>
+            <a:srgbClr val="BF9A5E"/>
+          </a:solidFill>
+          <a:ln>
+            <a:noFill/>
+          </a:ln>
+        </p:spPr>
+        <p:style>
+          <a:lnRef idx="1">
+            <a:schemeClr val="accent1"/>
+          </a:lnRef>
+          <a:fillRef idx="3">
+            <a:schemeClr val="accent1"/>
+          </a:fillRef>
+          <a:effectRef idx="2">
+            <a:schemeClr val="accent1"/>
+          </a:effectRef>
+          <a:fontRef idx="minor">
+            <a:schemeClr val="lt1"/>
+          </a:fontRef>
+        </p:style>
+        <p:txBody>
+          <a:bodyPr rtlCol="0" anchor="ctr"/>
+          <a:lstStyle/>
+          <a:p>
+            <a:pPr algn="ctr"/>
+          </a:p>
+        </p:txBody>
+      </p:sp>
       <p:sp>
         <p:nvSpPr>
           <p:cNvPr id="12" name="TextBox 11"/>
@@ -7708,8 +7860,8 @@
         </p:nvSpPr>
         <p:spPr>
           <a:xfrm>
-            <a:off x="566928" y="4297680"/>
-            <a:ext cx="5340096" cy="201168"/>
+            <a:off x="914400" y="1746504"/>
+            <a:ext cx="658368" cy="137160"/>
           </a:xfrm>
           <a:prstGeom prst="rect">
             <a:avLst/>
@@ -7720,20 +7872,20 @@
           </a:ln>
         </p:spPr>
         <p:txBody>
-          <a:bodyPr wrap="square" lIns="64008" rIns="64008" tIns="64008" bIns="64008" anchor="t">
+          <a:bodyPr wrap="square" lIns="0" rIns="0" tIns="0" bIns="0" anchor="t">
             <a:spAutoFit/>
           </a:bodyPr>
           <a:lstStyle/>
           <a:p>
             <a:pPr algn="ctr"/>
             <a:r>
-              <a:rPr sz="1000" b="0">
-                <a:solidFill>
-                  <a:srgbClr val="70767D"/>
-                </a:solidFill>
-                <a:latin typeface="Apple SD Gothic Neo"/>
-              </a:rPr>
-              <a:t>Phase 1 self-judge category scores</a:t>
+              <a:rPr sz="1100" b="1">
+                <a:solidFill>
+                  <a:srgbClr val="FFFFFF"/>
+                </a:solidFill>
+                <a:latin typeface="Apple SD Gothic Neo"/>
+              </a:rPr>
+              <a:t>P1</a:t>
             </a:r>
           </a:p>
         </p:txBody>
@@ -7746,8 +7898,8 @@
         </p:nvSpPr>
         <p:spPr>
           <a:xfrm>
-            <a:off x="6263640" y="4297680"/>
-            <a:ext cx="5340096" cy="201168"/>
+            <a:off x="749808" y="2267712"/>
+            <a:ext cx="987552" cy="320040"/>
           </a:xfrm>
           <a:prstGeom prst="rect">
             <a:avLst/>
@@ -7758,34 +7910,629 @@
           </a:ln>
         </p:spPr>
         <p:txBody>
-          <a:bodyPr wrap="square" lIns="64008" rIns="64008" tIns="64008" bIns="64008" anchor="t">
+          <a:bodyPr wrap="square" lIns="0" rIns="0" tIns="0" bIns="0" anchor="t">
             <a:spAutoFit/>
           </a:bodyPr>
           <a:lstStyle/>
           <a:p>
             <a:pPr algn="ctr"/>
             <a:r>
-              <a:rPr sz="1000" b="0">
-                <a:solidFill>
-                  <a:srgbClr val="70767D"/>
-                </a:solidFill>
-                <a:latin typeface="Apple SD Gothic Neo"/>
-              </a:rPr>
-              <a:t>초기 overall ordering sanity check</a:t>
-            </a:r>
-          </a:p>
-        </p:txBody>
-      </p:sp>
-      <p:sp>
-        <p:nvSpPr>
-          <p:cNvPr id="14" name="TextBox 13"/>
-          <p:cNvSpPr txBox="1"/>
-          <p:nvPr/>
-        </p:nvSpPr>
-        <p:spPr>
-          <a:xfrm>
-            <a:off x="502920" y="4553712"/>
-            <a:ext cx="11155680" cy="1417320"/>
+              <a:rPr sz="1200" b="1">
+                <a:solidFill>
+                  <a:srgbClr val="282C3A"/>
+                </a:solidFill>
+                <a:latin typeface="Apple SD Gothic Neo"/>
+              </a:rPr>
+              <a:t>Self-judge</a:t>
+            </a:r>
+          </a:p>
+        </p:txBody>
+      </p:sp>
+      <p:sp>
+        <p:nvSpPr>
+          <p:cNvPr id="14" name="Oval 13"/>
+          <p:cNvSpPr/>
+          <p:nvPr/>
+        </p:nvSpPr>
+        <p:spPr>
+          <a:xfrm>
+            <a:off x="2697480" y="1572768"/>
+            <a:ext cx="658368" cy="658368"/>
+          </a:xfrm>
+          <a:prstGeom prst="ellipse">
+            <a:avLst/>
+          </a:prstGeom>
+          <a:solidFill>
+            <a:srgbClr val="B5654E"/>
+          </a:solidFill>
+          <a:ln>
+            <a:noFill/>
+          </a:ln>
+        </p:spPr>
+        <p:style>
+          <a:lnRef idx="1">
+            <a:schemeClr val="accent1"/>
+          </a:lnRef>
+          <a:fillRef idx="3">
+            <a:schemeClr val="accent1"/>
+          </a:fillRef>
+          <a:effectRef idx="2">
+            <a:schemeClr val="accent1"/>
+          </a:effectRef>
+          <a:fontRef idx="minor">
+            <a:schemeClr val="lt1"/>
+          </a:fontRef>
+        </p:style>
+        <p:txBody>
+          <a:bodyPr rtlCol="0" anchor="ctr"/>
+          <a:lstStyle/>
+          <a:p>
+            <a:pPr algn="ctr"/>
+          </a:p>
+        </p:txBody>
+      </p:sp>
+      <p:sp>
+        <p:nvSpPr>
+          <p:cNvPr id="15" name="TextBox 14"/>
+          <p:cNvSpPr txBox="1"/>
+          <p:nvPr/>
+        </p:nvSpPr>
+        <p:spPr>
+          <a:xfrm>
+            <a:off x="2697480" y="1746504"/>
+            <a:ext cx="658368" cy="137160"/>
+          </a:xfrm>
+          <a:prstGeom prst="rect">
+            <a:avLst/>
+          </a:prstGeom>
+          <a:noFill/>
+          <a:ln>
+            <a:noFill/>
+          </a:ln>
+        </p:spPr>
+        <p:txBody>
+          <a:bodyPr wrap="square" lIns="0" rIns="0" tIns="0" bIns="0" anchor="t">
+            <a:spAutoFit/>
+          </a:bodyPr>
+          <a:lstStyle/>
+          <a:p>
+            <a:pPr algn="ctr"/>
+            <a:r>
+              <a:rPr sz="1100" b="1">
+                <a:solidFill>
+                  <a:srgbClr val="FFFFFF"/>
+                </a:solidFill>
+                <a:latin typeface="Apple SD Gothic Neo"/>
+              </a:rPr>
+              <a:t>P2</a:t>
+            </a:r>
+          </a:p>
+        </p:txBody>
+      </p:sp>
+      <p:sp>
+        <p:nvSpPr>
+          <p:cNvPr id="16" name="TextBox 15"/>
+          <p:cNvSpPr txBox="1"/>
+          <p:nvPr/>
+        </p:nvSpPr>
+        <p:spPr>
+          <a:xfrm>
+            <a:off x="2532888" y="2267712"/>
+            <a:ext cx="987552" cy="320040"/>
+          </a:xfrm>
+          <a:prstGeom prst="rect">
+            <a:avLst/>
+          </a:prstGeom>
+          <a:noFill/>
+          <a:ln>
+            <a:noFill/>
+          </a:ln>
+        </p:spPr>
+        <p:txBody>
+          <a:bodyPr wrap="square" lIns="0" rIns="0" tIns="0" bIns="0" anchor="t">
+            <a:spAutoFit/>
+          </a:bodyPr>
+          <a:lstStyle/>
+          <a:p>
+            <a:pPr algn="ctr"/>
+            <a:r>
+              <a:rPr sz="1200" b="1">
+                <a:solidFill>
+                  <a:srgbClr val="282C3A"/>
+                </a:solidFill>
+                <a:latin typeface="Apple SD Gothic Neo"/>
+              </a:rPr>
+              <a:t>Sanity</a:t>
+            </a:r>
+          </a:p>
+        </p:txBody>
+      </p:sp>
+      <p:sp>
+        <p:nvSpPr>
+          <p:cNvPr id="17" name="Oval 16"/>
+          <p:cNvSpPr/>
+          <p:nvPr/>
+        </p:nvSpPr>
+        <p:spPr>
+          <a:xfrm>
+            <a:off x="4480560" y="1572768"/>
+            <a:ext cx="658368" cy="658368"/>
+          </a:xfrm>
+          <a:prstGeom prst="ellipse">
+            <a:avLst/>
+          </a:prstGeom>
+          <a:solidFill>
+            <a:srgbClr val="375667"/>
+          </a:solidFill>
+          <a:ln>
+            <a:noFill/>
+          </a:ln>
+        </p:spPr>
+        <p:style>
+          <a:lnRef idx="1">
+            <a:schemeClr val="accent1"/>
+          </a:lnRef>
+          <a:fillRef idx="3">
+            <a:schemeClr val="accent1"/>
+          </a:fillRef>
+          <a:effectRef idx="2">
+            <a:schemeClr val="accent1"/>
+          </a:effectRef>
+          <a:fontRef idx="minor">
+            <a:schemeClr val="lt1"/>
+          </a:fontRef>
+        </p:style>
+        <p:txBody>
+          <a:bodyPr rtlCol="0" anchor="ctr"/>
+          <a:lstStyle/>
+          <a:p>
+            <a:pPr algn="ctr"/>
+          </a:p>
+        </p:txBody>
+      </p:sp>
+      <p:sp>
+        <p:nvSpPr>
+          <p:cNvPr id="18" name="TextBox 17"/>
+          <p:cNvSpPr txBox="1"/>
+          <p:nvPr/>
+        </p:nvSpPr>
+        <p:spPr>
+          <a:xfrm>
+            <a:off x="4480560" y="1746504"/>
+            <a:ext cx="658368" cy="137160"/>
+          </a:xfrm>
+          <a:prstGeom prst="rect">
+            <a:avLst/>
+          </a:prstGeom>
+          <a:noFill/>
+          <a:ln>
+            <a:noFill/>
+          </a:ln>
+        </p:spPr>
+        <p:txBody>
+          <a:bodyPr wrap="square" lIns="0" rIns="0" tIns="0" bIns="0" anchor="t">
+            <a:spAutoFit/>
+          </a:bodyPr>
+          <a:lstStyle/>
+          <a:p>
+            <a:pPr algn="ctr"/>
+            <a:r>
+              <a:rPr sz="1100" b="1">
+                <a:solidFill>
+                  <a:srgbClr val="FFFFFF"/>
+                </a:solidFill>
+                <a:latin typeface="Apple SD Gothic Neo"/>
+              </a:rPr>
+              <a:t>P3</a:t>
+            </a:r>
+          </a:p>
+        </p:txBody>
+      </p:sp>
+      <p:sp>
+        <p:nvSpPr>
+          <p:cNvPr id="19" name="TextBox 18"/>
+          <p:cNvSpPr txBox="1"/>
+          <p:nvPr/>
+        </p:nvSpPr>
+        <p:spPr>
+          <a:xfrm>
+            <a:off x="4315968" y="2267712"/>
+            <a:ext cx="987552" cy="320040"/>
+          </a:xfrm>
+          <a:prstGeom prst="rect">
+            <a:avLst/>
+          </a:prstGeom>
+          <a:noFill/>
+          <a:ln>
+            <a:noFill/>
+          </a:ln>
+        </p:spPr>
+        <p:txBody>
+          <a:bodyPr wrap="square" lIns="0" rIns="0" tIns="0" bIns="0" anchor="t">
+            <a:spAutoFit/>
+          </a:bodyPr>
+          <a:lstStyle/>
+          <a:p>
+            <a:pPr algn="ctr"/>
+            <a:r>
+              <a:rPr sz="1200" b="1">
+                <a:solidFill>
+                  <a:srgbClr val="282C3A"/>
+                </a:solidFill>
+                <a:latin typeface="Apple SD Gothic Neo"/>
+              </a:rPr>
+              <a:t>Scaling</a:t>
+            </a:r>
+          </a:p>
+        </p:txBody>
+      </p:sp>
+      <p:sp>
+        <p:nvSpPr>
+          <p:cNvPr id="20" name="Oval 19"/>
+          <p:cNvSpPr/>
+          <p:nvPr/>
+        </p:nvSpPr>
+        <p:spPr>
+          <a:xfrm>
+            <a:off x="6263640" y="1572768"/>
+            <a:ext cx="658368" cy="658368"/>
+          </a:xfrm>
+          <a:prstGeom prst="ellipse">
+            <a:avLst/>
+          </a:prstGeom>
+          <a:solidFill>
+            <a:srgbClr val="668185"/>
+          </a:solidFill>
+          <a:ln>
+            <a:noFill/>
+          </a:ln>
+        </p:spPr>
+        <p:style>
+          <a:lnRef idx="1">
+            <a:schemeClr val="accent1"/>
+          </a:lnRef>
+          <a:fillRef idx="3">
+            <a:schemeClr val="accent1"/>
+          </a:fillRef>
+          <a:effectRef idx="2">
+            <a:schemeClr val="accent1"/>
+          </a:effectRef>
+          <a:fontRef idx="minor">
+            <a:schemeClr val="lt1"/>
+          </a:fontRef>
+        </p:style>
+        <p:txBody>
+          <a:bodyPr rtlCol="0" anchor="ctr"/>
+          <a:lstStyle/>
+          <a:p>
+            <a:pPr algn="ctr"/>
+          </a:p>
+        </p:txBody>
+      </p:sp>
+      <p:sp>
+        <p:nvSpPr>
+          <p:cNvPr id="21" name="TextBox 20"/>
+          <p:cNvSpPr txBox="1"/>
+          <p:nvPr/>
+        </p:nvSpPr>
+        <p:spPr>
+          <a:xfrm>
+            <a:off x="6263640" y="1746504"/>
+            <a:ext cx="658368" cy="137160"/>
+          </a:xfrm>
+          <a:prstGeom prst="rect">
+            <a:avLst/>
+          </a:prstGeom>
+          <a:noFill/>
+          <a:ln>
+            <a:noFill/>
+          </a:ln>
+        </p:spPr>
+        <p:txBody>
+          <a:bodyPr wrap="square" lIns="0" rIns="0" tIns="0" bIns="0" anchor="t">
+            <a:spAutoFit/>
+          </a:bodyPr>
+          <a:lstStyle/>
+          <a:p>
+            <a:pPr algn="ctr"/>
+            <a:r>
+              <a:rPr sz="1100" b="1">
+                <a:solidFill>
+                  <a:srgbClr val="FFFFFF"/>
+                </a:solidFill>
+                <a:latin typeface="Apple SD Gothic Neo"/>
+              </a:rPr>
+              <a:t>P4</a:t>
+            </a:r>
+          </a:p>
+        </p:txBody>
+      </p:sp>
+      <p:sp>
+        <p:nvSpPr>
+          <p:cNvPr id="22" name="TextBox 21"/>
+          <p:cNvSpPr txBox="1"/>
+          <p:nvPr/>
+        </p:nvSpPr>
+        <p:spPr>
+          <a:xfrm>
+            <a:off x="6099048" y="2267712"/>
+            <a:ext cx="987552" cy="320040"/>
+          </a:xfrm>
+          <a:prstGeom prst="rect">
+            <a:avLst/>
+          </a:prstGeom>
+          <a:noFill/>
+          <a:ln>
+            <a:noFill/>
+          </a:ln>
+        </p:spPr>
+        <p:txBody>
+          <a:bodyPr wrap="square" lIns="0" rIns="0" tIns="0" bIns="0" anchor="t">
+            <a:spAutoFit/>
+          </a:bodyPr>
+          <a:lstStyle/>
+          <a:p>
+            <a:pPr algn="ctr"/>
+            <a:r>
+              <a:rPr sz="1200" b="1">
+                <a:solidFill>
+                  <a:srgbClr val="282C3A"/>
+                </a:solidFill>
+                <a:latin typeface="Apple SD Gothic Neo"/>
+              </a:rPr>
+              <a:t>InternLM</a:t>
+            </a:r>
+          </a:p>
+        </p:txBody>
+      </p:sp>
+      <p:sp>
+        <p:nvSpPr>
+          <p:cNvPr id="23" name="Oval 22"/>
+          <p:cNvSpPr/>
+          <p:nvPr/>
+        </p:nvSpPr>
+        <p:spPr>
+          <a:xfrm>
+            <a:off x="8046720" y="1572768"/>
+            <a:ext cx="658368" cy="658368"/>
+          </a:xfrm>
+          <a:prstGeom prst="ellipse">
+            <a:avLst/>
+          </a:prstGeom>
+          <a:solidFill>
+            <a:srgbClr val="282C3A"/>
+          </a:solidFill>
+          <a:ln>
+            <a:noFill/>
+          </a:ln>
+        </p:spPr>
+        <p:style>
+          <a:lnRef idx="1">
+            <a:schemeClr val="accent1"/>
+          </a:lnRef>
+          <a:fillRef idx="3">
+            <a:schemeClr val="accent1"/>
+          </a:fillRef>
+          <a:effectRef idx="2">
+            <a:schemeClr val="accent1"/>
+          </a:effectRef>
+          <a:fontRef idx="minor">
+            <a:schemeClr val="lt1"/>
+          </a:fontRef>
+        </p:style>
+        <p:txBody>
+          <a:bodyPr rtlCol="0" anchor="ctr"/>
+          <a:lstStyle/>
+          <a:p>
+            <a:pPr algn="ctr"/>
+          </a:p>
+        </p:txBody>
+      </p:sp>
+      <p:sp>
+        <p:nvSpPr>
+          <p:cNvPr id="24" name="TextBox 23"/>
+          <p:cNvSpPr txBox="1"/>
+          <p:nvPr/>
+        </p:nvSpPr>
+        <p:spPr>
+          <a:xfrm>
+            <a:off x="8046720" y="1746504"/>
+            <a:ext cx="658368" cy="137160"/>
+          </a:xfrm>
+          <a:prstGeom prst="rect">
+            <a:avLst/>
+          </a:prstGeom>
+          <a:noFill/>
+          <a:ln>
+            <a:noFill/>
+          </a:ln>
+        </p:spPr>
+        <p:txBody>
+          <a:bodyPr wrap="square" lIns="0" rIns="0" tIns="0" bIns="0" anchor="t">
+            <a:spAutoFit/>
+          </a:bodyPr>
+          <a:lstStyle/>
+          <a:p>
+            <a:pPr algn="ctr"/>
+            <a:r>
+              <a:rPr sz="1100" b="1">
+                <a:solidFill>
+                  <a:srgbClr val="FFFFFF"/>
+                </a:solidFill>
+                <a:latin typeface="Apple SD Gothic Neo"/>
+              </a:rPr>
+              <a:t>P5</a:t>
+            </a:r>
+          </a:p>
+        </p:txBody>
+      </p:sp>
+      <p:sp>
+        <p:nvSpPr>
+          <p:cNvPr id="25" name="TextBox 24"/>
+          <p:cNvSpPr txBox="1"/>
+          <p:nvPr/>
+        </p:nvSpPr>
+        <p:spPr>
+          <a:xfrm>
+            <a:off x="7882128" y="2267712"/>
+            <a:ext cx="987552" cy="320040"/>
+          </a:xfrm>
+          <a:prstGeom prst="rect">
+            <a:avLst/>
+          </a:prstGeom>
+          <a:noFill/>
+          <a:ln>
+            <a:noFill/>
+          </a:ln>
+        </p:spPr>
+        <p:txBody>
+          <a:bodyPr wrap="square" lIns="0" rIns="0" tIns="0" bIns="0" anchor="t">
+            <a:spAutoFit/>
+          </a:bodyPr>
+          <a:lstStyle/>
+          <a:p>
+            <a:pPr algn="ctr"/>
+            <a:r>
+              <a:rPr sz="1200" b="1">
+                <a:solidFill>
+                  <a:srgbClr val="282C3A"/>
+                </a:solidFill>
+                <a:latin typeface="Apple SD Gothic Neo"/>
+              </a:rPr>
+              <a:t>GPT-4o-mini</a:t>
+            </a:r>
+          </a:p>
+        </p:txBody>
+      </p:sp>
+      <p:sp>
+        <p:nvSpPr>
+          <p:cNvPr id="26" name="Oval 25"/>
+          <p:cNvSpPr/>
+          <p:nvPr/>
+        </p:nvSpPr>
+        <p:spPr>
+          <a:xfrm>
+            <a:off x="9829800" y="1572768"/>
+            <a:ext cx="658368" cy="658368"/>
+          </a:xfrm>
+          <a:prstGeom prst="ellipse">
+            <a:avLst/>
+          </a:prstGeom>
+          <a:solidFill>
+            <a:srgbClr val="375667"/>
+          </a:solidFill>
+          <a:ln>
+            <a:noFill/>
+          </a:ln>
+        </p:spPr>
+        <p:style>
+          <a:lnRef idx="1">
+            <a:schemeClr val="accent1"/>
+          </a:lnRef>
+          <a:fillRef idx="3">
+            <a:schemeClr val="accent1"/>
+          </a:fillRef>
+          <a:effectRef idx="2">
+            <a:schemeClr val="accent1"/>
+          </a:effectRef>
+          <a:fontRef idx="minor">
+            <a:schemeClr val="lt1"/>
+          </a:fontRef>
+        </p:style>
+        <p:txBody>
+          <a:bodyPr rtlCol="0" anchor="ctr"/>
+          <a:lstStyle/>
+          <a:p>
+            <a:pPr algn="ctr"/>
+          </a:p>
+        </p:txBody>
+      </p:sp>
+      <p:sp>
+        <p:nvSpPr>
+          <p:cNvPr id="27" name="TextBox 26"/>
+          <p:cNvSpPr txBox="1"/>
+          <p:nvPr/>
+        </p:nvSpPr>
+        <p:spPr>
+          <a:xfrm>
+            <a:off x="9829800" y="1746504"/>
+            <a:ext cx="658368" cy="137160"/>
+          </a:xfrm>
+          <a:prstGeom prst="rect">
+            <a:avLst/>
+          </a:prstGeom>
+          <a:noFill/>
+          <a:ln>
+            <a:noFill/>
+          </a:ln>
+        </p:spPr>
+        <p:txBody>
+          <a:bodyPr wrap="square" lIns="0" rIns="0" tIns="0" bIns="0" anchor="t">
+            <a:spAutoFit/>
+          </a:bodyPr>
+          <a:lstStyle/>
+          <a:p>
+            <a:pPr algn="ctr"/>
+            <a:r>
+              <a:rPr sz="1100" b="1">
+                <a:solidFill>
+                  <a:srgbClr val="FFFFFF"/>
+                </a:solidFill>
+                <a:latin typeface="Apple SD Gothic Neo"/>
+              </a:rPr>
+              <a:t>P6</a:t>
+            </a:r>
+          </a:p>
+        </p:txBody>
+      </p:sp>
+      <p:sp>
+        <p:nvSpPr>
+          <p:cNvPr id="28" name="TextBox 27"/>
+          <p:cNvSpPr txBox="1"/>
+          <p:nvPr/>
+        </p:nvSpPr>
+        <p:spPr>
+          <a:xfrm>
+            <a:off x="9665208" y="2267712"/>
+            <a:ext cx="987552" cy="320040"/>
+          </a:xfrm>
+          <a:prstGeom prst="rect">
+            <a:avLst/>
+          </a:prstGeom>
+          <a:noFill/>
+          <a:ln>
+            <a:noFill/>
+          </a:ln>
+        </p:spPr>
+        <p:txBody>
+          <a:bodyPr wrap="square" lIns="0" rIns="0" tIns="0" bIns="0" anchor="t">
+            <a:spAutoFit/>
+          </a:bodyPr>
+          <a:lstStyle/>
+          <a:p>
+            <a:pPr algn="ctr"/>
+            <a:r>
+              <a:rPr sz="1200" b="1">
+                <a:solidFill>
+                  <a:srgbClr val="282C3A"/>
+                </a:solidFill>
+                <a:latin typeface="Apple SD Gothic Neo"/>
+              </a:rPr>
+              <a:t>Hold-out</a:t>
+            </a:r>
+          </a:p>
+        </p:txBody>
+      </p:sp>
+      <p:sp>
+        <p:nvSpPr>
+          <p:cNvPr id="29" name="TextBox 28"/>
+          <p:cNvSpPr txBox="1"/>
+          <p:nvPr/>
+        </p:nvSpPr>
+        <p:spPr>
+          <a:xfrm>
+            <a:off x="502920" y="2944368"/>
+            <a:ext cx="11155680" cy="2743200"/>
           </a:xfrm>
           <a:prstGeom prst="rect">
             <a:avLst/>
@@ -7815,7 +8562,7 @@
               <a:spcAft>
                 <a:spcPts val="800"/>
               </a:spcAft>
-              <a:defRPr sz="1600">
+              <a:defRPr sz="1700">
                 <a:solidFill>
                   <a:srgbClr val="363A48"/>
                 </a:solidFill>
@@ -7823,7 +8570,7 @@
               </a:defRPr>
             </a:pPr>
             <a:r>
-              <a:t>• 원 논문은 strong judge의 가능성을 보였지만, 이 슬라이드는 오픈소스 self-judge로 가면 바로 어떤 함정이 생기는지 보여줍니다.</a:t>
+              <a:t>• P1 self-judge 기준선으로 자기평가 편향을 확인하고, P2에서 외부 14B judge로 초기 sanity check를 했다.</a:t>
             </a:r>
           </a:p>
           <a:p>
@@ -7837,7 +8584,7 @@
               <a:spcAft>
                 <a:spcPts val="800"/>
               </a:spcAft>
-              <a:defRPr sz="1600">
+              <a:defRPr sz="1700">
                 <a:solidFill>
                   <a:srgbClr val="363A48"/>
                 </a:solidFill>
@@ -7845,7 +8592,7 @@
               </a:defRPr>
             </a:pPr>
             <a:r>
-              <a:t>• Qwen2.5-7B self-judge는 overall 8.12인데 Math·Coding은 각각 8.80으로 튀며 자기 강점을 과대평가한다.</a:t>
+              <a:t>• P3는 Qwen 7B/14B/32B를 이용한 메인 judge scaling 실험이고, 여기서 RQ1과 RQ2의 핵심 수치가 나온다.</a:t>
             </a:r>
           </a:p>
           <a:p>
@@ -7859,7 +8606,7 @@
               <a:spcAft>
                 <a:spcPts val="800"/>
               </a:spcAft>
-              <a:defRPr sz="1600">
+              <a:defRPr sz="1700">
                 <a:solidFill>
                   <a:srgbClr val="363A48"/>
                 </a:solidFill>
@@ -7867,7 +8614,7 @@
               </a:defRPr>
             </a:pPr>
             <a:r>
-              <a:t>• 외부 14B judge를 붙이면 broad ranking은 정리되지만, pairwise inconsistency 자체는 여전히 높다.</a:t>
+              <a:t>• P4는 InternLM 7B/20B cross-family 점검, P5는 GPT-4o-mini external check로 Phase 3의 broad pattern을 보조 검증한다.</a:t>
             </a:r>
           </a:p>
           <a:p>
@@ -7881,7 +8628,7 @@
               <a:spcAft>
                 <a:spcPts val="800"/>
               </a:spcAft>
-              <a:defRPr sz="1600">
+              <a:defRPr sz="1700">
                 <a:solidFill>
                   <a:srgbClr val="363A48"/>
                 </a:solidFill>
@@ -7889,21 +8636,21 @@
               </a:defRPr>
             </a:pPr>
             <a:r>
-              <a:t>• 즉 문제는 ‘judge를 쓰느냐’가 아니라 ‘어떤 judge를 어떻게 쓰느냐’이다.</a:t>
-            </a:r>
-          </a:p>
-        </p:txBody>
-      </p:sp>
-      <p:sp>
-        <p:nvSpPr>
-          <p:cNvPr id="15" name="TextBox 14"/>
-          <p:cNvSpPr txBox="1"/>
-          <p:nvPr/>
-        </p:nvSpPr>
-        <p:spPr>
-          <a:xfrm>
-            <a:off x="502920" y="5632704"/>
-            <a:ext cx="11155680" cy="548640"/>
+              <a:t>• P6는 11개 모델 풀의 repeated hold-out으로 tinyMT-Bench subset이 same-set upper bound를 넘어서 어느 정도 운영 가능한지 다시 본 단계다.</a:t>
+            </a:r>
+          </a:p>
+        </p:txBody>
+      </p:sp>
+      <p:sp>
+        <p:nvSpPr>
+          <p:cNvPr id="30" name="TextBox 29"/>
+          <p:cNvSpPr txBox="1"/>
+          <p:nvPr/>
+        </p:nvSpPr>
+        <p:spPr>
+          <a:xfrm>
+            <a:off x="502920" y="5815584"/>
+            <a:ext cx="11155680" cy="384048"/>
           </a:xfrm>
           <a:prstGeom prst="rect">
             <a:avLst/>
@@ -7925,13 +8672,13 @@
           <a:p>
             <a:pPr algn="l"/>
             <a:r>
-              <a:rPr sz="1600" b="1">
+              <a:rPr sz="1500" b="1">
                 <a:solidFill>
                   <a:srgbClr val="282C3A"/>
                 </a:solidFill>
                 <a:latin typeface="Apple SD Gothic Neo"/>
               </a:rPr>
-              <a:t>RQ1을 제대로 보려면 먼저 self-judge 함정을 걷어내야 합니다. 이 슬라이드는 그 준비 단계입니다.</a:t>
+              <a:t>즉 오늘 결과는 한 번에 나온 것이 아니라 self-judge 확인 → main scaling → cross-family / external validation → hold-out verification의 순서로 쌓아 올린 것입니다.</a:t>
             </a:r>
           </a:p>
         </p:txBody>
@@ -8081,7 +8828,7 @@
                 </a:solidFill>
                 <a:latin typeface="Apple SD Gothic Neo"/>
               </a:rPr>
-              <a:t>RQ1 답. Phase 3: Qwen same-family scaling이 메인 결과다</a:t>
+              <a:t>RQ1 준비. Phase 1–2: 왜 self-judge를 믿으면 안 되는가</a:t>
             </a:r>
           </a:p>
         </p:txBody>
@@ -8161,7 +8908,7 @@
                 </a:solidFill>
                 <a:latin typeface="Apple SD Gothic Neo"/>
               </a:rPr>
-              <a:t>13/18</a:t>
+              <a:t>13/19</a:t>
             </a:r>
           </a:p>
         </p:txBody>
@@ -8284,14 +9031,14 @@
                 </a:solidFill>
                 <a:latin typeface="Apple SD Gothic Neo"/>
               </a:rPr>
-              <a:t>이 슬라이드의 목적: judge scaling이 reliability에 주는 효과를 가장 강하게 보여준다.</a:t>
+              <a:t>이 슬라이드의 목적: 메인 실험에 들어가기 전에 self-judge bias와 초기 sanity check를 짚는다.</a:t>
             </a:r>
           </a:p>
         </p:txBody>
       </p:sp>
       <p:pic>
         <p:nvPicPr>
-          <p:cNvPr id="10" name="Picture 9" descr="fig4_judge_scaling.png"/>
+          <p:cNvPr id="10" name="Picture 9" descr="fig0_phase1_scores.png"/>
           <p:cNvPicPr>
             <a:picLocks noChangeAspect="1"/>
           </p:cNvPicPr>
@@ -8306,7 +9053,7 @@
         <p:spPr>
           <a:xfrm>
             <a:off x="502920" y="1261872"/>
-            <a:ext cx="5468112" cy="2354645"/>
+            <a:ext cx="5468112" cy="2700226"/>
           </a:xfrm>
           <a:prstGeom prst="rect">
             <a:avLst/>
@@ -8315,7 +9062,7 @@
       </p:pic>
       <p:pic>
         <p:nvPicPr>
-          <p:cNvPr id="11" name="Picture 10" descr="fig5_phase3_scores.png"/>
+          <p:cNvPr id="11" name="Picture 10" descr="fig2_overall_rankings.png"/>
           <p:cNvPicPr>
             <a:picLocks noChangeAspect="1"/>
           </p:cNvPicPr>
@@ -8330,7 +9077,7 @@
         <p:spPr>
           <a:xfrm>
             <a:off x="6199632" y="1261872"/>
-            <a:ext cx="5468112" cy="2478816"/>
+            <a:ext cx="5468112" cy="2130702"/>
           </a:xfrm>
           <a:prstGeom prst="rect">
             <a:avLst/>
@@ -8370,7 +9117,7 @@
                 </a:solidFill>
                 <a:latin typeface="Apple SD Gothic Neo"/>
               </a:rPr>
-              <a:t>Judge scaling과 카테고리별 inconsistency</a:t>
+              <a:t>Phase 1 self-judge category scores</a:t>
             </a:r>
           </a:p>
         </p:txBody>
@@ -8408,7 +9155,7 @@
                 </a:solidFill>
                 <a:latin typeface="Apple SD Gothic Neo"/>
               </a:rPr>
-              <a:t>Phase 3 single-grade 점수 분포</a:t>
+              <a:t>초기 overall ordering sanity check</a:t>
             </a:r>
           </a:p>
         </p:txBody>
@@ -8460,7 +9207,7 @@
               </a:defRPr>
             </a:pPr>
             <a:r>
-              <a:t>• Pairwise inconsistency는 7B 78.75% → 14B 46.85% → 32B 32.86%로 단조 감소한다.</a:t>
+              <a:t>• 원 논문은 strong judge의 가능성을 보였지만, 이 슬라이드는 오픈소스 self-judge로 가면 바로 어떤 함정이 생기는지 보여줍니다.</a:t>
             </a:r>
           </a:p>
           <a:p>
@@ -8482,7 +9229,7 @@
               </a:defRPr>
             </a:pPr>
             <a:r>
-              <a:t>• Single-grade score range도 0.84 → 1.12 → 1.48로 확대되어 모델 간 변별력이 커진다.</a:t>
+              <a:t>• Qwen2.5-7B self-judge는 overall 8.12인데 Math·Coding은 각각 8.80으로 튀며 자기 강점을 과대평가한다.</a:t>
             </a:r>
           </a:p>
           <a:p>
@@ -8504,7 +9251,29 @@
               </a:defRPr>
             </a:pPr>
             <a:r>
-              <a:t>• 따라서 메인 결론은 ‘Qwen same-family empirical trend’로 읽는 것이 맞다.</a:t>
+              <a:t>• 외부 14B judge를 붙이면 broad ranking은 정리되지만, pairwise inconsistency 자체는 여전히 높다.</a:t>
+            </a:r>
+          </a:p>
+          <a:p>
+            <a:pPr>
+              <a:lnSpc>
+                <a:spcPct val="112000"/>
+              </a:lnSpc>
+              <a:spcBef>
+                <a:spcPts val="0"/>
+              </a:spcBef>
+              <a:spcAft>
+                <a:spcPts val="800"/>
+              </a:spcAft>
+              <a:defRPr sz="1600">
+                <a:solidFill>
+                  <a:srgbClr val="363A48"/>
+                </a:solidFill>
+                <a:latin typeface="Apple SD Gothic Neo"/>
+              </a:defRPr>
+            </a:pPr>
+            <a:r>
+              <a:t>• 즉 문제는 ‘judge를 쓰느냐’가 아니라 ‘어떤 judge를 어떻게 쓰느냐’이다.</a:t>
             </a:r>
           </a:p>
         </p:txBody>
@@ -8517,638 +9286,36 @@
         </p:nvSpPr>
         <p:spPr>
           <a:xfrm>
-            <a:off x="566928" y="5623560"/>
-            <a:ext cx="2029968" cy="877824"/>
+            <a:off x="502920" y="5632704"/>
+            <a:ext cx="11155680" cy="548640"/>
           </a:xfrm>
           <a:prstGeom prst="rect">
             <a:avLst/>
           </a:prstGeom>
           <a:solidFill>
-            <a:srgbClr val="FFFFFF"/>
+            <a:srgbClr val="E2EAEF"/>
           </a:solidFill>
           <a:ln>
             <a:solidFill>
-              <a:srgbClr val="DAD4CA"/>
+              <a:srgbClr val="E2EAEF"/>
             </a:solidFill>
           </a:ln>
         </p:spPr>
         <p:txBody>
-          <a:bodyPr wrap="square" lIns="54864" rIns="54864" tIns="54864" bIns="54864" anchor="t">
+          <a:bodyPr wrap="square" lIns="64008" rIns="64008" tIns="64008" bIns="64008" anchor="ctr">
             <a:spAutoFit/>
           </a:bodyPr>
           <a:lstStyle/>
           <a:p>
             <a:pPr algn="l"/>
             <a:r>
-              <a:rPr sz="1700" b="0">
-                <a:solidFill>
-                  <a:srgbClr val="363A48"/>
-                </a:solidFill>
-                <a:latin typeface="Apple SD Gothic Neo"/>
-              </a:rPr>
-              <a:t/>
-            </a:r>
-          </a:p>
-        </p:txBody>
-      </p:sp>
-      <p:sp>
-        <p:nvSpPr>
-          <p:cNvPr id="16" name="Rectangle 15"/>
-          <p:cNvSpPr/>
-          <p:nvPr/>
-        </p:nvSpPr>
-        <p:spPr>
-          <a:xfrm>
-            <a:off x="676656" y="5733288"/>
-            <a:ext cx="502920" cy="182880"/>
-          </a:xfrm>
-          <a:prstGeom prst="rect">
-            <a:avLst/>
-          </a:prstGeom>
-          <a:solidFill>
-            <a:srgbClr val="375667"/>
-          </a:solidFill>
-          <a:ln>
-            <a:noFill/>
-          </a:ln>
-        </p:spPr>
-        <p:style>
-          <a:lnRef idx="1">
-            <a:schemeClr val="accent1"/>
-          </a:lnRef>
-          <a:fillRef idx="3">
-            <a:schemeClr val="accent1"/>
-          </a:fillRef>
-          <a:effectRef idx="2">
-            <a:schemeClr val="accent1"/>
-          </a:effectRef>
-          <a:fontRef idx="minor">
-            <a:schemeClr val="lt1"/>
-          </a:fontRef>
-        </p:style>
-        <p:txBody>
-          <a:bodyPr rtlCol="0" anchor="ctr"/>
-          <a:lstStyle/>
-          <a:p>
-            <a:pPr algn="ctr"/>
-          </a:p>
-        </p:txBody>
-      </p:sp>
-      <p:sp>
-        <p:nvSpPr>
-          <p:cNvPr id="17" name="TextBox 16"/>
-          <p:cNvSpPr txBox="1"/>
-          <p:nvPr/>
-        </p:nvSpPr>
-        <p:spPr>
-          <a:xfrm>
-            <a:off x="694944" y="5733288"/>
-            <a:ext cx="1691640" cy="182880"/>
-          </a:xfrm>
-          <a:prstGeom prst="rect">
-            <a:avLst/>
-          </a:prstGeom>
-          <a:noFill/>
-          <a:ln>
-            <a:noFill/>
-          </a:ln>
-        </p:spPr>
-        <p:txBody>
-          <a:bodyPr wrap="square" lIns="9144" rIns="9144" tIns="9144" bIns="9144" anchor="ctr">
-            <a:spAutoFit/>
-          </a:bodyPr>
-          <a:lstStyle/>
-          <a:p>
-            <a:pPr algn="l"/>
-            <a:r>
-              <a:rPr sz="900" b="1">
-                <a:solidFill>
-                  <a:srgbClr val="FFFFFF"/>
-                </a:solidFill>
-                <a:latin typeface="Apple SD Gothic Neo"/>
-              </a:rPr>
-              <a:t>7B</a:t>
-            </a:r>
-          </a:p>
-        </p:txBody>
-      </p:sp>
-      <p:sp>
-        <p:nvSpPr>
-          <p:cNvPr id="18" name="TextBox 17"/>
-          <p:cNvSpPr txBox="1"/>
-          <p:nvPr/>
-        </p:nvSpPr>
-        <p:spPr>
-          <a:xfrm>
-            <a:off x="676656" y="5971032"/>
-            <a:ext cx="1737360" cy="310896"/>
-          </a:xfrm>
-          <a:prstGeom prst="rect">
-            <a:avLst/>
-          </a:prstGeom>
-          <a:noFill/>
-          <a:ln>
-            <a:noFill/>
-          </a:ln>
-        </p:spPr>
-        <p:txBody>
-          <a:bodyPr wrap="square" lIns="9144" rIns="9144" tIns="9144" bIns="9144" anchor="t">
-            <a:spAutoFit/>
-          </a:bodyPr>
-          <a:lstStyle/>
-          <a:p>
-            <a:pPr algn="l"/>
-            <a:r>
-              <a:rPr sz="1900" b="1">
+              <a:rPr sz="1600" b="1">
                 <a:solidFill>
                   <a:srgbClr val="282C3A"/>
                 </a:solidFill>
                 <a:latin typeface="Apple SD Gothic Neo"/>
               </a:rPr>
-              <a:t>78.75%</a:t>
-            </a:r>
-          </a:p>
-        </p:txBody>
-      </p:sp>
-      <p:sp>
-        <p:nvSpPr>
-          <p:cNvPr id="19" name="TextBox 18"/>
-          <p:cNvSpPr txBox="1"/>
-          <p:nvPr/>
-        </p:nvSpPr>
-        <p:spPr>
-          <a:xfrm>
-            <a:off x="2779776" y="5623560"/>
-            <a:ext cx="2029968" cy="877824"/>
-          </a:xfrm>
-          <a:prstGeom prst="rect">
-            <a:avLst/>
-          </a:prstGeom>
-          <a:solidFill>
-            <a:srgbClr val="FFFFFF"/>
-          </a:solidFill>
-          <a:ln>
-            <a:solidFill>
-              <a:srgbClr val="DAD4CA"/>
-            </a:solidFill>
-          </a:ln>
-        </p:spPr>
-        <p:txBody>
-          <a:bodyPr wrap="square" lIns="54864" rIns="54864" tIns="54864" bIns="54864" anchor="t">
-            <a:spAutoFit/>
-          </a:bodyPr>
-          <a:lstStyle/>
-          <a:p>
-            <a:pPr algn="l"/>
-            <a:r>
-              <a:rPr sz="1700" b="0">
-                <a:solidFill>
-                  <a:srgbClr val="363A48"/>
-                </a:solidFill>
-                <a:latin typeface="Apple SD Gothic Neo"/>
-              </a:rPr>
-              <a:t/>
-            </a:r>
-          </a:p>
-        </p:txBody>
-      </p:sp>
-      <p:sp>
-        <p:nvSpPr>
-          <p:cNvPr id="20" name="Rectangle 19"/>
-          <p:cNvSpPr/>
-          <p:nvPr/>
-        </p:nvSpPr>
-        <p:spPr>
-          <a:xfrm>
-            <a:off x="2889504" y="5733288"/>
-            <a:ext cx="502920" cy="182880"/>
-          </a:xfrm>
-          <a:prstGeom prst="rect">
-            <a:avLst/>
-          </a:prstGeom>
-          <a:solidFill>
-            <a:srgbClr val="B5654E"/>
-          </a:solidFill>
-          <a:ln>
-            <a:noFill/>
-          </a:ln>
-        </p:spPr>
-        <p:style>
-          <a:lnRef idx="1">
-            <a:schemeClr val="accent1"/>
-          </a:lnRef>
-          <a:fillRef idx="3">
-            <a:schemeClr val="accent1"/>
-          </a:fillRef>
-          <a:effectRef idx="2">
-            <a:schemeClr val="accent1"/>
-          </a:effectRef>
-          <a:fontRef idx="minor">
-            <a:schemeClr val="lt1"/>
-          </a:fontRef>
-        </p:style>
-        <p:txBody>
-          <a:bodyPr rtlCol="0" anchor="ctr"/>
-          <a:lstStyle/>
-          <a:p>
-            <a:pPr algn="ctr"/>
-          </a:p>
-        </p:txBody>
-      </p:sp>
-      <p:sp>
-        <p:nvSpPr>
-          <p:cNvPr id="21" name="TextBox 20"/>
-          <p:cNvSpPr txBox="1"/>
-          <p:nvPr/>
-        </p:nvSpPr>
-        <p:spPr>
-          <a:xfrm>
-            <a:off x="2907792" y="5733288"/>
-            <a:ext cx="1691640" cy="182880"/>
-          </a:xfrm>
-          <a:prstGeom prst="rect">
-            <a:avLst/>
-          </a:prstGeom>
-          <a:noFill/>
-          <a:ln>
-            <a:noFill/>
-          </a:ln>
-        </p:spPr>
-        <p:txBody>
-          <a:bodyPr wrap="square" lIns="9144" rIns="9144" tIns="9144" bIns="9144" anchor="ctr">
-            <a:spAutoFit/>
-          </a:bodyPr>
-          <a:lstStyle/>
-          <a:p>
-            <a:pPr algn="l"/>
-            <a:r>
-              <a:rPr sz="900" b="1">
-                <a:solidFill>
-                  <a:srgbClr val="FFFFFF"/>
-                </a:solidFill>
-                <a:latin typeface="Apple SD Gothic Neo"/>
-              </a:rPr>
-              <a:t>14B</a:t>
-            </a:r>
-          </a:p>
-        </p:txBody>
-      </p:sp>
-      <p:sp>
-        <p:nvSpPr>
-          <p:cNvPr id="22" name="TextBox 21"/>
-          <p:cNvSpPr txBox="1"/>
-          <p:nvPr/>
-        </p:nvSpPr>
-        <p:spPr>
-          <a:xfrm>
-            <a:off x="2889504" y="5971032"/>
-            <a:ext cx="1737360" cy="310896"/>
-          </a:xfrm>
-          <a:prstGeom prst="rect">
-            <a:avLst/>
-          </a:prstGeom>
-          <a:noFill/>
-          <a:ln>
-            <a:noFill/>
-          </a:ln>
-        </p:spPr>
-        <p:txBody>
-          <a:bodyPr wrap="square" lIns="9144" rIns="9144" tIns="9144" bIns="9144" anchor="t">
-            <a:spAutoFit/>
-          </a:bodyPr>
-          <a:lstStyle/>
-          <a:p>
-            <a:pPr algn="l"/>
-            <a:r>
-              <a:rPr sz="1900" b="1">
-                <a:solidFill>
-                  <a:srgbClr val="282C3A"/>
-                </a:solidFill>
-                <a:latin typeface="Apple SD Gothic Neo"/>
-              </a:rPr>
-              <a:t>46.85%</a:t>
-            </a:r>
-          </a:p>
-        </p:txBody>
-      </p:sp>
-      <p:sp>
-        <p:nvSpPr>
-          <p:cNvPr id="23" name="TextBox 22"/>
-          <p:cNvSpPr txBox="1"/>
-          <p:nvPr/>
-        </p:nvSpPr>
-        <p:spPr>
-          <a:xfrm>
-            <a:off x="4992624" y="5623560"/>
-            <a:ext cx="2029968" cy="877824"/>
-          </a:xfrm>
-          <a:prstGeom prst="rect">
-            <a:avLst/>
-          </a:prstGeom>
-          <a:solidFill>
-            <a:srgbClr val="FFFFFF"/>
-          </a:solidFill>
-          <a:ln>
-            <a:solidFill>
-              <a:srgbClr val="DAD4CA"/>
-            </a:solidFill>
-          </a:ln>
-        </p:spPr>
-        <p:txBody>
-          <a:bodyPr wrap="square" lIns="54864" rIns="54864" tIns="54864" bIns="54864" anchor="t">
-            <a:spAutoFit/>
-          </a:bodyPr>
-          <a:lstStyle/>
-          <a:p>
-            <a:pPr algn="l"/>
-            <a:r>
-              <a:rPr sz="1700" b="0">
-                <a:solidFill>
-                  <a:srgbClr val="363A48"/>
-                </a:solidFill>
-                <a:latin typeface="Apple SD Gothic Neo"/>
-              </a:rPr>
-              <a:t/>
-            </a:r>
-          </a:p>
-        </p:txBody>
-      </p:sp>
-      <p:sp>
-        <p:nvSpPr>
-          <p:cNvPr id="24" name="Rectangle 23"/>
-          <p:cNvSpPr/>
-          <p:nvPr/>
-        </p:nvSpPr>
-        <p:spPr>
-          <a:xfrm>
-            <a:off x="5102352" y="5733288"/>
-            <a:ext cx="502920" cy="182880"/>
-          </a:xfrm>
-          <a:prstGeom prst="rect">
-            <a:avLst/>
-          </a:prstGeom>
-          <a:solidFill>
-            <a:srgbClr val="BF9A5E"/>
-          </a:solidFill>
-          <a:ln>
-            <a:noFill/>
-          </a:ln>
-        </p:spPr>
-        <p:style>
-          <a:lnRef idx="1">
-            <a:schemeClr val="accent1"/>
-          </a:lnRef>
-          <a:fillRef idx="3">
-            <a:schemeClr val="accent1"/>
-          </a:fillRef>
-          <a:effectRef idx="2">
-            <a:schemeClr val="accent1"/>
-          </a:effectRef>
-          <a:fontRef idx="minor">
-            <a:schemeClr val="lt1"/>
-          </a:fontRef>
-        </p:style>
-        <p:txBody>
-          <a:bodyPr rtlCol="0" anchor="ctr"/>
-          <a:lstStyle/>
-          <a:p>
-            <a:pPr algn="ctr"/>
-          </a:p>
-        </p:txBody>
-      </p:sp>
-      <p:sp>
-        <p:nvSpPr>
-          <p:cNvPr id="25" name="TextBox 24"/>
-          <p:cNvSpPr txBox="1"/>
-          <p:nvPr/>
-        </p:nvSpPr>
-        <p:spPr>
-          <a:xfrm>
-            <a:off x="5120640" y="5733288"/>
-            <a:ext cx="1691640" cy="182880"/>
-          </a:xfrm>
-          <a:prstGeom prst="rect">
-            <a:avLst/>
-          </a:prstGeom>
-          <a:noFill/>
-          <a:ln>
-            <a:noFill/>
-          </a:ln>
-        </p:spPr>
-        <p:txBody>
-          <a:bodyPr wrap="square" lIns="9144" rIns="9144" tIns="9144" bIns="9144" anchor="ctr">
-            <a:spAutoFit/>
-          </a:bodyPr>
-          <a:lstStyle/>
-          <a:p>
-            <a:pPr algn="l"/>
-            <a:r>
-              <a:rPr sz="900" b="1">
-                <a:solidFill>
-                  <a:srgbClr val="FFFFFF"/>
-                </a:solidFill>
-                <a:latin typeface="Apple SD Gothic Neo"/>
-              </a:rPr>
-              <a:t>32B</a:t>
-            </a:r>
-          </a:p>
-        </p:txBody>
-      </p:sp>
-      <p:sp>
-        <p:nvSpPr>
-          <p:cNvPr id="26" name="TextBox 25"/>
-          <p:cNvSpPr txBox="1"/>
-          <p:nvPr/>
-        </p:nvSpPr>
-        <p:spPr>
-          <a:xfrm>
-            <a:off x="5102352" y="5971032"/>
-            <a:ext cx="1737360" cy="310896"/>
-          </a:xfrm>
-          <a:prstGeom prst="rect">
-            <a:avLst/>
-          </a:prstGeom>
-          <a:noFill/>
-          <a:ln>
-            <a:noFill/>
-          </a:ln>
-        </p:spPr>
-        <p:txBody>
-          <a:bodyPr wrap="square" lIns="9144" rIns="9144" tIns="9144" bIns="9144" anchor="t">
-            <a:spAutoFit/>
-          </a:bodyPr>
-          <a:lstStyle/>
-          <a:p>
-            <a:pPr algn="l"/>
-            <a:r>
-              <a:rPr sz="1900" b="1">
-                <a:solidFill>
-                  <a:srgbClr val="282C3A"/>
-                </a:solidFill>
-                <a:latin typeface="Apple SD Gothic Neo"/>
-              </a:rPr>
-              <a:t>32.86%</a:t>
-            </a:r>
-          </a:p>
-        </p:txBody>
-      </p:sp>
-      <p:sp>
-        <p:nvSpPr>
-          <p:cNvPr id="27" name="TextBox 26"/>
-          <p:cNvSpPr txBox="1"/>
-          <p:nvPr/>
-        </p:nvSpPr>
-        <p:spPr>
-          <a:xfrm>
-            <a:off x="7205472" y="5623560"/>
-            <a:ext cx="2029968" cy="877824"/>
-          </a:xfrm>
-          <a:prstGeom prst="rect">
-            <a:avLst/>
-          </a:prstGeom>
-          <a:solidFill>
-            <a:srgbClr val="FFFFFF"/>
-          </a:solidFill>
-          <a:ln>
-            <a:solidFill>
-              <a:srgbClr val="DAD4CA"/>
-            </a:solidFill>
-          </a:ln>
-        </p:spPr>
-        <p:txBody>
-          <a:bodyPr wrap="square" lIns="54864" rIns="54864" tIns="54864" bIns="54864" anchor="t">
-            <a:spAutoFit/>
-          </a:bodyPr>
-          <a:lstStyle/>
-          <a:p>
-            <a:pPr algn="l"/>
-            <a:r>
-              <a:rPr sz="1700" b="0">
-                <a:solidFill>
-                  <a:srgbClr val="363A48"/>
-                </a:solidFill>
-                <a:latin typeface="Apple SD Gothic Neo"/>
-              </a:rPr>
-              <a:t/>
-            </a:r>
-          </a:p>
-        </p:txBody>
-      </p:sp>
-      <p:sp>
-        <p:nvSpPr>
-          <p:cNvPr id="28" name="Rectangle 27"/>
-          <p:cNvSpPr/>
-          <p:nvPr/>
-        </p:nvSpPr>
-        <p:spPr>
-          <a:xfrm>
-            <a:off x="7315200" y="5733288"/>
-            <a:ext cx="502920" cy="182880"/>
-          </a:xfrm>
-          <a:prstGeom prst="rect">
-            <a:avLst/>
-          </a:prstGeom>
-          <a:solidFill>
-            <a:srgbClr val="668185"/>
-          </a:solidFill>
-          <a:ln>
-            <a:noFill/>
-          </a:ln>
-        </p:spPr>
-        <p:style>
-          <a:lnRef idx="1">
-            <a:schemeClr val="accent1"/>
-          </a:lnRef>
-          <a:fillRef idx="3">
-            <a:schemeClr val="accent1"/>
-          </a:fillRef>
-          <a:effectRef idx="2">
-            <a:schemeClr val="accent1"/>
-          </a:effectRef>
-          <a:fontRef idx="minor">
-            <a:schemeClr val="lt1"/>
-          </a:fontRef>
-        </p:style>
-        <p:txBody>
-          <a:bodyPr rtlCol="0" anchor="ctr"/>
-          <a:lstStyle/>
-          <a:p>
-            <a:pPr algn="ctr"/>
-          </a:p>
-        </p:txBody>
-      </p:sp>
-      <p:sp>
-        <p:nvSpPr>
-          <p:cNvPr id="29" name="TextBox 28"/>
-          <p:cNvSpPr txBox="1"/>
-          <p:nvPr/>
-        </p:nvSpPr>
-        <p:spPr>
-          <a:xfrm>
-            <a:off x="7333488" y="5733288"/>
-            <a:ext cx="1691640" cy="182880"/>
-          </a:xfrm>
-          <a:prstGeom prst="rect">
-            <a:avLst/>
-          </a:prstGeom>
-          <a:noFill/>
-          <a:ln>
-            <a:noFill/>
-          </a:ln>
-        </p:spPr>
-        <p:txBody>
-          <a:bodyPr wrap="square" lIns="9144" rIns="9144" tIns="9144" bIns="9144" anchor="ctr">
-            <a:spAutoFit/>
-          </a:bodyPr>
-          <a:lstStyle/>
-          <a:p>
-            <a:pPr algn="l"/>
-            <a:r>
-              <a:rPr sz="900" b="1">
-                <a:solidFill>
-                  <a:srgbClr val="FFFFFF"/>
-                </a:solidFill>
-                <a:latin typeface="Apple SD Gothic Neo"/>
-              </a:rPr>
-              <a:t>핵심</a:t>
-            </a:r>
-          </a:p>
-        </p:txBody>
-      </p:sp>
-      <p:sp>
-        <p:nvSpPr>
-          <p:cNvPr id="30" name="TextBox 29"/>
-          <p:cNvSpPr txBox="1"/>
-          <p:nvPr/>
-        </p:nvSpPr>
-        <p:spPr>
-          <a:xfrm>
-            <a:off x="7315200" y="5971032"/>
-            <a:ext cx="1737360" cy="310896"/>
-          </a:xfrm>
-          <a:prstGeom prst="rect">
-            <a:avLst/>
-          </a:prstGeom>
-          <a:noFill/>
-          <a:ln>
-            <a:noFill/>
-          </a:ln>
-        </p:spPr>
-        <p:txBody>
-          <a:bodyPr wrap="square" lIns="9144" rIns="9144" tIns="9144" bIns="9144" anchor="t">
-            <a:spAutoFit/>
-          </a:bodyPr>
-          <a:lstStyle/>
-          <a:p>
-            <a:pPr algn="l"/>
-            <a:r>
-              <a:rPr sz="1900" b="1">
-                <a:solidFill>
-                  <a:srgbClr val="282C3A"/>
-                </a:solidFill>
-                <a:latin typeface="Apple SD Gothic Neo"/>
-              </a:rPr>
-              <a:t>same-family trend</a:t>
+              <a:t>RQ1을 제대로 보려면 먼저 self-judge 함정을 걷어내야 합니다. 이 슬라이드는 그 준비 단계입니다.</a:t>
             </a:r>
           </a:p>
         </p:txBody>
@@ -9298,7 +9465,7 @@
                 </a:solidFill>
                 <a:latin typeface="Apple SD Gothic Neo"/>
               </a:rPr>
-              <a:t>RQ2-1. 그런데 broad ranking이 맞아도 남는 오류는 있다</a:t>
+              <a:t>RQ1 답. Phase 3: Qwen judge scaling이 메인 결과다</a:t>
             </a:r>
           </a:p>
         </p:txBody>
@@ -9378,7 +9545,7 @@
                 </a:solidFill>
                 <a:latin typeface="Apple SD Gothic Neo"/>
               </a:rPr>
-              <a:t>14/18</a:t>
+              <a:t>14/19</a:t>
             </a:r>
           </a:p>
         </p:txBody>
@@ -9501,14 +9668,14 @@
                 </a:solidFill>
                 <a:latin typeface="Apple SD Gothic Neo"/>
               </a:rPr>
-              <a:t>이 슬라이드의 목적: cross-family validation 이후에도 남는 residual bias와 practical ensemble 결론을 보여준다.</a:t>
+              <a:t>이 슬라이드의 목적: judge scaling이 reliability에 주는 효과를 가장 강하게 보여준다.</a:t>
             </a:r>
           </a:p>
         </p:txBody>
       </p:sp>
       <p:pic>
         <p:nvPicPr>
-          <p:cNvPr id="10" name="Picture 9" descr="fig11_position_bias.png"/>
+          <p:cNvPr id="10" name="Picture 9" descr="fig4_judge_scaling.png"/>
           <p:cNvPicPr>
             <a:picLocks noChangeAspect="1"/>
           </p:cNvPicPr>
@@ -9523,7 +9690,7 @@
         <p:spPr>
           <a:xfrm>
             <a:off x="502920" y="1261872"/>
-            <a:ext cx="5468112" cy="1974656"/>
+            <a:ext cx="5468112" cy="2354645"/>
           </a:xfrm>
           <a:prstGeom prst="rect">
             <a:avLst/>
@@ -9532,7 +9699,7 @@
       </p:pic>
       <p:pic>
         <p:nvPicPr>
-          <p:cNvPr id="11" name="Picture 10" descr="fig13_ensemble_v2.png"/>
+          <p:cNvPr id="11" name="Picture 10" descr="fig5_phase3_scores.png"/>
           <p:cNvPicPr>
             <a:picLocks noChangeAspect="1"/>
           </p:cNvPicPr>
@@ -9547,7 +9714,7 @@
         <p:spPr>
           <a:xfrm>
             <a:off x="6199632" y="1261872"/>
-            <a:ext cx="5468112" cy="2327359"/>
+            <a:ext cx="5468112" cy="2478816"/>
           </a:xfrm>
           <a:prstGeom prst="rect">
             <a:avLst/>
@@ -9587,7 +9754,7 @@
                 </a:solidFill>
                 <a:latin typeface="Apple SD Gothic Neo"/>
               </a:rPr>
-              <a:t>Residual position bias</a:t>
+              <a:t>Judge scaling과 카테고리별 inconsistency</a:t>
             </a:r>
           </a:p>
         </p:txBody>
@@ -9625,7 +9792,7 @@
                 </a:solidFill>
                 <a:latin typeface="Apple SD Gothic Neo"/>
               </a:rPr>
-              <a:t>Majority vs abstain ensemble</a:t>
+              <a:t>Phase 3 single-grade 점수 분포</a:t>
             </a:r>
           </a:p>
         </p:txBody>
@@ -9677,7 +9844,7 @@
               </a:defRPr>
             </a:pPr>
             <a:r>
-              <a:t>• 32B judge의 남은 불일치 중 94.93%가 first-position win으로 연결되어 residual bias가 위치 편향으로 농축된다.</a:t>
+              <a:t>• Pairwise inconsistency는 7B 78.75% → 14B 46.85% → 32B 32.86%로 단조 감소한다.</a:t>
             </a:r>
           </a:p>
           <a:p>
@@ -9699,7 +9866,7 @@
               </a:defRPr>
             </a:pPr>
             <a:r>
-              <a:t>• 단순 majority ensemble은 오히려 58.63%로 나빠지고, abstain ensemble만 24.70%까지 낮춘다.</a:t>
+              <a:t>• Single-grade score range도 0.84 → 1.12 → 1.48로 확대되어 모델 간 변별력이 커진다.</a:t>
             </a:r>
           </a:p>
           <a:p>
@@ -9721,7 +9888,7 @@
               </a:defRPr>
             </a:pPr>
             <a:r>
-              <a:t>• 즉 broad ranking이 맞는 것과 question-level decision이 깨끗한 것은 다른 문제다.</a:t>
+              <a:t>• 따라서 메인 결론은 ‘Qwen 기반 judge scaling의 same-family empirical trend’로 읽는 것이 맞다.</a:t>
             </a:r>
           </a:p>
         </p:txBody>
@@ -9734,36 +9901,638 @@
         </p:nvSpPr>
         <p:spPr>
           <a:xfrm>
-            <a:off x="502920" y="5632704"/>
-            <a:ext cx="11155680" cy="548640"/>
+            <a:off x="566928" y="5623560"/>
+            <a:ext cx="2029968" cy="877824"/>
           </a:xfrm>
           <a:prstGeom prst="rect">
             <a:avLst/>
           </a:prstGeom>
           <a:solidFill>
-            <a:srgbClr val="E2EAEF"/>
+            <a:srgbClr val="FFFFFF"/>
           </a:solidFill>
           <a:ln>
             <a:solidFill>
-              <a:srgbClr val="E2EAEF"/>
+              <a:srgbClr val="DAD4CA"/>
             </a:solidFill>
           </a:ln>
         </p:spPr>
         <p:txBody>
-          <a:bodyPr wrap="square" lIns="64008" rIns="64008" tIns="64008" bIns="64008" anchor="ctr">
+          <a:bodyPr wrap="square" lIns="54864" rIns="54864" tIns="54864" bIns="54864" anchor="t">
             <a:spAutoFit/>
           </a:bodyPr>
           <a:lstStyle/>
           <a:p>
             <a:pPr algn="l"/>
             <a:r>
-              <a:rPr sz="1600" b="1">
+              <a:rPr sz="1700" b="0">
+                <a:solidFill>
+                  <a:srgbClr val="363A48"/>
+                </a:solidFill>
+                <a:latin typeface="Apple SD Gothic Neo"/>
+              </a:rPr>
+              <a:t/>
+            </a:r>
+          </a:p>
+        </p:txBody>
+      </p:sp>
+      <p:sp>
+        <p:nvSpPr>
+          <p:cNvPr id="16" name="Rectangle 15"/>
+          <p:cNvSpPr/>
+          <p:nvPr/>
+        </p:nvSpPr>
+        <p:spPr>
+          <a:xfrm>
+            <a:off x="676656" y="5733288"/>
+            <a:ext cx="502920" cy="182880"/>
+          </a:xfrm>
+          <a:prstGeom prst="rect">
+            <a:avLst/>
+          </a:prstGeom>
+          <a:solidFill>
+            <a:srgbClr val="375667"/>
+          </a:solidFill>
+          <a:ln>
+            <a:noFill/>
+          </a:ln>
+        </p:spPr>
+        <p:style>
+          <a:lnRef idx="1">
+            <a:schemeClr val="accent1"/>
+          </a:lnRef>
+          <a:fillRef idx="3">
+            <a:schemeClr val="accent1"/>
+          </a:fillRef>
+          <a:effectRef idx="2">
+            <a:schemeClr val="accent1"/>
+          </a:effectRef>
+          <a:fontRef idx="minor">
+            <a:schemeClr val="lt1"/>
+          </a:fontRef>
+        </p:style>
+        <p:txBody>
+          <a:bodyPr rtlCol="0" anchor="ctr"/>
+          <a:lstStyle/>
+          <a:p>
+            <a:pPr algn="ctr"/>
+          </a:p>
+        </p:txBody>
+      </p:sp>
+      <p:sp>
+        <p:nvSpPr>
+          <p:cNvPr id="17" name="TextBox 16"/>
+          <p:cNvSpPr txBox="1"/>
+          <p:nvPr/>
+        </p:nvSpPr>
+        <p:spPr>
+          <a:xfrm>
+            <a:off x="694944" y="5733288"/>
+            <a:ext cx="1691640" cy="182880"/>
+          </a:xfrm>
+          <a:prstGeom prst="rect">
+            <a:avLst/>
+          </a:prstGeom>
+          <a:noFill/>
+          <a:ln>
+            <a:noFill/>
+          </a:ln>
+        </p:spPr>
+        <p:txBody>
+          <a:bodyPr wrap="square" lIns="9144" rIns="9144" tIns="9144" bIns="9144" anchor="ctr">
+            <a:spAutoFit/>
+          </a:bodyPr>
+          <a:lstStyle/>
+          <a:p>
+            <a:pPr algn="l"/>
+            <a:r>
+              <a:rPr sz="900" b="1">
+                <a:solidFill>
+                  <a:srgbClr val="FFFFFF"/>
+                </a:solidFill>
+                <a:latin typeface="Apple SD Gothic Neo"/>
+              </a:rPr>
+              <a:t>7B</a:t>
+            </a:r>
+          </a:p>
+        </p:txBody>
+      </p:sp>
+      <p:sp>
+        <p:nvSpPr>
+          <p:cNvPr id="18" name="TextBox 17"/>
+          <p:cNvSpPr txBox="1"/>
+          <p:nvPr/>
+        </p:nvSpPr>
+        <p:spPr>
+          <a:xfrm>
+            <a:off x="676656" y="5971032"/>
+            <a:ext cx="1737360" cy="310896"/>
+          </a:xfrm>
+          <a:prstGeom prst="rect">
+            <a:avLst/>
+          </a:prstGeom>
+          <a:noFill/>
+          <a:ln>
+            <a:noFill/>
+          </a:ln>
+        </p:spPr>
+        <p:txBody>
+          <a:bodyPr wrap="square" lIns="9144" rIns="9144" tIns="9144" bIns="9144" anchor="t">
+            <a:spAutoFit/>
+          </a:bodyPr>
+          <a:lstStyle/>
+          <a:p>
+            <a:pPr algn="l"/>
+            <a:r>
+              <a:rPr sz="1900" b="1">
                 <a:solidFill>
                   <a:srgbClr val="282C3A"/>
                 </a:solidFill>
                 <a:latin typeface="Apple SD Gothic Neo"/>
               </a:rPr>
-              <a:t>RQ2의 답은 명확합니다. 전체 서열이 맞아도 남는 오류는 구조화된 편향과 운영 리스크로 남습니다.</a:t>
+              <a:t>78.75%</a:t>
+            </a:r>
+          </a:p>
+        </p:txBody>
+      </p:sp>
+      <p:sp>
+        <p:nvSpPr>
+          <p:cNvPr id="19" name="TextBox 18"/>
+          <p:cNvSpPr txBox="1"/>
+          <p:nvPr/>
+        </p:nvSpPr>
+        <p:spPr>
+          <a:xfrm>
+            <a:off x="2779776" y="5623560"/>
+            <a:ext cx="2029968" cy="877824"/>
+          </a:xfrm>
+          <a:prstGeom prst="rect">
+            <a:avLst/>
+          </a:prstGeom>
+          <a:solidFill>
+            <a:srgbClr val="FFFFFF"/>
+          </a:solidFill>
+          <a:ln>
+            <a:solidFill>
+              <a:srgbClr val="DAD4CA"/>
+            </a:solidFill>
+          </a:ln>
+        </p:spPr>
+        <p:txBody>
+          <a:bodyPr wrap="square" lIns="54864" rIns="54864" tIns="54864" bIns="54864" anchor="t">
+            <a:spAutoFit/>
+          </a:bodyPr>
+          <a:lstStyle/>
+          <a:p>
+            <a:pPr algn="l"/>
+            <a:r>
+              <a:rPr sz="1700" b="0">
+                <a:solidFill>
+                  <a:srgbClr val="363A48"/>
+                </a:solidFill>
+                <a:latin typeface="Apple SD Gothic Neo"/>
+              </a:rPr>
+              <a:t/>
+            </a:r>
+          </a:p>
+        </p:txBody>
+      </p:sp>
+      <p:sp>
+        <p:nvSpPr>
+          <p:cNvPr id="20" name="Rectangle 19"/>
+          <p:cNvSpPr/>
+          <p:nvPr/>
+        </p:nvSpPr>
+        <p:spPr>
+          <a:xfrm>
+            <a:off x="2889504" y="5733288"/>
+            <a:ext cx="502920" cy="182880"/>
+          </a:xfrm>
+          <a:prstGeom prst="rect">
+            <a:avLst/>
+          </a:prstGeom>
+          <a:solidFill>
+            <a:srgbClr val="B5654E"/>
+          </a:solidFill>
+          <a:ln>
+            <a:noFill/>
+          </a:ln>
+        </p:spPr>
+        <p:style>
+          <a:lnRef idx="1">
+            <a:schemeClr val="accent1"/>
+          </a:lnRef>
+          <a:fillRef idx="3">
+            <a:schemeClr val="accent1"/>
+          </a:fillRef>
+          <a:effectRef idx="2">
+            <a:schemeClr val="accent1"/>
+          </a:effectRef>
+          <a:fontRef idx="minor">
+            <a:schemeClr val="lt1"/>
+          </a:fontRef>
+        </p:style>
+        <p:txBody>
+          <a:bodyPr rtlCol="0" anchor="ctr"/>
+          <a:lstStyle/>
+          <a:p>
+            <a:pPr algn="ctr"/>
+          </a:p>
+        </p:txBody>
+      </p:sp>
+      <p:sp>
+        <p:nvSpPr>
+          <p:cNvPr id="21" name="TextBox 20"/>
+          <p:cNvSpPr txBox="1"/>
+          <p:nvPr/>
+        </p:nvSpPr>
+        <p:spPr>
+          <a:xfrm>
+            <a:off x="2907792" y="5733288"/>
+            <a:ext cx="1691640" cy="182880"/>
+          </a:xfrm>
+          <a:prstGeom prst="rect">
+            <a:avLst/>
+          </a:prstGeom>
+          <a:noFill/>
+          <a:ln>
+            <a:noFill/>
+          </a:ln>
+        </p:spPr>
+        <p:txBody>
+          <a:bodyPr wrap="square" lIns="9144" rIns="9144" tIns="9144" bIns="9144" anchor="ctr">
+            <a:spAutoFit/>
+          </a:bodyPr>
+          <a:lstStyle/>
+          <a:p>
+            <a:pPr algn="l"/>
+            <a:r>
+              <a:rPr sz="900" b="1">
+                <a:solidFill>
+                  <a:srgbClr val="FFFFFF"/>
+                </a:solidFill>
+                <a:latin typeface="Apple SD Gothic Neo"/>
+              </a:rPr>
+              <a:t>14B</a:t>
+            </a:r>
+          </a:p>
+        </p:txBody>
+      </p:sp>
+      <p:sp>
+        <p:nvSpPr>
+          <p:cNvPr id="22" name="TextBox 21"/>
+          <p:cNvSpPr txBox="1"/>
+          <p:nvPr/>
+        </p:nvSpPr>
+        <p:spPr>
+          <a:xfrm>
+            <a:off x="2889504" y="5971032"/>
+            <a:ext cx="1737360" cy="310896"/>
+          </a:xfrm>
+          <a:prstGeom prst="rect">
+            <a:avLst/>
+          </a:prstGeom>
+          <a:noFill/>
+          <a:ln>
+            <a:noFill/>
+          </a:ln>
+        </p:spPr>
+        <p:txBody>
+          <a:bodyPr wrap="square" lIns="9144" rIns="9144" tIns="9144" bIns="9144" anchor="t">
+            <a:spAutoFit/>
+          </a:bodyPr>
+          <a:lstStyle/>
+          <a:p>
+            <a:pPr algn="l"/>
+            <a:r>
+              <a:rPr sz="1900" b="1">
+                <a:solidFill>
+                  <a:srgbClr val="282C3A"/>
+                </a:solidFill>
+                <a:latin typeface="Apple SD Gothic Neo"/>
+              </a:rPr>
+              <a:t>46.85%</a:t>
+            </a:r>
+          </a:p>
+        </p:txBody>
+      </p:sp>
+      <p:sp>
+        <p:nvSpPr>
+          <p:cNvPr id="23" name="TextBox 22"/>
+          <p:cNvSpPr txBox="1"/>
+          <p:nvPr/>
+        </p:nvSpPr>
+        <p:spPr>
+          <a:xfrm>
+            <a:off x="4992624" y="5623560"/>
+            <a:ext cx="2029968" cy="877824"/>
+          </a:xfrm>
+          <a:prstGeom prst="rect">
+            <a:avLst/>
+          </a:prstGeom>
+          <a:solidFill>
+            <a:srgbClr val="FFFFFF"/>
+          </a:solidFill>
+          <a:ln>
+            <a:solidFill>
+              <a:srgbClr val="DAD4CA"/>
+            </a:solidFill>
+          </a:ln>
+        </p:spPr>
+        <p:txBody>
+          <a:bodyPr wrap="square" lIns="54864" rIns="54864" tIns="54864" bIns="54864" anchor="t">
+            <a:spAutoFit/>
+          </a:bodyPr>
+          <a:lstStyle/>
+          <a:p>
+            <a:pPr algn="l"/>
+            <a:r>
+              <a:rPr sz="1700" b="0">
+                <a:solidFill>
+                  <a:srgbClr val="363A48"/>
+                </a:solidFill>
+                <a:latin typeface="Apple SD Gothic Neo"/>
+              </a:rPr>
+              <a:t/>
+            </a:r>
+          </a:p>
+        </p:txBody>
+      </p:sp>
+      <p:sp>
+        <p:nvSpPr>
+          <p:cNvPr id="24" name="Rectangle 23"/>
+          <p:cNvSpPr/>
+          <p:nvPr/>
+        </p:nvSpPr>
+        <p:spPr>
+          <a:xfrm>
+            <a:off x="5102352" y="5733288"/>
+            <a:ext cx="502920" cy="182880"/>
+          </a:xfrm>
+          <a:prstGeom prst="rect">
+            <a:avLst/>
+          </a:prstGeom>
+          <a:solidFill>
+            <a:srgbClr val="BF9A5E"/>
+          </a:solidFill>
+          <a:ln>
+            <a:noFill/>
+          </a:ln>
+        </p:spPr>
+        <p:style>
+          <a:lnRef idx="1">
+            <a:schemeClr val="accent1"/>
+          </a:lnRef>
+          <a:fillRef idx="3">
+            <a:schemeClr val="accent1"/>
+          </a:fillRef>
+          <a:effectRef idx="2">
+            <a:schemeClr val="accent1"/>
+          </a:effectRef>
+          <a:fontRef idx="minor">
+            <a:schemeClr val="lt1"/>
+          </a:fontRef>
+        </p:style>
+        <p:txBody>
+          <a:bodyPr rtlCol="0" anchor="ctr"/>
+          <a:lstStyle/>
+          <a:p>
+            <a:pPr algn="ctr"/>
+          </a:p>
+        </p:txBody>
+      </p:sp>
+      <p:sp>
+        <p:nvSpPr>
+          <p:cNvPr id="25" name="TextBox 24"/>
+          <p:cNvSpPr txBox="1"/>
+          <p:nvPr/>
+        </p:nvSpPr>
+        <p:spPr>
+          <a:xfrm>
+            <a:off x="5120640" y="5733288"/>
+            <a:ext cx="1691640" cy="182880"/>
+          </a:xfrm>
+          <a:prstGeom prst="rect">
+            <a:avLst/>
+          </a:prstGeom>
+          <a:noFill/>
+          <a:ln>
+            <a:noFill/>
+          </a:ln>
+        </p:spPr>
+        <p:txBody>
+          <a:bodyPr wrap="square" lIns="9144" rIns="9144" tIns="9144" bIns="9144" anchor="ctr">
+            <a:spAutoFit/>
+          </a:bodyPr>
+          <a:lstStyle/>
+          <a:p>
+            <a:pPr algn="l"/>
+            <a:r>
+              <a:rPr sz="900" b="1">
+                <a:solidFill>
+                  <a:srgbClr val="FFFFFF"/>
+                </a:solidFill>
+                <a:latin typeface="Apple SD Gothic Neo"/>
+              </a:rPr>
+              <a:t>32B</a:t>
+            </a:r>
+          </a:p>
+        </p:txBody>
+      </p:sp>
+      <p:sp>
+        <p:nvSpPr>
+          <p:cNvPr id="26" name="TextBox 25"/>
+          <p:cNvSpPr txBox="1"/>
+          <p:nvPr/>
+        </p:nvSpPr>
+        <p:spPr>
+          <a:xfrm>
+            <a:off x="5102352" y="5971032"/>
+            <a:ext cx="1737360" cy="310896"/>
+          </a:xfrm>
+          <a:prstGeom prst="rect">
+            <a:avLst/>
+          </a:prstGeom>
+          <a:noFill/>
+          <a:ln>
+            <a:noFill/>
+          </a:ln>
+        </p:spPr>
+        <p:txBody>
+          <a:bodyPr wrap="square" lIns="9144" rIns="9144" tIns="9144" bIns="9144" anchor="t">
+            <a:spAutoFit/>
+          </a:bodyPr>
+          <a:lstStyle/>
+          <a:p>
+            <a:pPr algn="l"/>
+            <a:r>
+              <a:rPr sz="1900" b="1">
+                <a:solidFill>
+                  <a:srgbClr val="282C3A"/>
+                </a:solidFill>
+                <a:latin typeface="Apple SD Gothic Neo"/>
+              </a:rPr>
+              <a:t>32.86%</a:t>
+            </a:r>
+          </a:p>
+        </p:txBody>
+      </p:sp>
+      <p:sp>
+        <p:nvSpPr>
+          <p:cNvPr id="27" name="TextBox 26"/>
+          <p:cNvSpPr txBox="1"/>
+          <p:nvPr/>
+        </p:nvSpPr>
+        <p:spPr>
+          <a:xfrm>
+            <a:off x="7205472" y="5623560"/>
+            <a:ext cx="2029968" cy="877824"/>
+          </a:xfrm>
+          <a:prstGeom prst="rect">
+            <a:avLst/>
+          </a:prstGeom>
+          <a:solidFill>
+            <a:srgbClr val="FFFFFF"/>
+          </a:solidFill>
+          <a:ln>
+            <a:solidFill>
+              <a:srgbClr val="DAD4CA"/>
+            </a:solidFill>
+          </a:ln>
+        </p:spPr>
+        <p:txBody>
+          <a:bodyPr wrap="square" lIns="54864" rIns="54864" tIns="54864" bIns="54864" anchor="t">
+            <a:spAutoFit/>
+          </a:bodyPr>
+          <a:lstStyle/>
+          <a:p>
+            <a:pPr algn="l"/>
+            <a:r>
+              <a:rPr sz="1700" b="0">
+                <a:solidFill>
+                  <a:srgbClr val="363A48"/>
+                </a:solidFill>
+                <a:latin typeface="Apple SD Gothic Neo"/>
+              </a:rPr>
+              <a:t/>
+            </a:r>
+          </a:p>
+        </p:txBody>
+      </p:sp>
+      <p:sp>
+        <p:nvSpPr>
+          <p:cNvPr id="28" name="Rectangle 27"/>
+          <p:cNvSpPr/>
+          <p:nvPr/>
+        </p:nvSpPr>
+        <p:spPr>
+          <a:xfrm>
+            <a:off x="7315200" y="5733288"/>
+            <a:ext cx="502920" cy="182880"/>
+          </a:xfrm>
+          <a:prstGeom prst="rect">
+            <a:avLst/>
+          </a:prstGeom>
+          <a:solidFill>
+            <a:srgbClr val="668185"/>
+          </a:solidFill>
+          <a:ln>
+            <a:noFill/>
+          </a:ln>
+        </p:spPr>
+        <p:style>
+          <a:lnRef idx="1">
+            <a:schemeClr val="accent1"/>
+          </a:lnRef>
+          <a:fillRef idx="3">
+            <a:schemeClr val="accent1"/>
+          </a:fillRef>
+          <a:effectRef idx="2">
+            <a:schemeClr val="accent1"/>
+          </a:effectRef>
+          <a:fontRef idx="minor">
+            <a:schemeClr val="lt1"/>
+          </a:fontRef>
+        </p:style>
+        <p:txBody>
+          <a:bodyPr rtlCol="0" anchor="ctr"/>
+          <a:lstStyle/>
+          <a:p>
+            <a:pPr algn="ctr"/>
+          </a:p>
+        </p:txBody>
+      </p:sp>
+      <p:sp>
+        <p:nvSpPr>
+          <p:cNvPr id="29" name="TextBox 28"/>
+          <p:cNvSpPr txBox="1"/>
+          <p:nvPr/>
+        </p:nvSpPr>
+        <p:spPr>
+          <a:xfrm>
+            <a:off x="7333488" y="5733288"/>
+            <a:ext cx="1691640" cy="182880"/>
+          </a:xfrm>
+          <a:prstGeom prst="rect">
+            <a:avLst/>
+          </a:prstGeom>
+          <a:noFill/>
+          <a:ln>
+            <a:noFill/>
+          </a:ln>
+        </p:spPr>
+        <p:txBody>
+          <a:bodyPr wrap="square" lIns="9144" rIns="9144" tIns="9144" bIns="9144" anchor="ctr">
+            <a:spAutoFit/>
+          </a:bodyPr>
+          <a:lstStyle/>
+          <a:p>
+            <a:pPr algn="l"/>
+            <a:r>
+              <a:rPr sz="900" b="1">
+                <a:solidFill>
+                  <a:srgbClr val="FFFFFF"/>
+                </a:solidFill>
+                <a:latin typeface="Apple SD Gothic Neo"/>
+              </a:rPr>
+              <a:t>핵심</a:t>
+            </a:r>
+          </a:p>
+        </p:txBody>
+      </p:sp>
+      <p:sp>
+        <p:nvSpPr>
+          <p:cNvPr id="30" name="TextBox 29"/>
+          <p:cNvSpPr txBox="1"/>
+          <p:nvPr/>
+        </p:nvSpPr>
+        <p:spPr>
+          <a:xfrm>
+            <a:off x="7315200" y="5971032"/>
+            <a:ext cx="1737360" cy="310896"/>
+          </a:xfrm>
+          <a:prstGeom prst="rect">
+            <a:avLst/>
+          </a:prstGeom>
+          <a:noFill/>
+          <a:ln>
+            <a:noFill/>
+          </a:ln>
+        </p:spPr>
+        <p:txBody>
+          <a:bodyPr wrap="square" lIns="9144" rIns="9144" tIns="9144" bIns="9144" anchor="t">
+            <a:spAutoFit/>
+          </a:bodyPr>
+          <a:lstStyle/>
+          <a:p>
+            <a:pPr algn="l"/>
+            <a:r>
+              <a:rPr sz="1900" b="1">
+                <a:solidFill>
+                  <a:srgbClr val="282C3A"/>
+                </a:solidFill>
+                <a:latin typeface="Apple SD Gothic Neo"/>
+              </a:rPr>
+              <a:t>same-family trend</a:t>
             </a:r>
           </a:p>
         </p:txBody>
@@ -9913,7 +10682,7 @@
                 </a:solidFill>
                 <a:latin typeface="Apple SD Gothic Neo"/>
               </a:rPr>
-              <a:t>RQ2-2. 왜 majority가 아니라 abstain인가</a:t>
+              <a:t>RQ2-1. 그런데 broad ranking이 맞아도 남는 오류는 있다</a:t>
             </a:r>
           </a:p>
         </p:txBody>
@@ -9993,7 +10762,7 @@
                 </a:solidFill>
                 <a:latin typeface="Apple SD Gothic Neo"/>
               </a:rPr>
-              <a:t>15/18</a:t>
+              <a:t>15/19</a:t>
             </a:r>
           </a:p>
         </p:txBody>
@@ -10116,21 +10885,145 @@
                 </a:solidFill>
                 <a:latin typeface="Apple SD Gothic Neo"/>
               </a:rPr>
-              <a:t>이 슬라이드의 목적: 기권 설계를 결과표가 아니라 decision rule 자체로 설명한다.</a:t>
-            </a:r>
-          </a:p>
-        </p:txBody>
-      </p:sp>
-      <p:sp>
-        <p:nvSpPr>
-          <p:cNvPr id="10" name="TextBox 9"/>
-          <p:cNvSpPr txBox="1"/>
-          <p:nvPr/>
-        </p:nvSpPr>
-        <p:spPr>
-          <a:xfrm>
-            <a:off x="502920" y="1298448"/>
-            <a:ext cx="6995160" cy="4526280"/>
+              <a:t>이 슬라이드의 목적: cross-family validation 이후에도 남는 residual bias와 practical ensemble 결론을 보여준다.</a:t>
+            </a:r>
+          </a:p>
+        </p:txBody>
+      </p:sp>
+      <p:pic>
+        <p:nvPicPr>
+          <p:cNvPr id="10" name="Picture 9" descr="fig11_position_bias.png"/>
+          <p:cNvPicPr>
+            <a:picLocks noChangeAspect="1"/>
+          </p:cNvPicPr>
+          <p:nvPr/>
+        </p:nvPicPr>
+        <p:blipFill>
+          <a:blip r:embed="rId2"/>
+          <a:stretch>
+            <a:fillRect/>
+          </a:stretch>
+        </p:blipFill>
+        <p:spPr>
+          <a:xfrm>
+            <a:off x="502920" y="1261872"/>
+            <a:ext cx="5468112" cy="1974656"/>
+          </a:xfrm>
+          <a:prstGeom prst="rect">
+            <a:avLst/>
+          </a:prstGeom>
+        </p:spPr>
+      </p:pic>
+      <p:pic>
+        <p:nvPicPr>
+          <p:cNvPr id="11" name="Picture 10" descr="fig13_ensemble_v2.png"/>
+          <p:cNvPicPr>
+            <a:picLocks noChangeAspect="1"/>
+          </p:cNvPicPr>
+          <p:nvPr/>
+        </p:nvPicPr>
+        <p:blipFill>
+          <a:blip r:embed="rId3"/>
+          <a:stretch>
+            <a:fillRect/>
+          </a:stretch>
+        </p:blipFill>
+        <p:spPr>
+          <a:xfrm>
+            <a:off x="6199632" y="1261872"/>
+            <a:ext cx="5468112" cy="2327359"/>
+          </a:xfrm>
+          <a:prstGeom prst="rect">
+            <a:avLst/>
+          </a:prstGeom>
+        </p:spPr>
+      </p:pic>
+      <p:sp>
+        <p:nvSpPr>
+          <p:cNvPr id="12" name="TextBox 11"/>
+          <p:cNvSpPr txBox="1"/>
+          <p:nvPr/>
+        </p:nvSpPr>
+        <p:spPr>
+          <a:xfrm>
+            <a:off x="566928" y="4297680"/>
+            <a:ext cx="5340096" cy="201168"/>
+          </a:xfrm>
+          <a:prstGeom prst="rect">
+            <a:avLst/>
+          </a:prstGeom>
+          <a:noFill/>
+          <a:ln>
+            <a:noFill/>
+          </a:ln>
+        </p:spPr>
+        <p:txBody>
+          <a:bodyPr wrap="square" lIns="64008" rIns="64008" tIns="64008" bIns="64008" anchor="t">
+            <a:spAutoFit/>
+          </a:bodyPr>
+          <a:lstStyle/>
+          <a:p>
+            <a:pPr algn="ctr"/>
+            <a:r>
+              <a:rPr sz="1000" b="0">
+                <a:solidFill>
+                  <a:srgbClr val="70767D"/>
+                </a:solidFill>
+                <a:latin typeface="Apple SD Gothic Neo"/>
+              </a:rPr>
+              <a:t>Residual position bias</a:t>
+            </a:r>
+          </a:p>
+        </p:txBody>
+      </p:sp>
+      <p:sp>
+        <p:nvSpPr>
+          <p:cNvPr id="13" name="TextBox 12"/>
+          <p:cNvSpPr txBox="1"/>
+          <p:nvPr/>
+        </p:nvSpPr>
+        <p:spPr>
+          <a:xfrm>
+            <a:off x="6263640" y="4297680"/>
+            <a:ext cx="5340096" cy="201168"/>
+          </a:xfrm>
+          <a:prstGeom prst="rect">
+            <a:avLst/>
+          </a:prstGeom>
+          <a:noFill/>
+          <a:ln>
+            <a:noFill/>
+          </a:ln>
+        </p:spPr>
+        <p:txBody>
+          <a:bodyPr wrap="square" lIns="64008" rIns="64008" tIns="64008" bIns="64008" anchor="t">
+            <a:spAutoFit/>
+          </a:bodyPr>
+          <a:lstStyle/>
+          <a:p>
+            <a:pPr algn="ctr"/>
+            <a:r>
+              <a:rPr sz="1000" b="0">
+                <a:solidFill>
+                  <a:srgbClr val="70767D"/>
+                </a:solidFill>
+                <a:latin typeface="Apple SD Gothic Neo"/>
+              </a:rPr>
+              <a:t>Majority vs abstain ensemble</a:t>
+            </a:r>
+          </a:p>
+        </p:txBody>
+      </p:sp>
+      <p:sp>
+        <p:nvSpPr>
+          <p:cNvPr id="14" name="TextBox 13"/>
+          <p:cNvSpPr txBox="1"/>
+          <p:nvPr/>
+        </p:nvSpPr>
+        <p:spPr>
+          <a:xfrm>
+            <a:off x="502920" y="4553712"/>
+            <a:ext cx="11155680" cy="1417320"/>
           </a:xfrm>
           <a:prstGeom prst="rect">
             <a:avLst/>
@@ -10145,7 +11038,7 @@
           </a:ln>
         </p:spPr>
         <p:txBody>
-          <a:bodyPr wrap="square" lIns="128016" rIns="128016" tIns="128016" bIns="128016" anchor="t">
+          <a:bodyPr wrap="square" lIns="118872" rIns="118872" tIns="118872" bIns="118872" anchor="t">
             <a:spAutoFit/>
           </a:bodyPr>
           <a:lstStyle/>
@@ -10160,7 +11053,7 @@
               <a:spcAft>
                 <a:spcPts val="800"/>
               </a:spcAft>
-              <a:defRPr sz="1800">
+              <a:defRPr sz="1600">
                 <a:solidFill>
                   <a:srgbClr val="363A48"/>
                 </a:solidFill>
@@ -10168,7 +11061,7 @@
               </a:defRPr>
             </a:pPr>
             <a:r>
-              <a:t>• 각 judge는 pairwise 한 쌍에 대해 {A, B, tie, inconsistent} 중 하나를 남긴다. 여기서 inconsistent는 AB/BA swap이 충돌한 low-confidence case다.</a:t>
+              <a:t>• 32B judge의 남은 불일치 중 94.93%가 first-position win으로 연결되어 residual bias가 위치 편향으로 농축된다.</a:t>
             </a:r>
           </a:p>
           <a:p>
@@ -10182,7 +11075,7 @@
               <a:spcAft>
                 <a:spcPts val="800"/>
               </a:spcAft>
-              <a:defRPr sz="1800">
+              <a:defRPr sz="1600">
                 <a:solidFill>
                   <a:srgbClr val="363A48"/>
                 </a:solidFill>
@@ -10190,7 +11083,7 @@
               </a:defRPr>
             </a:pPr>
             <a:r>
-              <a:t>• 다수결은 inconsistent도 하나의 표처럼 세기 때문에 [inconsistent, inconsistent, A] 같은 경우 winner를 잃고 noisy 7B가 aggregate를 오염시킨다.</a:t>
+              <a:t>• 단순 majority ensemble은 오히려 58.63%로 나빠지고, abstain ensemble만 24.70%까지 낮춘다.</a:t>
             </a:r>
           </a:p>
           <a:p>
@@ -10204,7 +11097,7 @@
               <a:spcAft>
                 <a:spcPts val="800"/>
               </a:spcAft>
-              <a:defRPr sz="1800">
+              <a:defRPr sz="1600">
                 <a:solidFill>
                   <a:srgbClr val="363A48"/>
                 </a:solidFill>
@@ -10212,81 +11105,21 @@
               </a:defRPr>
             </a:pPr>
             <a:r>
-              <a:t>• abstain은 inconsistent를 기권으로 버리고, 남은 decisive vote가 충돌하지 않을 때만 winner를 선언한다.</a:t>
-            </a:r>
-          </a:p>
-          <a:p>
-            <a:pPr>
-              <a:lnSpc>
-                <a:spcPct val="112000"/>
-              </a:lnSpc>
-              <a:spcBef>
-                <a:spcPts val="0"/>
-              </a:spcBef>
-              <a:spcAft>
-                <a:spcPts val="800"/>
-              </a:spcAft>
-              <a:defRPr sz="1800">
-                <a:solidFill>
-                  <a:srgbClr val="363A48"/>
-                </a:solidFill>
-                <a:latin typeface="Apple SD Gothic Neo"/>
-              </a:defRPr>
-            </a:pPr>
-            <a:r>
-              <a:t>• 실제로 604쌍(36%)이 inconsistent→winner로 복구되고, inconsistency는 58.63%→24.70%, decisive rate는 41.37%→75.30%로 개선된다.</a:t>
-            </a:r>
-          </a:p>
-        </p:txBody>
-      </p:sp>
-      <p:sp>
-        <p:nvSpPr>
-          <p:cNvPr id="11" name="TextBox 10"/>
-          <p:cNvSpPr txBox="1"/>
-          <p:nvPr/>
-        </p:nvSpPr>
-        <p:spPr>
-          <a:xfrm>
-            <a:off x="7726679" y="1298448"/>
-            <a:ext cx="3931920" cy="292608"/>
-          </a:xfrm>
-          <a:prstGeom prst="rect">
-            <a:avLst/>
-          </a:prstGeom>
-          <a:noFill/>
-          <a:ln>
-            <a:noFill/>
-          </a:ln>
-        </p:spPr>
-        <p:txBody>
-          <a:bodyPr wrap="square" lIns="64008" rIns="64008" tIns="64008" bIns="64008" anchor="t">
-            <a:spAutoFit/>
-          </a:bodyPr>
-          <a:lstStyle/>
-          <a:p>
-            <a:pPr algn="l"/>
-            <a:r>
-              <a:rPr sz="1800" b="1">
-                <a:solidFill>
-                  <a:srgbClr val="282C3A"/>
-                </a:solidFill>
-                <a:latin typeface="Apple SD Gothic Neo"/>
-              </a:rPr>
-              <a:t>핵심 해석</a:t>
-            </a:r>
-          </a:p>
-        </p:txBody>
-      </p:sp>
-      <p:sp>
-        <p:nvSpPr>
-          <p:cNvPr id="12" name="TextBox 11"/>
-          <p:cNvSpPr txBox="1"/>
-          <p:nvPr/>
-        </p:nvSpPr>
-        <p:spPr>
-          <a:xfrm>
-            <a:off x="7726679" y="1645920"/>
-            <a:ext cx="3931920" cy="4178808"/>
+              <a:t>• 즉 broad ranking이 맞는 것과 question-level decision이 깨끗한 것은 다른 문제다.</a:t>
+            </a:r>
+          </a:p>
+        </p:txBody>
+      </p:sp>
+      <p:sp>
+        <p:nvSpPr>
+          <p:cNvPr id="15" name="TextBox 14"/>
+          <p:cNvSpPr txBox="1"/>
+          <p:nvPr/>
+        </p:nvSpPr>
+        <p:spPr>
+          <a:xfrm>
+            <a:off x="502920" y="5632704"/>
+            <a:ext cx="11155680" cy="548640"/>
           </a:xfrm>
           <a:prstGeom prst="rect">
             <a:avLst/>
@@ -10301,702 +11134,20 @@
           </a:ln>
         </p:spPr>
         <p:txBody>
-          <a:bodyPr wrap="square" lIns="128016" rIns="128016" tIns="128016" bIns="128016" anchor="t">
+          <a:bodyPr wrap="square" lIns="64008" rIns="64008" tIns="64008" bIns="64008" anchor="ctr">
             <a:spAutoFit/>
           </a:bodyPr>
           <a:lstStyle/>
           <a:p>
             <a:pPr algn="l"/>
             <a:r>
-              <a:rPr sz="1700" b="0">
-                <a:solidFill>
-                  <a:srgbClr val="363A48"/>
-                </a:solidFill>
-                <a:latin typeface="Apple SD Gothic Neo"/>
-              </a:rPr>
-              <a:t/>
-            </a:r>
-          </a:p>
-        </p:txBody>
-      </p:sp>
-      <p:sp>
-        <p:nvSpPr>
-          <p:cNvPr id="13" name="TextBox 12"/>
-          <p:cNvSpPr txBox="1"/>
-          <p:nvPr/>
-        </p:nvSpPr>
-        <p:spPr>
-          <a:xfrm>
-            <a:off x="7882127" y="1847088"/>
-            <a:ext cx="3566160" cy="1170432"/>
-          </a:xfrm>
-          <a:prstGeom prst="rect">
-            <a:avLst/>
-          </a:prstGeom>
-          <a:noFill/>
-          <a:ln>
-            <a:noFill/>
-          </a:ln>
-        </p:spPr>
-        <p:txBody>
-          <a:bodyPr wrap="square" lIns="0" rIns="0" tIns="0" bIns="0" anchor="t">
-            <a:spAutoFit/>
-          </a:bodyPr>
-          <a:lstStyle/>
-          <a:p>
-            <a:pPr algn="l"/>
-            <a:r>
               <a:rPr sz="1600" b="1">
                 <a:solidFill>
                   <a:srgbClr val="282C3A"/>
                 </a:solidFill>
                 <a:latin typeface="Apple SD Gothic Neo"/>
               </a:rPr>
-              <a:t>abstain은 덜 결정하는 설계가 아니라, low-confidence vote를 표로 세지 않아서 더 많은 쌍을 더 깨끗하게 결정하는 설계입니다.</a:t>
-            </a:r>
-          </a:p>
-        </p:txBody>
-      </p:sp>
-      <p:sp>
-        <p:nvSpPr>
-          <p:cNvPr id="14" name="TextBox 13"/>
-          <p:cNvSpPr txBox="1"/>
-          <p:nvPr/>
-        </p:nvSpPr>
-        <p:spPr>
-          <a:xfrm>
-            <a:off x="7882127" y="3310128"/>
-            <a:ext cx="2029968" cy="877824"/>
-          </a:xfrm>
-          <a:prstGeom prst="rect">
-            <a:avLst/>
-          </a:prstGeom>
-          <a:solidFill>
-            <a:srgbClr val="FFFFFF"/>
-          </a:solidFill>
-          <a:ln>
-            <a:solidFill>
-              <a:srgbClr val="DAD4CA"/>
-            </a:solidFill>
-          </a:ln>
-        </p:spPr>
-        <p:txBody>
-          <a:bodyPr wrap="square" lIns="54864" rIns="54864" tIns="54864" bIns="54864" anchor="t">
-            <a:spAutoFit/>
-          </a:bodyPr>
-          <a:lstStyle/>
-          <a:p>
-            <a:pPr algn="l"/>
-            <a:r>
-              <a:rPr sz="1700" b="0">
-                <a:solidFill>
-                  <a:srgbClr val="363A48"/>
-                </a:solidFill>
-                <a:latin typeface="Apple SD Gothic Neo"/>
-              </a:rPr>
-              <a:t/>
-            </a:r>
-          </a:p>
-        </p:txBody>
-      </p:sp>
-      <p:sp>
-        <p:nvSpPr>
-          <p:cNvPr id="15" name="Rectangle 14"/>
-          <p:cNvSpPr/>
-          <p:nvPr/>
-        </p:nvSpPr>
-        <p:spPr>
-          <a:xfrm>
-            <a:off x="7991855" y="3419856"/>
-            <a:ext cx="502920" cy="182880"/>
-          </a:xfrm>
-          <a:prstGeom prst="rect">
-            <a:avLst/>
-          </a:prstGeom>
-          <a:solidFill>
-            <a:srgbClr val="375667"/>
-          </a:solidFill>
-          <a:ln>
-            <a:noFill/>
-          </a:ln>
-        </p:spPr>
-        <p:style>
-          <a:lnRef idx="1">
-            <a:schemeClr val="accent1"/>
-          </a:lnRef>
-          <a:fillRef idx="3">
-            <a:schemeClr val="accent1"/>
-          </a:fillRef>
-          <a:effectRef idx="2">
-            <a:schemeClr val="accent1"/>
-          </a:effectRef>
-          <a:fontRef idx="minor">
-            <a:schemeClr val="lt1"/>
-          </a:fontRef>
-        </p:style>
-        <p:txBody>
-          <a:bodyPr rtlCol="0" anchor="ctr"/>
-          <a:lstStyle/>
-          <a:p>
-            <a:pPr algn="ctr"/>
-          </a:p>
-        </p:txBody>
-      </p:sp>
-      <p:sp>
-        <p:nvSpPr>
-          <p:cNvPr id="16" name="TextBox 15"/>
-          <p:cNvSpPr txBox="1"/>
-          <p:nvPr/>
-        </p:nvSpPr>
-        <p:spPr>
-          <a:xfrm>
-            <a:off x="8010143" y="3419856"/>
-            <a:ext cx="1691640" cy="182880"/>
-          </a:xfrm>
-          <a:prstGeom prst="rect">
-            <a:avLst/>
-          </a:prstGeom>
-          <a:noFill/>
-          <a:ln>
-            <a:noFill/>
-          </a:ln>
-        </p:spPr>
-        <p:txBody>
-          <a:bodyPr wrap="square" lIns="9144" rIns="9144" tIns="9144" bIns="9144" anchor="ctr">
-            <a:spAutoFit/>
-          </a:bodyPr>
-          <a:lstStyle/>
-          <a:p>
-            <a:pPr algn="l"/>
-            <a:r>
-              <a:rPr sz="900" b="1">
-                <a:solidFill>
-                  <a:srgbClr val="FFFFFF"/>
-                </a:solidFill>
-                <a:latin typeface="Apple SD Gothic Neo"/>
-              </a:rPr>
-              <a:t>Majority</a:t>
-            </a:r>
-          </a:p>
-        </p:txBody>
-      </p:sp>
-      <p:sp>
-        <p:nvSpPr>
-          <p:cNvPr id="17" name="TextBox 16"/>
-          <p:cNvSpPr txBox="1"/>
-          <p:nvPr/>
-        </p:nvSpPr>
-        <p:spPr>
-          <a:xfrm>
-            <a:off x="7991855" y="3657600"/>
-            <a:ext cx="1737360" cy="310896"/>
-          </a:xfrm>
-          <a:prstGeom prst="rect">
-            <a:avLst/>
-          </a:prstGeom>
-          <a:noFill/>
-          <a:ln>
-            <a:noFill/>
-          </a:ln>
-        </p:spPr>
-        <p:txBody>
-          <a:bodyPr wrap="square" lIns="9144" rIns="9144" tIns="9144" bIns="9144" anchor="t">
-            <a:spAutoFit/>
-          </a:bodyPr>
-          <a:lstStyle/>
-          <a:p>
-            <a:pPr algn="l"/>
-            <a:r>
-              <a:rPr sz="1900" b="1">
-                <a:solidFill>
-                  <a:srgbClr val="282C3A"/>
-                </a:solidFill>
-                <a:latin typeface="Apple SD Gothic Neo"/>
-              </a:rPr>
-              <a:t>58.63%</a:t>
-            </a:r>
-          </a:p>
-        </p:txBody>
-      </p:sp>
-      <p:sp>
-        <p:nvSpPr>
-          <p:cNvPr id="18" name="TextBox 17"/>
-          <p:cNvSpPr txBox="1"/>
-          <p:nvPr/>
-        </p:nvSpPr>
-        <p:spPr>
-          <a:xfrm>
-            <a:off x="9729215" y="3310128"/>
-            <a:ext cx="2029968" cy="877824"/>
-          </a:xfrm>
-          <a:prstGeom prst="rect">
-            <a:avLst/>
-          </a:prstGeom>
-          <a:solidFill>
-            <a:srgbClr val="FFFFFF"/>
-          </a:solidFill>
-          <a:ln>
-            <a:solidFill>
-              <a:srgbClr val="DAD4CA"/>
-            </a:solidFill>
-          </a:ln>
-        </p:spPr>
-        <p:txBody>
-          <a:bodyPr wrap="square" lIns="54864" rIns="54864" tIns="54864" bIns="54864" anchor="t">
-            <a:spAutoFit/>
-          </a:bodyPr>
-          <a:lstStyle/>
-          <a:p>
-            <a:pPr algn="l"/>
-            <a:r>
-              <a:rPr sz="1700" b="0">
-                <a:solidFill>
-                  <a:srgbClr val="363A48"/>
-                </a:solidFill>
-                <a:latin typeface="Apple SD Gothic Neo"/>
-              </a:rPr>
-              <a:t/>
-            </a:r>
-          </a:p>
-        </p:txBody>
-      </p:sp>
-      <p:sp>
-        <p:nvSpPr>
-          <p:cNvPr id="19" name="Rectangle 18"/>
-          <p:cNvSpPr/>
-          <p:nvPr/>
-        </p:nvSpPr>
-        <p:spPr>
-          <a:xfrm>
-            <a:off x="9838943" y="3419856"/>
-            <a:ext cx="502920" cy="182880"/>
-          </a:xfrm>
-          <a:prstGeom prst="rect">
-            <a:avLst/>
-          </a:prstGeom>
-          <a:solidFill>
-            <a:srgbClr val="B5654E"/>
-          </a:solidFill>
-          <a:ln>
-            <a:noFill/>
-          </a:ln>
-        </p:spPr>
-        <p:style>
-          <a:lnRef idx="1">
-            <a:schemeClr val="accent1"/>
-          </a:lnRef>
-          <a:fillRef idx="3">
-            <a:schemeClr val="accent1"/>
-          </a:fillRef>
-          <a:effectRef idx="2">
-            <a:schemeClr val="accent1"/>
-          </a:effectRef>
-          <a:fontRef idx="minor">
-            <a:schemeClr val="lt1"/>
-          </a:fontRef>
-        </p:style>
-        <p:txBody>
-          <a:bodyPr rtlCol="0" anchor="ctr"/>
-          <a:lstStyle/>
-          <a:p>
-            <a:pPr algn="ctr"/>
-          </a:p>
-        </p:txBody>
-      </p:sp>
-      <p:sp>
-        <p:nvSpPr>
-          <p:cNvPr id="20" name="TextBox 19"/>
-          <p:cNvSpPr txBox="1"/>
-          <p:nvPr/>
-        </p:nvSpPr>
-        <p:spPr>
-          <a:xfrm>
-            <a:off x="9857231" y="3419856"/>
-            <a:ext cx="1691640" cy="182880"/>
-          </a:xfrm>
-          <a:prstGeom prst="rect">
-            <a:avLst/>
-          </a:prstGeom>
-          <a:noFill/>
-          <a:ln>
-            <a:noFill/>
-          </a:ln>
-        </p:spPr>
-        <p:txBody>
-          <a:bodyPr wrap="square" lIns="9144" rIns="9144" tIns="9144" bIns="9144" anchor="ctr">
-            <a:spAutoFit/>
-          </a:bodyPr>
-          <a:lstStyle/>
-          <a:p>
-            <a:pPr algn="l"/>
-            <a:r>
-              <a:rPr sz="900" b="1">
-                <a:solidFill>
-                  <a:srgbClr val="FFFFFF"/>
-                </a:solidFill>
-                <a:latin typeface="Apple SD Gothic Neo"/>
-              </a:rPr>
-              <a:t>Abstain</a:t>
-            </a:r>
-          </a:p>
-        </p:txBody>
-      </p:sp>
-      <p:sp>
-        <p:nvSpPr>
-          <p:cNvPr id="21" name="TextBox 20"/>
-          <p:cNvSpPr txBox="1"/>
-          <p:nvPr/>
-        </p:nvSpPr>
-        <p:spPr>
-          <a:xfrm>
-            <a:off x="9838943" y="3657600"/>
-            <a:ext cx="1737360" cy="310896"/>
-          </a:xfrm>
-          <a:prstGeom prst="rect">
-            <a:avLst/>
-          </a:prstGeom>
-          <a:noFill/>
-          <a:ln>
-            <a:noFill/>
-          </a:ln>
-        </p:spPr>
-        <p:txBody>
-          <a:bodyPr wrap="square" lIns="9144" rIns="9144" tIns="9144" bIns="9144" anchor="t">
-            <a:spAutoFit/>
-          </a:bodyPr>
-          <a:lstStyle/>
-          <a:p>
-            <a:pPr algn="l"/>
-            <a:r>
-              <a:rPr sz="1900" b="1">
-                <a:solidFill>
-                  <a:srgbClr val="282C3A"/>
-                </a:solidFill>
-                <a:latin typeface="Apple SD Gothic Neo"/>
-              </a:rPr>
-              <a:t>24.70%</a:t>
-            </a:r>
-          </a:p>
-        </p:txBody>
-      </p:sp>
-      <p:sp>
-        <p:nvSpPr>
-          <p:cNvPr id="22" name="TextBox 21"/>
-          <p:cNvSpPr txBox="1"/>
-          <p:nvPr/>
-        </p:nvSpPr>
-        <p:spPr>
-          <a:xfrm>
-            <a:off x="7882127" y="4224528"/>
-            <a:ext cx="2029968" cy="877824"/>
-          </a:xfrm>
-          <a:prstGeom prst="rect">
-            <a:avLst/>
-          </a:prstGeom>
-          <a:solidFill>
-            <a:srgbClr val="FFFFFF"/>
-          </a:solidFill>
-          <a:ln>
-            <a:solidFill>
-              <a:srgbClr val="DAD4CA"/>
-            </a:solidFill>
-          </a:ln>
-        </p:spPr>
-        <p:txBody>
-          <a:bodyPr wrap="square" lIns="54864" rIns="54864" tIns="54864" bIns="54864" anchor="t">
-            <a:spAutoFit/>
-          </a:bodyPr>
-          <a:lstStyle/>
-          <a:p>
-            <a:pPr algn="l"/>
-            <a:r>
-              <a:rPr sz="1700" b="0">
-                <a:solidFill>
-                  <a:srgbClr val="363A48"/>
-                </a:solidFill>
-                <a:latin typeface="Apple SD Gothic Neo"/>
-              </a:rPr>
-              <a:t/>
-            </a:r>
-          </a:p>
-        </p:txBody>
-      </p:sp>
-      <p:sp>
-        <p:nvSpPr>
-          <p:cNvPr id="23" name="Rectangle 22"/>
-          <p:cNvSpPr/>
-          <p:nvPr/>
-        </p:nvSpPr>
-        <p:spPr>
-          <a:xfrm>
-            <a:off x="7991855" y="4334256"/>
-            <a:ext cx="502920" cy="182880"/>
-          </a:xfrm>
-          <a:prstGeom prst="rect">
-            <a:avLst/>
-          </a:prstGeom>
-          <a:solidFill>
-            <a:srgbClr val="BF9A5E"/>
-          </a:solidFill>
-          <a:ln>
-            <a:noFill/>
-          </a:ln>
-        </p:spPr>
-        <p:style>
-          <a:lnRef idx="1">
-            <a:schemeClr val="accent1"/>
-          </a:lnRef>
-          <a:fillRef idx="3">
-            <a:schemeClr val="accent1"/>
-          </a:fillRef>
-          <a:effectRef idx="2">
-            <a:schemeClr val="accent1"/>
-          </a:effectRef>
-          <a:fontRef idx="minor">
-            <a:schemeClr val="lt1"/>
-          </a:fontRef>
-        </p:style>
-        <p:txBody>
-          <a:bodyPr rtlCol="0" anchor="ctr"/>
-          <a:lstStyle/>
-          <a:p>
-            <a:pPr algn="ctr"/>
-          </a:p>
-        </p:txBody>
-      </p:sp>
-      <p:sp>
-        <p:nvSpPr>
-          <p:cNvPr id="24" name="TextBox 23"/>
-          <p:cNvSpPr txBox="1"/>
-          <p:nvPr/>
-        </p:nvSpPr>
-        <p:spPr>
-          <a:xfrm>
-            <a:off x="8010143" y="4334256"/>
-            <a:ext cx="1691640" cy="182880"/>
-          </a:xfrm>
-          <a:prstGeom prst="rect">
-            <a:avLst/>
-          </a:prstGeom>
-          <a:noFill/>
-          <a:ln>
-            <a:noFill/>
-          </a:ln>
-        </p:spPr>
-        <p:txBody>
-          <a:bodyPr wrap="square" lIns="9144" rIns="9144" tIns="9144" bIns="9144" anchor="ctr">
-            <a:spAutoFit/>
-          </a:bodyPr>
-          <a:lstStyle/>
-          <a:p>
-            <a:pPr algn="l"/>
-            <a:r>
-              <a:rPr sz="900" b="1">
-                <a:solidFill>
-                  <a:srgbClr val="FFFFFF"/>
-                </a:solidFill>
-                <a:latin typeface="Apple SD Gothic Neo"/>
-              </a:rPr>
-              <a:t>Recovered</a:t>
-            </a:r>
-          </a:p>
-        </p:txBody>
-      </p:sp>
-      <p:sp>
-        <p:nvSpPr>
-          <p:cNvPr id="25" name="TextBox 24"/>
-          <p:cNvSpPr txBox="1"/>
-          <p:nvPr/>
-        </p:nvSpPr>
-        <p:spPr>
-          <a:xfrm>
-            <a:off x="7991855" y="4572000"/>
-            <a:ext cx="1737360" cy="310896"/>
-          </a:xfrm>
-          <a:prstGeom prst="rect">
-            <a:avLst/>
-          </a:prstGeom>
-          <a:noFill/>
-          <a:ln>
-            <a:noFill/>
-          </a:ln>
-        </p:spPr>
-        <p:txBody>
-          <a:bodyPr wrap="square" lIns="9144" rIns="9144" tIns="9144" bIns="9144" anchor="t">
-            <a:spAutoFit/>
-          </a:bodyPr>
-          <a:lstStyle/>
-          <a:p>
-            <a:pPr algn="l"/>
-            <a:r>
-              <a:rPr sz="1900" b="1">
-                <a:solidFill>
-                  <a:srgbClr val="282C3A"/>
-                </a:solidFill>
-                <a:latin typeface="Apple SD Gothic Neo"/>
-              </a:rPr>
-              <a:t>604쌍</a:t>
-            </a:r>
-          </a:p>
-        </p:txBody>
-      </p:sp>
-      <p:sp>
-        <p:nvSpPr>
-          <p:cNvPr id="26" name="TextBox 25"/>
-          <p:cNvSpPr txBox="1"/>
-          <p:nvPr/>
-        </p:nvSpPr>
-        <p:spPr>
-          <a:xfrm>
-            <a:off x="9729215" y="4224528"/>
-            <a:ext cx="2029968" cy="877824"/>
-          </a:xfrm>
-          <a:prstGeom prst="rect">
-            <a:avLst/>
-          </a:prstGeom>
-          <a:solidFill>
-            <a:srgbClr val="FFFFFF"/>
-          </a:solidFill>
-          <a:ln>
-            <a:solidFill>
-              <a:srgbClr val="DAD4CA"/>
-            </a:solidFill>
-          </a:ln>
-        </p:spPr>
-        <p:txBody>
-          <a:bodyPr wrap="square" lIns="54864" rIns="54864" tIns="54864" bIns="54864" anchor="t">
-            <a:spAutoFit/>
-          </a:bodyPr>
-          <a:lstStyle/>
-          <a:p>
-            <a:pPr algn="l"/>
-            <a:r>
-              <a:rPr sz="1700" b="0">
-                <a:solidFill>
-                  <a:srgbClr val="363A48"/>
-                </a:solidFill>
-                <a:latin typeface="Apple SD Gothic Neo"/>
-              </a:rPr>
-              <a:t/>
-            </a:r>
-          </a:p>
-        </p:txBody>
-      </p:sp>
-      <p:sp>
-        <p:nvSpPr>
-          <p:cNvPr id="27" name="Rectangle 26"/>
-          <p:cNvSpPr/>
-          <p:nvPr/>
-        </p:nvSpPr>
-        <p:spPr>
-          <a:xfrm>
-            <a:off x="9838943" y="4334256"/>
-            <a:ext cx="502920" cy="182880"/>
-          </a:xfrm>
-          <a:prstGeom prst="rect">
-            <a:avLst/>
-          </a:prstGeom>
-          <a:solidFill>
-            <a:srgbClr val="668185"/>
-          </a:solidFill>
-          <a:ln>
-            <a:noFill/>
-          </a:ln>
-        </p:spPr>
-        <p:style>
-          <a:lnRef idx="1">
-            <a:schemeClr val="accent1"/>
-          </a:lnRef>
-          <a:fillRef idx="3">
-            <a:schemeClr val="accent1"/>
-          </a:fillRef>
-          <a:effectRef idx="2">
-            <a:schemeClr val="accent1"/>
-          </a:effectRef>
-          <a:fontRef idx="minor">
-            <a:schemeClr val="lt1"/>
-          </a:fontRef>
-        </p:style>
-        <p:txBody>
-          <a:bodyPr rtlCol="0" anchor="ctr"/>
-          <a:lstStyle/>
-          <a:p>
-            <a:pPr algn="ctr"/>
-          </a:p>
-        </p:txBody>
-      </p:sp>
-      <p:sp>
-        <p:nvSpPr>
-          <p:cNvPr id="28" name="TextBox 27"/>
-          <p:cNvSpPr txBox="1"/>
-          <p:nvPr/>
-        </p:nvSpPr>
-        <p:spPr>
-          <a:xfrm>
-            <a:off x="9857231" y="4334256"/>
-            <a:ext cx="1691640" cy="182880"/>
-          </a:xfrm>
-          <a:prstGeom prst="rect">
-            <a:avLst/>
-          </a:prstGeom>
-          <a:noFill/>
-          <a:ln>
-            <a:noFill/>
-          </a:ln>
-        </p:spPr>
-        <p:txBody>
-          <a:bodyPr wrap="square" lIns="9144" rIns="9144" tIns="9144" bIns="9144" anchor="ctr">
-            <a:spAutoFit/>
-          </a:bodyPr>
-          <a:lstStyle/>
-          <a:p>
-            <a:pPr algn="l"/>
-            <a:r>
-              <a:rPr sz="900" b="1">
-                <a:solidFill>
-                  <a:srgbClr val="FFFFFF"/>
-                </a:solidFill>
-                <a:latin typeface="Apple SD Gothic Neo"/>
-              </a:rPr>
-              <a:t>Decisive</a:t>
-            </a:r>
-          </a:p>
-        </p:txBody>
-      </p:sp>
-      <p:sp>
-        <p:nvSpPr>
-          <p:cNvPr id="29" name="TextBox 28"/>
-          <p:cNvSpPr txBox="1"/>
-          <p:nvPr/>
-        </p:nvSpPr>
-        <p:spPr>
-          <a:xfrm>
-            <a:off x="9838943" y="4572000"/>
-            <a:ext cx="1737360" cy="310896"/>
-          </a:xfrm>
-          <a:prstGeom prst="rect">
-            <a:avLst/>
-          </a:prstGeom>
-          <a:noFill/>
-          <a:ln>
-            <a:noFill/>
-          </a:ln>
-        </p:spPr>
-        <p:txBody>
-          <a:bodyPr wrap="square" lIns="9144" rIns="9144" tIns="9144" bIns="9144" anchor="t">
-            <a:spAutoFit/>
-          </a:bodyPr>
-          <a:lstStyle/>
-          <a:p>
-            <a:pPr algn="l"/>
-            <a:r>
-              <a:rPr sz="1900" b="1">
-                <a:solidFill>
-                  <a:srgbClr val="282C3A"/>
-                </a:solidFill>
-                <a:latin typeface="Apple SD Gothic Neo"/>
-              </a:rPr>
-              <a:t>75.30%</a:t>
+              <a:t>RQ2의 답은 명확합니다. 전체 서열이 맞아도 남는 오류는 구조화된 편향과 운영 리스크로 남습니다.</a:t>
             </a:r>
           </a:p>
         </p:txBody>
@@ -11146,7 +11297,7 @@
                 </a:solidFill>
                 <a:latin typeface="Apple SD Gothic Neo"/>
               </a:rPr>
-              <a:t>RQ3. cross-family와 hold-out에서도 결론이 남는가</a:t>
+              <a:t>RQ2-2. 왜 majority가 아니라 abstain인가</a:t>
             </a:r>
           </a:p>
         </p:txBody>
@@ -11226,7 +11377,7 @@
                 </a:solidFill>
                 <a:latin typeface="Apple SD Gothic Neo"/>
               </a:rPr>
-              <a:t>16/18</a:t>
+              <a:t>16/19</a:t>
             </a:r>
           </a:p>
         </p:txBody>
@@ -11349,145 +11500,21 @@
                 </a:solidFill>
                 <a:latin typeface="Apple SD Gothic Neo"/>
               </a:rPr>
-              <a:t>이 슬라이드의 목적: InternLM20B, GPT-4o-mini, repeated hold-out 결과를 한 장에서 묶어 RQ3에 답한다.</a:t>
-            </a:r>
-          </a:p>
-        </p:txBody>
-      </p:sp>
-      <p:pic>
-        <p:nvPicPr>
-          <p:cNvPr id="10" name="Picture 9" descr="fig16_phase345_judge_summary.png"/>
-          <p:cNvPicPr>
-            <a:picLocks noChangeAspect="1"/>
-          </p:cNvPicPr>
-          <p:nvPr/>
-        </p:nvPicPr>
-        <p:blipFill>
-          <a:blip r:embed="rId2"/>
-          <a:stretch>
-            <a:fillRect/>
-          </a:stretch>
-        </p:blipFill>
-        <p:spPr>
-          <a:xfrm>
-            <a:off x="502920" y="1261872"/>
-            <a:ext cx="5468112" cy="3892253"/>
-          </a:xfrm>
-          <a:prstGeom prst="rect">
-            <a:avLst/>
-          </a:prstGeom>
-        </p:spPr>
-      </p:pic>
-      <p:pic>
-        <p:nvPicPr>
-          <p:cNvPr id="11" name="Picture 10" descr="fig15_tiny_mt_bench_generalization.png"/>
-          <p:cNvPicPr>
-            <a:picLocks noChangeAspect="1"/>
-          </p:cNvPicPr>
-          <p:nvPr/>
-        </p:nvPicPr>
-        <p:blipFill>
-          <a:blip r:embed="rId3"/>
-          <a:stretch>
-            <a:fillRect/>
-          </a:stretch>
-        </p:blipFill>
-        <p:spPr>
-          <a:xfrm>
-            <a:off x="6199632" y="1261872"/>
-            <a:ext cx="5468112" cy="2131906"/>
-          </a:xfrm>
-          <a:prstGeom prst="rect">
-            <a:avLst/>
-          </a:prstGeom>
-        </p:spPr>
-      </p:pic>
-      <p:sp>
-        <p:nvSpPr>
-          <p:cNvPr id="12" name="TextBox 11"/>
-          <p:cNvSpPr txBox="1"/>
-          <p:nvPr/>
-        </p:nvSpPr>
-        <p:spPr>
-          <a:xfrm>
-            <a:off x="566928" y="4297680"/>
-            <a:ext cx="5340096" cy="201168"/>
-          </a:xfrm>
-          <a:prstGeom prst="rect">
-            <a:avLst/>
-          </a:prstGeom>
-          <a:noFill/>
-          <a:ln>
-            <a:noFill/>
-          </a:ln>
-        </p:spPr>
-        <p:txBody>
-          <a:bodyPr wrap="square" lIns="64008" rIns="64008" tIns="64008" bIns="64008" anchor="t">
-            <a:spAutoFit/>
-          </a:bodyPr>
-          <a:lstStyle/>
-          <a:p>
-            <a:pPr algn="ctr"/>
-            <a:r>
-              <a:rPr sz="1000" b="0">
-                <a:solidFill>
-                  <a:srgbClr val="70767D"/>
-                </a:solidFill>
-                <a:latin typeface="Apple SD Gothic Neo"/>
-              </a:rPr>
-              <a:t>Cross-family / external judge summary</a:t>
-            </a:r>
-          </a:p>
-        </p:txBody>
-      </p:sp>
-      <p:sp>
-        <p:nvSpPr>
-          <p:cNvPr id="13" name="TextBox 12"/>
-          <p:cNvSpPr txBox="1"/>
-          <p:nvPr/>
-        </p:nvSpPr>
-        <p:spPr>
-          <a:xfrm>
-            <a:off x="6263640" y="4297680"/>
-            <a:ext cx="5340096" cy="201168"/>
-          </a:xfrm>
-          <a:prstGeom prst="rect">
-            <a:avLst/>
-          </a:prstGeom>
-          <a:noFill/>
-          <a:ln>
-            <a:noFill/>
-          </a:ln>
-        </p:spPr>
-        <p:txBody>
-          <a:bodyPr wrap="square" lIns="64008" rIns="64008" tIns="64008" bIns="64008" anchor="t">
-            <a:spAutoFit/>
-          </a:bodyPr>
-          <a:lstStyle/>
-          <a:p>
-            <a:pPr algn="ctr"/>
-            <a:r>
-              <a:rPr sz="1000" b="0">
-                <a:solidFill>
-                  <a:srgbClr val="70767D"/>
-                </a:solidFill>
-                <a:latin typeface="Apple SD Gothic Neo"/>
-              </a:rPr>
-              <a:t>330-split repeated hold-out generalization</a:t>
-            </a:r>
-          </a:p>
-        </p:txBody>
-      </p:sp>
-      <p:sp>
-        <p:nvSpPr>
-          <p:cNvPr id="14" name="TextBox 13"/>
-          <p:cNvSpPr txBox="1"/>
-          <p:nvPr/>
-        </p:nvSpPr>
-        <p:spPr>
-          <a:xfrm>
-            <a:off x="502920" y="4553712"/>
-            <a:ext cx="11155680" cy="1417320"/>
+              <a:t>이 슬라이드의 목적: 기권 설계를 결과표가 아니라 decision rule 자체로 설명한다.</a:t>
+            </a:r>
+          </a:p>
+        </p:txBody>
+      </p:sp>
+      <p:sp>
+        <p:nvSpPr>
+          <p:cNvPr id="10" name="TextBox 9"/>
+          <p:cNvSpPr txBox="1"/>
+          <p:nvPr/>
+        </p:nvSpPr>
+        <p:spPr>
+          <a:xfrm>
+            <a:off x="502920" y="1298448"/>
+            <a:ext cx="6995160" cy="4526280"/>
           </a:xfrm>
           <a:prstGeom prst="rect">
             <a:avLst/>
@@ -11502,7 +11529,7 @@
           </a:ln>
         </p:spPr>
         <p:txBody>
-          <a:bodyPr wrap="square" lIns="118872" rIns="118872" tIns="118872" bIns="118872" anchor="t">
+          <a:bodyPr wrap="square" lIns="128016" rIns="128016" tIns="128016" bIns="128016" anchor="t">
             <a:spAutoFit/>
           </a:bodyPr>
           <a:lstStyle/>
@@ -11517,7 +11544,7 @@
               <a:spcAft>
                 <a:spcPts val="800"/>
               </a:spcAft>
-              <a:defRPr sz="1600">
+              <a:defRPr sz="1800">
                 <a:solidFill>
                   <a:srgbClr val="363A48"/>
                 </a:solidFill>
@@ -11525,7 +11552,7 @@
               </a:defRPr>
             </a:pPr>
             <a:r>
-              <a:t>• InternLM20B는 Qwen32와 Spearman ρ=0.893로 broad ranking을 유지하지만, pairwise inconsistency는 47.44%로 더 noisy하다.</a:t>
+              <a:t>• 각 judge는 pairwise 한 쌍에 대해 {A, B, tie, inconsistent} 중 하나를 남긴다. 여기서 inconsistent는 AB/BA swap이 충돌한 low-confidence case다.</a:t>
             </a:r>
           </a:p>
           <a:p>
@@ -11539,7 +11566,7 @@
               <a:spcAft>
                 <a:spcPts val="800"/>
               </a:spcAft>
-              <a:defRPr sz="1600">
+              <a:defRPr sz="1800">
                 <a:solidFill>
                   <a:srgbClr val="363A48"/>
                 </a:solidFill>
@@ -11547,7 +11574,7 @@
               </a:defRPr>
             </a:pPr>
             <a:r>
-              <a:t>• GPT-4o-mini는 Qwen32와 ρ=0.964, τ=0.905, pairwise inconsistency 33.99%로 가장 강한 외부 기준점이다.</a:t>
+              <a:t>• 다수결은 inconsistent도 하나의 표처럼 세기 때문에 [inconsistent, inconsistent, A] 같은 경우 winner를 잃고 noisy 7B가 aggregate를 오염시킨다.</a:t>
             </a:r>
           </a:p>
           <a:p>
@@ -11561,7 +11588,7 @@
               <a:spcAft>
                 <a:spcPts val="800"/>
               </a:spcAft>
-              <a:defRPr sz="1600">
+              <a:defRPr sz="1800">
                 <a:solidFill>
                   <a:srgbClr val="363A48"/>
                 </a:solidFill>
@@ -11569,20 +11596,160 @@
               </a:defRPr>
             </a:pPr>
             <a:r>
-              <a:t>• tinyMT repeated hold-out 330 split에서는 60문항이 세 judge 모두 mean ρ≥0.97로 가장 안전한 운영점이었다.</a:t>
-            </a:r>
-          </a:p>
-        </p:txBody>
-      </p:sp>
-      <p:sp>
-        <p:nvSpPr>
-          <p:cNvPr id="15" name="TextBox 14"/>
-          <p:cNvSpPr txBox="1"/>
-          <p:nvPr/>
-        </p:nvSpPr>
-        <p:spPr>
-          <a:xfrm>
-            <a:off x="566928" y="5623560"/>
+              <a:t>• abstain은 inconsistent를 기권으로 버리고, 남은 decisive vote가 충돌하지 않을 때만 winner를 선언한다.</a:t>
+            </a:r>
+          </a:p>
+          <a:p>
+            <a:pPr>
+              <a:lnSpc>
+                <a:spcPct val="112000"/>
+              </a:lnSpc>
+              <a:spcBef>
+                <a:spcPts val="0"/>
+              </a:spcBef>
+              <a:spcAft>
+                <a:spcPts val="800"/>
+              </a:spcAft>
+              <a:defRPr sz="1800">
+                <a:solidFill>
+                  <a:srgbClr val="363A48"/>
+                </a:solidFill>
+                <a:latin typeface="Apple SD Gothic Neo"/>
+              </a:defRPr>
+            </a:pPr>
+            <a:r>
+              <a:t>• 실제로 604쌍(36%)이 inconsistent→winner로 복구되고, inconsistency는 58.63%→24.70%, decisive rate는 41.37%→75.30%로 개선된다.</a:t>
+            </a:r>
+          </a:p>
+        </p:txBody>
+      </p:sp>
+      <p:sp>
+        <p:nvSpPr>
+          <p:cNvPr id="11" name="TextBox 10"/>
+          <p:cNvSpPr txBox="1"/>
+          <p:nvPr/>
+        </p:nvSpPr>
+        <p:spPr>
+          <a:xfrm>
+            <a:off x="7726679" y="1298448"/>
+            <a:ext cx="3931920" cy="292608"/>
+          </a:xfrm>
+          <a:prstGeom prst="rect">
+            <a:avLst/>
+          </a:prstGeom>
+          <a:noFill/>
+          <a:ln>
+            <a:noFill/>
+          </a:ln>
+        </p:spPr>
+        <p:txBody>
+          <a:bodyPr wrap="square" lIns="64008" rIns="64008" tIns="64008" bIns="64008" anchor="t">
+            <a:spAutoFit/>
+          </a:bodyPr>
+          <a:lstStyle/>
+          <a:p>
+            <a:pPr algn="l"/>
+            <a:r>
+              <a:rPr sz="1800" b="1">
+                <a:solidFill>
+                  <a:srgbClr val="282C3A"/>
+                </a:solidFill>
+                <a:latin typeface="Apple SD Gothic Neo"/>
+              </a:rPr>
+              <a:t>핵심 해석</a:t>
+            </a:r>
+          </a:p>
+        </p:txBody>
+      </p:sp>
+      <p:sp>
+        <p:nvSpPr>
+          <p:cNvPr id="12" name="TextBox 11"/>
+          <p:cNvSpPr txBox="1"/>
+          <p:nvPr/>
+        </p:nvSpPr>
+        <p:spPr>
+          <a:xfrm>
+            <a:off x="7726679" y="1645920"/>
+            <a:ext cx="3931920" cy="4178808"/>
+          </a:xfrm>
+          <a:prstGeom prst="rect">
+            <a:avLst/>
+          </a:prstGeom>
+          <a:solidFill>
+            <a:srgbClr val="E2EAEF"/>
+          </a:solidFill>
+          <a:ln>
+            <a:solidFill>
+              <a:srgbClr val="E2EAEF"/>
+            </a:solidFill>
+          </a:ln>
+        </p:spPr>
+        <p:txBody>
+          <a:bodyPr wrap="square" lIns="128016" rIns="128016" tIns="128016" bIns="128016" anchor="t">
+            <a:spAutoFit/>
+          </a:bodyPr>
+          <a:lstStyle/>
+          <a:p>
+            <a:pPr algn="l"/>
+            <a:r>
+              <a:rPr sz="1700" b="0">
+                <a:solidFill>
+                  <a:srgbClr val="363A48"/>
+                </a:solidFill>
+                <a:latin typeface="Apple SD Gothic Neo"/>
+              </a:rPr>
+              <a:t/>
+            </a:r>
+          </a:p>
+        </p:txBody>
+      </p:sp>
+      <p:sp>
+        <p:nvSpPr>
+          <p:cNvPr id="13" name="TextBox 12"/>
+          <p:cNvSpPr txBox="1"/>
+          <p:nvPr/>
+        </p:nvSpPr>
+        <p:spPr>
+          <a:xfrm>
+            <a:off x="7882127" y="1847088"/>
+            <a:ext cx="3566160" cy="1170432"/>
+          </a:xfrm>
+          <a:prstGeom prst="rect">
+            <a:avLst/>
+          </a:prstGeom>
+          <a:noFill/>
+          <a:ln>
+            <a:noFill/>
+          </a:ln>
+        </p:spPr>
+        <p:txBody>
+          <a:bodyPr wrap="square" lIns="0" rIns="0" tIns="0" bIns="0" anchor="t">
+            <a:spAutoFit/>
+          </a:bodyPr>
+          <a:lstStyle/>
+          <a:p>
+            <a:pPr algn="l"/>
+            <a:r>
+              <a:rPr sz="1600" b="1">
+                <a:solidFill>
+                  <a:srgbClr val="282C3A"/>
+                </a:solidFill>
+                <a:latin typeface="Apple SD Gothic Neo"/>
+              </a:rPr>
+              <a:t>abstain은 덜 결정하는 설계가 아니라, low-confidence vote를 표로 세지 않아서 더 많은 쌍을 더 깨끗하게 결정하는 설계입니다.</a:t>
+            </a:r>
+          </a:p>
+        </p:txBody>
+      </p:sp>
+      <p:sp>
+        <p:nvSpPr>
+          <p:cNvPr id="14" name="TextBox 13"/>
+          <p:cNvSpPr txBox="1"/>
+          <p:nvPr/>
+        </p:nvSpPr>
+        <p:spPr>
+          <a:xfrm>
+            <a:off x="7882127" y="3310128"/>
             <a:ext cx="2029968" cy="877824"/>
           </a:xfrm>
           <a:prstGeom prst="rect">
@@ -11618,13 +11785,13 @@
       </p:sp>
       <p:sp>
         <p:nvSpPr>
-          <p:cNvPr id="16" name="Rectangle 15"/>
+          <p:cNvPr id="15" name="Rectangle 14"/>
           <p:cNvSpPr/>
           <p:nvPr/>
         </p:nvSpPr>
         <p:spPr>
           <a:xfrm>
-            <a:off x="676656" y="5733288"/>
+            <a:off x="7991855" y="3419856"/>
             <a:ext cx="502920" cy="182880"/>
           </a:xfrm>
           <a:prstGeom prst="rect">
@@ -11661,14 +11828,52 @@
       </p:sp>
       <p:sp>
         <p:nvSpPr>
+          <p:cNvPr id="16" name="TextBox 15"/>
+          <p:cNvSpPr txBox="1"/>
+          <p:nvPr/>
+        </p:nvSpPr>
+        <p:spPr>
+          <a:xfrm>
+            <a:off x="8010143" y="3419856"/>
+            <a:ext cx="1691640" cy="182880"/>
+          </a:xfrm>
+          <a:prstGeom prst="rect">
+            <a:avLst/>
+          </a:prstGeom>
+          <a:noFill/>
+          <a:ln>
+            <a:noFill/>
+          </a:ln>
+        </p:spPr>
+        <p:txBody>
+          <a:bodyPr wrap="square" lIns="9144" rIns="9144" tIns="9144" bIns="9144" anchor="ctr">
+            <a:spAutoFit/>
+          </a:bodyPr>
+          <a:lstStyle/>
+          <a:p>
+            <a:pPr algn="l"/>
+            <a:r>
+              <a:rPr sz="900" b="1">
+                <a:solidFill>
+                  <a:srgbClr val="FFFFFF"/>
+                </a:solidFill>
+                <a:latin typeface="Apple SD Gothic Neo"/>
+              </a:rPr>
+              <a:t>Majority</a:t>
+            </a:r>
+          </a:p>
+        </p:txBody>
+      </p:sp>
+      <p:sp>
+        <p:nvSpPr>
           <p:cNvPr id="17" name="TextBox 16"/>
           <p:cNvSpPr txBox="1"/>
           <p:nvPr/>
         </p:nvSpPr>
         <p:spPr>
           <a:xfrm>
-            <a:off x="694944" y="5733288"/>
-            <a:ext cx="1691640" cy="182880"/>
+            <a:off x="7991855" y="3657600"/>
+            <a:ext cx="1737360" cy="310896"/>
           </a:xfrm>
           <a:prstGeom prst="rect">
             <a:avLst/>
@@ -11679,20 +11884,20 @@
           </a:ln>
         </p:spPr>
         <p:txBody>
-          <a:bodyPr wrap="square" lIns="9144" rIns="9144" tIns="9144" bIns="9144" anchor="ctr">
+          <a:bodyPr wrap="square" lIns="9144" rIns="9144" tIns="9144" bIns="9144" anchor="t">
             <a:spAutoFit/>
           </a:bodyPr>
           <a:lstStyle/>
           <a:p>
             <a:pPr algn="l"/>
             <a:r>
-              <a:rPr sz="900" b="1">
-                <a:solidFill>
-                  <a:srgbClr val="FFFFFF"/>
-                </a:solidFill>
-                <a:latin typeface="Apple SD Gothic Neo"/>
-              </a:rPr>
-              <a:t>InternLM20B</a:t>
+              <a:rPr sz="1900" b="1">
+                <a:solidFill>
+                  <a:srgbClr val="282C3A"/>
+                </a:solidFill>
+                <a:latin typeface="Apple SD Gothic Neo"/>
+              </a:rPr>
+              <a:t>58.63%</a:t>
             </a:r>
           </a:p>
         </p:txBody>
@@ -11705,45 +11910,7 @@
         </p:nvSpPr>
         <p:spPr>
           <a:xfrm>
-            <a:off x="676656" y="5971032"/>
-            <a:ext cx="1737360" cy="310896"/>
-          </a:xfrm>
-          <a:prstGeom prst="rect">
-            <a:avLst/>
-          </a:prstGeom>
-          <a:noFill/>
-          <a:ln>
-            <a:noFill/>
-          </a:ln>
-        </p:spPr>
-        <p:txBody>
-          <a:bodyPr wrap="square" lIns="9144" rIns="9144" tIns="9144" bIns="9144" anchor="t">
-            <a:spAutoFit/>
-          </a:bodyPr>
-          <a:lstStyle/>
-          <a:p>
-            <a:pPr algn="l"/>
-            <a:r>
-              <a:rPr sz="1900" b="1">
-                <a:solidFill>
-                  <a:srgbClr val="282C3A"/>
-                </a:solidFill>
-                <a:latin typeface="Apple SD Gothic Neo"/>
-              </a:rPr>
-              <a:t>ρ=0.893</a:t>
-            </a:r>
-          </a:p>
-        </p:txBody>
-      </p:sp>
-      <p:sp>
-        <p:nvSpPr>
-          <p:cNvPr id="19" name="TextBox 18"/>
-          <p:cNvSpPr txBox="1"/>
-          <p:nvPr/>
-        </p:nvSpPr>
-        <p:spPr>
-          <a:xfrm>
-            <a:off x="2779776" y="5623560"/>
+            <a:off x="9729215" y="3310128"/>
             <a:ext cx="2029968" cy="877824"/>
           </a:xfrm>
           <a:prstGeom prst="rect">
@@ -11779,13 +11946,13 @@
       </p:sp>
       <p:sp>
         <p:nvSpPr>
-          <p:cNvPr id="20" name="Rectangle 19"/>
+          <p:cNvPr id="19" name="Rectangle 18"/>
           <p:cNvSpPr/>
           <p:nvPr/>
         </p:nvSpPr>
         <p:spPr>
           <a:xfrm>
-            <a:off x="2889504" y="5733288"/>
+            <a:off x="9838943" y="3419856"/>
             <a:ext cx="502920" cy="182880"/>
           </a:xfrm>
           <a:prstGeom prst="rect">
@@ -11822,14 +11989,52 @@
       </p:sp>
       <p:sp>
         <p:nvSpPr>
+          <p:cNvPr id="20" name="TextBox 19"/>
+          <p:cNvSpPr txBox="1"/>
+          <p:nvPr/>
+        </p:nvSpPr>
+        <p:spPr>
+          <a:xfrm>
+            <a:off x="9857231" y="3419856"/>
+            <a:ext cx="1691640" cy="182880"/>
+          </a:xfrm>
+          <a:prstGeom prst="rect">
+            <a:avLst/>
+          </a:prstGeom>
+          <a:noFill/>
+          <a:ln>
+            <a:noFill/>
+          </a:ln>
+        </p:spPr>
+        <p:txBody>
+          <a:bodyPr wrap="square" lIns="9144" rIns="9144" tIns="9144" bIns="9144" anchor="ctr">
+            <a:spAutoFit/>
+          </a:bodyPr>
+          <a:lstStyle/>
+          <a:p>
+            <a:pPr algn="l"/>
+            <a:r>
+              <a:rPr sz="900" b="1">
+                <a:solidFill>
+                  <a:srgbClr val="FFFFFF"/>
+                </a:solidFill>
+                <a:latin typeface="Apple SD Gothic Neo"/>
+              </a:rPr>
+              <a:t>Abstain</a:t>
+            </a:r>
+          </a:p>
+        </p:txBody>
+      </p:sp>
+      <p:sp>
+        <p:nvSpPr>
           <p:cNvPr id="21" name="TextBox 20"/>
           <p:cNvSpPr txBox="1"/>
           <p:nvPr/>
         </p:nvSpPr>
         <p:spPr>
           <a:xfrm>
-            <a:off x="2907792" y="5733288"/>
-            <a:ext cx="1691640" cy="182880"/>
+            <a:off x="9838943" y="3657600"/>
+            <a:ext cx="1737360" cy="310896"/>
           </a:xfrm>
           <a:prstGeom prst="rect">
             <a:avLst/>
@@ -11840,20 +12045,20 @@
           </a:ln>
         </p:spPr>
         <p:txBody>
-          <a:bodyPr wrap="square" lIns="9144" rIns="9144" tIns="9144" bIns="9144" anchor="ctr">
+          <a:bodyPr wrap="square" lIns="9144" rIns="9144" tIns="9144" bIns="9144" anchor="t">
             <a:spAutoFit/>
           </a:bodyPr>
           <a:lstStyle/>
           <a:p>
             <a:pPr algn="l"/>
             <a:r>
-              <a:rPr sz="900" b="1">
-                <a:solidFill>
-                  <a:srgbClr val="FFFFFF"/>
-                </a:solidFill>
-                <a:latin typeface="Apple SD Gothic Neo"/>
-              </a:rPr>
-              <a:t>GPT-4o-mini</a:t>
+              <a:rPr sz="1900" b="1">
+                <a:solidFill>
+                  <a:srgbClr val="282C3A"/>
+                </a:solidFill>
+                <a:latin typeface="Apple SD Gothic Neo"/>
+              </a:rPr>
+              <a:t>24.70%</a:t>
             </a:r>
           </a:p>
         </p:txBody>
@@ -11866,45 +12071,7 @@
         </p:nvSpPr>
         <p:spPr>
           <a:xfrm>
-            <a:off x="2889504" y="5971032"/>
-            <a:ext cx="1737360" cy="310896"/>
-          </a:xfrm>
-          <a:prstGeom prst="rect">
-            <a:avLst/>
-          </a:prstGeom>
-          <a:noFill/>
-          <a:ln>
-            <a:noFill/>
-          </a:ln>
-        </p:spPr>
-        <p:txBody>
-          <a:bodyPr wrap="square" lIns="9144" rIns="9144" tIns="9144" bIns="9144" anchor="t">
-            <a:spAutoFit/>
-          </a:bodyPr>
-          <a:lstStyle/>
-          <a:p>
-            <a:pPr algn="l"/>
-            <a:r>
-              <a:rPr sz="1900" b="1">
-                <a:solidFill>
-                  <a:srgbClr val="282C3A"/>
-                </a:solidFill>
-                <a:latin typeface="Apple SD Gothic Neo"/>
-              </a:rPr>
-              <a:t>ρ=0.964</a:t>
-            </a:r>
-          </a:p>
-        </p:txBody>
-      </p:sp>
-      <p:sp>
-        <p:nvSpPr>
-          <p:cNvPr id="23" name="TextBox 22"/>
-          <p:cNvSpPr txBox="1"/>
-          <p:nvPr/>
-        </p:nvSpPr>
-        <p:spPr>
-          <a:xfrm>
-            <a:off x="4992624" y="5623560"/>
+            <a:off x="7882127" y="4224528"/>
             <a:ext cx="2029968" cy="877824"/>
           </a:xfrm>
           <a:prstGeom prst="rect">
@@ -11940,13 +12107,13 @@
       </p:sp>
       <p:sp>
         <p:nvSpPr>
-          <p:cNvPr id="24" name="Rectangle 23"/>
+          <p:cNvPr id="23" name="Rectangle 22"/>
           <p:cNvSpPr/>
           <p:nvPr/>
         </p:nvSpPr>
         <p:spPr>
           <a:xfrm>
-            <a:off x="5102352" y="5733288"/>
+            <a:off x="7991855" y="4334256"/>
             <a:ext cx="502920" cy="182880"/>
           </a:xfrm>
           <a:prstGeom prst="rect">
@@ -11983,14 +12150,52 @@
       </p:sp>
       <p:sp>
         <p:nvSpPr>
+          <p:cNvPr id="24" name="TextBox 23"/>
+          <p:cNvSpPr txBox="1"/>
+          <p:nvPr/>
+        </p:nvSpPr>
+        <p:spPr>
+          <a:xfrm>
+            <a:off x="8010143" y="4334256"/>
+            <a:ext cx="1691640" cy="182880"/>
+          </a:xfrm>
+          <a:prstGeom prst="rect">
+            <a:avLst/>
+          </a:prstGeom>
+          <a:noFill/>
+          <a:ln>
+            <a:noFill/>
+          </a:ln>
+        </p:spPr>
+        <p:txBody>
+          <a:bodyPr wrap="square" lIns="9144" rIns="9144" tIns="9144" bIns="9144" anchor="ctr">
+            <a:spAutoFit/>
+          </a:bodyPr>
+          <a:lstStyle/>
+          <a:p>
+            <a:pPr algn="l"/>
+            <a:r>
+              <a:rPr sz="900" b="1">
+                <a:solidFill>
+                  <a:srgbClr val="FFFFFF"/>
+                </a:solidFill>
+                <a:latin typeface="Apple SD Gothic Neo"/>
+              </a:rPr>
+              <a:t>Recovered</a:t>
+            </a:r>
+          </a:p>
+        </p:txBody>
+      </p:sp>
+      <p:sp>
+        <p:nvSpPr>
           <p:cNvPr id="25" name="TextBox 24"/>
           <p:cNvSpPr txBox="1"/>
           <p:nvPr/>
         </p:nvSpPr>
         <p:spPr>
           <a:xfrm>
-            <a:off x="5120640" y="5733288"/>
-            <a:ext cx="1691640" cy="182880"/>
+            <a:off x="7991855" y="4572000"/>
+            <a:ext cx="1737360" cy="310896"/>
           </a:xfrm>
           <a:prstGeom prst="rect">
             <a:avLst/>
@@ -12001,20 +12206,20 @@
           </a:ln>
         </p:spPr>
         <p:txBody>
-          <a:bodyPr wrap="square" lIns="9144" rIns="9144" tIns="9144" bIns="9144" anchor="ctr">
+          <a:bodyPr wrap="square" lIns="9144" rIns="9144" tIns="9144" bIns="9144" anchor="t">
             <a:spAutoFit/>
           </a:bodyPr>
           <a:lstStyle/>
           <a:p>
             <a:pPr algn="l"/>
             <a:r>
-              <a:rPr sz="900" b="1">
-                <a:solidFill>
-                  <a:srgbClr val="FFFFFF"/>
-                </a:solidFill>
-                <a:latin typeface="Apple SD Gothic Neo"/>
-              </a:rPr>
-              <a:t>60문항</a:t>
+              <a:rPr sz="1900" b="1">
+                <a:solidFill>
+                  <a:srgbClr val="282C3A"/>
+                </a:solidFill>
+                <a:latin typeface="Apple SD Gothic Neo"/>
+              </a:rPr>
+              <a:t>604쌍</a:t>
             </a:r>
           </a:p>
         </p:txBody>
@@ -12027,45 +12232,7 @@
         </p:nvSpPr>
         <p:spPr>
           <a:xfrm>
-            <a:off x="5102352" y="5971032"/>
-            <a:ext cx="1737360" cy="310896"/>
-          </a:xfrm>
-          <a:prstGeom prst="rect">
-            <a:avLst/>
-          </a:prstGeom>
-          <a:noFill/>
-          <a:ln>
-            <a:noFill/>
-          </a:ln>
-        </p:spPr>
-        <p:txBody>
-          <a:bodyPr wrap="square" lIns="9144" rIns="9144" tIns="9144" bIns="9144" anchor="t">
-            <a:spAutoFit/>
-          </a:bodyPr>
-          <a:lstStyle/>
-          <a:p>
-            <a:pPr algn="l"/>
-            <a:r>
-              <a:rPr sz="1900" b="1">
-                <a:solidFill>
-                  <a:srgbClr val="282C3A"/>
-                </a:solidFill>
-                <a:latin typeface="Apple SD Gothic Neo"/>
-              </a:rPr>
-              <a:t>mean ρ≥0.97</a:t>
-            </a:r>
-          </a:p>
-        </p:txBody>
-      </p:sp>
-      <p:sp>
-        <p:nvSpPr>
-          <p:cNvPr id="27" name="TextBox 26"/>
-          <p:cNvSpPr txBox="1"/>
-          <p:nvPr/>
-        </p:nvSpPr>
-        <p:spPr>
-          <a:xfrm>
-            <a:off x="7205472" y="5623560"/>
+            <a:off x="9729215" y="4224528"/>
             <a:ext cx="2029968" cy="877824"/>
           </a:xfrm>
           <a:prstGeom prst="rect">
@@ -12101,13 +12268,13 @@
       </p:sp>
       <p:sp>
         <p:nvSpPr>
-          <p:cNvPr id="28" name="Rectangle 27"/>
+          <p:cNvPr id="27" name="Rectangle 26"/>
           <p:cNvSpPr/>
           <p:nvPr/>
         </p:nvSpPr>
         <p:spPr>
           <a:xfrm>
-            <a:off x="7315200" y="5733288"/>
+            <a:off x="9838943" y="4334256"/>
             <a:ext cx="502920" cy="182880"/>
           </a:xfrm>
           <a:prstGeom prst="rect">
@@ -12144,14 +12311,52 @@
       </p:sp>
       <p:sp>
         <p:nvSpPr>
+          <p:cNvPr id="28" name="TextBox 27"/>
+          <p:cNvSpPr txBox="1"/>
+          <p:nvPr/>
+        </p:nvSpPr>
+        <p:spPr>
+          <a:xfrm>
+            <a:off x="9857231" y="4334256"/>
+            <a:ext cx="1691640" cy="182880"/>
+          </a:xfrm>
+          <a:prstGeom prst="rect">
+            <a:avLst/>
+          </a:prstGeom>
+          <a:noFill/>
+          <a:ln>
+            <a:noFill/>
+          </a:ln>
+        </p:spPr>
+        <p:txBody>
+          <a:bodyPr wrap="square" lIns="9144" rIns="9144" tIns="9144" bIns="9144" anchor="ctr">
+            <a:spAutoFit/>
+          </a:bodyPr>
+          <a:lstStyle/>
+          <a:p>
+            <a:pPr algn="l"/>
+            <a:r>
+              <a:rPr sz="900" b="1">
+                <a:solidFill>
+                  <a:srgbClr val="FFFFFF"/>
+                </a:solidFill>
+                <a:latin typeface="Apple SD Gothic Neo"/>
+              </a:rPr>
+              <a:t>Decisive</a:t>
+            </a:r>
+          </a:p>
+        </p:txBody>
+      </p:sp>
+      <p:sp>
+        <p:nvSpPr>
           <p:cNvPr id="29" name="TextBox 28"/>
           <p:cNvSpPr txBox="1"/>
           <p:nvPr/>
         </p:nvSpPr>
         <p:spPr>
           <a:xfrm>
-            <a:off x="7333488" y="5733288"/>
-            <a:ext cx="1691640" cy="182880"/>
+            <a:off x="9838943" y="4572000"/>
+            <a:ext cx="1737360" cy="310896"/>
           </a:xfrm>
           <a:prstGeom prst="rect">
             <a:avLst/>
@@ -12162,58 +12367,20 @@
           </a:ln>
         </p:spPr>
         <p:txBody>
-          <a:bodyPr wrap="square" lIns="9144" rIns="9144" tIns="9144" bIns="9144" anchor="ctr">
+          <a:bodyPr wrap="square" lIns="9144" rIns="9144" tIns="9144" bIns="9144" anchor="t">
             <a:spAutoFit/>
           </a:bodyPr>
           <a:lstStyle/>
           <a:p>
             <a:pPr algn="l"/>
             <a:r>
-              <a:rPr sz="900" b="1">
-                <a:solidFill>
-                  <a:srgbClr val="FFFFFF"/>
-                </a:solidFill>
-                <a:latin typeface="Apple SD Gothic Neo"/>
-              </a:rPr>
-              <a:t>해석</a:t>
-            </a:r>
-          </a:p>
-        </p:txBody>
-      </p:sp>
-      <p:sp>
-        <p:nvSpPr>
-          <p:cNvPr id="30" name="TextBox 29"/>
-          <p:cNvSpPr txBox="1"/>
-          <p:nvPr/>
-        </p:nvSpPr>
-        <p:spPr>
-          <a:xfrm>
-            <a:off x="7315200" y="5971032"/>
-            <a:ext cx="1737360" cy="310896"/>
-          </a:xfrm>
-          <a:prstGeom prst="rect">
-            <a:avLst/>
-          </a:prstGeom>
-          <a:noFill/>
-          <a:ln>
-            <a:noFill/>
-          </a:ln>
-        </p:spPr>
-        <p:txBody>
-          <a:bodyPr wrap="square" lIns="9144" rIns="9144" tIns="9144" bIns="9144" anchor="t">
-            <a:spAutoFit/>
-          </a:bodyPr>
-          <a:lstStyle/>
-          <a:p>
-            <a:pPr algn="l"/>
-            <a:r>
               <a:rPr sz="1900" b="1">
                 <a:solidFill>
                   <a:srgbClr val="282C3A"/>
                 </a:solidFill>
                 <a:latin typeface="Apple SD Gothic Neo"/>
               </a:rPr>
-              <a:t>partial yes</a:t>
+              <a:t>75.30%</a:t>
             </a:r>
           </a:p>
         </p:txBody>
@@ -12363,7 +12530,7 @@
                 </a:solidFill>
                 <a:latin typeface="Apple SD Gothic Neo"/>
               </a:rPr>
-              <a:t>4. 세 연구 질문에 대해 지금 무엇을 답할 수 있나</a:t>
+              <a:t>RQ3. cross-family와 hold-out에서도 결론이 남는가</a:t>
             </a:r>
           </a:p>
         </p:txBody>
@@ -12443,7 +12610,7 @@
                 </a:solidFill>
                 <a:latin typeface="Apple SD Gothic Neo"/>
               </a:rPr>
-              <a:t>17/18</a:t>
+              <a:t>17/19</a:t>
             </a:r>
           </a:p>
         </p:txBody>
@@ -12566,95 +12733,59 @@
                 </a:solidFill>
                 <a:latin typeface="Apple SD Gothic Neo"/>
               </a:rPr>
-              <a:t>이 슬라이드의 목적: 2부에서 처음 던진 세 연구 질문에 대한 현재 답을 한 장에서 닫아 준다.</a:t>
-            </a:r>
-          </a:p>
-        </p:txBody>
-      </p:sp>
-      <p:sp>
-        <p:nvSpPr>
-          <p:cNvPr id="10" name="TextBox 9"/>
-          <p:cNvSpPr txBox="1"/>
-          <p:nvPr/>
-        </p:nvSpPr>
-        <p:spPr>
-          <a:xfrm>
-            <a:off x="502920" y="1298448"/>
-            <a:ext cx="11155680" cy="566928"/>
-          </a:xfrm>
-          <a:prstGeom prst="rect">
-            <a:avLst/>
-          </a:prstGeom>
-          <a:solidFill>
-            <a:srgbClr val="E2EAEF"/>
-          </a:solidFill>
-          <a:ln>
-            <a:solidFill>
-              <a:srgbClr val="E2EAEF"/>
-            </a:solidFill>
-          </a:ln>
-        </p:spPr>
-        <p:txBody>
-          <a:bodyPr wrap="square" lIns="64008" rIns="64008" tIns="64008" bIns="64008" anchor="ctr">
-            <a:spAutoFit/>
-          </a:bodyPr>
-          <a:lstStyle/>
-          <a:p>
-            <a:pPr algn="l"/>
-            <a:r>
-              <a:rPr sz="1900" b="1">
-                <a:solidFill>
-                  <a:srgbClr val="282C3A"/>
-                </a:solidFill>
-                <a:latin typeface="Apple SD Gothic Neo"/>
-              </a:rPr>
-              <a:t>따라서 이 발표의 결론은 ‘오픈소스 judge도 충분하다’가 아니라, ‘strong judge message는 부분적으로 재현되지만 boundary를 같이 말해야 한다’입니다.</a:t>
-            </a:r>
-          </a:p>
-        </p:txBody>
-      </p:sp>
-      <p:sp>
-        <p:nvSpPr>
-          <p:cNvPr id="11" name="TextBox 10"/>
-          <p:cNvSpPr txBox="1"/>
-          <p:nvPr/>
-        </p:nvSpPr>
-        <p:spPr>
-          <a:xfrm>
-            <a:off x="502920" y="2048256"/>
-            <a:ext cx="3553967" cy="1993392"/>
-          </a:xfrm>
-          <a:prstGeom prst="rect">
-            <a:avLst/>
-          </a:prstGeom>
-          <a:solidFill>
-            <a:srgbClr val="FFFFFF"/>
-          </a:solidFill>
-          <a:ln>
-            <a:solidFill>
-              <a:srgbClr val="DAD4CA"/>
-            </a:solidFill>
-          </a:ln>
-        </p:spPr>
-        <p:txBody>
-          <a:bodyPr wrap="square" lIns="109728" rIns="109728" tIns="109728" bIns="109728" anchor="t">
-            <a:spAutoFit/>
-          </a:bodyPr>
-          <a:lstStyle/>
-          <a:p>
-            <a:pPr algn="l"/>
-            <a:r>
-              <a:rPr sz="1700" b="0">
-                <a:solidFill>
-                  <a:srgbClr val="363A48"/>
-                </a:solidFill>
-                <a:latin typeface="Apple SD Gothic Neo"/>
-              </a:rPr>
-              <a:t/>
-            </a:r>
-          </a:p>
-        </p:txBody>
-      </p:sp>
+              <a:t>이 슬라이드의 목적: InternLM20B, GPT-4o-mini, repeated hold-out 결과를 한 장에서 묶어 RQ3에 답한다.</a:t>
+            </a:r>
+          </a:p>
+        </p:txBody>
+      </p:sp>
+      <p:pic>
+        <p:nvPicPr>
+          <p:cNvPr id="10" name="Picture 9" descr="fig16_phase345_judge_summary.png"/>
+          <p:cNvPicPr>
+            <a:picLocks noChangeAspect="1"/>
+          </p:cNvPicPr>
+          <p:nvPr/>
+        </p:nvPicPr>
+        <p:blipFill>
+          <a:blip r:embed="rId2"/>
+          <a:stretch>
+            <a:fillRect/>
+          </a:stretch>
+        </p:blipFill>
+        <p:spPr>
+          <a:xfrm>
+            <a:off x="502920" y="1261872"/>
+            <a:ext cx="5468112" cy="3892253"/>
+          </a:xfrm>
+          <a:prstGeom prst="rect">
+            <a:avLst/>
+          </a:prstGeom>
+        </p:spPr>
+      </p:pic>
+      <p:pic>
+        <p:nvPicPr>
+          <p:cNvPr id="11" name="Picture 10" descr="fig15_tiny_mt_bench_generalization.png"/>
+          <p:cNvPicPr>
+            <a:picLocks noChangeAspect="1"/>
+          </p:cNvPicPr>
+          <p:nvPr/>
+        </p:nvPicPr>
+        <p:blipFill>
+          <a:blip r:embed="rId3"/>
+          <a:stretch>
+            <a:fillRect/>
+          </a:stretch>
+        </p:blipFill>
+        <p:spPr>
+          <a:xfrm>
+            <a:off x="6199632" y="1261872"/>
+            <a:ext cx="5468112" cy="2131906"/>
+          </a:xfrm>
+          <a:prstGeom prst="rect">
+            <a:avLst/>
+          </a:prstGeom>
+        </p:spPr>
+      </p:pic>
       <p:sp>
         <p:nvSpPr>
           <p:cNvPr id="12" name="TextBox 11"/>
@@ -12663,8 +12794,8 @@
         </p:nvSpPr>
         <p:spPr>
           <a:xfrm>
-            <a:off x="576072" y="2157984"/>
-            <a:ext cx="3407664" cy="237744"/>
+            <a:off x="566928" y="4297680"/>
+            <a:ext cx="5340096" cy="201168"/>
           </a:xfrm>
           <a:prstGeom prst="rect">
             <a:avLst/>
@@ -12675,20 +12806,20 @@
           </a:ln>
         </p:spPr>
         <p:txBody>
-          <a:bodyPr wrap="square" lIns="0" rIns="0" tIns="0" bIns="0" anchor="t">
-            <a:spAutoFit/>
-          </a:bodyPr>
-          <a:lstStyle/>
-          <a:p>
-            <a:pPr algn="l"/>
-            <a:r>
-              <a:rPr sz="1500" b="1">
-                <a:solidFill>
-                  <a:srgbClr val="3B586E"/>
-                </a:solidFill>
-                <a:latin typeface="Apple SD Gothic Neo"/>
-              </a:rPr>
-              <a:t>RQ1. judge scaling은 개선되는가</a:t>
+          <a:bodyPr wrap="square" lIns="64008" rIns="64008" tIns="64008" bIns="64008" anchor="t">
+            <a:spAutoFit/>
+          </a:bodyPr>
+          <a:lstStyle/>
+          <a:p>
+            <a:pPr algn="ctr"/>
+            <a:r>
+              <a:rPr sz="1000" b="0">
+                <a:solidFill>
+                  <a:srgbClr val="70767D"/>
+                </a:solidFill>
+                <a:latin typeface="Apple SD Gothic Neo"/>
+              </a:rPr>
+              <a:t>Cross-family / external judge summary</a:t>
             </a:r>
           </a:p>
         </p:txBody>
@@ -12701,8 +12832,8 @@
         </p:nvSpPr>
         <p:spPr>
           <a:xfrm>
-            <a:off x="576072" y="2542032"/>
-            <a:ext cx="3407664" cy="1152144"/>
+            <a:off x="6263640" y="4297680"/>
+            <a:ext cx="5340096" cy="201168"/>
           </a:xfrm>
           <a:prstGeom prst="rect">
             <a:avLst/>
@@ -12713,20 +12844,20 @@
           </a:ln>
         </p:spPr>
         <p:txBody>
-          <a:bodyPr wrap="square" lIns="0" rIns="0" tIns="0" bIns="0" anchor="t">
-            <a:spAutoFit/>
-          </a:bodyPr>
-          <a:lstStyle/>
-          <a:p>
-            <a:pPr algn="l"/>
-            <a:r>
-              <a:rPr sz="1500" b="0">
-                <a:solidFill>
-                  <a:srgbClr val="363A48"/>
-                </a:solidFill>
-                <a:latin typeface="Apple SD Gothic Neo"/>
-              </a:rPr>
-              <a:t>예. Qwen same-family에서는 7B → 14B → 32B로 갈수록 pairwise inconsistency가 뚜렷하게 줄었습니다.</a:t>
+          <a:bodyPr wrap="square" lIns="64008" rIns="64008" tIns="64008" bIns="64008" anchor="t">
+            <a:spAutoFit/>
+          </a:bodyPr>
+          <a:lstStyle/>
+          <a:p>
+            <a:pPr algn="ctr"/>
+            <a:r>
+              <a:rPr sz="1000" b="0">
+                <a:solidFill>
+                  <a:srgbClr val="70767D"/>
+                </a:solidFill>
+                <a:latin typeface="Apple SD Gothic Neo"/>
+              </a:rPr>
+              <a:t>330-split repeated hold-out generalization</a:t>
             </a:r>
           </a:p>
         </p:txBody>
@@ -12739,244 +12870,8 @@
         </p:nvSpPr>
         <p:spPr>
           <a:xfrm>
-            <a:off x="4221480" y="2048256"/>
-            <a:ext cx="3553967" cy="1993392"/>
-          </a:xfrm>
-          <a:prstGeom prst="rect">
-            <a:avLst/>
-          </a:prstGeom>
-          <a:solidFill>
-            <a:srgbClr val="FFFFFF"/>
-          </a:solidFill>
-          <a:ln>
-            <a:solidFill>
-              <a:srgbClr val="DAD4CA"/>
-            </a:solidFill>
-          </a:ln>
-        </p:spPr>
-        <p:txBody>
-          <a:bodyPr wrap="square" lIns="109728" rIns="109728" tIns="109728" bIns="109728" anchor="t">
-            <a:spAutoFit/>
-          </a:bodyPr>
-          <a:lstStyle/>
-          <a:p>
-            <a:pPr algn="l"/>
-            <a:r>
-              <a:rPr sz="1700" b="0">
-                <a:solidFill>
-                  <a:srgbClr val="363A48"/>
-                </a:solidFill>
-                <a:latin typeface="Apple SD Gothic Neo"/>
-              </a:rPr>
-              <a:t/>
-            </a:r>
-          </a:p>
-        </p:txBody>
-      </p:sp>
-      <p:sp>
-        <p:nvSpPr>
-          <p:cNvPr id="15" name="TextBox 14"/>
-          <p:cNvSpPr txBox="1"/>
-          <p:nvPr/>
-        </p:nvSpPr>
-        <p:spPr>
-          <a:xfrm>
-            <a:off x="4294632" y="2157984"/>
-            <a:ext cx="3407664" cy="237744"/>
-          </a:xfrm>
-          <a:prstGeom prst="rect">
-            <a:avLst/>
-          </a:prstGeom>
-          <a:noFill/>
-          <a:ln>
-            <a:noFill/>
-          </a:ln>
-        </p:spPr>
-        <p:txBody>
-          <a:bodyPr wrap="square" lIns="0" rIns="0" tIns="0" bIns="0" anchor="t">
-            <a:spAutoFit/>
-          </a:bodyPr>
-          <a:lstStyle/>
-          <a:p>
-            <a:pPr algn="l"/>
-            <a:r>
-              <a:rPr sz="1500" b="1">
-                <a:solidFill>
-                  <a:srgbClr val="3B586E"/>
-                </a:solidFill>
-                <a:latin typeface="Apple SD Gothic Neo"/>
-              </a:rPr>
-              <a:t>RQ2. 남는 오류는 어떤 구조인가</a:t>
-            </a:r>
-          </a:p>
-        </p:txBody>
-      </p:sp>
-      <p:sp>
-        <p:nvSpPr>
-          <p:cNvPr id="16" name="TextBox 15"/>
-          <p:cNvSpPr txBox="1"/>
-          <p:nvPr/>
-        </p:nvSpPr>
-        <p:spPr>
-          <a:xfrm>
-            <a:off x="4294632" y="2542032"/>
-            <a:ext cx="3407664" cy="1152144"/>
-          </a:xfrm>
-          <a:prstGeom prst="rect">
-            <a:avLst/>
-          </a:prstGeom>
-          <a:noFill/>
-          <a:ln>
-            <a:noFill/>
-          </a:ln>
-        </p:spPr>
-        <p:txBody>
-          <a:bodyPr wrap="square" lIns="0" rIns="0" tIns="0" bIns="0" anchor="t">
-            <a:spAutoFit/>
-          </a:bodyPr>
-          <a:lstStyle/>
-          <a:p>
-            <a:pPr algn="l"/>
-            <a:r>
-              <a:rPr sz="1500" b="0">
-                <a:solidFill>
-                  <a:srgbClr val="363A48"/>
-                </a:solidFill>
-                <a:latin typeface="Apple SD Gothic Neo"/>
-              </a:rPr>
-              <a:t>단순 noise가 아니라 first-position bias와 format failure처럼 구조화됩니다. 그래서 abstain ensemble이 의미를 가집니다.</a:t>
-            </a:r>
-          </a:p>
-        </p:txBody>
-      </p:sp>
-      <p:sp>
-        <p:nvSpPr>
-          <p:cNvPr id="17" name="TextBox 16"/>
-          <p:cNvSpPr txBox="1"/>
-          <p:nvPr/>
-        </p:nvSpPr>
-        <p:spPr>
-          <a:xfrm>
-            <a:off x="7940040" y="2048256"/>
-            <a:ext cx="3553967" cy="1993392"/>
-          </a:xfrm>
-          <a:prstGeom prst="rect">
-            <a:avLst/>
-          </a:prstGeom>
-          <a:solidFill>
-            <a:srgbClr val="FFFFFF"/>
-          </a:solidFill>
-          <a:ln>
-            <a:solidFill>
-              <a:srgbClr val="DAD4CA"/>
-            </a:solidFill>
-          </a:ln>
-        </p:spPr>
-        <p:txBody>
-          <a:bodyPr wrap="square" lIns="109728" rIns="109728" tIns="109728" bIns="109728" anchor="t">
-            <a:spAutoFit/>
-          </a:bodyPr>
-          <a:lstStyle/>
-          <a:p>
-            <a:pPr algn="l"/>
-            <a:r>
-              <a:rPr sz="1700" b="0">
-                <a:solidFill>
-                  <a:srgbClr val="363A48"/>
-                </a:solidFill>
-                <a:latin typeface="Apple SD Gothic Neo"/>
-              </a:rPr>
-              <a:t/>
-            </a:r>
-          </a:p>
-        </p:txBody>
-      </p:sp>
-      <p:sp>
-        <p:nvSpPr>
-          <p:cNvPr id="18" name="TextBox 17"/>
-          <p:cNvSpPr txBox="1"/>
-          <p:nvPr/>
-        </p:nvSpPr>
-        <p:spPr>
-          <a:xfrm>
-            <a:off x="8013192" y="2157984"/>
-            <a:ext cx="3407664" cy="237744"/>
-          </a:xfrm>
-          <a:prstGeom prst="rect">
-            <a:avLst/>
-          </a:prstGeom>
-          <a:noFill/>
-          <a:ln>
-            <a:noFill/>
-          </a:ln>
-        </p:spPr>
-        <p:txBody>
-          <a:bodyPr wrap="square" lIns="0" rIns="0" tIns="0" bIns="0" anchor="t">
-            <a:spAutoFit/>
-          </a:bodyPr>
-          <a:lstStyle/>
-          <a:p>
-            <a:pPr algn="l"/>
-            <a:r>
-              <a:rPr sz="1500" b="1">
-                <a:solidFill>
-                  <a:srgbClr val="3B586E"/>
-                </a:solidFill>
-                <a:latin typeface="Apple SD Gothic Neo"/>
-              </a:rPr>
-              <a:t>RQ3. 그 결론은 남는가</a:t>
-            </a:r>
-          </a:p>
-        </p:txBody>
-      </p:sp>
-      <p:sp>
-        <p:nvSpPr>
-          <p:cNvPr id="19" name="TextBox 18"/>
-          <p:cNvSpPr txBox="1"/>
-          <p:nvPr/>
-        </p:nvSpPr>
-        <p:spPr>
-          <a:xfrm>
-            <a:off x="8013192" y="2542032"/>
-            <a:ext cx="3407664" cy="1152144"/>
-          </a:xfrm>
-          <a:prstGeom prst="rect">
-            <a:avLst/>
-          </a:prstGeom>
-          <a:noFill/>
-          <a:ln>
-            <a:noFill/>
-          </a:ln>
-        </p:spPr>
-        <p:txBody>
-          <a:bodyPr wrap="square" lIns="0" rIns="0" tIns="0" bIns="0" anchor="t">
-            <a:spAutoFit/>
-          </a:bodyPr>
-          <a:lstStyle/>
-          <a:p>
-            <a:pPr algn="l"/>
-            <a:r>
-              <a:rPr sz="1500" b="0">
-                <a:solidFill>
-                  <a:srgbClr val="363A48"/>
-                </a:solidFill>
-                <a:latin typeface="Apple SD Gothic Neo"/>
-              </a:rPr>
-              <a:t>부분적으로 예. InternLM20B·GPT-4o-mini·repeated hold-out이 broad claim을 지지하지만, 모든 open judge에 대한 보편 법칙은 아닙니다.</a:t>
-            </a:r>
-          </a:p>
-        </p:txBody>
-      </p:sp>
-      <p:sp>
-        <p:nvSpPr>
-          <p:cNvPr id="20" name="TextBox 19"/>
-          <p:cNvSpPr txBox="1"/>
-          <p:nvPr/>
-        </p:nvSpPr>
-        <p:spPr>
-          <a:xfrm>
-            <a:off x="502920" y="4407408"/>
-            <a:ext cx="11155680" cy="1225296"/>
+            <a:off x="502920" y="4553712"/>
+            <a:ext cx="11155680" cy="1417320"/>
           </a:xfrm>
           <a:prstGeom prst="rect">
             <a:avLst/>
@@ -13014,7 +12909,695 @@
               </a:defRPr>
             </a:pPr>
             <a:r>
-              <a:t>• RQ1, RQ2, RQ3를 다시 부르면 2부가 phase 나열이 아니라 하나의 argument로 닫힙니다.</a:t>
+              <a:t>• InternLM20B는 Qwen32와 Spearman ρ=0.893로 broad ranking을 유지하지만, pairwise inconsistency는 47.44%로 더 noisy하다.</a:t>
+            </a:r>
+          </a:p>
+          <a:p>
+            <a:pPr>
+              <a:lnSpc>
+                <a:spcPct val="112000"/>
+              </a:lnSpc>
+              <a:spcBef>
+                <a:spcPts val="0"/>
+              </a:spcBef>
+              <a:spcAft>
+                <a:spcPts val="800"/>
+              </a:spcAft>
+              <a:defRPr sz="1600">
+                <a:solidFill>
+                  <a:srgbClr val="363A48"/>
+                </a:solidFill>
+                <a:latin typeface="Apple SD Gothic Neo"/>
+              </a:defRPr>
+            </a:pPr>
+            <a:r>
+              <a:t>• GPT-4o-mini는 Qwen32와 ρ=0.964, τ=0.905, pairwise inconsistency 33.99%로 가장 강한 외부 기준점이다.</a:t>
+            </a:r>
+          </a:p>
+          <a:p>
+            <a:pPr>
+              <a:lnSpc>
+                <a:spcPct val="112000"/>
+              </a:lnSpc>
+              <a:spcBef>
+                <a:spcPts val="0"/>
+              </a:spcBef>
+              <a:spcAft>
+                <a:spcPts val="800"/>
+              </a:spcAft>
+              <a:defRPr sz="1600">
+                <a:solidFill>
+                  <a:srgbClr val="363A48"/>
+                </a:solidFill>
+                <a:latin typeface="Apple SD Gothic Neo"/>
+              </a:defRPr>
+            </a:pPr>
+            <a:r>
+              <a:t>• tinyMT repeated hold-out 330 split에서는 60문항이 세 judge 모두 mean ρ≥0.97로 가장 안전한 운영점이었다.</a:t>
+            </a:r>
+          </a:p>
+        </p:txBody>
+      </p:sp>
+      <p:sp>
+        <p:nvSpPr>
+          <p:cNvPr id="15" name="TextBox 14"/>
+          <p:cNvSpPr txBox="1"/>
+          <p:nvPr/>
+        </p:nvSpPr>
+        <p:spPr>
+          <a:xfrm>
+            <a:off x="566928" y="5623560"/>
+            <a:ext cx="2029968" cy="877824"/>
+          </a:xfrm>
+          <a:prstGeom prst="rect">
+            <a:avLst/>
+          </a:prstGeom>
+          <a:solidFill>
+            <a:srgbClr val="FFFFFF"/>
+          </a:solidFill>
+          <a:ln>
+            <a:solidFill>
+              <a:srgbClr val="DAD4CA"/>
+            </a:solidFill>
+          </a:ln>
+        </p:spPr>
+        <p:txBody>
+          <a:bodyPr wrap="square" lIns="54864" rIns="54864" tIns="54864" bIns="54864" anchor="t">
+            <a:spAutoFit/>
+          </a:bodyPr>
+          <a:lstStyle/>
+          <a:p>
+            <a:pPr algn="l"/>
+            <a:r>
+              <a:rPr sz="1700" b="0">
+                <a:solidFill>
+                  <a:srgbClr val="363A48"/>
+                </a:solidFill>
+                <a:latin typeface="Apple SD Gothic Neo"/>
+              </a:rPr>
+              <a:t/>
+            </a:r>
+          </a:p>
+        </p:txBody>
+      </p:sp>
+      <p:sp>
+        <p:nvSpPr>
+          <p:cNvPr id="16" name="Rectangle 15"/>
+          <p:cNvSpPr/>
+          <p:nvPr/>
+        </p:nvSpPr>
+        <p:spPr>
+          <a:xfrm>
+            <a:off x="676656" y="5733288"/>
+            <a:ext cx="502920" cy="182880"/>
+          </a:xfrm>
+          <a:prstGeom prst="rect">
+            <a:avLst/>
+          </a:prstGeom>
+          <a:solidFill>
+            <a:srgbClr val="375667"/>
+          </a:solidFill>
+          <a:ln>
+            <a:noFill/>
+          </a:ln>
+        </p:spPr>
+        <p:style>
+          <a:lnRef idx="1">
+            <a:schemeClr val="accent1"/>
+          </a:lnRef>
+          <a:fillRef idx="3">
+            <a:schemeClr val="accent1"/>
+          </a:fillRef>
+          <a:effectRef idx="2">
+            <a:schemeClr val="accent1"/>
+          </a:effectRef>
+          <a:fontRef idx="minor">
+            <a:schemeClr val="lt1"/>
+          </a:fontRef>
+        </p:style>
+        <p:txBody>
+          <a:bodyPr rtlCol="0" anchor="ctr"/>
+          <a:lstStyle/>
+          <a:p>
+            <a:pPr algn="ctr"/>
+          </a:p>
+        </p:txBody>
+      </p:sp>
+      <p:sp>
+        <p:nvSpPr>
+          <p:cNvPr id="17" name="TextBox 16"/>
+          <p:cNvSpPr txBox="1"/>
+          <p:nvPr/>
+        </p:nvSpPr>
+        <p:spPr>
+          <a:xfrm>
+            <a:off x="694944" y="5733288"/>
+            <a:ext cx="1691640" cy="182880"/>
+          </a:xfrm>
+          <a:prstGeom prst="rect">
+            <a:avLst/>
+          </a:prstGeom>
+          <a:noFill/>
+          <a:ln>
+            <a:noFill/>
+          </a:ln>
+        </p:spPr>
+        <p:txBody>
+          <a:bodyPr wrap="square" lIns="9144" rIns="9144" tIns="9144" bIns="9144" anchor="ctr">
+            <a:spAutoFit/>
+          </a:bodyPr>
+          <a:lstStyle/>
+          <a:p>
+            <a:pPr algn="l"/>
+            <a:r>
+              <a:rPr sz="900" b="1">
+                <a:solidFill>
+                  <a:srgbClr val="FFFFFF"/>
+                </a:solidFill>
+                <a:latin typeface="Apple SD Gothic Neo"/>
+              </a:rPr>
+              <a:t>InternLM20B</a:t>
+            </a:r>
+          </a:p>
+        </p:txBody>
+      </p:sp>
+      <p:sp>
+        <p:nvSpPr>
+          <p:cNvPr id="18" name="TextBox 17"/>
+          <p:cNvSpPr txBox="1"/>
+          <p:nvPr/>
+        </p:nvSpPr>
+        <p:spPr>
+          <a:xfrm>
+            <a:off x="676656" y="5971032"/>
+            <a:ext cx="1737360" cy="310896"/>
+          </a:xfrm>
+          <a:prstGeom prst="rect">
+            <a:avLst/>
+          </a:prstGeom>
+          <a:noFill/>
+          <a:ln>
+            <a:noFill/>
+          </a:ln>
+        </p:spPr>
+        <p:txBody>
+          <a:bodyPr wrap="square" lIns="9144" rIns="9144" tIns="9144" bIns="9144" anchor="t">
+            <a:spAutoFit/>
+          </a:bodyPr>
+          <a:lstStyle/>
+          <a:p>
+            <a:pPr algn="l"/>
+            <a:r>
+              <a:rPr sz="1900" b="1">
+                <a:solidFill>
+                  <a:srgbClr val="282C3A"/>
+                </a:solidFill>
+                <a:latin typeface="Apple SD Gothic Neo"/>
+              </a:rPr>
+              <a:t>ρ=0.893</a:t>
+            </a:r>
+          </a:p>
+        </p:txBody>
+      </p:sp>
+      <p:sp>
+        <p:nvSpPr>
+          <p:cNvPr id="19" name="TextBox 18"/>
+          <p:cNvSpPr txBox="1"/>
+          <p:nvPr/>
+        </p:nvSpPr>
+        <p:spPr>
+          <a:xfrm>
+            <a:off x="2779776" y="5623560"/>
+            <a:ext cx="2029968" cy="877824"/>
+          </a:xfrm>
+          <a:prstGeom prst="rect">
+            <a:avLst/>
+          </a:prstGeom>
+          <a:solidFill>
+            <a:srgbClr val="FFFFFF"/>
+          </a:solidFill>
+          <a:ln>
+            <a:solidFill>
+              <a:srgbClr val="DAD4CA"/>
+            </a:solidFill>
+          </a:ln>
+        </p:spPr>
+        <p:txBody>
+          <a:bodyPr wrap="square" lIns="54864" rIns="54864" tIns="54864" bIns="54864" anchor="t">
+            <a:spAutoFit/>
+          </a:bodyPr>
+          <a:lstStyle/>
+          <a:p>
+            <a:pPr algn="l"/>
+            <a:r>
+              <a:rPr sz="1700" b="0">
+                <a:solidFill>
+                  <a:srgbClr val="363A48"/>
+                </a:solidFill>
+                <a:latin typeface="Apple SD Gothic Neo"/>
+              </a:rPr>
+              <a:t/>
+            </a:r>
+          </a:p>
+        </p:txBody>
+      </p:sp>
+      <p:sp>
+        <p:nvSpPr>
+          <p:cNvPr id="20" name="Rectangle 19"/>
+          <p:cNvSpPr/>
+          <p:nvPr/>
+        </p:nvSpPr>
+        <p:spPr>
+          <a:xfrm>
+            <a:off x="2889504" y="5733288"/>
+            <a:ext cx="502920" cy="182880"/>
+          </a:xfrm>
+          <a:prstGeom prst="rect">
+            <a:avLst/>
+          </a:prstGeom>
+          <a:solidFill>
+            <a:srgbClr val="B5654E"/>
+          </a:solidFill>
+          <a:ln>
+            <a:noFill/>
+          </a:ln>
+        </p:spPr>
+        <p:style>
+          <a:lnRef idx="1">
+            <a:schemeClr val="accent1"/>
+          </a:lnRef>
+          <a:fillRef idx="3">
+            <a:schemeClr val="accent1"/>
+          </a:fillRef>
+          <a:effectRef idx="2">
+            <a:schemeClr val="accent1"/>
+          </a:effectRef>
+          <a:fontRef idx="minor">
+            <a:schemeClr val="lt1"/>
+          </a:fontRef>
+        </p:style>
+        <p:txBody>
+          <a:bodyPr rtlCol="0" anchor="ctr"/>
+          <a:lstStyle/>
+          <a:p>
+            <a:pPr algn="ctr"/>
+          </a:p>
+        </p:txBody>
+      </p:sp>
+      <p:sp>
+        <p:nvSpPr>
+          <p:cNvPr id="21" name="TextBox 20"/>
+          <p:cNvSpPr txBox="1"/>
+          <p:nvPr/>
+        </p:nvSpPr>
+        <p:spPr>
+          <a:xfrm>
+            <a:off x="2907792" y="5733288"/>
+            <a:ext cx="1691640" cy="182880"/>
+          </a:xfrm>
+          <a:prstGeom prst="rect">
+            <a:avLst/>
+          </a:prstGeom>
+          <a:noFill/>
+          <a:ln>
+            <a:noFill/>
+          </a:ln>
+        </p:spPr>
+        <p:txBody>
+          <a:bodyPr wrap="square" lIns="9144" rIns="9144" tIns="9144" bIns="9144" anchor="ctr">
+            <a:spAutoFit/>
+          </a:bodyPr>
+          <a:lstStyle/>
+          <a:p>
+            <a:pPr algn="l"/>
+            <a:r>
+              <a:rPr sz="900" b="1">
+                <a:solidFill>
+                  <a:srgbClr val="FFFFFF"/>
+                </a:solidFill>
+                <a:latin typeface="Apple SD Gothic Neo"/>
+              </a:rPr>
+              <a:t>GPT-4o-mini</a:t>
+            </a:r>
+          </a:p>
+        </p:txBody>
+      </p:sp>
+      <p:sp>
+        <p:nvSpPr>
+          <p:cNvPr id="22" name="TextBox 21"/>
+          <p:cNvSpPr txBox="1"/>
+          <p:nvPr/>
+        </p:nvSpPr>
+        <p:spPr>
+          <a:xfrm>
+            <a:off x="2889504" y="5971032"/>
+            <a:ext cx="1737360" cy="310896"/>
+          </a:xfrm>
+          <a:prstGeom prst="rect">
+            <a:avLst/>
+          </a:prstGeom>
+          <a:noFill/>
+          <a:ln>
+            <a:noFill/>
+          </a:ln>
+        </p:spPr>
+        <p:txBody>
+          <a:bodyPr wrap="square" lIns="9144" rIns="9144" tIns="9144" bIns="9144" anchor="t">
+            <a:spAutoFit/>
+          </a:bodyPr>
+          <a:lstStyle/>
+          <a:p>
+            <a:pPr algn="l"/>
+            <a:r>
+              <a:rPr sz="1900" b="1">
+                <a:solidFill>
+                  <a:srgbClr val="282C3A"/>
+                </a:solidFill>
+                <a:latin typeface="Apple SD Gothic Neo"/>
+              </a:rPr>
+              <a:t>ρ=0.964</a:t>
+            </a:r>
+          </a:p>
+        </p:txBody>
+      </p:sp>
+      <p:sp>
+        <p:nvSpPr>
+          <p:cNvPr id="23" name="TextBox 22"/>
+          <p:cNvSpPr txBox="1"/>
+          <p:nvPr/>
+        </p:nvSpPr>
+        <p:spPr>
+          <a:xfrm>
+            <a:off x="4992624" y="5623560"/>
+            <a:ext cx="2029968" cy="877824"/>
+          </a:xfrm>
+          <a:prstGeom prst="rect">
+            <a:avLst/>
+          </a:prstGeom>
+          <a:solidFill>
+            <a:srgbClr val="FFFFFF"/>
+          </a:solidFill>
+          <a:ln>
+            <a:solidFill>
+              <a:srgbClr val="DAD4CA"/>
+            </a:solidFill>
+          </a:ln>
+        </p:spPr>
+        <p:txBody>
+          <a:bodyPr wrap="square" lIns="54864" rIns="54864" tIns="54864" bIns="54864" anchor="t">
+            <a:spAutoFit/>
+          </a:bodyPr>
+          <a:lstStyle/>
+          <a:p>
+            <a:pPr algn="l"/>
+            <a:r>
+              <a:rPr sz="1700" b="0">
+                <a:solidFill>
+                  <a:srgbClr val="363A48"/>
+                </a:solidFill>
+                <a:latin typeface="Apple SD Gothic Neo"/>
+              </a:rPr>
+              <a:t/>
+            </a:r>
+          </a:p>
+        </p:txBody>
+      </p:sp>
+      <p:sp>
+        <p:nvSpPr>
+          <p:cNvPr id="24" name="Rectangle 23"/>
+          <p:cNvSpPr/>
+          <p:nvPr/>
+        </p:nvSpPr>
+        <p:spPr>
+          <a:xfrm>
+            <a:off x="5102352" y="5733288"/>
+            <a:ext cx="502920" cy="182880"/>
+          </a:xfrm>
+          <a:prstGeom prst="rect">
+            <a:avLst/>
+          </a:prstGeom>
+          <a:solidFill>
+            <a:srgbClr val="BF9A5E"/>
+          </a:solidFill>
+          <a:ln>
+            <a:noFill/>
+          </a:ln>
+        </p:spPr>
+        <p:style>
+          <a:lnRef idx="1">
+            <a:schemeClr val="accent1"/>
+          </a:lnRef>
+          <a:fillRef idx="3">
+            <a:schemeClr val="accent1"/>
+          </a:fillRef>
+          <a:effectRef idx="2">
+            <a:schemeClr val="accent1"/>
+          </a:effectRef>
+          <a:fontRef idx="minor">
+            <a:schemeClr val="lt1"/>
+          </a:fontRef>
+        </p:style>
+        <p:txBody>
+          <a:bodyPr rtlCol="0" anchor="ctr"/>
+          <a:lstStyle/>
+          <a:p>
+            <a:pPr algn="ctr"/>
+          </a:p>
+        </p:txBody>
+      </p:sp>
+      <p:sp>
+        <p:nvSpPr>
+          <p:cNvPr id="25" name="TextBox 24"/>
+          <p:cNvSpPr txBox="1"/>
+          <p:nvPr/>
+        </p:nvSpPr>
+        <p:spPr>
+          <a:xfrm>
+            <a:off x="5120640" y="5733288"/>
+            <a:ext cx="1691640" cy="182880"/>
+          </a:xfrm>
+          <a:prstGeom prst="rect">
+            <a:avLst/>
+          </a:prstGeom>
+          <a:noFill/>
+          <a:ln>
+            <a:noFill/>
+          </a:ln>
+        </p:spPr>
+        <p:txBody>
+          <a:bodyPr wrap="square" lIns="9144" rIns="9144" tIns="9144" bIns="9144" anchor="ctr">
+            <a:spAutoFit/>
+          </a:bodyPr>
+          <a:lstStyle/>
+          <a:p>
+            <a:pPr algn="l"/>
+            <a:r>
+              <a:rPr sz="900" b="1">
+                <a:solidFill>
+                  <a:srgbClr val="FFFFFF"/>
+                </a:solidFill>
+                <a:latin typeface="Apple SD Gothic Neo"/>
+              </a:rPr>
+              <a:t>60문항</a:t>
+            </a:r>
+          </a:p>
+        </p:txBody>
+      </p:sp>
+      <p:sp>
+        <p:nvSpPr>
+          <p:cNvPr id="26" name="TextBox 25"/>
+          <p:cNvSpPr txBox="1"/>
+          <p:nvPr/>
+        </p:nvSpPr>
+        <p:spPr>
+          <a:xfrm>
+            <a:off x="5102352" y="5971032"/>
+            <a:ext cx="1737360" cy="310896"/>
+          </a:xfrm>
+          <a:prstGeom prst="rect">
+            <a:avLst/>
+          </a:prstGeom>
+          <a:noFill/>
+          <a:ln>
+            <a:noFill/>
+          </a:ln>
+        </p:spPr>
+        <p:txBody>
+          <a:bodyPr wrap="square" lIns="9144" rIns="9144" tIns="9144" bIns="9144" anchor="t">
+            <a:spAutoFit/>
+          </a:bodyPr>
+          <a:lstStyle/>
+          <a:p>
+            <a:pPr algn="l"/>
+            <a:r>
+              <a:rPr sz="1900" b="1">
+                <a:solidFill>
+                  <a:srgbClr val="282C3A"/>
+                </a:solidFill>
+                <a:latin typeface="Apple SD Gothic Neo"/>
+              </a:rPr>
+              <a:t>mean ρ≥0.97</a:t>
+            </a:r>
+          </a:p>
+        </p:txBody>
+      </p:sp>
+      <p:sp>
+        <p:nvSpPr>
+          <p:cNvPr id="27" name="TextBox 26"/>
+          <p:cNvSpPr txBox="1"/>
+          <p:nvPr/>
+        </p:nvSpPr>
+        <p:spPr>
+          <a:xfrm>
+            <a:off x="7205472" y="5623560"/>
+            <a:ext cx="2029968" cy="877824"/>
+          </a:xfrm>
+          <a:prstGeom prst="rect">
+            <a:avLst/>
+          </a:prstGeom>
+          <a:solidFill>
+            <a:srgbClr val="FFFFFF"/>
+          </a:solidFill>
+          <a:ln>
+            <a:solidFill>
+              <a:srgbClr val="DAD4CA"/>
+            </a:solidFill>
+          </a:ln>
+        </p:spPr>
+        <p:txBody>
+          <a:bodyPr wrap="square" lIns="54864" rIns="54864" tIns="54864" bIns="54864" anchor="t">
+            <a:spAutoFit/>
+          </a:bodyPr>
+          <a:lstStyle/>
+          <a:p>
+            <a:pPr algn="l"/>
+            <a:r>
+              <a:rPr sz="1700" b="0">
+                <a:solidFill>
+                  <a:srgbClr val="363A48"/>
+                </a:solidFill>
+                <a:latin typeface="Apple SD Gothic Neo"/>
+              </a:rPr>
+              <a:t/>
+            </a:r>
+          </a:p>
+        </p:txBody>
+      </p:sp>
+      <p:sp>
+        <p:nvSpPr>
+          <p:cNvPr id="28" name="Rectangle 27"/>
+          <p:cNvSpPr/>
+          <p:nvPr/>
+        </p:nvSpPr>
+        <p:spPr>
+          <a:xfrm>
+            <a:off x="7315200" y="5733288"/>
+            <a:ext cx="502920" cy="182880"/>
+          </a:xfrm>
+          <a:prstGeom prst="rect">
+            <a:avLst/>
+          </a:prstGeom>
+          <a:solidFill>
+            <a:srgbClr val="668185"/>
+          </a:solidFill>
+          <a:ln>
+            <a:noFill/>
+          </a:ln>
+        </p:spPr>
+        <p:style>
+          <a:lnRef idx="1">
+            <a:schemeClr val="accent1"/>
+          </a:lnRef>
+          <a:fillRef idx="3">
+            <a:schemeClr val="accent1"/>
+          </a:fillRef>
+          <a:effectRef idx="2">
+            <a:schemeClr val="accent1"/>
+          </a:effectRef>
+          <a:fontRef idx="minor">
+            <a:schemeClr val="lt1"/>
+          </a:fontRef>
+        </p:style>
+        <p:txBody>
+          <a:bodyPr rtlCol="0" anchor="ctr"/>
+          <a:lstStyle/>
+          <a:p>
+            <a:pPr algn="ctr"/>
+          </a:p>
+        </p:txBody>
+      </p:sp>
+      <p:sp>
+        <p:nvSpPr>
+          <p:cNvPr id="29" name="TextBox 28"/>
+          <p:cNvSpPr txBox="1"/>
+          <p:nvPr/>
+        </p:nvSpPr>
+        <p:spPr>
+          <a:xfrm>
+            <a:off x="7333488" y="5733288"/>
+            <a:ext cx="1691640" cy="182880"/>
+          </a:xfrm>
+          <a:prstGeom prst="rect">
+            <a:avLst/>
+          </a:prstGeom>
+          <a:noFill/>
+          <a:ln>
+            <a:noFill/>
+          </a:ln>
+        </p:spPr>
+        <p:txBody>
+          <a:bodyPr wrap="square" lIns="9144" rIns="9144" tIns="9144" bIns="9144" anchor="ctr">
+            <a:spAutoFit/>
+          </a:bodyPr>
+          <a:lstStyle/>
+          <a:p>
+            <a:pPr algn="l"/>
+            <a:r>
+              <a:rPr sz="900" b="1">
+                <a:solidFill>
+                  <a:srgbClr val="FFFFFF"/>
+                </a:solidFill>
+                <a:latin typeface="Apple SD Gothic Neo"/>
+              </a:rPr>
+              <a:t>해석</a:t>
+            </a:r>
+          </a:p>
+        </p:txBody>
+      </p:sp>
+      <p:sp>
+        <p:nvSpPr>
+          <p:cNvPr id="30" name="TextBox 29"/>
+          <p:cNvSpPr txBox="1"/>
+          <p:nvPr/>
+        </p:nvSpPr>
+        <p:spPr>
+          <a:xfrm>
+            <a:off x="7315200" y="5971032"/>
+            <a:ext cx="1737360" cy="310896"/>
+          </a:xfrm>
+          <a:prstGeom prst="rect">
+            <a:avLst/>
+          </a:prstGeom>
+          <a:noFill/>
+          <a:ln>
+            <a:noFill/>
+          </a:ln>
+        </p:spPr>
+        <p:txBody>
+          <a:bodyPr wrap="square" lIns="9144" rIns="9144" tIns="9144" bIns="9144" anchor="t">
+            <a:spAutoFit/>
+          </a:bodyPr>
+          <a:lstStyle/>
+          <a:p>
+            <a:pPr algn="l"/>
+            <a:r>
+              <a:rPr sz="1900" b="1">
+                <a:solidFill>
+                  <a:srgbClr val="282C3A"/>
+                </a:solidFill>
+                <a:latin typeface="Apple SD Gothic Neo"/>
+              </a:rPr>
+              <a:t>partial yes</a:t>
             </a:r>
           </a:p>
         </p:txBody>
@@ -13164,7 +13747,7 @@
                 </a:solidFill>
                 <a:latin typeface="Apple SD Gothic Neo"/>
               </a:rPr>
-              <a:t>질문 전에: 저장소는 이렇게 읽으면 됩니다</a:t>
+              <a:t>4. 세 연구 질문에 대해 지금 무엇을 답할 수 있나</a:t>
             </a:r>
           </a:p>
         </p:txBody>
@@ -13244,7 +13827,808 @@
                 </a:solidFill>
                 <a:latin typeface="Apple SD Gothic Neo"/>
               </a:rPr>
-              <a:t>18/18</a:t>
+              <a:t>18/19</a:t>
+            </a:r>
+          </a:p>
+        </p:txBody>
+      </p:sp>
+      <p:sp>
+        <p:nvSpPr>
+          <p:cNvPr id="7" name="Rectangle 6"/>
+          <p:cNvSpPr/>
+          <p:nvPr/>
+        </p:nvSpPr>
+        <p:spPr>
+          <a:xfrm>
+            <a:off x="475488" y="6419088"/>
+            <a:ext cx="11201400" cy="36576"/>
+          </a:xfrm>
+          <a:prstGeom prst="rect">
+            <a:avLst/>
+          </a:prstGeom>
+          <a:solidFill>
+            <a:srgbClr val="DAD4CA"/>
+          </a:solidFill>
+          <a:ln>
+            <a:noFill/>
+          </a:ln>
+        </p:spPr>
+        <p:style>
+          <a:lnRef idx="1">
+            <a:schemeClr val="accent1"/>
+          </a:lnRef>
+          <a:fillRef idx="3">
+            <a:schemeClr val="accent1"/>
+          </a:fillRef>
+          <a:effectRef idx="2">
+            <a:schemeClr val="accent1"/>
+          </a:effectRef>
+          <a:fontRef idx="minor">
+            <a:schemeClr val="lt1"/>
+          </a:fontRef>
+        </p:style>
+        <p:txBody>
+          <a:bodyPr rtlCol="0" anchor="ctr"/>
+          <a:lstStyle/>
+          <a:p>
+            <a:pPr algn="ctr"/>
+          </a:p>
+        </p:txBody>
+      </p:sp>
+      <p:sp>
+        <p:nvSpPr>
+          <p:cNvPr id="8" name="TextBox 7"/>
+          <p:cNvSpPr txBox="1"/>
+          <p:nvPr/>
+        </p:nvSpPr>
+        <p:spPr>
+          <a:xfrm>
+            <a:off x="502920" y="6455664"/>
+            <a:ext cx="4663440" cy="164592"/>
+          </a:xfrm>
+          <a:prstGeom prst="rect">
+            <a:avLst/>
+          </a:prstGeom>
+          <a:noFill/>
+          <a:ln>
+            <a:noFill/>
+          </a:ln>
+        </p:spPr>
+        <p:txBody>
+          <a:bodyPr wrap="square" lIns="0" rIns="0" tIns="0" bIns="0" anchor="t">
+            <a:spAutoFit/>
+          </a:bodyPr>
+          <a:lstStyle/>
+          <a:p>
+            <a:pPr algn="l"/>
+            <a:r>
+              <a:rPr sz="800" b="0">
+                <a:solidFill>
+                  <a:srgbClr val="70767D"/>
+                </a:solidFill>
+                <a:latin typeface="Apple SD Gothic Neo"/>
+              </a:rPr>
+              <a:t>내 연구 | reproduction and extensions</a:t>
+            </a:r>
+          </a:p>
+        </p:txBody>
+      </p:sp>
+      <p:sp>
+        <p:nvSpPr>
+          <p:cNvPr id="9" name="TextBox 8"/>
+          <p:cNvSpPr txBox="1"/>
+          <p:nvPr/>
+        </p:nvSpPr>
+        <p:spPr>
+          <a:xfrm>
+            <a:off x="438912" y="694944"/>
+            <a:ext cx="11292840" cy="365760"/>
+          </a:xfrm>
+          <a:prstGeom prst="rect">
+            <a:avLst/>
+          </a:prstGeom>
+          <a:solidFill>
+            <a:srgbClr val="E2EAEF"/>
+          </a:solidFill>
+          <a:ln>
+            <a:solidFill>
+              <a:srgbClr val="E2EAEF"/>
+            </a:solidFill>
+          </a:ln>
+        </p:spPr>
+        <p:txBody>
+          <a:bodyPr wrap="square" lIns="27432" rIns="27432" tIns="27432" bIns="27432" anchor="ctr">
+            <a:spAutoFit/>
+          </a:bodyPr>
+          <a:lstStyle/>
+          <a:p>
+            <a:pPr algn="l"/>
+            <a:r>
+              <a:rPr sz="1200" b="1">
+                <a:solidFill>
+                  <a:srgbClr val="282C3A"/>
+                </a:solidFill>
+                <a:latin typeface="Apple SD Gothic Neo"/>
+              </a:rPr>
+              <a:t>이 슬라이드의 목적: 2부에서 처음 던진 세 연구 질문에 대한 현재 답을 한 장에서 닫아 준다.</a:t>
+            </a:r>
+          </a:p>
+        </p:txBody>
+      </p:sp>
+      <p:sp>
+        <p:nvSpPr>
+          <p:cNvPr id="10" name="TextBox 9"/>
+          <p:cNvSpPr txBox="1"/>
+          <p:nvPr/>
+        </p:nvSpPr>
+        <p:spPr>
+          <a:xfrm>
+            <a:off x="502920" y="1298448"/>
+            <a:ext cx="11155680" cy="566928"/>
+          </a:xfrm>
+          <a:prstGeom prst="rect">
+            <a:avLst/>
+          </a:prstGeom>
+          <a:solidFill>
+            <a:srgbClr val="E2EAEF"/>
+          </a:solidFill>
+          <a:ln>
+            <a:solidFill>
+              <a:srgbClr val="E2EAEF"/>
+            </a:solidFill>
+          </a:ln>
+        </p:spPr>
+        <p:txBody>
+          <a:bodyPr wrap="square" lIns="64008" rIns="64008" tIns="64008" bIns="64008" anchor="ctr">
+            <a:spAutoFit/>
+          </a:bodyPr>
+          <a:lstStyle/>
+          <a:p>
+            <a:pPr algn="l"/>
+            <a:r>
+              <a:rPr sz="1900" b="1">
+                <a:solidFill>
+                  <a:srgbClr val="282C3A"/>
+                </a:solidFill>
+                <a:latin typeface="Apple SD Gothic Neo"/>
+              </a:rPr>
+              <a:t>따라서 이 발표의 결론은 ‘오픈소스 judge도 충분하다’가 아니라, ‘strong judge message는 부분적으로 재현되지만 boundary를 같이 말해야 한다’입니다.</a:t>
+            </a:r>
+          </a:p>
+        </p:txBody>
+      </p:sp>
+      <p:sp>
+        <p:nvSpPr>
+          <p:cNvPr id="11" name="TextBox 10"/>
+          <p:cNvSpPr txBox="1"/>
+          <p:nvPr/>
+        </p:nvSpPr>
+        <p:spPr>
+          <a:xfrm>
+            <a:off x="502920" y="2048256"/>
+            <a:ext cx="3553967" cy="1993392"/>
+          </a:xfrm>
+          <a:prstGeom prst="rect">
+            <a:avLst/>
+          </a:prstGeom>
+          <a:solidFill>
+            <a:srgbClr val="FFFFFF"/>
+          </a:solidFill>
+          <a:ln>
+            <a:solidFill>
+              <a:srgbClr val="DAD4CA"/>
+            </a:solidFill>
+          </a:ln>
+        </p:spPr>
+        <p:txBody>
+          <a:bodyPr wrap="square" lIns="109728" rIns="109728" tIns="109728" bIns="109728" anchor="t">
+            <a:spAutoFit/>
+          </a:bodyPr>
+          <a:lstStyle/>
+          <a:p>
+            <a:pPr algn="l"/>
+            <a:r>
+              <a:rPr sz="1700" b="0">
+                <a:solidFill>
+                  <a:srgbClr val="363A48"/>
+                </a:solidFill>
+                <a:latin typeface="Apple SD Gothic Neo"/>
+              </a:rPr>
+              <a:t/>
+            </a:r>
+          </a:p>
+        </p:txBody>
+      </p:sp>
+      <p:sp>
+        <p:nvSpPr>
+          <p:cNvPr id="12" name="TextBox 11"/>
+          <p:cNvSpPr txBox="1"/>
+          <p:nvPr/>
+        </p:nvSpPr>
+        <p:spPr>
+          <a:xfrm>
+            <a:off x="576072" y="2157984"/>
+            <a:ext cx="3407664" cy="237744"/>
+          </a:xfrm>
+          <a:prstGeom prst="rect">
+            <a:avLst/>
+          </a:prstGeom>
+          <a:noFill/>
+          <a:ln>
+            <a:noFill/>
+          </a:ln>
+        </p:spPr>
+        <p:txBody>
+          <a:bodyPr wrap="square" lIns="0" rIns="0" tIns="0" bIns="0" anchor="t">
+            <a:spAutoFit/>
+          </a:bodyPr>
+          <a:lstStyle/>
+          <a:p>
+            <a:pPr algn="l"/>
+            <a:r>
+              <a:rPr sz="1500" b="1">
+                <a:solidFill>
+                  <a:srgbClr val="3B586E"/>
+                </a:solidFill>
+                <a:latin typeface="Apple SD Gothic Neo"/>
+              </a:rPr>
+              <a:t>RQ1. judge scaling은 개선되는가</a:t>
+            </a:r>
+          </a:p>
+        </p:txBody>
+      </p:sp>
+      <p:sp>
+        <p:nvSpPr>
+          <p:cNvPr id="13" name="TextBox 12"/>
+          <p:cNvSpPr txBox="1"/>
+          <p:nvPr/>
+        </p:nvSpPr>
+        <p:spPr>
+          <a:xfrm>
+            <a:off x="576072" y="2542032"/>
+            <a:ext cx="3407664" cy="1152144"/>
+          </a:xfrm>
+          <a:prstGeom prst="rect">
+            <a:avLst/>
+          </a:prstGeom>
+          <a:noFill/>
+          <a:ln>
+            <a:noFill/>
+          </a:ln>
+        </p:spPr>
+        <p:txBody>
+          <a:bodyPr wrap="square" lIns="0" rIns="0" tIns="0" bIns="0" anchor="t">
+            <a:spAutoFit/>
+          </a:bodyPr>
+          <a:lstStyle/>
+          <a:p>
+            <a:pPr algn="l"/>
+            <a:r>
+              <a:rPr sz="1500" b="0">
+                <a:solidFill>
+                  <a:srgbClr val="363A48"/>
+                </a:solidFill>
+                <a:latin typeface="Apple SD Gothic Neo"/>
+              </a:rPr>
+              <a:t>예. Qwen judge scaling 결과에서는 7B → 14B → 32B로 갈수록 pairwise inconsistency가 뚜렷하게 줄었습니다.</a:t>
+            </a:r>
+          </a:p>
+        </p:txBody>
+      </p:sp>
+      <p:sp>
+        <p:nvSpPr>
+          <p:cNvPr id="14" name="TextBox 13"/>
+          <p:cNvSpPr txBox="1"/>
+          <p:nvPr/>
+        </p:nvSpPr>
+        <p:spPr>
+          <a:xfrm>
+            <a:off x="4221480" y="2048256"/>
+            <a:ext cx="3553967" cy="1993392"/>
+          </a:xfrm>
+          <a:prstGeom prst="rect">
+            <a:avLst/>
+          </a:prstGeom>
+          <a:solidFill>
+            <a:srgbClr val="FFFFFF"/>
+          </a:solidFill>
+          <a:ln>
+            <a:solidFill>
+              <a:srgbClr val="DAD4CA"/>
+            </a:solidFill>
+          </a:ln>
+        </p:spPr>
+        <p:txBody>
+          <a:bodyPr wrap="square" lIns="109728" rIns="109728" tIns="109728" bIns="109728" anchor="t">
+            <a:spAutoFit/>
+          </a:bodyPr>
+          <a:lstStyle/>
+          <a:p>
+            <a:pPr algn="l"/>
+            <a:r>
+              <a:rPr sz="1700" b="0">
+                <a:solidFill>
+                  <a:srgbClr val="363A48"/>
+                </a:solidFill>
+                <a:latin typeface="Apple SD Gothic Neo"/>
+              </a:rPr>
+              <a:t/>
+            </a:r>
+          </a:p>
+        </p:txBody>
+      </p:sp>
+      <p:sp>
+        <p:nvSpPr>
+          <p:cNvPr id="15" name="TextBox 14"/>
+          <p:cNvSpPr txBox="1"/>
+          <p:nvPr/>
+        </p:nvSpPr>
+        <p:spPr>
+          <a:xfrm>
+            <a:off x="4294632" y="2157984"/>
+            <a:ext cx="3407664" cy="237744"/>
+          </a:xfrm>
+          <a:prstGeom prst="rect">
+            <a:avLst/>
+          </a:prstGeom>
+          <a:noFill/>
+          <a:ln>
+            <a:noFill/>
+          </a:ln>
+        </p:spPr>
+        <p:txBody>
+          <a:bodyPr wrap="square" lIns="0" rIns="0" tIns="0" bIns="0" anchor="t">
+            <a:spAutoFit/>
+          </a:bodyPr>
+          <a:lstStyle/>
+          <a:p>
+            <a:pPr algn="l"/>
+            <a:r>
+              <a:rPr sz="1500" b="1">
+                <a:solidFill>
+                  <a:srgbClr val="3B586E"/>
+                </a:solidFill>
+                <a:latin typeface="Apple SD Gothic Neo"/>
+              </a:rPr>
+              <a:t>RQ2. 남는 오류는 어떤 구조인가</a:t>
+            </a:r>
+          </a:p>
+        </p:txBody>
+      </p:sp>
+      <p:sp>
+        <p:nvSpPr>
+          <p:cNvPr id="16" name="TextBox 15"/>
+          <p:cNvSpPr txBox="1"/>
+          <p:nvPr/>
+        </p:nvSpPr>
+        <p:spPr>
+          <a:xfrm>
+            <a:off x="4294632" y="2542032"/>
+            <a:ext cx="3407664" cy="1152144"/>
+          </a:xfrm>
+          <a:prstGeom prst="rect">
+            <a:avLst/>
+          </a:prstGeom>
+          <a:noFill/>
+          <a:ln>
+            <a:noFill/>
+          </a:ln>
+        </p:spPr>
+        <p:txBody>
+          <a:bodyPr wrap="square" lIns="0" rIns="0" tIns="0" bIns="0" anchor="t">
+            <a:spAutoFit/>
+          </a:bodyPr>
+          <a:lstStyle/>
+          <a:p>
+            <a:pPr algn="l"/>
+            <a:r>
+              <a:rPr sz="1500" b="0">
+                <a:solidFill>
+                  <a:srgbClr val="363A48"/>
+                </a:solidFill>
+                <a:latin typeface="Apple SD Gothic Neo"/>
+              </a:rPr>
+              <a:t>단순 noise가 아니라 first-position bias와 format failure처럼 구조화됩니다. 그래서 abstain ensemble이 의미를 가집니다.</a:t>
+            </a:r>
+          </a:p>
+        </p:txBody>
+      </p:sp>
+      <p:sp>
+        <p:nvSpPr>
+          <p:cNvPr id="17" name="TextBox 16"/>
+          <p:cNvSpPr txBox="1"/>
+          <p:nvPr/>
+        </p:nvSpPr>
+        <p:spPr>
+          <a:xfrm>
+            <a:off x="7940040" y="2048256"/>
+            <a:ext cx="3553967" cy="1993392"/>
+          </a:xfrm>
+          <a:prstGeom prst="rect">
+            <a:avLst/>
+          </a:prstGeom>
+          <a:solidFill>
+            <a:srgbClr val="FFFFFF"/>
+          </a:solidFill>
+          <a:ln>
+            <a:solidFill>
+              <a:srgbClr val="DAD4CA"/>
+            </a:solidFill>
+          </a:ln>
+        </p:spPr>
+        <p:txBody>
+          <a:bodyPr wrap="square" lIns="109728" rIns="109728" tIns="109728" bIns="109728" anchor="t">
+            <a:spAutoFit/>
+          </a:bodyPr>
+          <a:lstStyle/>
+          <a:p>
+            <a:pPr algn="l"/>
+            <a:r>
+              <a:rPr sz="1700" b="0">
+                <a:solidFill>
+                  <a:srgbClr val="363A48"/>
+                </a:solidFill>
+                <a:latin typeface="Apple SD Gothic Neo"/>
+              </a:rPr>
+              <a:t/>
+            </a:r>
+          </a:p>
+        </p:txBody>
+      </p:sp>
+      <p:sp>
+        <p:nvSpPr>
+          <p:cNvPr id="18" name="TextBox 17"/>
+          <p:cNvSpPr txBox="1"/>
+          <p:nvPr/>
+        </p:nvSpPr>
+        <p:spPr>
+          <a:xfrm>
+            <a:off x="8013192" y="2157984"/>
+            <a:ext cx="3407664" cy="237744"/>
+          </a:xfrm>
+          <a:prstGeom prst="rect">
+            <a:avLst/>
+          </a:prstGeom>
+          <a:noFill/>
+          <a:ln>
+            <a:noFill/>
+          </a:ln>
+        </p:spPr>
+        <p:txBody>
+          <a:bodyPr wrap="square" lIns="0" rIns="0" tIns="0" bIns="0" anchor="t">
+            <a:spAutoFit/>
+          </a:bodyPr>
+          <a:lstStyle/>
+          <a:p>
+            <a:pPr algn="l"/>
+            <a:r>
+              <a:rPr sz="1500" b="1">
+                <a:solidFill>
+                  <a:srgbClr val="3B586E"/>
+                </a:solidFill>
+                <a:latin typeface="Apple SD Gothic Neo"/>
+              </a:rPr>
+              <a:t>RQ3. 그 결론은 남는가</a:t>
+            </a:r>
+          </a:p>
+        </p:txBody>
+      </p:sp>
+      <p:sp>
+        <p:nvSpPr>
+          <p:cNvPr id="19" name="TextBox 18"/>
+          <p:cNvSpPr txBox="1"/>
+          <p:nvPr/>
+        </p:nvSpPr>
+        <p:spPr>
+          <a:xfrm>
+            <a:off x="8013192" y="2542032"/>
+            <a:ext cx="3407664" cy="1152144"/>
+          </a:xfrm>
+          <a:prstGeom prst="rect">
+            <a:avLst/>
+          </a:prstGeom>
+          <a:noFill/>
+          <a:ln>
+            <a:noFill/>
+          </a:ln>
+        </p:spPr>
+        <p:txBody>
+          <a:bodyPr wrap="square" lIns="0" rIns="0" tIns="0" bIns="0" anchor="t">
+            <a:spAutoFit/>
+          </a:bodyPr>
+          <a:lstStyle/>
+          <a:p>
+            <a:pPr algn="l"/>
+            <a:r>
+              <a:rPr sz="1500" b="0">
+                <a:solidFill>
+                  <a:srgbClr val="363A48"/>
+                </a:solidFill>
+                <a:latin typeface="Apple SD Gothic Neo"/>
+              </a:rPr>
+              <a:t>부분적으로 예. InternLM20B·GPT-4o-mini·repeated hold-out이 broad claim을 지지하지만, 모든 open judge에 대한 보편 법칙은 아닙니다.</a:t>
+            </a:r>
+          </a:p>
+        </p:txBody>
+      </p:sp>
+      <p:sp>
+        <p:nvSpPr>
+          <p:cNvPr id="20" name="TextBox 19"/>
+          <p:cNvSpPr txBox="1"/>
+          <p:nvPr/>
+        </p:nvSpPr>
+        <p:spPr>
+          <a:xfrm>
+            <a:off x="502920" y="4407408"/>
+            <a:ext cx="11155680" cy="1225296"/>
+          </a:xfrm>
+          <a:prstGeom prst="rect">
+            <a:avLst/>
+          </a:prstGeom>
+          <a:solidFill>
+            <a:srgbClr val="FFFFFF"/>
+          </a:solidFill>
+          <a:ln>
+            <a:solidFill>
+              <a:srgbClr val="DAD4CA"/>
+            </a:solidFill>
+          </a:ln>
+        </p:spPr>
+        <p:txBody>
+          <a:bodyPr wrap="square" lIns="118872" rIns="118872" tIns="118872" bIns="118872" anchor="t">
+            <a:spAutoFit/>
+          </a:bodyPr>
+          <a:lstStyle/>
+          <a:p>
+            <a:pPr algn="l">
+              <a:lnSpc>
+                <a:spcPct val="112000"/>
+              </a:lnSpc>
+              <a:spcBef>
+                <a:spcPts val="0"/>
+              </a:spcBef>
+              <a:spcAft>
+                <a:spcPts val="800"/>
+              </a:spcAft>
+              <a:defRPr sz="1600">
+                <a:solidFill>
+                  <a:srgbClr val="363A48"/>
+                </a:solidFill>
+                <a:latin typeface="Apple SD Gothic Neo"/>
+              </a:defRPr>
+            </a:pPr>
+            <a:r>
+              <a:t>• RQ1, RQ2, RQ3를 다시 부르면 2부가 phase 나열이 아니라 하나의 argument로 닫힙니다.</a:t>
+            </a:r>
+          </a:p>
+        </p:txBody>
+      </p:sp>
+    </p:spTree>
+  </p:cSld>
+  <p:clrMapOvr>
+    <a:masterClrMapping/>
+  </p:clrMapOvr>
+</p:sld>
+</file>
+
+<file path=ppt/slides/slide19.xml><?xml version="1.0" encoding="utf-8"?>
+<p:sld xmlns:a="http://schemas.openxmlformats.org/drawingml/2006/main" xmlns:p="http://schemas.openxmlformats.org/presentationml/2006/main" xmlns:r="http://schemas.openxmlformats.org/officeDocument/2006/relationships">
+  <p:cSld>
+    <p:bg>
+      <p:bgPr>
+        <a:solidFill>
+          <a:srgbClr val="EFF4F6"/>
+        </a:solidFill>
+        <a:effectLst/>
+      </p:bgPr>
+    </p:bg>
+    <p:spTree>
+      <p:nvGrpSpPr>
+        <p:cNvPr id="1" name=""/>
+        <p:cNvGrpSpPr/>
+        <p:nvPr/>
+      </p:nvGrpSpPr>
+      <p:grpSpPr/>
+      <p:sp>
+        <p:nvSpPr>
+          <p:cNvPr id="2" name="Rectangle 1"/>
+          <p:cNvSpPr/>
+          <p:nvPr/>
+        </p:nvSpPr>
+        <p:spPr>
+          <a:xfrm>
+            <a:off x="329184" y="384048"/>
+            <a:ext cx="128016" cy="841248"/>
+          </a:xfrm>
+          <a:prstGeom prst="rect">
+            <a:avLst/>
+          </a:prstGeom>
+          <a:solidFill>
+            <a:srgbClr val="3B586E"/>
+          </a:solidFill>
+          <a:ln>
+            <a:noFill/>
+          </a:ln>
+        </p:spPr>
+        <p:style>
+          <a:lnRef idx="1">
+            <a:schemeClr val="accent1"/>
+          </a:lnRef>
+          <a:fillRef idx="3">
+            <a:schemeClr val="accent1"/>
+          </a:fillRef>
+          <a:effectRef idx="2">
+            <a:schemeClr val="accent1"/>
+          </a:effectRef>
+          <a:fontRef idx="minor">
+            <a:schemeClr val="lt1"/>
+          </a:fontRef>
+        </p:style>
+        <p:txBody>
+          <a:bodyPr rtlCol="0" anchor="ctr"/>
+          <a:lstStyle/>
+          <a:p>
+            <a:pPr algn="ctr"/>
+          </a:p>
+        </p:txBody>
+      </p:sp>
+      <p:sp>
+        <p:nvSpPr>
+          <p:cNvPr id="3" name="Rectangle 2"/>
+          <p:cNvSpPr/>
+          <p:nvPr/>
+        </p:nvSpPr>
+        <p:spPr>
+          <a:xfrm>
+            <a:off x="329184" y="182880"/>
+            <a:ext cx="11384280" cy="36576"/>
+          </a:xfrm>
+          <a:prstGeom prst="rect">
+            <a:avLst/>
+          </a:prstGeom>
+          <a:solidFill>
+            <a:srgbClr val="DAD4CA"/>
+          </a:solidFill>
+          <a:ln>
+            <a:noFill/>
+          </a:ln>
+        </p:spPr>
+        <p:style>
+          <a:lnRef idx="1">
+            <a:schemeClr val="accent1"/>
+          </a:lnRef>
+          <a:fillRef idx="3">
+            <a:schemeClr val="accent1"/>
+          </a:fillRef>
+          <a:effectRef idx="2">
+            <a:schemeClr val="accent1"/>
+          </a:effectRef>
+          <a:fontRef idx="minor">
+            <a:schemeClr val="lt1"/>
+          </a:fontRef>
+        </p:style>
+        <p:txBody>
+          <a:bodyPr rtlCol="0" anchor="ctr"/>
+          <a:lstStyle/>
+          <a:p>
+            <a:pPr algn="ctr"/>
+          </a:p>
+        </p:txBody>
+      </p:sp>
+      <p:sp>
+        <p:nvSpPr>
+          <p:cNvPr id="4" name="TextBox 3"/>
+          <p:cNvSpPr txBox="1"/>
+          <p:nvPr/>
+        </p:nvSpPr>
+        <p:spPr>
+          <a:xfrm>
+            <a:off x="621792" y="329184"/>
+            <a:ext cx="8595360" cy="530352"/>
+          </a:xfrm>
+          <a:prstGeom prst="rect">
+            <a:avLst/>
+          </a:prstGeom>
+          <a:noFill/>
+          <a:ln>
+            <a:noFill/>
+          </a:ln>
+        </p:spPr>
+        <p:txBody>
+          <a:bodyPr wrap="square" lIns="0" rIns="0" tIns="0" bIns="0" anchor="t">
+            <a:spAutoFit/>
+          </a:bodyPr>
+          <a:lstStyle/>
+          <a:p>
+            <a:pPr algn="l"/>
+            <a:r>
+              <a:rPr sz="2400" b="1">
+                <a:solidFill>
+                  <a:srgbClr val="282C3A"/>
+                </a:solidFill>
+                <a:latin typeface="Apple SD Gothic Neo"/>
+              </a:rPr>
+              <a:t>질문 전에: 저장소는 이렇게 읽으면 됩니다</a:t>
+            </a:r>
+          </a:p>
+        </p:txBody>
+      </p:sp>
+      <p:sp>
+        <p:nvSpPr>
+          <p:cNvPr id="5" name="TextBox 4"/>
+          <p:cNvSpPr txBox="1"/>
+          <p:nvPr/>
+        </p:nvSpPr>
+        <p:spPr>
+          <a:xfrm>
+            <a:off x="9601200" y="402336"/>
+            <a:ext cx="1417320" cy="201168"/>
+          </a:xfrm>
+          <a:prstGeom prst="rect">
+            <a:avLst/>
+          </a:prstGeom>
+          <a:solidFill>
+            <a:srgbClr val="E2EAEF"/>
+          </a:solidFill>
+          <a:ln>
+            <a:solidFill>
+              <a:srgbClr val="E2EAEF"/>
+            </a:solidFill>
+          </a:ln>
+        </p:spPr>
+        <p:txBody>
+          <a:bodyPr wrap="square" lIns="9144" rIns="9144" tIns="9144" bIns="9144" anchor="ctr">
+            <a:spAutoFit/>
+          </a:bodyPr>
+          <a:lstStyle/>
+          <a:p>
+            <a:pPr algn="ctr"/>
+            <a:r>
+              <a:rPr sz="1000" b="1">
+                <a:solidFill>
+                  <a:srgbClr val="282C3A"/>
+                </a:solidFill>
+                <a:latin typeface="Apple SD Gothic Neo"/>
+              </a:rPr>
+              <a:t>내 연구</a:t>
+            </a:r>
+          </a:p>
+        </p:txBody>
+      </p:sp>
+      <p:sp>
+        <p:nvSpPr>
+          <p:cNvPr id="6" name="TextBox 5"/>
+          <p:cNvSpPr txBox="1"/>
+          <p:nvPr/>
+        </p:nvSpPr>
+        <p:spPr>
+          <a:xfrm>
+            <a:off x="11064240" y="420624"/>
+            <a:ext cx="685800" cy="164592"/>
+          </a:xfrm>
+          <a:prstGeom prst="rect">
+            <a:avLst/>
+          </a:prstGeom>
+          <a:noFill/>
+          <a:ln>
+            <a:noFill/>
+          </a:ln>
+        </p:spPr>
+        <p:txBody>
+          <a:bodyPr wrap="square" lIns="0" rIns="0" tIns="0" bIns="0" anchor="ctr">
+            <a:spAutoFit/>
+          </a:bodyPr>
+          <a:lstStyle/>
+          <a:p>
+            <a:pPr algn="r"/>
+            <a:r>
+              <a:rPr sz="1000" b="1">
+                <a:solidFill>
+                  <a:srgbClr val="70767D"/>
+                </a:solidFill>
+                <a:latin typeface="Apple SD Gothic Neo"/>
+              </a:rPr>
+              <a:t>19/19</a:t>
             </a:r>
           </a:p>
         </p:txBody>
@@ -14477,7 +15861,7 @@
                 </a:solidFill>
                 <a:latin typeface="Apple SD Gothic Neo"/>
               </a:rPr>
-              <a:t>2/18</a:t>
+              <a:t>2/19</a:t>
             </a:r>
           </a:p>
         </p:txBody>
@@ -14996,7 +16380,7 @@
                 </a:solidFill>
                 <a:latin typeface="Apple SD Gothic Neo"/>
               </a:rPr>
-              <a:t>same-family scaling, cross-family sanity, repeated hold-out을 순서대로 보며 어디까지 믿을 수 있는지 정리합니다.</a:t>
+              <a:t>judge scaling, cross-family sanity, repeated hold-out을 순서대로 보며 어디까지 믿을 수 있는지 정리합니다.</a:t>
             </a:r>
           </a:p>
         </p:txBody>
@@ -15226,7 +16610,7 @@
                 </a:solidFill>
                 <a:latin typeface="Apple SD Gothic Neo"/>
               </a:rPr>
-              <a:t>3/18</a:t>
+              <a:t>3/19</a:t>
             </a:r>
           </a:p>
         </p:txBody>
@@ -15841,7 +17225,7 @@
                 </a:solidFill>
                 <a:latin typeface="Apple SD Gothic Neo"/>
               </a:rPr>
-              <a:t>4/18</a:t>
+              <a:t>4/19</a:t>
             </a:r>
           </a:p>
         </p:txBody>
@@ -17052,7 +18436,7 @@
                 </a:solidFill>
                 <a:latin typeface="Apple SD Gothic Neo"/>
               </a:rPr>
-              <a:t>5/18</a:t>
+              <a:t>5/19</a:t>
             </a:r>
           </a:p>
         </p:txBody>
@@ -17853,7 +19237,7 @@
                 </a:solidFill>
                 <a:latin typeface="Apple SD Gothic Neo"/>
               </a:rPr>
-              <a:t>6/18</a:t>
+              <a:t>6/19</a:t>
             </a:r>
           </a:p>
         </p:txBody>
@@ -18816,7 +20200,7 @@
                 </a:solidFill>
                 <a:latin typeface="Apple SD Gothic Neo"/>
               </a:rPr>
-              <a:t>7/18</a:t>
+              <a:t>7/19</a:t>
             </a:r>
           </a:p>
         </p:txBody>
@@ -19431,7 +20815,7 @@
                 </a:solidFill>
                 <a:latin typeface="Apple SD Gothic Neo"/>
               </a:rPr>
-              <a:t>8/18</a:t>
+              <a:t>8/19</a:t>
             </a:r>
           </a:p>
         </p:txBody>
@@ -20170,7 +21554,7 @@
                 </a:solidFill>
                 <a:latin typeface="Apple SD Gothic Neo"/>
               </a:rPr>
-              <a:t>9/18</a:t>
+              <a:t>9/19</a:t>
             </a:r>
           </a:p>
         </p:txBody>

--- a/presentation/mt_bench_paper_study.pptx
+++ b/presentation/mt_bench_paper_study.pptx
@@ -24,6 +24,7 @@
     <p:sldId id="272" r:id="rId24"/>
     <p:sldId id="273" r:id="rId25"/>
     <p:sldId id="274" r:id="rId26"/>
+    <p:sldId id="275" r:id="rId27"/>
   </p:sldIdLst>
   <p:sldSz cx="12191695" cy="6858000" type="screen4x3"/>
   <p:notesSz cx="6858000" cy="9144000"/>
@@ -738,13 +739,13 @@
           </a:p>
           <a:p>
             <a:r>
-              <a:t>뒤 절반 전체를 묶는 세 연구 질문을 정리하는 슬라이드입니다.</a:t>
+              <a:t>뒤 절반 전체를 묶는 네 연구 질문을 정리하는 슬라이드입니다.</a:t>
             </a:r>
           </a:p>
           <a:p/>
           <a:p>
             <a:r>
-              <a:t>뒤 절반을 들을 때는 세 질문만 기억하면 됩니다.</a:t>
+              <a:t>뒤 절반을 들을 때는 네 질문만 기억하면 됩니다.</a:t>
             </a:r>
           </a:p>
           <a:p>
@@ -759,7 +760,12 @@
           </a:p>
           <a:p>
             <a:r>
-              <a:t>그리고 그 결론이 cross-family와 hold-out까지 가도 남는가.</a:t>
+              <a:t>작은 judge들을 합칠 때 어떤 집계 규칙이 더 나은가.</a:t>
+            </a:r>
+          </a:p>
+          <a:p>
+            <a:r>
+              <a:t>마지막으로 문항 수를 줄여도 서열이 남는가.</a:t>
             </a:r>
           </a:p>
           <a:p/>
@@ -862,6 +868,11 @@
           </a:p>
           <a:p>
             <a:r>
+              <a:t>이 P3 결과 위에서 RQ3인 ensemble design도 평가합니다.</a:t>
+            </a:r>
+          </a:p>
+          <a:p>
+            <a:r>
               <a:t>P4와 P5는 그 메인 결과를 보조 검증하는 단계입니다.</a:t>
             </a:r>
           </a:p>
@@ -1449,54 +1460,54 @@
           <a:lstStyle/>
           <a:p>
             <a:r>
-              <a:t>이제 RQ3를 한 장에서 정리합니다.</a:t>
-            </a:r>
-          </a:p>
-          <a:p>
-            <a:r>
-              <a:t>Claude 피드백을 반영해서 InternLM, GPT-4o-mini, hold-out을 하나의 arc로 묶었습니다.</a:t>
+              <a:t>이제 RQ4로 넘어갑니다.</a:t>
+            </a:r>
+          </a:p>
+          <a:p>
+            <a:r>
+              <a:t>여기서는 먼저 same-set 결과만 따로 보겠습니다.</a:t>
             </a:r>
           </a:p>
           <a:p/>
           <a:p>
             <a:r>
-              <a:t>첫 번째 포인트는 cross-family sanity입니다.</a:t>
-            </a:r>
-          </a:p>
-          <a:p>
-            <a:r>
-              <a:t>InternLM20B는 Qwen32와 broad ranking을 꽤 잘 맞추지만 더 noisy합니다.</a:t>
-            </a:r>
-          </a:p>
-          <a:p>
-            <a:r>
-              <a:t>두 번째 포인트는 strongest external anchor입니다.</a:t>
-            </a:r>
-          </a:p>
-          <a:p>
-            <a:r>
-              <a:t>GPT-4o-mini는 Qwen32와 가장 잘 맞는 외부 judge입니다.</a:t>
-            </a:r>
-          </a:p>
-          <a:p>
-            <a:r>
-              <a:t>세 번째 포인트는 question reduction의 hold-out 현실입니다.</a:t>
-            </a:r>
-          </a:p>
-          <a:p>
-            <a:r>
-              <a:t>repeated hold-out 기준으로는 60문항이 가장 안전한 운영점입니다.</a:t>
+              <a:t>TopDisc-40은 동일 7개 모델 집합에서는 ρ=1.000입니다.</a:t>
+            </a:r>
+          </a:p>
+          <a:p>
+            <a:r>
+              <a:t>그래서 얼핏 보면 80문항을 바로 40문항으로 줄여도 되는 것처럼 보입니다.</a:t>
+            </a:r>
+          </a:p>
+          <a:p>
+            <a:r>
+              <a:t>하지만 바로 옆 random sensitivity를 보면 질문 수가 줄어들수록 분산이 커지고,</a:t>
+            </a:r>
+          </a:p>
+          <a:p>
+            <a:r>
+              <a:t>mean과 worst-case가 다르다는 점이 드러납니다.</a:t>
             </a:r>
           </a:p>
           <a:p/>
           <a:p>
             <a:r>
-              <a:t>즉 RQ3는 완전한 yes가 아니라 partial yes라고 답해야 정직합니다.</a:t>
-            </a:r>
-          </a:p>
-          <a:p>
-            <a:r>
-              <a:t>큰 흐름은 남지만, judge 품질과 question-level cleanliness는 서로 다릅니다.</a:t>
+              <a:t>그래서 이 슬라이드는 일부러 strong same-set result를 보여주되,</a:t>
+            </a:r>
+          </a:p>
+          <a:p>
+            <a:r>
+              <a:t>동시에 이것이 upper bound라는 점을 같이 말하는 슬라이드입니다.</a:t>
+            </a:r>
+          </a:p>
+          <a:p>
+            <a:r>
+              <a:t>즉 같은 모델셋 안에서는 40문항이 매우 강하지만,</a:t>
+            </a:r>
+          </a:p>
+          <a:p>
+            <a:r>
+              <a:t>실제 운영점은 다음 슬라이드의 hold-out까지 보고 정해야 합니다.</a:t>
             </a:r>
           </a:p>
         </p:txBody>
@@ -1566,65 +1577,60 @@
           <a:lstStyle/>
           <a:p>
             <a:r>
-              <a:t>이 슬라이드는 2부 전체를 닫아 주는 슬라이드입니다.</a:t>
-            </a:r>
-          </a:p>
-          <a:p>
-            <a:r>
-              <a:t>Claude가 지적한 것처럼 2부가 phase 보고의 나열로 끝나면 연구 질문이 희미해집니다.</a:t>
-            </a:r>
-          </a:p>
-          <a:p>
-            <a:r>
-              <a:t>그래서 처음 던진 RQ1, RQ2, RQ3를 다시 불러와 답하는 방식으로 마무리합니다.</a:t>
+              <a:t>이 슬라이드는 RQ4를 보수적으로 닫기 위한 두 번째 슬라이드입니다.</a:t>
             </a:r>
           </a:p>
           <a:p/>
           <a:p>
             <a:r>
-              <a:t>RQ1에 대한 답은 가장 명확합니다.</a:t>
-            </a:r>
-          </a:p>
-          <a:p>
-            <a:r>
-              <a:t>Qwen judge scaling 결과에서는 reliability 개선이 분명히 관찰됐습니다.</a:t>
-            </a:r>
-          </a:p>
-          <a:p>
-            <a:r>
-              <a:t>RQ2에 대한 답도 선명합니다.</a:t>
-            </a:r>
-          </a:p>
-          <a:p>
-            <a:r>
-              <a:t>남는 오류는 단순 noise가 아니라 구조화된 bias와 format failure입니다.</a:t>
+              <a:t>첫 번째 축은 judge family입니다.</a:t>
+            </a:r>
+          </a:p>
+          <a:p>
+            <a:r>
+              <a:t>InternLM20B와 GPT-4o-mini가 Qwen32와 broad ranking을 꽤 잘 맞춘다는 점은,</a:t>
+            </a:r>
+          </a:p>
+          <a:p>
+            <a:r>
+              <a:t>Qwen 결과가 완전히 특이한 artifact는 아니라는 근거를 줍니다.</a:t>
+            </a:r>
+          </a:p>
+          <a:p>
+            <a:r>
+              <a:t>하지만 pairwise exact agreement는 여전히 낮기 때문에,</a:t>
+            </a:r>
+          </a:p>
+          <a:p>
+            <a:r>
+              <a:t>질문 수준의 cleanliness까지 같다고 말하면 안 됩니다.</a:t>
             </a:r>
           </a:p>
           <a:p/>
           <a:p>
             <a:r>
-              <a:t>RQ3는 부분적으로만 예라고 답해야 정직합니다.</a:t>
-            </a:r>
-          </a:p>
-          <a:p>
-            <a:r>
-              <a:t>InternLM20B, GPT-4o-mini, repeated hold-out이 broad claim을 지지하지만,</a:t>
-            </a:r>
-          </a:p>
-          <a:p>
-            <a:r>
-              <a:t>이걸 모든 open judge에 대한 보편 법칙처럼 말하면 과합니다.</a:t>
+              <a:t>두 번째 축은 hold-out입니다.</a:t>
+            </a:r>
+          </a:p>
+          <a:p>
+            <a:r>
+              <a:t>330개 split 반복 검증을 보면 40문항도 평균적으로 강하지만,</a:t>
+            </a:r>
+          </a:p>
+          <a:p>
+            <a:r>
+              <a:t>세 judge 모두에서 가장 안전한 운영점은 60문항 쪽입니다.</a:t>
             </a:r>
           </a:p>
           <a:p/>
           <a:p>
             <a:r>
-              <a:t>이 슬라이드가 들어가면 2부가 phase 보고가 아니라</a:t>
-            </a:r>
-          </a:p>
-          <a:p>
-            <a:r>
-              <a:t>세 개의 연구 질문에 대한 실험적 답변으로 닫히게 됩니다.</a:t>
+              <a:t>그래서 발표에서는 40문항을 headline으로 과장하지 않고,</a:t>
+            </a:r>
+          </a:p>
+          <a:p>
+            <a:r>
+              <a:t>same-set upper bound와 repeated hold-out safe zone을 분리해서 말하는 것이 핵심입니다.</a:t>
             </a:r>
           </a:p>
         </p:txBody>
@@ -1694,44 +1700,71 @@
           <a:lstStyle/>
           <a:p>
             <a:r>
-              <a:t>마지막 슬라이드는 발표를 마무리하면서 동시에 repo 안내를 하는 슬라이드입니다.</a:t>
-            </a:r>
-          </a:p>
-          <a:p>
-            <a:r>
-              <a:t>교수님이 발표 후 저장소를 실제로 보신다면 어디부터 보면 되는지를 남기는 역할도 합니다.</a:t>
+              <a:t>이 슬라이드는 2부 전체를 닫아 주는 슬라이드입니다.</a:t>
+            </a:r>
+          </a:p>
+          <a:p>
+            <a:r>
+              <a:t>2부가 phase 보고의 나열로 끝나면 연구 질문이 희미해집니다.</a:t>
+            </a:r>
+          </a:p>
+          <a:p>
+            <a:r>
+              <a:t>그래서 처음 던진 RQ1부터 RQ4까지를 다시 불러와 답하는 방식으로 마무리합니다.</a:t>
             </a:r>
           </a:p>
           <a:p/>
           <a:p>
             <a:r>
-              <a:t>오늘 발표는 paper study였기 때문에, 발표가 끝나면 질문이 두 방향으로 나올 겁니다.</a:t>
-            </a:r>
-          </a:p>
-          <a:p>
-            <a:r>
-              <a:t>원 논문 자체에 대한 질문과, 제 재현 실험에 대한 질문입니다.</a:t>
-            </a:r>
-          </a:p>
-          <a:p>
-            <a:r>
-              <a:t>전자는 presentation과 paper를 보면 되고,</a:t>
-            </a:r>
-          </a:p>
-          <a:p>
-            <a:r>
-              <a:t>후자는 README, figures, data를 따라가면 됩니다.</a:t>
-            </a:r>
-          </a:p>
-          <a:p>
-            <a:r>
-              <a:t>특히 저장소는 phase 순서로 읽으면 오늘 발표의 2부와 같은 흐름이 다시 재생됩니다.</a:t>
+              <a:t>RQ1에 대한 답은 가장 명확합니다.</a:t>
+            </a:r>
+          </a:p>
+          <a:p>
+            <a:r>
+              <a:t>Qwen judge scaling 결과에서는 reliability 개선이 분명히 관찰됐습니다.</a:t>
+            </a:r>
+          </a:p>
+          <a:p>
+            <a:r>
+              <a:t>RQ2에 대한 답도 선명합니다.</a:t>
+            </a:r>
+          </a:p>
+          <a:p>
+            <a:r>
+              <a:t>남는 오류는 단순 noise가 아니라 순서 민감성과 format failure입니다.</a:t>
             </a:r>
           </a:p>
           <a:p/>
           <a:p>
             <a:r>
-              <a:t>이상으로 발표를 마치고 질문 받겠습니다.</a:t>
+              <a:t>RQ3는 decision rule 문제였습니다.</a:t>
+            </a:r>
+          </a:p>
+          <a:p>
+            <a:r>
+              <a:t>작은 judge를 그냥 다수결로 세면 안 되고, low-confidence vote를 기권으로 다뤄야 한다는 점이 드러났습니다.</a:t>
+            </a:r>
+          </a:p>
+          <a:p/>
+          <a:p>
+            <a:r>
+              <a:t>RQ4는 부분적으로만 예라고 답해야 정직합니다.</a:t>
+            </a:r>
+          </a:p>
+          <a:p>
+            <a:r>
+              <a:t>40문항 headline만 남기면 과하고, same-set upper bound와 hold-out safe zone을 같이 말해야 합니다.</a:t>
+            </a:r>
+          </a:p>
+          <a:p/>
+          <a:p>
+            <a:r>
+              <a:t>이 슬라이드가 들어가면 2부가 phase 보고가 아니라</a:t>
+            </a:r>
+          </a:p>
+          <a:p>
+            <a:r>
+              <a:t>네 개의 연구 질문에 대한 실험적 답변으로 닫히게 됩니다.</a:t>
             </a:r>
           </a:p>
         </p:txBody>
@@ -1849,6 +1882,113 @@
           <a:p>
             <a:r>
               <a:t>그리고 오픈소스 judge를 실제로 어디까지 믿어도 되는가.</a:t>
+            </a:r>
+          </a:p>
+        </p:txBody>
+      </p:sp>
+      <p:sp>
+        <p:nvSpPr>
+          <p:cNvPr id="4" name="Slide Number Placeholder 3"/>
+          <p:cNvSpPr>
+            <a:spLocks noGrp="1"/>
+          </p:cNvSpPr>
+          <p:nvPr>
+            <p:ph type="sldNum" idx="5" sz="quarter"/>
+          </p:nvPr>
+        </p:nvSpPr>
+        <p:spPr/>
+      </p:sp>
+    </p:spTree>
+  </p:cSld>
+  <p:clrMapOvr>
+    <a:masterClrMapping/>
+  </p:clrMapOvr>
+</p:notes>
+</file>
+
+<file path=ppt/notesSlides/notesSlide20.xml><?xml version="1.0" encoding="utf-8"?>
+<p:notes xmlns:a="http://schemas.openxmlformats.org/drawingml/2006/main" xmlns:p="http://schemas.openxmlformats.org/presentationml/2006/main" xmlns:r="http://schemas.openxmlformats.org/officeDocument/2006/relationships">
+  <p:cSld>
+    <p:spTree>
+      <p:nvGrpSpPr>
+        <p:cNvPr id="1" name=""/>
+        <p:cNvGrpSpPr/>
+        <p:nvPr/>
+      </p:nvGrpSpPr>
+      <p:grpSpPr>
+        <a:xfrm>
+          <a:off x="0" y="0"/>
+          <a:ext cx="0" cy="0"/>
+          <a:chOff x="0" y="0"/>
+          <a:chExt cx="0" cy="0"/>
+        </a:xfrm>
+      </p:grpSpPr>
+      <p:sp>
+        <p:nvSpPr>
+          <p:cNvPr id="2" name="Slide Image Placeholder 1"/>
+          <p:cNvSpPr>
+            <a:spLocks noGrp="1"/>
+          </p:cNvSpPr>
+          <p:nvPr>
+            <p:ph type="sldImg" idx="2"/>
+          </p:nvPr>
+        </p:nvSpPr>
+        <p:spPr/>
+      </p:sp>
+      <p:sp>
+        <p:nvSpPr>
+          <p:cNvPr id="3" name="Notes Placeholder 2"/>
+          <p:cNvSpPr>
+            <a:spLocks noGrp="1"/>
+          </p:cNvSpPr>
+          <p:nvPr>
+            <p:ph type="body" idx="3" sz="quarter"/>
+          </p:nvPr>
+        </p:nvSpPr>
+        <p:spPr/>
+        <p:txBody>
+          <a:bodyPr/>
+          <a:lstStyle/>
+          <a:p>
+            <a:r>
+              <a:t>마지막 슬라이드는 발표를 마무리하면서 동시에 repo 안내를 하는 슬라이드입니다.</a:t>
+            </a:r>
+          </a:p>
+          <a:p>
+            <a:r>
+              <a:t>교수님이 발표 후 저장소를 실제로 보신다면 어디부터 보면 되는지를 남기는 역할도 합니다.</a:t>
+            </a:r>
+          </a:p>
+          <a:p/>
+          <a:p>
+            <a:r>
+              <a:t>오늘 발표는 paper study였기 때문에, 발표가 끝나면 질문이 두 방향으로 나올 겁니다.</a:t>
+            </a:r>
+          </a:p>
+          <a:p>
+            <a:r>
+              <a:t>원 논문 자체에 대한 질문과, 제 재현 실험에 대한 질문입니다.</a:t>
+            </a:r>
+          </a:p>
+          <a:p>
+            <a:r>
+              <a:t>전자는 presentation과 paper를 보면 되고,</a:t>
+            </a:r>
+          </a:p>
+          <a:p>
+            <a:r>
+              <a:t>후자는 README, figures, data를 따라가면 됩니다.</a:t>
+            </a:r>
+          </a:p>
+          <a:p>
+            <a:r>
+              <a:t>특히 저장소는 phase 순서로 읽으면 오늘 발표의 2부와 같은 흐름이 다시 재생됩니다.</a:t>
+            </a:r>
+          </a:p>
+          <a:p/>
+          <a:p>
+            <a:r>
+              <a:t>이상으로 발표를 마치고 질문 받겠습니다.</a:t>
             </a:r>
           </a:p>
         </p:txBody>
@@ -6607,7 +6747,7 @@
                 </a:solidFill>
                 <a:latin typeface="Apple SD Gothic Neo"/>
               </a:rPr>
-              <a:t>10/19</a:t>
+              <a:t>10/20</a:t>
             </a:r>
           </a:p>
         </p:txBody>
@@ -6757,7 +6897,7 @@
                 </a:solidFill>
                 <a:latin typeface="Apple SD Gothic Neo"/>
               </a:rPr>
-              <a:t>2-1. 내가 실제로 검증한 세 연구 질문</a:t>
+              <a:t>2-1. 내가 실제로 검증한 네 연구 질문</a:t>
             </a:r>
           </a:p>
         </p:txBody>
@@ -6837,7 +6977,7 @@
                 </a:solidFill>
                 <a:latin typeface="Apple SD Gothic Neo"/>
               </a:rPr>
-              <a:t>11/19</a:t>
+              <a:t>11/20</a:t>
             </a:r>
           </a:p>
         </p:txBody>
@@ -6960,7 +7100,7 @@
                 </a:solidFill>
                 <a:latin typeface="Apple SD Gothic Neo"/>
               </a:rPr>
-              <a:t>이 슬라이드의 목적: 뒤 절반의 랩미팅을 연구 질문 단위로 묶어 놓고 듣게 한다.</a:t>
+              <a:t>이 슬라이드의 목적: 뒤 절반의 내 연구 파트를 연구 질문 단위로 묶어 놓고 듣게 한다.</a:t>
             </a:r>
           </a:p>
         </p:txBody>
@@ -7002,7 +7142,7 @@
                 </a:solidFill>
                 <a:latin typeface="Apple SD Gothic Neo"/>
               </a:rPr>
-              <a:t>이 뒤 절반은 구현 목록이 아니라 세 개의 연구 질문으로 듣는 것이 가장 좋습니다.</a:t>
+              <a:t>이 뒤 절반은 phase 로그가 아니라 네 개의 연구 질문을 차례로 답하는 발표로 듣는 것이 가장 좋습니다.</a:t>
             </a:r>
           </a:p>
         </p:txBody>
@@ -7016,7 +7156,7 @@
         <p:spPr>
           <a:xfrm>
             <a:off x="502920" y="2048256"/>
-            <a:ext cx="3553967" cy="1993392"/>
+            <a:ext cx="5449824" cy="1444752"/>
           </a:xfrm>
           <a:prstGeom prst="rect">
             <a:avLst/>
@@ -7057,8 +7197,8 @@
         </p:nvSpPr>
         <p:spPr>
           <a:xfrm>
-            <a:off x="576072" y="2157984"/>
-            <a:ext cx="3407664" cy="237744"/>
+            <a:off x="594360" y="2157984"/>
+            <a:ext cx="5266944" cy="201168"/>
           </a:xfrm>
           <a:prstGeom prst="rect">
             <a:avLst/>
@@ -7095,8 +7235,8 @@
         </p:nvSpPr>
         <p:spPr>
           <a:xfrm>
-            <a:off x="576072" y="2542032"/>
-            <a:ext cx="3407664" cy="1152144"/>
+            <a:off x="594360" y="2450592"/>
+            <a:ext cx="5266944" cy="804672"/>
           </a:xfrm>
           <a:prstGeom prst="rect">
             <a:avLst/>
@@ -7114,7 +7254,7 @@
           <a:p>
             <a:pPr algn="l"/>
             <a:r>
-              <a:rPr sz="1500" b="0">
+              <a:rPr sz="1350" b="0">
                 <a:solidFill>
                   <a:srgbClr val="363A48"/>
                 </a:solidFill>
@@ -7133,8 +7273,8 @@
         </p:nvSpPr>
         <p:spPr>
           <a:xfrm>
-            <a:off x="4221480" y="2048256"/>
-            <a:ext cx="3553967" cy="1993392"/>
+            <a:off x="6208776" y="2048256"/>
+            <a:ext cx="5449824" cy="1444752"/>
           </a:xfrm>
           <a:prstGeom prst="rect">
             <a:avLst/>
@@ -7175,8 +7315,8 @@
         </p:nvSpPr>
         <p:spPr>
           <a:xfrm>
-            <a:off x="4294632" y="2157984"/>
-            <a:ext cx="3407664" cy="237744"/>
+            <a:off x="6300216" y="2157984"/>
+            <a:ext cx="5266944" cy="201168"/>
           </a:xfrm>
           <a:prstGeom prst="rect">
             <a:avLst/>
@@ -7213,8 +7353,8 @@
         </p:nvSpPr>
         <p:spPr>
           <a:xfrm>
-            <a:off x="4294632" y="2542032"/>
-            <a:ext cx="3407664" cy="1152144"/>
+            <a:off x="6300216" y="2450592"/>
+            <a:ext cx="5266944" cy="804672"/>
           </a:xfrm>
           <a:prstGeom prst="rect">
             <a:avLst/>
@@ -7232,13 +7372,13 @@
           <a:p>
             <a:pPr algn="l"/>
             <a:r>
-              <a:rPr sz="1500" b="0">
+              <a:rPr sz="1350" b="0">
                 <a:solidFill>
                   <a:srgbClr val="363A48"/>
                 </a:solidFill>
                 <a:latin typeface="Apple SD Gothic Neo"/>
               </a:rPr>
-              <a:t>좋아진 뒤 남는 오류는 단순 noise인가, 아니면 position bias나 format failure처럼 구조화되는가?</a:t>
+              <a:t>judge가 좋아진 뒤에도 남는 오류는 단순 noise인가, 아니면 순서 민감성과 format failure처럼 구조화되는가?</a:t>
             </a:r>
           </a:p>
         </p:txBody>
@@ -7251,8 +7391,8 @@
         </p:nvSpPr>
         <p:spPr>
           <a:xfrm>
-            <a:off x="7940040" y="2048256"/>
-            <a:ext cx="3553967" cy="1993392"/>
+            <a:off x="502920" y="3675888"/>
+            <a:ext cx="5449824" cy="1444752"/>
           </a:xfrm>
           <a:prstGeom prst="rect">
             <a:avLst/>
@@ -7293,8 +7433,8 @@
         </p:nvSpPr>
         <p:spPr>
           <a:xfrm>
-            <a:off x="8013192" y="2157984"/>
-            <a:ext cx="3407664" cy="237744"/>
+            <a:off x="594360" y="3785616"/>
+            <a:ext cx="5266944" cy="201168"/>
           </a:xfrm>
           <a:prstGeom prst="rect">
             <a:avLst/>
@@ -7318,7 +7458,7 @@
                 </a:solidFill>
                 <a:latin typeface="Apple SD Gothic Neo"/>
               </a:rPr>
-              <a:t>RQ3. validation</a:t>
+              <a:t>RQ3. ensemble design</a:t>
             </a:r>
           </a:p>
         </p:txBody>
@@ -7331,8 +7471,8 @@
         </p:nvSpPr>
         <p:spPr>
           <a:xfrm>
-            <a:off x="8013192" y="2542032"/>
-            <a:ext cx="3407664" cy="1152144"/>
+            <a:off x="594360" y="4078224"/>
+            <a:ext cx="5266944" cy="804672"/>
           </a:xfrm>
           <a:prstGeom prst="rect">
             <a:avLst/>
@@ -7350,13 +7490,13 @@
           <a:p>
             <a:pPr algn="l"/>
             <a:r>
-              <a:rPr sz="1500" b="0">
+              <a:rPr sz="1350" b="0">
                 <a:solidFill>
                   <a:srgbClr val="363A48"/>
                 </a:solidFill>
                 <a:latin typeface="Apple SD Gothic Neo"/>
               </a:rPr>
-              <a:t>InternLM, GPT-4o-mini, repeated hold-out까지 붙여도 같은 결론이 남는가?</a:t>
+              <a:t>작은 judge 여러 개를 합칠 때, 다수결보다 더 나은 decision rule이 실제로 존재하는가?</a:t>
             </a:r>
           </a:p>
         </p:txBody>
@@ -7369,8 +7509,126 @@
         </p:nvSpPr>
         <p:spPr>
           <a:xfrm>
-            <a:off x="502920" y="4407408"/>
-            <a:ext cx="11155680" cy="1225296"/>
+            <a:off x="6208776" y="3675888"/>
+            <a:ext cx="5449824" cy="1444752"/>
+          </a:xfrm>
+          <a:prstGeom prst="rect">
+            <a:avLst/>
+          </a:prstGeom>
+          <a:solidFill>
+            <a:srgbClr val="FFFFFF"/>
+          </a:solidFill>
+          <a:ln>
+            <a:solidFill>
+              <a:srgbClr val="DAD4CA"/>
+            </a:solidFill>
+          </a:ln>
+        </p:spPr>
+        <p:txBody>
+          <a:bodyPr wrap="square" lIns="109728" rIns="109728" tIns="109728" bIns="109728" anchor="t">
+            <a:spAutoFit/>
+          </a:bodyPr>
+          <a:lstStyle/>
+          <a:p>
+            <a:pPr algn="l"/>
+            <a:r>
+              <a:rPr sz="1700" b="0">
+                <a:solidFill>
+                  <a:srgbClr val="363A48"/>
+                </a:solidFill>
+                <a:latin typeface="Apple SD Gothic Neo"/>
+              </a:rPr>
+              <a:t/>
+            </a:r>
+          </a:p>
+        </p:txBody>
+      </p:sp>
+      <p:sp>
+        <p:nvSpPr>
+          <p:cNvPr id="21" name="TextBox 20"/>
+          <p:cNvSpPr txBox="1"/>
+          <p:nvPr/>
+        </p:nvSpPr>
+        <p:spPr>
+          <a:xfrm>
+            <a:off x="6300216" y="3785616"/>
+            <a:ext cx="5266944" cy="201168"/>
+          </a:xfrm>
+          <a:prstGeom prst="rect">
+            <a:avLst/>
+          </a:prstGeom>
+          <a:noFill/>
+          <a:ln>
+            <a:noFill/>
+          </a:ln>
+        </p:spPr>
+        <p:txBody>
+          <a:bodyPr wrap="square" lIns="0" rIns="0" tIns="0" bIns="0" anchor="t">
+            <a:spAutoFit/>
+          </a:bodyPr>
+          <a:lstStyle/>
+          <a:p>
+            <a:pPr algn="l"/>
+            <a:r>
+              <a:rPr sz="1500" b="1">
+                <a:solidFill>
+                  <a:srgbClr val="3B586E"/>
+                </a:solidFill>
+                <a:latin typeface="Apple SD Gothic Neo"/>
+              </a:rPr>
+              <a:t>RQ4. question reduction</a:t>
+            </a:r>
+          </a:p>
+        </p:txBody>
+      </p:sp>
+      <p:sp>
+        <p:nvSpPr>
+          <p:cNvPr id="22" name="TextBox 21"/>
+          <p:cNvSpPr txBox="1"/>
+          <p:nvPr/>
+        </p:nvSpPr>
+        <p:spPr>
+          <a:xfrm>
+            <a:off x="6300216" y="4078224"/>
+            <a:ext cx="5266944" cy="804672"/>
+          </a:xfrm>
+          <a:prstGeom prst="rect">
+            <a:avLst/>
+          </a:prstGeom>
+          <a:noFill/>
+          <a:ln>
+            <a:noFill/>
+          </a:ln>
+        </p:spPr>
+        <p:txBody>
+          <a:bodyPr wrap="square" lIns="0" rIns="0" tIns="0" bIns="0" anchor="t">
+            <a:spAutoFit/>
+          </a:bodyPr>
+          <a:lstStyle/>
+          <a:p>
+            <a:pPr algn="l"/>
+            <a:r>
+              <a:rPr sz="1350" b="0">
+                <a:solidFill>
+                  <a:srgbClr val="363A48"/>
+                </a:solidFill>
+                <a:latin typeface="Apple SD Gothic Neo"/>
+              </a:rPr>
+              <a:t>변별도 기반 subset으로 비용을 줄이면서도 모델 서열을 보존할 수 있는가?</a:t>
+            </a:r>
+          </a:p>
+        </p:txBody>
+      </p:sp>
+      <p:sp>
+        <p:nvSpPr>
+          <p:cNvPr id="23" name="TextBox 22"/>
+          <p:cNvSpPr txBox="1"/>
+          <p:nvPr/>
+        </p:nvSpPr>
+        <p:spPr>
+          <a:xfrm>
+            <a:off x="502920" y="5285232"/>
+            <a:ext cx="11155680" cy="749808"/>
           </a:xfrm>
           <a:prstGeom prst="rect">
             <a:avLst/>
@@ -7400,7 +7658,7 @@
               <a:spcAft>
                 <a:spcPts val="800"/>
               </a:spcAft>
-              <a:defRPr sz="1600">
+              <a:defRPr sz="1500">
                 <a:solidFill>
                   <a:srgbClr val="363A48"/>
                 </a:solidFill>
@@ -7408,7 +7666,7 @@
               </a:defRPr>
             </a:pPr>
             <a:r>
-              <a:t>• 이 뒤 절반은 구현 목록보다 세 개의 연구 질문으로 들으면 가장 잘 들어온다.</a:t>
+              <a:t>• 즉 뒤 절반은 phase log가 아니라 RQ1부터 RQ4까지의 답을 찾아가는 흐름으로 들으면 가장 자연스럽다.</a:t>
             </a:r>
           </a:p>
         </p:txBody>
@@ -7638,7 +7896,7 @@
                 </a:solidFill>
                 <a:latin typeface="Apple SD Gothic Neo"/>
               </a:rPr>
-              <a:t>12/19</a:t>
+              <a:t>12/20</a:t>
             </a:r>
           </a:p>
         </p:txBody>
@@ -8531,8 +8789,8 @@
         </p:nvSpPr>
         <p:spPr>
           <a:xfrm>
-            <a:off x="502920" y="2944368"/>
-            <a:ext cx="11155680" cy="2743200"/>
+            <a:off x="502920" y="2907792"/>
+            <a:ext cx="11155680" cy="2816352"/>
           </a:xfrm>
           <a:prstGeom prst="rect">
             <a:avLst/>
@@ -8614,7 +8872,7 @@
               </a:defRPr>
             </a:pPr>
             <a:r>
-              <a:t>• P4는 InternLM 7B/20B cross-family 점검, P5는 GPT-4o-mini external check로 Phase 3의 broad pattern을 보조 검증한다.</a:t>
+              <a:t>• P3의 출력 위에서 RQ3로 ensemble decision rule을 비교하고, P4·P5는 Qwen 결과가 family가 바뀌어도 크게 무너지지 않는지 점검한다.</a:t>
             </a:r>
           </a:p>
           <a:p>
@@ -8636,7 +8894,7 @@
               </a:defRPr>
             </a:pPr>
             <a:r>
-              <a:t>• P6는 11개 모델 풀의 repeated hold-out으로 tinyMT-Bench subset이 same-set upper bound를 넘어서 어느 정도 운영 가능한지 다시 본 단계다.</a:t>
+              <a:t>• P6는 11개 모델 풀의 repeated hold-out으로 RQ4, 즉 tinyMT-Bench subset의 운영 가능성을 same-set upper bound와 분리해 다시 본 단계다.</a:t>
             </a:r>
           </a:p>
         </p:txBody>
@@ -8649,7 +8907,7 @@
         </p:nvSpPr>
         <p:spPr>
           <a:xfrm>
-            <a:off x="502920" y="5815584"/>
+            <a:off x="502920" y="5833872"/>
             <a:ext cx="11155680" cy="384048"/>
           </a:xfrm>
           <a:prstGeom prst="rect">
@@ -8678,7 +8936,7 @@
                 </a:solidFill>
                 <a:latin typeface="Apple SD Gothic Neo"/>
               </a:rPr>
-              <a:t>즉 오늘 결과는 한 번에 나온 것이 아니라 self-judge 확인 → main scaling → cross-family / external validation → hold-out verification의 순서로 쌓아 올린 것입니다.</a:t>
+              <a:t>즉 오늘 결과는 self-judge 확인 → main scaling → ensemble / cross-family 보강 → repeated hold-out 검증의 순서로 쌓아 올린 것입니다.</a:t>
             </a:r>
           </a:p>
         </p:txBody>
@@ -8908,7 +9166,7 @@
                 </a:solidFill>
                 <a:latin typeface="Apple SD Gothic Neo"/>
               </a:rPr>
-              <a:t>13/19</a:t>
+              <a:t>13/20</a:t>
             </a:r>
           </a:p>
         </p:txBody>
@@ -9036,9 +9294,51 @@
           </a:p>
         </p:txBody>
       </p:sp>
+      <p:sp>
+        <p:nvSpPr>
+          <p:cNvPr id="10" name="TextBox 9"/>
+          <p:cNvSpPr txBox="1"/>
+          <p:nvPr/>
+        </p:nvSpPr>
+        <p:spPr>
+          <a:xfrm>
+            <a:off x="502920" y="1261872"/>
+            <a:ext cx="5449824" cy="2907792"/>
+          </a:xfrm>
+          <a:prstGeom prst="rect">
+            <a:avLst/>
+          </a:prstGeom>
+          <a:solidFill>
+            <a:srgbClr val="FFFFFF"/>
+          </a:solidFill>
+          <a:ln>
+            <a:solidFill>
+              <a:srgbClr val="DAD4CA"/>
+            </a:solidFill>
+          </a:ln>
+        </p:spPr>
+        <p:txBody>
+          <a:bodyPr wrap="square" lIns="109728" rIns="109728" tIns="109728" bIns="109728" anchor="t">
+            <a:spAutoFit/>
+          </a:bodyPr>
+          <a:lstStyle/>
+          <a:p>
+            <a:pPr algn="l"/>
+            <a:r>
+              <a:rPr sz="1700" b="0">
+                <a:solidFill>
+                  <a:srgbClr val="363A48"/>
+                </a:solidFill>
+                <a:latin typeface="Apple SD Gothic Neo"/>
+              </a:rPr>
+              <a:t/>
+            </a:r>
+          </a:p>
+        </p:txBody>
+      </p:sp>
       <p:pic>
         <p:nvPicPr>
-          <p:cNvPr id="10" name="Picture 9" descr="fig0_phase1_scores.png"/>
+          <p:cNvPr id="11" name="Picture 10" descr="fig0_phase1_scores.png"/>
           <p:cNvPicPr>
             <a:picLocks noChangeAspect="1"/>
           </p:cNvPicPr>
@@ -9052,17 +9352,59 @@
         </p:blipFill>
         <p:spPr>
           <a:xfrm>
-            <a:off x="502920" y="1261872"/>
-            <a:ext cx="5468112" cy="2700226"/>
+            <a:off x="612648" y="1424355"/>
+            <a:ext cx="5230368" cy="2582825"/>
           </a:xfrm>
           <a:prstGeom prst="rect">
             <a:avLst/>
           </a:prstGeom>
         </p:spPr>
       </p:pic>
+      <p:sp>
+        <p:nvSpPr>
+          <p:cNvPr id="12" name="TextBox 11"/>
+          <p:cNvSpPr txBox="1"/>
+          <p:nvPr/>
+        </p:nvSpPr>
+        <p:spPr>
+          <a:xfrm>
+            <a:off x="6208776" y="1261872"/>
+            <a:ext cx="5449824" cy="2907792"/>
+          </a:xfrm>
+          <a:prstGeom prst="rect">
+            <a:avLst/>
+          </a:prstGeom>
+          <a:solidFill>
+            <a:srgbClr val="FFFFFF"/>
+          </a:solidFill>
+          <a:ln>
+            <a:solidFill>
+              <a:srgbClr val="DAD4CA"/>
+            </a:solidFill>
+          </a:ln>
+        </p:spPr>
+        <p:txBody>
+          <a:bodyPr wrap="square" lIns="109728" rIns="109728" tIns="109728" bIns="109728" anchor="t">
+            <a:spAutoFit/>
+          </a:bodyPr>
+          <a:lstStyle/>
+          <a:p>
+            <a:pPr algn="l"/>
+            <a:r>
+              <a:rPr sz="1700" b="0">
+                <a:solidFill>
+                  <a:srgbClr val="363A48"/>
+                </a:solidFill>
+                <a:latin typeface="Apple SD Gothic Neo"/>
+              </a:rPr>
+              <a:t/>
+            </a:r>
+          </a:p>
+        </p:txBody>
+      </p:sp>
       <p:pic>
         <p:nvPicPr>
-          <p:cNvPr id="11" name="Picture 10" descr="fig2_overall_rankings.png"/>
+          <p:cNvPr id="13" name="Picture 12" descr="fig2_overall_rankings.png"/>
           <p:cNvPicPr>
             <a:picLocks noChangeAspect="1"/>
           </p:cNvPicPr>
@@ -9076,8 +9418,8 @@
         </p:blipFill>
         <p:spPr>
           <a:xfrm>
-            <a:off x="6199632" y="1261872"/>
-            <a:ext cx="5468112" cy="2130702"/>
+            <a:off x="6318504" y="1696737"/>
+            <a:ext cx="5230367" cy="2038062"/>
           </a:xfrm>
           <a:prstGeom prst="rect">
             <a:avLst/>
@@ -9086,14 +9428,14 @@
       </p:pic>
       <p:sp>
         <p:nvSpPr>
-          <p:cNvPr id="12" name="TextBox 11"/>
-          <p:cNvSpPr txBox="1"/>
-          <p:nvPr/>
-        </p:nvSpPr>
-        <p:spPr>
-          <a:xfrm>
-            <a:off x="566928" y="4297680"/>
-            <a:ext cx="5340096" cy="201168"/>
+          <p:cNvPr id="14" name="TextBox 13"/>
+          <p:cNvSpPr txBox="1"/>
+          <p:nvPr/>
+        </p:nvSpPr>
+        <p:spPr>
+          <a:xfrm>
+            <a:off x="502920" y="4279392"/>
+            <a:ext cx="5449824" cy="201168"/>
           </a:xfrm>
           <a:prstGeom prst="rect">
             <a:avLst/>
@@ -9124,14 +9466,14 @@
       </p:sp>
       <p:sp>
         <p:nvSpPr>
-          <p:cNvPr id="13" name="TextBox 12"/>
-          <p:cNvSpPr txBox="1"/>
-          <p:nvPr/>
-        </p:nvSpPr>
-        <p:spPr>
-          <a:xfrm>
-            <a:off x="6263640" y="4297680"/>
-            <a:ext cx="5340096" cy="201168"/>
+          <p:cNvPr id="15" name="TextBox 14"/>
+          <p:cNvSpPr txBox="1"/>
+          <p:nvPr/>
+        </p:nvSpPr>
+        <p:spPr>
+          <a:xfrm>
+            <a:off x="6208776" y="4279392"/>
+            <a:ext cx="5449824" cy="201168"/>
           </a:xfrm>
           <a:prstGeom prst="rect">
             <a:avLst/>
@@ -9162,14 +9504,14 @@
       </p:sp>
       <p:sp>
         <p:nvSpPr>
-          <p:cNvPr id="14" name="TextBox 13"/>
-          <p:cNvSpPr txBox="1"/>
-          <p:nvPr/>
-        </p:nvSpPr>
-        <p:spPr>
-          <a:xfrm>
-            <a:off x="502920" y="4553712"/>
-            <a:ext cx="11155680" cy="1417320"/>
+          <p:cNvPr id="16" name="TextBox 15"/>
+          <p:cNvSpPr txBox="1"/>
+          <p:nvPr/>
+        </p:nvSpPr>
+        <p:spPr>
+          <a:xfrm>
+            <a:off x="502920" y="4535424"/>
+            <a:ext cx="11155680" cy="1353312"/>
           </a:xfrm>
           <a:prstGeom prst="rect">
             <a:avLst/>
@@ -9280,13 +9622,13 @@
       </p:sp>
       <p:sp>
         <p:nvSpPr>
-          <p:cNvPr id="15" name="TextBox 14"/>
-          <p:cNvSpPr txBox="1"/>
-          <p:nvPr/>
-        </p:nvSpPr>
-        <p:spPr>
-          <a:xfrm>
-            <a:off x="502920" y="5632704"/>
+          <p:cNvPr id="17" name="TextBox 16"/>
+          <p:cNvSpPr txBox="1"/>
+          <p:nvPr/>
+        </p:nvSpPr>
+        <p:spPr>
+          <a:xfrm>
+            <a:off x="502920" y="5596128"/>
             <a:ext cx="11155680" cy="548640"/>
           </a:xfrm>
           <a:prstGeom prst="rect">
@@ -9545,7 +9887,7 @@
                 </a:solidFill>
                 <a:latin typeface="Apple SD Gothic Neo"/>
               </a:rPr>
-              <a:t>14/19</a:t>
+              <a:t>14/20</a:t>
             </a:r>
           </a:p>
         </p:txBody>
@@ -9673,9 +10015,51 @@
           </a:p>
         </p:txBody>
       </p:sp>
+      <p:sp>
+        <p:nvSpPr>
+          <p:cNvPr id="10" name="TextBox 9"/>
+          <p:cNvSpPr txBox="1"/>
+          <p:nvPr/>
+        </p:nvSpPr>
+        <p:spPr>
+          <a:xfrm>
+            <a:off x="502920" y="1261872"/>
+            <a:ext cx="5449824" cy="2907792"/>
+          </a:xfrm>
+          <a:prstGeom prst="rect">
+            <a:avLst/>
+          </a:prstGeom>
+          <a:solidFill>
+            <a:srgbClr val="FFFFFF"/>
+          </a:solidFill>
+          <a:ln>
+            <a:solidFill>
+              <a:srgbClr val="DAD4CA"/>
+            </a:solidFill>
+          </a:ln>
+        </p:spPr>
+        <p:txBody>
+          <a:bodyPr wrap="square" lIns="109728" rIns="109728" tIns="109728" bIns="109728" anchor="t">
+            <a:spAutoFit/>
+          </a:bodyPr>
+          <a:lstStyle/>
+          <a:p>
+            <a:pPr algn="l"/>
+            <a:r>
+              <a:rPr sz="1700" b="0">
+                <a:solidFill>
+                  <a:srgbClr val="363A48"/>
+                </a:solidFill>
+                <a:latin typeface="Apple SD Gothic Neo"/>
+              </a:rPr>
+              <a:t/>
+            </a:r>
+          </a:p>
+        </p:txBody>
+      </p:sp>
       <p:pic>
         <p:nvPicPr>
-          <p:cNvPr id="10" name="Picture 9" descr="fig4_judge_scaling.png"/>
+          <p:cNvPr id="11" name="Picture 10" descr="fig4_judge_scaling.png"/>
           <p:cNvPicPr>
             <a:picLocks noChangeAspect="1"/>
           </p:cNvPicPr>
@@ -9689,17 +10073,59 @@
         </p:blipFill>
         <p:spPr>
           <a:xfrm>
-            <a:off x="502920" y="1261872"/>
-            <a:ext cx="5468112" cy="2354645"/>
+            <a:off x="612648" y="1589633"/>
+            <a:ext cx="5230368" cy="2252269"/>
           </a:xfrm>
           <a:prstGeom prst="rect">
             <a:avLst/>
           </a:prstGeom>
         </p:spPr>
       </p:pic>
+      <p:sp>
+        <p:nvSpPr>
+          <p:cNvPr id="12" name="TextBox 11"/>
+          <p:cNvSpPr txBox="1"/>
+          <p:nvPr/>
+        </p:nvSpPr>
+        <p:spPr>
+          <a:xfrm>
+            <a:off x="6208776" y="1261872"/>
+            <a:ext cx="5449824" cy="2907792"/>
+          </a:xfrm>
+          <a:prstGeom prst="rect">
+            <a:avLst/>
+          </a:prstGeom>
+          <a:solidFill>
+            <a:srgbClr val="FFFFFF"/>
+          </a:solidFill>
+          <a:ln>
+            <a:solidFill>
+              <a:srgbClr val="DAD4CA"/>
+            </a:solidFill>
+          </a:ln>
+        </p:spPr>
+        <p:txBody>
+          <a:bodyPr wrap="square" lIns="109728" rIns="109728" tIns="109728" bIns="109728" anchor="t">
+            <a:spAutoFit/>
+          </a:bodyPr>
+          <a:lstStyle/>
+          <a:p>
+            <a:pPr algn="l"/>
+            <a:r>
+              <a:rPr sz="1700" b="0">
+                <a:solidFill>
+                  <a:srgbClr val="363A48"/>
+                </a:solidFill>
+                <a:latin typeface="Apple SD Gothic Neo"/>
+              </a:rPr>
+              <a:t/>
+            </a:r>
+          </a:p>
+        </p:txBody>
+      </p:sp>
       <p:pic>
         <p:nvPicPr>
-          <p:cNvPr id="11" name="Picture 10" descr="fig5_phase3_scores.png"/>
+          <p:cNvPr id="13" name="Picture 12" descr="fig5_phase3_scores.png"/>
           <p:cNvPicPr>
             <a:picLocks noChangeAspect="1"/>
           </p:cNvPicPr>
@@ -9713,8 +10139,8 @@
         </p:blipFill>
         <p:spPr>
           <a:xfrm>
-            <a:off x="6199632" y="1261872"/>
-            <a:ext cx="5468112" cy="2478816"/>
+            <a:off x="6318504" y="1530247"/>
+            <a:ext cx="5230368" cy="2371041"/>
           </a:xfrm>
           <a:prstGeom prst="rect">
             <a:avLst/>
@@ -9723,14 +10149,14 @@
       </p:pic>
       <p:sp>
         <p:nvSpPr>
-          <p:cNvPr id="12" name="TextBox 11"/>
-          <p:cNvSpPr txBox="1"/>
-          <p:nvPr/>
-        </p:nvSpPr>
-        <p:spPr>
-          <a:xfrm>
-            <a:off x="566928" y="4297680"/>
-            <a:ext cx="5340096" cy="201168"/>
+          <p:cNvPr id="14" name="TextBox 13"/>
+          <p:cNvSpPr txBox="1"/>
+          <p:nvPr/>
+        </p:nvSpPr>
+        <p:spPr>
+          <a:xfrm>
+            <a:off x="502920" y="4279392"/>
+            <a:ext cx="5449824" cy="201168"/>
           </a:xfrm>
           <a:prstGeom prst="rect">
             <a:avLst/>
@@ -9761,14 +10187,14 @@
       </p:sp>
       <p:sp>
         <p:nvSpPr>
-          <p:cNvPr id="13" name="TextBox 12"/>
-          <p:cNvSpPr txBox="1"/>
-          <p:nvPr/>
-        </p:nvSpPr>
-        <p:spPr>
-          <a:xfrm>
-            <a:off x="6263640" y="4297680"/>
-            <a:ext cx="5340096" cy="201168"/>
+          <p:cNvPr id="15" name="TextBox 14"/>
+          <p:cNvSpPr txBox="1"/>
+          <p:nvPr/>
+        </p:nvSpPr>
+        <p:spPr>
+          <a:xfrm>
+            <a:off x="6208776" y="4279392"/>
+            <a:ext cx="5449824" cy="201168"/>
           </a:xfrm>
           <a:prstGeom prst="rect">
             <a:avLst/>
@@ -9799,14 +10225,14 @@
       </p:sp>
       <p:sp>
         <p:nvSpPr>
-          <p:cNvPr id="14" name="TextBox 13"/>
-          <p:cNvSpPr txBox="1"/>
-          <p:nvPr/>
-        </p:nvSpPr>
-        <p:spPr>
-          <a:xfrm>
-            <a:off x="502920" y="4553712"/>
-            <a:ext cx="11155680" cy="1417320"/>
+          <p:cNvPr id="16" name="TextBox 15"/>
+          <p:cNvSpPr txBox="1"/>
+          <p:nvPr/>
+        </p:nvSpPr>
+        <p:spPr>
+          <a:xfrm>
+            <a:off x="502920" y="4535424"/>
+            <a:ext cx="11155680" cy="1353312"/>
           </a:xfrm>
           <a:prstGeom prst="rect">
             <a:avLst/>
@@ -9895,13 +10321,13 @@
       </p:sp>
       <p:sp>
         <p:nvSpPr>
-          <p:cNvPr id="15" name="TextBox 14"/>
-          <p:cNvSpPr txBox="1"/>
-          <p:nvPr/>
-        </p:nvSpPr>
-        <p:spPr>
-          <a:xfrm>
-            <a:off x="566928" y="5623560"/>
+          <p:cNvPr id="17" name="TextBox 16"/>
+          <p:cNvSpPr txBox="1"/>
+          <p:nvPr/>
+        </p:nvSpPr>
+        <p:spPr>
+          <a:xfrm>
+            <a:off x="566928" y="5577840"/>
             <a:ext cx="2029968" cy="877824"/>
           </a:xfrm>
           <a:prstGeom prst="rect">
@@ -9937,13 +10363,13 @@
       </p:sp>
       <p:sp>
         <p:nvSpPr>
-          <p:cNvPr id="16" name="Rectangle 15"/>
+          <p:cNvPr id="18" name="Rectangle 17"/>
           <p:cNvSpPr/>
           <p:nvPr/>
         </p:nvSpPr>
         <p:spPr>
           <a:xfrm>
-            <a:off x="676656" y="5733288"/>
+            <a:off x="676656" y="5687568"/>
             <a:ext cx="502920" cy="182880"/>
           </a:xfrm>
           <a:prstGeom prst="rect">
@@ -9980,13 +10406,13 @@
       </p:sp>
       <p:sp>
         <p:nvSpPr>
-          <p:cNvPr id="17" name="TextBox 16"/>
-          <p:cNvSpPr txBox="1"/>
-          <p:nvPr/>
-        </p:nvSpPr>
-        <p:spPr>
-          <a:xfrm>
-            <a:off x="694944" y="5733288"/>
+          <p:cNvPr id="19" name="TextBox 18"/>
+          <p:cNvSpPr txBox="1"/>
+          <p:nvPr/>
+        </p:nvSpPr>
+        <p:spPr>
+          <a:xfrm>
+            <a:off x="694944" y="5687568"/>
             <a:ext cx="1691640" cy="182880"/>
           </a:xfrm>
           <a:prstGeom prst="rect">
@@ -10018,13 +10444,13 @@
       </p:sp>
       <p:sp>
         <p:nvSpPr>
-          <p:cNvPr id="18" name="TextBox 17"/>
-          <p:cNvSpPr txBox="1"/>
-          <p:nvPr/>
-        </p:nvSpPr>
-        <p:spPr>
-          <a:xfrm>
-            <a:off x="676656" y="5971032"/>
+          <p:cNvPr id="20" name="TextBox 19"/>
+          <p:cNvSpPr txBox="1"/>
+          <p:nvPr/>
+        </p:nvSpPr>
+        <p:spPr>
+          <a:xfrm>
+            <a:off x="676656" y="5925312"/>
             <a:ext cx="1737360" cy="310896"/>
           </a:xfrm>
           <a:prstGeom prst="rect">
@@ -10056,13 +10482,13 @@
       </p:sp>
       <p:sp>
         <p:nvSpPr>
-          <p:cNvPr id="19" name="TextBox 18"/>
-          <p:cNvSpPr txBox="1"/>
-          <p:nvPr/>
-        </p:nvSpPr>
-        <p:spPr>
-          <a:xfrm>
-            <a:off x="2779776" y="5623560"/>
+          <p:cNvPr id="21" name="TextBox 20"/>
+          <p:cNvSpPr txBox="1"/>
+          <p:nvPr/>
+        </p:nvSpPr>
+        <p:spPr>
+          <a:xfrm>
+            <a:off x="2779776" y="5577840"/>
             <a:ext cx="2029968" cy="877824"/>
           </a:xfrm>
           <a:prstGeom prst="rect">
@@ -10098,13 +10524,13 @@
       </p:sp>
       <p:sp>
         <p:nvSpPr>
-          <p:cNvPr id="20" name="Rectangle 19"/>
+          <p:cNvPr id="22" name="Rectangle 21"/>
           <p:cNvSpPr/>
           <p:nvPr/>
         </p:nvSpPr>
         <p:spPr>
           <a:xfrm>
-            <a:off x="2889504" y="5733288"/>
+            <a:off x="2889504" y="5687568"/>
             <a:ext cx="502920" cy="182880"/>
           </a:xfrm>
           <a:prstGeom prst="rect">
@@ -10141,13 +10567,13 @@
       </p:sp>
       <p:sp>
         <p:nvSpPr>
-          <p:cNvPr id="21" name="TextBox 20"/>
-          <p:cNvSpPr txBox="1"/>
-          <p:nvPr/>
-        </p:nvSpPr>
-        <p:spPr>
-          <a:xfrm>
-            <a:off x="2907792" y="5733288"/>
+          <p:cNvPr id="23" name="TextBox 22"/>
+          <p:cNvSpPr txBox="1"/>
+          <p:nvPr/>
+        </p:nvSpPr>
+        <p:spPr>
+          <a:xfrm>
+            <a:off x="2907792" y="5687568"/>
             <a:ext cx="1691640" cy="182880"/>
           </a:xfrm>
           <a:prstGeom prst="rect">
@@ -10179,13 +10605,13 @@
       </p:sp>
       <p:sp>
         <p:nvSpPr>
-          <p:cNvPr id="22" name="TextBox 21"/>
-          <p:cNvSpPr txBox="1"/>
-          <p:nvPr/>
-        </p:nvSpPr>
-        <p:spPr>
-          <a:xfrm>
-            <a:off x="2889504" y="5971032"/>
+          <p:cNvPr id="24" name="TextBox 23"/>
+          <p:cNvSpPr txBox="1"/>
+          <p:nvPr/>
+        </p:nvSpPr>
+        <p:spPr>
+          <a:xfrm>
+            <a:off x="2889504" y="5925312"/>
             <a:ext cx="1737360" cy="310896"/>
           </a:xfrm>
           <a:prstGeom prst="rect">
@@ -10217,13 +10643,13 @@
       </p:sp>
       <p:sp>
         <p:nvSpPr>
-          <p:cNvPr id="23" name="TextBox 22"/>
-          <p:cNvSpPr txBox="1"/>
-          <p:nvPr/>
-        </p:nvSpPr>
-        <p:spPr>
-          <a:xfrm>
-            <a:off x="4992624" y="5623560"/>
+          <p:cNvPr id="25" name="TextBox 24"/>
+          <p:cNvSpPr txBox="1"/>
+          <p:nvPr/>
+        </p:nvSpPr>
+        <p:spPr>
+          <a:xfrm>
+            <a:off x="4992624" y="5577840"/>
             <a:ext cx="2029968" cy="877824"/>
           </a:xfrm>
           <a:prstGeom prst="rect">
@@ -10259,13 +10685,13 @@
       </p:sp>
       <p:sp>
         <p:nvSpPr>
-          <p:cNvPr id="24" name="Rectangle 23"/>
+          <p:cNvPr id="26" name="Rectangle 25"/>
           <p:cNvSpPr/>
           <p:nvPr/>
         </p:nvSpPr>
         <p:spPr>
           <a:xfrm>
-            <a:off x="5102352" y="5733288"/>
+            <a:off x="5102352" y="5687568"/>
             <a:ext cx="502920" cy="182880"/>
           </a:xfrm>
           <a:prstGeom prst="rect">
@@ -10302,13 +10728,13 @@
       </p:sp>
       <p:sp>
         <p:nvSpPr>
-          <p:cNvPr id="25" name="TextBox 24"/>
-          <p:cNvSpPr txBox="1"/>
-          <p:nvPr/>
-        </p:nvSpPr>
-        <p:spPr>
-          <a:xfrm>
-            <a:off x="5120640" y="5733288"/>
+          <p:cNvPr id="27" name="TextBox 26"/>
+          <p:cNvSpPr txBox="1"/>
+          <p:nvPr/>
+        </p:nvSpPr>
+        <p:spPr>
+          <a:xfrm>
+            <a:off x="5120640" y="5687568"/>
             <a:ext cx="1691640" cy="182880"/>
           </a:xfrm>
           <a:prstGeom prst="rect">
@@ -10340,13 +10766,13 @@
       </p:sp>
       <p:sp>
         <p:nvSpPr>
-          <p:cNvPr id="26" name="TextBox 25"/>
-          <p:cNvSpPr txBox="1"/>
-          <p:nvPr/>
-        </p:nvSpPr>
-        <p:spPr>
-          <a:xfrm>
-            <a:off x="5102352" y="5971032"/>
+          <p:cNvPr id="28" name="TextBox 27"/>
+          <p:cNvSpPr txBox="1"/>
+          <p:nvPr/>
+        </p:nvSpPr>
+        <p:spPr>
+          <a:xfrm>
+            <a:off x="5102352" y="5925312"/>
             <a:ext cx="1737360" cy="310896"/>
           </a:xfrm>
           <a:prstGeom prst="rect">
@@ -10378,13 +10804,13 @@
       </p:sp>
       <p:sp>
         <p:nvSpPr>
-          <p:cNvPr id="27" name="TextBox 26"/>
-          <p:cNvSpPr txBox="1"/>
-          <p:nvPr/>
-        </p:nvSpPr>
-        <p:spPr>
-          <a:xfrm>
-            <a:off x="7205472" y="5623560"/>
+          <p:cNvPr id="29" name="TextBox 28"/>
+          <p:cNvSpPr txBox="1"/>
+          <p:nvPr/>
+        </p:nvSpPr>
+        <p:spPr>
+          <a:xfrm>
+            <a:off x="7205472" y="5577840"/>
             <a:ext cx="2029968" cy="877824"/>
           </a:xfrm>
           <a:prstGeom prst="rect">
@@ -10420,13 +10846,13 @@
       </p:sp>
       <p:sp>
         <p:nvSpPr>
-          <p:cNvPr id="28" name="Rectangle 27"/>
+          <p:cNvPr id="30" name="Rectangle 29"/>
           <p:cNvSpPr/>
           <p:nvPr/>
         </p:nvSpPr>
         <p:spPr>
           <a:xfrm>
-            <a:off x="7315200" y="5733288"/>
+            <a:off x="7315200" y="5687568"/>
             <a:ext cx="502920" cy="182880"/>
           </a:xfrm>
           <a:prstGeom prst="rect">
@@ -10463,13 +10889,13 @@
       </p:sp>
       <p:sp>
         <p:nvSpPr>
-          <p:cNvPr id="29" name="TextBox 28"/>
-          <p:cNvSpPr txBox="1"/>
-          <p:nvPr/>
-        </p:nvSpPr>
-        <p:spPr>
-          <a:xfrm>
-            <a:off x="7333488" y="5733288"/>
+          <p:cNvPr id="31" name="TextBox 30"/>
+          <p:cNvSpPr txBox="1"/>
+          <p:nvPr/>
+        </p:nvSpPr>
+        <p:spPr>
+          <a:xfrm>
+            <a:off x="7333488" y="5687568"/>
             <a:ext cx="1691640" cy="182880"/>
           </a:xfrm>
           <a:prstGeom prst="rect">
@@ -10501,13 +10927,13 @@
       </p:sp>
       <p:sp>
         <p:nvSpPr>
-          <p:cNvPr id="30" name="TextBox 29"/>
-          <p:cNvSpPr txBox="1"/>
-          <p:nvPr/>
-        </p:nvSpPr>
-        <p:spPr>
-          <a:xfrm>
-            <a:off x="7315200" y="5971032"/>
+          <p:cNvPr id="32" name="TextBox 31"/>
+          <p:cNvSpPr txBox="1"/>
+          <p:nvPr/>
+        </p:nvSpPr>
+        <p:spPr>
+          <a:xfrm>
+            <a:off x="7315200" y="5925312"/>
             <a:ext cx="1737360" cy="310896"/>
           </a:xfrm>
           <a:prstGeom prst="rect">
@@ -10682,7 +11108,7 @@
                 </a:solidFill>
                 <a:latin typeface="Apple SD Gothic Neo"/>
               </a:rPr>
-              <a:t>RQ2-1. 그런데 broad ranking이 맞아도 남는 오류는 있다</a:t>
+              <a:t>RQ2. judge가 좋아진 뒤에도 남는 오류는 무엇인가</a:t>
             </a:r>
           </a:p>
         </p:txBody>
@@ -10762,7 +11188,7 @@
                 </a:solidFill>
                 <a:latin typeface="Apple SD Gothic Neo"/>
               </a:rPr>
-              <a:t>15/19</a:t>
+              <a:t>15/20</a:t>
             </a:r>
           </a:p>
         </p:txBody>
@@ -10885,14 +11311,56 @@
                 </a:solidFill>
                 <a:latin typeface="Apple SD Gothic Neo"/>
               </a:rPr>
-              <a:t>이 슬라이드의 목적: cross-family validation 이후에도 남는 residual bias와 practical ensemble 결론을 보여준다.</a:t>
+              <a:t>이 슬라이드의 목적: 전체 서열과 질문 단위 결정이 분리된다는 점, 그리고 잔여 오류가 순서 민감하게 남는다는 점을 보여준다.</a:t>
+            </a:r>
+          </a:p>
+        </p:txBody>
+      </p:sp>
+      <p:sp>
+        <p:nvSpPr>
+          <p:cNvPr id="10" name="TextBox 9"/>
+          <p:cNvSpPr txBox="1"/>
+          <p:nvPr/>
+        </p:nvSpPr>
+        <p:spPr>
+          <a:xfrm>
+            <a:off x="502920" y="1261872"/>
+            <a:ext cx="5449824" cy="2907792"/>
+          </a:xfrm>
+          <a:prstGeom prst="rect">
+            <a:avLst/>
+          </a:prstGeom>
+          <a:solidFill>
+            <a:srgbClr val="FFFFFF"/>
+          </a:solidFill>
+          <a:ln>
+            <a:solidFill>
+              <a:srgbClr val="DAD4CA"/>
+            </a:solidFill>
+          </a:ln>
+        </p:spPr>
+        <p:txBody>
+          <a:bodyPr wrap="square" lIns="109728" rIns="109728" tIns="109728" bIns="109728" anchor="t">
+            <a:spAutoFit/>
+          </a:bodyPr>
+          <a:lstStyle/>
+          <a:p>
+            <a:pPr algn="l"/>
+            <a:r>
+              <a:rPr sz="1700" b="0">
+                <a:solidFill>
+                  <a:srgbClr val="363A48"/>
+                </a:solidFill>
+                <a:latin typeface="Apple SD Gothic Neo"/>
+              </a:rPr>
+              <a:t/>
             </a:r>
           </a:p>
         </p:txBody>
       </p:sp>
       <p:pic>
         <p:nvPicPr>
-          <p:cNvPr id="10" name="Picture 9" descr="fig11_position_bias.png"/>
+          <p:cNvPr id="11" name="Picture 10" descr="fig11_position_bias.png"/>
           <p:cNvPicPr>
             <a:picLocks noChangeAspect="1"/>
           </p:cNvPicPr>
@@ -10906,17 +11374,59 @@
         </p:blipFill>
         <p:spPr>
           <a:xfrm>
-            <a:off x="502920" y="1261872"/>
-            <a:ext cx="5468112" cy="1974656"/>
+            <a:off x="612648" y="1771367"/>
+            <a:ext cx="5230368" cy="1888801"/>
           </a:xfrm>
           <a:prstGeom prst="rect">
             <a:avLst/>
           </a:prstGeom>
         </p:spPr>
       </p:pic>
+      <p:sp>
+        <p:nvSpPr>
+          <p:cNvPr id="12" name="TextBox 11"/>
+          <p:cNvSpPr txBox="1"/>
+          <p:nvPr/>
+        </p:nvSpPr>
+        <p:spPr>
+          <a:xfrm>
+            <a:off x="6208776" y="1261872"/>
+            <a:ext cx="5449824" cy="2907792"/>
+          </a:xfrm>
+          <a:prstGeom prst="rect">
+            <a:avLst/>
+          </a:prstGeom>
+          <a:solidFill>
+            <a:srgbClr val="FFFFFF"/>
+          </a:solidFill>
+          <a:ln>
+            <a:solidFill>
+              <a:srgbClr val="DAD4CA"/>
+            </a:solidFill>
+          </a:ln>
+        </p:spPr>
+        <p:txBody>
+          <a:bodyPr wrap="square" lIns="109728" rIns="109728" tIns="109728" bIns="109728" anchor="t">
+            <a:spAutoFit/>
+          </a:bodyPr>
+          <a:lstStyle/>
+          <a:p>
+            <a:pPr algn="l"/>
+            <a:r>
+              <a:rPr sz="1700" b="0">
+                <a:solidFill>
+                  <a:srgbClr val="363A48"/>
+                </a:solidFill>
+                <a:latin typeface="Apple SD Gothic Neo"/>
+              </a:rPr>
+              <a:t/>
+            </a:r>
+          </a:p>
+        </p:txBody>
+      </p:sp>
       <p:pic>
         <p:nvPicPr>
-          <p:cNvPr id="11" name="Picture 10" descr="fig13_ensemble_v2.png"/>
+          <p:cNvPr id="13" name="Picture 12" descr="fig13_ensemble_v2.png"/>
           <p:cNvPicPr>
             <a:picLocks noChangeAspect="1"/>
           </p:cNvPicPr>
@@ -10930,8 +11440,8 @@
         </p:blipFill>
         <p:spPr>
           <a:xfrm>
-            <a:off x="6199632" y="1261872"/>
-            <a:ext cx="5468112" cy="2327359"/>
+            <a:off x="6318504" y="1602683"/>
+            <a:ext cx="5230368" cy="2226169"/>
           </a:xfrm>
           <a:prstGeom prst="rect">
             <a:avLst/>
@@ -10940,14 +11450,14 @@
       </p:pic>
       <p:sp>
         <p:nvSpPr>
-          <p:cNvPr id="12" name="TextBox 11"/>
-          <p:cNvSpPr txBox="1"/>
-          <p:nvPr/>
-        </p:nvSpPr>
-        <p:spPr>
-          <a:xfrm>
-            <a:off x="566928" y="4297680"/>
-            <a:ext cx="5340096" cy="201168"/>
+          <p:cNvPr id="14" name="TextBox 13"/>
+          <p:cNvSpPr txBox="1"/>
+          <p:nvPr/>
+        </p:nvSpPr>
+        <p:spPr>
+          <a:xfrm>
+            <a:off x="502920" y="4279392"/>
+            <a:ext cx="5449824" cy="201168"/>
           </a:xfrm>
           <a:prstGeom prst="rect">
             <a:avLst/>
@@ -10971,21 +11481,21 @@
                 </a:solidFill>
                 <a:latin typeface="Apple SD Gothic Neo"/>
               </a:rPr>
-              <a:t>Residual position bias</a:t>
-            </a:r>
-          </a:p>
-        </p:txBody>
-      </p:sp>
-      <p:sp>
-        <p:nvSpPr>
-          <p:cNvPr id="13" name="TextBox 12"/>
-          <p:cNvSpPr txBox="1"/>
-          <p:nvPr/>
-        </p:nvSpPr>
-        <p:spPr>
-          <a:xfrm>
-            <a:off x="6263640" y="4297680"/>
-            <a:ext cx="5340096" cy="201168"/>
+              <a:t>Order-sensitive residual errors</a:t>
+            </a:r>
+          </a:p>
+        </p:txBody>
+      </p:sp>
+      <p:sp>
+        <p:nvSpPr>
+          <p:cNvPr id="15" name="TextBox 14"/>
+          <p:cNvSpPr txBox="1"/>
+          <p:nvPr/>
+        </p:nvSpPr>
+        <p:spPr>
+          <a:xfrm>
+            <a:off x="6208776" y="4279392"/>
+            <a:ext cx="5449824" cy="201168"/>
           </a:xfrm>
           <a:prstGeom prst="rect">
             <a:avLst/>
@@ -11016,14 +11526,14 @@
       </p:sp>
       <p:sp>
         <p:nvSpPr>
-          <p:cNvPr id="14" name="TextBox 13"/>
-          <p:cNvSpPr txBox="1"/>
-          <p:nvPr/>
-        </p:nvSpPr>
-        <p:spPr>
-          <a:xfrm>
-            <a:off x="502920" y="4553712"/>
-            <a:ext cx="11155680" cy="1417320"/>
+          <p:cNvPr id="16" name="TextBox 15"/>
+          <p:cNvSpPr txBox="1"/>
+          <p:nvPr/>
+        </p:nvSpPr>
+        <p:spPr>
+          <a:xfrm>
+            <a:off x="502920" y="4535424"/>
+            <a:ext cx="11155680" cy="1353312"/>
           </a:xfrm>
           <a:prstGeom prst="rect">
             <a:avLst/>
@@ -11061,7 +11571,7 @@
               </a:defRPr>
             </a:pPr>
             <a:r>
-              <a:t>• 32B judge의 남은 불일치 중 94.93%가 first-position win으로 연결되어 residual bias가 위치 편향으로 농축된다.</a:t>
+              <a:t>• Qwen32, InternLM20B, GPT-4o-mini는 broad ranking은 대체로 맞지만, exact pairwise winner agreement는 0.50~0.58 수준에 머문다.</a:t>
             </a:r>
           </a:p>
           <a:p>
@@ -11083,7 +11593,7 @@
               </a:defRPr>
             </a:pPr>
             <a:r>
-              <a:t>• 단순 majority ensemble은 오히려 58.63%로 나빠지고, abstain ensemble만 24.70%까지 낮춘다.</a:t>
+              <a:t>• 특히 Qwen32의 남은 불일치 중 94.93%가 first-position win으로 연결되어, 잔여 오류가 순서 민감한 사례에 집중된다는 점이 드러난다.</a:t>
             </a:r>
           </a:p>
           <a:p>
@@ -11105,20 +11615,20 @@
               </a:defRPr>
             </a:pPr>
             <a:r>
-              <a:t>• 즉 broad ranking이 맞는 것과 question-level decision이 깨끗한 것은 다른 문제다.</a:t>
-            </a:r>
-          </a:p>
-        </p:txBody>
-      </p:sp>
-      <p:sp>
-        <p:nvSpPr>
-          <p:cNvPr id="15" name="TextBox 14"/>
-          <p:cNvSpPr txBox="1"/>
-          <p:nvPr/>
-        </p:nvSpPr>
-        <p:spPr>
-          <a:xfrm>
-            <a:off x="502920" y="5632704"/>
+              <a:t>• 즉 ranking validity와 question-level decision cleanliness는 분리해서 읽어야 한다.</a:t>
+            </a:r>
+          </a:p>
+        </p:txBody>
+      </p:sp>
+      <p:sp>
+        <p:nvSpPr>
+          <p:cNvPr id="17" name="TextBox 16"/>
+          <p:cNvSpPr txBox="1"/>
+          <p:nvPr/>
+        </p:nvSpPr>
+        <p:spPr>
+          <a:xfrm>
+            <a:off x="502920" y="5596128"/>
             <a:ext cx="11155680" cy="548640"/>
           </a:xfrm>
           <a:prstGeom prst="rect">
@@ -11147,7 +11657,7 @@
                 </a:solidFill>
                 <a:latin typeface="Apple SD Gothic Neo"/>
               </a:rPr>
-              <a:t>RQ2의 답은 명확합니다. 전체 서열이 맞아도 남는 오류는 구조화된 편향과 운영 리스크로 남습니다.</a:t>
+              <a:t>RQ2의 답은 명확합니다. judge가 좋아져도 남는 오류는 단순 노이즈가 아니라 순서 민감성과 운영 리스크의 형태로 남습니다.</a:t>
             </a:r>
           </a:p>
         </p:txBody>
@@ -11297,7 +11807,7 @@
                 </a:solidFill>
                 <a:latin typeface="Apple SD Gothic Neo"/>
               </a:rPr>
-              <a:t>RQ2-2. 왜 majority가 아니라 abstain인가</a:t>
+              <a:t>RQ3. 왜 majority보다 abstain이 더 낫나</a:t>
             </a:r>
           </a:p>
         </p:txBody>
@@ -11377,7 +11887,7 @@
                 </a:solidFill>
                 <a:latin typeface="Apple SD Gothic Neo"/>
               </a:rPr>
-              <a:t>16/19</a:t>
+              <a:t>16/20</a:t>
             </a:r>
           </a:p>
         </p:txBody>
@@ -11736,7 +12246,7 @@
                 </a:solidFill>
                 <a:latin typeface="Apple SD Gothic Neo"/>
               </a:rPr>
-              <a:t>abstain은 덜 결정하는 설계가 아니라, low-confidence vote를 표로 세지 않아서 더 많은 쌍을 더 깨끗하게 결정하는 설계입니다.</a:t>
+              <a:t>RQ3의 답은 예입니다. 작은 judge를 그냥 다수결로 합치는 것보다, low-confidence vote를 기권으로 다루는 것이 훨씬 더 낫습니다.</a:t>
             </a:r>
           </a:p>
         </p:txBody>
@@ -12530,7 +13040,7 @@
                 </a:solidFill>
                 <a:latin typeface="Apple SD Gothic Neo"/>
               </a:rPr>
-              <a:t>RQ3. cross-family와 hold-out에서도 결론이 남는가</a:t>
+              <a:t>RQ4-1. 문항을 줄여도 같은 모델셋에서는 서열이 남는가</a:t>
             </a:r>
           </a:p>
         </p:txBody>
@@ -12610,7 +13120,7 @@
                 </a:solidFill>
                 <a:latin typeface="Apple SD Gothic Neo"/>
               </a:rPr>
-              <a:t>17/19</a:t>
+              <a:t>17/20</a:t>
             </a:r>
           </a:p>
         </p:txBody>
@@ -12733,14 +13243,56 @@
                 </a:solidFill>
                 <a:latin typeface="Apple SD Gothic Neo"/>
               </a:rPr>
-              <a:t>이 슬라이드의 목적: InternLM20B, GPT-4o-mini, repeated hold-out 결과를 한 장에서 묶어 RQ3에 답한다.</a:t>
+              <a:t>이 슬라이드의 목적: tinyMT-Bench의 same-set upper bound와 random baseline을 함께 보여준다.</a:t>
+            </a:r>
+          </a:p>
+        </p:txBody>
+      </p:sp>
+      <p:sp>
+        <p:nvSpPr>
+          <p:cNvPr id="10" name="TextBox 9"/>
+          <p:cNvSpPr txBox="1"/>
+          <p:nvPr/>
+        </p:nvSpPr>
+        <p:spPr>
+          <a:xfrm>
+            <a:off x="502920" y="1261872"/>
+            <a:ext cx="5449824" cy="2907792"/>
+          </a:xfrm>
+          <a:prstGeom prst="rect">
+            <a:avLst/>
+          </a:prstGeom>
+          <a:solidFill>
+            <a:srgbClr val="FFFFFF"/>
+          </a:solidFill>
+          <a:ln>
+            <a:solidFill>
+              <a:srgbClr val="DAD4CA"/>
+            </a:solidFill>
+          </a:ln>
+        </p:spPr>
+        <p:txBody>
+          <a:bodyPr wrap="square" lIns="109728" rIns="109728" tIns="109728" bIns="109728" anchor="t">
+            <a:spAutoFit/>
+          </a:bodyPr>
+          <a:lstStyle/>
+          <a:p>
+            <a:pPr algn="l"/>
+            <a:r>
+              <a:rPr sz="1700" b="0">
+                <a:solidFill>
+                  <a:srgbClr val="363A48"/>
+                </a:solidFill>
+                <a:latin typeface="Apple SD Gothic Neo"/>
+              </a:rPr>
+              <a:t/>
             </a:r>
           </a:p>
         </p:txBody>
       </p:sp>
       <p:pic>
         <p:nvPicPr>
-          <p:cNvPr id="10" name="Picture 9" descr="fig16_phase345_judge_summary.png"/>
+          <p:cNvPr id="11" name="Picture 10" descr="fig9_tiny_mt_bench.png"/>
           <p:cNvPicPr>
             <a:picLocks noChangeAspect="1"/>
           </p:cNvPicPr>
@@ -12754,17 +13306,59 @@
         </p:blipFill>
         <p:spPr>
           <a:xfrm>
-            <a:off x="502920" y="1261872"/>
-            <a:ext cx="5468112" cy="3892253"/>
+            <a:off x="612648" y="1784242"/>
+            <a:ext cx="5230368" cy="1863051"/>
           </a:xfrm>
           <a:prstGeom prst="rect">
             <a:avLst/>
           </a:prstGeom>
         </p:spPr>
       </p:pic>
+      <p:sp>
+        <p:nvSpPr>
+          <p:cNvPr id="12" name="TextBox 11"/>
+          <p:cNvSpPr txBox="1"/>
+          <p:nvPr/>
+        </p:nvSpPr>
+        <p:spPr>
+          <a:xfrm>
+            <a:off x="6208776" y="1261872"/>
+            <a:ext cx="5449824" cy="2907792"/>
+          </a:xfrm>
+          <a:prstGeom prst="rect">
+            <a:avLst/>
+          </a:prstGeom>
+          <a:solidFill>
+            <a:srgbClr val="FFFFFF"/>
+          </a:solidFill>
+          <a:ln>
+            <a:solidFill>
+              <a:srgbClr val="DAD4CA"/>
+            </a:solidFill>
+          </a:ln>
+        </p:spPr>
+        <p:txBody>
+          <a:bodyPr wrap="square" lIns="109728" rIns="109728" tIns="109728" bIns="109728" anchor="t">
+            <a:spAutoFit/>
+          </a:bodyPr>
+          <a:lstStyle/>
+          <a:p>
+            <a:pPr algn="l"/>
+            <a:r>
+              <a:rPr sz="1700" b="0">
+                <a:solidFill>
+                  <a:srgbClr val="363A48"/>
+                </a:solidFill>
+                <a:latin typeface="Apple SD Gothic Neo"/>
+              </a:rPr>
+              <a:t/>
+            </a:r>
+          </a:p>
+        </p:txBody>
+      </p:sp>
       <p:pic>
         <p:nvPicPr>
-          <p:cNvPr id="11" name="Picture 10" descr="fig15_tiny_mt_bench_generalization.png"/>
+          <p:cNvPr id="13" name="Picture 12" descr="fig7_qsize_sensitivity.png"/>
           <p:cNvPicPr>
             <a:picLocks noChangeAspect="1"/>
           </p:cNvPicPr>
@@ -12778,8 +13372,8 @@
         </p:blipFill>
         <p:spPr>
           <a:xfrm>
-            <a:off x="6199632" y="1261872"/>
-            <a:ext cx="5468112" cy="2131906"/>
+            <a:off x="6840387" y="1371600"/>
+            <a:ext cx="4186602" cy="2688336"/>
           </a:xfrm>
           <a:prstGeom prst="rect">
             <a:avLst/>
@@ -12788,14 +13382,14 @@
       </p:pic>
       <p:sp>
         <p:nvSpPr>
-          <p:cNvPr id="12" name="TextBox 11"/>
-          <p:cNvSpPr txBox="1"/>
-          <p:nvPr/>
-        </p:nvSpPr>
-        <p:spPr>
-          <a:xfrm>
-            <a:off x="566928" y="4297680"/>
-            <a:ext cx="5340096" cy="201168"/>
+          <p:cNvPr id="14" name="TextBox 13"/>
+          <p:cNvSpPr txBox="1"/>
+          <p:nvPr/>
+        </p:nvSpPr>
+        <p:spPr>
+          <a:xfrm>
+            <a:off x="502920" y="4279392"/>
+            <a:ext cx="5449824" cy="201168"/>
           </a:xfrm>
           <a:prstGeom prst="rect">
             <a:avLst/>
@@ -12819,21 +13413,21 @@
                 </a:solidFill>
                 <a:latin typeface="Apple SD Gothic Neo"/>
               </a:rPr>
-              <a:t>Cross-family / external judge summary</a:t>
-            </a:r>
-          </a:p>
-        </p:txBody>
-      </p:sp>
-      <p:sp>
-        <p:nvSpPr>
-          <p:cNvPr id="13" name="TextBox 12"/>
-          <p:cNvSpPr txBox="1"/>
-          <p:nvPr/>
-        </p:nvSpPr>
-        <p:spPr>
-          <a:xfrm>
-            <a:off x="6263640" y="4297680"/>
-            <a:ext cx="5340096" cy="201168"/>
+              <a:t>same-set tinyMT-Bench upper bound</a:t>
+            </a:r>
+          </a:p>
+        </p:txBody>
+      </p:sp>
+      <p:sp>
+        <p:nvSpPr>
+          <p:cNvPr id="15" name="TextBox 14"/>
+          <p:cNvSpPr txBox="1"/>
+          <p:nvPr/>
+        </p:nvSpPr>
+        <p:spPr>
+          <a:xfrm>
+            <a:off x="6208776" y="4279392"/>
+            <a:ext cx="5449824" cy="201168"/>
           </a:xfrm>
           <a:prstGeom prst="rect">
             <a:avLst/>
@@ -12857,21 +13451,21 @@
                 </a:solidFill>
                 <a:latin typeface="Apple SD Gothic Neo"/>
               </a:rPr>
-              <a:t>330-split repeated hold-out generalization</a:t>
-            </a:r>
-          </a:p>
-        </p:txBody>
-      </p:sp>
-      <p:sp>
-        <p:nvSpPr>
-          <p:cNvPr id="14" name="TextBox 13"/>
-          <p:cNvSpPr txBox="1"/>
-          <p:nvPr/>
-        </p:nvSpPr>
-        <p:spPr>
-          <a:xfrm>
-            <a:off x="502920" y="4553712"/>
-            <a:ext cx="11155680" cy="1417320"/>
+              <a:t>question count sensitivity of random subsets</a:t>
+            </a:r>
+          </a:p>
+        </p:txBody>
+      </p:sp>
+      <p:sp>
+        <p:nvSpPr>
+          <p:cNvPr id="16" name="TextBox 15"/>
+          <p:cNvSpPr txBox="1"/>
+          <p:nvPr/>
+        </p:nvSpPr>
+        <p:spPr>
+          <a:xfrm>
+            <a:off x="502920" y="4535424"/>
+            <a:ext cx="11155680" cy="1353312"/>
           </a:xfrm>
           <a:prstGeom prst="rect">
             <a:avLst/>
@@ -12909,7 +13503,7 @@
               </a:defRPr>
             </a:pPr>
             <a:r>
-              <a:t>• InternLM20B는 Qwen32와 Spearman ρ=0.893로 broad ranking을 유지하지만, pairwise inconsistency는 47.44%로 더 noisy하다.</a:t>
+              <a:t>• TopDisc-40은 동일 7개 모델 집합에서 ρ=1.000, TopDisc-25는 ρ=0.964를 달성해 same-set upper bound로는 매우 강하다.</a:t>
             </a:r>
           </a:p>
           <a:p>
@@ -12931,7 +13525,7 @@
               </a:defRPr>
             </a:pPr>
             <a:r>
-              <a:t>• GPT-4o-mini는 Qwen32와 ρ=0.964, τ=0.905, pairwise inconsistency 33.99%로 가장 강한 외부 기준점이다.</a:t>
+              <a:t>• 반면 random subset은 평균적으로는 좋아져도 분산이 커서, 30문항에서는 mean ρ≈0.95여도 worst-case는 여전히 흔들린다.</a:t>
             </a:r>
           </a:p>
           <a:p>
@@ -12953,20 +13547,20 @@
               </a:defRPr>
             </a:pPr>
             <a:r>
-              <a:t>• tinyMT repeated hold-out 330 split에서는 60문항이 세 judge 모두 mean ρ≥0.97로 가장 안전한 운영점이었다.</a:t>
-            </a:r>
-          </a:p>
-        </p:txBody>
-      </p:sp>
-      <p:sp>
-        <p:nvSpPr>
-          <p:cNvPr id="15" name="TextBox 14"/>
-          <p:cNvSpPr txBox="1"/>
-          <p:nvPr/>
-        </p:nvSpPr>
-        <p:spPr>
-          <a:xfrm>
-            <a:off x="566928" y="5623560"/>
+              <a:t>• 즉 same-set 결과만 보면 40문항으로 절반 절감이 가능해 보이지만, 이 수치만으로 운영점을 확정하면 과감해진다.</a:t>
+            </a:r>
+          </a:p>
+        </p:txBody>
+      </p:sp>
+      <p:sp>
+        <p:nvSpPr>
+          <p:cNvPr id="17" name="TextBox 16"/>
+          <p:cNvSpPr txBox="1"/>
+          <p:nvPr/>
+        </p:nvSpPr>
+        <p:spPr>
+          <a:xfrm>
+            <a:off x="566928" y="5577840"/>
             <a:ext cx="2029968" cy="877824"/>
           </a:xfrm>
           <a:prstGeom prst="rect">
@@ -13002,13 +13596,13 @@
       </p:sp>
       <p:sp>
         <p:nvSpPr>
-          <p:cNvPr id="16" name="Rectangle 15"/>
+          <p:cNvPr id="18" name="Rectangle 17"/>
           <p:cNvSpPr/>
           <p:nvPr/>
         </p:nvSpPr>
         <p:spPr>
           <a:xfrm>
-            <a:off x="676656" y="5733288"/>
+            <a:off x="676656" y="5687568"/>
             <a:ext cx="502920" cy="182880"/>
           </a:xfrm>
           <a:prstGeom prst="rect">
@@ -13045,13 +13639,13 @@
       </p:sp>
       <p:sp>
         <p:nvSpPr>
-          <p:cNvPr id="17" name="TextBox 16"/>
-          <p:cNvSpPr txBox="1"/>
-          <p:nvPr/>
-        </p:nvSpPr>
-        <p:spPr>
-          <a:xfrm>
-            <a:off x="694944" y="5733288"/>
+          <p:cNvPr id="19" name="TextBox 18"/>
+          <p:cNvSpPr txBox="1"/>
+          <p:nvPr/>
+        </p:nvSpPr>
+        <p:spPr>
+          <a:xfrm>
+            <a:off x="694944" y="5687568"/>
             <a:ext cx="1691640" cy="182880"/>
           </a:xfrm>
           <a:prstGeom prst="rect">
@@ -13076,20 +13670,20 @@
                 </a:solidFill>
                 <a:latin typeface="Apple SD Gothic Neo"/>
               </a:rPr>
-              <a:t>InternLM20B</a:t>
-            </a:r>
-          </a:p>
-        </p:txBody>
-      </p:sp>
-      <p:sp>
-        <p:nvSpPr>
-          <p:cNvPr id="18" name="TextBox 17"/>
-          <p:cNvSpPr txBox="1"/>
-          <p:nvPr/>
-        </p:nvSpPr>
-        <p:spPr>
-          <a:xfrm>
-            <a:off x="676656" y="5971032"/>
+              <a:t>TopDisc-25</a:t>
+            </a:r>
+          </a:p>
+        </p:txBody>
+      </p:sp>
+      <p:sp>
+        <p:nvSpPr>
+          <p:cNvPr id="20" name="TextBox 19"/>
+          <p:cNvSpPr txBox="1"/>
+          <p:nvPr/>
+        </p:nvSpPr>
+        <p:spPr>
+          <a:xfrm>
+            <a:off x="676656" y="5925312"/>
             <a:ext cx="1737360" cy="310896"/>
           </a:xfrm>
           <a:prstGeom prst="rect">
@@ -13114,20 +13708,20 @@
                 </a:solidFill>
                 <a:latin typeface="Apple SD Gothic Neo"/>
               </a:rPr>
-              <a:t>ρ=0.893</a:t>
-            </a:r>
-          </a:p>
-        </p:txBody>
-      </p:sp>
-      <p:sp>
-        <p:nvSpPr>
-          <p:cNvPr id="19" name="TextBox 18"/>
-          <p:cNvSpPr txBox="1"/>
-          <p:nvPr/>
-        </p:nvSpPr>
-        <p:spPr>
-          <a:xfrm>
-            <a:off x="2779776" y="5623560"/>
+              <a:t>ρ=0.964</a:t>
+            </a:r>
+          </a:p>
+        </p:txBody>
+      </p:sp>
+      <p:sp>
+        <p:nvSpPr>
+          <p:cNvPr id="21" name="TextBox 20"/>
+          <p:cNvSpPr txBox="1"/>
+          <p:nvPr/>
+        </p:nvSpPr>
+        <p:spPr>
+          <a:xfrm>
+            <a:off x="2779776" y="5577840"/>
             <a:ext cx="2029968" cy="877824"/>
           </a:xfrm>
           <a:prstGeom prst="rect">
@@ -13163,13 +13757,13 @@
       </p:sp>
       <p:sp>
         <p:nvSpPr>
-          <p:cNvPr id="20" name="Rectangle 19"/>
+          <p:cNvPr id="22" name="Rectangle 21"/>
           <p:cNvSpPr/>
           <p:nvPr/>
         </p:nvSpPr>
         <p:spPr>
           <a:xfrm>
-            <a:off x="2889504" y="5733288"/>
+            <a:off x="2889504" y="5687568"/>
             <a:ext cx="502920" cy="182880"/>
           </a:xfrm>
           <a:prstGeom prst="rect">
@@ -13206,13 +13800,13 @@
       </p:sp>
       <p:sp>
         <p:nvSpPr>
-          <p:cNvPr id="21" name="TextBox 20"/>
-          <p:cNvSpPr txBox="1"/>
-          <p:nvPr/>
-        </p:nvSpPr>
-        <p:spPr>
-          <a:xfrm>
-            <a:off x="2907792" y="5733288"/>
+          <p:cNvPr id="23" name="TextBox 22"/>
+          <p:cNvSpPr txBox="1"/>
+          <p:nvPr/>
+        </p:nvSpPr>
+        <p:spPr>
+          <a:xfrm>
+            <a:off x="2907792" y="5687568"/>
             <a:ext cx="1691640" cy="182880"/>
           </a:xfrm>
           <a:prstGeom prst="rect">
@@ -13237,20 +13831,20 @@
                 </a:solidFill>
                 <a:latin typeface="Apple SD Gothic Neo"/>
               </a:rPr>
-              <a:t>GPT-4o-mini</a:t>
-            </a:r>
-          </a:p>
-        </p:txBody>
-      </p:sp>
-      <p:sp>
-        <p:nvSpPr>
-          <p:cNvPr id="22" name="TextBox 21"/>
-          <p:cNvSpPr txBox="1"/>
-          <p:nvPr/>
-        </p:nvSpPr>
-        <p:spPr>
-          <a:xfrm>
-            <a:off x="2889504" y="5971032"/>
+              <a:t>TopDisc-40</a:t>
+            </a:r>
+          </a:p>
+        </p:txBody>
+      </p:sp>
+      <p:sp>
+        <p:nvSpPr>
+          <p:cNvPr id="24" name="TextBox 23"/>
+          <p:cNvSpPr txBox="1"/>
+          <p:nvPr/>
+        </p:nvSpPr>
+        <p:spPr>
+          <a:xfrm>
+            <a:off x="2889504" y="5925312"/>
             <a:ext cx="1737360" cy="310896"/>
           </a:xfrm>
           <a:prstGeom prst="rect">
@@ -13275,20 +13869,20 @@
                 </a:solidFill>
                 <a:latin typeface="Apple SD Gothic Neo"/>
               </a:rPr>
-              <a:t>ρ=0.964</a:t>
-            </a:r>
-          </a:p>
-        </p:txBody>
-      </p:sp>
-      <p:sp>
-        <p:nvSpPr>
-          <p:cNvPr id="23" name="TextBox 22"/>
-          <p:cNvSpPr txBox="1"/>
-          <p:nvPr/>
-        </p:nvSpPr>
-        <p:spPr>
-          <a:xfrm>
-            <a:off x="4992624" y="5623560"/>
+              <a:t>ρ=1.000</a:t>
+            </a:r>
+          </a:p>
+        </p:txBody>
+      </p:sp>
+      <p:sp>
+        <p:nvSpPr>
+          <p:cNvPr id="25" name="TextBox 24"/>
+          <p:cNvSpPr txBox="1"/>
+          <p:nvPr/>
+        </p:nvSpPr>
+        <p:spPr>
+          <a:xfrm>
+            <a:off x="4992624" y="5577840"/>
             <a:ext cx="2029968" cy="877824"/>
           </a:xfrm>
           <a:prstGeom prst="rect">
@@ -13324,13 +13918,13 @@
       </p:sp>
       <p:sp>
         <p:nvSpPr>
-          <p:cNvPr id="24" name="Rectangle 23"/>
+          <p:cNvPr id="26" name="Rectangle 25"/>
           <p:cNvSpPr/>
           <p:nvPr/>
         </p:nvSpPr>
         <p:spPr>
           <a:xfrm>
-            <a:off x="5102352" y="5733288"/>
+            <a:off x="5102352" y="5687568"/>
             <a:ext cx="502920" cy="182880"/>
           </a:xfrm>
           <a:prstGeom prst="rect">
@@ -13367,13 +13961,13 @@
       </p:sp>
       <p:sp>
         <p:nvSpPr>
-          <p:cNvPr id="25" name="TextBox 24"/>
-          <p:cNvSpPr txBox="1"/>
-          <p:nvPr/>
-        </p:nvSpPr>
-        <p:spPr>
-          <a:xfrm>
-            <a:off x="5120640" y="5733288"/>
+          <p:cNvPr id="27" name="TextBox 26"/>
+          <p:cNvSpPr txBox="1"/>
+          <p:nvPr/>
+        </p:nvSpPr>
+        <p:spPr>
+          <a:xfrm>
+            <a:off x="5120640" y="5687568"/>
             <a:ext cx="1691640" cy="182880"/>
           </a:xfrm>
           <a:prstGeom prst="rect">
@@ -13398,20 +13992,20 @@
                 </a:solidFill>
                 <a:latin typeface="Apple SD Gothic Neo"/>
               </a:rPr>
-              <a:t>60문항</a:t>
-            </a:r>
-          </a:p>
-        </p:txBody>
-      </p:sp>
-      <p:sp>
-        <p:nvSpPr>
-          <p:cNvPr id="26" name="TextBox 25"/>
-          <p:cNvSpPr txBox="1"/>
-          <p:nvPr/>
-        </p:nvSpPr>
-        <p:spPr>
-          <a:xfrm>
-            <a:off x="5102352" y="5971032"/>
+              <a:t>Random 30</a:t>
+            </a:r>
+          </a:p>
+        </p:txBody>
+      </p:sp>
+      <p:sp>
+        <p:nvSpPr>
+          <p:cNvPr id="28" name="TextBox 27"/>
+          <p:cNvSpPr txBox="1"/>
+          <p:nvPr/>
+        </p:nvSpPr>
+        <p:spPr>
+          <a:xfrm>
+            <a:off x="5102352" y="5925312"/>
             <a:ext cx="1737360" cy="310896"/>
           </a:xfrm>
           <a:prstGeom prst="rect">
@@ -13436,20 +14030,20 @@
                 </a:solidFill>
                 <a:latin typeface="Apple SD Gothic Neo"/>
               </a:rPr>
-              <a:t>mean ρ≥0.97</a:t>
-            </a:r>
-          </a:p>
-        </p:txBody>
-      </p:sp>
-      <p:sp>
-        <p:nvSpPr>
-          <p:cNvPr id="27" name="TextBox 26"/>
-          <p:cNvSpPr txBox="1"/>
-          <p:nvPr/>
-        </p:nvSpPr>
-        <p:spPr>
-          <a:xfrm>
-            <a:off x="7205472" y="5623560"/>
+              <a:t>mean ρ≈0.95</a:t>
+            </a:r>
+          </a:p>
+        </p:txBody>
+      </p:sp>
+      <p:sp>
+        <p:nvSpPr>
+          <p:cNvPr id="29" name="TextBox 28"/>
+          <p:cNvSpPr txBox="1"/>
+          <p:nvPr/>
+        </p:nvSpPr>
+        <p:spPr>
+          <a:xfrm>
+            <a:off x="7205472" y="5577840"/>
             <a:ext cx="2029968" cy="877824"/>
           </a:xfrm>
           <a:prstGeom prst="rect">
@@ -13485,13 +14079,13 @@
       </p:sp>
       <p:sp>
         <p:nvSpPr>
-          <p:cNvPr id="28" name="Rectangle 27"/>
+          <p:cNvPr id="30" name="Rectangle 29"/>
           <p:cNvSpPr/>
           <p:nvPr/>
         </p:nvSpPr>
         <p:spPr>
           <a:xfrm>
-            <a:off x="7315200" y="5733288"/>
+            <a:off x="7315200" y="5687568"/>
             <a:ext cx="502920" cy="182880"/>
           </a:xfrm>
           <a:prstGeom prst="rect">
@@ -13528,13 +14122,13 @@
       </p:sp>
       <p:sp>
         <p:nvSpPr>
-          <p:cNvPr id="29" name="TextBox 28"/>
-          <p:cNvSpPr txBox="1"/>
-          <p:nvPr/>
-        </p:nvSpPr>
-        <p:spPr>
-          <a:xfrm>
-            <a:off x="7333488" y="5733288"/>
+          <p:cNvPr id="31" name="TextBox 30"/>
+          <p:cNvSpPr txBox="1"/>
+          <p:nvPr/>
+        </p:nvSpPr>
+        <p:spPr>
+          <a:xfrm>
+            <a:off x="7333488" y="5687568"/>
             <a:ext cx="1691640" cy="182880"/>
           </a:xfrm>
           <a:prstGeom prst="rect">
@@ -13566,13 +14160,13 @@
       </p:sp>
       <p:sp>
         <p:nvSpPr>
-          <p:cNvPr id="30" name="TextBox 29"/>
-          <p:cNvSpPr txBox="1"/>
-          <p:nvPr/>
-        </p:nvSpPr>
-        <p:spPr>
-          <a:xfrm>
-            <a:off x="7315200" y="5971032"/>
+          <p:cNvPr id="32" name="TextBox 31"/>
+          <p:cNvSpPr txBox="1"/>
+          <p:nvPr/>
+        </p:nvSpPr>
+        <p:spPr>
+          <a:xfrm>
+            <a:off x="7315200" y="5925312"/>
             <a:ext cx="1737360" cy="310896"/>
           </a:xfrm>
           <a:prstGeom prst="rect">
@@ -13597,7 +14191,7 @@
                 </a:solidFill>
                 <a:latin typeface="Apple SD Gothic Neo"/>
               </a:rPr>
-              <a:t>partial yes</a:t>
+              <a:t>same-set upper bound</a:t>
             </a:r>
           </a:p>
         </p:txBody>
@@ -13747,7 +14341,7 @@
                 </a:solidFill>
                 <a:latin typeface="Apple SD Gothic Neo"/>
               </a:rPr>
-              <a:t>4. 세 연구 질문에 대해 지금 무엇을 답할 수 있나</a:t>
+              <a:t>RQ4-2. hold-out과 다른 judge에서 안전한 운영점은 어디인가</a:t>
             </a:r>
           </a:p>
         </p:txBody>
@@ -13827,7 +14421,7 @@
                 </a:solidFill>
                 <a:latin typeface="Apple SD Gothic Neo"/>
               </a:rPr>
-              <a:t>18/19</a:t>
+              <a:t>18/20</a:t>
             </a:r>
           </a:p>
         </p:txBody>
@@ -13950,7 +14544,7 @@
                 </a:solidFill>
                 <a:latin typeface="Apple SD Gothic Neo"/>
               </a:rPr>
-              <a:t>이 슬라이드의 목적: 2부에서 처음 던진 세 연구 질문에 대한 현재 답을 한 장에서 닫아 준다.</a:t>
+              <a:t>이 슬라이드의 목적: cross-family judge sanity와 repeated hold-out 운영점을 함께 묶어 same-set 결과를 보수적으로 닫는다.</a:t>
             </a:r>
           </a:p>
         </p:txBody>
@@ -13963,50 +14557,8 @@
         </p:nvSpPr>
         <p:spPr>
           <a:xfrm>
-            <a:off x="502920" y="1298448"/>
-            <a:ext cx="11155680" cy="566928"/>
-          </a:xfrm>
-          <a:prstGeom prst="rect">
-            <a:avLst/>
-          </a:prstGeom>
-          <a:solidFill>
-            <a:srgbClr val="E2EAEF"/>
-          </a:solidFill>
-          <a:ln>
-            <a:solidFill>
-              <a:srgbClr val="E2EAEF"/>
-            </a:solidFill>
-          </a:ln>
-        </p:spPr>
-        <p:txBody>
-          <a:bodyPr wrap="square" lIns="64008" rIns="64008" tIns="64008" bIns="64008" anchor="ctr">
-            <a:spAutoFit/>
-          </a:bodyPr>
-          <a:lstStyle/>
-          <a:p>
-            <a:pPr algn="l"/>
-            <a:r>
-              <a:rPr sz="1900" b="1">
-                <a:solidFill>
-                  <a:srgbClr val="282C3A"/>
-                </a:solidFill>
-                <a:latin typeface="Apple SD Gothic Neo"/>
-              </a:rPr>
-              <a:t>따라서 이 발표의 결론은 ‘오픈소스 judge도 충분하다’가 아니라, ‘strong judge message는 부분적으로 재현되지만 boundary를 같이 말해야 한다’입니다.</a:t>
-            </a:r>
-          </a:p>
-        </p:txBody>
-      </p:sp>
-      <p:sp>
-        <p:nvSpPr>
-          <p:cNvPr id="11" name="TextBox 10"/>
-          <p:cNvSpPr txBox="1"/>
-          <p:nvPr/>
-        </p:nvSpPr>
-        <p:spPr>
-          <a:xfrm>
-            <a:off x="502920" y="2048256"/>
-            <a:ext cx="3553967" cy="1993392"/>
+            <a:off x="502920" y="1261872"/>
+            <a:ext cx="5449824" cy="2907792"/>
           </a:xfrm>
           <a:prstGeom prst="rect">
             <a:avLst/>
@@ -14039,6 +14591,30 @@
           </a:p>
         </p:txBody>
       </p:sp>
+      <p:pic>
+        <p:nvPicPr>
+          <p:cNvPr id="11" name="Picture 10" descr="fig16_phase345_judge_summary.png"/>
+          <p:cNvPicPr>
+            <a:picLocks noChangeAspect="1"/>
+          </p:cNvPicPr>
+          <p:nvPr/>
+        </p:nvPicPr>
+        <p:blipFill>
+          <a:blip r:embed="rId2"/>
+          <a:stretch>
+            <a:fillRect/>
+          </a:stretch>
+        </p:blipFill>
+        <p:spPr>
+          <a:xfrm>
+            <a:off x="1339450" y="1371600"/>
+            <a:ext cx="3776764" cy="2688336"/>
+          </a:xfrm>
+          <a:prstGeom prst="rect">
+            <a:avLst/>
+          </a:prstGeom>
+        </p:spPr>
+      </p:pic>
       <p:sp>
         <p:nvSpPr>
           <p:cNvPr id="12" name="TextBox 11"/>
@@ -14047,84 +14623,8 @@
         </p:nvSpPr>
         <p:spPr>
           <a:xfrm>
-            <a:off x="576072" y="2157984"/>
-            <a:ext cx="3407664" cy="237744"/>
-          </a:xfrm>
-          <a:prstGeom prst="rect">
-            <a:avLst/>
-          </a:prstGeom>
-          <a:noFill/>
-          <a:ln>
-            <a:noFill/>
-          </a:ln>
-        </p:spPr>
-        <p:txBody>
-          <a:bodyPr wrap="square" lIns="0" rIns="0" tIns="0" bIns="0" anchor="t">
-            <a:spAutoFit/>
-          </a:bodyPr>
-          <a:lstStyle/>
-          <a:p>
-            <a:pPr algn="l"/>
-            <a:r>
-              <a:rPr sz="1500" b="1">
-                <a:solidFill>
-                  <a:srgbClr val="3B586E"/>
-                </a:solidFill>
-                <a:latin typeface="Apple SD Gothic Neo"/>
-              </a:rPr>
-              <a:t>RQ1. judge scaling은 개선되는가</a:t>
-            </a:r>
-          </a:p>
-        </p:txBody>
-      </p:sp>
-      <p:sp>
-        <p:nvSpPr>
-          <p:cNvPr id="13" name="TextBox 12"/>
-          <p:cNvSpPr txBox="1"/>
-          <p:nvPr/>
-        </p:nvSpPr>
-        <p:spPr>
-          <a:xfrm>
-            <a:off x="576072" y="2542032"/>
-            <a:ext cx="3407664" cy="1152144"/>
-          </a:xfrm>
-          <a:prstGeom prst="rect">
-            <a:avLst/>
-          </a:prstGeom>
-          <a:noFill/>
-          <a:ln>
-            <a:noFill/>
-          </a:ln>
-        </p:spPr>
-        <p:txBody>
-          <a:bodyPr wrap="square" lIns="0" rIns="0" tIns="0" bIns="0" anchor="t">
-            <a:spAutoFit/>
-          </a:bodyPr>
-          <a:lstStyle/>
-          <a:p>
-            <a:pPr algn="l"/>
-            <a:r>
-              <a:rPr sz="1500" b="0">
-                <a:solidFill>
-                  <a:srgbClr val="363A48"/>
-                </a:solidFill>
-                <a:latin typeface="Apple SD Gothic Neo"/>
-              </a:rPr>
-              <a:t>예. Qwen judge scaling 결과에서는 7B → 14B → 32B로 갈수록 pairwise inconsistency가 뚜렷하게 줄었습니다.</a:t>
-            </a:r>
-          </a:p>
-        </p:txBody>
-      </p:sp>
-      <p:sp>
-        <p:nvSpPr>
-          <p:cNvPr id="14" name="TextBox 13"/>
-          <p:cNvSpPr txBox="1"/>
-          <p:nvPr/>
-        </p:nvSpPr>
-        <p:spPr>
-          <a:xfrm>
-            <a:off x="4221480" y="2048256"/>
-            <a:ext cx="3553967" cy="1993392"/>
+            <a:off x="6208776" y="1261872"/>
+            <a:ext cx="5449824" cy="2907792"/>
           </a:xfrm>
           <a:prstGeom prst="rect">
             <a:avLst/>
@@ -14157,6 +14657,68 @@
           </a:p>
         </p:txBody>
       </p:sp>
+      <p:pic>
+        <p:nvPicPr>
+          <p:cNvPr id="13" name="Picture 12" descr="fig15_tiny_mt_bench_generalization.png"/>
+          <p:cNvPicPr>
+            <a:picLocks noChangeAspect="1"/>
+          </p:cNvPicPr>
+          <p:nvPr/>
+        </p:nvPicPr>
+        <p:blipFill>
+          <a:blip r:embed="rId3"/>
+          <a:stretch>
+            <a:fillRect/>
+          </a:stretch>
+        </p:blipFill>
+        <p:spPr>
+          <a:xfrm>
+            <a:off x="6318504" y="1696161"/>
+            <a:ext cx="5230368" cy="2039214"/>
+          </a:xfrm>
+          <a:prstGeom prst="rect">
+            <a:avLst/>
+          </a:prstGeom>
+        </p:spPr>
+      </p:pic>
+      <p:sp>
+        <p:nvSpPr>
+          <p:cNvPr id="14" name="TextBox 13"/>
+          <p:cNvSpPr txBox="1"/>
+          <p:nvPr/>
+        </p:nvSpPr>
+        <p:spPr>
+          <a:xfrm>
+            <a:off x="502920" y="4279392"/>
+            <a:ext cx="5449824" cy="201168"/>
+          </a:xfrm>
+          <a:prstGeom prst="rect">
+            <a:avLst/>
+          </a:prstGeom>
+          <a:noFill/>
+          <a:ln>
+            <a:noFill/>
+          </a:ln>
+        </p:spPr>
+        <p:txBody>
+          <a:bodyPr wrap="square" lIns="64008" rIns="64008" tIns="64008" bIns="64008" anchor="t">
+            <a:spAutoFit/>
+          </a:bodyPr>
+          <a:lstStyle/>
+          <a:p>
+            <a:pPr algn="ctr"/>
+            <a:r>
+              <a:rPr sz="1000" b="0">
+                <a:solidFill>
+                  <a:srgbClr val="70767D"/>
+                </a:solidFill>
+                <a:latin typeface="Apple SD Gothic Neo"/>
+              </a:rPr>
+              <a:t>Cross-family and external judge summary</a:t>
+            </a:r>
+          </a:p>
+        </p:txBody>
+      </p:sp>
       <p:sp>
         <p:nvSpPr>
           <p:cNvPr id="15" name="TextBox 14"/>
@@ -14165,8 +14727,8 @@
         </p:nvSpPr>
         <p:spPr>
           <a:xfrm>
-            <a:off x="4294632" y="2157984"/>
-            <a:ext cx="3407664" cy="237744"/>
+            <a:off x="6208776" y="4279392"/>
+            <a:ext cx="5449824" cy="201168"/>
           </a:xfrm>
           <a:prstGeom prst="rect">
             <a:avLst/>
@@ -14177,20 +14739,20 @@
           </a:ln>
         </p:spPr>
         <p:txBody>
-          <a:bodyPr wrap="square" lIns="0" rIns="0" tIns="0" bIns="0" anchor="t">
-            <a:spAutoFit/>
-          </a:bodyPr>
-          <a:lstStyle/>
-          <a:p>
-            <a:pPr algn="l"/>
-            <a:r>
-              <a:rPr sz="1500" b="1">
-                <a:solidFill>
-                  <a:srgbClr val="3B586E"/>
-                </a:solidFill>
-                <a:latin typeface="Apple SD Gothic Neo"/>
-              </a:rPr>
-              <a:t>RQ2. 남는 오류는 어떤 구조인가</a:t>
+          <a:bodyPr wrap="square" lIns="64008" rIns="64008" tIns="64008" bIns="64008" anchor="t">
+            <a:spAutoFit/>
+          </a:bodyPr>
+          <a:lstStyle/>
+          <a:p>
+            <a:pPr algn="ctr"/>
+            <a:r>
+              <a:rPr sz="1000" b="0">
+                <a:solidFill>
+                  <a:srgbClr val="70767D"/>
+                </a:solidFill>
+                <a:latin typeface="Apple SD Gothic Neo"/>
+              </a:rPr>
+              <a:t>330-split repeated hold-out generalization</a:t>
             </a:r>
           </a:p>
         </p:txBody>
@@ -14203,164 +14765,8 @@
         </p:nvSpPr>
         <p:spPr>
           <a:xfrm>
-            <a:off x="4294632" y="2542032"/>
-            <a:ext cx="3407664" cy="1152144"/>
-          </a:xfrm>
-          <a:prstGeom prst="rect">
-            <a:avLst/>
-          </a:prstGeom>
-          <a:noFill/>
-          <a:ln>
-            <a:noFill/>
-          </a:ln>
-        </p:spPr>
-        <p:txBody>
-          <a:bodyPr wrap="square" lIns="0" rIns="0" tIns="0" bIns="0" anchor="t">
-            <a:spAutoFit/>
-          </a:bodyPr>
-          <a:lstStyle/>
-          <a:p>
-            <a:pPr algn="l"/>
-            <a:r>
-              <a:rPr sz="1500" b="0">
-                <a:solidFill>
-                  <a:srgbClr val="363A48"/>
-                </a:solidFill>
-                <a:latin typeface="Apple SD Gothic Neo"/>
-              </a:rPr>
-              <a:t>단순 noise가 아니라 first-position bias와 format failure처럼 구조화됩니다. 그래서 abstain ensemble이 의미를 가집니다.</a:t>
-            </a:r>
-          </a:p>
-        </p:txBody>
-      </p:sp>
-      <p:sp>
-        <p:nvSpPr>
-          <p:cNvPr id="17" name="TextBox 16"/>
-          <p:cNvSpPr txBox="1"/>
-          <p:nvPr/>
-        </p:nvSpPr>
-        <p:spPr>
-          <a:xfrm>
-            <a:off x="7940040" y="2048256"/>
-            <a:ext cx="3553967" cy="1993392"/>
-          </a:xfrm>
-          <a:prstGeom prst="rect">
-            <a:avLst/>
-          </a:prstGeom>
-          <a:solidFill>
-            <a:srgbClr val="FFFFFF"/>
-          </a:solidFill>
-          <a:ln>
-            <a:solidFill>
-              <a:srgbClr val="DAD4CA"/>
-            </a:solidFill>
-          </a:ln>
-        </p:spPr>
-        <p:txBody>
-          <a:bodyPr wrap="square" lIns="109728" rIns="109728" tIns="109728" bIns="109728" anchor="t">
-            <a:spAutoFit/>
-          </a:bodyPr>
-          <a:lstStyle/>
-          <a:p>
-            <a:pPr algn="l"/>
-            <a:r>
-              <a:rPr sz="1700" b="0">
-                <a:solidFill>
-                  <a:srgbClr val="363A48"/>
-                </a:solidFill>
-                <a:latin typeface="Apple SD Gothic Neo"/>
-              </a:rPr>
-              <a:t/>
-            </a:r>
-          </a:p>
-        </p:txBody>
-      </p:sp>
-      <p:sp>
-        <p:nvSpPr>
-          <p:cNvPr id="18" name="TextBox 17"/>
-          <p:cNvSpPr txBox="1"/>
-          <p:nvPr/>
-        </p:nvSpPr>
-        <p:spPr>
-          <a:xfrm>
-            <a:off x="8013192" y="2157984"/>
-            <a:ext cx="3407664" cy="237744"/>
-          </a:xfrm>
-          <a:prstGeom prst="rect">
-            <a:avLst/>
-          </a:prstGeom>
-          <a:noFill/>
-          <a:ln>
-            <a:noFill/>
-          </a:ln>
-        </p:spPr>
-        <p:txBody>
-          <a:bodyPr wrap="square" lIns="0" rIns="0" tIns="0" bIns="0" anchor="t">
-            <a:spAutoFit/>
-          </a:bodyPr>
-          <a:lstStyle/>
-          <a:p>
-            <a:pPr algn="l"/>
-            <a:r>
-              <a:rPr sz="1500" b="1">
-                <a:solidFill>
-                  <a:srgbClr val="3B586E"/>
-                </a:solidFill>
-                <a:latin typeface="Apple SD Gothic Neo"/>
-              </a:rPr>
-              <a:t>RQ3. 그 결론은 남는가</a:t>
-            </a:r>
-          </a:p>
-        </p:txBody>
-      </p:sp>
-      <p:sp>
-        <p:nvSpPr>
-          <p:cNvPr id="19" name="TextBox 18"/>
-          <p:cNvSpPr txBox="1"/>
-          <p:nvPr/>
-        </p:nvSpPr>
-        <p:spPr>
-          <a:xfrm>
-            <a:off x="8013192" y="2542032"/>
-            <a:ext cx="3407664" cy="1152144"/>
-          </a:xfrm>
-          <a:prstGeom prst="rect">
-            <a:avLst/>
-          </a:prstGeom>
-          <a:noFill/>
-          <a:ln>
-            <a:noFill/>
-          </a:ln>
-        </p:spPr>
-        <p:txBody>
-          <a:bodyPr wrap="square" lIns="0" rIns="0" tIns="0" bIns="0" anchor="t">
-            <a:spAutoFit/>
-          </a:bodyPr>
-          <a:lstStyle/>
-          <a:p>
-            <a:pPr algn="l"/>
-            <a:r>
-              <a:rPr sz="1500" b="0">
-                <a:solidFill>
-                  <a:srgbClr val="363A48"/>
-                </a:solidFill>
-                <a:latin typeface="Apple SD Gothic Neo"/>
-              </a:rPr>
-              <a:t>부분적으로 예. InternLM20B·GPT-4o-mini·repeated hold-out이 broad claim을 지지하지만, 모든 open judge에 대한 보편 법칙은 아닙니다.</a:t>
-            </a:r>
-          </a:p>
-        </p:txBody>
-      </p:sp>
-      <p:sp>
-        <p:nvSpPr>
-          <p:cNvPr id="20" name="TextBox 19"/>
-          <p:cNvSpPr txBox="1"/>
-          <p:nvPr/>
-        </p:nvSpPr>
-        <p:spPr>
-          <a:xfrm>
-            <a:off x="502920" y="4407408"/>
-            <a:ext cx="11155680" cy="1225296"/>
+            <a:off x="502920" y="4535424"/>
+            <a:ext cx="11155680" cy="1353312"/>
           </a:xfrm>
           <a:prstGeom prst="rect">
             <a:avLst/>
@@ -14398,7 +14804,695 @@
               </a:defRPr>
             </a:pPr>
             <a:r>
-              <a:t>• RQ1, RQ2, RQ3를 다시 부르면 2부가 phase 나열이 아니라 하나의 argument로 닫힙니다.</a:t>
+              <a:t>• InternLM20B는 Qwen32와 ρ=0.893, GPT-4o-mini는 ρ=0.964로 broad ranking pattern을 유지해 Qwen 결과가 완전한 family artifact는 아님을 보여준다.</a:t>
+            </a:r>
+          </a:p>
+          <a:p>
+            <a:pPr>
+              <a:lnSpc>
+                <a:spcPct val="112000"/>
+              </a:lnSpc>
+              <a:spcBef>
+                <a:spcPts val="0"/>
+              </a:spcBef>
+              <a:spcAft>
+                <a:spcPts val="800"/>
+              </a:spcAft>
+              <a:defRPr sz="1600">
+                <a:solidFill>
+                  <a:srgbClr val="363A48"/>
+                </a:solidFill>
+                <a:latin typeface="Apple SD Gothic Neo"/>
+              </a:defRPr>
+            </a:pPr>
+            <a:r>
+              <a:t>• 다만 exact pairwise agreement는 0.50~0.58 수준이라 judge 간 broad consistency와 question-level cleanliness는 여전히 구분해야 한다.</a:t>
+            </a:r>
+          </a:p>
+          <a:p>
+            <a:pPr>
+              <a:lnSpc>
+                <a:spcPct val="112000"/>
+              </a:lnSpc>
+              <a:spcBef>
+                <a:spcPts val="0"/>
+              </a:spcBef>
+              <a:spcAft>
+                <a:spcPts val="800"/>
+              </a:spcAft>
+              <a:defRPr sz="1600">
+                <a:solidFill>
+                  <a:srgbClr val="363A48"/>
+                </a:solidFill>
+                <a:latin typeface="Apple SD Gothic Neo"/>
+              </a:defRPr>
+            </a:pPr>
+            <a:r>
+              <a:t>• Repeated hold-out 330 split에서는 40문항도 strong하지만, 세 judge 모두에서 가장 안전한 운영점은 60문항(mean ρ≈0.998 / 0.995 / 0.972)이다.</a:t>
+            </a:r>
+          </a:p>
+        </p:txBody>
+      </p:sp>
+      <p:sp>
+        <p:nvSpPr>
+          <p:cNvPr id="17" name="TextBox 16"/>
+          <p:cNvSpPr txBox="1"/>
+          <p:nvPr/>
+        </p:nvSpPr>
+        <p:spPr>
+          <a:xfrm>
+            <a:off x="566928" y="5577840"/>
+            <a:ext cx="2029968" cy="877824"/>
+          </a:xfrm>
+          <a:prstGeom prst="rect">
+            <a:avLst/>
+          </a:prstGeom>
+          <a:solidFill>
+            <a:srgbClr val="FFFFFF"/>
+          </a:solidFill>
+          <a:ln>
+            <a:solidFill>
+              <a:srgbClr val="DAD4CA"/>
+            </a:solidFill>
+          </a:ln>
+        </p:spPr>
+        <p:txBody>
+          <a:bodyPr wrap="square" lIns="54864" rIns="54864" tIns="54864" bIns="54864" anchor="t">
+            <a:spAutoFit/>
+          </a:bodyPr>
+          <a:lstStyle/>
+          <a:p>
+            <a:pPr algn="l"/>
+            <a:r>
+              <a:rPr sz="1700" b="0">
+                <a:solidFill>
+                  <a:srgbClr val="363A48"/>
+                </a:solidFill>
+                <a:latin typeface="Apple SD Gothic Neo"/>
+              </a:rPr>
+              <a:t/>
+            </a:r>
+          </a:p>
+        </p:txBody>
+      </p:sp>
+      <p:sp>
+        <p:nvSpPr>
+          <p:cNvPr id="18" name="Rectangle 17"/>
+          <p:cNvSpPr/>
+          <p:nvPr/>
+        </p:nvSpPr>
+        <p:spPr>
+          <a:xfrm>
+            <a:off x="676656" y="5687568"/>
+            <a:ext cx="502920" cy="182880"/>
+          </a:xfrm>
+          <a:prstGeom prst="rect">
+            <a:avLst/>
+          </a:prstGeom>
+          <a:solidFill>
+            <a:srgbClr val="375667"/>
+          </a:solidFill>
+          <a:ln>
+            <a:noFill/>
+          </a:ln>
+        </p:spPr>
+        <p:style>
+          <a:lnRef idx="1">
+            <a:schemeClr val="accent1"/>
+          </a:lnRef>
+          <a:fillRef idx="3">
+            <a:schemeClr val="accent1"/>
+          </a:fillRef>
+          <a:effectRef idx="2">
+            <a:schemeClr val="accent1"/>
+          </a:effectRef>
+          <a:fontRef idx="minor">
+            <a:schemeClr val="lt1"/>
+          </a:fontRef>
+        </p:style>
+        <p:txBody>
+          <a:bodyPr rtlCol="0" anchor="ctr"/>
+          <a:lstStyle/>
+          <a:p>
+            <a:pPr algn="ctr"/>
+          </a:p>
+        </p:txBody>
+      </p:sp>
+      <p:sp>
+        <p:nvSpPr>
+          <p:cNvPr id="19" name="TextBox 18"/>
+          <p:cNvSpPr txBox="1"/>
+          <p:nvPr/>
+        </p:nvSpPr>
+        <p:spPr>
+          <a:xfrm>
+            <a:off x="694944" y="5687568"/>
+            <a:ext cx="1691640" cy="182880"/>
+          </a:xfrm>
+          <a:prstGeom prst="rect">
+            <a:avLst/>
+          </a:prstGeom>
+          <a:noFill/>
+          <a:ln>
+            <a:noFill/>
+          </a:ln>
+        </p:spPr>
+        <p:txBody>
+          <a:bodyPr wrap="square" lIns="9144" rIns="9144" tIns="9144" bIns="9144" anchor="ctr">
+            <a:spAutoFit/>
+          </a:bodyPr>
+          <a:lstStyle/>
+          <a:p>
+            <a:pPr algn="l"/>
+            <a:r>
+              <a:rPr sz="900" b="1">
+                <a:solidFill>
+                  <a:srgbClr val="FFFFFF"/>
+                </a:solidFill>
+                <a:latin typeface="Apple SD Gothic Neo"/>
+              </a:rPr>
+              <a:t>InternLM20B</a:t>
+            </a:r>
+          </a:p>
+        </p:txBody>
+      </p:sp>
+      <p:sp>
+        <p:nvSpPr>
+          <p:cNvPr id="20" name="TextBox 19"/>
+          <p:cNvSpPr txBox="1"/>
+          <p:nvPr/>
+        </p:nvSpPr>
+        <p:spPr>
+          <a:xfrm>
+            <a:off x="676656" y="5925312"/>
+            <a:ext cx="1737360" cy="310896"/>
+          </a:xfrm>
+          <a:prstGeom prst="rect">
+            <a:avLst/>
+          </a:prstGeom>
+          <a:noFill/>
+          <a:ln>
+            <a:noFill/>
+          </a:ln>
+        </p:spPr>
+        <p:txBody>
+          <a:bodyPr wrap="square" lIns="9144" rIns="9144" tIns="9144" bIns="9144" anchor="t">
+            <a:spAutoFit/>
+          </a:bodyPr>
+          <a:lstStyle/>
+          <a:p>
+            <a:pPr algn="l"/>
+            <a:r>
+              <a:rPr sz="1900" b="1">
+                <a:solidFill>
+                  <a:srgbClr val="282C3A"/>
+                </a:solidFill>
+                <a:latin typeface="Apple SD Gothic Neo"/>
+              </a:rPr>
+              <a:t>ρ=0.893</a:t>
+            </a:r>
+          </a:p>
+        </p:txBody>
+      </p:sp>
+      <p:sp>
+        <p:nvSpPr>
+          <p:cNvPr id="21" name="TextBox 20"/>
+          <p:cNvSpPr txBox="1"/>
+          <p:nvPr/>
+        </p:nvSpPr>
+        <p:spPr>
+          <a:xfrm>
+            <a:off x="2779776" y="5577840"/>
+            <a:ext cx="2029968" cy="877824"/>
+          </a:xfrm>
+          <a:prstGeom prst="rect">
+            <a:avLst/>
+          </a:prstGeom>
+          <a:solidFill>
+            <a:srgbClr val="FFFFFF"/>
+          </a:solidFill>
+          <a:ln>
+            <a:solidFill>
+              <a:srgbClr val="DAD4CA"/>
+            </a:solidFill>
+          </a:ln>
+        </p:spPr>
+        <p:txBody>
+          <a:bodyPr wrap="square" lIns="54864" rIns="54864" tIns="54864" bIns="54864" anchor="t">
+            <a:spAutoFit/>
+          </a:bodyPr>
+          <a:lstStyle/>
+          <a:p>
+            <a:pPr algn="l"/>
+            <a:r>
+              <a:rPr sz="1700" b="0">
+                <a:solidFill>
+                  <a:srgbClr val="363A48"/>
+                </a:solidFill>
+                <a:latin typeface="Apple SD Gothic Neo"/>
+              </a:rPr>
+              <a:t/>
+            </a:r>
+          </a:p>
+        </p:txBody>
+      </p:sp>
+      <p:sp>
+        <p:nvSpPr>
+          <p:cNvPr id="22" name="Rectangle 21"/>
+          <p:cNvSpPr/>
+          <p:nvPr/>
+        </p:nvSpPr>
+        <p:spPr>
+          <a:xfrm>
+            <a:off x="2889504" y="5687568"/>
+            <a:ext cx="502920" cy="182880"/>
+          </a:xfrm>
+          <a:prstGeom prst="rect">
+            <a:avLst/>
+          </a:prstGeom>
+          <a:solidFill>
+            <a:srgbClr val="B5654E"/>
+          </a:solidFill>
+          <a:ln>
+            <a:noFill/>
+          </a:ln>
+        </p:spPr>
+        <p:style>
+          <a:lnRef idx="1">
+            <a:schemeClr val="accent1"/>
+          </a:lnRef>
+          <a:fillRef idx="3">
+            <a:schemeClr val="accent1"/>
+          </a:fillRef>
+          <a:effectRef idx="2">
+            <a:schemeClr val="accent1"/>
+          </a:effectRef>
+          <a:fontRef idx="minor">
+            <a:schemeClr val="lt1"/>
+          </a:fontRef>
+        </p:style>
+        <p:txBody>
+          <a:bodyPr rtlCol="0" anchor="ctr"/>
+          <a:lstStyle/>
+          <a:p>
+            <a:pPr algn="ctr"/>
+          </a:p>
+        </p:txBody>
+      </p:sp>
+      <p:sp>
+        <p:nvSpPr>
+          <p:cNvPr id="23" name="TextBox 22"/>
+          <p:cNvSpPr txBox="1"/>
+          <p:nvPr/>
+        </p:nvSpPr>
+        <p:spPr>
+          <a:xfrm>
+            <a:off x="2907792" y="5687568"/>
+            <a:ext cx="1691640" cy="182880"/>
+          </a:xfrm>
+          <a:prstGeom prst="rect">
+            <a:avLst/>
+          </a:prstGeom>
+          <a:noFill/>
+          <a:ln>
+            <a:noFill/>
+          </a:ln>
+        </p:spPr>
+        <p:txBody>
+          <a:bodyPr wrap="square" lIns="9144" rIns="9144" tIns="9144" bIns="9144" anchor="ctr">
+            <a:spAutoFit/>
+          </a:bodyPr>
+          <a:lstStyle/>
+          <a:p>
+            <a:pPr algn="l"/>
+            <a:r>
+              <a:rPr sz="900" b="1">
+                <a:solidFill>
+                  <a:srgbClr val="FFFFFF"/>
+                </a:solidFill>
+                <a:latin typeface="Apple SD Gothic Neo"/>
+              </a:rPr>
+              <a:t>GPT-4o-mini</a:t>
+            </a:r>
+          </a:p>
+        </p:txBody>
+      </p:sp>
+      <p:sp>
+        <p:nvSpPr>
+          <p:cNvPr id="24" name="TextBox 23"/>
+          <p:cNvSpPr txBox="1"/>
+          <p:nvPr/>
+        </p:nvSpPr>
+        <p:spPr>
+          <a:xfrm>
+            <a:off x="2889504" y="5925312"/>
+            <a:ext cx="1737360" cy="310896"/>
+          </a:xfrm>
+          <a:prstGeom prst="rect">
+            <a:avLst/>
+          </a:prstGeom>
+          <a:noFill/>
+          <a:ln>
+            <a:noFill/>
+          </a:ln>
+        </p:spPr>
+        <p:txBody>
+          <a:bodyPr wrap="square" lIns="9144" rIns="9144" tIns="9144" bIns="9144" anchor="t">
+            <a:spAutoFit/>
+          </a:bodyPr>
+          <a:lstStyle/>
+          <a:p>
+            <a:pPr algn="l"/>
+            <a:r>
+              <a:rPr sz="1900" b="1">
+                <a:solidFill>
+                  <a:srgbClr val="282C3A"/>
+                </a:solidFill>
+                <a:latin typeface="Apple SD Gothic Neo"/>
+              </a:rPr>
+              <a:t>ρ=0.964</a:t>
+            </a:r>
+          </a:p>
+        </p:txBody>
+      </p:sp>
+      <p:sp>
+        <p:nvSpPr>
+          <p:cNvPr id="25" name="TextBox 24"/>
+          <p:cNvSpPr txBox="1"/>
+          <p:nvPr/>
+        </p:nvSpPr>
+        <p:spPr>
+          <a:xfrm>
+            <a:off x="4992624" y="5577840"/>
+            <a:ext cx="2029968" cy="877824"/>
+          </a:xfrm>
+          <a:prstGeom prst="rect">
+            <a:avLst/>
+          </a:prstGeom>
+          <a:solidFill>
+            <a:srgbClr val="FFFFFF"/>
+          </a:solidFill>
+          <a:ln>
+            <a:solidFill>
+              <a:srgbClr val="DAD4CA"/>
+            </a:solidFill>
+          </a:ln>
+        </p:spPr>
+        <p:txBody>
+          <a:bodyPr wrap="square" lIns="54864" rIns="54864" tIns="54864" bIns="54864" anchor="t">
+            <a:spAutoFit/>
+          </a:bodyPr>
+          <a:lstStyle/>
+          <a:p>
+            <a:pPr algn="l"/>
+            <a:r>
+              <a:rPr sz="1700" b="0">
+                <a:solidFill>
+                  <a:srgbClr val="363A48"/>
+                </a:solidFill>
+                <a:latin typeface="Apple SD Gothic Neo"/>
+              </a:rPr>
+              <a:t/>
+            </a:r>
+          </a:p>
+        </p:txBody>
+      </p:sp>
+      <p:sp>
+        <p:nvSpPr>
+          <p:cNvPr id="26" name="Rectangle 25"/>
+          <p:cNvSpPr/>
+          <p:nvPr/>
+        </p:nvSpPr>
+        <p:spPr>
+          <a:xfrm>
+            <a:off x="5102352" y="5687568"/>
+            <a:ext cx="502920" cy="182880"/>
+          </a:xfrm>
+          <a:prstGeom prst="rect">
+            <a:avLst/>
+          </a:prstGeom>
+          <a:solidFill>
+            <a:srgbClr val="BF9A5E"/>
+          </a:solidFill>
+          <a:ln>
+            <a:noFill/>
+          </a:ln>
+        </p:spPr>
+        <p:style>
+          <a:lnRef idx="1">
+            <a:schemeClr val="accent1"/>
+          </a:lnRef>
+          <a:fillRef idx="3">
+            <a:schemeClr val="accent1"/>
+          </a:fillRef>
+          <a:effectRef idx="2">
+            <a:schemeClr val="accent1"/>
+          </a:effectRef>
+          <a:fontRef idx="minor">
+            <a:schemeClr val="lt1"/>
+          </a:fontRef>
+        </p:style>
+        <p:txBody>
+          <a:bodyPr rtlCol="0" anchor="ctr"/>
+          <a:lstStyle/>
+          <a:p>
+            <a:pPr algn="ctr"/>
+          </a:p>
+        </p:txBody>
+      </p:sp>
+      <p:sp>
+        <p:nvSpPr>
+          <p:cNvPr id="27" name="TextBox 26"/>
+          <p:cNvSpPr txBox="1"/>
+          <p:nvPr/>
+        </p:nvSpPr>
+        <p:spPr>
+          <a:xfrm>
+            <a:off x="5120640" y="5687568"/>
+            <a:ext cx="1691640" cy="182880"/>
+          </a:xfrm>
+          <a:prstGeom prst="rect">
+            <a:avLst/>
+          </a:prstGeom>
+          <a:noFill/>
+          <a:ln>
+            <a:noFill/>
+          </a:ln>
+        </p:spPr>
+        <p:txBody>
+          <a:bodyPr wrap="square" lIns="9144" rIns="9144" tIns="9144" bIns="9144" anchor="ctr">
+            <a:spAutoFit/>
+          </a:bodyPr>
+          <a:lstStyle/>
+          <a:p>
+            <a:pPr algn="l"/>
+            <a:r>
+              <a:rPr sz="900" b="1">
+                <a:solidFill>
+                  <a:srgbClr val="FFFFFF"/>
+                </a:solidFill>
+                <a:latin typeface="Apple SD Gothic Neo"/>
+              </a:rPr>
+              <a:t>60문항</a:t>
+            </a:r>
+          </a:p>
+        </p:txBody>
+      </p:sp>
+      <p:sp>
+        <p:nvSpPr>
+          <p:cNvPr id="28" name="TextBox 27"/>
+          <p:cNvSpPr txBox="1"/>
+          <p:nvPr/>
+        </p:nvSpPr>
+        <p:spPr>
+          <a:xfrm>
+            <a:off x="5102352" y="5925312"/>
+            <a:ext cx="1737360" cy="310896"/>
+          </a:xfrm>
+          <a:prstGeom prst="rect">
+            <a:avLst/>
+          </a:prstGeom>
+          <a:noFill/>
+          <a:ln>
+            <a:noFill/>
+          </a:ln>
+        </p:spPr>
+        <p:txBody>
+          <a:bodyPr wrap="square" lIns="9144" rIns="9144" tIns="9144" bIns="9144" anchor="t">
+            <a:spAutoFit/>
+          </a:bodyPr>
+          <a:lstStyle/>
+          <a:p>
+            <a:pPr algn="l"/>
+            <a:r>
+              <a:rPr sz="1900" b="1">
+                <a:solidFill>
+                  <a:srgbClr val="282C3A"/>
+                </a:solidFill>
+                <a:latin typeface="Apple SD Gothic Neo"/>
+              </a:rPr>
+              <a:t>three-judge safe zone</a:t>
+            </a:r>
+          </a:p>
+        </p:txBody>
+      </p:sp>
+      <p:sp>
+        <p:nvSpPr>
+          <p:cNvPr id="29" name="TextBox 28"/>
+          <p:cNvSpPr txBox="1"/>
+          <p:nvPr/>
+        </p:nvSpPr>
+        <p:spPr>
+          <a:xfrm>
+            <a:off x="7205472" y="5577840"/>
+            <a:ext cx="2029968" cy="877824"/>
+          </a:xfrm>
+          <a:prstGeom prst="rect">
+            <a:avLst/>
+          </a:prstGeom>
+          <a:solidFill>
+            <a:srgbClr val="FFFFFF"/>
+          </a:solidFill>
+          <a:ln>
+            <a:solidFill>
+              <a:srgbClr val="DAD4CA"/>
+            </a:solidFill>
+          </a:ln>
+        </p:spPr>
+        <p:txBody>
+          <a:bodyPr wrap="square" lIns="54864" rIns="54864" tIns="54864" bIns="54864" anchor="t">
+            <a:spAutoFit/>
+          </a:bodyPr>
+          <a:lstStyle/>
+          <a:p>
+            <a:pPr algn="l"/>
+            <a:r>
+              <a:rPr sz="1700" b="0">
+                <a:solidFill>
+                  <a:srgbClr val="363A48"/>
+                </a:solidFill>
+                <a:latin typeface="Apple SD Gothic Neo"/>
+              </a:rPr>
+              <a:t/>
+            </a:r>
+          </a:p>
+        </p:txBody>
+      </p:sp>
+      <p:sp>
+        <p:nvSpPr>
+          <p:cNvPr id="30" name="Rectangle 29"/>
+          <p:cNvSpPr/>
+          <p:nvPr/>
+        </p:nvSpPr>
+        <p:spPr>
+          <a:xfrm>
+            <a:off x="7315200" y="5687568"/>
+            <a:ext cx="502920" cy="182880"/>
+          </a:xfrm>
+          <a:prstGeom prst="rect">
+            <a:avLst/>
+          </a:prstGeom>
+          <a:solidFill>
+            <a:srgbClr val="668185"/>
+          </a:solidFill>
+          <a:ln>
+            <a:noFill/>
+          </a:ln>
+        </p:spPr>
+        <p:style>
+          <a:lnRef idx="1">
+            <a:schemeClr val="accent1"/>
+          </a:lnRef>
+          <a:fillRef idx="3">
+            <a:schemeClr val="accent1"/>
+          </a:fillRef>
+          <a:effectRef idx="2">
+            <a:schemeClr val="accent1"/>
+          </a:effectRef>
+          <a:fontRef idx="minor">
+            <a:schemeClr val="lt1"/>
+          </a:fontRef>
+        </p:style>
+        <p:txBody>
+          <a:bodyPr rtlCol="0" anchor="ctr"/>
+          <a:lstStyle/>
+          <a:p>
+            <a:pPr algn="ctr"/>
+          </a:p>
+        </p:txBody>
+      </p:sp>
+      <p:sp>
+        <p:nvSpPr>
+          <p:cNvPr id="31" name="TextBox 30"/>
+          <p:cNvSpPr txBox="1"/>
+          <p:nvPr/>
+        </p:nvSpPr>
+        <p:spPr>
+          <a:xfrm>
+            <a:off x="7333488" y="5687568"/>
+            <a:ext cx="1691640" cy="182880"/>
+          </a:xfrm>
+          <a:prstGeom prst="rect">
+            <a:avLst/>
+          </a:prstGeom>
+          <a:noFill/>
+          <a:ln>
+            <a:noFill/>
+          </a:ln>
+        </p:spPr>
+        <p:txBody>
+          <a:bodyPr wrap="square" lIns="9144" rIns="9144" tIns="9144" bIns="9144" anchor="ctr">
+            <a:spAutoFit/>
+          </a:bodyPr>
+          <a:lstStyle/>
+          <a:p>
+            <a:pPr algn="l"/>
+            <a:r>
+              <a:rPr sz="900" b="1">
+                <a:solidFill>
+                  <a:srgbClr val="FFFFFF"/>
+                </a:solidFill>
+                <a:latin typeface="Apple SD Gothic Neo"/>
+              </a:rPr>
+              <a:t>해석</a:t>
+            </a:r>
+          </a:p>
+        </p:txBody>
+      </p:sp>
+      <p:sp>
+        <p:nvSpPr>
+          <p:cNvPr id="32" name="TextBox 31"/>
+          <p:cNvSpPr txBox="1"/>
+          <p:nvPr/>
+        </p:nvSpPr>
+        <p:spPr>
+          <a:xfrm>
+            <a:off x="7315200" y="5925312"/>
+            <a:ext cx="1737360" cy="310896"/>
+          </a:xfrm>
+          <a:prstGeom prst="rect">
+            <a:avLst/>
+          </a:prstGeom>
+          <a:noFill/>
+          <a:ln>
+            <a:noFill/>
+          </a:ln>
+        </p:spPr>
+        <p:txBody>
+          <a:bodyPr wrap="square" lIns="9144" rIns="9144" tIns="9144" bIns="9144" anchor="t">
+            <a:spAutoFit/>
+          </a:bodyPr>
+          <a:lstStyle/>
+          <a:p>
+            <a:pPr algn="l"/>
+            <a:r>
+              <a:rPr sz="1900" b="1">
+                <a:solidFill>
+                  <a:srgbClr val="282C3A"/>
+                </a:solidFill>
+                <a:latin typeface="Apple SD Gothic Neo"/>
+              </a:rPr>
+              <a:t>preliminary but strong</a:t>
             </a:r>
           </a:p>
         </p:txBody>
@@ -14548,7 +15642,7 @@
                 </a:solidFill>
                 <a:latin typeface="Apple SD Gothic Neo"/>
               </a:rPr>
-              <a:t>질문 전에: 저장소는 이렇게 읽으면 됩니다</a:t>
+              <a:t>2-3. 네 연구 질문에 대한 현재 답</a:t>
             </a:r>
           </a:p>
         </p:txBody>
@@ -14628,7 +15722,7 @@
                 </a:solidFill>
                 <a:latin typeface="Apple SD Gothic Neo"/>
               </a:rPr>
-              <a:t>19/19</a:t>
+              <a:t>19/20</a:t>
             </a:r>
           </a:p>
         </p:txBody>
@@ -14751,7 +15845,7 @@
                 </a:solidFill>
                 <a:latin typeface="Apple SD Gothic Neo"/>
               </a:rPr>
-              <a:t>이 슬라이드의 목적: 발표 후 repo를 실제로 볼 사람을 위해 마지막 안내를 남기고 Q&amp;A로 넘긴다.</a:t>
+              <a:t>이 슬라이드의 목적: 2부에서 처음 던진 네 연구 질문에 대한 현재 답을 한 장에서 닫아 준다.</a:t>
             </a:r>
           </a:p>
         </p:txBody>
@@ -14765,7 +15859,49 @@
         <p:spPr>
           <a:xfrm>
             <a:off x="502920" y="1298448"/>
-            <a:ext cx="6995160" cy="4526280"/>
+            <a:ext cx="11155680" cy="566928"/>
+          </a:xfrm>
+          <a:prstGeom prst="rect">
+            <a:avLst/>
+          </a:prstGeom>
+          <a:solidFill>
+            <a:srgbClr val="E2EAEF"/>
+          </a:solidFill>
+          <a:ln>
+            <a:solidFill>
+              <a:srgbClr val="E2EAEF"/>
+            </a:solidFill>
+          </a:ln>
+        </p:spPr>
+        <p:txBody>
+          <a:bodyPr wrap="square" lIns="64008" rIns="64008" tIns="64008" bIns="64008" anchor="ctr">
+            <a:spAutoFit/>
+          </a:bodyPr>
+          <a:lstStyle/>
+          <a:p>
+            <a:pPr algn="l"/>
+            <a:r>
+              <a:rPr sz="1900" b="1">
+                <a:solidFill>
+                  <a:srgbClr val="282C3A"/>
+                </a:solidFill>
+                <a:latin typeface="Apple SD Gothic Neo"/>
+              </a:rPr>
+              <a:t>따라서 결론은 단순 재현 성공이 아니라, 오픈소스 judge를 어디까지 믿고 어디서부터 운영 규칙을 붙여야 하는지 실험적으로 말할 수 있게 되었다는 것입니다.</a:t>
+            </a:r>
+          </a:p>
+        </p:txBody>
+      </p:sp>
+      <p:sp>
+        <p:nvSpPr>
+          <p:cNvPr id="11" name="TextBox 10"/>
+          <p:cNvSpPr txBox="1"/>
+          <p:nvPr/>
+        </p:nvSpPr>
+        <p:spPr>
+          <a:xfrm>
+            <a:off x="502920" y="2048256"/>
+            <a:ext cx="5449824" cy="1444752"/>
           </a:xfrm>
           <a:prstGeom prst="rect">
             <a:avLst/>
@@ -14780,7 +15916,479 @@
           </a:ln>
         </p:spPr>
         <p:txBody>
-          <a:bodyPr wrap="square" lIns="128016" rIns="128016" tIns="128016" bIns="128016" anchor="t">
+          <a:bodyPr wrap="square" lIns="109728" rIns="109728" tIns="109728" bIns="109728" anchor="t">
+            <a:spAutoFit/>
+          </a:bodyPr>
+          <a:lstStyle/>
+          <a:p>
+            <a:pPr algn="l"/>
+            <a:r>
+              <a:rPr sz="1700" b="0">
+                <a:solidFill>
+                  <a:srgbClr val="363A48"/>
+                </a:solidFill>
+                <a:latin typeface="Apple SD Gothic Neo"/>
+              </a:rPr>
+              <a:t/>
+            </a:r>
+          </a:p>
+        </p:txBody>
+      </p:sp>
+      <p:sp>
+        <p:nvSpPr>
+          <p:cNvPr id="12" name="TextBox 11"/>
+          <p:cNvSpPr txBox="1"/>
+          <p:nvPr/>
+        </p:nvSpPr>
+        <p:spPr>
+          <a:xfrm>
+            <a:off x="594360" y="2157984"/>
+            <a:ext cx="5266944" cy="201168"/>
+          </a:xfrm>
+          <a:prstGeom prst="rect">
+            <a:avLst/>
+          </a:prstGeom>
+          <a:noFill/>
+          <a:ln>
+            <a:noFill/>
+          </a:ln>
+        </p:spPr>
+        <p:txBody>
+          <a:bodyPr wrap="square" lIns="0" rIns="0" tIns="0" bIns="0" anchor="t">
+            <a:spAutoFit/>
+          </a:bodyPr>
+          <a:lstStyle/>
+          <a:p>
+            <a:pPr algn="l"/>
+            <a:r>
+              <a:rPr sz="1500" b="1">
+                <a:solidFill>
+                  <a:srgbClr val="3B586E"/>
+                </a:solidFill>
+                <a:latin typeface="Apple SD Gothic Neo"/>
+              </a:rPr>
+              <a:t>RQ1. judge scaling은 개선되는가</a:t>
+            </a:r>
+          </a:p>
+        </p:txBody>
+      </p:sp>
+      <p:sp>
+        <p:nvSpPr>
+          <p:cNvPr id="13" name="TextBox 12"/>
+          <p:cNvSpPr txBox="1"/>
+          <p:nvPr/>
+        </p:nvSpPr>
+        <p:spPr>
+          <a:xfrm>
+            <a:off x="594360" y="2450592"/>
+            <a:ext cx="5266944" cy="804672"/>
+          </a:xfrm>
+          <a:prstGeom prst="rect">
+            <a:avLst/>
+          </a:prstGeom>
+          <a:noFill/>
+          <a:ln>
+            <a:noFill/>
+          </a:ln>
+        </p:spPr>
+        <p:txBody>
+          <a:bodyPr wrap="square" lIns="0" rIns="0" tIns="0" bIns="0" anchor="t">
+            <a:spAutoFit/>
+          </a:bodyPr>
+          <a:lstStyle/>
+          <a:p>
+            <a:pPr algn="l"/>
+            <a:r>
+              <a:rPr sz="1350" b="0">
+                <a:solidFill>
+                  <a:srgbClr val="363A48"/>
+                </a:solidFill>
+                <a:latin typeface="Apple SD Gothic Neo"/>
+              </a:rPr>
+              <a:t>예. Qwen judge scaling 결과에서는 7B → 14B → 32B로 갈수록 pairwise inconsistency가 뚜렷하게 줄었습니다.</a:t>
+            </a:r>
+          </a:p>
+        </p:txBody>
+      </p:sp>
+      <p:sp>
+        <p:nvSpPr>
+          <p:cNvPr id="14" name="TextBox 13"/>
+          <p:cNvSpPr txBox="1"/>
+          <p:nvPr/>
+        </p:nvSpPr>
+        <p:spPr>
+          <a:xfrm>
+            <a:off x="6208776" y="2048256"/>
+            <a:ext cx="5449824" cy="1444752"/>
+          </a:xfrm>
+          <a:prstGeom prst="rect">
+            <a:avLst/>
+          </a:prstGeom>
+          <a:solidFill>
+            <a:srgbClr val="FFFFFF"/>
+          </a:solidFill>
+          <a:ln>
+            <a:solidFill>
+              <a:srgbClr val="DAD4CA"/>
+            </a:solidFill>
+          </a:ln>
+        </p:spPr>
+        <p:txBody>
+          <a:bodyPr wrap="square" lIns="109728" rIns="109728" tIns="109728" bIns="109728" anchor="t">
+            <a:spAutoFit/>
+          </a:bodyPr>
+          <a:lstStyle/>
+          <a:p>
+            <a:pPr algn="l"/>
+            <a:r>
+              <a:rPr sz="1700" b="0">
+                <a:solidFill>
+                  <a:srgbClr val="363A48"/>
+                </a:solidFill>
+                <a:latin typeface="Apple SD Gothic Neo"/>
+              </a:rPr>
+              <a:t/>
+            </a:r>
+          </a:p>
+        </p:txBody>
+      </p:sp>
+      <p:sp>
+        <p:nvSpPr>
+          <p:cNvPr id="15" name="TextBox 14"/>
+          <p:cNvSpPr txBox="1"/>
+          <p:nvPr/>
+        </p:nvSpPr>
+        <p:spPr>
+          <a:xfrm>
+            <a:off x="6300216" y="2157984"/>
+            <a:ext cx="5266944" cy="201168"/>
+          </a:xfrm>
+          <a:prstGeom prst="rect">
+            <a:avLst/>
+          </a:prstGeom>
+          <a:noFill/>
+          <a:ln>
+            <a:noFill/>
+          </a:ln>
+        </p:spPr>
+        <p:txBody>
+          <a:bodyPr wrap="square" lIns="0" rIns="0" tIns="0" bIns="0" anchor="t">
+            <a:spAutoFit/>
+          </a:bodyPr>
+          <a:lstStyle/>
+          <a:p>
+            <a:pPr algn="l"/>
+            <a:r>
+              <a:rPr sz="1500" b="1">
+                <a:solidFill>
+                  <a:srgbClr val="3B586E"/>
+                </a:solidFill>
+                <a:latin typeface="Apple SD Gothic Neo"/>
+              </a:rPr>
+              <a:t>RQ2. 남는 오류는 어떤 구조인가</a:t>
+            </a:r>
+          </a:p>
+        </p:txBody>
+      </p:sp>
+      <p:sp>
+        <p:nvSpPr>
+          <p:cNvPr id="16" name="TextBox 15"/>
+          <p:cNvSpPr txBox="1"/>
+          <p:nvPr/>
+        </p:nvSpPr>
+        <p:spPr>
+          <a:xfrm>
+            <a:off x="6300216" y="2450592"/>
+            <a:ext cx="5266944" cy="804672"/>
+          </a:xfrm>
+          <a:prstGeom prst="rect">
+            <a:avLst/>
+          </a:prstGeom>
+          <a:noFill/>
+          <a:ln>
+            <a:noFill/>
+          </a:ln>
+        </p:spPr>
+        <p:txBody>
+          <a:bodyPr wrap="square" lIns="0" rIns="0" tIns="0" bIns="0" anchor="t">
+            <a:spAutoFit/>
+          </a:bodyPr>
+          <a:lstStyle/>
+          <a:p>
+            <a:pPr algn="l"/>
+            <a:r>
+              <a:rPr sz="1350" b="0">
+                <a:solidFill>
+                  <a:srgbClr val="363A48"/>
+                </a:solidFill>
+                <a:latin typeface="Apple SD Gothic Neo"/>
+              </a:rPr>
+              <a:t>단순 noise가 아니라 순서 민감성과 format failure처럼 구조화됩니다. 그래서 ranking과 question-level cleanliness를 분리해야 합니다.</a:t>
+            </a:r>
+          </a:p>
+        </p:txBody>
+      </p:sp>
+      <p:sp>
+        <p:nvSpPr>
+          <p:cNvPr id="17" name="TextBox 16"/>
+          <p:cNvSpPr txBox="1"/>
+          <p:nvPr/>
+        </p:nvSpPr>
+        <p:spPr>
+          <a:xfrm>
+            <a:off x="502920" y="3675888"/>
+            <a:ext cx="5449824" cy="1444752"/>
+          </a:xfrm>
+          <a:prstGeom prst="rect">
+            <a:avLst/>
+          </a:prstGeom>
+          <a:solidFill>
+            <a:srgbClr val="FFFFFF"/>
+          </a:solidFill>
+          <a:ln>
+            <a:solidFill>
+              <a:srgbClr val="DAD4CA"/>
+            </a:solidFill>
+          </a:ln>
+        </p:spPr>
+        <p:txBody>
+          <a:bodyPr wrap="square" lIns="109728" rIns="109728" tIns="109728" bIns="109728" anchor="t">
+            <a:spAutoFit/>
+          </a:bodyPr>
+          <a:lstStyle/>
+          <a:p>
+            <a:pPr algn="l"/>
+            <a:r>
+              <a:rPr sz="1700" b="0">
+                <a:solidFill>
+                  <a:srgbClr val="363A48"/>
+                </a:solidFill>
+                <a:latin typeface="Apple SD Gothic Neo"/>
+              </a:rPr>
+              <a:t/>
+            </a:r>
+          </a:p>
+        </p:txBody>
+      </p:sp>
+      <p:sp>
+        <p:nvSpPr>
+          <p:cNvPr id="18" name="TextBox 17"/>
+          <p:cNvSpPr txBox="1"/>
+          <p:nvPr/>
+        </p:nvSpPr>
+        <p:spPr>
+          <a:xfrm>
+            <a:off x="594360" y="3785616"/>
+            <a:ext cx="5266944" cy="201168"/>
+          </a:xfrm>
+          <a:prstGeom prst="rect">
+            <a:avLst/>
+          </a:prstGeom>
+          <a:noFill/>
+          <a:ln>
+            <a:noFill/>
+          </a:ln>
+        </p:spPr>
+        <p:txBody>
+          <a:bodyPr wrap="square" lIns="0" rIns="0" tIns="0" bIns="0" anchor="t">
+            <a:spAutoFit/>
+          </a:bodyPr>
+          <a:lstStyle/>
+          <a:p>
+            <a:pPr algn="l"/>
+            <a:r>
+              <a:rPr sz="1500" b="1">
+                <a:solidFill>
+                  <a:srgbClr val="3B586E"/>
+                </a:solidFill>
+                <a:latin typeface="Apple SD Gothic Neo"/>
+              </a:rPr>
+              <a:t>RQ3. 어떤 앙상블이 더 낫나</a:t>
+            </a:r>
+          </a:p>
+        </p:txBody>
+      </p:sp>
+      <p:sp>
+        <p:nvSpPr>
+          <p:cNvPr id="19" name="TextBox 18"/>
+          <p:cNvSpPr txBox="1"/>
+          <p:nvPr/>
+        </p:nvSpPr>
+        <p:spPr>
+          <a:xfrm>
+            <a:off x="594360" y="4078224"/>
+            <a:ext cx="5266944" cy="804672"/>
+          </a:xfrm>
+          <a:prstGeom prst="rect">
+            <a:avLst/>
+          </a:prstGeom>
+          <a:noFill/>
+          <a:ln>
+            <a:noFill/>
+          </a:ln>
+        </p:spPr>
+        <p:txBody>
+          <a:bodyPr wrap="square" lIns="0" rIns="0" tIns="0" bIns="0" anchor="t">
+            <a:spAutoFit/>
+          </a:bodyPr>
+          <a:lstStyle/>
+          <a:p>
+            <a:pPr algn="l"/>
+            <a:r>
+              <a:rPr sz="1350" b="0">
+                <a:solidFill>
+                  <a:srgbClr val="363A48"/>
+                </a:solidFill>
+                <a:latin typeface="Apple SD Gothic Neo"/>
+              </a:rPr>
+              <a:t>단순 majority보다 abstain이 낫습니다. inconsistent를 표로 세지 않을 때 더 많은 쌍을 더 깨끗하게 결정할 수 있습니다.</a:t>
+            </a:r>
+          </a:p>
+        </p:txBody>
+      </p:sp>
+      <p:sp>
+        <p:nvSpPr>
+          <p:cNvPr id="20" name="TextBox 19"/>
+          <p:cNvSpPr txBox="1"/>
+          <p:nvPr/>
+        </p:nvSpPr>
+        <p:spPr>
+          <a:xfrm>
+            <a:off x="6208776" y="3675888"/>
+            <a:ext cx="5449824" cy="1444752"/>
+          </a:xfrm>
+          <a:prstGeom prst="rect">
+            <a:avLst/>
+          </a:prstGeom>
+          <a:solidFill>
+            <a:srgbClr val="FFFFFF"/>
+          </a:solidFill>
+          <a:ln>
+            <a:solidFill>
+              <a:srgbClr val="DAD4CA"/>
+            </a:solidFill>
+          </a:ln>
+        </p:spPr>
+        <p:txBody>
+          <a:bodyPr wrap="square" lIns="109728" rIns="109728" tIns="109728" bIns="109728" anchor="t">
+            <a:spAutoFit/>
+          </a:bodyPr>
+          <a:lstStyle/>
+          <a:p>
+            <a:pPr algn="l"/>
+            <a:r>
+              <a:rPr sz="1700" b="0">
+                <a:solidFill>
+                  <a:srgbClr val="363A48"/>
+                </a:solidFill>
+                <a:latin typeface="Apple SD Gothic Neo"/>
+              </a:rPr>
+              <a:t/>
+            </a:r>
+          </a:p>
+        </p:txBody>
+      </p:sp>
+      <p:sp>
+        <p:nvSpPr>
+          <p:cNvPr id="21" name="TextBox 20"/>
+          <p:cNvSpPr txBox="1"/>
+          <p:nvPr/>
+        </p:nvSpPr>
+        <p:spPr>
+          <a:xfrm>
+            <a:off x="6300216" y="3785616"/>
+            <a:ext cx="5266944" cy="201168"/>
+          </a:xfrm>
+          <a:prstGeom prst="rect">
+            <a:avLst/>
+          </a:prstGeom>
+          <a:noFill/>
+          <a:ln>
+            <a:noFill/>
+          </a:ln>
+        </p:spPr>
+        <p:txBody>
+          <a:bodyPr wrap="square" lIns="0" rIns="0" tIns="0" bIns="0" anchor="t">
+            <a:spAutoFit/>
+          </a:bodyPr>
+          <a:lstStyle/>
+          <a:p>
+            <a:pPr algn="l"/>
+            <a:r>
+              <a:rPr sz="1500" b="1">
+                <a:solidFill>
+                  <a:srgbClr val="3B586E"/>
+                </a:solidFill>
+                <a:latin typeface="Apple SD Gothic Neo"/>
+              </a:rPr>
+              <a:t>RQ4. 문항을 줄여도 되나</a:t>
+            </a:r>
+          </a:p>
+        </p:txBody>
+      </p:sp>
+      <p:sp>
+        <p:nvSpPr>
+          <p:cNvPr id="22" name="TextBox 21"/>
+          <p:cNvSpPr txBox="1"/>
+          <p:nvPr/>
+        </p:nvSpPr>
+        <p:spPr>
+          <a:xfrm>
+            <a:off x="6300216" y="4078224"/>
+            <a:ext cx="5266944" cy="804672"/>
+          </a:xfrm>
+          <a:prstGeom prst="rect">
+            <a:avLst/>
+          </a:prstGeom>
+          <a:noFill/>
+          <a:ln>
+            <a:noFill/>
+          </a:ln>
+        </p:spPr>
+        <p:txBody>
+          <a:bodyPr wrap="square" lIns="0" rIns="0" tIns="0" bIns="0" anchor="t">
+            <a:spAutoFit/>
+          </a:bodyPr>
+          <a:lstStyle/>
+          <a:p>
+            <a:pPr algn="l"/>
+            <a:r>
+              <a:rPr sz="1350" b="0">
+                <a:solidFill>
+                  <a:srgbClr val="363A48"/>
+                </a:solidFill>
+                <a:latin typeface="Apple SD Gothic Neo"/>
+              </a:rPr>
+              <a:t>부분적으로 예. same-set upper bound는 40문항에서 강하지만, repeated hold-out 기준 안전한 운영점은 60문항 쪽입니다.</a:t>
+            </a:r>
+          </a:p>
+        </p:txBody>
+      </p:sp>
+      <p:sp>
+        <p:nvSpPr>
+          <p:cNvPr id="23" name="TextBox 22"/>
+          <p:cNvSpPr txBox="1"/>
+          <p:nvPr/>
+        </p:nvSpPr>
+        <p:spPr>
+          <a:xfrm>
+            <a:off x="502920" y="5285232"/>
+            <a:ext cx="11155680" cy="749808"/>
+          </a:xfrm>
+          <a:prstGeom prst="rect">
+            <a:avLst/>
+          </a:prstGeom>
+          <a:solidFill>
+            <a:srgbClr val="FFFFFF"/>
+          </a:solidFill>
+          <a:ln>
+            <a:solidFill>
+              <a:srgbClr val="DAD4CA"/>
+            </a:solidFill>
+          </a:ln>
+        </p:spPr>
+        <p:txBody>
+          <a:bodyPr wrap="square" lIns="118872" rIns="118872" tIns="118872" bIns="118872" anchor="t">
             <a:spAutoFit/>
           </a:bodyPr>
           <a:lstStyle/>
@@ -14795,7 +16403,7 @@
               <a:spcAft>
                 <a:spcPts val="800"/>
               </a:spcAft>
-              <a:defRPr sz="1800">
+              <a:defRPr sz="1500">
                 <a:solidFill>
                   <a:srgbClr val="363A48"/>
                 </a:solidFill>
@@ -14803,835 +16411,7 @@
               </a:defRPr>
             </a:pPr>
             <a:r>
-              <a:t>• 원 논문 설명은 `presentation/`의 deck와 notes, 재현 서사는 `README.md`, 원고는 `paper/`를 보면 된다.</a:t>
-            </a:r>
-          </a:p>
-          <a:p>
-            <a:pPr>
-              <a:lnSpc>
-                <a:spcPct val="112000"/>
-              </a:lnSpc>
-              <a:spcBef>
-                <a:spcPts val="0"/>
-              </a:spcBef>
-              <a:spcAft>
-                <a:spcPts val="800"/>
-              </a:spcAft>
-              <a:defRPr sz="1800">
-                <a:solidFill>
-                  <a:srgbClr val="363A48"/>
-                </a:solidFill>
-                <a:latin typeface="Apple SD Gothic Neo"/>
-              </a:defRPr>
-            </a:pPr>
-            <a:r>
-              <a:t>• 실험은 Phase 1–2 → Phase 3 → Phase 4–5 → Phase 6 순으로 읽으면 오늘 발표 흐름과 정확히 맞는다.</a:t>
-            </a:r>
-          </a:p>
-          <a:p>
-            <a:pPr>
-              <a:lnSpc>
-                <a:spcPct val="112000"/>
-              </a:lnSpc>
-              <a:spcBef>
-                <a:spcPts val="0"/>
-              </a:spcBef>
-              <a:spcAft>
-                <a:spcPts val="800"/>
-              </a:spcAft>
-              <a:defRPr sz="1800">
-                <a:solidFill>
-                  <a:srgbClr val="363A48"/>
-                </a:solidFill>
-                <a:latin typeface="Apple SD Gothic Neo"/>
-              </a:defRPr>
-            </a:pPr>
-            <a:r>
-              <a:t>• 수치 검증은 `figures/` 옆 CSV와 `data/` raw judgment를 따라가면 된다.</a:t>
-            </a:r>
-          </a:p>
-          <a:p>
-            <a:pPr>
-              <a:lnSpc>
-                <a:spcPct val="112000"/>
-              </a:lnSpc>
-              <a:spcBef>
-                <a:spcPts val="0"/>
-              </a:spcBef>
-              <a:spcAft>
-                <a:spcPts val="800"/>
-              </a:spcAft>
-              <a:defRPr sz="1800">
-                <a:solidFill>
-                  <a:srgbClr val="363A48"/>
-                </a:solidFill>
-                <a:latin typeface="Apple SD Gothic Neo"/>
-              </a:defRPr>
-            </a:pPr>
-            <a:r>
-              <a:t>• 즉 오늘 발표는 끝나도, repo 안에서 결론을 다시 확인할 수 있게 설계되어 있다.</a:t>
-            </a:r>
-          </a:p>
-        </p:txBody>
-      </p:sp>
-      <p:sp>
-        <p:nvSpPr>
-          <p:cNvPr id="11" name="TextBox 10"/>
-          <p:cNvSpPr txBox="1"/>
-          <p:nvPr/>
-        </p:nvSpPr>
-        <p:spPr>
-          <a:xfrm>
-            <a:off x="7726679" y="1298448"/>
-            <a:ext cx="3931920" cy="292608"/>
-          </a:xfrm>
-          <a:prstGeom prst="rect">
-            <a:avLst/>
-          </a:prstGeom>
-          <a:noFill/>
-          <a:ln>
-            <a:noFill/>
-          </a:ln>
-        </p:spPr>
-        <p:txBody>
-          <a:bodyPr wrap="square" lIns="64008" rIns="64008" tIns="64008" bIns="64008" anchor="t">
-            <a:spAutoFit/>
-          </a:bodyPr>
-          <a:lstStyle/>
-          <a:p>
-            <a:pPr algn="l"/>
-            <a:r>
-              <a:rPr sz="1800" b="1">
-                <a:solidFill>
-                  <a:srgbClr val="282C3A"/>
-                </a:solidFill>
-                <a:latin typeface="Apple SD Gothic Neo"/>
-              </a:rPr>
-              <a:t>핵심 해석</a:t>
-            </a:r>
-          </a:p>
-        </p:txBody>
-      </p:sp>
-      <p:sp>
-        <p:nvSpPr>
-          <p:cNvPr id="12" name="TextBox 11"/>
-          <p:cNvSpPr txBox="1"/>
-          <p:nvPr/>
-        </p:nvSpPr>
-        <p:spPr>
-          <a:xfrm>
-            <a:off x="7726679" y="1645920"/>
-            <a:ext cx="3931920" cy="4178808"/>
-          </a:xfrm>
-          <a:prstGeom prst="rect">
-            <a:avLst/>
-          </a:prstGeom>
-          <a:solidFill>
-            <a:srgbClr val="E2EAEF"/>
-          </a:solidFill>
-          <a:ln>
-            <a:solidFill>
-              <a:srgbClr val="E2EAEF"/>
-            </a:solidFill>
-          </a:ln>
-        </p:spPr>
-        <p:txBody>
-          <a:bodyPr wrap="square" lIns="128016" rIns="128016" tIns="128016" bIns="128016" anchor="t">
-            <a:spAutoFit/>
-          </a:bodyPr>
-          <a:lstStyle/>
-          <a:p>
-            <a:pPr algn="l"/>
-            <a:r>
-              <a:rPr sz="1700" b="0">
-                <a:solidFill>
-                  <a:srgbClr val="363A48"/>
-                </a:solidFill>
-                <a:latin typeface="Apple SD Gothic Neo"/>
-              </a:rPr>
-              <a:t/>
-            </a:r>
-          </a:p>
-        </p:txBody>
-      </p:sp>
-      <p:sp>
-        <p:nvSpPr>
-          <p:cNvPr id="13" name="TextBox 12"/>
-          <p:cNvSpPr txBox="1"/>
-          <p:nvPr/>
-        </p:nvSpPr>
-        <p:spPr>
-          <a:xfrm>
-            <a:off x="7882127" y="1847088"/>
-            <a:ext cx="3566160" cy="1170432"/>
-          </a:xfrm>
-          <a:prstGeom prst="rect">
-            <a:avLst/>
-          </a:prstGeom>
-          <a:noFill/>
-          <a:ln>
-            <a:noFill/>
-          </a:ln>
-        </p:spPr>
-        <p:txBody>
-          <a:bodyPr wrap="square" lIns="0" rIns="0" tIns="0" bIns="0" anchor="t">
-            <a:spAutoFit/>
-          </a:bodyPr>
-          <a:lstStyle/>
-          <a:p>
-            <a:pPr algn="l"/>
-            <a:r>
-              <a:rPr sz="1600" b="1">
-                <a:solidFill>
-                  <a:srgbClr val="282C3A"/>
-                </a:solidFill>
-                <a:latin typeface="Apple SD Gothic Neo"/>
-              </a:rPr>
-              <a:t>질문 받겠습니다.</a:t>
-            </a:r>
-          </a:p>
-        </p:txBody>
-      </p:sp>
-      <p:sp>
-        <p:nvSpPr>
-          <p:cNvPr id="14" name="TextBox 13"/>
-          <p:cNvSpPr txBox="1"/>
-          <p:nvPr/>
-        </p:nvSpPr>
-        <p:spPr>
-          <a:xfrm>
-            <a:off x="7882127" y="3310128"/>
-            <a:ext cx="2029968" cy="877824"/>
-          </a:xfrm>
-          <a:prstGeom prst="rect">
-            <a:avLst/>
-          </a:prstGeom>
-          <a:solidFill>
-            <a:srgbClr val="FFFFFF"/>
-          </a:solidFill>
-          <a:ln>
-            <a:solidFill>
-              <a:srgbClr val="DAD4CA"/>
-            </a:solidFill>
-          </a:ln>
-        </p:spPr>
-        <p:txBody>
-          <a:bodyPr wrap="square" lIns="54864" rIns="54864" tIns="54864" bIns="54864" anchor="t">
-            <a:spAutoFit/>
-          </a:bodyPr>
-          <a:lstStyle/>
-          <a:p>
-            <a:pPr algn="l"/>
-            <a:r>
-              <a:rPr sz="1700" b="0">
-                <a:solidFill>
-                  <a:srgbClr val="363A48"/>
-                </a:solidFill>
-                <a:latin typeface="Apple SD Gothic Neo"/>
-              </a:rPr>
-              <a:t/>
-            </a:r>
-          </a:p>
-        </p:txBody>
-      </p:sp>
-      <p:sp>
-        <p:nvSpPr>
-          <p:cNvPr id="15" name="Rectangle 14"/>
-          <p:cNvSpPr/>
-          <p:nvPr/>
-        </p:nvSpPr>
-        <p:spPr>
-          <a:xfrm>
-            <a:off x="7991855" y="3419856"/>
-            <a:ext cx="502920" cy="182880"/>
-          </a:xfrm>
-          <a:prstGeom prst="rect">
-            <a:avLst/>
-          </a:prstGeom>
-          <a:solidFill>
-            <a:srgbClr val="375667"/>
-          </a:solidFill>
-          <a:ln>
-            <a:noFill/>
-          </a:ln>
-        </p:spPr>
-        <p:style>
-          <a:lnRef idx="1">
-            <a:schemeClr val="accent1"/>
-          </a:lnRef>
-          <a:fillRef idx="3">
-            <a:schemeClr val="accent1"/>
-          </a:fillRef>
-          <a:effectRef idx="2">
-            <a:schemeClr val="accent1"/>
-          </a:effectRef>
-          <a:fontRef idx="minor">
-            <a:schemeClr val="lt1"/>
-          </a:fontRef>
-        </p:style>
-        <p:txBody>
-          <a:bodyPr rtlCol="0" anchor="ctr"/>
-          <a:lstStyle/>
-          <a:p>
-            <a:pPr algn="ctr"/>
-          </a:p>
-        </p:txBody>
-      </p:sp>
-      <p:sp>
-        <p:nvSpPr>
-          <p:cNvPr id="16" name="TextBox 15"/>
-          <p:cNvSpPr txBox="1"/>
-          <p:nvPr/>
-        </p:nvSpPr>
-        <p:spPr>
-          <a:xfrm>
-            <a:off x="8010143" y="3419856"/>
-            <a:ext cx="1691640" cy="182880"/>
-          </a:xfrm>
-          <a:prstGeom prst="rect">
-            <a:avLst/>
-          </a:prstGeom>
-          <a:noFill/>
-          <a:ln>
-            <a:noFill/>
-          </a:ln>
-        </p:spPr>
-        <p:txBody>
-          <a:bodyPr wrap="square" lIns="9144" rIns="9144" tIns="9144" bIns="9144" anchor="ctr">
-            <a:spAutoFit/>
-          </a:bodyPr>
-          <a:lstStyle/>
-          <a:p>
-            <a:pPr algn="l"/>
-            <a:r>
-              <a:rPr sz="900" b="1">
-                <a:solidFill>
-                  <a:srgbClr val="FFFFFF"/>
-                </a:solidFill>
-                <a:latin typeface="Apple SD Gothic Neo"/>
-              </a:rPr>
-              <a:t>presentation</a:t>
-            </a:r>
-          </a:p>
-        </p:txBody>
-      </p:sp>
-      <p:sp>
-        <p:nvSpPr>
-          <p:cNvPr id="17" name="TextBox 16"/>
-          <p:cNvSpPr txBox="1"/>
-          <p:nvPr/>
-        </p:nvSpPr>
-        <p:spPr>
-          <a:xfrm>
-            <a:off x="7991855" y="3657600"/>
-            <a:ext cx="1737360" cy="310896"/>
-          </a:xfrm>
-          <a:prstGeom prst="rect">
-            <a:avLst/>
-          </a:prstGeom>
-          <a:noFill/>
-          <a:ln>
-            <a:noFill/>
-          </a:ln>
-        </p:spPr>
-        <p:txBody>
-          <a:bodyPr wrap="square" lIns="9144" rIns="9144" tIns="9144" bIns="9144" anchor="t">
-            <a:spAutoFit/>
-          </a:bodyPr>
-          <a:lstStyle/>
-          <a:p>
-            <a:pPr algn="l"/>
-            <a:r>
-              <a:rPr sz="1900" b="1">
-                <a:solidFill>
-                  <a:srgbClr val="282C3A"/>
-                </a:solidFill>
-                <a:latin typeface="Apple SD Gothic Neo"/>
-              </a:rPr>
-              <a:t>today's deck</a:t>
-            </a:r>
-          </a:p>
-        </p:txBody>
-      </p:sp>
-      <p:sp>
-        <p:nvSpPr>
-          <p:cNvPr id="18" name="TextBox 17"/>
-          <p:cNvSpPr txBox="1"/>
-          <p:nvPr/>
-        </p:nvSpPr>
-        <p:spPr>
-          <a:xfrm>
-            <a:off x="9729215" y="3310128"/>
-            <a:ext cx="2029968" cy="877824"/>
-          </a:xfrm>
-          <a:prstGeom prst="rect">
-            <a:avLst/>
-          </a:prstGeom>
-          <a:solidFill>
-            <a:srgbClr val="FFFFFF"/>
-          </a:solidFill>
-          <a:ln>
-            <a:solidFill>
-              <a:srgbClr val="DAD4CA"/>
-            </a:solidFill>
-          </a:ln>
-        </p:spPr>
-        <p:txBody>
-          <a:bodyPr wrap="square" lIns="54864" rIns="54864" tIns="54864" bIns="54864" anchor="t">
-            <a:spAutoFit/>
-          </a:bodyPr>
-          <a:lstStyle/>
-          <a:p>
-            <a:pPr algn="l"/>
-            <a:r>
-              <a:rPr sz="1700" b="0">
-                <a:solidFill>
-                  <a:srgbClr val="363A48"/>
-                </a:solidFill>
-                <a:latin typeface="Apple SD Gothic Neo"/>
-              </a:rPr>
-              <a:t/>
-            </a:r>
-          </a:p>
-        </p:txBody>
-      </p:sp>
-      <p:sp>
-        <p:nvSpPr>
-          <p:cNvPr id="19" name="Rectangle 18"/>
-          <p:cNvSpPr/>
-          <p:nvPr/>
-        </p:nvSpPr>
-        <p:spPr>
-          <a:xfrm>
-            <a:off x="9838943" y="3419856"/>
-            <a:ext cx="502920" cy="182880"/>
-          </a:xfrm>
-          <a:prstGeom prst="rect">
-            <a:avLst/>
-          </a:prstGeom>
-          <a:solidFill>
-            <a:srgbClr val="B5654E"/>
-          </a:solidFill>
-          <a:ln>
-            <a:noFill/>
-          </a:ln>
-        </p:spPr>
-        <p:style>
-          <a:lnRef idx="1">
-            <a:schemeClr val="accent1"/>
-          </a:lnRef>
-          <a:fillRef idx="3">
-            <a:schemeClr val="accent1"/>
-          </a:fillRef>
-          <a:effectRef idx="2">
-            <a:schemeClr val="accent1"/>
-          </a:effectRef>
-          <a:fontRef idx="minor">
-            <a:schemeClr val="lt1"/>
-          </a:fontRef>
-        </p:style>
-        <p:txBody>
-          <a:bodyPr rtlCol="0" anchor="ctr"/>
-          <a:lstStyle/>
-          <a:p>
-            <a:pPr algn="ctr"/>
-          </a:p>
-        </p:txBody>
-      </p:sp>
-      <p:sp>
-        <p:nvSpPr>
-          <p:cNvPr id="20" name="TextBox 19"/>
-          <p:cNvSpPr txBox="1"/>
-          <p:nvPr/>
-        </p:nvSpPr>
-        <p:spPr>
-          <a:xfrm>
-            <a:off x="9857231" y="3419856"/>
-            <a:ext cx="1691640" cy="182880"/>
-          </a:xfrm>
-          <a:prstGeom prst="rect">
-            <a:avLst/>
-          </a:prstGeom>
-          <a:noFill/>
-          <a:ln>
-            <a:noFill/>
-          </a:ln>
-        </p:spPr>
-        <p:txBody>
-          <a:bodyPr wrap="square" lIns="9144" rIns="9144" tIns="9144" bIns="9144" anchor="ctr">
-            <a:spAutoFit/>
-          </a:bodyPr>
-          <a:lstStyle/>
-          <a:p>
-            <a:pPr algn="l"/>
-            <a:r>
-              <a:rPr sz="900" b="1">
-                <a:solidFill>
-                  <a:srgbClr val="FFFFFF"/>
-                </a:solidFill>
-                <a:latin typeface="Apple SD Gothic Neo"/>
-              </a:rPr>
-              <a:t>README</a:t>
-            </a:r>
-          </a:p>
-        </p:txBody>
-      </p:sp>
-      <p:sp>
-        <p:nvSpPr>
-          <p:cNvPr id="21" name="TextBox 20"/>
-          <p:cNvSpPr txBox="1"/>
-          <p:nvPr/>
-        </p:nvSpPr>
-        <p:spPr>
-          <a:xfrm>
-            <a:off x="9838943" y="3657600"/>
-            <a:ext cx="1737360" cy="310896"/>
-          </a:xfrm>
-          <a:prstGeom prst="rect">
-            <a:avLst/>
-          </a:prstGeom>
-          <a:noFill/>
-          <a:ln>
-            <a:noFill/>
-          </a:ln>
-        </p:spPr>
-        <p:txBody>
-          <a:bodyPr wrap="square" lIns="9144" rIns="9144" tIns="9144" bIns="9144" anchor="t">
-            <a:spAutoFit/>
-          </a:bodyPr>
-          <a:lstStyle/>
-          <a:p>
-            <a:pPr algn="l"/>
-            <a:r>
-              <a:rPr sz="1900" b="1">
-                <a:solidFill>
-                  <a:srgbClr val="282C3A"/>
-                </a:solidFill>
-                <a:latin typeface="Apple SD Gothic Neo"/>
-              </a:rPr>
-              <a:t>story</a:t>
-            </a:r>
-          </a:p>
-        </p:txBody>
-      </p:sp>
-      <p:sp>
-        <p:nvSpPr>
-          <p:cNvPr id="22" name="TextBox 21"/>
-          <p:cNvSpPr txBox="1"/>
-          <p:nvPr/>
-        </p:nvSpPr>
-        <p:spPr>
-          <a:xfrm>
-            <a:off x="7882127" y="4224528"/>
-            <a:ext cx="2029968" cy="877824"/>
-          </a:xfrm>
-          <a:prstGeom prst="rect">
-            <a:avLst/>
-          </a:prstGeom>
-          <a:solidFill>
-            <a:srgbClr val="FFFFFF"/>
-          </a:solidFill>
-          <a:ln>
-            <a:solidFill>
-              <a:srgbClr val="DAD4CA"/>
-            </a:solidFill>
-          </a:ln>
-        </p:spPr>
-        <p:txBody>
-          <a:bodyPr wrap="square" lIns="54864" rIns="54864" tIns="54864" bIns="54864" anchor="t">
-            <a:spAutoFit/>
-          </a:bodyPr>
-          <a:lstStyle/>
-          <a:p>
-            <a:pPr algn="l"/>
-            <a:r>
-              <a:rPr sz="1700" b="0">
-                <a:solidFill>
-                  <a:srgbClr val="363A48"/>
-                </a:solidFill>
-                <a:latin typeface="Apple SD Gothic Neo"/>
-              </a:rPr>
-              <a:t/>
-            </a:r>
-          </a:p>
-        </p:txBody>
-      </p:sp>
-      <p:sp>
-        <p:nvSpPr>
-          <p:cNvPr id="23" name="Rectangle 22"/>
-          <p:cNvSpPr/>
-          <p:nvPr/>
-        </p:nvSpPr>
-        <p:spPr>
-          <a:xfrm>
-            <a:off x="7991855" y="4334256"/>
-            <a:ext cx="502920" cy="182880"/>
-          </a:xfrm>
-          <a:prstGeom prst="rect">
-            <a:avLst/>
-          </a:prstGeom>
-          <a:solidFill>
-            <a:srgbClr val="BF9A5E"/>
-          </a:solidFill>
-          <a:ln>
-            <a:noFill/>
-          </a:ln>
-        </p:spPr>
-        <p:style>
-          <a:lnRef idx="1">
-            <a:schemeClr val="accent1"/>
-          </a:lnRef>
-          <a:fillRef idx="3">
-            <a:schemeClr val="accent1"/>
-          </a:fillRef>
-          <a:effectRef idx="2">
-            <a:schemeClr val="accent1"/>
-          </a:effectRef>
-          <a:fontRef idx="minor">
-            <a:schemeClr val="lt1"/>
-          </a:fontRef>
-        </p:style>
-        <p:txBody>
-          <a:bodyPr rtlCol="0" anchor="ctr"/>
-          <a:lstStyle/>
-          <a:p>
-            <a:pPr algn="ctr"/>
-          </a:p>
-        </p:txBody>
-      </p:sp>
-      <p:sp>
-        <p:nvSpPr>
-          <p:cNvPr id="24" name="TextBox 23"/>
-          <p:cNvSpPr txBox="1"/>
-          <p:nvPr/>
-        </p:nvSpPr>
-        <p:spPr>
-          <a:xfrm>
-            <a:off x="8010143" y="4334256"/>
-            <a:ext cx="1691640" cy="182880"/>
-          </a:xfrm>
-          <a:prstGeom prst="rect">
-            <a:avLst/>
-          </a:prstGeom>
-          <a:noFill/>
-          <a:ln>
-            <a:noFill/>
-          </a:ln>
-        </p:spPr>
-        <p:txBody>
-          <a:bodyPr wrap="square" lIns="9144" rIns="9144" tIns="9144" bIns="9144" anchor="ctr">
-            <a:spAutoFit/>
-          </a:bodyPr>
-          <a:lstStyle/>
-          <a:p>
-            <a:pPr algn="l"/>
-            <a:r>
-              <a:rPr sz="900" b="1">
-                <a:solidFill>
-                  <a:srgbClr val="FFFFFF"/>
-                </a:solidFill>
-                <a:latin typeface="Apple SD Gothic Neo"/>
-              </a:rPr>
-              <a:t>data</a:t>
-            </a:r>
-          </a:p>
-        </p:txBody>
-      </p:sp>
-      <p:sp>
-        <p:nvSpPr>
-          <p:cNvPr id="25" name="TextBox 24"/>
-          <p:cNvSpPr txBox="1"/>
-          <p:nvPr/>
-        </p:nvSpPr>
-        <p:spPr>
-          <a:xfrm>
-            <a:off x="7991855" y="4572000"/>
-            <a:ext cx="1737360" cy="310896"/>
-          </a:xfrm>
-          <a:prstGeom prst="rect">
-            <a:avLst/>
-          </a:prstGeom>
-          <a:noFill/>
-          <a:ln>
-            <a:noFill/>
-          </a:ln>
-        </p:spPr>
-        <p:txBody>
-          <a:bodyPr wrap="square" lIns="9144" rIns="9144" tIns="9144" bIns="9144" anchor="t">
-            <a:spAutoFit/>
-          </a:bodyPr>
-          <a:lstStyle/>
-          <a:p>
-            <a:pPr algn="l"/>
-            <a:r>
-              <a:rPr sz="1900" b="1">
-                <a:solidFill>
-                  <a:srgbClr val="282C3A"/>
-                </a:solidFill>
-                <a:latin typeface="Apple SD Gothic Neo"/>
-              </a:rPr>
-              <a:t>evidence</a:t>
-            </a:r>
-          </a:p>
-        </p:txBody>
-      </p:sp>
-      <p:sp>
-        <p:nvSpPr>
-          <p:cNvPr id="26" name="TextBox 25"/>
-          <p:cNvSpPr txBox="1"/>
-          <p:nvPr/>
-        </p:nvSpPr>
-        <p:spPr>
-          <a:xfrm>
-            <a:off x="9729215" y="4224528"/>
-            <a:ext cx="2029968" cy="877824"/>
-          </a:xfrm>
-          <a:prstGeom prst="rect">
-            <a:avLst/>
-          </a:prstGeom>
-          <a:solidFill>
-            <a:srgbClr val="FFFFFF"/>
-          </a:solidFill>
-          <a:ln>
-            <a:solidFill>
-              <a:srgbClr val="DAD4CA"/>
-            </a:solidFill>
-          </a:ln>
-        </p:spPr>
-        <p:txBody>
-          <a:bodyPr wrap="square" lIns="54864" rIns="54864" tIns="54864" bIns="54864" anchor="t">
-            <a:spAutoFit/>
-          </a:bodyPr>
-          <a:lstStyle/>
-          <a:p>
-            <a:pPr algn="l"/>
-            <a:r>
-              <a:rPr sz="1700" b="0">
-                <a:solidFill>
-                  <a:srgbClr val="363A48"/>
-                </a:solidFill>
-                <a:latin typeface="Apple SD Gothic Neo"/>
-              </a:rPr>
-              <a:t/>
-            </a:r>
-          </a:p>
-        </p:txBody>
-      </p:sp>
-      <p:sp>
-        <p:nvSpPr>
-          <p:cNvPr id="27" name="Rectangle 26"/>
-          <p:cNvSpPr/>
-          <p:nvPr/>
-        </p:nvSpPr>
-        <p:spPr>
-          <a:xfrm>
-            <a:off x="9838943" y="4334256"/>
-            <a:ext cx="502920" cy="182880"/>
-          </a:xfrm>
-          <a:prstGeom prst="rect">
-            <a:avLst/>
-          </a:prstGeom>
-          <a:solidFill>
-            <a:srgbClr val="668185"/>
-          </a:solidFill>
-          <a:ln>
-            <a:noFill/>
-          </a:ln>
-        </p:spPr>
-        <p:style>
-          <a:lnRef idx="1">
-            <a:schemeClr val="accent1"/>
-          </a:lnRef>
-          <a:fillRef idx="3">
-            <a:schemeClr val="accent1"/>
-          </a:fillRef>
-          <a:effectRef idx="2">
-            <a:schemeClr val="accent1"/>
-          </a:effectRef>
-          <a:fontRef idx="minor">
-            <a:schemeClr val="lt1"/>
-          </a:fontRef>
-        </p:style>
-        <p:txBody>
-          <a:bodyPr rtlCol="0" anchor="ctr"/>
-          <a:lstStyle/>
-          <a:p>
-            <a:pPr algn="ctr"/>
-          </a:p>
-        </p:txBody>
-      </p:sp>
-      <p:sp>
-        <p:nvSpPr>
-          <p:cNvPr id="28" name="TextBox 27"/>
-          <p:cNvSpPr txBox="1"/>
-          <p:nvPr/>
-        </p:nvSpPr>
-        <p:spPr>
-          <a:xfrm>
-            <a:off x="9857231" y="4334256"/>
-            <a:ext cx="1691640" cy="182880"/>
-          </a:xfrm>
-          <a:prstGeom prst="rect">
-            <a:avLst/>
-          </a:prstGeom>
-          <a:noFill/>
-          <a:ln>
-            <a:noFill/>
-          </a:ln>
-        </p:spPr>
-        <p:txBody>
-          <a:bodyPr wrap="square" lIns="9144" rIns="9144" tIns="9144" bIns="9144" anchor="ctr">
-            <a:spAutoFit/>
-          </a:bodyPr>
-          <a:lstStyle/>
-          <a:p>
-            <a:pPr algn="l"/>
-            <a:r>
-              <a:rPr sz="900" b="1">
-                <a:solidFill>
-                  <a:srgbClr val="FFFFFF"/>
-                </a:solidFill>
-                <a:latin typeface="Apple SD Gothic Neo"/>
-              </a:rPr>
-              <a:t>paper</a:t>
-            </a:r>
-          </a:p>
-        </p:txBody>
-      </p:sp>
-      <p:sp>
-        <p:nvSpPr>
-          <p:cNvPr id="29" name="TextBox 28"/>
-          <p:cNvSpPr txBox="1"/>
-          <p:nvPr/>
-        </p:nvSpPr>
-        <p:spPr>
-          <a:xfrm>
-            <a:off x="9838943" y="4572000"/>
-            <a:ext cx="1737360" cy="310896"/>
-          </a:xfrm>
-          <a:prstGeom prst="rect">
-            <a:avLst/>
-          </a:prstGeom>
-          <a:noFill/>
-          <a:ln>
-            <a:noFill/>
-          </a:ln>
-        </p:spPr>
-        <p:txBody>
-          <a:bodyPr wrap="square" lIns="9144" rIns="9144" tIns="9144" bIns="9144" anchor="t">
-            <a:spAutoFit/>
-          </a:bodyPr>
-          <a:lstStyle/>
-          <a:p>
-            <a:pPr algn="l"/>
-            <a:r>
-              <a:rPr sz="1900" b="1">
-                <a:solidFill>
-                  <a:srgbClr val="282C3A"/>
-                </a:solidFill>
-                <a:latin typeface="Apple SD Gothic Neo"/>
-              </a:rPr>
-              <a:t>final text</a:t>
+              <a:t>• 즉 이 발표의 결론은 ‘오픈소스 judge도 충분하다’가 아니라, strong judge 메시지의 경계와 운영 규칙까지 같이 말할 수 있게 되었다는 데 있습니다.</a:t>
             </a:r>
           </a:p>
         </p:txBody>
@@ -15861,7 +16641,7 @@
                 </a:solidFill>
                 <a:latin typeface="Apple SD Gothic Neo"/>
               </a:rPr>
-              <a:t>2/19</a:t>
+              <a:t>2/20</a:t>
             </a:r>
           </a:p>
         </p:txBody>
@@ -16040,7 +16820,7 @@
         <p:spPr>
           <a:xfrm>
             <a:off x="502920" y="2048256"/>
-            <a:ext cx="3553967" cy="1993392"/>
+            <a:ext cx="3584448" cy="2029968"/>
           </a:xfrm>
           <a:prstGeom prst="rect">
             <a:avLst/>
@@ -16082,7 +16862,7 @@
         <p:spPr>
           <a:xfrm>
             <a:off x="576072" y="2157984"/>
-            <a:ext cx="3407664" cy="237744"/>
+            <a:ext cx="3438144" cy="237744"/>
           </a:xfrm>
           <a:prstGeom prst="rect">
             <a:avLst/>
@@ -16119,8 +16899,8 @@
         </p:nvSpPr>
         <p:spPr>
           <a:xfrm>
-            <a:off x="576072" y="2542032"/>
-            <a:ext cx="3407664" cy="1152144"/>
+            <a:off x="576072" y="2523744"/>
+            <a:ext cx="3438144" cy="1188720"/>
           </a:xfrm>
           <a:prstGeom prst="rect">
             <a:avLst/>
@@ -16138,7 +16918,7 @@
           <a:p>
             <a:pPr algn="l"/>
             <a:r>
-              <a:rPr sz="1500" b="0">
+              <a:rPr sz="1400" b="0">
                 <a:solidFill>
                   <a:srgbClr val="363A48"/>
                 </a:solidFill>
@@ -16157,8 +16937,8 @@
         </p:nvSpPr>
         <p:spPr>
           <a:xfrm>
-            <a:off x="4221480" y="2048256"/>
-            <a:ext cx="3553967" cy="1993392"/>
+            <a:off x="4288536" y="2048256"/>
+            <a:ext cx="3584448" cy="2029968"/>
           </a:xfrm>
           <a:prstGeom prst="rect">
             <a:avLst/>
@@ -16199,8 +16979,8 @@
         </p:nvSpPr>
         <p:spPr>
           <a:xfrm>
-            <a:off x="4294632" y="2157984"/>
-            <a:ext cx="3407664" cy="237744"/>
+            <a:off x="4361688" y="2157984"/>
+            <a:ext cx="3438144" cy="237744"/>
           </a:xfrm>
           <a:prstGeom prst="rect">
             <a:avLst/>
@@ -16237,8 +17017,8 @@
         </p:nvSpPr>
         <p:spPr>
           <a:xfrm>
-            <a:off x="4294632" y="2542032"/>
-            <a:ext cx="3407664" cy="1152144"/>
+            <a:off x="4361688" y="2523744"/>
+            <a:ext cx="3438144" cy="1188720"/>
           </a:xfrm>
           <a:prstGeom prst="rect">
             <a:avLst/>
@@ -16256,7 +17036,7 @@
           <a:p>
             <a:pPr algn="l"/>
             <a:r>
-              <a:rPr sz="1500" b="0">
+              <a:rPr sz="1400" b="0">
                 <a:solidFill>
                   <a:srgbClr val="363A48"/>
                 </a:solidFill>
@@ -16275,8 +17055,8 @@
         </p:nvSpPr>
         <p:spPr>
           <a:xfrm>
-            <a:off x="7940040" y="2048256"/>
-            <a:ext cx="3553967" cy="1993392"/>
+            <a:off x="8074152" y="2048256"/>
+            <a:ext cx="3584448" cy="2029968"/>
           </a:xfrm>
           <a:prstGeom prst="rect">
             <a:avLst/>
@@ -16317,8 +17097,8 @@
         </p:nvSpPr>
         <p:spPr>
           <a:xfrm>
-            <a:off x="8013192" y="2157984"/>
-            <a:ext cx="3407664" cy="237744"/>
+            <a:off x="8147304" y="2157984"/>
+            <a:ext cx="3438144" cy="237744"/>
           </a:xfrm>
           <a:prstGeom prst="rect">
             <a:avLst/>
@@ -16355,8 +17135,8 @@
         </p:nvSpPr>
         <p:spPr>
           <a:xfrm>
-            <a:off x="8013192" y="2542032"/>
-            <a:ext cx="3407664" cy="1152144"/>
+            <a:off x="8147304" y="2523744"/>
+            <a:ext cx="3438144" cy="1188720"/>
           </a:xfrm>
           <a:prstGeom prst="rect">
             <a:avLst/>
@@ -16374,13 +17154,1246 @@
           <a:p>
             <a:pPr algn="l"/>
             <a:r>
-              <a:rPr sz="1500" b="0">
+              <a:rPr sz="1400" b="0">
                 <a:solidFill>
                   <a:srgbClr val="363A48"/>
                 </a:solidFill>
                 <a:latin typeface="Apple SD Gothic Neo"/>
               </a:rPr>
               <a:t>judge scaling, cross-family sanity, repeated hold-out을 순서대로 보며 어디까지 믿을 수 있는지 정리합니다.</a:t>
+            </a:r>
+          </a:p>
+        </p:txBody>
+      </p:sp>
+    </p:spTree>
+  </p:cSld>
+  <p:clrMapOvr>
+    <a:masterClrMapping/>
+  </p:clrMapOvr>
+</p:sld>
+</file>
+
+<file path=ppt/slides/slide20.xml><?xml version="1.0" encoding="utf-8"?>
+<p:sld xmlns:a="http://schemas.openxmlformats.org/drawingml/2006/main" xmlns:p="http://schemas.openxmlformats.org/presentationml/2006/main" xmlns:r="http://schemas.openxmlformats.org/officeDocument/2006/relationships">
+  <p:cSld>
+    <p:bg>
+      <p:bgPr>
+        <a:solidFill>
+          <a:srgbClr val="EFF4F6"/>
+        </a:solidFill>
+        <a:effectLst/>
+      </p:bgPr>
+    </p:bg>
+    <p:spTree>
+      <p:nvGrpSpPr>
+        <p:cNvPr id="1" name=""/>
+        <p:cNvGrpSpPr/>
+        <p:nvPr/>
+      </p:nvGrpSpPr>
+      <p:grpSpPr/>
+      <p:sp>
+        <p:nvSpPr>
+          <p:cNvPr id="2" name="Rectangle 1"/>
+          <p:cNvSpPr/>
+          <p:nvPr/>
+        </p:nvSpPr>
+        <p:spPr>
+          <a:xfrm>
+            <a:off x="329184" y="384048"/>
+            <a:ext cx="128016" cy="841248"/>
+          </a:xfrm>
+          <a:prstGeom prst="rect">
+            <a:avLst/>
+          </a:prstGeom>
+          <a:solidFill>
+            <a:srgbClr val="3B586E"/>
+          </a:solidFill>
+          <a:ln>
+            <a:noFill/>
+          </a:ln>
+        </p:spPr>
+        <p:style>
+          <a:lnRef idx="1">
+            <a:schemeClr val="accent1"/>
+          </a:lnRef>
+          <a:fillRef idx="3">
+            <a:schemeClr val="accent1"/>
+          </a:fillRef>
+          <a:effectRef idx="2">
+            <a:schemeClr val="accent1"/>
+          </a:effectRef>
+          <a:fontRef idx="minor">
+            <a:schemeClr val="lt1"/>
+          </a:fontRef>
+        </p:style>
+        <p:txBody>
+          <a:bodyPr rtlCol="0" anchor="ctr"/>
+          <a:lstStyle/>
+          <a:p>
+            <a:pPr algn="ctr"/>
+          </a:p>
+        </p:txBody>
+      </p:sp>
+      <p:sp>
+        <p:nvSpPr>
+          <p:cNvPr id="3" name="Rectangle 2"/>
+          <p:cNvSpPr/>
+          <p:nvPr/>
+        </p:nvSpPr>
+        <p:spPr>
+          <a:xfrm>
+            <a:off x="329184" y="182880"/>
+            <a:ext cx="11384280" cy="36576"/>
+          </a:xfrm>
+          <a:prstGeom prst="rect">
+            <a:avLst/>
+          </a:prstGeom>
+          <a:solidFill>
+            <a:srgbClr val="DAD4CA"/>
+          </a:solidFill>
+          <a:ln>
+            <a:noFill/>
+          </a:ln>
+        </p:spPr>
+        <p:style>
+          <a:lnRef idx="1">
+            <a:schemeClr val="accent1"/>
+          </a:lnRef>
+          <a:fillRef idx="3">
+            <a:schemeClr val="accent1"/>
+          </a:fillRef>
+          <a:effectRef idx="2">
+            <a:schemeClr val="accent1"/>
+          </a:effectRef>
+          <a:fontRef idx="minor">
+            <a:schemeClr val="lt1"/>
+          </a:fontRef>
+        </p:style>
+        <p:txBody>
+          <a:bodyPr rtlCol="0" anchor="ctr"/>
+          <a:lstStyle/>
+          <a:p>
+            <a:pPr algn="ctr"/>
+          </a:p>
+        </p:txBody>
+      </p:sp>
+      <p:sp>
+        <p:nvSpPr>
+          <p:cNvPr id="4" name="TextBox 3"/>
+          <p:cNvSpPr txBox="1"/>
+          <p:nvPr/>
+        </p:nvSpPr>
+        <p:spPr>
+          <a:xfrm>
+            <a:off x="621792" y="329184"/>
+            <a:ext cx="8595360" cy="530352"/>
+          </a:xfrm>
+          <a:prstGeom prst="rect">
+            <a:avLst/>
+          </a:prstGeom>
+          <a:noFill/>
+          <a:ln>
+            <a:noFill/>
+          </a:ln>
+        </p:spPr>
+        <p:txBody>
+          <a:bodyPr wrap="square" lIns="0" rIns="0" tIns="0" bIns="0" anchor="t">
+            <a:spAutoFit/>
+          </a:bodyPr>
+          <a:lstStyle/>
+          <a:p>
+            <a:pPr algn="l"/>
+            <a:r>
+              <a:rPr sz="2400" b="1">
+                <a:solidFill>
+                  <a:srgbClr val="282C3A"/>
+                </a:solidFill>
+                <a:latin typeface="Apple SD Gothic Neo"/>
+              </a:rPr>
+              <a:t>질문 전에: 저장소는 이렇게 읽으면 됩니다</a:t>
+            </a:r>
+          </a:p>
+        </p:txBody>
+      </p:sp>
+      <p:sp>
+        <p:nvSpPr>
+          <p:cNvPr id="5" name="TextBox 4"/>
+          <p:cNvSpPr txBox="1"/>
+          <p:nvPr/>
+        </p:nvSpPr>
+        <p:spPr>
+          <a:xfrm>
+            <a:off x="9601200" y="402336"/>
+            <a:ext cx="1417320" cy="201168"/>
+          </a:xfrm>
+          <a:prstGeom prst="rect">
+            <a:avLst/>
+          </a:prstGeom>
+          <a:solidFill>
+            <a:srgbClr val="E2EAEF"/>
+          </a:solidFill>
+          <a:ln>
+            <a:solidFill>
+              <a:srgbClr val="E2EAEF"/>
+            </a:solidFill>
+          </a:ln>
+        </p:spPr>
+        <p:txBody>
+          <a:bodyPr wrap="square" lIns="9144" rIns="9144" tIns="9144" bIns="9144" anchor="ctr">
+            <a:spAutoFit/>
+          </a:bodyPr>
+          <a:lstStyle/>
+          <a:p>
+            <a:pPr algn="ctr"/>
+            <a:r>
+              <a:rPr sz="1000" b="1">
+                <a:solidFill>
+                  <a:srgbClr val="282C3A"/>
+                </a:solidFill>
+                <a:latin typeface="Apple SD Gothic Neo"/>
+              </a:rPr>
+              <a:t>내 연구</a:t>
+            </a:r>
+          </a:p>
+        </p:txBody>
+      </p:sp>
+      <p:sp>
+        <p:nvSpPr>
+          <p:cNvPr id="6" name="TextBox 5"/>
+          <p:cNvSpPr txBox="1"/>
+          <p:nvPr/>
+        </p:nvSpPr>
+        <p:spPr>
+          <a:xfrm>
+            <a:off x="11064240" y="420624"/>
+            <a:ext cx="685800" cy="164592"/>
+          </a:xfrm>
+          <a:prstGeom prst="rect">
+            <a:avLst/>
+          </a:prstGeom>
+          <a:noFill/>
+          <a:ln>
+            <a:noFill/>
+          </a:ln>
+        </p:spPr>
+        <p:txBody>
+          <a:bodyPr wrap="square" lIns="0" rIns="0" tIns="0" bIns="0" anchor="ctr">
+            <a:spAutoFit/>
+          </a:bodyPr>
+          <a:lstStyle/>
+          <a:p>
+            <a:pPr algn="r"/>
+            <a:r>
+              <a:rPr sz="1000" b="1">
+                <a:solidFill>
+                  <a:srgbClr val="70767D"/>
+                </a:solidFill>
+                <a:latin typeface="Apple SD Gothic Neo"/>
+              </a:rPr>
+              <a:t>20/20</a:t>
+            </a:r>
+          </a:p>
+        </p:txBody>
+      </p:sp>
+      <p:sp>
+        <p:nvSpPr>
+          <p:cNvPr id="7" name="Rectangle 6"/>
+          <p:cNvSpPr/>
+          <p:nvPr/>
+        </p:nvSpPr>
+        <p:spPr>
+          <a:xfrm>
+            <a:off x="475488" y="6419088"/>
+            <a:ext cx="11201400" cy="36576"/>
+          </a:xfrm>
+          <a:prstGeom prst="rect">
+            <a:avLst/>
+          </a:prstGeom>
+          <a:solidFill>
+            <a:srgbClr val="DAD4CA"/>
+          </a:solidFill>
+          <a:ln>
+            <a:noFill/>
+          </a:ln>
+        </p:spPr>
+        <p:style>
+          <a:lnRef idx="1">
+            <a:schemeClr val="accent1"/>
+          </a:lnRef>
+          <a:fillRef idx="3">
+            <a:schemeClr val="accent1"/>
+          </a:fillRef>
+          <a:effectRef idx="2">
+            <a:schemeClr val="accent1"/>
+          </a:effectRef>
+          <a:fontRef idx="minor">
+            <a:schemeClr val="lt1"/>
+          </a:fontRef>
+        </p:style>
+        <p:txBody>
+          <a:bodyPr rtlCol="0" anchor="ctr"/>
+          <a:lstStyle/>
+          <a:p>
+            <a:pPr algn="ctr"/>
+          </a:p>
+        </p:txBody>
+      </p:sp>
+      <p:sp>
+        <p:nvSpPr>
+          <p:cNvPr id="8" name="TextBox 7"/>
+          <p:cNvSpPr txBox="1"/>
+          <p:nvPr/>
+        </p:nvSpPr>
+        <p:spPr>
+          <a:xfrm>
+            <a:off x="502920" y="6455664"/>
+            <a:ext cx="4663440" cy="164592"/>
+          </a:xfrm>
+          <a:prstGeom prst="rect">
+            <a:avLst/>
+          </a:prstGeom>
+          <a:noFill/>
+          <a:ln>
+            <a:noFill/>
+          </a:ln>
+        </p:spPr>
+        <p:txBody>
+          <a:bodyPr wrap="square" lIns="0" rIns="0" tIns="0" bIns="0" anchor="t">
+            <a:spAutoFit/>
+          </a:bodyPr>
+          <a:lstStyle/>
+          <a:p>
+            <a:pPr algn="l"/>
+            <a:r>
+              <a:rPr sz="800" b="0">
+                <a:solidFill>
+                  <a:srgbClr val="70767D"/>
+                </a:solidFill>
+                <a:latin typeface="Apple SD Gothic Neo"/>
+              </a:rPr>
+              <a:t>내 연구 | reproduction and extensions</a:t>
+            </a:r>
+          </a:p>
+        </p:txBody>
+      </p:sp>
+      <p:sp>
+        <p:nvSpPr>
+          <p:cNvPr id="9" name="TextBox 8"/>
+          <p:cNvSpPr txBox="1"/>
+          <p:nvPr/>
+        </p:nvSpPr>
+        <p:spPr>
+          <a:xfrm>
+            <a:off x="438912" y="694944"/>
+            <a:ext cx="11292840" cy="365760"/>
+          </a:xfrm>
+          <a:prstGeom prst="rect">
+            <a:avLst/>
+          </a:prstGeom>
+          <a:solidFill>
+            <a:srgbClr val="E2EAEF"/>
+          </a:solidFill>
+          <a:ln>
+            <a:solidFill>
+              <a:srgbClr val="E2EAEF"/>
+            </a:solidFill>
+          </a:ln>
+        </p:spPr>
+        <p:txBody>
+          <a:bodyPr wrap="square" lIns="27432" rIns="27432" tIns="27432" bIns="27432" anchor="ctr">
+            <a:spAutoFit/>
+          </a:bodyPr>
+          <a:lstStyle/>
+          <a:p>
+            <a:pPr algn="l"/>
+            <a:r>
+              <a:rPr sz="1200" b="1">
+                <a:solidFill>
+                  <a:srgbClr val="282C3A"/>
+                </a:solidFill>
+                <a:latin typeface="Apple SD Gothic Neo"/>
+              </a:rPr>
+              <a:t>이 슬라이드의 목적: 발표 후 repo를 실제로 볼 사람을 위해 마지막 안내를 남기고 Q&amp;A로 넘긴다.</a:t>
+            </a:r>
+          </a:p>
+        </p:txBody>
+      </p:sp>
+      <p:sp>
+        <p:nvSpPr>
+          <p:cNvPr id="10" name="TextBox 9"/>
+          <p:cNvSpPr txBox="1"/>
+          <p:nvPr/>
+        </p:nvSpPr>
+        <p:spPr>
+          <a:xfrm>
+            <a:off x="502920" y="1298448"/>
+            <a:ext cx="6995160" cy="4526280"/>
+          </a:xfrm>
+          <a:prstGeom prst="rect">
+            <a:avLst/>
+          </a:prstGeom>
+          <a:solidFill>
+            <a:srgbClr val="FFFFFF"/>
+          </a:solidFill>
+          <a:ln>
+            <a:solidFill>
+              <a:srgbClr val="DAD4CA"/>
+            </a:solidFill>
+          </a:ln>
+        </p:spPr>
+        <p:txBody>
+          <a:bodyPr wrap="square" lIns="128016" rIns="128016" tIns="128016" bIns="128016" anchor="t">
+            <a:spAutoFit/>
+          </a:bodyPr>
+          <a:lstStyle/>
+          <a:p>
+            <a:pPr algn="l">
+              <a:lnSpc>
+                <a:spcPct val="112000"/>
+              </a:lnSpc>
+              <a:spcBef>
+                <a:spcPts val="0"/>
+              </a:spcBef>
+              <a:spcAft>
+                <a:spcPts val="800"/>
+              </a:spcAft>
+              <a:defRPr sz="1800">
+                <a:solidFill>
+                  <a:srgbClr val="363A48"/>
+                </a:solidFill>
+                <a:latin typeface="Apple SD Gothic Neo"/>
+              </a:defRPr>
+            </a:pPr>
+            <a:r>
+              <a:t>• 원 논문 설명은 `presentation/`의 deck와 notes, 재현 서사는 `README.md`, 원고는 `paper/`를 보면 된다.</a:t>
+            </a:r>
+          </a:p>
+          <a:p>
+            <a:pPr>
+              <a:lnSpc>
+                <a:spcPct val="112000"/>
+              </a:lnSpc>
+              <a:spcBef>
+                <a:spcPts val="0"/>
+              </a:spcBef>
+              <a:spcAft>
+                <a:spcPts val="800"/>
+              </a:spcAft>
+              <a:defRPr sz="1800">
+                <a:solidFill>
+                  <a:srgbClr val="363A48"/>
+                </a:solidFill>
+                <a:latin typeface="Apple SD Gothic Neo"/>
+              </a:defRPr>
+            </a:pPr>
+            <a:r>
+              <a:t>• 실험은 Phase 1–2 → Phase 3 → Phase 4–5 → Phase 6 순으로 읽으면 오늘 발표 흐름과 정확히 맞는다.</a:t>
+            </a:r>
+          </a:p>
+          <a:p>
+            <a:pPr>
+              <a:lnSpc>
+                <a:spcPct val="112000"/>
+              </a:lnSpc>
+              <a:spcBef>
+                <a:spcPts val="0"/>
+              </a:spcBef>
+              <a:spcAft>
+                <a:spcPts val="800"/>
+              </a:spcAft>
+              <a:defRPr sz="1800">
+                <a:solidFill>
+                  <a:srgbClr val="363A48"/>
+                </a:solidFill>
+                <a:latin typeface="Apple SD Gothic Neo"/>
+              </a:defRPr>
+            </a:pPr>
+            <a:r>
+              <a:t>• 수치 검증은 `figures/` 옆 CSV와 `data/` raw judgment를 따라가면 된다.</a:t>
+            </a:r>
+          </a:p>
+          <a:p>
+            <a:pPr>
+              <a:lnSpc>
+                <a:spcPct val="112000"/>
+              </a:lnSpc>
+              <a:spcBef>
+                <a:spcPts val="0"/>
+              </a:spcBef>
+              <a:spcAft>
+                <a:spcPts val="800"/>
+              </a:spcAft>
+              <a:defRPr sz="1800">
+                <a:solidFill>
+                  <a:srgbClr val="363A48"/>
+                </a:solidFill>
+                <a:latin typeface="Apple SD Gothic Neo"/>
+              </a:defRPr>
+            </a:pPr>
+            <a:r>
+              <a:t>• 즉 오늘 발표는 끝나도, repo 안에서 결론을 다시 확인할 수 있게 설계되어 있다.</a:t>
+            </a:r>
+          </a:p>
+        </p:txBody>
+      </p:sp>
+      <p:sp>
+        <p:nvSpPr>
+          <p:cNvPr id="11" name="TextBox 10"/>
+          <p:cNvSpPr txBox="1"/>
+          <p:nvPr/>
+        </p:nvSpPr>
+        <p:spPr>
+          <a:xfrm>
+            <a:off x="7726679" y="1298448"/>
+            <a:ext cx="3931920" cy="292608"/>
+          </a:xfrm>
+          <a:prstGeom prst="rect">
+            <a:avLst/>
+          </a:prstGeom>
+          <a:noFill/>
+          <a:ln>
+            <a:noFill/>
+          </a:ln>
+        </p:spPr>
+        <p:txBody>
+          <a:bodyPr wrap="square" lIns="64008" rIns="64008" tIns="64008" bIns="64008" anchor="t">
+            <a:spAutoFit/>
+          </a:bodyPr>
+          <a:lstStyle/>
+          <a:p>
+            <a:pPr algn="l"/>
+            <a:r>
+              <a:rPr sz="1800" b="1">
+                <a:solidFill>
+                  <a:srgbClr val="282C3A"/>
+                </a:solidFill>
+                <a:latin typeface="Apple SD Gothic Neo"/>
+              </a:rPr>
+              <a:t>핵심 해석</a:t>
+            </a:r>
+          </a:p>
+        </p:txBody>
+      </p:sp>
+      <p:sp>
+        <p:nvSpPr>
+          <p:cNvPr id="12" name="TextBox 11"/>
+          <p:cNvSpPr txBox="1"/>
+          <p:nvPr/>
+        </p:nvSpPr>
+        <p:spPr>
+          <a:xfrm>
+            <a:off x="7726679" y="1645920"/>
+            <a:ext cx="3931920" cy="4178808"/>
+          </a:xfrm>
+          <a:prstGeom prst="rect">
+            <a:avLst/>
+          </a:prstGeom>
+          <a:solidFill>
+            <a:srgbClr val="E2EAEF"/>
+          </a:solidFill>
+          <a:ln>
+            <a:solidFill>
+              <a:srgbClr val="E2EAEF"/>
+            </a:solidFill>
+          </a:ln>
+        </p:spPr>
+        <p:txBody>
+          <a:bodyPr wrap="square" lIns="128016" rIns="128016" tIns="128016" bIns="128016" anchor="t">
+            <a:spAutoFit/>
+          </a:bodyPr>
+          <a:lstStyle/>
+          <a:p>
+            <a:pPr algn="l"/>
+            <a:r>
+              <a:rPr sz="1700" b="0">
+                <a:solidFill>
+                  <a:srgbClr val="363A48"/>
+                </a:solidFill>
+                <a:latin typeface="Apple SD Gothic Neo"/>
+              </a:rPr>
+              <a:t/>
+            </a:r>
+          </a:p>
+        </p:txBody>
+      </p:sp>
+      <p:sp>
+        <p:nvSpPr>
+          <p:cNvPr id="13" name="TextBox 12"/>
+          <p:cNvSpPr txBox="1"/>
+          <p:nvPr/>
+        </p:nvSpPr>
+        <p:spPr>
+          <a:xfrm>
+            <a:off x="7882127" y="1847088"/>
+            <a:ext cx="3566160" cy="1170432"/>
+          </a:xfrm>
+          <a:prstGeom prst="rect">
+            <a:avLst/>
+          </a:prstGeom>
+          <a:noFill/>
+          <a:ln>
+            <a:noFill/>
+          </a:ln>
+        </p:spPr>
+        <p:txBody>
+          <a:bodyPr wrap="square" lIns="0" rIns="0" tIns="0" bIns="0" anchor="t">
+            <a:spAutoFit/>
+          </a:bodyPr>
+          <a:lstStyle/>
+          <a:p>
+            <a:pPr algn="l"/>
+            <a:r>
+              <a:rPr sz="1600" b="1">
+                <a:solidFill>
+                  <a:srgbClr val="282C3A"/>
+                </a:solidFill>
+                <a:latin typeface="Apple SD Gothic Neo"/>
+              </a:rPr>
+              <a:t>질문 받겠습니다.</a:t>
+            </a:r>
+          </a:p>
+        </p:txBody>
+      </p:sp>
+      <p:sp>
+        <p:nvSpPr>
+          <p:cNvPr id="14" name="TextBox 13"/>
+          <p:cNvSpPr txBox="1"/>
+          <p:nvPr/>
+        </p:nvSpPr>
+        <p:spPr>
+          <a:xfrm>
+            <a:off x="7882127" y="3310128"/>
+            <a:ext cx="2029968" cy="877824"/>
+          </a:xfrm>
+          <a:prstGeom prst="rect">
+            <a:avLst/>
+          </a:prstGeom>
+          <a:solidFill>
+            <a:srgbClr val="FFFFFF"/>
+          </a:solidFill>
+          <a:ln>
+            <a:solidFill>
+              <a:srgbClr val="DAD4CA"/>
+            </a:solidFill>
+          </a:ln>
+        </p:spPr>
+        <p:txBody>
+          <a:bodyPr wrap="square" lIns="54864" rIns="54864" tIns="54864" bIns="54864" anchor="t">
+            <a:spAutoFit/>
+          </a:bodyPr>
+          <a:lstStyle/>
+          <a:p>
+            <a:pPr algn="l"/>
+            <a:r>
+              <a:rPr sz="1700" b="0">
+                <a:solidFill>
+                  <a:srgbClr val="363A48"/>
+                </a:solidFill>
+                <a:latin typeface="Apple SD Gothic Neo"/>
+              </a:rPr>
+              <a:t/>
+            </a:r>
+          </a:p>
+        </p:txBody>
+      </p:sp>
+      <p:sp>
+        <p:nvSpPr>
+          <p:cNvPr id="15" name="Rectangle 14"/>
+          <p:cNvSpPr/>
+          <p:nvPr/>
+        </p:nvSpPr>
+        <p:spPr>
+          <a:xfrm>
+            <a:off x="7991855" y="3419856"/>
+            <a:ext cx="502920" cy="182880"/>
+          </a:xfrm>
+          <a:prstGeom prst="rect">
+            <a:avLst/>
+          </a:prstGeom>
+          <a:solidFill>
+            <a:srgbClr val="375667"/>
+          </a:solidFill>
+          <a:ln>
+            <a:noFill/>
+          </a:ln>
+        </p:spPr>
+        <p:style>
+          <a:lnRef idx="1">
+            <a:schemeClr val="accent1"/>
+          </a:lnRef>
+          <a:fillRef idx="3">
+            <a:schemeClr val="accent1"/>
+          </a:fillRef>
+          <a:effectRef idx="2">
+            <a:schemeClr val="accent1"/>
+          </a:effectRef>
+          <a:fontRef idx="minor">
+            <a:schemeClr val="lt1"/>
+          </a:fontRef>
+        </p:style>
+        <p:txBody>
+          <a:bodyPr rtlCol="0" anchor="ctr"/>
+          <a:lstStyle/>
+          <a:p>
+            <a:pPr algn="ctr"/>
+          </a:p>
+        </p:txBody>
+      </p:sp>
+      <p:sp>
+        <p:nvSpPr>
+          <p:cNvPr id="16" name="TextBox 15"/>
+          <p:cNvSpPr txBox="1"/>
+          <p:nvPr/>
+        </p:nvSpPr>
+        <p:spPr>
+          <a:xfrm>
+            <a:off x="8010143" y="3419856"/>
+            <a:ext cx="1691640" cy="182880"/>
+          </a:xfrm>
+          <a:prstGeom prst="rect">
+            <a:avLst/>
+          </a:prstGeom>
+          <a:noFill/>
+          <a:ln>
+            <a:noFill/>
+          </a:ln>
+        </p:spPr>
+        <p:txBody>
+          <a:bodyPr wrap="square" lIns="9144" rIns="9144" tIns="9144" bIns="9144" anchor="ctr">
+            <a:spAutoFit/>
+          </a:bodyPr>
+          <a:lstStyle/>
+          <a:p>
+            <a:pPr algn="l"/>
+            <a:r>
+              <a:rPr sz="900" b="1">
+                <a:solidFill>
+                  <a:srgbClr val="FFFFFF"/>
+                </a:solidFill>
+                <a:latin typeface="Apple SD Gothic Neo"/>
+              </a:rPr>
+              <a:t>presentation</a:t>
+            </a:r>
+          </a:p>
+        </p:txBody>
+      </p:sp>
+      <p:sp>
+        <p:nvSpPr>
+          <p:cNvPr id="17" name="TextBox 16"/>
+          <p:cNvSpPr txBox="1"/>
+          <p:nvPr/>
+        </p:nvSpPr>
+        <p:spPr>
+          <a:xfrm>
+            <a:off x="7991855" y="3657600"/>
+            <a:ext cx="1737360" cy="310896"/>
+          </a:xfrm>
+          <a:prstGeom prst="rect">
+            <a:avLst/>
+          </a:prstGeom>
+          <a:noFill/>
+          <a:ln>
+            <a:noFill/>
+          </a:ln>
+        </p:spPr>
+        <p:txBody>
+          <a:bodyPr wrap="square" lIns="9144" rIns="9144" tIns="9144" bIns="9144" anchor="t">
+            <a:spAutoFit/>
+          </a:bodyPr>
+          <a:lstStyle/>
+          <a:p>
+            <a:pPr algn="l"/>
+            <a:r>
+              <a:rPr sz="1900" b="1">
+                <a:solidFill>
+                  <a:srgbClr val="282C3A"/>
+                </a:solidFill>
+                <a:latin typeface="Apple SD Gothic Neo"/>
+              </a:rPr>
+              <a:t>today's deck</a:t>
+            </a:r>
+          </a:p>
+        </p:txBody>
+      </p:sp>
+      <p:sp>
+        <p:nvSpPr>
+          <p:cNvPr id="18" name="TextBox 17"/>
+          <p:cNvSpPr txBox="1"/>
+          <p:nvPr/>
+        </p:nvSpPr>
+        <p:spPr>
+          <a:xfrm>
+            <a:off x="9729215" y="3310128"/>
+            <a:ext cx="2029968" cy="877824"/>
+          </a:xfrm>
+          <a:prstGeom prst="rect">
+            <a:avLst/>
+          </a:prstGeom>
+          <a:solidFill>
+            <a:srgbClr val="FFFFFF"/>
+          </a:solidFill>
+          <a:ln>
+            <a:solidFill>
+              <a:srgbClr val="DAD4CA"/>
+            </a:solidFill>
+          </a:ln>
+        </p:spPr>
+        <p:txBody>
+          <a:bodyPr wrap="square" lIns="54864" rIns="54864" tIns="54864" bIns="54864" anchor="t">
+            <a:spAutoFit/>
+          </a:bodyPr>
+          <a:lstStyle/>
+          <a:p>
+            <a:pPr algn="l"/>
+            <a:r>
+              <a:rPr sz="1700" b="0">
+                <a:solidFill>
+                  <a:srgbClr val="363A48"/>
+                </a:solidFill>
+                <a:latin typeface="Apple SD Gothic Neo"/>
+              </a:rPr>
+              <a:t/>
+            </a:r>
+          </a:p>
+        </p:txBody>
+      </p:sp>
+      <p:sp>
+        <p:nvSpPr>
+          <p:cNvPr id="19" name="Rectangle 18"/>
+          <p:cNvSpPr/>
+          <p:nvPr/>
+        </p:nvSpPr>
+        <p:spPr>
+          <a:xfrm>
+            <a:off x="9838943" y="3419856"/>
+            <a:ext cx="502920" cy="182880"/>
+          </a:xfrm>
+          <a:prstGeom prst="rect">
+            <a:avLst/>
+          </a:prstGeom>
+          <a:solidFill>
+            <a:srgbClr val="B5654E"/>
+          </a:solidFill>
+          <a:ln>
+            <a:noFill/>
+          </a:ln>
+        </p:spPr>
+        <p:style>
+          <a:lnRef idx="1">
+            <a:schemeClr val="accent1"/>
+          </a:lnRef>
+          <a:fillRef idx="3">
+            <a:schemeClr val="accent1"/>
+          </a:fillRef>
+          <a:effectRef idx="2">
+            <a:schemeClr val="accent1"/>
+          </a:effectRef>
+          <a:fontRef idx="minor">
+            <a:schemeClr val="lt1"/>
+          </a:fontRef>
+        </p:style>
+        <p:txBody>
+          <a:bodyPr rtlCol="0" anchor="ctr"/>
+          <a:lstStyle/>
+          <a:p>
+            <a:pPr algn="ctr"/>
+          </a:p>
+        </p:txBody>
+      </p:sp>
+      <p:sp>
+        <p:nvSpPr>
+          <p:cNvPr id="20" name="TextBox 19"/>
+          <p:cNvSpPr txBox="1"/>
+          <p:nvPr/>
+        </p:nvSpPr>
+        <p:spPr>
+          <a:xfrm>
+            <a:off x="9857231" y="3419856"/>
+            <a:ext cx="1691640" cy="182880"/>
+          </a:xfrm>
+          <a:prstGeom prst="rect">
+            <a:avLst/>
+          </a:prstGeom>
+          <a:noFill/>
+          <a:ln>
+            <a:noFill/>
+          </a:ln>
+        </p:spPr>
+        <p:txBody>
+          <a:bodyPr wrap="square" lIns="9144" rIns="9144" tIns="9144" bIns="9144" anchor="ctr">
+            <a:spAutoFit/>
+          </a:bodyPr>
+          <a:lstStyle/>
+          <a:p>
+            <a:pPr algn="l"/>
+            <a:r>
+              <a:rPr sz="900" b="1">
+                <a:solidFill>
+                  <a:srgbClr val="FFFFFF"/>
+                </a:solidFill>
+                <a:latin typeface="Apple SD Gothic Neo"/>
+              </a:rPr>
+              <a:t>README</a:t>
+            </a:r>
+          </a:p>
+        </p:txBody>
+      </p:sp>
+      <p:sp>
+        <p:nvSpPr>
+          <p:cNvPr id="21" name="TextBox 20"/>
+          <p:cNvSpPr txBox="1"/>
+          <p:nvPr/>
+        </p:nvSpPr>
+        <p:spPr>
+          <a:xfrm>
+            <a:off x="9838943" y="3657600"/>
+            <a:ext cx="1737360" cy="310896"/>
+          </a:xfrm>
+          <a:prstGeom prst="rect">
+            <a:avLst/>
+          </a:prstGeom>
+          <a:noFill/>
+          <a:ln>
+            <a:noFill/>
+          </a:ln>
+        </p:spPr>
+        <p:txBody>
+          <a:bodyPr wrap="square" lIns="9144" rIns="9144" tIns="9144" bIns="9144" anchor="t">
+            <a:spAutoFit/>
+          </a:bodyPr>
+          <a:lstStyle/>
+          <a:p>
+            <a:pPr algn="l"/>
+            <a:r>
+              <a:rPr sz="1900" b="1">
+                <a:solidFill>
+                  <a:srgbClr val="282C3A"/>
+                </a:solidFill>
+                <a:latin typeface="Apple SD Gothic Neo"/>
+              </a:rPr>
+              <a:t>story</a:t>
+            </a:r>
+          </a:p>
+        </p:txBody>
+      </p:sp>
+      <p:sp>
+        <p:nvSpPr>
+          <p:cNvPr id="22" name="TextBox 21"/>
+          <p:cNvSpPr txBox="1"/>
+          <p:nvPr/>
+        </p:nvSpPr>
+        <p:spPr>
+          <a:xfrm>
+            <a:off x="7882127" y="4224528"/>
+            <a:ext cx="2029968" cy="877824"/>
+          </a:xfrm>
+          <a:prstGeom prst="rect">
+            <a:avLst/>
+          </a:prstGeom>
+          <a:solidFill>
+            <a:srgbClr val="FFFFFF"/>
+          </a:solidFill>
+          <a:ln>
+            <a:solidFill>
+              <a:srgbClr val="DAD4CA"/>
+            </a:solidFill>
+          </a:ln>
+        </p:spPr>
+        <p:txBody>
+          <a:bodyPr wrap="square" lIns="54864" rIns="54864" tIns="54864" bIns="54864" anchor="t">
+            <a:spAutoFit/>
+          </a:bodyPr>
+          <a:lstStyle/>
+          <a:p>
+            <a:pPr algn="l"/>
+            <a:r>
+              <a:rPr sz="1700" b="0">
+                <a:solidFill>
+                  <a:srgbClr val="363A48"/>
+                </a:solidFill>
+                <a:latin typeface="Apple SD Gothic Neo"/>
+              </a:rPr>
+              <a:t/>
+            </a:r>
+          </a:p>
+        </p:txBody>
+      </p:sp>
+      <p:sp>
+        <p:nvSpPr>
+          <p:cNvPr id="23" name="Rectangle 22"/>
+          <p:cNvSpPr/>
+          <p:nvPr/>
+        </p:nvSpPr>
+        <p:spPr>
+          <a:xfrm>
+            <a:off x="7991855" y="4334256"/>
+            <a:ext cx="502920" cy="182880"/>
+          </a:xfrm>
+          <a:prstGeom prst="rect">
+            <a:avLst/>
+          </a:prstGeom>
+          <a:solidFill>
+            <a:srgbClr val="BF9A5E"/>
+          </a:solidFill>
+          <a:ln>
+            <a:noFill/>
+          </a:ln>
+        </p:spPr>
+        <p:style>
+          <a:lnRef idx="1">
+            <a:schemeClr val="accent1"/>
+          </a:lnRef>
+          <a:fillRef idx="3">
+            <a:schemeClr val="accent1"/>
+          </a:fillRef>
+          <a:effectRef idx="2">
+            <a:schemeClr val="accent1"/>
+          </a:effectRef>
+          <a:fontRef idx="minor">
+            <a:schemeClr val="lt1"/>
+          </a:fontRef>
+        </p:style>
+        <p:txBody>
+          <a:bodyPr rtlCol="0" anchor="ctr"/>
+          <a:lstStyle/>
+          <a:p>
+            <a:pPr algn="ctr"/>
+          </a:p>
+        </p:txBody>
+      </p:sp>
+      <p:sp>
+        <p:nvSpPr>
+          <p:cNvPr id="24" name="TextBox 23"/>
+          <p:cNvSpPr txBox="1"/>
+          <p:nvPr/>
+        </p:nvSpPr>
+        <p:spPr>
+          <a:xfrm>
+            <a:off x="8010143" y="4334256"/>
+            <a:ext cx="1691640" cy="182880"/>
+          </a:xfrm>
+          <a:prstGeom prst="rect">
+            <a:avLst/>
+          </a:prstGeom>
+          <a:noFill/>
+          <a:ln>
+            <a:noFill/>
+          </a:ln>
+        </p:spPr>
+        <p:txBody>
+          <a:bodyPr wrap="square" lIns="9144" rIns="9144" tIns="9144" bIns="9144" anchor="ctr">
+            <a:spAutoFit/>
+          </a:bodyPr>
+          <a:lstStyle/>
+          <a:p>
+            <a:pPr algn="l"/>
+            <a:r>
+              <a:rPr sz="900" b="1">
+                <a:solidFill>
+                  <a:srgbClr val="FFFFFF"/>
+                </a:solidFill>
+                <a:latin typeface="Apple SD Gothic Neo"/>
+              </a:rPr>
+              <a:t>data</a:t>
+            </a:r>
+          </a:p>
+        </p:txBody>
+      </p:sp>
+      <p:sp>
+        <p:nvSpPr>
+          <p:cNvPr id="25" name="TextBox 24"/>
+          <p:cNvSpPr txBox="1"/>
+          <p:nvPr/>
+        </p:nvSpPr>
+        <p:spPr>
+          <a:xfrm>
+            <a:off x="7991855" y="4572000"/>
+            <a:ext cx="1737360" cy="310896"/>
+          </a:xfrm>
+          <a:prstGeom prst="rect">
+            <a:avLst/>
+          </a:prstGeom>
+          <a:noFill/>
+          <a:ln>
+            <a:noFill/>
+          </a:ln>
+        </p:spPr>
+        <p:txBody>
+          <a:bodyPr wrap="square" lIns="9144" rIns="9144" tIns="9144" bIns="9144" anchor="t">
+            <a:spAutoFit/>
+          </a:bodyPr>
+          <a:lstStyle/>
+          <a:p>
+            <a:pPr algn="l"/>
+            <a:r>
+              <a:rPr sz="1900" b="1">
+                <a:solidFill>
+                  <a:srgbClr val="282C3A"/>
+                </a:solidFill>
+                <a:latin typeface="Apple SD Gothic Neo"/>
+              </a:rPr>
+              <a:t>evidence</a:t>
+            </a:r>
+          </a:p>
+        </p:txBody>
+      </p:sp>
+      <p:sp>
+        <p:nvSpPr>
+          <p:cNvPr id="26" name="TextBox 25"/>
+          <p:cNvSpPr txBox="1"/>
+          <p:nvPr/>
+        </p:nvSpPr>
+        <p:spPr>
+          <a:xfrm>
+            <a:off x="9729215" y="4224528"/>
+            <a:ext cx="2029968" cy="877824"/>
+          </a:xfrm>
+          <a:prstGeom prst="rect">
+            <a:avLst/>
+          </a:prstGeom>
+          <a:solidFill>
+            <a:srgbClr val="FFFFFF"/>
+          </a:solidFill>
+          <a:ln>
+            <a:solidFill>
+              <a:srgbClr val="DAD4CA"/>
+            </a:solidFill>
+          </a:ln>
+        </p:spPr>
+        <p:txBody>
+          <a:bodyPr wrap="square" lIns="54864" rIns="54864" tIns="54864" bIns="54864" anchor="t">
+            <a:spAutoFit/>
+          </a:bodyPr>
+          <a:lstStyle/>
+          <a:p>
+            <a:pPr algn="l"/>
+            <a:r>
+              <a:rPr sz="1700" b="0">
+                <a:solidFill>
+                  <a:srgbClr val="363A48"/>
+                </a:solidFill>
+                <a:latin typeface="Apple SD Gothic Neo"/>
+              </a:rPr>
+              <a:t/>
+            </a:r>
+          </a:p>
+        </p:txBody>
+      </p:sp>
+      <p:sp>
+        <p:nvSpPr>
+          <p:cNvPr id="27" name="Rectangle 26"/>
+          <p:cNvSpPr/>
+          <p:nvPr/>
+        </p:nvSpPr>
+        <p:spPr>
+          <a:xfrm>
+            <a:off x="9838943" y="4334256"/>
+            <a:ext cx="502920" cy="182880"/>
+          </a:xfrm>
+          <a:prstGeom prst="rect">
+            <a:avLst/>
+          </a:prstGeom>
+          <a:solidFill>
+            <a:srgbClr val="668185"/>
+          </a:solidFill>
+          <a:ln>
+            <a:noFill/>
+          </a:ln>
+        </p:spPr>
+        <p:style>
+          <a:lnRef idx="1">
+            <a:schemeClr val="accent1"/>
+          </a:lnRef>
+          <a:fillRef idx="3">
+            <a:schemeClr val="accent1"/>
+          </a:fillRef>
+          <a:effectRef idx="2">
+            <a:schemeClr val="accent1"/>
+          </a:effectRef>
+          <a:fontRef idx="minor">
+            <a:schemeClr val="lt1"/>
+          </a:fontRef>
+        </p:style>
+        <p:txBody>
+          <a:bodyPr rtlCol="0" anchor="ctr"/>
+          <a:lstStyle/>
+          <a:p>
+            <a:pPr algn="ctr"/>
+          </a:p>
+        </p:txBody>
+      </p:sp>
+      <p:sp>
+        <p:nvSpPr>
+          <p:cNvPr id="28" name="TextBox 27"/>
+          <p:cNvSpPr txBox="1"/>
+          <p:nvPr/>
+        </p:nvSpPr>
+        <p:spPr>
+          <a:xfrm>
+            <a:off x="9857231" y="4334256"/>
+            <a:ext cx="1691640" cy="182880"/>
+          </a:xfrm>
+          <a:prstGeom prst="rect">
+            <a:avLst/>
+          </a:prstGeom>
+          <a:noFill/>
+          <a:ln>
+            <a:noFill/>
+          </a:ln>
+        </p:spPr>
+        <p:txBody>
+          <a:bodyPr wrap="square" lIns="9144" rIns="9144" tIns="9144" bIns="9144" anchor="ctr">
+            <a:spAutoFit/>
+          </a:bodyPr>
+          <a:lstStyle/>
+          <a:p>
+            <a:pPr algn="l"/>
+            <a:r>
+              <a:rPr sz="900" b="1">
+                <a:solidFill>
+                  <a:srgbClr val="FFFFFF"/>
+                </a:solidFill>
+                <a:latin typeface="Apple SD Gothic Neo"/>
+              </a:rPr>
+              <a:t>paper</a:t>
+            </a:r>
+          </a:p>
+        </p:txBody>
+      </p:sp>
+      <p:sp>
+        <p:nvSpPr>
+          <p:cNvPr id="29" name="TextBox 28"/>
+          <p:cNvSpPr txBox="1"/>
+          <p:nvPr/>
+        </p:nvSpPr>
+        <p:spPr>
+          <a:xfrm>
+            <a:off x="9838943" y="4572000"/>
+            <a:ext cx="1737360" cy="310896"/>
+          </a:xfrm>
+          <a:prstGeom prst="rect">
+            <a:avLst/>
+          </a:prstGeom>
+          <a:noFill/>
+          <a:ln>
+            <a:noFill/>
+          </a:ln>
+        </p:spPr>
+        <p:txBody>
+          <a:bodyPr wrap="square" lIns="9144" rIns="9144" tIns="9144" bIns="9144" anchor="t">
+            <a:spAutoFit/>
+          </a:bodyPr>
+          <a:lstStyle/>
+          <a:p>
+            <a:pPr algn="l"/>
+            <a:r>
+              <a:rPr sz="1900" b="1">
+                <a:solidFill>
+                  <a:srgbClr val="282C3A"/>
+                </a:solidFill>
+                <a:latin typeface="Apple SD Gothic Neo"/>
+              </a:rPr>
+              <a:t>final text</a:t>
             </a:r>
           </a:p>
         </p:txBody>
@@ -16610,7 +18623,7 @@
                 </a:solidFill>
                 <a:latin typeface="Apple SD Gothic Neo"/>
               </a:rPr>
-              <a:t>3/19</a:t>
+              <a:t>3/20</a:t>
             </a:r>
           </a:p>
         </p:txBody>
@@ -16738,9 +18751,51 @@
           </a:p>
         </p:txBody>
       </p:sp>
+      <p:sp>
+        <p:nvSpPr>
+          <p:cNvPr id="10" name="TextBox 9"/>
+          <p:cNvSpPr txBox="1"/>
+          <p:nvPr/>
+        </p:nvSpPr>
+        <p:spPr>
+          <a:xfrm>
+            <a:off x="502920" y="1261872"/>
+            <a:ext cx="5449824" cy="2907792"/>
+          </a:xfrm>
+          <a:prstGeom prst="rect">
+            <a:avLst/>
+          </a:prstGeom>
+          <a:solidFill>
+            <a:srgbClr val="FFFFFF"/>
+          </a:solidFill>
+          <a:ln>
+            <a:solidFill>
+              <a:srgbClr val="DAD4CA"/>
+            </a:solidFill>
+          </a:ln>
+        </p:spPr>
+        <p:txBody>
+          <a:bodyPr wrap="square" lIns="109728" rIns="109728" tIns="109728" bIns="109728" anchor="t">
+            <a:spAutoFit/>
+          </a:bodyPr>
+          <a:lstStyle/>
+          <a:p>
+            <a:pPr algn="l"/>
+            <a:r>
+              <a:rPr sz="1700" b="0">
+                <a:solidFill>
+                  <a:srgbClr val="363A48"/>
+                </a:solidFill>
+                <a:latin typeface="Apple SD Gothic Neo"/>
+              </a:rPr>
+              <a:t/>
+            </a:r>
+          </a:p>
+        </p:txBody>
+      </p:sp>
       <p:pic>
         <p:nvPicPr>
-          <p:cNvPr id="10" name="Picture 9" descr="paper_chatbot_arena_ui.png"/>
+          <p:cNvPr id="11" name="Picture 10" descr="paper_chatbot_arena_ui.png"/>
           <p:cNvPicPr>
             <a:picLocks noChangeAspect="1"/>
           </p:cNvPicPr>
@@ -16754,17 +18809,59 @@
         </p:blipFill>
         <p:spPr>
           <a:xfrm>
-            <a:off x="502920" y="1261872"/>
-            <a:ext cx="5468112" cy="4282192"/>
+            <a:off x="1511407" y="1371600"/>
+            <a:ext cx="3432850" cy="2688336"/>
           </a:xfrm>
           <a:prstGeom prst="rect">
             <a:avLst/>
           </a:prstGeom>
         </p:spPr>
       </p:pic>
+      <p:sp>
+        <p:nvSpPr>
+          <p:cNvPr id="12" name="TextBox 11"/>
+          <p:cNvSpPr txBox="1"/>
+          <p:nvPr/>
+        </p:nvSpPr>
+        <p:spPr>
+          <a:xfrm>
+            <a:off x="6208776" y="1261872"/>
+            <a:ext cx="5449824" cy="2907792"/>
+          </a:xfrm>
+          <a:prstGeom prst="rect">
+            <a:avLst/>
+          </a:prstGeom>
+          <a:solidFill>
+            <a:srgbClr val="FFFFFF"/>
+          </a:solidFill>
+          <a:ln>
+            <a:solidFill>
+              <a:srgbClr val="DAD4CA"/>
+            </a:solidFill>
+          </a:ln>
+        </p:spPr>
+        <p:txBody>
+          <a:bodyPr wrap="square" lIns="109728" rIns="109728" tIns="109728" bIns="109728" anchor="t">
+            <a:spAutoFit/>
+          </a:bodyPr>
+          <a:lstStyle/>
+          <a:p>
+            <a:pPr algn="l"/>
+            <a:r>
+              <a:rPr sz="1700" b="0">
+                <a:solidFill>
+                  <a:srgbClr val="363A48"/>
+                </a:solidFill>
+                <a:latin typeface="Apple SD Gothic Neo"/>
+              </a:rPr>
+              <a:t/>
+            </a:r>
+          </a:p>
+        </p:txBody>
+      </p:sp>
       <p:pic>
         <p:nvPicPr>
-          <p:cNvPr id="11" name="Picture 10" descr="paper_mtbench_winrate_fig3.png"/>
+          <p:cNvPr id="13" name="Picture 12" descr="paper_mtbench_winrate_fig3.png"/>
           <p:cNvPicPr>
             <a:picLocks noChangeAspect="1"/>
           </p:cNvPicPr>
@@ -16778,8 +18875,8 @@
         </p:blipFill>
         <p:spPr>
           <a:xfrm>
-            <a:off x="6199632" y="1261872"/>
-            <a:ext cx="5468112" cy="2961894"/>
+            <a:off x="6452147" y="1371600"/>
+            <a:ext cx="4963081" cy="2688336"/>
           </a:xfrm>
           <a:prstGeom prst="rect">
             <a:avLst/>
@@ -16788,14 +18885,14 @@
       </p:pic>
       <p:sp>
         <p:nvSpPr>
-          <p:cNvPr id="12" name="TextBox 11"/>
-          <p:cNvSpPr txBox="1"/>
-          <p:nvPr/>
-        </p:nvSpPr>
-        <p:spPr>
-          <a:xfrm>
-            <a:off x="566928" y="4297680"/>
-            <a:ext cx="5340096" cy="201168"/>
+          <p:cNvPr id="14" name="TextBox 13"/>
+          <p:cNvSpPr txBox="1"/>
+          <p:nvPr/>
+        </p:nvSpPr>
+        <p:spPr>
+          <a:xfrm>
+            <a:off x="502920" y="4279392"/>
+            <a:ext cx="5449824" cy="201168"/>
           </a:xfrm>
           <a:prstGeom prst="rect">
             <a:avLst/>
@@ -16826,14 +18923,14 @@
       </p:sp>
       <p:sp>
         <p:nvSpPr>
-          <p:cNvPr id="13" name="TextBox 12"/>
-          <p:cNvSpPr txBox="1"/>
-          <p:nvPr/>
-        </p:nvSpPr>
-        <p:spPr>
-          <a:xfrm>
-            <a:off x="6263640" y="4297680"/>
-            <a:ext cx="5340096" cy="201168"/>
+          <p:cNvPr id="15" name="TextBox 14"/>
+          <p:cNvSpPr txBox="1"/>
+          <p:nvPr/>
+        </p:nvSpPr>
+        <p:spPr>
+          <a:xfrm>
+            <a:off x="6208776" y="4279392"/>
+            <a:ext cx="5449824" cy="201168"/>
           </a:xfrm>
           <a:prstGeom prst="rect">
             <a:avLst/>
@@ -16864,14 +18961,14 @@
       </p:sp>
       <p:sp>
         <p:nvSpPr>
-          <p:cNvPr id="14" name="TextBox 13"/>
-          <p:cNvSpPr txBox="1"/>
-          <p:nvPr/>
-        </p:nvSpPr>
-        <p:spPr>
-          <a:xfrm>
-            <a:off x="502920" y="4553712"/>
-            <a:ext cx="11155680" cy="1417320"/>
+          <p:cNvPr id="16" name="TextBox 15"/>
+          <p:cNvSpPr txBox="1"/>
+          <p:nvPr/>
+        </p:nvSpPr>
+        <p:spPr>
+          <a:xfrm>
+            <a:off x="502920" y="4535424"/>
+            <a:ext cx="11155680" cy="1353312"/>
           </a:xfrm>
           <a:prstGeom prst="rect">
             <a:avLst/>
@@ -16960,13 +19057,13 @@
       </p:sp>
       <p:sp>
         <p:nvSpPr>
-          <p:cNvPr id="15" name="TextBox 14"/>
-          <p:cNvSpPr txBox="1"/>
-          <p:nvPr/>
-        </p:nvSpPr>
-        <p:spPr>
-          <a:xfrm>
-            <a:off x="502920" y="5632704"/>
+          <p:cNvPr id="17" name="TextBox 16"/>
+          <p:cNvSpPr txBox="1"/>
+          <p:nvPr/>
+        </p:nvSpPr>
+        <p:spPr>
+          <a:xfrm>
+            <a:off x="502920" y="5596128"/>
             <a:ext cx="11155680" cy="548640"/>
           </a:xfrm>
           <a:prstGeom prst="rect">
@@ -17225,7 +19322,7 @@
                 </a:solidFill>
                 <a:latin typeface="Apple SD Gothic Neo"/>
               </a:rPr>
-              <a:t>4/19</a:t>
+              <a:t>4/20</a:t>
             </a:r>
           </a:p>
         </p:txBody>
@@ -18436,7 +20533,7 @@
                 </a:solidFill>
                 <a:latin typeface="Apple SD Gothic Neo"/>
               </a:rPr>
-              <a:t>5/19</a:t>
+              <a:t>5/20</a:t>
             </a:r>
           </a:p>
         </p:txBody>
@@ -18615,7 +20712,7 @@
         <p:spPr>
           <a:xfrm>
             <a:off x="502920" y="2048256"/>
-            <a:ext cx="3553967" cy="1993392"/>
+            <a:ext cx="3584448" cy="2029968"/>
           </a:xfrm>
           <a:prstGeom prst="rect">
             <a:avLst/>
@@ -18657,7 +20754,7 @@
         <p:spPr>
           <a:xfrm>
             <a:off x="576072" y="2157984"/>
-            <a:ext cx="3407664" cy="237744"/>
+            <a:ext cx="3438144" cy="237744"/>
           </a:xfrm>
           <a:prstGeom prst="rect">
             <a:avLst/>
@@ -18694,8 +20791,8 @@
         </p:nvSpPr>
         <p:spPr>
           <a:xfrm>
-            <a:off x="576072" y="2542032"/>
-            <a:ext cx="3407664" cy="1152144"/>
+            <a:off x="576072" y="2523744"/>
+            <a:ext cx="3438144" cy="1188720"/>
           </a:xfrm>
           <a:prstGeom prst="rect">
             <a:avLst/>
@@ -18713,7 +20810,7 @@
           <a:p>
             <a:pPr algn="l"/>
             <a:r>
-              <a:rPr sz="1500" b="0">
+              <a:rPr sz="1400" b="0">
                 <a:solidFill>
                   <a:srgbClr val="363A48"/>
                 </a:solidFill>
@@ -18732,8 +20829,8 @@
         </p:nvSpPr>
         <p:spPr>
           <a:xfrm>
-            <a:off x="4221480" y="2048256"/>
-            <a:ext cx="3553967" cy="1993392"/>
+            <a:off x="4288536" y="2048256"/>
+            <a:ext cx="3584448" cy="2029968"/>
           </a:xfrm>
           <a:prstGeom prst="rect">
             <a:avLst/>
@@ -18774,8 +20871,8 @@
         </p:nvSpPr>
         <p:spPr>
           <a:xfrm>
-            <a:off x="4294632" y="2157984"/>
-            <a:ext cx="3407664" cy="237744"/>
+            <a:off x="4361688" y="2157984"/>
+            <a:ext cx="3438144" cy="237744"/>
           </a:xfrm>
           <a:prstGeom prst="rect">
             <a:avLst/>
@@ -18812,8 +20909,8 @@
         </p:nvSpPr>
         <p:spPr>
           <a:xfrm>
-            <a:off x="4294632" y="2542032"/>
-            <a:ext cx="3407664" cy="1152144"/>
+            <a:off x="4361688" y="2523744"/>
+            <a:ext cx="3438144" cy="1188720"/>
           </a:xfrm>
           <a:prstGeom prst="rect">
             <a:avLst/>
@@ -18831,7 +20928,7 @@
           <a:p>
             <a:pPr algn="l"/>
             <a:r>
-              <a:rPr sz="1500" b="0">
+              <a:rPr sz="1400" b="0">
                 <a:solidFill>
                   <a:srgbClr val="363A48"/>
                 </a:solidFill>
@@ -18850,8 +20947,8 @@
         </p:nvSpPr>
         <p:spPr>
           <a:xfrm>
-            <a:off x="7940040" y="2048256"/>
-            <a:ext cx="3553967" cy="1993392"/>
+            <a:off x="8074152" y="2048256"/>
+            <a:ext cx="3584448" cy="2029968"/>
           </a:xfrm>
           <a:prstGeom prst="rect">
             <a:avLst/>
@@ -18892,8 +20989,8 @@
         </p:nvSpPr>
         <p:spPr>
           <a:xfrm>
-            <a:off x="8013192" y="2157984"/>
-            <a:ext cx="3407664" cy="237744"/>
+            <a:off x="8147304" y="2157984"/>
+            <a:ext cx="3438144" cy="237744"/>
           </a:xfrm>
           <a:prstGeom prst="rect">
             <a:avLst/>
@@ -18930,8 +21027,8 @@
         </p:nvSpPr>
         <p:spPr>
           <a:xfrm>
-            <a:off x="8013192" y="2542032"/>
-            <a:ext cx="3407664" cy="1152144"/>
+            <a:off x="8147304" y="2523744"/>
+            <a:ext cx="3438144" cy="1188720"/>
           </a:xfrm>
           <a:prstGeom prst="rect">
             <a:avLst/>
@@ -18949,7 +21046,7 @@
           <a:p>
             <a:pPr algn="l"/>
             <a:r>
-              <a:rPr sz="1500" b="0">
+              <a:rPr sz="1400" b="0">
                 <a:solidFill>
                   <a:srgbClr val="363A48"/>
                 </a:solidFill>
@@ -18969,7 +21066,7 @@
         <p:spPr>
           <a:xfrm>
             <a:off x="502920" y="4407408"/>
-            <a:ext cx="11155680" cy="1225296"/>
+            <a:ext cx="11155680" cy="1298448"/>
           </a:xfrm>
           <a:prstGeom prst="rect">
             <a:avLst/>
@@ -19237,7 +21334,7 @@
                 </a:solidFill>
                 <a:latin typeface="Apple SD Gothic Neo"/>
               </a:rPr>
-              <a:t>6/19</a:t>
+              <a:t>6/20</a:t>
             </a:r>
           </a:p>
         </p:txBody>
@@ -19416,7 +21513,7 @@
         <p:spPr>
           <a:xfrm>
             <a:off x="502920" y="2048256"/>
-            <a:ext cx="2624327" cy="1993392"/>
+            <a:ext cx="5449824" cy="1444752"/>
           </a:xfrm>
           <a:prstGeom prst="rect">
             <a:avLst/>
@@ -19457,8 +21554,8 @@
         </p:nvSpPr>
         <p:spPr>
           <a:xfrm>
-            <a:off x="576072" y="2157984"/>
-            <a:ext cx="2478024" cy="237744"/>
+            <a:off x="594360" y="2157984"/>
+            <a:ext cx="5266944" cy="201168"/>
           </a:xfrm>
           <a:prstGeom prst="rect">
             <a:avLst/>
@@ -19495,8 +21592,8 @@
         </p:nvSpPr>
         <p:spPr>
           <a:xfrm>
-            <a:off x="576072" y="2542032"/>
-            <a:ext cx="2478024" cy="1152144"/>
+            <a:off x="594360" y="2450592"/>
+            <a:ext cx="5266944" cy="804672"/>
           </a:xfrm>
           <a:prstGeom prst="rect">
             <a:avLst/>
@@ -19514,7 +21611,7 @@
           <a:p>
             <a:pPr algn="l"/>
             <a:r>
-              <a:rPr sz="1500" b="0">
+              <a:rPr sz="1350" b="0">
                 <a:solidFill>
                   <a:srgbClr val="363A48"/>
                 </a:solidFill>
@@ -19533,8 +21630,8 @@
         </p:nvSpPr>
         <p:spPr>
           <a:xfrm>
-            <a:off x="3291839" y="2048256"/>
-            <a:ext cx="2624327" cy="1993392"/>
+            <a:off x="6208776" y="2048256"/>
+            <a:ext cx="5449824" cy="1444752"/>
           </a:xfrm>
           <a:prstGeom prst="rect">
             <a:avLst/>
@@ -19575,8 +21672,8 @@
         </p:nvSpPr>
         <p:spPr>
           <a:xfrm>
-            <a:off x="3364991" y="2157984"/>
-            <a:ext cx="2478024" cy="237744"/>
+            <a:off x="6300216" y="2157984"/>
+            <a:ext cx="5266944" cy="201168"/>
           </a:xfrm>
           <a:prstGeom prst="rect">
             <a:avLst/>
@@ -19613,8 +21710,8 @@
         </p:nvSpPr>
         <p:spPr>
           <a:xfrm>
-            <a:off x="3364991" y="2542032"/>
-            <a:ext cx="2478024" cy="1152144"/>
+            <a:off x="6300216" y="2450592"/>
+            <a:ext cx="5266944" cy="804672"/>
           </a:xfrm>
           <a:prstGeom prst="rect">
             <a:avLst/>
@@ -19632,7 +21729,7 @@
           <a:p>
             <a:pPr algn="l"/>
             <a:r>
-              <a:rPr sz="1500" b="0">
+              <a:rPr sz="1350" b="0">
                 <a:solidFill>
                   <a:srgbClr val="363A48"/>
                 </a:solidFill>
@@ -19651,8 +21748,8 @@
         </p:nvSpPr>
         <p:spPr>
           <a:xfrm>
-            <a:off x="6080759" y="2048256"/>
-            <a:ext cx="2624327" cy="1993392"/>
+            <a:off x="502920" y="3675888"/>
+            <a:ext cx="5449824" cy="1444752"/>
           </a:xfrm>
           <a:prstGeom prst="rect">
             <a:avLst/>
@@ -19693,8 +21790,8 @@
         </p:nvSpPr>
         <p:spPr>
           <a:xfrm>
-            <a:off x="6153911" y="2157984"/>
-            <a:ext cx="2478024" cy="237744"/>
+            <a:off x="594360" y="3785616"/>
+            <a:ext cx="5266944" cy="201168"/>
           </a:xfrm>
           <a:prstGeom prst="rect">
             <a:avLst/>
@@ -19731,8 +21828,8 @@
         </p:nvSpPr>
         <p:spPr>
           <a:xfrm>
-            <a:off x="6153911" y="2542032"/>
-            <a:ext cx="2478024" cy="1152144"/>
+            <a:off x="594360" y="4078224"/>
+            <a:ext cx="5266944" cy="804672"/>
           </a:xfrm>
           <a:prstGeom prst="rect">
             <a:avLst/>
@@ -19750,7 +21847,7 @@
           <a:p>
             <a:pPr algn="l"/>
             <a:r>
-              <a:rPr sz="1500" b="0">
+              <a:rPr sz="1350" b="0">
                 <a:solidFill>
                   <a:srgbClr val="363A48"/>
                 </a:solidFill>
@@ -19769,8 +21866,8 @@
         </p:nvSpPr>
         <p:spPr>
           <a:xfrm>
-            <a:off x="8869680" y="2048256"/>
-            <a:ext cx="2624327" cy="1993392"/>
+            <a:off x="6208776" y="3675888"/>
+            <a:ext cx="5449824" cy="1444752"/>
           </a:xfrm>
           <a:prstGeom prst="rect">
             <a:avLst/>
@@ -19811,8 +21908,8 @@
         </p:nvSpPr>
         <p:spPr>
           <a:xfrm>
-            <a:off x="8942832" y="2157984"/>
-            <a:ext cx="2478024" cy="237744"/>
+            <a:off x="6300216" y="3785616"/>
+            <a:ext cx="5266944" cy="201168"/>
           </a:xfrm>
           <a:prstGeom prst="rect">
             <a:avLst/>
@@ -19849,8 +21946,8 @@
         </p:nvSpPr>
         <p:spPr>
           <a:xfrm>
-            <a:off x="8942832" y="2542032"/>
-            <a:ext cx="2478024" cy="1152144"/>
+            <a:off x="6300216" y="4078224"/>
+            <a:ext cx="5266944" cy="804672"/>
           </a:xfrm>
           <a:prstGeom prst="rect">
             <a:avLst/>
@@ -19868,7 +21965,7 @@
           <a:p>
             <a:pPr algn="l"/>
             <a:r>
-              <a:rPr sz="1500" b="0">
+              <a:rPr sz="1350" b="0">
                 <a:solidFill>
                   <a:srgbClr val="363A48"/>
                 </a:solidFill>
@@ -19887,8 +21984,8 @@
         </p:nvSpPr>
         <p:spPr>
           <a:xfrm>
-            <a:off x="502920" y="4407408"/>
-            <a:ext cx="11155680" cy="1225296"/>
+            <a:off x="502920" y="5285232"/>
+            <a:ext cx="11155680" cy="749808"/>
           </a:xfrm>
           <a:prstGeom prst="rect">
             <a:avLst/>
@@ -19918,7 +22015,7 @@
               <a:spcAft>
                 <a:spcPts val="800"/>
               </a:spcAft>
-              <a:defRPr sz="1600">
+              <a:defRPr sz="1500">
                 <a:solidFill>
                   <a:srgbClr val="363A48"/>
                 </a:solidFill>
@@ -19940,7 +22037,7 @@
               <a:spcAft>
                 <a:spcPts val="800"/>
               </a:spcAft>
-              <a:defRPr sz="1600">
+              <a:defRPr sz="1500">
                 <a:solidFill>
                   <a:srgbClr val="363A48"/>
                 </a:solidFill>
@@ -19962,7 +22059,7 @@
               <a:spcAft>
                 <a:spcPts val="800"/>
               </a:spcAft>
-              <a:defRPr sz="1600">
+              <a:defRPr sz="1500">
                 <a:solidFill>
                   <a:srgbClr val="363A48"/>
                 </a:solidFill>
@@ -20200,7 +22297,7 @@
                 </a:solidFill>
                 <a:latin typeface="Apple SD Gothic Neo"/>
               </a:rPr>
-              <a:t>7/19</a:t>
+              <a:t>7/20</a:t>
             </a:r>
           </a:p>
         </p:txBody>
@@ -20328,9 +22425,51 @@
           </a:p>
         </p:txBody>
       </p:sp>
+      <p:sp>
+        <p:nvSpPr>
+          <p:cNvPr id="10" name="TextBox 9"/>
+          <p:cNvSpPr txBox="1"/>
+          <p:nvPr/>
+        </p:nvSpPr>
+        <p:spPr>
+          <a:xfrm>
+            <a:off x="502920" y="1261872"/>
+            <a:ext cx="5449824" cy="2907792"/>
+          </a:xfrm>
+          <a:prstGeom prst="rect">
+            <a:avLst/>
+          </a:prstGeom>
+          <a:solidFill>
+            <a:srgbClr val="FFFFFF"/>
+          </a:solidFill>
+          <a:ln>
+            <a:solidFill>
+              <a:srgbClr val="DAD4CA"/>
+            </a:solidFill>
+          </a:ln>
+        </p:spPr>
+        <p:txBody>
+          <a:bodyPr wrap="square" lIns="109728" rIns="109728" tIns="109728" bIns="109728" anchor="t">
+            <a:spAutoFit/>
+          </a:bodyPr>
+          <a:lstStyle/>
+          <a:p>
+            <a:pPr algn="l"/>
+            <a:r>
+              <a:rPr sz="1700" b="0">
+                <a:solidFill>
+                  <a:srgbClr val="363A48"/>
+                </a:solidFill>
+                <a:latin typeface="Apple SD Gothic Neo"/>
+              </a:rPr>
+              <a:t/>
+            </a:r>
+          </a:p>
+        </p:txBody>
+      </p:sp>
       <p:pic>
         <p:nvPicPr>
-          <p:cNvPr id="10" name="Picture 9" descr="paper_mtbench_agreement_table5.png"/>
+          <p:cNvPr id="11" name="Picture 10" descr="paper_mtbench_agreement_table5.png"/>
           <p:cNvPicPr>
             <a:picLocks noChangeAspect="1"/>
           </p:cNvPicPr>
@@ -20344,17 +22483,59 @@
         </p:blipFill>
         <p:spPr>
           <a:xfrm>
-            <a:off x="502920" y="1261872"/>
-            <a:ext cx="5468112" cy="2426248"/>
+            <a:off x="612648" y="1555388"/>
+            <a:ext cx="5230367" cy="2320759"/>
           </a:xfrm>
           <a:prstGeom prst="rect">
             <a:avLst/>
           </a:prstGeom>
         </p:spPr>
       </p:pic>
+      <p:sp>
+        <p:nvSpPr>
+          <p:cNvPr id="12" name="TextBox 11"/>
+          <p:cNvSpPr txBox="1"/>
+          <p:nvPr/>
+        </p:nvSpPr>
+        <p:spPr>
+          <a:xfrm>
+            <a:off x="6208776" y="1261872"/>
+            <a:ext cx="5449824" cy="2907792"/>
+          </a:xfrm>
+          <a:prstGeom prst="rect">
+            <a:avLst/>
+          </a:prstGeom>
+          <a:solidFill>
+            <a:srgbClr val="FFFFFF"/>
+          </a:solidFill>
+          <a:ln>
+            <a:solidFill>
+              <a:srgbClr val="DAD4CA"/>
+            </a:solidFill>
+          </a:ln>
+        </p:spPr>
+        <p:txBody>
+          <a:bodyPr wrap="square" lIns="109728" rIns="109728" tIns="109728" bIns="109728" anchor="t">
+            <a:spAutoFit/>
+          </a:bodyPr>
+          <a:lstStyle/>
+          <a:p>
+            <a:pPr algn="l"/>
+            <a:r>
+              <a:rPr sz="1700" b="0">
+                <a:solidFill>
+                  <a:srgbClr val="363A48"/>
+                </a:solidFill>
+                <a:latin typeface="Apple SD Gothic Neo"/>
+              </a:rPr>
+              <a:t/>
+            </a:r>
+          </a:p>
+        </p:txBody>
+      </p:sp>
       <p:pic>
         <p:nvPicPr>
-          <p:cNvPr id="11" name="Picture 10" descr="paper_table8_scores.png"/>
+          <p:cNvPr id="13" name="Picture 12" descr="paper_table8_scores.png"/>
           <p:cNvPicPr>
             <a:picLocks noChangeAspect="1"/>
           </p:cNvPicPr>
@@ -20368,8 +22549,8 @@
         </p:blipFill>
         <p:spPr>
           <a:xfrm>
-            <a:off x="6199632" y="1261872"/>
-            <a:ext cx="5468112" cy="2173224"/>
+            <a:off x="6318504" y="1676400"/>
+            <a:ext cx="5230368" cy="2078736"/>
           </a:xfrm>
           <a:prstGeom prst="rect">
             <a:avLst/>
@@ -20378,14 +22559,14 @@
       </p:pic>
       <p:sp>
         <p:nvSpPr>
-          <p:cNvPr id="12" name="TextBox 11"/>
-          <p:cNvSpPr txBox="1"/>
-          <p:nvPr/>
-        </p:nvSpPr>
-        <p:spPr>
-          <a:xfrm>
-            <a:off x="566928" y="4297680"/>
-            <a:ext cx="5340096" cy="201168"/>
+          <p:cNvPr id="14" name="TextBox 13"/>
+          <p:cNvSpPr txBox="1"/>
+          <p:nvPr/>
+        </p:nvSpPr>
+        <p:spPr>
+          <a:xfrm>
+            <a:off x="502920" y="4279392"/>
+            <a:ext cx="5449824" cy="201168"/>
           </a:xfrm>
           <a:prstGeom prst="rect">
             <a:avLst/>
@@ -20416,14 +22597,14 @@
       </p:sp>
       <p:sp>
         <p:nvSpPr>
-          <p:cNvPr id="13" name="TextBox 12"/>
-          <p:cNvSpPr txBox="1"/>
-          <p:nvPr/>
-        </p:nvSpPr>
-        <p:spPr>
-          <a:xfrm>
-            <a:off x="6263640" y="4297680"/>
-            <a:ext cx="5340096" cy="201168"/>
+          <p:cNvPr id="15" name="TextBox 14"/>
+          <p:cNvSpPr txBox="1"/>
+          <p:nvPr/>
+        </p:nvSpPr>
+        <p:spPr>
+          <a:xfrm>
+            <a:off x="6208776" y="4279392"/>
+            <a:ext cx="5449824" cy="201168"/>
           </a:xfrm>
           <a:prstGeom prst="rect">
             <a:avLst/>
@@ -20454,14 +22635,14 @@
       </p:sp>
       <p:sp>
         <p:nvSpPr>
-          <p:cNvPr id="14" name="TextBox 13"/>
-          <p:cNvSpPr txBox="1"/>
-          <p:nvPr/>
-        </p:nvSpPr>
-        <p:spPr>
-          <a:xfrm>
-            <a:off x="502920" y="4553712"/>
-            <a:ext cx="11155680" cy="1417320"/>
+          <p:cNvPr id="16" name="TextBox 15"/>
+          <p:cNvSpPr txBox="1"/>
+          <p:nvPr/>
+        </p:nvSpPr>
+        <p:spPr>
+          <a:xfrm>
+            <a:off x="502920" y="4535424"/>
+            <a:ext cx="11155680" cy="1353312"/>
           </a:xfrm>
           <a:prstGeom prst="rect">
             <a:avLst/>
@@ -20550,13 +22731,13 @@
       </p:sp>
       <p:sp>
         <p:nvSpPr>
-          <p:cNvPr id="15" name="TextBox 14"/>
-          <p:cNvSpPr txBox="1"/>
-          <p:nvPr/>
-        </p:nvSpPr>
-        <p:spPr>
-          <a:xfrm>
-            <a:off x="502920" y="5632704"/>
+          <p:cNvPr id="17" name="TextBox 16"/>
+          <p:cNvSpPr txBox="1"/>
+          <p:nvPr/>
+        </p:nvSpPr>
+        <p:spPr>
+          <a:xfrm>
+            <a:off x="502920" y="5596128"/>
             <a:ext cx="11155680" cy="548640"/>
           </a:xfrm>
           <a:prstGeom prst="rect">
@@ -20815,7 +22996,7 @@
                 </a:solidFill>
                 <a:latin typeface="Apple SD Gothic Neo"/>
               </a:rPr>
-              <a:t>8/19</a:t>
+              <a:t>8/20</a:t>
             </a:r>
           </a:p>
         </p:txBody>
@@ -20994,7 +23175,7 @@
         <p:spPr>
           <a:xfrm>
             <a:off x="502920" y="1975104"/>
-            <a:ext cx="5440680" cy="4315968"/>
+            <a:ext cx="5449824" cy="4370832"/>
           </a:xfrm>
           <a:prstGeom prst="rect">
             <a:avLst/>
@@ -21036,7 +23217,7 @@
         <p:spPr>
           <a:xfrm>
             <a:off x="594360" y="2084832"/>
-            <a:ext cx="5212080" cy="237744"/>
+            <a:ext cx="5266944" cy="237744"/>
           </a:xfrm>
           <a:prstGeom prst="rect">
             <a:avLst/>
@@ -21074,7 +23255,7 @@
         <p:spPr>
           <a:xfrm>
             <a:off x="594360" y="2450592"/>
-            <a:ext cx="5212080" cy="3520440"/>
+            <a:ext cx="5266944" cy="3566160"/>
           </a:xfrm>
           <a:prstGeom prst="rect">
             <a:avLst/>
@@ -21165,8 +23346,8 @@
         </p:nvSpPr>
         <p:spPr>
           <a:xfrm>
-            <a:off x="6108192" y="1975104"/>
-            <a:ext cx="5440680" cy="4315968"/>
+            <a:off x="6208776" y="1975104"/>
+            <a:ext cx="5449824" cy="4370832"/>
           </a:xfrm>
           <a:prstGeom prst="rect">
             <a:avLst/>
@@ -21207,8 +23388,8 @@
         </p:nvSpPr>
         <p:spPr>
           <a:xfrm>
-            <a:off x="6199632" y="2084832"/>
-            <a:ext cx="5212080" cy="237744"/>
+            <a:off x="6300216" y="2084832"/>
+            <a:ext cx="5266944" cy="237744"/>
           </a:xfrm>
           <a:prstGeom prst="rect">
             <a:avLst/>
@@ -21245,8 +23426,8 @@
         </p:nvSpPr>
         <p:spPr>
           <a:xfrm>
-            <a:off x="6199632" y="2450592"/>
-            <a:ext cx="5212080" cy="3520440"/>
+            <a:off x="6300216" y="2450592"/>
+            <a:ext cx="5266944" cy="3566160"/>
           </a:xfrm>
           <a:prstGeom prst="rect">
             <a:avLst/>
@@ -21554,7 +23735,7 @@
                 </a:solidFill>
                 <a:latin typeface="Apple SD Gothic Neo"/>
               </a:rPr>
-              <a:t>9/19</a:t>
+              <a:t>9/20</a:t>
             </a:r>
           </a:p>
         </p:txBody>

--- a/presentation/mt_bench_paper_study.pptx
+++ b/presentation/mt_bench_paper_study.pptx
@@ -6100,8 +6100,8 @@
         </p:nvSpPr>
         <p:spPr>
           <a:xfrm>
-            <a:off x="713232" y="786384"/>
-            <a:ext cx="5303520" cy="1353312"/>
+            <a:off x="713232" y="749808"/>
+            <a:ext cx="5376672" cy="1554480"/>
           </a:xfrm>
           <a:prstGeom prst="rect">
             <a:avLst/>
@@ -6113,20 +6113,21 @@
         </p:spPr>
         <p:txBody>
           <a:bodyPr wrap="square" lIns="0" rIns="0" tIns="0" bIns="0" anchor="t">
-            <a:spAutoFit/>
+            <a:normAutofit/>
           </a:bodyPr>
           <a:lstStyle/>
           <a:p>
             <a:pPr algn="l"/>
             <a:r>
-              <a:rPr sz="3000" b="1">
+              <a:rPr sz="2700" b="1">
                 <a:solidFill>
                   <a:srgbClr val="282C3A"/>
                 </a:solidFill>
                 <a:latin typeface="Apple SD Gothic Neo"/>
               </a:rPr>
-              <a:t>MT-Bench / Chatbot Arena
-논문 리뷰와 내 연구</a:t>
+              <a:t>Judging LLM-as-a-Judge
+with MT-Bench
+and Chatbot Arena</a:t>
             </a:r>
           </a:p>
         </p:txBody>
@@ -6139,8 +6140,8 @@
         </p:nvSpPr>
         <p:spPr>
           <a:xfrm>
-            <a:off x="731520" y="2395728"/>
-            <a:ext cx="4937760" cy="274320"/>
+            <a:off x="731520" y="2542032"/>
+            <a:ext cx="4846320" cy="256032"/>
           </a:xfrm>
           <a:prstGeom prst="rect">
             <a:avLst/>
@@ -6152,7 +6153,7 @@
         </p:spPr>
         <p:txBody>
           <a:bodyPr wrap="square" lIns="0" rIns="0" tIns="0" bIns="0" anchor="t">
-            <a:spAutoFit/>
+            <a:normAutofit/>
           </a:bodyPr>
           <a:lstStyle/>
           <a:p>
@@ -6164,7 +6165,7 @@
                 </a:solidFill>
                 <a:latin typeface="Apple SD Gothic Neo"/>
               </a:rPr>
-              <a:t>1부 논문 리뷰, 2부 내 연구</a:t>
+              <a:t>논문 스터디</a:t>
             </a:r>
           </a:p>
         </p:txBody>
@@ -6177,8 +6178,8 @@
         </p:nvSpPr>
         <p:spPr>
           <a:xfrm>
-            <a:off x="731520" y="2871216"/>
-            <a:ext cx="5029200" cy="1234440"/>
+            <a:off x="731520" y="2926080"/>
+            <a:ext cx="5074920" cy="960120"/>
           </a:xfrm>
           <a:prstGeom prst="rect">
             <a:avLst/>
@@ -6190,20 +6191,20 @@
         </p:spPr>
         <p:txBody>
           <a:bodyPr wrap="square" lIns="64008" rIns="64008" tIns="64008" bIns="64008" anchor="t">
-            <a:spAutoFit/>
+            <a:normAutofit/>
           </a:bodyPr>
           <a:lstStyle/>
           <a:p>
             <a:pPr algn="l"/>
             <a:r>
-              <a:rPr sz="1800" b="0">
+              <a:rPr sz="1600" b="0">
                 <a:solidFill>
                   <a:srgbClr val="363A48"/>
                 </a:solidFill>
                 <a:latin typeface="Apple SD Gothic Neo"/>
               </a:rPr>
-              <a:t>앞 절반은 Zheng et al.의 베이스 논문을 읽는 시간입니다.
-뒤 절반은 그 프로토콜을 제 저장소와 실험으로 어떻게 옮겼는지 설명합니다.</a:t>
+              <a:t>앞 절반은 원 논문의 설계와 메시지를 읽고,
+뒤 절반은 그 프로토콜을 내 오픈소스 judge 실험으로 어떻게 옮겼는지 설명합니다.</a:t>
             </a:r>
           </a:p>
         </p:txBody>
@@ -6229,7 +6230,7 @@
         </p:spPr>
         <p:txBody>
           <a:bodyPr wrap="square" lIns="0" rIns="0" tIns="0" bIns="0" anchor="t">
-            <a:spAutoFit/>
+            <a:normAutofit/>
           </a:bodyPr>
           <a:lstStyle/>
           <a:p>
@@ -6315,7 +6316,7 @@
         </p:spPr>
         <p:txBody>
           <a:bodyPr wrap="square" lIns="0" rIns="0" tIns="0" bIns="0" anchor="t">
-            <a:spAutoFit/>
+            <a:normAutofit/>
           </a:bodyPr>
           <a:lstStyle/>
           <a:p>
@@ -6353,7 +6354,7 @@
         </p:spPr>
         <p:txBody>
           <a:bodyPr wrap="square" lIns="0" rIns="0" tIns="0" bIns="0" anchor="t">
-            <a:spAutoFit/>
+            <a:normAutofit/>
           </a:bodyPr>
           <a:lstStyle/>
           <a:p>
@@ -6391,19 +6392,19 @@
         </p:spPr>
         <p:txBody>
           <a:bodyPr wrap="square" lIns="0" rIns="0" tIns="0" bIns="0" anchor="t">
-            <a:spAutoFit/>
+            <a:normAutofit/>
           </a:bodyPr>
           <a:lstStyle/>
           <a:p>
             <a:pPr algn="l"/>
             <a:r>
-              <a:rPr sz="1600" b="1">
+              <a:rPr sz="1500" b="1">
                 <a:solidFill>
                   <a:srgbClr val="FFFFFF"/>
                 </a:solidFill>
                 <a:latin typeface="Apple SD Gothic Neo"/>
               </a:rPr>
-              <a:t>핵심 질문: strong judge LLM의 논문 메시지가 오픈소스 judge 실험으로 어디까지 이어지는가?</a:t>
+              <a:t>핵심 질문: 이 논문의 strong-judge 메시지가 내 오픈소스 judge 재현 실험에서도 어디까지 유지되는가?</a:t>
             </a:r>
           </a:p>
         </p:txBody>
@@ -6429,7 +6430,7 @@
         </p:spPr>
         <p:txBody>
           <a:bodyPr wrap="square" lIns="0" rIns="0" tIns="0" bIns="0" anchor="t">
-            <a:spAutoFit/>
+            <a:normAutofit/>
           </a:bodyPr>
           <a:lstStyle/>
           <a:p>
@@ -6441,7 +6442,7 @@
                 </a:solidFill>
                 <a:latin typeface="Apple SD Gothic Neo"/>
               </a:rPr>
-              <a:t>박승현 | CLINK Lab | 논문 리뷰 + 내 연구</a:t>
+              <a:t>박승현 | CLINK Lab | paper study + my reproduction</a:t>
             </a:r>
           </a:p>
         </p:txBody>
@@ -6579,7 +6580,7 @@
         </p:spPr>
         <p:txBody>
           <a:bodyPr wrap="square" lIns="0" rIns="0" tIns="0" bIns="0" anchor="t">
-            <a:spAutoFit/>
+            <a:normAutofit/>
           </a:bodyPr>
           <a:lstStyle/>
           <a:p>
@@ -6617,7 +6618,7 @@
         </p:spPr>
         <p:txBody>
           <a:bodyPr wrap="square" lIns="0" rIns="0" tIns="0" bIns="0" anchor="t">
-            <a:spAutoFit/>
+            <a:normAutofit/>
           </a:bodyPr>
           <a:lstStyle/>
           <a:p>
@@ -6655,13 +6656,13 @@
         </p:spPr>
         <p:txBody>
           <a:bodyPr wrap="square" lIns="0" rIns="0" tIns="0" bIns="0" anchor="t">
-            <a:spAutoFit/>
+            <a:normAutofit/>
           </a:bodyPr>
           <a:lstStyle/>
           <a:p>
             <a:pPr algn="l"/>
             <a:r>
-              <a:rPr sz="3000" b="1">
+              <a:rPr sz="2800" b="1">
                 <a:solidFill>
                   <a:srgbClr val="282C3A"/>
                 </a:solidFill>
@@ -6697,7 +6698,7 @@
         </p:spPr>
         <p:txBody>
           <a:bodyPr wrap="square" lIns="109728" rIns="109728" tIns="109728" bIns="109728" anchor="t">
-            <a:spAutoFit/>
+            <a:normAutofit/>
           </a:bodyPr>
           <a:lstStyle/>
           <a:p>
@@ -6709,7 +6710,7 @@
                 </a:solidFill>
                 <a:latin typeface="Apple SD Gothic Neo"/>
               </a:rPr>
-              <a:t>이제부터는 paper claim을 다시 읽는 것이 아니라, 그 claim을 내 judge 실험으로 어디까지 옮길 수 있었는지 보여드립니다.</a:t>
+              <a:t>이제부터는 내 연구입니다. 원 논문의 프로토콜을 오픈소스 judge 실험으로 어떻게 재현하고 어디까지 확장했는지 보여드립니다.</a:t>
             </a:r>
           </a:p>
         </p:txBody>
@@ -6735,7 +6736,7 @@
         </p:spPr>
         <p:txBody>
           <a:bodyPr wrap="square" lIns="0" rIns="0" tIns="0" bIns="0" anchor="t">
-            <a:spAutoFit/>
+            <a:normAutofit/>
           </a:bodyPr>
           <a:lstStyle/>
           <a:p>
@@ -6885,7 +6886,7 @@
         </p:spPr>
         <p:txBody>
           <a:bodyPr wrap="square" lIns="0" rIns="0" tIns="0" bIns="0" anchor="t">
-            <a:spAutoFit/>
+            <a:normAutofit/>
           </a:bodyPr>
           <a:lstStyle/>
           <a:p>
@@ -6927,7 +6928,7 @@
         </p:spPr>
         <p:txBody>
           <a:bodyPr wrap="square" lIns="9144" rIns="9144" tIns="9144" bIns="9144" anchor="ctr">
-            <a:spAutoFit/>
+            <a:normAutofit/>
           </a:bodyPr>
           <a:lstStyle/>
           <a:p>
@@ -6965,7 +6966,7 @@
         </p:spPr>
         <p:txBody>
           <a:bodyPr wrap="square" lIns="0" rIns="0" tIns="0" bIns="0" anchor="ctr">
-            <a:spAutoFit/>
+            <a:normAutofit/>
           </a:bodyPr>
           <a:lstStyle/>
           <a:p>
@@ -7046,7 +7047,7 @@
         </p:spPr>
         <p:txBody>
           <a:bodyPr wrap="square" lIns="0" rIns="0" tIns="0" bIns="0" anchor="t">
-            <a:spAutoFit/>
+            <a:normAutofit/>
           </a:bodyPr>
           <a:lstStyle/>
           <a:p>
@@ -7088,7 +7089,7 @@
         </p:spPr>
         <p:txBody>
           <a:bodyPr wrap="square" lIns="27432" rIns="27432" tIns="27432" bIns="27432" anchor="ctr">
-            <a:spAutoFit/>
+            <a:normAutofit/>
           </a:bodyPr>
           <a:lstStyle/>
           <a:p>
@@ -7130,7 +7131,7 @@
         </p:spPr>
         <p:txBody>
           <a:bodyPr wrap="square" lIns="64008" rIns="64008" tIns="64008" bIns="64008" anchor="ctr">
-            <a:spAutoFit/>
+            <a:normAutofit/>
           </a:bodyPr>
           <a:lstStyle/>
           <a:p>
@@ -7172,7 +7173,7 @@
         </p:spPr>
         <p:txBody>
           <a:bodyPr wrap="square" lIns="109728" rIns="109728" tIns="109728" bIns="109728" anchor="t">
-            <a:spAutoFit/>
+            <a:normAutofit/>
           </a:bodyPr>
           <a:lstStyle/>
           <a:p>
@@ -7210,7 +7211,7 @@
         </p:spPr>
         <p:txBody>
           <a:bodyPr wrap="square" lIns="0" rIns="0" tIns="0" bIns="0" anchor="t">
-            <a:spAutoFit/>
+            <a:normAutofit/>
           </a:bodyPr>
           <a:lstStyle/>
           <a:p>
@@ -7248,7 +7249,7 @@
         </p:spPr>
         <p:txBody>
           <a:bodyPr wrap="square" lIns="0" rIns="0" tIns="0" bIns="0" anchor="t">
-            <a:spAutoFit/>
+            <a:normAutofit/>
           </a:bodyPr>
           <a:lstStyle/>
           <a:p>
@@ -7290,7 +7291,7 @@
         </p:spPr>
         <p:txBody>
           <a:bodyPr wrap="square" lIns="109728" rIns="109728" tIns="109728" bIns="109728" anchor="t">
-            <a:spAutoFit/>
+            <a:normAutofit/>
           </a:bodyPr>
           <a:lstStyle/>
           <a:p>
@@ -7328,7 +7329,7 @@
         </p:spPr>
         <p:txBody>
           <a:bodyPr wrap="square" lIns="0" rIns="0" tIns="0" bIns="0" anchor="t">
-            <a:spAutoFit/>
+            <a:normAutofit/>
           </a:bodyPr>
           <a:lstStyle/>
           <a:p>
@@ -7366,7 +7367,7 @@
         </p:spPr>
         <p:txBody>
           <a:bodyPr wrap="square" lIns="0" rIns="0" tIns="0" bIns="0" anchor="t">
-            <a:spAutoFit/>
+            <a:normAutofit/>
           </a:bodyPr>
           <a:lstStyle/>
           <a:p>
@@ -7408,7 +7409,7 @@
         </p:spPr>
         <p:txBody>
           <a:bodyPr wrap="square" lIns="109728" rIns="109728" tIns="109728" bIns="109728" anchor="t">
-            <a:spAutoFit/>
+            <a:normAutofit/>
           </a:bodyPr>
           <a:lstStyle/>
           <a:p>
@@ -7446,7 +7447,7 @@
         </p:spPr>
         <p:txBody>
           <a:bodyPr wrap="square" lIns="0" rIns="0" tIns="0" bIns="0" anchor="t">
-            <a:spAutoFit/>
+            <a:normAutofit/>
           </a:bodyPr>
           <a:lstStyle/>
           <a:p>
@@ -7484,7 +7485,7 @@
         </p:spPr>
         <p:txBody>
           <a:bodyPr wrap="square" lIns="0" rIns="0" tIns="0" bIns="0" anchor="t">
-            <a:spAutoFit/>
+            <a:normAutofit/>
           </a:bodyPr>
           <a:lstStyle/>
           <a:p>
@@ -7526,7 +7527,7 @@
         </p:spPr>
         <p:txBody>
           <a:bodyPr wrap="square" lIns="109728" rIns="109728" tIns="109728" bIns="109728" anchor="t">
-            <a:spAutoFit/>
+            <a:normAutofit/>
           </a:bodyPr>
           <a:lstStyle/>
           <a:p>
@@ -7564,7 +7565,7 @@
         </p:spPr>
         <p:txBody>
           <a:bodyPr wrap="square" lIns="0" rIns="0" tIns="0" bIns="0" anchor="t">
-            <a:spAutoFit/>
+            <a:normAutofit/>
           </a:bodyPr>
           <a:lstStyle/>
           <a:p>
@@ -7602,7 +7603,7 @@
         </p:spPr>
         <p:txBody>
           <a:bodyPr wrap="square" lIns="0" rIns="0" tIns="0" bIns="0" anchor="t">
-            <a:spAutoFit/>
+            <a:normAutofit/>
           </a:bodyPr>
           <a:lstStyle/>
           <a:p>
@@ -7644,7 +7645,7 @@
         </p:spPr>
         <p:txBody>
           <a:bodyPr wrap="square" lIns="118872" rIns="118872" tIns="118872" bIns="118872" anchor="t">
-            <a:spAutoFit/>
+            <a:normAutofit/>
           </a:bodyPr>
           <a:lstStyle/>
           <a:p>
@@ -7804,7 +7805,7 @@
         </p:spPr>
         <p:txBody>
           <a:bodyPr wrap="square" lIns="0" rIns="0" tIns="0" bIns="0" anchor="t">
-            <a:spAutoFit/>
+            <a:normAutofit/>
           </a:bodyPr>
           <a:lstStyle/>
           <a:p>
@@ -7846,7 +7847,7 @@
         </p:spPr>
         <p:txBody>
           <a:bodyPr wrap="square" lIns="9144" rIns="9144" tIns="9144" bIns="9144" anchor="ctr">
-            <a:spAutoFit/>
+            <a:normAutofit/>
           </a:bodyPr>
           <a:lstStyle/>
           <a:p>
@@ -7884,7 +7885,7 @@
         </p:spPr>
         <p:txBody>
           <a:bodyPr wrap="square" lIns="0" rIns="0" tIns="0" bIns="0" anchor="ctr">
-            <a:spAutoFit/>
+            <a:normAutofit/>
           </a:bodyPr>
           <a:lstStyle/>
           <a:p>
@@ -7965,7 +7966,7 @@
         </p:spPr>
         <p:txBody>
           <a:bodyPr wrap="square" lIns="0" rIns="0" tIns="0" bIns="0" anchor="t">
-            <a:spAutoFit/>
+            <a:normAutofit/>
           </a:bodyPr>
           <a:lstStyle/>
           <a:p>
@@ -8007,7 +8008,7 @@
         </p:spPr>
         <p:txBody>
           <a:bodyPr wrap="square" lIns="27432" rIns="27432" tIns="27432" bIns="27432" anchor="ctr">
-            <a:spAutoFit/>
+            <a:normAutofit/>
           </a:bodyPr>
           <a:lstStyle/>
           <a:p>
@@ -8131,7 +8132,7 @@
         </p:spPr>
         <p:txBody>
           <a:bodyPr wrap="square" lIns="0" rIns="0" tIns="0" bIns="0" anchor="t">
-            <a:spAutoFit/>
+            <a:normAutofit/>
           </a:bodyPr>
           <a:lstStyle/>
           <a:p>
@@ -8169,7 +8170,7 @@
         </p:spPr>
         <p:txBody>
           <a:bodyPr wrap="square" lIns="0" rIns="0" tIns="0" bIns="0" anchor="t">
-            <a:spAutoFit/>
+            <a:normAutofit/>
           </a:bodyPr>
           <a:lstStyle/>
           <a:p>
@@ -8250,7 +8251,7 @@
         </p:spPr>
         <p:txBody>
           <a:bodyPr wrap="square" lIns="0" rIns="0" tIns="0" bIns="0" anchor="t">
-            <a:spAutoFit/>
+            <a:normAutofit/>
           </a:bodyPr>
           <a:lstStyle/>
           <a:p>
@@ -8288,7 +8289,7 @@
         </p:spPr>
         <p:txBody>
           <a:bodyPr wrap="square" lIns="0" rIns="0" tIns="0" bIns="0" anchor="t">
-            <a:spAutoFit/>
+            <a:normAutofit/>
           </a:bodyPr>
           <a:lstStyle/>
           <a:p>
@@ -8369,7 +8370,7 @@
         </p:spPr>
         <p:txBody>
           <a:bodyPr wrap="square" lIns="0" rIns="0" tIns="0" bIns="0" anchor="t">
-            <a:spAutoFit/>
+            <a:normAutofit/>
           </a:bodyPr>
           <a:lstStyle/>
           <a:p>
@@ -8407,7 +8408,7 @@
         </p:spPr>
         <p:txBody>
           <a:bodyPr wrap="square" lIns="0" rIns="0" tIns="0" bIns="0" anchor="t">
-            <a:spAutoFit/>
+            <a:normAutofit/>
           </a:bodyPr>
           <a:lstStyle/>
           <a:p>
@@ -8488,7 +8489,7 @@
         </p:spPr>
         <p:txBody>
           <a:bodyPr wrap="square" lIns="0" rIns="0" tIns="0" bIns="0" anchor="t">
-            <a:spAutoFit/>
+            <a:normAutofit/>
           </a:bodyPr>
           <a:lstStyle/>
           <a:p>
@@ -8526,7 +8527,7 @@
         </p:spPr>
         <p:txBody>
           <a:bodyPr wrap="square" lIns="0" rIns="0" tIns="0" bIns="0" anchor="t">
-            <a:spAutoFit/>
+            <a:normAutofit/>
           </a:bodyPr>
           <a:lstStyle/>
           <a:p>
@@ -8607,7 +8608,7 @@
         </p:spPr>
         <p:txBody>
           <a:bodyPr wrap="square" lIns="0" rIns="0" tIns="0" bIns="0" anchor="t">
-            <a:spAutoFit/>
+            <a:normAutofit/>
           </a:bodyPr>
           <a:lstStyle/>
           <a:p>
@@ -8645,7 +8646,7 @@
         </p:spPr>
         <p:txBody>
           <a:bodyPr wrap="square" lIns="0" rIns="0" tIns="0" bIns="0" anchor="t">
-            <a:spAutoFit/>
+            <a:normAutofit/>
           </a:bodyPr>
           <a:lstStyle/>
           <a:p>
@@ -8726,7 +8727,7 @@
         </p:spPr>
         <p:txBody>
           <a:bodyPr wrap="square" lIns="0" rIns="0" tIns="0" bIns="0" anchor="t">
-            <a:spAutoFit/>
+            <a:normAutofit/>
           </a:bodyPr>
           <a:lstStyle/>
           <a:p>
@@ -8764,7 +8765,7 @@
         </p:spPr>
         <p:txBody>
           <a:bodyPr wrap="square" lIns="0" rIns="0" tIns="0" bIns="0" anchor="t">
-            <a:spAutoFit/>
+            <a:normAutofit/>
           </a:bodyPr>
           <a:lstStyle/>
           <a:p>
@@ -8806,7 +8807,7 @@
         </p:spPr>
         <p:txBody>
           <a:bodyPr wrap="square" lIns="118872" rIns="118872" tIns="118872" bIns="118872" anchor="t">
-            <a:spAutoFit/>
+            <a:normAutofit/>
           </a:bodyPr>
           <a:lstStyle/>
           <a:p>
@@ -8924,7 +8925,7 @@
         </p:spPr>
         <p:txBody>
           <a:bodyPr wrap="square" lIns="64008" rIns="64008" tIns="64008" bIns="64008" anchor="ctr">
-            <a:spAutoFit/>
+            <a:normAutofit/>
           </a:bodyPr>
           <a:lstStyle/>
           <a:p>
@@ -9074,13 +9075,13 @@
         </p:spPr>
         <p:txBody>
           <a:bodyPr wrap="square" lIns="0" rIns="0" tIns="0" bIns="0" anchor="t">
-            <a:spAutoFit/>
+            <a:normAutofit/>
           </a:bodyPr>
           <a:lstStyle/>
           <a:p>
             <a:pPr algn="l"/>
             <a:r>
-              <a:rPr sz="2400" b="1">
+              <a:rPr sz="2100" b="1">
                 <a:solidFill>
                   <a:srgbClr val="282C3A"/>
                 </a:solidFill>
@@ -9116,7 +9117,7 @@
         </p:spPr>
         <p:txBody>
           <a:bodyPr wrap="square" lIns="9144" rIns="9144" tIns="9144" bIns="9144" anchor="ctr">
-            <a:spAutoFit/>
+            <a:normAutofit/>
           </a:bodyPr>
           <a:lstStyle/>
           <a:p>
@@ -9154,7 +9155,7 @@
         </p:spPr>
         <p:txBody>
           <a:bodyPr wrap="square" lIns="0" rIns="0" tIns="0" bIns="0" anchor="ctr">
-            <a:spAutoFit/>
+            <a:normAutofit/>
           </a:bodyPr>
           <a:lstStyle/>
           <a:p>
@@ -9235,7 +9236,7 @@
         </p:spPr>
         <p:txBody>
           <a:bodyPr wrap="square" lIns="0" rIns="0" tIns="0" bIns="0" anchor="t">
-            <a:spAutoFit/>
+            <a:normAutofit/>
           </a:bodyPr>
           <a:lstStyle/>
           <a:p>
@@ -9277,7 +9278,7 @@
         </p:spPr>
         <p:txBody>
           <a:bodyPr wrap="square" lIns="27432" rIns="27432" tIns="27432" bIns="27432" anchor="ctr">
-            <a:spAutoFit/>
+            <a:normAutofit/>
           </a:bodyPr>
           <a:lstStyle/>
           <a:p>
@@ -9319,7 +9320,7 @@
         </p:spPr>
         <p:txBody>
           <a:bodyPr wrap="square" lIns="109728" rIns="109728" tIns="109728" bIns="109728" anchor="t">
-            <a:spAutoFit/>
+            <a:normAutofit/>
           </a:bodyPr>
           <a:lstStyle/>
           <a:p>
@@ -9385,7 +9386,7 @@
         </p:spPr>
         <p:txBody>
           <a:bodyPr wrap="square" lIns="109728" rIns="109728" tIns="109728" bIns="109728" anchor="t">
-            <a:spAutoFit/>
+            <a:normAutofit/>
           </a:bodyPr>
           <a:lstStyle/>
           <a:p>
@@ -9447,7 +9448,7 @@
         </p:spPr>
         <p:txBody>
           <a:bodyPr wrap="square" lIns="64008" rIns="64008" tIns="64008" bIns="64008" anchor="t">
-            <a:spAutoFit/>
+            <a:normAutofit/>
           </a:bodyPr>
           <a:lstStyle/>
           <a:p>
@@ -9485,7 +9486,7 @@
         </p:spPr>
         <p:txBody>
           <a:bodyPr wrap="square" lIns="64008" rIns="64008" tIns="64008" bIns="64008" anchor="t">
-            <a:spAutoFit/>
+            <a:normAutofit/>
           </a:bodyPr>
           <a:lstStyle/>
           <a:p>
@@ -9527,7 +9528,7 @@
         </p:spPr>
         <p:txBody>
           <a:bodyPr wrap="square" lIns="118872" rIns="118872" tIns="118872" bIns="118872" anchor="t">
-            <a:spAutoFit/>
+            <a:normAutofit/>
           </a:bodyPr>
           <a:lstStyle/>
           <a:p>
@@ -9541,7 +9542,7 @@
               <a:spcAft>
                 <a:spcPts val="800"/>
               </a:spcAft>
-              <a:defRPr sz="1600">
+              <a:defRPr sz="1500">
                 <a:solidFill>
                   <a:srgbClr val="363A48"/>
                 </a:solidFill>
@@ -9563,7 +9564,7 @@
               <a:spcAft>
                 <a:spcPts val="800"/>
               </a:spcAft>
-              <a:defRPr sz="1600">
+              <a:defRPr sz="1500">
                 <a:solidFill>
                   <a:srgbClr val="363A48"/>
                 </a:solidFill>
@@ -9585,7 +9586,7 @@
               <a:spcAft>
                 <a:spcPts val="800"/>
               </a:spcAft>
-              <a:defRPr sz="1600">
+              <a:defRPr sz="1500">
                 <a:solidFill>
                   <a:srgbClr val="363A48"/>
                 </a:solidFill>
@@ -9607,7 +9608,7 @@
               <a:spcAft>
                 <a:spcPts val="800"/>
               </a:spcAft>
-              <a:defRPr sz="1600">
+              <a:defRPr sz="1500">
                 <a:solidFill>
                   <a:srgbClr val="363A48"/>
                 </a:solidFill>
@@ -9645,7 +9646,7 @@
         </p:spPr>
         <p:txBody>
           <a:bodyPr wrap="square" lIns="64008" rIns="64008" tIns="64008" bIns="64008" anchor="ctr">
-            <a:spAutoFit/>
+            <a:normAutofit/>
           </a:bodyPr>
           <a:lstStyle/>
           <a:p>
@@ -9795,13 +9796,13 @@
         </p:spPr>
         <p:txBody>
           <a:bodyPr wrap="square" lIns="0" rIns="0" tIns="0" bIns="0" anchor="t">
-            <a:spAutoFit/>
+            <a:normAutofit/>
           </a:bodyPr>
           <a:lstStyle/>
           <a:p>
             <a:pPr algn="l"/>
             <a:r>
-              <a:rPr sz="2400" b="1">
+              <a:rPr sz="2100" b="1">
                 <a:solidFill>
                   <a:srgbClr val="282C3A"/>
                 </a:solidFill>
@@ -9837,7 +9838,7 @@
         </p:spPr>
         <p:txBody>
           <a:bodyPr wrap="square" lIns="9144" rIns="9144" tIns="9144" bIns="9144" anchor="ctr">
-            <a:spAutoFit/>
+            <a:normAutofit/>
           </a:bodyPr>
           <a:lstStyle/>
           <a:p>
@@ -9875,7 +9876,7 @@
         </p:spPr>
         <p:txBody>
           <a:bodyPr wrap="square" lIns="0" rIns="0" tIns="0" bIns="0" anchor="ctr">
-            <a:spAutoFit/>
+            <a:normAutofit/>
           </a:bodyPr>
           <a:lstStyle/>
           <a:p>
@@ -9956,7 +9957,7 @@
         </p:spPr>
         <p:txBody>
           <a:bodyPr wrap="square" lIns="0" rIns="0" tIns="0" bIns="0" anchor="t">
-            <a:spAutoFit/>
+            <a:normAutofit/>
           </a:bodyPr>
           <a:lstStyle/>
           <a:p>
@@ -9998,7 +9999,7 @@
         </p:spPr>
         <p:txBody>
           <a:bodyPr wrap="square" lIns="27432" rIns="27432" tIns="27432" bIns="27432" anchor="ctr">
-            <a:spAutoFit/>
+            <a:normAutofit/>
           </a:bodyPr>
           <a:lstStyle/>
           <a:p>
@@ -10040,7 +10041,7 @@
         </p:spPr>
         <p:txBody>
           <a:bodyPr wrap="square" lIns="109728" rIns="109728" tIns="109728" bIns="109728" anchor="t">
-            <a:spAutoFit/>
+            <a:normAutofit/>
           </a:bodyPr>
           <a:lstStyle/>
           <a:p>
@@ -10106,7 +10107,7 @@
         </p:spPr>
         <p:txBody>
           <a:bodyPr wrap="square" lIns="109728" rIns="109728" tIns="109728" bIns="109728" anchor="t">
-            <a:spAutoFit/>
+            <a:normAutofit/>
           </a:bodyPr>
           <a:lstStyle/>
           <a:p>
@@ -10168,7 +10169,7 @@
         </p:spPr>
         <p:txBody>
           <a:bodyPr wrap="square" lIns="64008" rIns="64008" tIns="64008" bIns="64008" anchor="t">
-            <a:spAutoFit/>
+            <a:normAutofit/>
           </a:bodyPr>
           <a:lstStyle/>
           <a:p>
@@ -10206,7 +10207,7 @@
         </p:spPr>
         <p:txBody>
           <a:bodyPr wrap="square" lIns="64008" rIns="64008" tIns="64008" bIns="64008" anchor="t">
-            <a:spAutoFit/>
+            <a:normAutofit/>
           </a:bodyPr>
           <a:lstStyle/>
           <a:p>
@@ -10248,7 +10249,7 @@
         </p:spPr>
         <p:txBody>
           <a:bodyPr wrap="square" lIns="118872" rIns="118872" tIns="118872" bIns="118872" anchor="t">
-            <a:spAutoFit/>
+            <a:normAutofit/>
           </a:bodyPr>
           <a:lstStyle/>
           <a:p>
@@ -10344,7 +10345,7 @@
         </p:spPr>
         <p:txBody>
           <a:bodyPr wrap="square" lIns="54864" rIns="54864" tIns="54864" bIns="54864" anchor="t">
-            <a:spAutoFit/>
+            <a:normAutofit/>
           </a:bodyPr>
           <a:lstStyle/>
           <a:p>
@@ -10425,7 +10426,7 @@
         </p:spPr>
         <p:txBody>
           <a:bodyPr wrap="square" lIns="9144" rIns="9144" tIns="9144" bIns="9144" anchor="ctr">
-            <a:spAutoFit/>
+            <a:normAutofit/>
           </a:bodyPr>
           <a:lstStyle/>
           <a:p>
@@ -10463,7 +10464,7 @@
         </p:spPr>
         <p:txBody>
           <a:bodyPr wrap="square" lIns="9144" rIns="9144" tIns="9144" bIns="9144" anchor="t">
-            <a:spAutoFit/>
+            <a:normAutofit/>
           </a:bodyPr>
           <a:lstStyle/>
           <a:p>
@@ -10505,7 +10506,7 @@
         </p:spPr>
         <p:txBody>
           <a:bodyPr wrap="square" lIns="54864" rIns="54864" tIns="54864" bIns="54864" anchor="t">
-            <a:spAutoFit/>
+            <a:normAutofit/>
           </a:bodyPr>
           <a:lstStyle/>
           <a:p>
@@ -10586,7 +10587,7 @@
         </p:spPr>
         <p:txBody>
           <a:bodyPr wrap="square" lIns="9144" rIns="9144" tIns="9144" bIns="9144" anchor="ctr">
-            <a:spAutoFit/>
+            <a:normAutofit/>
           </a:bodyPr>
           <a:lstStyle/>
           <a:p>
@@ -10624,7 +10625,7 @@
         </p:spPr>
         <p:txBody>
           <a:bodyPr wrap="square" lIns="9144" rIns="9144" tIns="9144" bIns="9144" anchor="t">
-            <a:spAutoFit/>
+            <a:normAutofit/>
           </a:bodyPr>
           <a:lstStyle/>
           <a:p>
@@ -10666,7 +10667,7 @@
         </p:spPr>
         <p:txBody>
           <a:bodyPr wrap="square" lIns="54864" rIns="54864" tIns="54864" bIns="54864" anchor="t">
-            <a:spAutoFit/>
+            <a:normAutofit/>
           </a:bodyPr>
           <a:lstStyle/>
           <a:p>
@@ -10747,7 +10748,7 @@
         </p:spPr>
         <p:txBody>
           <a:bodyPr wrap="square" lIns="9144" rIns="9144" tIns="9144" bIns="9144" anchor="ctr">
-            <a:spAutoFit/>
+            <a:normAutofit/>
           </a:bodyPr>
           <a:lstStyle/>
           <a:p>
@@ -10785,7 +10786,7 @@
         </p:spPr>
         <p:txBody>
           <a:bodyPr wrap="square" lIns="9144" rIns="9144" tIns="9144" bIns="9144" anchor="t">
-            <a:spAutoFit/>
+            <a:normAutofit/>
           </a:bodyPr>
           <a:lstStyle/>
           <a:p>
@@ -10827,7 +10828,7 @@
         </p:spPr>
         <p:txBody>
           <a:bodyPr wrap="square" lIns="54864" rIns="54864" tIns="54864" bIns="54864" anchor="t">
-            <a:spAutoFit/>
+            <a:normAutofit/>
           </a:bodyPr>
           <a:lstStyle/>
           <a:p>
@@ -10908,7 +10909,7 @@
         </p:spPr>
         <p:txBody>
           <a:bodyPr wrap="square" lIns="9144" rIns="9144" tIns="9144" bIns="9144" anchor="ctr">
-            <a:spAutoFit/>
+            <a:normAutofit/>
           </a:bodyPr>
           <a:lstStyle/>
           <a:p>
@@ -10946,7 +10947,7 @@
         </p:spPr>
         <p:txBody>
           <a:bodyPr wrap="square" lIns="9144" rIns="9144" tIns="9144" bIns="9144" anchor="t">
-            <a:spAutoFit/>
+            <a:normAutofit/>
           </a:bodyPr>
           <a:lstStyle/>
           <a:p>
@@ -11096,13 +11097,13 @@
         </p:spPr>
         <p:txBody>
           <a:bodyPr wrap="square" lIns="0" rIns="0" tIns="0" bIns="0" anchor="t">
-            <a:spAutoFit/>
+            <a:normAutofit/>
           </a:bodyPr>
           <a:lstStyle/>
           <a:p>
             <a:pPr algn="l"/>
             <a:r>
-              <a:rPr sz="2400" b="1">
+              <a:rPr sz="2200" b="1">
                 <a:solidFill>
                   <a:srgbClr val="282C3A"/>
                 </a:solidFill>
@@ -11138,7 +11139,7 @@
         </p:spPr>
         <p:txBody>
           <a:bodyPr wrap="square" lIns="9144" rIns="9144" tIns="9144" bIns="9144" anchor="ctr">
-            <a:spAutoFit/>
+            <a:normAutofit/>
           </a:bodyPr>
           <a:lstStyle/>
           <a:p>
@@ -11176,7 +11177,7 @@
         </p:spPr>
         <p:txBody>
           <a:bodyPr wrap="square" lIns="0" rIns="0" tIns="0" bIns="0" anchor="ctr">
-            <a:spAutoFit/>
+            <a:normAutofit/>
           </a:bodyPr>
           <a:lstStyle/>
           <a:p>
@@ -11257,7 +11258,7 @@
         </p:spPr>
         <p:txBody>
           <a:bodyPr wrap="square" lIns="0" rIns="0" tIns="0" bIns="0" anchor="t">
-            <a:spAutoFit/>
+            <a:normAutofit/>
           </a:bodyPr>
           <a:lstStyle/>
           <a:p>
@@ -11299,7 +11300,7 @@
         </p:spPr>
         <p:txBody>
           <a:bodyPr wrap="square" lIns="27432" rIns="27432" tIns="27432" bIns="27432" anchor="ctr">
-            <a:spAutoFit/>
+            <a:normAutofit/>
           </a:bodyPr>
           <a:lstStyle/>
           <a:p>
@@ -11341,7 +11342,7 @@
         </p:spPr>
         <p:txBody>
           <a:bodyPr wrap="square" lIns="109728" rIns="109728" tIns="109728" bIns="109728" anchor="t">
-            <a:spAutoFit/>
+            <a:normAutofit/>
           </a:bodyPr>
           <a:lstStyle/>
           <a:p>
@@ -11407,7 +11408,7 @@
         </p:spPr>
         <p:txBody>
           <a:bodyPr wrap="square" lIns="109728" rIns="109728" tIns="109728" bIns="109728" anchor="t">
-            <a:spAutoFit/>
+            <a:normAutofit/>
           </a:bodyPr>
           <a:lstStyle/>
           <a:p>
@@ -11469,7 +11470,7 @@
         </p:spPr>
         <p:txBody>
           <a:bodyPr wrap="square" lIns="64008" rIns="64008" tIns="64008" bIns="64008" anchor="t">
-            <a:spAutoFit/>
+            <a:normAutofit/>
           </a:bodyPr>
           <a:lstStyle/>
           <a:p>
@@ -11507,7 +11508,7 @@
         </p:spPr>
         <p:txBody>
           <a:bodyPr wrap="square" lIns="64008" rIns="64008" tIns="64008" bIns="64008" anchor="t">
-            <a:spAutoFit/>
+            <a:normAutofit/>
           </a:bodyPr>
           <a:lstStyle/>
           <a:p>
@@ -11549,7 +11550,7 @@
         </p:spPr>
         <p:txBody>
           <a:bodyPr wrap="square" lIns="118872" rIns="118872" tIns="118872" bIns="118872" anchor="t">
-            <a:spAutoFit/>
+            <a:normAutofit/>
           </a:bodyPr>
           <a:lstStyle/>
           <a:p>
@@ -11563,7 +11564,7 @@
               <a:spcAft>
                 <a:spcPts val="800"/>
               </a:spcAft>
-              <a:defRPr sz="1600">
+              <a:defRPr sz="1500">
                 <a:solidFill>
                   <a:srgbClr val="363A48"/>
                 </a:solidFill>
@@ -11585,7 +11586,7 @@
               <a:spcAft>
                 <a:spcPts val="800"/>
               </a:spcAft>
-              <a:defRPr sz="1600">
+              <a:defRPr sz="1500">
                 <a:solidFill>
                   <a:srgbClr val="363A48"/>
                 </a:solidFill>
@@ -11607,7 +11608,7 @@
               <a:spcAft>
                 <a:spcPts val="800"/>
               </a:spcAft>
-              <a:defRPr sz="1600">
+              <a:defRPr sz="1500">
                 <a:solidFill>
                   <a:srgbClr val="363A48"/>
                 </a:solidFill>
@@ -11645,7 +11646,7 @@
         </p:spPr>
         <p:txBody>
           <a:bodyPr wrap="square" lIns="64008" rIns="64008" tIns="64008" bIns="64008" anchor="ctr">
-            <a:spAutoFit/>
+            <a:normAutofit/>
           </a:bodyPr>
           <a:lstStyle/>
           <a:p>
@@ -11795,13 +11796,13 @@
         </p:spPr>
         <p:txBody>
           <a:bodyPr wrap="square" lIns="0" rIns="0" tIns="0" bIns="0" anchor="t">
-            <a:spAutoFit/>
+            <a:normAutofit/>
           </a:bodyPr>
           <a:lstStyle/>
           <a:p>
             <a:pPr algn="l"/>
             <a:r>
-              <a:rPr sz="2400" b="1">
+              <a:rPr sz="2200" b="1">
                 <a:solidFill>
                   <a:srgbClr val="282C3A"/>
                 </a:solidFill>
@@ -11837,7 +11838,7 @@
         </p:spPr>
         <p:txBody>
           <a:bodyPr wrap="square" lIns="9144" rIns="9144" tIns="9144" bIns="9144" anchor="ctr">
-            <a:spAutoFit/>
+            <a:normAutofit/>
           </a:bodyPr>
           <a:lstStyle/>
           <a:p>
@@ -11875,7 +11876,7 @@
         </p:spPr>
         <p:txBody>
           <a:bodyPr wrap="square" lIns="0" rIns="0" tIns="0" bIns="0" anchor="ctr">
-            <a:spAutoFit/>
+            <a:normAutofit/>
           </a:bodyPr>
           <a:lstStyle/>
           <a:p>
@@ -11956,7 +11957,7 @@
         </p:spPr>
         <p:txBody>
           <a:bodyPr wrap="square" lIns="0" rIns="0" tIns="0" bIns="0" anchor="t">
-            <a:spAutoFit/>
+            <a:normAutofit/>
           </a:bodyPr>
           <a:lstStyle/>
           <a:p>
@@ -11998,7 +11999,7 @@
         </p:spPr>
         <p:txBody>
           <a:bodyPr wrap="square" lIns="27432" rIns="27432" tIns="27432" bIns="27432" anchor="ctr">
-            <a:spAutoFit/>
+            <a:normAutofit/>
           </a:bodyPr>
           <a:lstStyle/>
           <a:p>
@@ -12040,7 +12041,7 @@
         </p:spPr>
         <p:txBody>
           <a:bodyPr wrap="square" lIns="128016" rIns="128016" tIns="128016" bIns="128016" anchor="t">
-            <a:spAutoFit/>
+            <a:normAutofit/>
           </a:bodyPr>
           <a:lstStyle/>
           <a:p>
@@ -12054,7 +12055,7 @@
               <a:spcAft>
                 <a:spcPts val="800"/>
               </a:spcAft>
-              <a:defRPr sz="1800">
+              <a:defRPr sz="1500">
                 <a:solidFill>
                   <a:srgbClr val="363A48"/>
                 </a:solidFill>
@@ -12076,7 +12077,7 @@
               <a:spcAft>
                 <a:spcPts val="800"/>
               </a:spcAft>
-              <a:defRPr sz="1800">
+              <a:defRPr sz="1500">
                 <a:solidFill>
                   <a:srgbClr val="363A48"/>
                 </a:solidFill>
@@ -12098,7 +12099,7 @@
               <a:spcAft>
                 <a:spcPts val="800"/>
               </a:spcAft>
-              <a:defRPr sz="1800">
+              <a:defRPr sz="1500">
                 <a:solidFill>
                   <a:srgbClr val="363A48"/>
                 </a:solidFill>
@@ -12120,7 +12121,7 @@
               <a:spcAft>
                 <a:spcPts val="800"/>
               </a:spcAft>
-              <a:defRPr sz="1800">
+              <a:defRPr sz="1500">
                 <a:solidFill>
                   <a:srgbClr val="363A48"/>
                 </a:solidFill>
@@ -12154,7 +12155,7 @@
         </p:spPr>
         <p:txBody>
           <a:bodyPr wrap="square" lIns="64008" rIns="64008" tIns="64008" bIns="64008" anchor="t">
-            <a:spAutoFit/>
+            <a:normAutofit/>
           </a:bodyPr>
           <a:lstStyle/>
           <a:p>
@@ -12196,7 +12197,7 @@
         </p:spPr>
         <p:txBody>
           <a:bodyPr wrap="square" lIns="128016" rIns="128016" tIns="128016" bIns="128016" anchor="t">
-            <a:spAutoFit/>
+            <a:normAutofit/>
           </a:bodyPr>
           <a:lstStyle/>
           <a:p>
@@ -12234,7 +12235,7 @@
         </p:spPr>
         <p:txBody>
           <a:bodyPr wrap="square" lIns="0" rIns="0" tIns="0" bIns="0" anchor="t">
-            <a:spAutoFit/>
+            <a:normAutofit/>
           </a:bodyPr>
           <a:lstStyle/>
           <a:p>
@@ -12276,7 +12277,7 @@
         </p:spPr>
         <p:txBody>
           <a:bodyPr wrap="square" lIns="54864" rIns="54864" tIns="54864" bIns="54864" anchor="t">
-            <a:spAutoFit/>
+            <a:normAutofit/>
           </a:bodyPr>
           <a:lstStyle/>
           <a:p>
@@ -12357,7 +12358,7 @@
         </p:spPr>
         <p:txBody>
           <a:bodyPr wrap="square" lIns="9144" rIns="9144" tIns="9144" bIns="9144" anchor="ctr">
-            <a:spAutoFit/>
+            <a:normAutofit/>
           </a:bodyPr>
           <a:lstStyle/>
           <a:p>
@@ -12395,7 +12396,7 @@
         </p:spPr>
         <p:txBody>
           <a:bodyPr wrap="square" lIns="9144" rIns="9144" tIns="9144" bIns="9144" anchor="t">
-            <a:spAutoFit/>
+            <a:normAutofit/>
           </a:bodyPr>
           <a:lstStyle/>
           <a:p>
@@ -12437,7 +12438,7 @@
         </p:spPr>
         <p:txBody>
           <a:bodyPr wrap="square" lIns="54864" rIns="54864" tIns="54864" bIns="54864" anchor="t">
-            <a:spAutoFit/>
+            <a:normAutofit/>
           </a:bodyPr>
           <a:lstStyle/>
           <a:p>
@@ -12518,7 +12519,7 @@
         </p:spPr>
         <p:txBody>
           <a:bodyPr wrap="square" lIns="9144" rIns="9144" tIns="9144" bIns="9144" anchor="ctr">
-            <a:spAutoFit/>
+            <a:normAutofit/>
           </a:bodyPr>
           <a:lstStyle/>
           <a:p>
@@ -12556,7 +12557,7 @@
         </p:spPr>
         <p:txBody>
           <a:bodyPr wrap="square" lIns="9144" rIns="9144" tIns="9144" bIns="9144" anchor="t">
-            <a:spAutoFit/>
+            <a:normAutofit/>
           </a:bodyPr>
           <a:lstStyle/>
           <a:p>
@@ -12598,7 +12599,7 @@
         </p:spPr>
         <p:txBody>
           <a:bodyPr wrap="square" lIns="54864" rIns="54864" tIns="54864" bIns="54864" anchor="t">
-            <a:spAutoFit/>
+            <a:normAutofit/>
           </a:bodyPr>
           <a:lstStyle/>
           <a:p>
@@ -12679,7 +12680,7 @@
         </p:spPr>
         <p:txBody>
           <a:bodyPr wrap="square" lIns="9144" rIns="9144" tIns="9144" bIns="9144" anchor="ctr">
-            <a:spAutoFit/>
+            <a:normAutofit/>
           </a:bodyPr>
           <a:lstStyle/>
           <a:p>
@@ -12717,7 +12718,7 @@
         </p:spPr>
         <p:txBody>
           <a:bodyPr wrap="square" lIns="9144" rIns="9144" tIns="9144" bIns="9144" anchor="t">
-            <a:spAutoFit/>
+            <a:normAutofit/>
           </a:bodyPr>
           <a:lstStyle/>
           <a:p>
@@ -12759,7 +12760,7 @@
         </p:spPr>
         <p:txBody>
           <a:bodyPr wrap="square" lIns="54864" rIns="54864" tIns="54864" bIns="54864" anchor="t">
-            <a:spAutoFit/>
+            <a:normAutofit/>
           </a:bodyPr>
           <a:lstStyle/>
           <a:p>
@@ -12840,7 +12841,7 @@
         </p:spPr>
         <p:txBody>
           <a:bodyPr wrap="square" lIns="9144" rIns="9144" tIns="9144" bIns="9144" anchor="ctr">
-            <a:spAutoFit/>
+            <a:normAutofit/>
           </a:bodyPr>
           <a:lstStyle/>
           <a:p>
@@ -12878,7 +12879,7 @@
         </p:spPr>
         <p:txBody>
           <a:bodyPr wrap="square" lIns="9144" rIns="9144" tIns="9144" bIns="9144" anchor="t">
-            <a:spAutoFit/>
+            <a:normAutofit/>
           </a:bodyPr>
           <a:lstStyle/>
           <a:p>
@@ -13028,13 +13029,13 @@
         </p:spPr>
         <p:txBody>
           <a:bodyPr wrap="square" lIns="0" rIns="0" tIns="0" bIns="0" anchor="t">
-            <a:spAutoFit/>
+            <a:normAutofit/>
           </a:bodyPr>
           <a:lstStyle/>
           <a:p>
             <a:pPr algn="l"/>
             <a:r>
-              <a:rPr sz="2400" b="1">
+              <a:rPr sz="2200" b="1">
                 <a:solidFill>
                   <a:srgbClr val="282C3A"/>
                 </a:solidFill>
@@ -13070,7 +13071,7 @@
         </p:spPr>
         <p:txBody>
           <a:bodyPr wrap="square" lIns="9144" rIns="9144" tIns="9144" bIns="9144" anchor="ctr">
-            <a:spAutoFit/>
+            <a:normAutofit/>
           </a:bodyPr>
           <a:lstStyle/>
           <a:p>
@@ -13108,7 +13109,7 @@
         </p:spPr>
         <p:txBody>
           <a:bodyPr wrap="square" lIns="0" rIns="0" tIns="0" bIns="0" anchor="ctr">
-            <a:spAutoFit/>
+            <a:normAutofit/>
           </a:bodyPr>
           <a:lstStyle/>
           <a:p>
@@ -13189,7 +13190,7 @@
         </p:spPr>
         <p:txBody>
           <a:bodyPr wrap="square" lIns="0" rIns="0" tIns="0" bIns="0" anchor="t">
-            <a:spAutoFit/>
+            <a:normAutofit/>
           </a:bodyPr>
           <a:lstStyle/>
           <a:p>
@@ -13231,7 +13232,7 @@
         </p:spPr>
         <p:txBody>
           <a:bodyPr wrap="square" lIns="27432" rIns="27432" tIns="27432" bIns="27432" anchor="ctr">
-            <a:spAutoFit/>
+            <a:normAutofit/>
           </a:bodyPr>
           <a:lstStyle/>
           <a:p>
@@ -13273,7 +13274,7 @@
         </p:spPr>
         <p:txBody>
           <a:bodyPr wrap="square" lIns="109728" rIns="109728" tIns="109728" bIns="109728" anchor="t">
-            <a:spAutoFit/>
+            <a:normAutofit/>
           </a:bodyPr>
           <a:lstStyle/>
           <a:p>
@@ -13339,7 +13340,7 @@
         </p:spPr>
         <p:txBody>
           <a:bodyPr wrap="square" lIns="109728" rIns="109728" tIns="109728" bIns="109728" anchor="t">
-            <a:spAutoFit/>
+            <a:normAutofit/>
           </a:bodyPr>
           <a:lstStyle/>
           <a:p>
@@ -13401,7 +13402,7 @@
         </p:spPr>
         <p:txBody>
           <a:bodyPr wrap="square" lIns="64008" rIns="64008" tIns="64008" bIns="64008" anchor="t">
-            <a:spAutoFit/>
+            <a:normAutofit/>
           </a:bodyPr>
           <a:lstStyle/>
           <a:p>
@@ -13439,7 +13440,7 @@
         </p:spPr>
         <p:txBody>
           <a:bodyPr wrap="square" lIns="64008" rIns="64008" tIns="64008" bIns="64008" anchor="t">
-            <a:spAutoFit/>
+            <a:normAutofit/>
           </a:bodyPr>
           <a:lstStyle/>
           <a:p>
@@ -13481,7 +13482,7 @@
         </p:spPr>
         <p:txBody>
           <a:bodyPr wrap="square" lIns="118872" rIns="118872" tIns="118872" bIns="118872" anchor="t">
-            <a:spAutoFit/>
+            <a:normAutofit/>
           </a:bodyPr>
           <a:lstStyle/>
           <a:p>
@@ -13577,7 +13578,7 @@
         </p:spPr>
         <p:txBody>
           <a:bodyPr wrap="square" lIns="54864" rIns="54864" tIns="54864" bIns="54864" anchor="t">
-            <a:spAutoFit/>
+            <a:normAutofit/>
           </a:bodyPr>
           <a:lstStyle/>
           <a:p>
@@ -13658,7 +13659,7 @@
         </p:spPr>
         <p:txBody>
           <a:bodyPr wrap="square" lIns="9144" rIns="9144" tIns="9144" bIns="9144" anchor="ctr">
-            <a:spAutoFit/>
+            <a:normAutofit/>
           </a:bodyPr>
           <a:lstStyle/>
           <a:p>
@@ -13696,7 +13697,7 @@
         </p:spPr>
         <p:txBody>
           <a:bodyPr wrap="square" lIns="9144" rIns="9144" tIns="9144" bIns="9144" anchor="t">
-            <a:spAutoFit/>
+            <a:normAutofit/>
           </a:bodyPr>
           <a:lstStyle/>
           <a:p>
@@ -13738,7 +13739,7 @@
         </p:spPr>
         <p:txBody>
           <a:bodyPr wrap="square" lIns="54864" rIns="54864" tIns="54864" bIns="54864" anchor="t">
-            <a:spAutoFit/>
+            <a:normAutofit/>
           </a:bodyPr>
           <a:lstStyle/>
           <a:p>
@@ -13819,7 +13820,7 @@
         </p:spPr>
         <p:txBody>
           <a:bodyPr wrap="square" lIns="9144" rIns="9144" tIns="9144" bIns="9144" anchor="ctr">
-            <a:spAutoFit/>
+            <a:normAutofit/>
           </a:bodyPr>
           <a:lstStyle/>
           <a:p>
@@ -13857,7 +13858,7 @@
         </p:spPr>
         <p:txBody>
           <a:bodyPr wrap="square" lIns="9144" rIns="9144" tIns="9144" bIns="9144" anchor="t">
-            <a:spAutoFit/>
+            <a:normAutofit/>
           </a:bodyPr>
           <a:lstStyle/>
           <a:p>
@@ -13899,7 +13900,7 @@
         </p:spPr>
         <p:txBody>
           <a:bodyPr wrap="square" lIns="54864" rIns="54864" tIns="54864" bIns="54864" anchor="t">
-            <a:spAutoFit/>
+            <a:normAutofit/>
           </a:bodyPr>
           <a:lstStyle/>
           <a:p>
@@ -13980,7 +13981,7 @@
         </p:spPr>
         <p:txBody>
           <a:bodyPr wrap="square" lIns="9144" rIns="9144" tIns="9144" bIns="9144" anchor="ctr">
-            <a:spAutoFit/>
+            <a:normAutofit/>
           </a:bodyPr>
           <a:lstStyle/>
           <a:p>
@@ -14018,7 +14019,7 @@
         </p:spPr>
         <p:txBody>
           <a:bodyPr wrap="square" lIns="9144" rIns="9144" tIns="9144" bIns="9144" anchor="t">
-            <a:spAutoFit/>
+            <a:normAutofit/>
           </a:bodyPr>
           <a:lstStyle/>
           <a:p>
@@ -14060,7 +14061,7 @@
         </p:spPr>
         <p:txBody>
           <a:bodyPr wrap="square" lIns="54864" rIns="54864" tIns="54864" bIns="54864" anchor="t">
-            <a:spAutoFit/>
+            <a:normAutofit/>
           </a:bodyPr>
           <a:lstStyle/>
           <a:p>
@@ -14141,7 +14142,7 @@
         </p:spPr>
         <p:txBody>
           <a:bodyPr wrap="square" lIns="9144" rIns="9144" tIns="9144" bIns="9144" anchor="ctr">
-            <a:spAutoFit/>
+            <a:normAutofit/>
           </a:bodyPr>
           <a:lstStyle/>
           <a:p>
@@ -14179,7 +14180,7 @@
         </p:spPr>
         <p:txBody>
           <a:bodyPr wrap="square" lIns="9144" rIns="9144" tIns="9144" bIns="9144" anchor="t">
-            <a:spAutoFit/>
+            <a:normAutofit/>
           </a:bodyPr>
           <a:lstStyle/>
           <a:p>
@@ -14329,13 +14330,13 @@
         </p:spPr>
         <p:txBody>
           <a:bodyPr wrap="square" lIns="0" rIns="0" tIns="0" bIns="0" anchor="t">
-            <a:spAutoFit/>
+            <a:normAutofit/>
           </a:bodyPr>
           <a:lstStyle/>
           <a:p>
             <a:pPr algn="l"/>
             <a:r>
-              <a:rPr sz="2400" b="1">
+              <a:rPr sz="2100" b="1">
                 <a:solidFill>
                   <a:srgbClr val="282C3A"/>
                 </a:solidFill>
@@ -14371,7 +14372,7 @@
         </p:spPr>
         <p:txBody>
           <a:bodyPr wrap="square" lIns="9144" rIns="9144" tIns="9144" bIns="9144" anchor="ctr">
-            <a:spAutoFit/>
+            <a:normAutofit/>
           </a:bodyPr>
           <a:lstStyle/>
           <a:p>
@@ -14409,7 +14410,7 @@
         </p:spPr>
         <p:txBody>
           <a:bodyPr wrap="square" lIns="0" rIns="0" tIns="0" bIns="0" anchor="ctr">
-            <a:spAutoFit/>
+            <a:normAutofit/>
           </a:bodyPr>
           <a:lstStyle/>
           <a:p>
@@ -14490,7 +14491,7 @@
         </p:spPr>
         <p:txBody>
           <a:bodyPr wrap="square" lIns="0" rIns="0" tIns="0" bIns="0" anchor="t">
-            <a:spAutoFit/>
+            <a:normAutofit/>
           </a:bodyPr>
           <a:lstStyle/>
           <a:p>
@@ -14532,7 +14533,7 @@
         </p:spPr>
         <p:txBody>
           <a:bodyPr wrap="square" lIns="27432" rIns="27432" tIns="27432" bIns="27432" anchor="ctr">
-            <a:spAutoFit/>
+            <a:normAutofit/>
           </a:bodyPr>
           <a:lstStyle/>
           <a:p>
@@ -14574,7 +14575,7 @@
         </p:spPr>
         <p:txBody>
           <a:bodyPr wrap="square" lIns="109728" rIns="109728" tIns="109728" bIns="109728" anchor="t">
-            <a:spAutoFit/>
+            <a:normAutofit/>
           </a:bodyPr>
           <a:lstStyle/>
           <a:p>
@@ -14640,7 +14641,7 @@
         </p:spPr>
         <p:txBody>
           <a:bodyPr wrap="square" lIns="109728" rIns="109728" tIns="109728" bIns="109728" anchor="t">
-            <a:spAutoFit/>
+            <a:normAutofit/>
           </a:bodyPr>
           <a:lstStyle/>
           <a:p>
@@ -14702,7 +14703,7 @@
         </p:spPr>
         <p:txBody>
           <a:bodyPr wrap="square" lIns="64008" rIns="64008" tIns="64008" bIns="64008" anchor="t">
-            <a:spAutoFit/>
+            <a:normAutofit/>
           </a:bodyPr>
           <a:lstStyle/>
           <a:p>
@@ -14740,7 +14741,7 @@
         </p:spPr>
         <p:txBody>
           <a:bodyPr wrap="square" lIns="64008" rIns="64008" tIns="64008" bIns="64008" anchor="t">
-            <a:spAutoFit/>
+            <a:normAutofit/>
           </a:bodyPr>
           <a:lstStyle/>
           <a:p>
@@ -14782,7 +14783,7 @@
         </p:spPr>
         <p:txBody>
           <a:bodyPr wrap="square" lIns="118872" rIns="118872" tIns="118872" bIns="118872" anchor="t">
-            <a:spAutoFit/>
+            <a:normAutofit/>
           </a:bodyPr>
           <a:lstStyle/>
           <a:p>
@@ -14796,7 +14797,7 @@
               <a:spcAft>
                 <a:spcPts val="800"/>
               </a:spcAft>
-              <a:defRPr sz="1600">
+              <a:defRPr sz="1500">
                 <a:solidFill>
                   <a:srgbClr val="363A48"/>
                 </a:solidFill>
@@ -14818,7 +14819,7 @@
               <a:spcAft>
                 <a:spcPts val="800"/>
               </a:spcAft>
-              <a:defRPr sz="1600">
+              <a:defRPr sz="1500">
                 <a:solidFill>
                   <a:srgbClr val="363A48"/>
                 </a:solidFill>
@@ -14840,7 +14841,7 @@
               <a:spcAft>
                 <a:spcPts val="800"/>
               </a:spcAft>
-              <a:defRPr sz="1600">
+              <a:defRPr sz="1500">
                 <a:solidFill>
                   <a:srgbClr val="363A48"/>
                 </a:solidFill>
@@ -14878,7 +14879,7 @@
         </p:spPr>
         <p:txBody>
           <a:bodyPr wrap="square" lIns="54864" rIns="54864" tIns="54864" bIns="54864" anchor="t">
-            <a:spAutoFit/>
+            <a:normAutofit/>
           </a:bodyPr>
           <a:lstStyle/>
           <a:p>
@@ -14959,7 +14960,7 @@
         </p:spPr>
         <p:txBody>
           <a:bodyPr wrap="square" lIns="9144" rIns="9144" tIns="9144" bIns="9144" anchor="ctr">
-            <a:spAutoFit/>
+            <a:normAutofit/>
           </a:bodyPr>
           <a:lstStyle/>
           <a:p>
@@ -14997,7 +14998,7 @@
         </p:spPr>
         <p:txBody>
           <a:bodyPr wrap="square" lIns="9144" rIns="9144" tIns="9144" bIns="9144" anchor="t">
-            <a:spAutoFit/>
+            <a:normAutofit/>
           </a:bodyPr>
           <a:lstStyle/>
           <a:p>
@@ -15039,7 +15040,7 @@
         </p:spPr>
         <p:txBody>
           <a:bodyPr wrap="square" lIns="54864" rIns="54864" tIns="54864" bIns="54864" anchor="t">
-            <a:spAutoFit/>
+            <a:normAutofit/>
           </a:bodyPr>
           <a:lstStyle/>
           <a:p>
@@ -15120,7 +15121,7 @@
         </p:spPr>
         <p:txBody>
           <a:bodyPr wrap="square" lIns="9144" rIns="9144" tIns="9144" bIns="9144" anchor="ctr">
-            <a:spAutoFit/>
+            <a:normAutofit/>
           </a:bodyPr>
           <a:lstStyle/>
           <a:p>
@@ -15158,7 +15159,7 @@
         </p:spPr>
         <p:txBody>
           <a:bodyPr wrap="square" lIns="9144" rIns="9144" tIns="9144" bIns="9144" anchor="t">
-            <a:spAutoFit/>
+            <a:normAutofit/>
           </a:bodyPr>
           <a:lstStyle/>
           <a:p>
@@ -15200,7 +15201,7 @@
         </p:spPr>
         <p:txBody>
           <a:bodyPr wrap="square" lIns="54864" rIns="54864" tIns="54864" bIns="54864" anchor="t">
-            <a:spAutoFit/>
+            <a:normAutofit/>
           </a:bodyPr>
           <a:lstStyle/>
           <a:p>
@@ -15281,7 +15282,7 @@
         </p:spPr>
         <p:txBody>
           <a:bodyPr wrap="square" lIns="9144" rIns="9144" tIns="9144" bIns="9144" anchor="ctr">
-            <a:spAutoFit/>
+            <a:normAutofit/>
           </a:bodyPr>
           <a:lstStyle/>
           <a:p>
@@ -15319,7 +15320,7 @@
         </p:spPr>
         <p:txBody>
           <a:bodyPr wrap="square" lIns="9144" rIns="9144" tIns="9144" bIns="9144" anchor="t">
-            <a:spAutoFit/>
+            <a:normAutofit/>
           </a:bodyPr>
           <a:lstStyle/>
           <a:p>
@@ -15361,7 +15362,7 @@
         </p:spPr>
         <p:txBody>
           <a:bodyPr wrap="square" lIns="54864" rIns="54864" tIns="54864" bIns="54864" anchor="t">
-            <a:spAutoFit/>
+            <a:normAutofit/>
           </a:bodyPr>
           <a:lstStyle/>
           <a:p>
@@ -15442,7 +15443,7 @@
         </p:spPr>
         <p:txBody>
           <a:bodyPr wrap="square" lIns="9144" rIns="9144" tIns="9144" bIns="9144" anchor="ctr">
-            <a:spAutoFit/>
+            <a:normAutofit/>
           </a:bodyPr>
           <a:lstStyle/>
           <a:p>
@@ -15480,7 +15481,7 @@
         </p:spPr>
         <p:txBody>
           <a:bodyPr wrap="square" lIns="9144" rIns="9144" tIns="9144" bIns="9144" anchor="t">
-            <a:spAutoFit/>
+            <a:normAutofit/>
           </a:bodyPr>
           <a:lstStyle/>
           <a:p>
@@ -15630,7 +15631,7 @@
         </p:spPr>
         <p:txBody>
           <a:bodyPr wrap="square" lIns="0" rIns="0" tIns="0" bIns="0" anchor="t">
-            <a:spAutoFit/>
+            <a:normAutofit/>
           </a:bodyPr>
           <a:lstStyle/>
           <a:p>
@@ -15672,7 +15673,7 @@
         </p:spPr>
         <p:txBody>
           <a:bodyPr wrap="square" lIns="9144" rIns="9144" tIns="9144" bIns="9144" anchor="ctr">
-            <a:spAutoFit/>
+            <a:normAutofit/>
           </a:bodyPr>
           <a:lstStyle/>
           <a:p>
@@ -15710,7 +15711,7 @@
         </p:spPr>
         <p:txBody>
           <a:bodyPr wrap="square" lIns="0" rIns="0" tIns="0" bIns="0" anchor="ctr">
-            <a:spAutoFit/>
+            <a:normAutofit/>
           </a:bodyPr>
           <a:lstStyle/>
           <a:p>
@@ -15791,7 +15792,7 @@
         </p:spPr>
         <p:txBody>
           <a:bodyPr wrap="square" lIns="0" rIns="0" tIns="0" bIns="0" anchor="t">
-            <a:spAutoFit/>
+            <a:normAutofit/>
           </a:bodyPr>
           <a:lstStyle/>
           <a:p>
@@ -15833,7 +15834,7 @@
         </p:spPr>
         <p:txBody>
           <a:bodyPr wrap="square" lIns="27432" rIns="27432" tIns="27432" bIns="27432" anchor="ctr">
-            <a:spAutoFit/>
+            <a:normAutofit/>
           </a:bodyPr>
           <a:lstStyle/>
           <a:p>
@@ -15875,7 +15876,7 @@
         </p:spPr>
         <p:txBody>
           <a:bodyPr wrap="square" lIns="64008" rIns="64008" tIns="64008" bIns="64008" anchor="ctr">
-            <a:spAutoFit/>
+            <a:normAutofit/>
           </a:bodyPr>
           <a:lstStyle/>
           <a:p>
@@ -15917,7 +15918,7 @@
         </p:spPr>
         <p:txBody>
           <a:bodyPr wrap="square" lIns="109728" rIns="109728" tIns="109728" bIns="109728" anchor="t">
-            <a:spAutoFit/>
+            <a:normAutofit/>
           </a:bodyPr>
           <a:lstStyle/>
           <a:p>
@@ -15955,7 +15956,7 @@
         </p:spPr>
         <p:txBody>
           <a:bodyPr wrap="square" lIns="0" rIns="0" tIns="0" bIns="0" anchor="t">
-            <a:spAutoFit/>
+            <a:normAutofit/>
           </a:bodyPr>
           <a:lstStyle/>
           <a:p>
@@ -15993,7 +15994,7 @@
         </p:spPr>
         <p:txBody>
           <a:bodyPr wrap="square" lIns="0" rIns="0" tIns="0" bIns="0" anchor="t">
-            <a:spAutoFit/>
+            <a:normAutofit/>
           </a:bodyPr>
           <a:lstStyle/>
           <a:p>
@@ -16035,7 +16036,7 @@
         </p:spPr>
         <p:txBody>
           <a:bodyPr wrap="square" lIns="109728" rIns="109728" tIns="109728" bIns="109728" anchor="t">
-            <a:spAutoFit/>
+            <a:normAutofit/>
           </a:bodyPr>
           <a:lstStyle/>
           <a:p>
@@ -16073,7 +16074,7 @@
         </p:spPr>
         <p:txBody>
           <a:bodyPr wrap="square" lIns="0" rIns="0" tIns="0" bIns="0" anchor="t">
-            <a:spAutoFit/>
+            <a:normAutofit/>
           </a:bodyPr>
           <a:lstStyle/>
           <a:p>
@@ -16111,7 +16112,7 @@
         </p:spPr>
         <p:txBody>
           <a:bodyPr wrap="square" lIns="0" rIns="0" tIns="0" bIns="0" anchor="t">
-            <a:spAutoFit/>
+            <a:normAutofit/>
           </a:bodyPr>
           <a:lstStyle/>
           <a:p>
@@ -16153,7 +16154,7 @@
         </p:spPr>
         <p:txBody>
           <a:bodyPr wrap="square" lIns="109728" rIns="109728" tIns="109728" bIns="109728" anchor="t">
-            <a:spAutoFit/>
+            <a:normAutofit/>
           </a:bodyPr>
           <a:lstStyle/>
           <a:p>
@@ -16191,7 +16192,7 @@
         </p:spPr>
         <p:txBody>
           <a:bodyPr wrap="square" lIns="0" rIns="0" tIns="0" bIns="0" anchor="t">
-            <a:spAutoFit/>
+            <a:normAutofit/>
           </a:bodyPr>
           <a:lstStyle/>
           <a:p>
@@ -16229,7 +16230,7 @@
         </p:spPr>
         <p:txBody>
           <a:bodyPr wrap="square" lIns="0" rIns="0" tIns="0" bIns="0" anchor="t">
-            <a:spAutoFit/>
+            <a:normAutofit/>
           </a:bodyPr>
           <a:lstStyle/>
           <a:p>
@@ -16271,7 +16272,7 @@
         </p:spPr>
         <p:txBody>
           <a:bodyPr wrap="square" lIns="109728" rIns="109728" tIns="109728" bIns="109728" anchor="t">
-            <a:spAutoFit/>
+            <a:normAutofit/>
           </a:bodyPr>
           <a:lstStyle/>
           <a:p>
@@ -16309,7 +16310,7 @@
         </p:spPr>
         <p:txBody>
           <a:bodyPr wrap="square" lIns="0" rIns="0" tIns="0" bIns="0" anchor="t">
-            <a:spAutoFit/>
+            <a:normAutofit/>
           </a:bodyPr>
           <a:lstStyle/>
           <a:p>
@@ -16347,7 +16348,7 @@
         </p:spPr>
         <p:txBody>
           <a:bodyPr wrap="square" lIns="0" rIns="0" tIns="0" bIns="0" anchor="t">
-            <a:spAutoFit/>
+            <a:normAutofit/>
           </a:bodyPr>
           <a:lstStyle/>
           <a:p>
@@ -16389,7 +16390,7 @@
         </p:spPr>
         <p:txBody>
           <a:bodyPr wrap="square" lIns="118872" rIns="118872" tIns="118872" bIns="118872" anchor="t">
-            <a:spAutoFit/>
+            <a:normAutofit/>
           </a:bodyPr>
           <a:lstStyle/>
           <a:p>
@@ -16549,13 +16550,13 @@
         </p:spPr>
         <p:txBody>
           <a:bodyPr wrap="square" lIns="0" rIns="0" tIns="0" bIns="0" anchor="t">
-            <a:spAutoFit/>
+            <a:normAutofit/>
           </a:bodyPr>
           <a:lstStyle/>
           <a:p>
             <a:pPr algn="l"/>
             <a:r>
-              <a:rPr sz="2400" b="1">
+              <a:rPr sz="2200" b="1">
                 <a:solidFill>
                   <a:srgbClr val="282C3A"/>
                 </a:solidFill>
@@ -16591,7 +16592,7 @@
         </p:spPr>
         <p:txBody>
           <a:bodyPr wrap="square" lIns="9144" rIns="9144" tIns="9144" bIns="9144" anchor="ctr">
-            <a:spAutoFit/>
+            <a:normAutofit/>
           </a:bodyPr>
           <a:lstStyle/>
           <a:p>
@@ -16629,7 +16630,7 @@
         </p:spPr>
         <p:txBody>
           <a:bodyPr wrap="square" lIns="0" rIns="0" tIns="0" bIns="0" anchor="ctr">
-            <a:spAutoFit/>
+            <a:normAutofit/>
           </a:bodyPr>
           <a:lstStyle/>
           <a:p>
@@ -16710,7 +16711,7 @@
         </p:spPr>
         <p:txBody>
           <a:bodyPr wrap="square" lIns="0" rIns="0" tIns="0" bIns="0" anchor="t">
-            <a:spAutoFit/>
+            <a:normAutofit/>
           </a:bodyPr>
           <a:lstStyle/>
           <a:p>
@@ -16752,7 +16753,7 @@
         </p:spPr>
         <p:txBody>
           <a:bodyPr wrap="square" lIns="27432" rIns="27432" tIns="27432" bIns="27432" anchor="ctr">
-            <a:spAutoFit/>
+            <a:normAutofit/>
           </a:bodyPr>
           <a:lstStyle/>
           <a:p>
@@ -16794,7 +16795,7 @@
         </p:spPr>
         <p:txBody>
           <a:bodyPr wrap="square" lIns="64008" rIns="64008" tIns="64008" bIns="64008" anchor="ctr">
-            <a:spAutoFit/>
+            <a:normAutofit/>
           </a:bodyPr>
           <a:lstStyle/>
           <a:p>
@@ -16836,7 +16837,7 @@
         </p:spPr>
         <p:txBody>
           <a:bodyPr wrap="square" lIns="109728" rIns="109728" tIns="109728" bIns="109728" anchor="t">
-            <a:spAutoFit/>
+            <a:normAutofit/>
           </a:bodyPr>
           <a:lstStyle/>
           <a:p>
@@ -16874,7 +16875,7 @@
         </p:spPr>
         <p:txBody>
           <a:bodyPr wrap="square" lIns="0" rIns="0" tIns="0" bIns="0" anchor="t">
-            <a:spAutoFit/>
+            <a:normAutofit/>
           </a:bodyPr>
           <a:lstStyle/>
           <a:p>
@@ -16912,7 +16913,7 @@
         </p:spPr>
         <p:txBody>
           <a:bodyPr wrap="square" lIns="0" rIns="0" tIns="0" bIns="0" anchor="t">
-            <a:spAutoFit/>
+            <a:normAutofit/>
           </a:bodyPr>
           <a:lstStyle/>
           <a:p>
@@ -16954,7 +16955,7 @@
         </p:spPr>
         <p:txBody>
           <a:bodyPr wrap="square" lIns="109728" rIns="109728" tIns="109728" bIns="109728" anchor="t">
-            <a:spAutoFit/>
+            <a:normAutofit/>
           </a:bodyPr>
           <a:lstStyle/>
           <a:p>
@@ -16992,7 +16993,7 @@
         </p:spPr>
         <p:txBody>
           <a:bodyPr wrap="square" lIns="0" rIns="0" tIns="0" bIns="0" anchor="t">
-            <a:spAutoFit/>
+            <a:normAutofit/>
           </a:bodyPr>
           <a:lstStyle/>
           <a:p>
@@ -17030,7 +17031,7 @@
         </p:spPr>
         <p:txBody>
           <a:bodyPr wrap="square" lIns="0" rIns="0" tIns="0" bIns="0" anchor="t">
-            <a:spAutoFit/>
+            <a:normAutofit/>
           </a:bodyPr>
           <a:lstStyle/>
           <a:p>
@@ -17072,7 +17073,7 @@
         </p:spPr>
         <p:txBody>
           <a:bodyPr wrap="square" lIns="109728" rIns="109728" tIns="109728" bIns="109728" anchor="t">
-            <a:spAutoFit/>
+            <a:normAutofit/>
           </a:bodyPr>
           <a:lstStyle/>
           <a:p>
@@ -17110,7 +17111,7 @@
         </p:spPr>
         <p:txBody>
           <a:bodyPr wrap="square" lIns="0" rIns="0" tIns="0" bIns="0" anchor="t">
-            <a:spAutoFit/>
+            <a:normAutofit/>
           </a:bodyPr>
           <a:lstStyle/>
           <a:p>
@@ -17148,7 +17149,7 @@
         </p:spPr>
         <p:txBody>
           <a:bodyPr wrap="square" lIns="0" rIns="0" tIns="0" bIns="0" anchor="t">
-            <a:spAutoFit/>
+            <a:normAutofit/>
           </a:bodyPr>
           <a:lstStyle/>
           <a:p>
@@ -17298,7 +17299,7 @@
         </p:spPr>
         <p:txBody>
           <a:bodyPr wrap="square" lIns="0" rIns="0" tIns="0" bIns="0" anchor="t">
-            <a:spAutoFit/>
+            <a:normAutofit/>
           </a:bodyPr>
           <a:lstStyle/>
           <a:p>
@@ -17340,7 +17341,7 @@
         </p:spPr>
         <p:txBody>
           <a:bodyPr wrap="square" lIns="9144" rIns="9144" tIns="9144" bIns="9144" anchor="ctr">
-            <a:spAutoFit/>
+            <a:normAutofit/>
           </a:bodyPr>
           <a:lstStyle/>
           <a:p>
@@ -17378,7 +17379,7 @@
         </p:spPr>
         <p:txBody>
           <a:bodyPr wrap="square" lIns="0" rIns="0" tIns="0" bIns="0" anchor="ctr">
-            <a:spAutoFit/>
+            <a:normAutofit/>
           </a:bodyPr>
           <a:lstStyle/>
           <a:p>
@@ -17459,7 +17460,7 @@
         </p:spPr>
         <p:txBody>
           <a:bodyPr wrap="square" lIns="0" rIns="0" tIns="0" bIns="0" anchor="t">
-            <a:spAutoFit/>
+            <a:normAutofit/>
           </a:bodyPr>
           <a:lstStyle/>
           <a:p>
@@ -17501,7 +17502,7 @@
         </p:spPr>
         <p:txBody>
           <a:bodyPr wrap="square" lIns="27432" rIns="27432" tIns="27432" bIns="27432" anchor="ctr">
-            <a:spAutoFit/>
+            <a:normAutofit/>
           </a:bodyPr>
           <a:lstStyle/>
           <a:p>
@@ -17543,7 +17544,7 @@
         </p:spPr>
         <p:txBody>
           <a:bodyPr wrap="square" lIns="128016" rIns="128016" tIns="128016" bIns="128016" anchor="t">
-            <a:spAutoFit/>
+            <a:normAutofit/>
           </a:bodyPr>
           <a:lstStyle/>
           <a:p>
@@ -17557,7 +17558,7 @@
               <a:spcAft>
                 <a:spcPts val="800"/>
               </a:spcAft>
-              <a:defRPr sz="1800">
+              <a:defRPr sz="1600">
                 <a:solidFill>
                   <a:srgbClr val="363A48"/>
                 </a:solidFill>
@@ -17579,7 +17580,7 @@
               <a:spcAft>
                 <a:spcPts val="800"/>
               </a:spcAft>
-              <a:defRPr sz="1800">
+              <a:defRPr sz="1600">
                 <a:solidFill>
                   <a:srgbClr val="363A48"/>
                 </a:solidFill>
@@ -17601,7 +17602,7 @@
               <a:spcAft>
                 <a:spcPts val="800"/>
               </a:spcAft>
-              <a:defRPr sz="1800">
+              <a:defRPr sz="1600">
                 <a:solidFill>
                   <a:srgbClr val="363A48"/>
                 </a:solidFill>
@@ -17623,7 +17624,7 @@
               <a:spcAft>
                 <a:spcPts val="800"/>
               </a:spcAft>
-              <a:defRPr sz="1800">
+              <a:defRPr sz="1600">
                 <a:solidFill>
                   <a:srgbClr val="363A48"/>
                 </a:solidFill>
@@ -17657,7 +17658,7 @@
         </p:spPr>
         <p:txBody>
           <a:bodyPr wrap="square" lIns="64008" rIns="64008" tIns="64008" bIns="64008" anchor="t">
-            <a:spAutoFit/>
+            <a:normAutofit/>
           </a:bodyPr>
           <a:lstStyle/>
           <a:p>
@@ -17699,7 +17700,7 @@
         </p:spPr>
         <p:txBody>
           <a:bodyPr wrap="square" lIns="128016" rIns="128016" tIns="128016" bIns="128016" anchor="t">
-            <a:spAutoFit/>
+            <a:normAutofit/>
           </a:bodyPr>
           <a:lstStyle/>
           <a:p>
@@ -17737,7 +17738,7 @@
         </p:spPr>
         <p:txBody>
           <a:bodyPr wrap="square" lIns="0" rIns="0" tIns="0" bIns="0" anchor="t">
-            <a:spAutoFit/>
+            <a:normAutofit/>
           </a:bodyPr>
           <a:lstStyle/>
           <a:p>
@@ -17779,7 +17780,7 @@
         </p:spPr>
         <p:txBody>
           <a:bodyPr wrap="square" lIns="54864" rIns="54864" tIns="54864" bIns="54864" anchor="t">
-            <a:spAutoFit/>
+            <a:normAutofit/>
           </a:bodyPr>
           <a:lstStyle/>
           <a:p>
@@ -17860,7 +17861,7 @@
         </p:spPr>
         <p:txBody>
           <a:bodyPr wrap="square" lIns="9144" rIns="9144" tIns="9144" bIns="9144" anchor="ctr">
-            <a:spAutoFit/>
+            <a:normAutofit/>
           </a:bodyPr>
           <a:lstStyle/>
           <a:p>
@@ -17898,7 +17899,7 @@
         </p:spPr>
         <p:txBody>
           <a:bodyPr wrap="square" lIns="9144" rIns="9144" tIns="9144" bIns="9144" anchor="t">
-            <a:spAutoFit/>
+            <a:normAutofit/>
           </a:bodyPr>
           <a:lstStyle/>
           <a:p>
@@ -17940,7 +17941,7 @@
         </p:spPr>
         <p:txBody>
           <a:bodyPr wrap="square" lIns="54864" rIns="54864" tIns="54864" bIns="54864" anchor="t">
-            <a:spAutoFit/>
+            <a:normAutofit/>
           </a:bodyPr>
           <a:lstStyle/>
           <a:p>
@@ -18021,7 +18022,7 @@
         </p:spPr>
         <p:txBody>
           <a:bodyPr wrap="square" lIns="9144" rIns="9144" tIns="9144" bIns="9144" anchor="ctr">
-            <a:spAutoFit/>
+            <a:normAutofit/>
           </a:bodyPr>
           <a:lstStyle/>
           <a:p>
@@ -18059,7 +18060,7 @@
         </p:spPr>
         <p:txBody>
           <a:bodyPr wrap="square" lIns="9144" rIns="9144" tIns="9144" bIns="9144" anchor="t">
-            <a:spAutoFit/>
+            <a:normAutofit/>
           </a:bodyPr>
           <a:lstStyle/>
           <a:p>
@@ -18101,7 +18102,7 @@
         </p:spPr>
         <p:txBody>
           <a:bodyPr wrap="square" lIns="54864" rIns="54864" tIns="54864" bIns="54864" anchor="t">
-            <a:spAutoFit/>
+            <a:normAutofit/>
           </a:bodyPr>
           <a:lstStyle/>
           <a:p>
@@ -18182,7 +18183,7 @@
         </p:spPr>
         <p:txBody>
           <a:bodyPr wrap="square" lIns="9144" rIns="9144" tIns="9144" bIns="9144" anchor="ctr">
-            <a:spAutoFit/>
+            <a:normAutofit/>
           </a:bodyPr>
           <a:lstStyle/>
           <a:p>
@@ -18220,7 +18221,7 @@
         </p:spPr>
         <p:txBody>
           <a:bodyPr wrap="square" lIns="9144" rIns="9144" tIns="9144" bIns="9144" anchor="t">
-            <a:spAutoFit/>
+            <a:normAutofit/>
           </a:bodyPr>
           <a:lstStyle/>
           <a:p>
@@ -18262,7 +18263,7 @@
         </p:spPr>
         <p:txBody>
           <a:bodyPr wrap="square" lIns="54864" rIns="54864" tIns="54864" bIns="54864" anchor="t">
-            <a:spAutoFit/>
+            <a:normAutofit/>
           </a:bodyPr>
           <a:lstStyle/>
           <a:p>
@@ -18343,7 +18344,7 @@
         </p:spPr>
         <p:txBody>
           <a:bodyPr wrap="square" lIns="9144" rIns="9144" tIns="9144" bIns="9144" anchor="ctr">
-            <a:spAutoFit/>
+            <a:normAutofit/>
           </a:bodyPr>
           <a:lstStyle/>
           <a:p>
@@ -18381,7 +18382,7 @@
         </p:spPr>
         <p:txBody>
           <a:bodyPr wrap="square" lIns="9144" rIns="9144" tIns="9144" bIns="9144" anchor="t">
-            <a:spAutoFit/>
+            <a:normAutofit/>
           </a:bodyPr>
           <a:lstStyle/>
           <a:p>
@@ -18531,7 +18532,7 @@
         </p:spPr>
         <p:txBody>
           <a:bodyPr wrap="square" lIns="0" rIns="0" tIns="0" bIns="0" anchor="t">
-            <a:spAutoFit/>
+            <a:normAutofit/>
           </a:bodyPr>
           <a:lstStyle/>
           <a:p>
@@ -18573,7 +18574,7 @@
         </p:spPr>
         <p:txBody>
           <a:bodyPr wrap="square" lIns="9144" rIns="9144" tIns="9144" bIns="9144" anchor="ctr">
-            <a:spAutoFit/>
+            <a:normAutofit/>
           </a:bodyPr>
           <a:lstStyle/>
           <a:p>
@@ -18611,7 +18612,7 @@
         </p:spPr>
         <p:txBody>
           <a:bodyPr wrap="square" lIns="0" rIns="0" tIns="0" bIns="0" anchor="ctr">
-            <a:spAutoFit/>
+            <a:normAutofit/>
           </a:bodyPr>
           <a:lstStyle/>
           <a:p>
@@ -18692,7 +18693,7 @@
         </p:spPr>
         <p:txBody>
           <a:bodyPr wrap="square" lIns="0" rIns="0" tIns="0" bIns="0" anchor="t">
-            <a:spAutoFit/>
+            <a:normAutofit/>
           </a:bodyPr>
           <a:lstStyle/>
           <a:p>
@@ -18734,7 +18735,7 @@
         </p:spPr>
         <p:txBody>
           <a:bodyPr wrap="square" lIns="27432" rIns="27432" tIns="27432" bIns="27432" anchor="ctr">
-            <a:spAutoFit/>
+            <a:normAutofit/>
           </a:bodyPr>
           <a:lstStyle/>
           <a:p>
@@ -18776,7 +18777,7 @@
         </p:spPr>
         <p:txBody>
           <a:bodyPr wrap="square" lIns="109728" rIns="109728" tIns="109728" bIns="109728" anchor="t">
-            <a:spAutoFit/>
+            <a:normAutofit/>
           </a:bodyPr>
           <a:lstStyle/>
           <a:p>
@@ -18842,7 +18843,7 @@
         </p:spPr>
         <p:txBody>
           <a:bodyPr wrap="square" lIns="109728" rIns="109728" tIns="109728" bIns="109728" anchor="t">
-            <a:spAutoFit/>
+            <a:normAutofit/>
           </a:bodyPr>
           <a:lstStyle/>
           <a:p>
@@ -18904,7 +18905,7 @@
         </p:spPr>
         <p:txBody>
           <a:bodyPr wrap="square" lIns="64008" rIns="64008" tIns="64008" bIns="64008" anchor="t">
-            <a:spAutoFit/>
+            <a:normAutofit/>
           </a:bodyPr>
           <a:lstStyle/>
           <a:p>
@@ -18942,7 +18943,7 @@
         </p:spPr>
         <p:txBody>
           <a:bodyPr wrap="square" lIns="64008" rIns="64008" tIns="64008" bIns="64008" anchor="t">
-            <a:spAutoFit/>
+            <a:normAutofit/>
           </a:bodyPr>
           <a:lstStyle/>
           <a:p>
@@ -18984,7 +18985,7 @@
         </p:spPr>
         <p:txBody>
           <a:bodyPr wrap="square" lIns="118872" rIns="118872" tIns="118872" bIns="118872" anchor="t">
-            <a:spAutoFit/>
+            <a:normAutofit/>
           </a:bodyPr>
           <a:lstStyle/>
           <a:p>
@@ -19080,7 +19081,7 @@
         </p:spPr>
         <p:txBody>
           <a:bodyPr wrap="square" lIns="64008" rIns="64008" tIns="64008" bIns="64008" anchor="ctr">
-            <a:spAutoFit/>
+            <a:normAutofit/>
           </a:bodyPr>
           <a:lstStyle/>
           <a:p>
@@ -19230,13 +19231,13 @@
         </p:spPr>
         <p:txBody>
           <a:bodyPr wrap="square" lIns="0" rIns="0" tIns="0" bIns="0" anchor="t">
-            <a:spAutoFit/>
+            <a:normAutofit/>
           </a:bodyPr>
           <a:lstStyle/>
           <a:p>
             <a:pPr algn="l"/>
             <a:r>
-              <a:rPr sz="2400" b="1">
+              <a:rPr sz="2100" b="1">
                 <a:solidFill>
                   <a:srgbClr val="282C3A"/>
                 </a:solidFill>
@@ -19272,7 +19273,7 @@
         </p:spPr>
         <p:txBody>
           <a:bodyPr wrap="square" lIns="9144" rIns="9144" tIns="9144" bIns="9144" anchor="ctr">
-            <a:spAutoFit/>
+            <a:normAutofit/>
           </a:bodyPr>
           <a:lstStyle/>
           <a:p>
@@ -19310,7 +19311,7 @@
         </p:spPr>
         <p:txBody>
           <a:bodyPr wrap="square" lIns="0" rIns="0" tIns="0" bIns="0" anchor="ctr">
-            <a:spAutoFit/>
+            <a:normAutofit/>
           </a:bodyPr>
           <a:lstStyle/>
           <a:p>
@@ -19391,7 +19392,7 @@
         </p:spPr>
         <p:txBody>
           <a:bodyPr wrap="square" lIns="0" rIns="0" tIns="0" bIns="0" anchor="t">
-            <a:spAutoFit/>
+            <a:normAutofit/>
           </a:bodyPr>
           <a:lstStyle/>
           <a:p>
@@ -19433,7 +19434,7 @@
         </p:spPr>
         <p:txBody>
           <a:bodyPr wrap="square" lIns="27432" rIns="27432" tIns="27432" bIns="27432" anchor="ctr">
-            <a:spAutoFit/>
+            <a:normAutofit/>
           </a:bodyPr>
           <a:lstStyle/>
           <a:p>
@@ -19475,7 +19476,7 @@
         </p:spPr>
         <p:txBody>
           <a:bodyPr wrap="square" lIns="128016" rIns="128016" tIns="128016" bIns="128016" anchor="t">
-            <a:spAutoFit/>
+            <a:normAutofit/>
           </a:bodyPr>
           <a:lstStyle/>
           <a:p>
@@ -19489,7 +19490,7 @@
               <a:spcAft>
                 <a:spcPts val="800"/>
               </a:spcAft>
-              <a:defRPr sz="1800">
+              <a:defRPr sz="1600">
                 <a:solidFill>
                   <a:srgbClr val="363A48"/>
                 </a:solidFill>
@@ -19511,7 +19512,7 @@
               <a:spcAft>
                 <a:spcPts val="800"/>
               </a:spcAft>
-              <a:defRPr sz="1800">
+              <a:defRPr sz="1600">
                 <a:solidFill>
                   <a:srgbClr val="363A48"/>
                 </a:solidFill>
@@ -19533,7 +19534,7 @@
               <a:spcAft>
                 <a:spcPts val="800"/>
               </a:spcAft>
-              <a:defRPr sz="1800">
+              <a:defRPr sz="1600">
                 <a:solidFill>
                   <a:srgbClr val="363A48"/>
                 </a:solidFill>
@@ -19567,7 +19568,7 @@
         </p:spPr>
         <p:txBody>
           <a:bodyPr wrap="square" lIns="64008" rIns="64008" tIns="64008" bIns="64008" anchor="t">
-            <a:spAutoFit/>
+            <a:normAutofit/>
           </a:bodyPr>
           <a:lstStyle/>
           <a:p>
@@ -19609,7 +19610,7 @@
         </p:spPr>
         <p:txBody>
           <a:bodyPr wrap="square" lIns="128016" rIns="128016" tIns="128016" bIns="128016" anchor="t">
-            <a:spAutoFit/>
+            <a:normAutofit/>
           </a:bodyPr>
           <a:lstStyle/>
           <a:p>
@@ -19647,7 +19648,7 @@
         </p:spPr>
         <p:txBody>
           <a:bodyPr wrap="square" lIns="0" rIns="0" tIns="0" bIns="0" anchor="t">
-            <a:spAutoFit/>
+            <a:normAutofit/>
           </a:bodyPr>
           <a:lstStyle/>
           <a:p>
@@ -19689,7 +19690,7 @@
         </p:spPr>
         <p:txBody>
           <a:bodyPr wrap="square" lIns="54864" rIns="54864" tIns="54864" bIns="54864" anchor="t">
-            <a:spAutoFit/>
+            <a:normAutofit/>
           </a:bodyPr>
           <a:lstStyle/>
           <a:p>
@@ -19770,7 +19771,7 @@
         </p:spPr>
         <p:txBody>
           <a:bodyPr wrap="square" lIns="9144" rIns="9144" tIns="9144" bIns="9144" anchor="ctr">
-            <a:spAutoFit/>
+            <a:normAutofit/>
           </a:bodyPr>
           <a:lstStyle/>
           <a:p>
@@ -19808,7 +19809,7 @@
         </p:spPr>
         <p:txBody>
           <a:bodyPr wrap="square" lIns="9144" rIns="9144" tIns="9144" bIns="9144" anchor="t">
-            <a:spAutoFit/>
+            <a:normAutofit/>
           </a:bodyPr>
           <a:lstStyle/>
           <a:p>
@@ -19850,7 +19851,7 @@
         </p:spPr>
         <p:txBody>
           <a:bodyPr wrap="square" lIns="54864" rIns="54864" tIns="54864" bIns="54864" anchor="t">
-            <a:spAutoFit/>
+            <a:normAutofit/>
           </a:bodyPr>
           <a:lstStyle/>
           <a:p>
@@ -19931,7 +19932,7 @@
         </p:spPr>
         <p:txBody>
           <a:bodyPr wrap="square" lIns="9144" rIns="9144" tIns="9144" bIns="9144" anchor="ctr">
-            <a:spAutoFit/>
+            <a:normAutofit/>
           </a:bodyPr>
           <a:lstStyle/>
           <a:p>
@@ -19969,7 +19970,7 @@
         </p:spPr>
         <p:txBody>
           <a:bodyPr wrap="square" lIns="9144" rIns="9144" tIns="9144" bIns="9144" anchor="t">
-            <a:spAutoFit/>
+            <a:normAutofit/>
           </a:bodyPr>
           <a:lstStyle/>
           <a:p>
@@ -20011,7 +20012,7 @@
         </p:spPr>
         <p:txBody>
           <a:bodyPr wrap="square" lIns="54864" rIns="54864" tIns="54864" bIns="54864" anchor="t">
-            <a:spAutoFit/>
+            <a:normAutofit/>
           </a:bodyPr>
           <a:lstStyle/>
           <a:p>
@@ -20092,7 +20093,7 @@
         </p:spPr>
         <p:txBody>
           <a:bodyPr wrap="square" lIns="9144" rIns="9144" tIns="9144" bIns="9144" anchor="ctr">
-            <a:spAutoFit/>
+            <a:normAutofit/>
           </a:bodyPr>
           <a:lstStyle/>
           <a:p>
@@ -20130,7 +20131,7 @@
         </p:spPr>
         <p:txBody>
           <a:bodyPr wrap="square" lIns="9144" rIns="9144" tIns="9144" bIns="9144" anchor="t">
-            <a:spAutoFit/>
+            <a:normAutofit/>
           </a:bodyPr>
           <a:lstStyle/>
           <a:p>
@@ -20172,7 +20173,7 @@
         </p:spPr>
         <p:txBody>
           <a:bodyPr wrap="square" lIns="54864" rIns="54864" tIns="54864" bIns="54864" anchor="t">
-            <a:spAutoFit/>
+            <a:normAutofit/>
           </a:bodyPr>
           <a:lstStyle/>
           <a:p>
@@ -20253,7 +20254,7 @@
         </p:spPr>
         <p:txBody>
           <a:bodyPr wrap="square" lIns="9144" rIns="9144" tIns="9144" bIns="9144" anchor="ctr">
-            <a:spAutoFit/>
+            <a:normAutofit/>
           </a:bodyPr>
           <a:lstStyle/>
           <a:p>
@@ -20291,7 +20292,7 @@
         </p:spPr>
         <p:txBody>
           <a:bodyPr wrap="square" lIns="9144" rIns="9144" tIns="9144" bIns="9144" anchor="t">
-            <a:spAutoFit/>
+            <a:normAutofit/>
           </a:bodyPr>
           <a:lstStyle/>
           <a:p>
@@ -20441,7 +20442,7 @@
         </p:spPr>
         <p:txBody>
           <a:bodyPr wrap="square" lIns="0" rIns="0" tIns="0" bIns="0" anchor="t">
-            <a:spAutoFit/>
+            <a:normAutofit/>
           </a:bodyPr>
           <a:lstStyle/>
           <a:p>
@@ -20483,7 +20484,7 @@
         </p:spPr>
         <p:txBody>
           <a:bodyPr wrap="square" lIns="9144" rIns="9144" tIns="9144" bIns="9144" anchor="ctr">
-            <a:spAutoFit/>
+            <a:normAutofit/>
           </a:bodyPr>
           <a:lstStyle/>
           <a:p>
@@ -20521,7 +20522,7 @@
         </p:spPr>
         <p:txBody>
           <a:bodyPr wrap="square" lIns="0" rIns="0" tIns="0" bIns="0" anchor="ctr">
-            <a:spAutoFit/>
+            <a:normAutofit/>
           </a:bodyPr>
           <a:lstStyle/>
           <a:p>
@@ -20602,7 +20603,7 @@
         </p:spPr>
         <p:txBody>
           <a:bodyPr wrap="square" lIns="0" rIns="0" tIns="0" bIns="0" anchor="t">
-            <a:spAutoFit/>
+            <a:normAutofit/>
           </a:bodyPr>
           <a:lstStyle/>
           <a:p>
@@ -20644,7 +20645,7 @@
         </p:spPr>
         <p:txBody>
           <a:bodyPr wrap="square" lIns="27432" rIns="27432" tIns="27432" bIns="27432" anchor="ctr">
-            <a:spAutoFit/>
+            <a:normAutofit/>
           </a:bodyPr>
           <a:lstStyle/>
           <a:p>
@@ -20686,7 +20687,7 @@
         </p:spPr>
         <p:txBody>
           <a:bodyPr wrap="square" lIns="64008" rIns="64008" tIns="64008" bIns="64008" anchor="ctr">
-            <a:spAutoFit/>
+            <a:normAutofit/>
           </a:bodyPr>
           <a:lstStyle/>
           <a:p>
@@ -20728,7 +20729,7 @@
         </p:spPr>
         <p:txBody>
           <a:bodyPr wrap="square" lIns="109728" rIns="109728" tIns="109728" bIns="109728" anchor="t">
-            <a:spAutoFit/>
+            <a:normAutofit/>
           </a:bodyPr>
           <a:lstStyle/>
           <a:p>
@@ -20766,7 +20767,7 @@
         </p:spPr>
         <p:txBody>
           <a:bodyPr wrap="square" lIns="0" rIns="0" tIns="0" bIns="0" anchor="t">
-            <a:spAutoFit/>
+            <a:normAutofit/>
           </a:bodyPr>
           <a:lstStyle/>
           <a:p>
@@ -20804,7 +20805,7 @@
         </p:spPr>
         <p:txBody>
           <a:bodyPr wrap="square" lIns="0" rIns="0" tIns="0" bIns="0" anchor="t">
-            <a:spAutoFit/>
+            <a:normAutofit/>
           </a:bodyPr>
           <a:lstStyle/>
           <a:p>
@@ -20846,7 +20847,7 @@
         </p:spPr>
         <p:txBody>
           <a:bodyPr wrap="square" lIns="109728" rIns="109728" tIns="109728" bIns="109728" anchor="t">
-            <a:spAutoFit/>
+            <a:normAutofit/>
           </a:bodyPr>
           <a:lstStyle/>
           <a:p>
@@ -20884,7 +20885,7 @@
         </p:spPr>
         <p:txBody>
           <a:bodyPr wrap="square" lIns="0" rIns="0" tIns="0" bIns="0" anchor="t">
-            <a:spAutoFit/>
+            <a:normAutofit/>
           </a:bodyPr>
           <a:lstStyle/>
           <a:p>
@@ -20922,7 +20923,7 @@
         </p:spPr>
         <p:txBody>
           <a:bodyPr wrap="square" lIns="0" rIns="0" tIns="0" bIns="0" anchor="t">
-            <a:spAutoFit/>
+            <a:normAutofit/>
           </a:bodyPr>
           <a:lstStyle/>
           <a:p>
@@ -20964,7 +20965,7 @@
         </p:spPr>
         <p:txBody>
           <a:bodyPr wrap="square" lIns="109728" rIns="109728" tIns="109728" bIns="109728" anchor="t">
-            <a:spAutoFit/>
+            <a:normAutofit/>
           </a:bodyPr>
           <a:lstStyle/>
           <a:p>
@@ -21002,7 +21003,7 @@
         </p:spPr>
         <p:txBody>
           <a:bodyPr wrap="square" lIns="0" rIns="0" tIns="0" bIns="0" anchor="t">
-            <a:spAutoFit/>
+            <a:normAutofit/>
           </a:bodyPr>
           <a:lstStyle/>
           <a:p>
@@ -21040,7 +21041,7 @@
         </p:spPr>
         <p:txBody>
           <a:bodyPr wrap="square" lIns="0" rIns="0" tIns="0" bIns="0" anchor="t">
-            <a:spAutoFit/>
+            <a:normAutofit/>
           </a:bodyPr>
           <a:lstStyle/>
           <a:p>
@@ -21082,7 +21083,7 @@
         </p:spPr>
         <p:txBody>
           <a:bodyPr wrap="square" lIns="118872" rIns="118872" tIns="118872" bIns="118872" anchor="t">
-            <a:spAutoFit/>
+            <a:normAutofit/>
           </a:bodyPr>
           <a:lstStyle/>
           <a:p>
@@ -21242,13 +21243,13 @@
         </p:spPr>
         <p:txBody>
           <a:bodyPr wrap="square" lIns="0" rIns="0" tIns="0" bIns="0" anchor="t">
-            <a:spAutoFit/>
+            <a:normAutofit/>
           </a:bodyPr>
           <a:lstStyle/>
           <a:p>
             <a:pPr algn="l"/>
             <a:r>
-              <a:rPr sz="2400" b="1">
+              <a:rPr sz="2200" b="1">
                 <a:solidFill>
                   <a:srgbClr val="282C3A"/>
                 </a:solidFill>
@@ -21284,7 +21285,7 @@
         </p:spPr>
         <p:txBody>
           <a:bodyPr wrap="square" lIns="9144" rIns="9144" tIns="9144" bIns="9144" anchor="ctr">
-            <a:spAutoFit/>
+            <a:normAutofit/>
           </a:bodyPr>
           <a:lstStyle/>
           <a:p>
@@ -21322,7 +21323,7 @@
         </p:spPr>
         <p:txBody>
           <a:bodyPr wrap="square" lIns="0" rIns="0" tIns="0" bIns="0" anchor="ctr">
-            <a:spAutoFit/>
+            <a:normAutofit/>
           </a:bodyPr>
           <a:lstStyle/>
           <a:p>
@@ -21403,7 +21404,7 @@
         </p:spPr>
         <p:txBody>
           <a:bodyPr wrap="square" lIns="0" rIns="0" tIns="0" bIns="0" anchor="t">
-            <a:spAutoFit/>
+            <a:normAutofit/>
           </a:bodyPr>
           <a:lstStyle/>
           <a:p>
@@ -21445,7 +21446,7 @@
         </p:spPr>
         <p:txBody>
           <a:bodyPr wrap="square" lIns="27432" rIns="27432" tIns="27432" bIns="27432" anchor="ctr">
-            <a:spAutoFit/>
+            <a:normAutofit/>
           </a:bodyPr>
           <a:lstStyle/>
           <a:p>
@@ -21487,7 +21488,7 @@
         </p:spPr>
         <p:txBody>
           <a:bodyPr wrap="square" lIns="64008" rIns="64008" tIns="64008" bIns="64008" anchor="ctr">
-            <a:spAutoFit/>
+            <a:normAutofit/>
           </a:bodyPr>
           <a:lstStyle/>
           <a:p>
@@ -21529,7 +21530,7 @@
         </p:spPr>
         <p:txBody>
           <a:bodyPr wrap="square" lIns="109728" rIns="109728" tIns="109728" bIns="109728" anchor="t">
-            <a:spAutoFit/>
+            <a:normAutofit/>
           </a:bodyPr>
           <a:lstStyle/>
           <a:p>
@@ -21567,7 +21568,7 @@
         </p:spPr>
         <p:txBody>
           <a:bodyPr wrap="square" lIns="0" rIns="0" tIns="0" bIns="0" anchor="t">
-            <a:spAutoFit/>
+            <a:normAutofit/>
           </a:bodyPr>
           <a:lstStyle/>
           <a:p>
@@ -21605,7 +21606,7 @@
         </p:spPr>
         <p:txBody>
           <a:bodyPr wrap="square" lIns="0" rIns="0" tIns="0" bIns="0" anchor="t">
-            <a:spAutoFit/>
+            <a:normAutofit/>
           </a:bodyPr>
           <a:lstStyle/>
           <a:p>
@@ -21647,7 +21648,7 @@
         </p:spPr>
         <p:txBody>
           <a:bodyPr wrap="square" lIns="109728" rIns="109728" tIns="109728" bIns="109728" anchor="t">
-            <a:spAutoFit/>
+            <a:normAutofit/>
           </a:bodyPr>
           <a:lstStyle/>
           <a:p>
@@ -21685,7 +21686,7 @@
         </p:spPr>
         <p:txBody>
           <a:bodyPr wrap="square" lIns="0" rIns="0" tIns="0" bIns="0" anchor="t">
-            <a:spAutoFit/>
+            <a:normAutofit/>
           </a:bodyPr>
           <a:lstStyle/>
           <a:p>
@@ -21723,7 +21724,7 @@
         </p:spPr>
         <p:txBody>
           <a:bodyPr wrap="square" lIns="0" rIns="0" tIns="0" bIns="0" anchor="t">
-            <a:spAutoFit/>
+            <a:normAutofit/>
           </a:bodyPr>
           <a:lstStyle/>
           <a:p>
@@ -21765,7 +21766,7 @@
         </p:spPr>
         <p:txBody>
           <a:bodyPr wrap="square" lIns="109728" rIns="109728" tIns="109728" bIns="109728" anchor="t">
-            <a:spAutoFit/>
+            <a:normAutofit/>
           </a:bodyPr>
           <a:lstStyle/>
           <a:p>
@@ -21803,7 +21804,7 @@
         </p:spPr>
         <p:txBody>
           <a:bodyPr wrap="square" lIns="0" rIns="0" tIns="0" bIns="0" anchor="t">
-            <a:spAutoFit/>
+            <a:normAutofit/>
           </a:bodyPr>
           <a:lstStyle/>
           <a:p>
@@ -21841,7 +21842,7 @@
         </p:spPr>
         <p:txBody>
           <a:bodyPr wrap="square" lIns="0" rIns="0" tIns="0" bIns="0" anchor="t">
-            <a:spAutoFit/>
+            <a:normAutofit/>
           </a:bodyPr>
           <a:lstStyle/>
           <a:p>
@@ -21883,7 +21884,7 @@
         </p:spPr>
         <p:txBody>
           <a:bodyPr wrap="square" lIns="109728" rIns="109728" tIns="109728" bIns="109728" anchor="t">
-            <a:spAutoFit/>
+            <a:normAutofit/>
           </a:bodyPr>
           <a:lstStyle/>
           <a:p>
@@ -21921,7 +21922,7 @@
         </p:spPr>
         <p:txBody>
           <a:bodyPr wrap="square" lIns="0" rIns="0" tIns="0" bIns="0" anchor="t">
-            <a:spAutoFit/>
+            <a:normAutofit/>
           </a:bodyPr>
           <a:lstStyle/>
           <a:p>
@@ -21959,7 +21960,7 @@
         </p:spPr>
         <p:txBody>
           <a:bodyPr wrap="square" lIns="0" rIns="0" tIns="0" bIns="0" anchor="t">
-            <a:spAutoFit/>
+            <a:normAutofit/>
           </a:bodyPr>
           <a:lstStyle/>
           <a:p>
@@ -22001,7 +22002,7 @@
         </p:spPr>
         <p:txBody>
           <a:bodyPr wrap="square" lIns="118872" rIns="118872" tIns="118872" bIns="118872" anchor="t">
-            <a:spAutoFit/>
+            <a:normAutofit/>
           </a:bodyPr>
           <a:lstStyle/>
           <a:p>
@@ -22205,7 +22206,7 @@
         </p:spPr>
         <p:txBody>
           <a:bodyPr wrap="square" lIns="0" rIns="0" tIns="0" bIns="0" anchor="t">
-            <a:spAutoFit/>
+            <a:normAutofit/>
           </a:bodyPr>
           <a:lstStyle/>
           <a:p>
@@ -22247,7 +22248,7 @@
         </p:spPr>
         <p:txBody>
           <a:bodyPr wrap="square" lIns="9144" rIns="9144" tIns="9144" bIns="9144" anchor="ctr">
-            <a:spAutoFit/>
+            <a:normAutofit/>
           </a:bodyPr>
           <a:lstStyle/>
           <a:p>
@@ -22285,7 +22286,7 @@
         </p:spPr>
         <p:txBody>
           <a:bodyPr wrap="square" lIns="0" rIns="0" tIns="0" bIns="0" anchor="ctr">
-            <a:spAutoFit/>
+            <a:normAutofit/>
           </a:bodyPr>
           <a:lstStyle/>
           <a:p>
@@ -22366,7 +22367,7 @@
         </p:spPr>
         <p:txBody>
           <a:bodyPr wrap="square" lIns="0" rIns="0" tIns="0" bIns="0" anchor="t">
-            <a:spAutoFit/>
+            <a:normAutofit/>
           </a:bodyPr>
           <a:lstStyle/>
           <a:p>
@@ -22408,7 +22409,7 @@
         </p:spPr>
         <p:txBody>
           <a:bodyPr wrap="square" lIns="27432" rIns="27432" tIns="27432" bIns="27432" anchor="ctr">
-            <a:spAutoFit/>
+            <a:normAutofit/>
           </a:bodyPr>
           <a:lstStyle/>
           <a:p>
@@ -22450,7 +22451,7 @@
         </p:spPr>
         <p:txBody>
           <a:bodyPr wrap="square" lIns="109728" rIns="109728" tIns="109728" bIns="109728" anchor="t">
-            <a:spAutoFit/>
+            <a:normAutofit/>
           </a:bodyPr>
           <a:lstStyle/>
           <a:p>
@@ -22516,7 +22517,7 @@
         </p:spPr>
         <p:txBody>
           <a:bodyPr wrap="square" lIns="109728" rIns="109728" tIns="109728" bIns="109728" anchor="t">
-            <a:spAutoFit/>
+            <a:normAutofit/>
           </a:bodyPr>
           <a:lstStyle/>
           <a:p>
@@ -22578,7 +22579,7 @@
         </p:spPr>
         <p:txBody>
           <a:bodyPr wrap="square" lIns="64008" rIns="64008" tIns="64008" bIns="64008" anchor="t">
-            <a:spAutoFit/>
+            <a:normAutofit/>
           </a:bodyPr>
           <a:lstStyle/>
           <a:p>
@@ -22616,7 +22617,7 @@
         </p:spPr>
         <p:txBody>
           <a:bodyPr wrap="square" lIns="64008" rIns="64008" tIns="64008" bIns="64008" anchor="t">
-            <a:spAutoFit/>
+            <a:normAutofit/>
           </a:bodyPr>
           <a:lstStyle/>
           <a:p>
@@ -22658,7 +22659,7 @@
         </p:spPr>
         <p:txBody>
           <a:bodyPr wrap="square" lIns="118872" rIns="118872" tIns="118872" bIns="118872" anchor="t">
-            <a:spAutoFit/>
+            <a:normAutofit/>
           </a:bodyPr>
           <a:lstStyle/>
           <a:p>
@@ -22754,7 +22755,7 @@
         </p:spPr>
         <p:txBody>
           <a:bodyPr wrap="square" lIns="64008" rIns="64008" tIns="64008" bIns="64008" anchor="ctr">
-            <a:spAutoFit/>
+            <a:normAutofit/>
           </a:bodyPr>
           <a:lstStyle/>
           <a:p>
@@ -22904,7 +22905,7 @@
         </p:spPr>
         <p:txBody>
           <a:bodyPr wrap="square" lIns="0" rIns="0" tIns="0" bIns="0" anchor="t">
-            <a:spAutoFit/>
+            <a:normAutofit/>
           </a:bodyPr>
           <a:lstStyle/>
           <a:p>
@@ -22946,7 +22947,7 @@
         </p:spPr>
         <p:txBody>
           <a:bodyPr wrap="square" lIns="9144" rIns="9144" tIns="9144" bIns="9144" anchor="ctr">
-            <a:spAutoFit/>
+            <a:normAutofit/>
           </a:bodyPr>
           <a:lstStyle/>
           <a:p>
@@ -22984,7 +22985,7 @@
         </p:spPr>
         <p:txBody>
           <a:bodyPr wrap="square" lIns="0" rIns="0" tIns="0" bIns="0" anchor="ctr">
-            <a:spAutoFit/>
+            <a:normAutofit/>
           </a:bodyPr>
           <a:lstStyle/>
           <a:p>
@@ -23065,7 +23066,7 @@
         </p:spPr>
         <p:txBody>
           <a:bodyPr wrap="square" lIns="0" rIns="0" tIns="0" bIns="0" anchor="t">
-            <a:spAutoFit/>
+            <a:normAutofit/>
           </a:bodyPr>
           <a:lstStyle/>
           <a:p>
@@ -23107,7 +23108,7 @@
         </p:spPr>
         <p:txBody>
           <a:bodyPr wrap="square" lIns="27432" rIns="27432" tIns="27432" bIns="27432" anchor="ctr">
-            <a:spAutoFit/>
+            <a:normAutofit/>
           </a:bodyPr>
           <a:lstStyle/>
           <a:p>
@@ -23149,7 +23150,7 @@
         </p:spPr>
         <p:txBody>
           <a:bodyPr wrap="square" lIns="64008" rIns="64008" tIns="64008" bIns="64008" anchor="ctr">
-            <a:spAutoFit/>
+            <a:normAutofit/>
           </a:bodyPr>
           <a:lstStyle/>
           <a:p>
@@ -23191,7 +23192,7 @@
         </p:spPr>
         <p:txBody>
           <a:bodyPr wrap="square" lIns="118872" rIns="118872" tIns="118872" bIns="118872" anchor="t">
-            <a:spAutoFit/>
+            <a:normAutofit/>
           </a:bodyPr>
           <a:lstStyle/>
           <a:p>
@@ -23229,7 +23230,7 @@
         </p:spPr>
         <p:txBody>
           <a:bodyPr wrap="square" lIns="0" rIns="0" tIns="0" bIns="0" anchor="t">
-            <a:spAutoFit/>
+            <a:normAutofit/>
           </a:bodyPr>
           <a:lstStyle/>
           <a:p>
@@ -23267,7 +23268,7 @@
         </p:spPr>
         <p:txBody>
           <a:bodyPr wrap="square" lIns="0" rIns="0" tIns="0" bIns="0" anchor="t">
-            <a:spAutoFit/>
+            <a:normAutofit/>
           </a:bodyPr>
           <a:lstStyle/>
           <a:p>
@@ -23363,7 +23364,7 @@
         </p:spPr>
         <p:txBody>
           <a:bodyPr wrap="square" lIns="118872" rIns="118872" tIns="118872" bIns="118872" anchor="t">
-            <a:spAutoFit/>
+            <a:normAutofit/>
           </a:bodyPr>
           <a:lstStyle/>
           <a:p>
@@ -23401,7 +23402,7 @@
         </p:spPr>
         <p:txBody>
           <a:bodyPr wrap="square" lIns="0" rIns="0" tIns="0" bIns="0" anchor="t">
-            <a:spAutoFit/>
+            <a:normAutofit/>
           </a:bodyPr>
           <a:lstStyle/>
           <a:p>
@@ -23439,7 +23440,7 @@
         </p:spPr>
         <p:txBody>
           <a:bodyPr wrap="square" lIns="0" rIns="0" tIns="0" bIns="0" anchor="t">
-            <a:spAutoFit/>
+            <a:normAutofit/>
           </a:bodyPr>
           <a:lstStyle/>
           <a:p>
@@ -23643,13 +23644,13 @@
         </p:spPr>
         <p:txBody>
           <a:bodyPr wrap="square" lIns="0" rIns="0" tIns="0" bIns="0" anchor="t">
-            <a:spAutoFit/>
+            <a:normAutofit/>
           </a:bodyPr>
           <a:lstStyle/>
           <a:p>
             <a:pPr algn="l"/>
             <a:r>
-              <a:rPr sz="2400" b="1">
+              <a:rPr sz="2200" b="1">
                 <a:solidFill>
                   <a:srgbClr val="282C3A"/>
                 </a:solidFill>
@@ -23685,7 +23686,7 @@
         </p:spPr>
         <p:txBody>
           <a:bodyPr wrap="square" lIns="9144" rIns="9144" tIns="9144" bIns="9144" anchor="ctr">
-            <a:spAutoFit/>
+            <a:normAutofit/>
           </a:bodyPr>
           <a:lstStyle/>
           <a:p>
@@ -23723,7 +23724,7 @@
         </p:spPr>
         <p:txBody>
           <a:bodyPr wrap="square" lIns="0" rIns="0" tIns="0" bIns="0" anchor="ctr">
-            <a:spAutoFit/>
+            <a:normAutofit/>
           </a:bodyPr>
           <a:lstStyle/>
           <a:p>
@@ -23804,7 +23805,7 @@
         </p:spPr>
         <p:txBody>
           <a:bodyPr wrap="square" lIns="0" rIns="0" tIns="0" bIns="0" anchor="t">
-            <a:spAutoFit/>
+            <a:normAutofit/>
           </a:bodyPr>
           <a:lstStyle/>
           <a:p>
@@ -23846,7 +23847,7 @@
         </p:spPr>
         <p:txBody>
           <a:bodyPr wrap="square" lIns="27432" rIns="27432" tIns="27432" bIns="27432" anchor="ctr">
-            <a:spAutoFit/>
+            <a:normAutofit/>
           </a:bodyPr>
           <a:lstStyle/>
           <a:p>
@@ -23888,7 +23889,7 @@
         </p:spPr>
         <p:txBody>
           <a:bodyPr wrap="square" lIns="128016" rIns="128016" tIns="128016" bIns="128016" anchor="t">
-            <a:spAutoFit/>
+            <a:normAutofit/>
           </a:bodyPr>
           <a:lstStyle/>
           <a:p>
@@ -23902,7 +23903,7 @@
               <a:spcAft>
                 <a:spcPts val="800"/>
               </a:spcAft>
-              <a:defRPr sz="1800">
+              <a:defRPr sz="1600">
                 <a:solidFill>
                   <a:srgbClr val="363A48"/>
                 </a:solidFill>
@@ -23924,7 +23925,7 @@
               <a:spcAft>
                 <a:spcPts val="800"/>
               </a:spcAft>
-              <a:defRPr sz="1800">
+              <a:defRPr sz="1600">
                 <a:solidFill>
                   <a:srgbClr val="363A48"/>
                 </a:solidFill>
@@ -23946,7 +23947,7 @@
               <a:spcAft>
                 <a:spcPts val="800"/>
               </a:spcAft>
-              <a:defRPr sz="1800">
+              <a:defRPr sz="1600">
                 <a:solidFill>
                   <a:srgbClr val="363A48"/>
                 </a:solidFill>
@@ -23980,7 +23981,7 @@
         </p:spPr>
         <p:txBody>
           <a:bodyPr wrap="square" lIns="64008" rIns="64008" tIns="64008" bIns="64008" anchor="t">
-            <a:spAutoFit/>
+            <a:normAutofit/>
           </a:bodyPr>
           <a:lstStyle/>
           <a:p>
@@ -24022,7 +24023,7 @@
         </p:spPr>
         <p:txBody>
           <a:bodyPr wrap="square" lIns="128016" rIns="128016" tIns="128016" bIns="128016" anchor="t">
-            <a:spAutoFit/>
+            <a:normAutofit/>
           </a:bodyPr>
           <a:lstStyle/>
           <a:p>
@@ -24060,7 +24061,7 @@
         </p:spPr>
         <p:txBody>
           <a:bodyPr wrap="square" lIns="0" rIns="0" tIns="0" bIns="0" anchor="t">
-            <a:spAutoFit/>
+            <a:normAutofit/>
           </a:bodyPr>
           <a:lstStyle/>
           <a:p>
@@ -24102,7 +24103,7 @@
         </p:spPr>
         <p:txBody>
           <a:bodyPr wrap="square" lIns="54864" rIns="54864" tIns="54864" bIns="54864" anchor="t">
-            <a:spAutoFit/>
+            <a:normAutofit/>
           </a:bodyPr>
           <a:lstStyle/>
           <a:p>
@@ -24183,7 +24184,7 @@
         </p:spPr>
         <p:txBody>
           <a:bodyPr wrap="square" lIns="9144" rIns="9144" tIns="9144" bIns="9144" anchor="ctr">
-            <a:spAutoFit/>
+            <a:normAutofit/>
           </a:bodyPr>
           <a:lstStyle/>
           <a:p>
@@ -24221,7 +24222,7 @@
         </p:spPr>
         <p:txBody>
           <a:bodyPr wrap="square" lIns="9144" rIns="9144" tIns="9144" bIns="9144" anchor="t">
-            <a:spAutoFit/>
+            <a:normAutofit/>
           </a:bodyPr>
           <a:lstStyle/>
           <a:p>
@@ -24263,7 +24264,7 @@
         </p:spPr>
         <p:txBody>
           <a:bodyPr wrap="square" lIns="54864" rIns="54864" tIns="54864" bIns="54864" anchor="t">
-            <a:spAutoFit/>
+            <a:normAutofit/>
           </a:bodyPr>
           <a:lstStyle/>
           <a:p>
@@ -24344,7 +24345,7 @@
         </p:spPr>
         <p:txBody>
           <a:bodyPr wrap="square" lIns="9144" rIns="9144" tIns="9144" bIns="9144" anchor="ctr">
-            <a:spAutoFit/>
+            <a:normAutofit/>
           </a:bodyPr>
           <a:lstStyle/>
           <a:p>
@@ -24382,7 +24383,7 @@
         </p:spPr>
         <p:txBody>
           <a:bodyPr wrap="square" lIns="9144" rIns="9144" tIns="9144" bIns="9144" anchor="t">
-            <a:spAutoFit/>
+            <a:normAutofit/>
           </a:bodyPr>
           <a:lstStyle/>
           <a:p>
@@ -24424,7 +24425,7 @@
         </p:spPr>
         <p:txBody>
           <a:bodyPr wrap="square" lIns="54864" rIns="54864" tIns="54864" bIns="54864" anchor="t">
-            <a:spAutoFit/>
+            <a:normAutofit/>
           </a:bodyPr>
           <a:lstStyle/>
           <a:p>
@@ -24505,7 +24506,7 @@
         </p:spPr>
         <p:txBody>
           <a:bodyPr wrap="square" lIns="9144" rIns="9144" tIns="9144" bIns="9144" anchor="ctr">
-            <a:spAutoFit/>
+            <a:normAutofit/>
           </a:bodyPr>
           <a:lstStyle/>
           <a:p>
@@ -24543,7 +24544,7 @@
         </p:spPr>
         <p:txBody>
           <a:bodyPr wrap="square" lIns="9144" rIns="9144" tIns="9144" bIns="9144" anchor="t">
-            <a:spAutoFit/>
+            <a:normAutofit/>
           </a:bodyPr>
           <a:lstStyle/>
           <a:p>
@@ -24585,7 +24586,7 @@
         </p:spPr>
         <p:txBody>
           <a:bodyPr wrap="square" lIns="54864" rIns="54864" tIns="54864" bIns="54864" anchor="t">
-            <a:spAutoFit/>
+            <a:normAutofit/>
           </a:bodyPr>
           <a:lstStyle/>
           <a:p>
@@ -24666,7 +24667,7 @@
         </p:spPr>
         <p:txBody>
           <a:bodyPr wrap="square" lIns="9144" rIns="9144" tIns="9144" bIns="9144" anchor="ctr">
-            <a:spAutoFit/>
+            <a:normAutofit/>
           </a:bodyPr>
           <a:lstStyle/>
           <a:p>
@@ -24704,7 +24705,7 @@
         </p:spPr>
         <p:txBody>
           <a:bodyPr wrap="square" lIns="9144" rIns="9144" tIns="9144" bIns="9144" anchor="t">
-            <a:spAutoFit/>
+            <a:normAutofit/>
           </a:bodyPr>
           <a:lstStyle/>
           <a:p>
